--- a/The_Case_for_Nuclear_Power_in_Zambia.pptx
+++ b/The_Case_for_Nuclear_Power_in_Zambia.pptx
@@ -506,7 +506,7 @@
           <a:lstStyle/>
           <a:p>
             <a:r>
-              <a:t>[SETUP — 0:00 to 0:30] Good afternoon. The story I want to tell you today is not about reactors. It is about a choice: between a future powered by drought, and a future powered by uranium Zambia already owns. My Big Idea is simple: Zambia must leverage its existing radiological safety expertise and uranium resources to transition to nuclear power as a drought-proof solution for national energy security. Over the next three minutes I'll walk you from an invisible danger in Siavonga, to a proven safety record in the United States, to an actionable policy ask here at home. The destination is industrial mastery.</a:t>
+              <a:t>[0:00-0:30 — SETUP]  Three minutes. One argument. Zambia does not have to choose between energy poverty and environmental risk — because we already own the solution. We have uranium in the ground. We have a Radiation Protection Authority that has spent decades managing radiological risk. And we have a Cabinet-approved 2020 Nuclear Policy. What we do not yet have is the legislative signature that turns those assets into megawatts. That signature is what I am here to argue for.</a:t>
             </a:r>
           </a:p>
         </p:txBody>
@@ -576,7 +576,7 @@
           <a:lstStyle/>
           <a:p>
             <a:r>
-              <a:t>[CONFLICT — 0:30 to 1:15] Picture two scenes. Scene one: Siavonga, Zambia. The 2024 Uranium Baseline Survey found uranium in the water and in the dust — unmonitored, untracked, in a community that lives on top of the resource. An invisible ghost. Scene two: the U.S. nuclear security enterprise. Twenty-two thousand workers. Every measurable dose recorded. The average technician absorbs 59.12 mrem a year — less than two percent of the federal limit, and comparable to routine medical imaging. Same element. Same physics. Two completely different societal outcomes. The difference is not the uranium. The difference is the system around it. That is the gap Zambia must close — and the expertise to close it already lives inside our Radiation Protection Authority.</a:t>
+              <a:t>[0:30-1:15 — CONFLICT]  Picture two scenes. Siavonga, Zambia: the 2024 Uranium Baseline Survey found uranium in the drinking water and uranium in the dust. People live on top of the resource — with no dosimetry, no baseline, no regulator on the ground. That is radiological fear. Now picture the U.S. nuclear enterprise: twenty-two thousand workers, the average technician absorbs fifty-nine point one two mrem a year — less than two percent of the federal limit. Every dose tracked. Every year. Same element. Same physics. Two completely different outcomes. The variable is not the uranium. The variable is the system wrapped around it.</a:t>
             </a:r>
           </a:p>
         </p:txBody>
@@ -646,7 +646,7 @@
           <a:lstStyle/>
           <a:p>
             <a:r>
-              <a:t>[EVIDENCE — 1:15 to 2:00] So can a radiological system actually be trusted? The data says yes. Across a decade — 2014 to 2024 — the U.S. DOE Radiation Exposure Monitoring System recorded an average individual dose of 59.12 mrem per technician per year. The federal limit is 5,000. We are operating at less than two percent of that ceiling. And here is the line that matters most for Zambia: between 2021 and 2024 the monitored workforce grew, and the individual dose did not. Safety scales. Ninety-eight percent of exposure is external photon radiation — managed by shielding we already understand. The IAEA Milestone Approach gives us the exact same playbook, and our Radiation Protection Authority — soon the Nuclear Safety and Protection Authority — already speaks this language. We are not starting from zero. We are starting from competence.</a:t>
+              <a:t>[1:15-2:00 — EVIDENCE]  Can the system actually be trusted? Fifty-nine point one two mrem. Across a decade. Across twenty-two thousand workers. That is the U.S. DOE Radiation Exposure Monitoring System record — under two percent of the federal limit. And the line that matters most for us: between 2021 and 2024 the monitored workforce grew, and individual dose did not move. Safety scales. Ninety-eight percent of exposure is external — managed by shielding we already use in our copper mines. The IAEA Milestone Approach is the exact roadmap Zambia is already on through the Radiation Protection Authority. We are not starting from zero. We are starting from competence.</a:t>
             </a:r>
           </a:p>
         </p:txBody>
@@ -716,7 +716,7 @@
           <a:lstStyle/>
           <a:p>
             <a:r>
-              <a:t>[CONFLICT DEEPENS — 2:00 to 2:30] Now bring it home. Eighty-four percent of Zambia's electricity comes from hydropower. In the 2015/16 drought we lost a thousand megawatts of generation and spent roughly four hundred and forty million U.S. dollars on unbudgeted imports. The 2023-2024 ZESCO reports show the Kariba crisis is not a one-off — it is the new climate baseline. Meanwhile Vision 2030 and the Seventh National Development Plan commit us to a two thousand megawatt nuclear target, the National Nuclear Policy was approved in 2020, and partnerships with ROSATOM, IP3, and KAERI are already signed. The fuel is literally under our feet. The strategy is on paper. The missing piece is enactment.</a:t>
+              <a:t>[2:00-2:30 — STAKES]  Now bring it home. Eighty-four percent of our electricity comes from hydropower. In the 2015/16 drought we lost a thousand megawatts and spent roughly four hundred and forty million U.S. dollars on unbudgeted imports. The 2023-24 ZESCO reports show the Kariba crisis is not a one-off — it is the new climate baseline. Meanwhile our 2020 Nuclear Policy commits to a two thousand megawatt target. ROSATOM, IP3, and KAERI partnerships are signed. The uranium is in the ground. We wrote the plan in 2020. Six years later, the grid is still waiting.</a:t>
             </a:r>
           </a:p>
         </p:txBody>
@@ -786,7 +786,7 @@
           <a:lstStyle/>
           <a:p>
             <a:r>
-              <a:t>[RESOLUTION — 2:30 to 3:00] So what do I want you to take away? Three actions. First, enact: pass the Nuclear Bill and formalise the Nuclear Safety and Protection Authority as an independent regulator under the IAEA Milestone Approach. Second, equip: fund the radiological monitoring expansion, starting in Siavonga, so that no community lives next to uranium without instruments. Third, execute: advance the Centre for Nuclear Science and Technology and the pre-feasibility studies for the two thousand megawatt programme. The fifty-nine point one two mrem U.S. record proves the safety model is real. Our 2020 Nuclear Policy proves the political will is real. Our uranium proves the fuel is real. The only thing standing between Zambia and a drought-proof grid is the signature on a bill. Let us move from fear to mastery. Thank you.</a:t>
+              <a:t>[2:30-3:00 — RESOLUTION]  So what am I asking for? Three decisions. First, ENACT — pass the Nuclear Bill and formalise the Nuclear Safety and Protection Authority as an independent regulator, aligned with the IAEA Milestone Approach. Without that signature, every other step is symbolic. Second, EQUIP — fund radiological monitoring, starting in Siavonga, so no community lives beside uranium without instruments. Third, EXECUTE — greenlight the Centre for Nuclear Science and Technology and the pre-feasibility studies for the two thousand megawatt programme. The fuel is under our feet. The expertise is on our payroll. The bill is on the table. Sign it. Thank you.</a:t>
             </a:r>
           </a:p>
         </p:txBody>
@@ -3788,7 +3788,7 @@
     <p:bg>
       <p:bgPr>
         <a:solidFill>
-          <a:srgbClr val="0B2E4F"/>
+          <a:srgbClr val="06142A"/>
         </a:solidFill>
         <a:effectLst/>
       </p:bgPr>
@@ -3808,14 +3808,14 @@
         </p:nvSpPr>
         <p:spPr>
           <a:xfrm>
-            <a:off x="0" y="3291840"/>
-            <a:ext cx="12191695" cy="73152"/>
+            <a:off x="548640" y="548640"/>
+            <a:ext cx="73152" cy="411480"/>
           </a:xfrm>
           <a:prstGeom prst="rect">
             <a:avLst/>
           </a:prstGeom>
           <a:solidFill>
-            <a:srgbClr val="B86B2A"/>
+            <a:srgbClr val="CC7A2E"/>
           </a:solidFill>
           <a:ln>
             <a:noFill/>
@@ -3852,8 +3852,8 @@
         </p:nvSpPr>
         <p:spPr>
           <a:xfrm>
-            <a:off x="731520" y="1463040"/>
-            <a:ext cx="10698480" cy="1097280"/>
+            <a:off x="777240" y="530352"/>
+            <a:ext cx="9144000" cy="365760"/>
           </a:xfrm>
           <a:prstGeom prst="rect">
             <a:avLst/>
@@ -3861,14 +3861,150 @@
           <a:noFill/>
         </p:spPr>
         <p:txBody>
-          <a:bodyPr wrap="square" lIns="45720" rIns="45720" tIns="18288" bIns="18288">
+          <a:bodyPr wrap="square" anchor="t" lIns="0" rIns="0" tIns="0" bIns="0">
             <a:spAutoFit/>
           </a:bodyPr>
           <a:lstStyle/>
           <a:p>
-            <a:pPr algn="l"/>
-            <a:r>
-              <a:rPr sz="4800" b="1">
+            <a:pPr algn="l">
+              <a:lnSpc>
+                <a:spcPct val="115000"/>
+              </a:lnSpc>
+            </a:pPr>
+            <a:r>
+              <a:rPr sz="1200" b="1" i="0">
+                <a:solidFill>
+                  <a:srgbClr val="E8A860"/>
+                </a:solidFill>
+                <a:latin typeface="Calibri"/>
+              </a:rPr>
+              <a:t>ENERGY SECURITY  ·  REPUBLIC OF ZAMBIA  ·  2026</a:t>
+            </a:r>
+          </a:p>
+        </p:txBody>
+      </p:sp>
+      <p:sp>
+        <p:nvSpPr>
+          <p:cNvPr id="4" name="TextBox 3"/>
+          <p:cNvSpPr txBox="1"/>
+          <p:nvPr/>
+        </p:nvSpPr>
+        <p:spPr>
+          <a:xfrm>
+            <a:off x="548640" y="1554480"/>
+            <a:ext cx="11064240" cy="2286000"/>
+          </a:xfrm>
+          <a:prstGeom prst="rect">
+            <a:avLst/>
+          </a:prstGeom>
+          <a:noFill/>
+        </p:spPr>
+        <p:txBody>
+          <a:bodyPr wrap="square" anchor="t" lIns="0" rIns="0" tIns="0" bIns="0">
+            <a:spAutoFit/>
+          </a:bodyPr>
+          <a:lstStyle/>
+          <a:p>
+            <a:pPr algn="l">
+              <a:lnSpc>
+                <a:spcPct val="100000"/>
+              </a:lnSpc>
+            </a:pPr>
+            <a:r>
+              <a:rPr sz="6400" b="1" i="0">
+                <a:solidFill>
+                  <a:srgbClr val="FFFFFF"/>
+                </a:solidFill>
+                <a:latin typeface="Calibri"/>
+              </a:rPr>
+              <a:t>We already own</a:t>
+            </a:r>
+          </a:p>
+          <a:p>
+            <a:pPr algn="l">
+              <a:lnSpc>
+                <a:spcPct val="100000"/>
+              </a:lnSpc>
+              <a:spcAft>
+                <a:spcPts val="0"/>
+              </a:spcAft>
+            </a:pPr>
+            <a:r>
+              <a:rPr sz="6400" b="1" i="0">
+                <a:solidFill>
+                  <a:srgbClr val="E8A860"/>
+                </a:solidFill>
+                <a:latin typeface="Calibri"/>
+              </a:rPr>
+              <a:t>the solution.</a:t>
+            </a:r>
+          </a:p>
+        </p:txBody>
+      </p:sp>
+      <p:cxnSp>
+        <p:nvCxnSpPr>
+          <p:cNvPr id="5" name="Connector 4"/>
+          <p:cNvCxnSpPr/>
+          <p:nvPr/>
+        </p:nvCxnSpPr>
+        <p:spPr>
+          <a:xfrm>
+            <a:off x="548640" y="3977639"/>
+            <a:ext cx="2286000" cy="0"/>
+          </a:xfrm>
+          <a:prstGeom prst="line">
+            <a:avLst/>
+          </a:prstGeom>
+          <a:ln w="19050">
+            <a:solidFill>
+              <a:srgbClr val="CC7A2E"/>
+            </a:solidFill>
+          </a:ln>
+        </p:spPr>
+        <p:style>
+          <a:lnRef idx="2">
+            <a:schemeClr val="accent1"/>
+          </a:lnRef>
+          <a:fillRef idx="0">
+            <a:schemeClr val="accent1"/>
+          </a:fillRef>
+          <a:effectRef idx="1">
+            <a:schemeClr val="accent1"/>
+          </a:effectRef>
+          <a:fontRef idx="minor">
+            <a:schemeClr val="tx1"/>
+          </a:fontRef>
+        </p:style>
+      </p:cxnSp>
+      <p:sp>
+        <p:nvSpPr>
+          <p:cNvPr id="6" name="TextBox 5"/>
+          <p:cNvSpPr txBox="1"/>
+          <p:nvPr/>
+        </p:nvSpPr>
+        <p:spPr>
+          <a:xfrm>
+            <a:off x="548640" y="4114800"/>
+            <a:ext cx="11064240" cy="457200"/>
+          </a:xfrm>
+          <a:prstGeom prst="rect">
+            <a:avLst/>
+          </a:prstGeom>
+          <a:noFill/>
+        </p:spPr>
+        <p:txBody>
+          <a:bodyPr wrap="square" anchor="t" lIns="0" rIns="0" tIns="0" bIns="0">
+            <a:spAutoFit/>
+          </a:bodyPr>
+          <a:lstStyle/>
+          <a:p>
+            <a:pPr algn="l">
+              <a:lnSpc>
+                <a:spcPct val="115000"/>
+              </a:lnSpc>
+            </a:pPr>
+            <a:r>
+              <a:rPr sz="2600" b="0" i="0">
                 <a:solidFill>
                   <a:srgbClr val="FFFFFF"/>
                 </a:solidFill>
@@ -3881,160 +4017,20 @@
       </p:sp>
       <p:sp>
         <p:nvSpPr>
-          <p:cNvPr id="4" name="TextBox 3"/>
-          <p:cNvSpPr txBox="1"/>
-          <p:nvPr/>
-        </p:nvSpPr>
-        <p:spPr>
-          <a:xfrm>
-            <a:off x="731520" y="2468880"/>
-            <a:ext cx="10698480" cy="731520"/>
-          </a:xfrm>
-          <a:prstGeom prst="rect">
-            <a:avLst/>
-          </a:prstGeom>
-          <a:noFill/>
-        </p:spPr>
-        <p:txBody>
-          <a:bodyPr wrap="square" lIns="45720" rIns="45720" tIns="18288" bIns="18288">
-            <a:spAutoFit/>
-          </a:bodyPr>
-          <a:lstStyle/>
-          <a:p>
-            <a:pPr algn="l"/>
-            <a:r>
-              <a:rPr sz="2400" b="0">
-                <a:solidFill>
-                  <a:srgbClr val="B86B2A"/>
-                </a:solidFill>
-                <a:latin typeface="Calibri"/>
-              </a:rPr>
-              <a:t>From Radiological Fear to Industrial Mastery</a:t>
-            </a:r>
-          </a:p>
-        </p:txBody>
-      </p:sp>
-      <p:sp>
-        <p:nvSpPr>
-          <p:cNvPr id="5" name="TextBox 4"/>
-          <p:cNvSpPr txBox="1"/>
-          <p:nvPr/>
-        </p:nvSpPr>
-        <p:spPr>
-          <a:xfrm>
-            <a:off x="731520" y="3611880"/>
-            <a:ext cx="10698480" cy="1828800"/>
-          </a:xfrm>
-          <a:prstGeom prst="rect">
-            <a:avLst/>
-          </a:prstGeom>
-          <a:noFill/>
-        </p:spPr>
-        <p:txBody>
-          <a:bodyPr wrap="square" lIns="45720" rIns="45720" tIns="18288" bIns="18288">
-            <a:spAutoFit/>
-          </a:bodyPr>
-          <a:lstStyle/>
-          <a:p>
-            <a:pPr algn="l"/>
-            <a:r>
-              <a:rPr sz="1800" b="0">
-                <a:solidFill>
-                  <a:srgbClr val="E6ECF2"/>
-                </a:solidFill>
-                <a:latin typeface="Calibri"/>
-              </a:rPr>
-              <a:t>Zambia must leverage its existing radiological safety expertise and uranium resources to transition to nuclear power as a drought-proof solution for national energy security.</a:t>
-            </a:r>
-          </a:p>
-        </p:txBody>
-      </p:sp>
-      <p:sp>
-        <p:nvSpPr>
-          <p:cNvPr id="6" name="TextBox 5"/>
-          <p:cNvSpPr txBox="1"/>
-          <p:nvPr/>
-        </p:nvSpPr>
-        <p:spPr>
-          <a:xfrm>
-            <a:off x="731520" y="5669280"/>
-            <a:ext cx="10698480" cy="365760"/>
-          </a:xfrm>
-          <a:prstGeom prst="rect">
-            <a:avLst/>
-          </a:prstGeom>
-          <a:noFill/>
-        </p:spPr>
-        <p:txBody>
-          <a:bodyPr wrap="square" lIns="45720" rIns="45720" tIns="18288" bIns="18288">
-            <a:spAutoFit/>
-          </a:bodyPr>
-          <a:lstStyle/>
-          <a:p>
-            <a:pPr algn="l"/>
-            <a:r>
-              <a:rPr sz="1400" b="1">
-                <a:solidFill>
-                  <a:srgbClr val="FFFFFF"/>
-                </a:solidFill>
-                <a:latin typeface="Calibri"/>
-              </a:rPr>
-              <a:t>Prepared by: Elizabeth Mwaba</a:t>
-            </a:r>
-          </a:p>
-        </p:txBody>
-      </p:sp>
-      <p:sp>
-        <p:nvSpPr>
-          <p:cNvPr id="7" name="TextBox 6"/>
-          <p:cNvSpPr txBox="1"/>
-          <p:nvPr/>
-        </p:nvSpPr>
-        <p:spPr>
-          <a:xfrm>
-            <a:off x="731520" y="5989320"/>
-            <a:ext cx="10698480" cy="365760"/>
-          </a:xfrm>
-          <a:prstGeom prst="rect">
-            <a:avLst/>
-          </a:prstGeom>
-          <a:noFill/>
-        </p:spPr>
-        <p:txBody>
-          <a:bodyPr wrap="square" lIns="45720" rIns="45720" tIns="18288" bIns="18288">
-            <a:spAutoFit/>
-          </a:bodyPr>
-          <a:lstStyle/>
-          <a:p>
-            <a:pPr algn="l"/>
-            <a:r>
-              <a:rPr sz="1200" b="0">
-                <a:solidFill>
-                  <a:srgbClr val="CFD8E3"/>
-                </a:solidFill>
-                <a:latin typeface="Calibri"/>
-              </a:rPr>
-              <a:t>A data-driven advocacy brief</a:t>
-            </a:r>
-          </a:p>
-        </p:txBody>
-      </p:sp>
-      <p:sp>
-        <p:nvSpPr>
-          <p:cNvPr id="8" name="Rectangle 7"/>
+          <p:cNvPr id="7" name="Rectangle 6"/>
           <p:cNvSpPr/>
           <p:nvPr/>
         </p:nvSpPr>
         <p:spPr>
           <a:xfrm>
-            <a:off x="0" y="6446520"/>
-            <a:ext cx="12191695" cy="411480"/>
+            <a:off x="548640" y="4846320"/>
+            <a:ext cx="11064240" cy="36576"/>
           </a:xfrm>
           <a:prstGeom prst="rect">
             <a:avLst/>
           </a:prstGeom>
           <a:solidFill>
-            <a:srgbClr val="0B2E4F"/>
+            <a:srgbClr val="334466"/>
           </a:solidFill>
           <a:ln>
             <a:noFill/>
@@ -4065,14 +4061,53 @@
       </p:sp>
       <p:sp>
         <p:nvSpPr>
+          <p:cNvPr id="8" name="TextBox 7"/>
+          <p:cNvSpPr txBox="1"/>
+          <p:nvPr/>
+        </p:nvSpPr>
+        <p:spPr>
+          <a:xfrm>
+            <a:off x="548640" y="5029200"/>
+            <a:ext cx="11064240" cy="1005840"/>
+          </a:xfrm>
+          <a:prstGeom prst="rect">
+            <a:avLst/>
+          </a:prstGeom>
+          <a:noFill/>
+        </p:spPr>
+        <p:txBody>
+          <a:bodyPr wrap="square" anchor="t" lIns="0" rIns="0" tIns="0" bIns="0">
+            <a:spAutoFit/>
+          </a:bodyPr>
+          <a:lstStyle/>
+          <a:p>
+            <a:pPr algn="l">
+              <a:lnSpc>
+                <a:spcPct val="125000"/>
+              </a:lnSpc>
+            </a:pPr>
+            <a:r>
+              <a:rPr sz="1500" b="0" i="1">
+                <a:solidFill>
+                  <a:srgbClr val="CFD8E3"/>
+                </a:solidFill>
+                <a:latin typeface="Calibri"/>
+              </a:rPr>
+              <a:t>Zambia must leverage its existing radiological safety expertise and uranium resources to transition to nuclear power as a drought-proof solution for national energy security.</a:t>
+            </a:r>
+          </a:p>
+        </p:txBody>
+      </p:sp>
+      <p:sp>
+        <p:nvSpPr>
           <p:cNvPr id="9" name="TextBox 8"/>
           <p:cNvSpPr txBox="1"/>
           <p:nvPr/>
         </p:nvSpPr>
         <p:spPr>
           <a:xfrm>
-            <a:off x="365760" y="6492240"/>
-            <a:ext cx="10515600" cy="365760"/>
+            <a:off x="548640" y="6263640"/>
+            <a:ext cx="7315200" cy="274320"/>
           </a:xfrm>
           <a:prstGeom prst="rect">
             <a:avLst/>
@@ -4080,20 +4115,24 @@
           <a:noFill/>
         </p:spPr>
         <p:txBody>
-          <a:bodyPr wrap="square" lIns="45720" rIns="45720" tIns="18288" bIns="18288">
+          <a:bodyPr wrap="square" anchor="t" lIns="0" rIns="0" tIns="0" bIns="0">
             <a:spAutoFit/>
           </a:bodyPr>
           <a:lstStyle/>
           <a:p>
-            <a:pPr algn="l"/>
-            <a:r>
-              <a:rPr sz="900" b="0">
+            <a:pPr algn="l">
+              <a:lnSpc>
+                <a:spcPct val="115000"/>
+              </a:lnSpc>
+            </a:pPr>
+            <a:r>
+              <a:rPr sz="1100" b="1" i="0">
                 <a:solidFill>
                   <a:srgbClr val="FFFFFF"/>
                 </a:solidFill>
                 <a:latin typeface="Calibri"/>
               </a:rPr>
-              <a:t>Sources: Zambia 7th National Development Plan (7NDP) &amp; Vision 2030 | IAEA Milestone Approach for New Nuclear Programs</a:t>
+              <a:t>Prepared by  ELIZABETH MWABA</a:t>
             </a:r>
           </a:p>
         </p:txBody>
@@ -4106,8 +4145,8 @@
         </p:nvSpPr>
         <p:spPr>
           <a:xfrm>
-            <a:off x="11247120" y="6492240"/>
-            <a:ext cx="822960" cy="365760"/>
+            <a:off x="548640" y="6492240"/>
+            <a:ext cx="7315200" cy="228600"/>
           </a:xfrm>
           <a:prstGeom prst="rect">
             <a:avLst/>
@@ -4115,20 +4154,24 @@
           <a:noFill/>
         </p:spPr>
         <p:txBody>
-          <a:bodyPr wrap="square" lIns="45720" rIns="45720" tIns="18288" bIns="18288">
+          <a:bodyPr wrap="square" anchor="t" lIns="0" rIns="0" tIns="0" bIns="0">
             <a:spAutoFit/>
           </a:bodyPr>
           <a:lstStyle/>
           <a:p>
-            <a:pPr algn="r"/>
-            <a:r>
-              <a:rPr sz="1000" b="1">
-                <a:solidFill>
-                  <a:srgbClr val="B86B2A"/>
+            <a:pPr algn="l">
+              <a:lnSpc>
+                <a:spcPct val="115000"/>
+              </a:lnSpc>
+            </a:pPr>
+            <a:r>
+              <a:rPr sz="900" b="0" i="0">
+                <a:solidFill>
+                  <a:srgbClr val="99A3B3"/>
                 </a:solidFill>
                 <a:latin typeface="Calibri"/>
               </a:rPr>
-              <a:t>1 / 5</a:t>
+              <a:t>Radiological Analyst  ·  Supervisor Review Brief</a:t>
             </a:r>
           </a:p>
         </p:txBody>
@@ -4147,7 +4190,7 @@
     <p:bg>
       <p:bgPr>
         <a:solidFill>
-          <a:srgbClr val="FFFFFF"/>
+          <a:srgbClr val="F7F5F0"/>
         </a:solidFill>
         <a:effectLst/>
       </p:bgPr>
@@ -4161,20 +4204,172 @@
       <p:grpSpPr/>
       <p:sp>
         <p:nvSpPr>
-          <p:cNvPr id="2" name="Rectangle 1"/>
+          <p:cNvPr id="2" name="TextBox 1"/>
+          <p:cNvSpPr txBox="1"/>
+          <p:nvPr/>
+        </p:nvSpPr>
+        <p:spPr>
+          <a:xfrm>
+            <a:off x="548640" y="411480"/>
+            <a:ext cx="7315200" cy="274320"/>
+          </a:xfrm>
+          <a:prstGeom prst="rect">
+            <a:avLst/>
+          </a:prstGeom>
+          <a:noFill/>
+        </p:spPr>
+        <p:txBody>
+          <a:bodyPr wrap="square" anchor="t" lIns="0" rIns="0" tIns="0" bIns="0">
+            <a:spAutoFit/>
+          </a:bodyPr>
+          <a:lstStyle/>
+          <a:p>
+            <a:pPr algn="l">
+              <a:lnSpc>
+                <a:spcPct val="115000"/>
+              </a:lnSpc>
+            </a:pPr>
+            <a:r>
+              <a:rPr sz="1100" b="1" i="0">
+                <a:solidFill>
+                  <a:srgbClr val="CC7A2E"/>
+                </a:solidFill>
+                <a:latin typeface="Calibri"/>
+              </a:rPr>
+              <a:t>01  ·  THE HOOK</a:t>
+            </a:r>
+          </a:p>
+        </p:txBody>
+      </p:sp>
+      <p:sp>
+        <p:nvSpPr>
+          <p:cNvPr id="3" name="TextBox 2"/>
+          <p:cNvSpPr txBox="1"/>
+          <p:nvPr/>
+        </p:nvSpPr>
+        <p:spPr>
+          <a:xfrm>
+            <a:off x="548640" y="685800"/>
+            <a:ext cx="11064240" cy="640080"/>
+          </a:xfrm>
+          <a:prstGeom prst="rect">
+            <a:avLst/>
+          </a:prstGeom>
+          <a:noFill/>
+        </p:spPr>
+        <p:txBody>
+          <a:bodyPr wrap="square" anchor="t" lIns="0" rIns="0" tIns="0" bIns="0">
+            <a:spAutoFit/>
+          </a:bodyPr>
+          <a:lstStyle/>
+          <a:p>
+            <a:pPr algn="l">
+              <a:lnSpc>
+                <a:spcPct val="115000"/>
+              </a:lnSpc>
+            </a:pPr>
+            <a:r>
+              <a:rPr sz="3400" b="1" i="0">
+                <a:solidFill>
+                  <a:srgbClr val="0A1F3D"/>
+                </a:solidFill>
+                <a:latin typeface="Calibri"/>
+              </a:rPr>
+              <a:t>Same element. Two realities.</a:t>
+            </a:r>
+          </a:p>
+        </p:txBody>
+      </p:sp>
+      <p:cxnSp>
+        <p:nvCxnSpPr>
+          <p:cNvPr id="4" name="Connector 3"/>
+          <p:cNvCxnSpPr/>
+          <p:nvPr/>
+        </p:nvCxnSpPr>
+        <p:spPr>
+          <a:xfrm>
+            <a:off x="548640" y="1325880"/>
+            <a:ext cx="1097280" cy="0"/>
+          </a:xfrm>
+          <a:prstGeom prst="line">
+            <a:avLst/>
+          </a:prstGeom>
+          <a:ln w="19050">
+            <a:solidFill>
+              <a:srgbClr val="CC7A2E"/>
+            </a:solidFill>
+          </a:ln>
+        </p:spPr>
+        <p:style>
+          <a:lnRef idx="2">
+            <a:schemeClr val="accent1"/>
+          </a:lnRef>
+          <a:fillRef idx="0">
+            <a:schemeClr val="accent1"/>
+          </a:fillRef>
+          <a:effectRef idx="1">
+            <a:schemeClr val="accent1"/>
+          </a:effectRef>
+          <a:fontRef idx="minor">
+            <a:schemeClr val="tx1"/>
+          </a:fontRef>
+        </p:style>
+      </p:cxnSp>
+      <p:sp>
+        <p:nvSpPr>
+          <p:cNvPr id="5" name="TextBox 4"/>
+          <p:cNvSpPr txBox="1"/>
+          <p:nvPr/>
+        </p:nvSpPr>
+        <p:spPr>
+          <a:xfrm>
+            <a:off x="548640" y="1417320"/>
+            <a:ext cx="11064240" cy="457200"/>
+          </a:xfrm>
+          <a:prstGeom prst="rect">
+            <a:avLst/>
+          </a:prstGeom>
+          <a:noFill/>
+        </p:spPr>
+        <p:txBody>
+          <a:bodyPr wrap="square" anchor="t" lIns="0" rIns="0" tIns="0" bIns="0">
+            <a:spAutoFit/>
+          </a:bodyPr>
+          <a:lstStyle/>
+          <a:p>
+            <a:pPr algn="l">
+              <a:lnSpc>
+                <a:spcPct val="115000"/>
+              </a:lnSpc>
+            </a:pPr>
+            <a:r>
+              <a:rPr sz="1500" b="0" i="1">
+                <a:solidFill>
+                  <a:srgbClr val="6B7280"/>
+                </a:solidFill>
+                <a:latin typeface="Calibri"/>
+              </a:rPr>
+              <a:t>Zambians and Americans both live with uranium. Only one nation measures it.</a:t>
+            </a:r>
+          </a:p>
+        </p:txBody>
+      </p:sp>
+      <p:sp>
+        <p:nvSpPr>
+          <p:cNvPr id="6" name="Rectangle 5"/>
           <p:cNvSpPr/>
           <p:nvPr/>
         </p:nvSpPr>
         <p:spPr>
           <a:xfrm>
-            <a:off x="0" y="0"/>
-            <a:ext cx="12191695" cy="960120"/>
+            <a:off x="548640" y="2240280"/>
+            <a:ext cx="5532120" cy="3657600"/>
           </a:xfrm>
           <a:prstGeom prst="rect">
             <a:avLst/>
           </a:prstGeom>
           <a:solidFill>
-            <a:srgbClr val="0B2E4F"/>
+            <a:srgbClr val="7C1818"/>
           </a:solidFill>
           <a:ln>
             <a:noFill/>
@@ -4205,20 +4400,20 @@
       </p:sp>
       <p:sp>
         <p:nvSpPr>
-          <p:cNvPr id="3" name="Rectangle 2"/>
+          <p:cNvPr id="7" name="Rectangle 6"/>
           <p:cNvSpPr/>
           <p:nvPr/>
         </p:nvSpPr>
         <p:spPr>
           <a:xfrm>
-            <a:off x="0" y="960120"/>
-            <a:ext cx="12191695" cy="73152"/>
+            <a:off x="548640" y="2240280"/>
+            <a:ext cx="109728" cy="3657600"/>
           </a:xfrm>
           <a:prstGeom prst="rect">
             <a:avLst/>
           </a:prstGeom>
           <a:solidFill>
-            <a:srgbClr val="B86B2A"/>
+            <a:srgbClr val="B32B2B"/>
           </a:solidFill>
           <a:ln>
             <a:noFill/>
@@ -4249,14 +4444,14 @@
       </p:sp>
       <p:sp>
         <p:nvSpPr>
-          <p:cNvPr id="4" name="TextBox 3"/>
+          <p:cNvPr id="8" name="TextBox 7"/>
           <p:cNvSpPr txBox="1"/>
           <p:nvPr/>
         </p:nvSpPr>
         <p:spPr>
           <a:xfrm>
-            <a:off x="457200" y="164592"/>
-            <a:ext cx="11430000" cy="548640"/>
+            <a:off x="777240" y="2377440"/>
+            <a:ext cx="5120640" cy="274320"/>
           </a:xfrm>
           <a:prstGeom prst="rect">
             <a:avLst/>
@@ -4264,34 +4459,38 @@
           <a:noFill/>
         </p:spPr>
         <p:txBody>
-          <a:bodyPr wrap="square" lIns="45720" rIns="45720" tIns="18288" bIns="18288">
+          <a:bodyPr wrap="square" anchor="t" lIns="0" rIns="0" tIns="0" bIns="0">
             <a:spAutoFit/>
           </a:bodyPr>
           <a:lstStyle/>
           <a:p>
-            <a:pPr algn="l"/>
-            <a:r>
-              <a:rPr sz="2800" b="1">
-                <a:solidFill>
-                  <a:srgbClr val="FFFFFF"/>
+            <a:pPr algn="l">
+              <a:lnSpc>
+                <a:spcPct val="115000"/>
+              </a:lnSpc>
+            </a:pPr>
+            <a:r>
+              <a:rPr sz="1100" b="1" i="0">
+                <a:solidFill>
+                  <a:srgbClr val="E8A860"/>
                 </a:solidFill>
                 <a:latin typeface="Calibri"/>
               </a:rPr>
-              <a:t>The Hook: Siavonga's Invisible Ghost</a:t>
-            </a:r>
-          </a:p>
-        </p:txBody>
-      </p:sp>
-      <p:sp>
-        <p:nvSpPr>
-          <p:cNvPr id="5" name="TextBox 4"/>
+              <a:t>ZAMBIA  ·  SIAVONGA</a:t>
+            </a:r>
+          </a:p>
+        </p:txBody>
+      </p:sp>
+      <p:sp>
+        <p:nvSpPr>
+          <p:cNvPr id="9" name="TextBox 8"/>
           <p:cNvSpPr txBox="1"/>
           <p:nvPr/>
         </p:nvSpPr>
         <p:spPr>
           <a:xfrm>
-            <a:off x="457200" y="594360"/>
-            <a:ext cx="11430000" cy="320040"/>
+            <a:off x="777240" y="2697480"/>
+            <a:ext cx="5120640" cy="1280160"/>
           </a:xfrm>
           <a:prstGeom prst="rect">
             <a:avLst/>
@@ -4299,40 +4498,159 @@
           <a:noFill/>
         </p:spPr>
         <p:txBody>
-          <a:bodyPr wrap="square" lIns="45720" rIns="45720" tIns="18288" bIns="18288">
+          <a:bodyPr wrap="square" anchor="t" lIns="0" rIns="0" tIns="0" bIns="0">
             <a:spAutoFit/>
           </a:bodyPr>
           <a:lstStyle/>
           <a:p>
-            <a:pPr algn="l"/>
-            <a:r>
-              <a:rPr sz="1400" b="0">
-                <a:solidFill>
-                  <a:srgbClr val="CFD8E3"/>
+            <a:pPr algn="l">
+              <a:lnSpc>
+                <a:spcPct val="105000"/>
+              </a:lnSpc>
+            </a:pPr>
+            <a:r>
+              <a:rPr sz="2600" b="1" i="0">
+                <a:solidFill>
+                  <a:srgbClr val="FFFFFF"/>
                 </a:solidFill>
                 <a:latin typeface="Calibri"/>
               </a:rPr>
-              <a:t>The paradox we already live with</a:t>
-            </a:r>
-          </a:p>
-        </p:txBody>
-      </p:sp>
-      <p:sp>
-        <p:nvSpPr>
-          <p:cNvPr id="6" name="Rectangle 5"/>
+              <a:t>Uranium in the water.
+Uranium in the dust.</a:t>
+            </a:r>
+          </a:p>
+        </p:txBody>
+      </p:sp>
+      <p:sp>
+        <p:nvSpPr>
+          <p:cNvPr id="10" name="TextBox 9"/>
+          <p:cNvSpPr txBox="1"/>
+          <p:nvPr/>
+        </p:nvSpPr>
+        <p:spPr>
+          <a:xfrm>
+            <a:off x="777240" y="4160520"/>
+            <a:ext cx="5120640" cy="914400"/>
+          </a:xfrm>
+          <a:prstGeom prst="rect">
+            <a:avLst/>
+          </a:prstGeom>
+          <a:noFill/>
+        </p:spPr>
+        <p:txBody>
+          <a:bodyPr wrap="square" anchor="t" lIns="0" rIns="0" tIns="0" bIns="0">
+            <a:spAutoFit/>
+          </a:bodyPr>
+          <a:lstStyle/>
+          <a:p>
+            <a:pPr algn="l">
+              <a:lnSpc>
+                <a:spcPct val="130000"/>
+              </a:lnSpc>
+            </a:pPr>
+            <a:r>
+              <a:rPr sz="1300" b="0" i="0">
+                <a:solidFill>
+                  <a:srgbClr val="F2CFCF"/>
+                </a:solidFill>
+                <a:latin typeface="Calibri"/>
+              </a:rPr>
+              <a:t>Zero monitoring.  Zero baseline.
+Zero accountability.</a:t>
+            </a:r>
+          </a:p>
+        </p:txBody>
+      </p:sp>
+      <p:cxnSp>
+        <p:nvCxnSpPr>
+          <p:cNvPr id="11" name="Connector 10"/>
+          <p:cNvCxnSpPr/>
+          <p:nvPr/>
+        </p:nvCxnSpPr>
+        <p:spPr>
+          <a:xfrm>
+            <a:off x="777240" y="5166360"/>
+            <a:ext cx="914400" cy="0"/>
+          </a:xfrm>
+          <a:prstGeom prst="line">
+            <a:avLst/>
+          </a:prstGeom>
+          <a:ln w="12700">
+            <a:solidFill>
+              <a:srgbClr val="CC7A2E"/>
+            </a:solidFill>
+          </a:ln>
+        </p:spPr>
+        <p:style>
+          <a:lnRef idx="2">
+            <a:schemeClr val="accent1"/>
+          </a:lnRef>
+          <a:fillRef idx="0">
+            <a:schemeClr val="accent1"/>
+          </a:fillRef>
+          <a:effectRef idx="1">
+            <a:schemeClr val="accent1"/>
+          </a:effectRef>
+          <a:fontRef idx="minor">
+            <a:schemeClr val="tx1"/>
+          </a:fontRef>
+        </p:style>
+      </p:cxnSp>
+      <p:sp>
+        <p:nvSpPr>
+          <p:cNvPr id="12" name="TextBox 11"/>
+          <p:cNvSpPr txBox="1"/>
+          <p:nvPr/>
+        </p:nvSpPr>
+        <p:spPr>
+          <a:xfrm>
+            <a:off x="777240" y="5257800"/>
+            <a:ext cx="5120640" cy="457200"/>
+          </a:xfrm>
+          <a:prstGeom prst="rect">
+            <a:avLst/>
+          </a:prstGeom>
+          <a:noFill/>
+        </p:spPr>
+        <p:txBody>
+          <a:bodyPr wrap="square" anchor="t" lIns="0" rIns="0" tIns="0" bIns="0">
+            <a:spAutoFit/>
+          </a:bodyPr>
+          <a:lstStyle/>
+          <a:p>
+            <a:pPr algn="l">
+              <a:lnSpc>
+                <a:spcPct val="115000"/>
+              </a:lnSpc>
+            </a:pPr>
+            <a:r>
+              <a:rPr sz="1400" b="1" i="0">
+                <a:solidFill>
+                  <a:srgbClr val="E8A860"/>
+                </a:solidFill>
+                <a:latin typeface="Calibri"/>
+              </a:rPr>
+              <a:t>RADIOLOGICAL  FEAR</a:t>
+            </a:r>
+          </a:p>
+        </p:txBody>
+      </p:sp>
+      <p:sp>
+        <p:nvSpPr>
+          <p:cNvPr id="13" name="Rectangle 12"/>
           <p:cNvSpPr/>
           <p:nvPr/>
         </p:nvSpPr>
         <p:spPr>
           <a:xfrm>
-            <a:off x="457200" y="1371600"/>
-            <a:ext cx="5394960" cy="502920"/>
+            <a:off x="6263640" y="2240280"/>
+            <a:ext cx="5349240" cy="3657600"/>
           </a:xfrm>
           <a:prstGeom prst="rect">
             <a:avLst/>
           </a:prstGeom>
           <a:solidFill>
-            <a:srgbClr val="C0392B"/>
+            <a:srgbClr val="0A1F3D"/>
           </a:solidFill>
           <a:ln>
             <a:noFill/>
@@ -4363,55 +4681,20 @@
       </p:sp>
       <p:sp>
         <p:nvSpPr>
-          <p:cNvPr id="7" name="TextBox 6"/>
-          <p:cNvSpPr txBox="1"/>
-          <p:nvPr/>
-        </p:nvSpPr>
-        <p:spPr>
-          <a:xfrm>
-            <a:off x="457200" y="1417320"/>
-            <a:ext cx="5394960" cy="457200"/>
-          </a:xfrm>
-          <a:prstGeom prst="rect">
-            <a:avLst/>
-          </a:prstGeom>
-          <a:noFill/>
-        </p:spPr>
-        <p:txBody>
-          <a:bodyPr wrap="square" lIns="45720" rIns="45720" tIns="18288" bIns="18288">
-            <a:spAutoFit/>
-          </a:bodyPr>
-          <a:lstStyle/>
-          <a:p>
-            <a:pPr algn="l"/>
-            <a:r>
-              <a:rPr sz="1800" b="1">
-                <a:solidFill>
-                  <a:srgbClr val="FFFFFF"/>
-                </a:solidFill>
-                <a:latin typeface="Calibri"/>
-              </a:rPr>
-              <a:t>  INVISIBLE DANGER</a:t>
-            </a:r>
-          </a:p>
-        </p:txBody>
-      </p:sp>
-      <p:sp>
-        <p:nvSpPr>
-          <p:cNvPr id="8" name="Rectangle 7"/>
+          <p:cNvPr id="14" name="Rectangle 13"/>
           <p:cNvSpPr/>
           <p:nvPr/>
         </p:nvSpPr>
         <p:spPr>
           <a:xfrm>
-            <a:off x="457200" y="1874519"/>
-            <a:ext cx="5394960" cy="4251960"/>
+            <a:off x="6263640" y="2240280"/>
+            <a:ext cx="109728" cy="3657600"/>
           </a:xfrm>
           <a:prstGeom prst="rect">
             <a:avLst/>
           </a:prstGeom>
           <a:solidFill>
-            <a:srgbClr val="F2F4F7"/>
+            <a:srgbClr val="CC7A2E"/>
           </a:solidFill>
           <a:ln>
             <a:noFill/>
@@ -4442,14 +4725,14 @@
       </p:sp>
       <p:sp>
         <p:nvSpPr>
-          <p:cNvPr id="9" name="TextBox 8"/>
+          <p:cNvPr id="15" name="TextBox 14"/>
           <p:cNvSpPr txBox="1"/>
           <p:nvPr/>
         </p:nvSpPr>
         <p:spPr>
           <a:xfrm>
-            <a:off x="685800" y="2011680"/>
-            <a:ext cx="5120640" cy="4389120"/>
+            <a:off x="6492240" y="2377440"/>
+            <a:ext cx="5029200" cy="274320"/>
           </a:xfrm>
           <a:prstGeom prst="rect">
             <a:avLst/>
@@ -4457,92 +4740,237 @@
           <a:noFill/>
         </p:spPr>
         <p:txBody>
-          <a:bodyPr wrap="square">
+          <a:bodyPr wrap="square" anchor="t" lIns="0" rIns="0" tIns="0" bIns="0">
             <a:spAutoFit/>
           </a:bodyPr>
           <a:lstStyle/>
           <a:p>
-            <a:pPr>
-              <a:spcAft>
-                <a:spcPts val="600"/>
-              </a:spcAft>
+            <a:pPr algn="l">
+              <a:lnSpc>
+                <a:spcPct val="115000"/>
+              </a:lnSpc>
             </a:pPr>
             <a:r>
-              <a:rPr sz="1500">
-                <a:solidFill>
-                  <a:srgbClr val="1A1A1A"/>
+              <a:rPr sz="1100" b="1" i="0">
+                <a:solidFill>
+                  <a:srgbClr val="E8A860"/>
                 </a:solidFill>
                 <a:latin typeface="Calibri"/>
               </a:rPr>
-              <a:t>•  Unmonitored environmental uranium detected in Siavonga water and dust samples.</a:t>
-            </a:r>
-          </a:p>
-          <a:p>
-            <a:pPr>
-              <a:spcAft>
-                <a:spcPts val="600"/>
-              </a:spcAft>
+              <a:t>USA  ·  DOE NUCLEAR ENTERPRISE</a:t>
+            </a:r>
+          </a:p>
+        </p:txBody>
+      </p:sp>
+      <p:sp>
+        <p:nvSpPr>
+          <p:cNvPr id="16" name="TextBox 15"/>
+          <p:cNvSpPr txBox="1"/>
+          <p:nvPr/>
+        </p:nvSpPr>
+        <p:spPr>
+          <a:xfrm>
+            <a:off x="6492240" y="2697480"/>
+            <a:ext cx="5029200" cy="1280160"/>
+          </a:xfrm>
+          <a:prstGeom prst="rect">
+            <a:avLst/>
+          </a:prstGeom>
+          <a:noFill/>
+        </p:spPr>
+        <p:txBody>
+          <a:bodyPr wrap="square" anchor="t" lIns="0" rIns="0" tIns="0" bIns="0">
+            <a:spAutoFit/>
+          </a:bodyPr>
+          <a:lstStyle/>
+          <a:p>
+            <a:pPr algn="l">
+              <a:lnSpc>
+                <a:spcPct val="105000"/>
+              </a:lnSpc>
             </a:pPr>
             <a:r>
-              <a:rPr sz="1500">
-                <a:solidFill>
-                  <a:srgbClr val="1A1A1A"/>
+              <a:rPr sz="2600" b="1" i="0">
+                <a:solidFill>
+                  <a:srgbClr val="FFFFFF"/>
                 </a:solidFill>
                 <a:latin typeface="Calibri"/>
               </a:rPr>
-              <a:t>•  Communities exposed daily — without dosimetry, without baseline data, without recourse.</a:t>
-            </a:r>
-          </a:p>
-          <a:p>
-            <a:pPr>
-              <a:spcAft>
-                <a:spcPts val="600"/>
-              </a:spcAft>
+              <a:t>22,000 workers.
+59.12 mrem average.</a:t>
+            </a:r>
+          </a:p>
+        </p:txBody>
+      </p:sp>
+      <p:sp>
+        <p:nvSpPr>
+          <p:cNvPr id="17" name="TextBox 16"/>
+          <p:cNvSpPr txBox="1"/>
+          <p:nvPr/>
+        </p:nvSpPr>
+        <p:spPr>
+          <a:xfrm>
+            <a:off x="6492240" y="4160520"/>
+            <a:ext cx="5029200" cy="914400"/>
+          </a:xfrm>
+          <a:prstGeom prst="rect">
+            <a:avLst/>
+          </a:prstGeom>
+          <a:noFill/>
+        </p:spPr>
+        <p:txBody>
+          <a:bodyPr wrap="square" anchor="t" lIns="0" rIns="0" tIns="0" bIns="0">
+            <a:spAutoFit/>
+          </a:bodyPr>
+          <a:lstStyle/>
+          <a:p>
+            <a:pPr algn="l">
+              <a:lnSpc>
+                <a:spcPct val="130000"/>
+              </a:lnSpc>
             </a:pPr>
             <a:r>
-              <a:rPr sz="1500">
-                <a:solidFill>
-                  <a:srgbClr val="1A1A1A"/>
+              <a:rPr sz="1300" b="0" i="0">
+                <a:solidFill>
+                  <a:srgbClr val="CFD8E3"/>
                 </a:solidFill>
                 <a:latin typeface="Calibri"/>
               </a:rPr>
-              <a:t>•  Risk is real, but invisible: no instrumentation, no regulator presence, no accountability.</a:t>
-            </a:r>
-          </a:p>
-          <a:p>
-            <a:pPr>
-              <a:spcAft>
-                <a:spcPts val="600"/>
-              </a:spcAft>
+              <a:t>Every dose tracked.  Every site audited.
+Every year. For a decade.</a:t>
+            </a:r>
+          </a:p>
+        </p:txBody>
+      </p:sp>
+      <p:cxnSp>
+        <p:nvCxnSpPr>
+          <p:cNvPr id="18" name="Connector 17"/>
+          <p:cNvCxnSpPr/>
+          <p:nvPr/>
+        </p:nvCxnSpPr>
+        <p:spPr>
+          <a:xfrm>
+            <a:off x="6492240" y="5166360"/>
+            <a:ext cx="914400" cy="0"/>
+          </a:xfrm>
+          <a:prstGeom prst="line">
+            <a:avLst/>
+          </a:prstGeom>
+          <a:ln w="12700">
+            <a:solidFill>
+              <a:srgbClr val="CC7A2E"/>
+            </a:solidFill>
+          </a:ln>
+        </p:spPr>
+        <p:style>
+          <a:lnRef idx="2">
+            <a:schemeClr val="accent1"/>
+          </a:lnRef>
+          <a:fillRef idx="0">
+            <a:schemeClr val="accent1"/>
+          </a:fillRef>
+          <a:effectRef idx="1">
+            <a:schemeClr val="accent1"/>
+          </a:effectRef>
+          <a:fontRef idx="minor">
+            <a:schemeClr val="tx1"/>
+          </a:fontRef>
+        </p:style>
+      </p:cxnSp>
+      <p:sp>
+        <p:nvSpPr>
+          <p:cNvPr id="19" name="TextBox 18"/>
+          <p:cNvSpPr txBox="1"/>
+          <p:nvPr/>
+        </p:nvSpPr>
+        <p:spPr>
+          <a:xfrm>
+            <a:off x="6492240" y="5257800"/>
+            <a:ext cx="5029200" cy="457200"/>
+          </a:xfrm>
+          <a:prstGeom prst="rect">
+            <a:avLst/>
+          </a:prstGeom>
+          <a:noFill/>
+        </p:spPr>
+        <p:txBody>
+          <a:bodyPr wrap="square" anchor="t" lIns="0" rIns="0" tIns="0" bIns="0">
+            <a:spAutoFit/>
+          </a:bodyPr>
+          <a:lstStyle/>
+          <a:p>
+            <a:pPr algn="l">
+              <a:lnSpc>
+                <a:spcPct val="115000"/>
+              </a:lnSpc>
             </a:pPr>
             <a:r>
-              <a:rPr sz="1500">
-                <a:solidFill>
-                  <a:srgbClr val="1A1A1A"/>
+              <a:rPr sz="1400" b="1" i="0">
+                <a:solidFill>
+                  <a:srgbClr val="E8A860"/>
                 </a:solidFill>
                 <a:latin typeface="Calibri"/>
               </a:rPr>
-              <a:t>•  This is the status quo of radiological FEAR — exposure without measurement.</a:t>
-            </a:r>
-          </a:p>
-        </p:txBody>
-      </p:sp>
-      <p:sp>
-        <p:nvSpPr>
-          <p:cNvPr id="10" name="Rectangle 9"/>
+              <a:t>INDUSTRIAL  MASTERY</a:t>
+            </a:r>
+          </a:p>
+        </p:txBody>
+      </p:sp>
+      <p:sp>
+        <p:nvSpPr>
+          <p:cNvPr id="20" name="TextBox 19"/>
+          <p:cNvSpPr txBox="1"/>
+          <p:nvPr/>
+        </p:nvSpPr>
+        <p:spPr>
+          <a:xfrm>
+            <a:off x="548640" y="6080760"/>
+            <a:ext cx="11064240" cy="365760"/>
+          </a:xfrm>
+          <a:prstGeom prst="rect">
+            <a:avLst/>
+          </a:prstGeom>
+          <a:noFill/>
+        </p:spPr>
+        <p:txBody>
+          <a:bodyPr wrap="square" anchor="t" lIns="0" rIns="0" tIns="0" bIns="0">
+            <a:spAutoFit/>
+          </a:bodyPr>
+          <a:lstStyle/>
+          <a:p>
+            <a:pPr algn="ctr">
+              <a:lnSpc>
+                <a:spcPct val="115000"/>
+              </a:lnSpc>
+            </a:pPr>
+            <a:r>
+              <a:rPr sz="1500" b="1" i="0">
+                <a:solidFill>
+                  <a:srgbClr val="0A1F3D"/>
+                </a:solidFill>
+                <a:latin typeface="Calibri"/>
+              </a:rPr>
+              <a:t>The gap is not the science. It is the system.</a:t>
+            </a:r>
+          </a:p>
+        </p:txBody>
+      </p:sp>
+      <p:sp>
+        <p:nvSpPr>
+          <p:cNvPr id="21" name="Rectangle 20"/>
           <p:cNvSpPr/>
           <p:nvPr/>
         </p:nvSpPr>
         <p:spPr>
           <a:xfrm>
-            <a:off x="6355080" y="1371600"/>
-            <a:ext cx="5394960" cy="502920"/>
+            <a:off x="0" y="6675120"/>
+            <a:ext cx="12191695" cy="182880"/>
           </a:xfrm>
           <a:prstGeom prst="rect">
             <a:avLst/>
           </a:prstGeom>
           <a:solidFill>
-            <a:srgbClr val="0B2E4F"/>
+            <a:srgbClr val="C8CED6"/>
           </a:solidFill>
           <a:ln>
             <a:noFill/>
@@ -4573,55 +5001,20 @@
       </p:sp>
       <p:sp>
         <p:nvSpPr>
-          <p:cNvPr id="11" name="TextBox 10"/>
-          <p:cNvSpPr txBox="1"/>
-          <p:nvPr/>
-        </p:nvSpPr>
-        <p:spPr>
-          <a:xfrm>
-            <a:off x="6355080" y="1417320"/>
-            <a:ext cx="5394960" cy="457200"/>
-          </a:xfrm>
-          <a:prstGeom prst="rect">
-            <a:avLst/>
-          </a:prstGeom>
-          <a:noFill/>
-        </p:spPr>
-        <p:txBody>
-          <a:bodyPr wrap="square" lIns="45720" rIns="45720" tIns="18288" bIns="18288">
-            <a:spAutoFit/>
-          </a:bodyPr>
-          <a:lstStyle/>
-          <a:p>
-            <a:pPr algn="l"/>
-            <a:r>
-              <a:rPr sz="1800" b="1">
-                <a:solidFill>
-                  <a:srgbClr val="FFFFFF"/>
-                </a:solidFill>
-                <a:latin typeface="Calibri"/>
-              </a:rPr>
-              <a:t>  PRECISION MONITORING</a:t>
-            </a:r>
-          </a:p>
-        </p:txBody>
-      </p:sp>
-      <p:sp>
-        <p:nvSpPr>
-          <p:cNvPr id="12" name="Rectangle 11"/>
+          <p:cNvPr id="22" name="Rectangle 21"/>
           <p:cNvSpPr/>
           <p:nvPr/>
         </p:nvSpPr>
         <p:spPr>
           <a:xfrm>
-            <a:off x="6355080" y="1874519"/>
-            <a:ext cx="5394960" cy="4251960"/>
+            <a:off x="0" y="6675120"/>
+            <a:ext cx="640080" cy="182880"/>
           </a:xfrm>
           <a:prstGeom prst="rect">
             <a:avLst/>
           </a:prstGeom>
           <a:solidFill>
-            <a:srgbClr val="F2F4F7"/>
+            <a:srgbClr val="CC7A2E"/>
           </a:solidFill>
           <a:ln>
             <a:noFill/>
@@ -4652,14 +5045,14 @@
       </p:sp>
       <p:sp>
         <p:nvSpPr>
-          <p:cNvPr id="13" name="TextBox 12"/>
+          <p:cNvPr id="23" name="TextBox 22"/>
           <p:cNvSpPr txBox="1"/>
           <p:nvPr/>
         </p:nvSpPr>
         <p:spPr>
           <a:xfrm>
-            <a:off x="6583680" y="2011680"/>
-            <a:ext cx="5120640" cy="4389120"/>
+            <a:off x="457200" y="6446520"/>
+            <a:ext cx="9601200" cy="228600"/>
           </a:xfrm>
           <a:prstGeom prst="rect">
             <a:avLst/>
@@ -4667,221 +5060,63 @@
           <a:noFill/>
         </p:spPr>
         <p:txBody>
-          <a:bodyPr wrap="square">
+          <a:bodyPr wrap="square" anchor="t" lIns="0" rIns="0" tIns="0" bIns="0">
             <a:spAutoFit/>
           </a:bodyPr>
           <a:lstStyle/>
           <a:p>
-            <a:pPr>
-              <a:spcAft>
-                <a:spcPts val="600"/>
-              </a:spcAft>
+            <a:pPr algn="l">
+              <a:lnSpc>
+                <a:spcPct val="115000"/>
+              </a:lnSpc>
             </a:pPr>
             <a:r>
-              <a:rPr sz="1500">
-                <a:solidFill>
-                  <a:srgbClr val="1A1A1A"/>
+              <a:rPr sz="900" b="0" i="1">
+                <a:solidFill>
+                  <a:srgbClr val="6B7280"/>
                 </a:solidFill>
                 <a:latin typeface="Calibri"/>
               </a:rPr>
-              <a:t>•  U.S. nuclear enterprise: ~22,000 workers, 11,000 with measurable dose, tracked annually.</a:t>
-            </a:r>
-          </a:p>
-          <a:p>
-            <a:pPr>
-              <a:spcAft>
-                <a:spcPts val="600"/>
-              </a:spcAft>
+              <a:t>Sources: Siavonga Uranium Baseline Survey (2024) · U.S. DOE REMS 2024 Report</a:t>
+            </a:r>
+          </a:p>
+        </p:txBody>
+      </p:sp>
+      <p:sp>
+        <p:nvSpPr>
+          <p:cNvPr id="24" name="TextBox 23"/>
+          <p:cNvSpPr txBox="1"/>
+          <p:nvPr/>
+        </p:nvSpPr>
+        <p:spPr>
+          <a:xfrm>
+            <a:off x="10515600" y="6446520"/>
+            <a:ext cx="1463040" cy="228600"/>
+          </a:xfrm>
+          <a:prstGeom prst="rect">
+            <a:avLst/>
+          </a:prstGeom>
+          <a:noFill/>
+        </p:spPr>
+        <p:txBody>
+          <a:bodyPr wrap="square" anchor="t" lIns="0" rIns="0" tIns="0" bIns="0">
+            <a:spAutoFit/>
+          </a:bodyPr>
+          <a:lstStyle/>
+          <a:p>
+            <a:pPr algn="r">
+              <a:lnSpc>
+                <a:spcPct val="115000"/>
+              </a:lnSpc>
             </a:pPr>
             <a:r>
-              <a:rPr sz="1500">
-                <a:solidFill>
-                  <a:srgbClr val="1A1A1A"/>
+              <a:rPr sz="900" b="1" i="0">
+                <a:solidFill>
+                  <a:srgbClr val="2A3344"/>
                 </a:solidFill>
                 <a:latin typeface="Calibri"/>
               </a:rPr>
-              <a:t>•  Average individual dose: 59.12 mrem — under 2% of the 5,000 mrem federal limit.</a:t>
-            </a:r>
-          </a:p>
-          <a:p>
-            <a:pPr>
-              <a:spcAft>
-                <a:spcPts val="600"/>
-              </a:spcAft>
-            </a:pPr>
-            <a:r>
-              <a:rPr sz="1500">
-                <a:solidFill>
-                  <a:srgbClr val="1A1A1A"/>
-                </a:solidFill>
-                <a:latin typeface="Calibri"/>
-              </a:rPr>
-              <a:t>•  Workforce grew (1,133 → 1,167) with NO rise in individual exposure. Safety is scalable.</a:t>
-            </a:r>
-          </a:p>
-          <a:p>
-            <a:pPr>
-              <a:spcAft>
-                <a:spcPts val="600"/>
-              </a:spcAft>
-            </a:pPr>
-            <a:r>
-              <a:rPr sz="1500">
-                <a:solidFill>
-                  <a:srgbClr val="1A1A1A"/>
-                </a:solidFill>
-                <a:latin typeface="Calibri"/>
-              </a:rPr>
-              <a:t>•  This is industrial MASTERY — exposure rigorously measured, managed, and minimised.</a:t>
-            </a:r>
-          </a:p>
-        </p:txBody>
-      </p:sp>
-      <p:sp>
-        <p:nvSpPr>
-          <p:cNvPr id="14" name="TextBox 13"/>
-          <p:cNvSpPr txBox="1"/>
-          <p:nvPr/>
-        </p:nvSpPr>
-        <p:spPr>
-          <a:xfrm>
-            <a:off x="457200" y="5989320"/>
-            <a:ext cx="11247120" cy="365760"/>
-          </a:xfrm>
-          <a:prstGeom prst="rect">
-            <a:avLst/>
-          </a:prstGeom>
-          <a:noFill/>
-        </p:spPr>
-        <p:txBody>
-          <a:bodyPr wrap="square" lIns="45720" rIns="45720" tIns="18288" bIns="18288">
-            <a:spAutoFit/>
-          </a:bodyPr>
-          <a:lstStyle/>
-          <a:p>
-            <a:pPr algn="ctr"/>
-            <a:r>
-              <a:rPr sz="1600" b="1">
-                <a:solidFill>
-                  <a:srgbClr val="C0392B"/>
-                </a:solidFill>
-                <a:latin typeface="Calibri"/>
-              </a:rPr>
-              <a:t>The transition Zambia must make: from FEAR to MASTERY.</a:t>
-            </a:r>
-          </a:p>
-        </p:txBody>
-      </p:sp>
-      <p:sp>
-        <p:nvSpPr>
-          <p:cNvPr id="15" name="Rectangle 14"/>
-          <p:cNvSpPr/>
-          <p:nvPr/>
-        </p:nvSpPr>
-        <p:spPr>
-          <a:xfrm>
-            <a:off x="0" y="6446520"/>
-            <a:ext cx="12191695" cy="411480"/>
-          </a:xfrm>
-          <a:prstGeom prst="rect">
-            <a:avLst/>
-          </a:prstGeom>
-          <a:solidFill>
-            <a:srgbClr val="0B2E4F"/>
-          </a:solidFill>
-          <a:ln>
-            <a:noFill/>
-          </a:ln>
-          <a:effectLst/>
-        </p:spPr>
-        <p:style>
-          <a:lnRef idx="1">
-            <a:schemeClr val="accent1"/>
-          </a:lnRef>
-          <a:fillRef idx="3">
-            <a:schemeClr val="accent1"/>
-          </a:fillRef>
-          <a:effectRef idx="2">
-            <a:schemeClr val="accent1"/>
-          </a:effectRef>
-          <a:fontRef idx="minor">
-            <a:schemeClr val="lt1"/>
-          </a:fontRef>
-        </p:style>
-        <p:txBody>
-          <a:bodyPr rtlCol="0" anchor="ctr"/>
-          <a:lstStyle/>
-          <a:p>
-            <a:pPr algn="ctr"/>
-          </a:p>
-        </p:txBody>
-      </p:sp>
-      <p:sp>
-        <p:nvSpPr>
-          <p:cNvPr id="16" name="TextBox 15"/>
-          <p:cNvSpPr txBox="1"/>
-          <p:nvPr/>
-        </p:nvSpPr>
-        <p:spPr>
-          <a:xfrm>
-            <a:off x="365760" y="6492240"/>
-            <a:ext cx="10515600" cy="365760"/>
-          </a:xfrm>
-          <a:prstGeom prst="rect">
-            <a:avLst/>
-          </a:prstGeom>
-          <a:noFill/>
-        </p:spPr>
-        <p:txBody>
-          <a:bodyPr wrap="square" lIns="45720" rIns="45720" tIns="18288" bIns="18288">
-            <a:spAutoFit/>
-          </a:bodyPr>
-          <a:lstStyle/>
-          <a:p>
-            <a:pPr algn="l"/>
-            <a:r>
-              <a:rPr sz="900" b="0">
-                <a:solidFill>
-                  <a:srgbClr val="FFFFFF"/>
-                </a:solidFill>
-                <a:latin typeface="Calibri"/>
-              </a:rPr>
-              <a:t>Sources: Siavonga Uranium Baseline Survey (2024) | U.S. DOE REMS 2024 Report</a:t>
-            </a:r>
-          </a:p>
-        </p:txBody>
-      </p:sp>
-      <p:sp>
-        <p:nvSpPr>
-          <p:cNvPr id="17" name="TextBox 16"/>
-          <p:cNvSpPr txBox="1"/>
-          <p:nvPr/>
-        </p:nvSpPr>
-        <p:spPr>
-          <a:xfrm>
-            <a:off x="11247120" y="6492240"/>
-            <a:ext cx="822960" cy="365760"/>
-          </a:xfrm>
-          <a:prstGeom prst="rect">
-            <a:avLst/>
-          </a:prstGeom>
-          <a:noFill/>
-        </p:spPr>
-        <p:txBody>
-          <a:bodyPr wrap="square" lIns="45720" rIns="45720" tIns="18288" bIns="18288">
-            <a:spAutoFit/>
-          </a:bodyPr>
-          <a:lstStyle/>
-          <a:p>
-            <a:pPr algn="r"/>
-            <a:r>
-              <a:rPr sz="1000" b="1">
-                <a:solidFill>
-                  <a:srgbClr val="B86B2A"/>
-                </a:solidFill>
-                <a:latin typeface="Calibri"/>
-              </a:rPr>
-              <a:t>2 / 5</a:t>
+              <a:t>2 / 5  ·  E. Mwaba</a:t>
             </a:r>
           </a:p>
         </p:txBody>
@@ -4900,7 +5135,7 @@
     <p:bg>
       <p:bgPr>
         <a:solidFill>
-          <a:srgbClr val="FFFFFF"/>
+          <a:srgbClr val="F7F5F0"/>
         </a:solidFill>
         <a:effectLst/>
       </p:bgPr>
@@ -4914,20 +5149,172 @@
       <p:grpSpPr/>
       <p:sp>
         <p:nvSpPr>
-          <p:cNvPr id="2" name="Rectangle 1"/>
+          <p:cNvPr id="2" name="TextBox 1"/>
+          <p:cNvSpPr txBox="1"/>
+          <p:nvPr/>
+        </p:nvSpPr>
+        <p:spPr>
+          <a:xfrm>
+            <a:off x="548640" y="411480"/>
+            <a:ext cx="7315200" cy="274320"/>
+          </a:xfrm>
+          <a:prstGeom prst="rect">
+            <a:avLst/>
+          </a:prstGeom>
+          <a:noFill/>
+        </p:spPr>
+        <p:txBody>
+          <a:bodyPr wrap="square" anchor="t" lIns="0" rIns="0" tIns="0" bIns="0">
+            <a:spAutoFit/>
+          </a:bodyPr>
+          <a:lstStyle/>
+          <a:p>
+            <a:pPr algn="l">
+              <a:lnSpc>
+                <a:spcPct val="115000"/>
+              </a:lnSpc>
+            </a:pPr>
+            <a:r>
+              <a:rPr sz="1100" b="1" i="0">
+                <a:solidFill>
+                  <a:srgbClr val="CC7A2E"/>
+                </a:solidFill>
+                <a:latin typeface="Calibri"/>
+              </a:rPr>
+              <a:t>02  ·  THE EVIDENCE</a:t>
+            </a:r>
+          </a:p>
+        </p:txBody>
+      </p:sp>
+      <p:sp>
+        <p:nvSpPr>
+          <p:cNvPr id="3" name="TextBox 2"/>
+          <p:cNvSpPr txBox="1"/>
+          <p:nvPr/>
+        </p:nvSpPr>
+        <p:spPr>
+          <a:xfrm>
+            <a:off x="548640" y="685800"/>
+            <a:ext cx="11064240" cy="640080"/>
+          </a:xfrm>
+          <a:prstGeom prst="rect">
+            <a:avLst/>
+          </a:prstGeom>
+          <a:noFill/>
+        </p:spPr>
+        <p:txBody>
+          <a:bodyPr wrap="square" anchor="t" lIns="0" rIns="0" tIns="0" bIns="0">
+            <a:spAutoFit/>
+          </a:bodyPr>
+          <a:lstStyle/>
+          <a:p>
+            <a:pPr algn="l">
+              <a:lnSpc>
+                <a:spcPct val="115000"/>
+              </a:lnSpc>
+            </a:pPr>
+            <a:r>
+              <a:rPr sz="3000" b="1" i="0">
+                <a:solidFill>
+                  <a:srgbClr val="0A1F3D"/>
+                </a:solidFill>
+                <a:latin typeface="Calibri"/>
+              </a:rPr>
+              <a:t>Nuclear safety is not theory. It's a track record.</a:t>
+            </a:r>
+          </a:p>
+        </p:txBody>
+      </p:sp>
+      <p:cxnSp>
+        <p:nvCxnSpPr>
+          <p:cNvPr id="4" name="Connector 3"/>
+          <p:cNvCxnSpPr/>
+          <p:nvPr/>
+        </p:nvCxnSpPr>
+        <p:spPr>
+          <a:xfrm>
+            <a:off x="548640" y="1325880"/>
+            <a:ext cx="1097280" cy="0"/>
+          </a:xfrm>
+          <a:prstGeom prst="line">
+            <a:avLst/>
+          </a:prstGeom>
+          <a:ln w="19050">
+            <a:solidFill>
+              <a:srgbClr val="CC7A2E"/>
+            </a:solidFill>
+          </a:ln>
+        </p:spPr>
+        <p:style>
+          <a:lnRef idx="2">
+            <a:schemeClr val="accent1"/>
+          </a:lnRef>
+          <a:fillRef idx="0">
+            <a:schemeClr val="accent1"/>
+          </a:fillRef>
+          <a:effectRef idx="1">
+            <a:schemeClr val="accent1"/>
+          </a:effectRef>
+          <a:fontRef idx="minor">
+            <a:schemeClr val="tx1"/>
+          </a:fontRef>
+        </p:style>
+      </p:cxnSp>
+      <p:sp>
+        <p:nvSpPr>
+          <p:cNvPr id="5" name="TextBox 4"/>
+          <p:cNvSpPr txBox="1"/>
+          <p:nvPr/>
+        </p:nvSpPr>
+        <p:spPr>
+          <a:xfrm>
+            <a:off x="548640" y="1417320"/>
+            <a:ext cx="11064240" cy="457200"/>
+          </a:xfrm>
+          <a:prstGeom prst="rect">
+            <a:avLst/>
+          </a:prstGeom>
+          <a:noFill/>
+        </p:spPr>
+        <p:txBody>
+          <a:bodyPr wrap="square" anchor="t" lIns="0" rIns="0" tIns="0" bIns="0">
+            <a:spAutoFit/>
+          </a:bodyPr>
+          <a:lstStyle/>
+          <a:p>
+            <a:pPr algn="l">
+              <a:lnSpc>
+                <a:spcPct val="115000"/>
+              </a:lnSpc>
+            </a:pPr>
+            <a:r>
+              <a:rPr sz="1400" b="0" i="1">
+                <a:solidFill>
+                  <a:srgbClr val="6B7280"/>
+                </a:solidFill>
+                <a:latin typeface="Calibri"/>
+              </a:rPr>
+              <a:t>A decade of U.S. data (2014-2024) — and a regulatory playbook Zambia is already following.</a:t>
+            </a:r>
+          </a:p>
+        </p:txBody>
+      </p:sp>
+      <p:sp>
+        <p:nvSpPr>
+          <p:cNvPr id="6" name="Rectangle 5"/>
           <p:cNvSpPr/>
           <p:nvPr/>
         </p:nvSpPr>
         <p:spPr>
           <a:xfrm>
-            <a:off x="0" y="0"/>
-            <a:ext cx="12191695" cy="960120"/>
+            <a:off x="548640" y="2148840"/>
+            <a:ext cx="6766560" cy="2651760"/>
           </a:xfrm>
           <a:prstGeom prst="rect">
             <a:avLst/>
           </a:prstGeom>
           <a:solidFill>
-            <a:srgbClr val="0B2E4F"/>
+            <a:srgbClr val="0A1F3D"/>
           </a:solidFill>
           <a:ln>
             <a:noFill/>
@@ -4958,20 +5345,20 @@
       </p:sp>
       <p:sp>
         <p:nvSpPr>
-          <p:cNvPr id="3" name="Rectangle 2"/>
+          <p:cNvPr id="7" name="Rectangle 6"/>
           <p:cNvSpPr/>
           <p:nvPr/>
         </p:nvSpPr>
         <p:spPr>
           <a:xfrm>
-            <a:off x="0" y="960120"/>
-            <a:ext cx="12191695" cy="73152"/>
+            <a:off x="548640" y="2148840"/>
+            <a:ext cx="137160" cy="2651760"/>
           </a:xfrm>
           <a:prstGeom prst="rect">
             <a:avLst/>
           </a:prstGeom>
           <a:solidFill>
-            <a:srgbClr val="B86B2A"/>
+            <a:srgbClr val="CC7A2E"/>
           </a:solidFill>
           <a:ln>
             <a:noFill/>
@@ -5002,14 +5389,14 @@
       </p:sp>
       <p:sp>
         <p:nvSpPr>
-          <p:cNvPr id="4" name="TextBox 3"/>
+          <p:cNvPr id="8" name="TextBox 7"/>
           <p:cNvSpPr txBox="1"/>
           <p:nvPr/>
         </p:nvSpPr>
         <p:spPr>
           <a:xfrm>
-            <a:off x="457200" y="164592"/>
-            <a:ext cx="11430000" cy="548640"/>
+            <a:off x="868680" y="2286000"/>
+            <a:ext cx="6400800" cy="320040"/>
           </a:xfrm>
           <a:prstGeom prst="rect">
             <a:avLst/>
@@ -5017,34 +5404,38 @@
           <a:noFill/>
         </p:spPr>
         <p:txBody>
-          <a:bodyPr wrap="square" lIns="45720" rIns="45720" tIns="18288" bIns="18288">
+          <a:bodyPr wrap="square" anchor="t" lIns="0" rIns="0" tIns="0" bIns="0">
             <a:spAutoFit/>
           </a:bodyPr>
           <a:lstStyle/>
           <a:p>
-            <a:pPr algn="l"/>
-            <a:r>
-              <a:rPr sz="2800" b="1">
-                <a:solidFill>
-                  <a:srgbClr val="FFFFFF"/>
+            <a:pPr algn="l">
+              <a:lnSpc>
+                <a:spcPct val="115000"/>
+              </a:lnSpc>
+            </a:pPr>
+            <a:r>
+              <a:rPr sz="1200" b="1" i="0">
+                <a:solidFill>
+                  <a:srgbClr val="E8A860"/>
                 </a:solidFill>
                 <a:latin typeface="Calibri"/>
               </a:rPr>
-              <a:t>Safety Evidence: 59.12 mrem Proves Mastery</a:t>
-            </a:r>
-          </a:p>
-        </p:txBody>
-      </p:sp>
-      <p:sp>
-        <p:nvSpPr>
-          <p:cNvPr id="5" name="TextBox 4"/>
+              <a:t>AVERAGE  INDIVIDUAL  DOSE</a:t>
+            </a:r>
+          </a:p>
+        </p:txBody>
+      </p:sp>
+      <p:sp>
+        <p:nvSpPr>
+          <p:cNvPr id="9" name="TextBox 8"/>
           <p:cNvSpPr txBox="1"/>
           <p:nvPr/>
         </p:nvSpPr>
         <p:spPr>
           <a:xfrm>
-            <a:off x="457200" y="594360"/>
-            <a:ext cx="11430000" cy="320040"/>
+            <a:off x="868680" y="2697480"/>
+            <a:ext cx="6400800" cy="1737360"/>
           </a:xfrm>
           <a:prstGeom prst="rect">
             <a:avLst/>
@@ -5052,40 +5443,175 @@
           <a:noFill/>
         </p:spPr>
         <p:txBody>
-          <a:bodyPr wrap="square" lIns="45720" rIns="45720" tIns="18288" bIns="18288">
+          <a:bodyPr wrap="square" anchor="t" lIns="0" rIns="0" tIns="0" bIns="0">
             <a:spAutoFit/>
           </a:bodyPr>
           <a:lstStyle/>
           <a:p>
-            <a:pPr algn="l"/>
-            <a:r>
-              <a:rPr sz="1400" b="0">
-                <a:solidFill>
-                  <a:srgbClr val="CFD8E3"/>
+            <a:pPr algn="l">
+              <a:lnSpc>
+                <a:spcPct val="100000"/>
+              </a:lnSpc>
+            </a:pPr>
+            <a:r>
+              <a:rPr sz="11000" b="1" i="0">
+                <a:solidFill>
+                  <a:srgbClr val="FFFFFF"/>
                 </a:solidFill>
                 <a:latin typeface="Calibri"/>
               </a:rPr>
-              <a:t>A decade of data (2014-2024) vs. the IAEA benchmark</a:t>
-            </a:r>
-          </a:p>
-        </p:txBody>
-      </p:sp>
-      <p:sp>
-        <p:nvSpPr>
-          <p:cNvPr id="6" name="Rectangle 5"/>
+              <a:t>59.12</a:t>
+            </a:r>
+            <a:r>
+              <a:rPr sz="2800" b="0" i="0">
+                <a:solidFill>
+                  <a:srgbClr val="E8A860"/>
+                </a:solidFill>
+                <a:latin typeface="Calibri"/>
+              </a:rPr>
+              <a:t>  mrem</a:t>
+            </a:r>
+          </a:p>
+        </p:txBody>
+      </p:sp>
+      <p:sp>
+        <p:nvSpPr>
+          <p:cNvPr id="10" name="TextBox 9"/>
+          <p:cNvSpPr txBox="1"/>
+          <p:nvPr/>
+        </p:nvSpPr>
+        <p:spPr>
+          <a:xfrm>
+            <a:off x="868680" y="4160520"/>
+            <a:ext cx="6400800" cy="365760"/>
+          </a:xfrm>
+          <a:prstGeom prst="rect">
+            <a:avLst/>
+          </a:prstGeom>
+          <a:noFill/>
+        </p:spPr>
+        <p:txBody>
+          <a:bodyPr wrap="square" anchor="t" lIns="0" rIns="0" tIns="0" bIns="0">
+            <a:spAutoFit/>
+          </a:bodyPr>
+          <a:lstStyle/>
+          <a:p>
+            <a:pPr algn="l">
+              <a:lnSpc>
+                <a:spcPct val="115000"/>
+              </a:lnSpc>
+            </a:pPr>
+            <a:r>
+              <a:rPr sz="1200" b="0" i="0">
+                <a:solidFill>
+                  <a:srgbClr val="CFD8E3"/>
+                </a:solidFill>
+                <a:latin typeface="Calibri"/>
+              </a:rPr>
+              <a:t>per technician  ·  per year  ·  10-year mean</a:t>
+            </a:r>
+          </a:p>
+        </p:txBody>
+      </p:sp>
+      <p:cxnSp>
+        <p:nvCxnSpPr>
+          <p:cNvPr id="11" name="Connector 10"/>
+          <p:cNvCxnSpPr/>
+          <p:nvPr/>
+        </p:nvCxnSpPr>
+        <p:spPr>
+          <a:xfrm>
+            <a:off x="868680" y="4526280"/>
+            <a:ext cx="6400800" cy="0"/>
+          </a:xfrm>
+          <a:prstGeom prst="line">
+            <a:avLst/>
+          </a:prstGeom>
+          <a:ln w="9525">
+            <a:solidFill>
+              <a:srgbClr val="334466"/>
+            </a:solidFill>
+          </a:ln>
+        </p:spPr>
+        <p:style>
+          <a:lnRef idx="2">
+            <a:schemeClr val="accent1"/>
+          </a:lnRef>
+          <a:fillRef idx="0">
+            <a:schemeClr val="accent1"/>
+          </a:fillRef>
+          <a:effectRef idx="1">
+            <a:schemeClr val="accent1"/>
+          </a:effectRef>
+          <a:fontRef idx="minor">
+            <a:schemeClr val="tx1"/>
+          </a:fontRef>
+        </p:style>
+      </p:cxnSp>
+      <p:sp>
+        <p:nvSpPr>
+          <p:cNvPr id="12" name="TextBox 11"/>
+          <p:cNvSpPr txBox="1"/>
+          <p:nvPr/>
+        </p:nvSpPr>
+        <p:spPr>
+          <a:xfrm>
+            <a:off x="868680" y="4572000"/>
+            <a:ext cx="6400800" cy="365760"/>
+          </a:xfrm>
+          <a:prstGeom prst="rect">
+            <a:avLst/>
+          </a:prstGeom>
+          <a:noFill/>
+        </p:spPr>
+        <p:txBody>
+          <a:bodyPr wrap="square" anchor="t" lIns="0" rIns="0" tIns="0" bIns="0">
+            <a:spAutoFit/>
+          </a:bodyPr>
+          <a:lstStyle/>
+          <a:p>
+            <a:pPr algn="l">
+              <a:lnSpc>
+                <a:spcPct val="115000"/>
+              </a:lnSpc>
+            </a:pPr>
+            <a:r>
+              <a:rPr sz="1800" b="1" i="0">
+                <a:solidFill>
+                  <a:srgbClr val="E8A860"/>
+                </a:solidFill>
+                <a:latin typeface="Calibri"/>
+              </a:rPr>
+              <a:t>&lt; 2%</a:t>
+            </a:r>
+            <a:r>
+              <a:rPr sz="1300" b="0" i="0">
+                <a:solidFill>
+                  <a:srgbClr val="FFFFFF"/>
+                </a:solidFill>
+                <a:latin typeface="Calibri"/>
+              </a:rPr>
+              <a:t>  of the 5,000 mrem federal occupational limit</a:t>
+            </a:r>
+          </a:p>
+        </p:txBody>
+      </p:sp>
+      <p:sp>
+        <p:nvSpPr>
+          <p:cNvPr id="13" name="Rectangle 12"/>
           <p:cNvSpPr/>
           <p:nvPr/>
         </p:nvSpPr>
         <p:spPr>
           <a:xfrm>
-            <a:off x="457200" y="1371600"/>
-            <a:ext cx="3840480" cy="2286000"/>
+            <a:off x="7543800" y="2148840"/>
+            <a:ext cx="4160520" cy="841248"/>
           </a:xfrm>
           <a:prstGeom prst="rect">
             <a:avLst/>
           </a:prstGeom>
           <a:solidFill>
-            <a:srgbClr val="0B2E4F"/>
+            <a:srgbClr val="FFFFFF"/>
           </a:solidFill>
           <a:ln>
             <a:noFill/>
@@ -5116,125 +5642,20 @@
       </p:sp>
       <p:sp>
         <p:nvSpPr>
-          <p:cNvPr id="7" name="TextBox 6"/>
-          <p:cNvSpPr txBox="1"/>
-          <p:nvPr/>
-        </p:nvSpPr>
-        <p:spPr>
-          <a:xfrm>
-            <a:off x="457200" y="1417320"/>
-            <a:ext cx="3840480" cy="457200"/>
-          </a:xfrm>
-          <a:prstGeom prst="rect">
-            <a:avLst/>
-          </a:prstGeom>
-          <a:noFill/>
-        </p:spPr>
-        <p:txBody>
-          <a:bodyPr wrap="square" lIns="45720" rIns="45720" tIns="18288" bIns="18288">
-            <a:spAutoFit/>
-          </a:bodyPr>
-          <a:lstStyle/>
-          <a:p>
-            <a:pPr algn="ctr"/>
-            <a:r>
-              <a:rPr sz="1200" b="1">
-                <a:solidFill>
-                  <a:srgbClr val="B86B2A"/>
-                </a:solidFill>
-                <a:latin typeface="Calibri"/>
-              </a:rPr>
-              <a:t>AVERAGE DOSE</a:t>
-            </a:r>
-          </a:p>
-        </p:txBody>
-      </p:sp>
-      <p:sp>
-        <p:nvSpPr>
-          <p:cNvPr id="8" name="TextBox 7"/>
-          <p:cNvSpPr txBox="1"/>
-          <p:nvPr/>
-        </p:nvSpPr>
-        <p:spPr>
-          <a:xfrm>
-            <a:off x="457200" y="1828800"/>
-            <a:ext cx="3840480" cy="1280160"/>
-          </a:xfrm>
-          <a:prstGeom prst="rect">
-            <a:avLst/>
-          </a:prstGeom>
-          <a:noFill/>
-        </p:spPr>
-        <p:txBody>
-          <a:bodyPr wrap="square" lIns="45720" rIns="45720" tIns="18288" bIns="18288">
-            <a:spAutoFit/>
-          </a:bodyPr>
-          <a:lstStyle/>
-          <a:p>
-            <a:pPr algn="ctr"/>
-            <a:r>
-              <a:rPr sz="7200" b="1">
-                <a:solidFill>
-                  <a:srgbClr val="FFFFFF"/>
-                </a:solidFill>
-                <a:latin typeface="Calibri"/>
-              </a:rPr>
-              <a:t>59.12</a:t>
-            </a:r>
-          </a:p>
-        </p:txBody>
-      </p:sp>
-      <p:sp>
-        <p:nvSpPr>
-          <p:cNvPr id="9" name="TextBox 8"/>
-          <p:cNvSpPr txBox="1"/>
-          <p:nvPr/>
-        </p:nvSpPr>
-        <p:spPr>
-          <a:xfrm>
-            <a:off x="457200" y="2971800"/>
-            <a:ext cx="3840480" cy="548640"/>
-          </a:xfrm>
-          <a:prstGeom prst="rect">
-            <a:avLst/>
-          </a:prstGeom>
-          <a:noFill/>
-        </p:spPr>
-        <p:txBody>
-          <a:bodyPr wrap="square" lIns="45720" rIns="45720" tIns="18288" bIns="18288">
-            <a:spAutoFit/>
-          </a:bodyPr>
-          <a:lstStyle/>
-          <a:p>
-            <a:pPr algn="ctr"/>
-            <a:r>
-              <a:rPr sz="1400" b="0">
-                <a:solidFill>
-                  <a:srgbClr val="FFFFFF"/>
-                </a:solidFill>
-                <a:latin typeface="Calibri"/>
-              </a:rPr>
-              <a:t>mrem / technician / year</a:t>
-            </a:r>
-          </a:p>
-        </p:txBody>
-      </p:sp>
-      <p:sp>
-        <p:nvSpPr>
-          <p:cNvPr id="10" name="Rectangle 9"/>
+          <p:cNvPr id="14" name="Rectangle 13"/>
           <p:cNvSpPr/>
           <p:nvPr/>
         </p:nvSpPr>
         <p:spPr>
           <a:xfrm>
-            <a:off x="4572000" y="1371600"/>
-            <a:ext cx="3840480" cy="2286000"/>
+            <a:off x="7543800" y="2148840"/>
+            <a:ext cx="91440" cy="841248"/>
           </a:xfrm>
           <a:prstGeom prst="rect">
             <a:avLst/>
           </a:prstGeom>
           <a:solidFill>
-            <a:srgbClr val="B86B2A"/>
+            <a:srgbClr val="CC7A2E"/>
           </a:solidFill>
           <a:ln>
             <a:noFill/>
@@ -5265,14 +5686,14 @@
       </p:sp>
       <p:sp>
         <p:nvSpPr>
-          <p:cNvPr id="11" name="TextBox 10"/>
+          <p:cNvPr id="15" name="TextBox 14"/>
           <p:cNvSpPr txBox="1"/>
           <p:nvPr/>
         </p:nvSpPr>
         <p:spPr>
           <a:xfrm>
-            <a:off x="4572000" y="1417320"/>
-            <a:ext cx="3840480" cy="457200"/>
+            <a:off x="7772400" y="2221992"/>
+            <a:ext cx="3886200" cy="274320"/>
           </a:xfrm>
           <a:prstGeom prst="rect">
             <a:avLst/>
@@ -5280,34 +5701,38 @@
           <a:noFill/>
         </p:spPr>
         <p:txBody>
-          <a:bodyPr wrap="square" lIns="45720" rIns="45720" tIns="18288" bIns="18288">
+          <a:bodyPr wrap="square" anchor="t" lIns="0" rIns="0" tIns="0" bIns="0">
             <a:spAutoFit/>
           </a:bodyPr>
           <a:lstStyle/>
           <a:p>
-            <a:pPr algn="ctr"/>
-            <a:r>
-              <a:rPr sz="1200" b="1">
-                <a:solidFill>
-                  <a:srgbClr val="0B2E4F"/>
+            <a:pPr algn="l">
+              <a:lnSpc>
+                <a:spcPct val="115000"/>
+              </a:lnSpc>
+            </a:pPr>
+            <a:r>
+              <a:rPr sz="1100" b="1" i="0">
+                <a:solidFill>
+                  <a:srgbClr val="0A1F3D"/>
                 </a:solidFill>
                 <a:latin typeface="Calibri"/>
               </a:rPr>
-              <a:t>FEDERAL LIMIT</a:t>
-            </a:r>
-          </a:p>
-        </p:txBody>
-      </p:sp>
-      <p:sp>
-        <p:nvSpPr>
-          <p:cNvPr id="12" name="TextBox 11"/>
+              <a:t>SCALABLE</a:t>
+            </a:r>
+          </a:p>
+        </p:txBody>
+      </p:sp>
+      <p:sp>
+        <p:nvSpPr>
+          <p:cNvPr id="16" name="TextBox 15"/>
           <p:cNvSpPr txBox="1"/>
           <p:nvPr/>
         </p:nvSpPr>
         <p:spPr>
           <a:xfrm>
-            <a:off x="4572000" y="1828800"/>
-            <a:ext cx="3840480" cy="1280160"/>
+            <a:off x="7772400" y="2478024"/>
+            <a:ext cx="3886200" cy="502920"/>
           </a:xfrm>
           <a:prstGeom prst="rect">
             <a:avLst/>
@@ -5315,75 +5740,44 @@
           <a:noFill/>
         </p:spPr>
         <p:txBody>
-          <a:bodyPr wrap="square" lIns="45720" rIns="45720" tIns="18288" bIns="18288">
+          <a:bodyPr wrap="square" anchor="t" lIns="0" rIns="0" tIns="0" bIns="0">
             <a:spAutoFit/>
           </a:bodyPr>
           <a:lstStyle/>
           <a:p>
-            <a:pPr algn="ctr"/>
-            <a:r>
-              <a:rPr sz="7200" b="1">
-                <a:solidFill>
-                  <a:srgbClr val="FFFFFF"/>
+            <a:pPr algn="l">
+              <a:lnSpc>
+                <a:spcPct val="120000"/>
+              </a:lnSpc>
+            </a:pPr>
+            <a:r>
+              <a:rPr sz="1200" b="0" i="0">
+                <a:solidFill>
+                  <a:srgbClr val="121824"/>
                 </a:solidFill>
                 <a:latin typeface="Calibri"/>
               </a:rPr>
-              <a:t>5,000</a:t>
-            </a:r>
-          </a:p>
-        </p:txBody>
-      </p:sp>
-      <p:sp>
-        <p:nvSpPr>
-          <p:cNvPr id="13" name="TextBox 12"/>
-          <p:cNvSpPr txBox="1"/>
-          <p:nvPr/>
-        </p:nvSpPr>
-        <p:spPr>
-          <a:xfrm>
-            <a:off x="4572000" y="2971800"/>
-            <a:ext cx="3840480" cy="548640"/>
-          </a:xfrm>
-          <a:prstGeom prst="rect">
-            <a:avLst/>
-          </a:prstGeom>
-          <a:noFill/>
-        </p:spPr>
-        <p:txBody>
-          <a:bodyPr wrap="square" lIns="45720" rIns="45720" tIns="18288" bIns="18288">
-            <a:spAutoFit/>
-          </a:bodyPr>
-          <a:lstStyle/>
-          <a:p>
-            <a:pPr algn="ctr"/>
-            <a:r>
-              <a:rPr sz="1400" b="0">
-                <a:solidFill>
-                  <a:srgbClr val="FFFFFF"/>
-                </a:solidFill>
-                <a:latin typeface="Calibri"/>
-              </a:rPr>
-              <a:t>mrem occupational ceiling</a:t>
-            </a:r>
-          </a:p>
-        </p:txBody>
-      </p:sp>
-      <p:sp>
-        <p:nvSpPr>
-          <p:cNvPr id="14" name="Rectangle 13"/>
+              <a:t>Workforce grew 1,133 → 1,167. Average dose did not move.</a:t>
+            </a:r>
+          </a:p>
+        </p:txBody>
+      </p:sp>
+      <p:sp>
+        <p:nvSpPr>
+          <p:cNvPr id="17" name="Rectangle 16"/>
           <p:cNvSpPr/>
           <p:nvPr/>
         </p:nvSpPr>
         <p:spPr>
           <a:xfrm>
-            <a:off x="8686800" y="1371600"/>
-            <a:ext cx="3017520" cy="2286000"/>
+            <a:off x="7543800" y="3054096"/>
+            <a:ext cx="4160520" cy="841248"/>
           </a:xfrm>
           <a:prstGeom prst="rect">
             <a:avLst/>
           </a:prstGeom>
           <a:solidFill>
-            <a:srgbClr val="C0392B"/>
+            <a:srgbClr val="FFFFFF"/>
           </a:solidFill>
           <a:ln>
             <a:noFill/>
@@ -5414,247 +5808,20 @@
       </p:sp>
       <p:sp>
         <p:nvSpPr>
-          <p:cNvPr id="15" name="TextBox 14"/>
-          <p:cNvSpPr txBox="1"/>
-          <p:nvPr/>
-        </p:nvSpPr>
-        <p:spPr>
-          <a:xfrm>
-            <a:off x="8686800" y="1417320"/>
-            <a:ext cx="3017520" cy="457200"/>
-          </a:xfrm>
-          <a:prstGeom prst="rect">
-            <a:avLst/>
-          </a:prstGeom>
-          <a:noFill/>
-        </p:spPr>
-        <p:txBody>
-          <a:bodyPr wrap="square" lIns="45720" rIns="45720" tIns="18288" bIns="18288">
-            <a:spAutoFit/>
-          </a:bodyPr>
-          <a:lstStyle/>
-          <a:p>
-            <a:pPr algn="ctr"/>
-            <a:r>
-              <a:rPr sz="1200" b="1">
-                <a:solidFill>
-                  <a:srgbClr val="FFFFFF"/>
-                </a:solidFill>
-                <a:latin typeface="Calibri"/>
-              </a:rPr>
-              <a:t>OF THE LIMIT</a:t>
-            </a:r>
-          </a:p>
-        </p:txBody>
-      </p:sp>
-      <p:sp>
-        <p:nvSpPr>
-          <p:cNvPr id="16" name="TextBox 15"/>
-          <p:cNvSpPr txBox="1"/>
-          <p:nvPr/>
-        </p:nvSpPr>
-        <p:spPr>
-          <a:xfrm>
-            <a:off x="8686800" y="1828800"/>
-            <a:ext cx="3017520" cy="1280160"/>
-          </a:xfrm>
-          <a:prstGeom prst="rect">
-            <a:avLst/>
-          </a:prstGeom>
-          <a:noFill/>
-        </p:spPr>
-        <p:txBody>
-          <a:bodyPr wrap="square" lIns="45720" rIns="45720" tIns="18288" bIns="18288">
-            <a:spAutoFit/>
-          </a:bodyPr>
-          <a:lstStyle/>
-          <a:p>
-            <a:pPr algn="ctr"/>
-            <a:r>
-              <a:rPr sz="7200" b="1">
-                <a:solidFill>
-                  <a:srgbClr val="FFFFFF"/>
-                </a:solidFill>
-                <a:latin typeface="Calibri"/>
-              </a:rPr>
-              <a:t>&lt; 2%</a:t>
-            </a:r>
-          </a:p>
-        </p:txBody>
-      </p:sp>
-      <p:sp>
-        <p:nvSpPr>
-          <p:cNvPr id="17" name="TextBox 16"/>
-          <p:cNvSpPr txBox="1"/>
-          <p:nvPr/>
-        </p:nvSpPr>
-        <p:spPr>
-          <a:xfrm>
-            <a:off x="8686800" y="2971800"/>
-            <a:ext cx="3017520" cy="548640"/>
-          </a:xfrm>
-          <a:prstGeom prst="rect">
-            <a:avLst/>
-          </a:prstGeom>
-          <a:noFill/>
-        </p:spPr>
-        <p:txBody>
-          <a:bodyPr wrap="square" lIns="45720" rIns="45720" tIns="18288" bIns="18288">
-            <a:spAutoFit/>
-          </a:bodyPr>
-          <a:lstStyle/>
-          <a:p>
-            <a:pPr algn="ctr"/>
-            <a:r>
-              <a:rPr sz="1400" b="0">
-                <a:solidFill>
-                  <a:srgbClr val="FFFFFF"/>
-                </a:solidFill>
-                <a:latin typeface="Calibri"/>
-              </a:rPr>
-              <a:t>industrial safety margin</a:t>
-            </a:r>
-          </a:p>
-        </p:txBody>
-      </p:sp>
-      <p:sp>
-        <p:nvSpPr>
-          <p:cNvPr id="18" name="TextBox 17"/>
-          <p:cNvSpPr txBox="1"/>
-          <p:nvPr/>
-        </p:nvSpPr>
-        <p:spPr>
-          <a:xfrm>
-            <a:off x="457200" y="3840480"/>
-            <a:ext cx="11247120" cy="411480"/>
-          </a:xfrm>
-          <a:prstGeom prst="rect">
-            <a:avLst/>
-          </a:prstGeom>
-          <a:noFill/>
-        </p:spPr>
-        <p:txBody>
-          <a:bodyPr wrap="square" lIns="45720" rIns="45720" tIns="18288" bIns="18288">
-            <a:spAutoFit/>
-          </a:bodyPr>
-          <a:lstStyle/>
-          <a:p>
-            <a:pPr algn="l"/>
-            <a:r>
-              <a:rPr sz="1800" b="1">
-                <a:solidFill>
-                  <a:srgbClr val="0B2E4F"/>
-                </a:solidFill>
-                <a:latin typeface="Calibri"/>
-              </a:rPr>
-              <a:t>What the data proves — and why Zambia can replicate it:</a:t>
-            </a:r>
-          </a:p>
-        </p:txBody>
-      </p:sp>
-      <p:sp>
-        <p:nvSpPr>
-          <p:cNvPr id="19" name="TextBox 18"/>
-          <p:cNvSpPr txBox="1"/>
-          <p:nvPr/>
-        </p:nvSpPr>
-        <p:spPr>
-          <a:xfrm>
-            <a:off x="640080" y="4297680"/>
-            <a:ext cx="10972800" cy="2011680"/>
-          </a:xfrm>
-          <a:prstGeom prst="rect">
-            <a:avLst/>
-          </a:prstGeom>
-          <a:noFill/>
-        </p:spPr>
-        <p:txBody>
-          <a:bodyPr wrap="square">
-            <a:spAutoFit/>
-          </a:bodyPr>
-          <a:lstStyle/>
-          <a:p>
-            <a:pPr>
-              <a:spcAft>
-                <a:spcPts val="600"/>
-              </a:spcAft>
-            </a:pPr>
-            <a:r>
-              <a:rPr sz="1400">
-                <a:solidFill>
-                  <a:srgbClr val="1A1A1A"/>
-                </a:solidFill>
-                <a:latin typeface="Calibri"/>
-              </a:rPr>
-              <a:t>•  Scalability: workforce grew from 1,133 to 1,167 (2021-2024); average dose stayed flat. Safety infrastructure scales.</a:t>
-            </a:r>
-          </a:p>
-          <a:p>
-            <a:pPr>
-              <a:spcAft>
-                <a:spcPts val="600"/>
-              </a:spcAft>
-            </a:pPr>
-            <a:r>
-              <a:rPr sz="1400">
-                <a:solidFill>
-                  <a:srgbClr val="1A1A1A"/>
-                </a:solidFill>
-                <a:latin typeface="Calibri"/>
-              </a:rPr>
-              <a:t>•  Containment of risk: 98% of exposure is external (managed by shielding); only 2% internal — validates respiratory and clean-room protocols.</a:t>
-            </a:r>
-          </a:p>
-          <a:p>
-            <a:pPr>
-              <a:spcAft>
-                <a:spcPts val="600"/>
-              </a:spcAft>
-            </a:pPr>
-            <a:r>
-              <a:rPr sz="1400">
-                <a:solidFill>
-                  <a:srgbClr val="1A1A1A"/>
-                </a:solidFill>
-                <a:latin typeface="Calibri"/>
-              </a:rPr>
-              <a:t>•  Targeted oversight: hot zones (Savannah River, Albuquerque) are identified and mitigated, not hidden.</a:t>
-            </a:r>
-          </a:p>
-          <a:p>
-            <a:pPr>
-              <a:spcAft>
-                <a:spcPts val="600"/>
-              </a:spcAft>
-            </a:pPr>
-            <a:r>
-              <a:rPr sz="1400">
-                <a:solidFill>
-                  <a:srgbClr val="1A1A1A"/>
-                </a:solidFill>
-                <a:latin typeface="Calibri"/>
-              </a:rPr>
-              <a:t>•  Alignment: IAEA Milestone Approach provides the same regulatory roadmap Zambia is already following through the Radiation Protection Authority (RPA → NSPA).</a:t>
-            </a:r>
-          </a:p>
-        </p:txBody>
-      </p:sp>
-      <p:sp>
-        <p:nvSpPr>
-          <p:cNvPr id="20" name="Rectangle 19"/>
+          <p:cNvPr id="18" name="Rectangle 17"/>
           <p:cNvSpPr/>
           <p:nvPr/>
         </p:nvSpPr>
         <p:spPr>
           <a:xfrm>
-            <a:off x="0" y="6446520"/>
-            <a:ext cx="12191695" cy="411480"/>
+            <a:off x="7543800" y="3054096"/>
+            <a:ext cx="91440" cy="841248"/>
           </a:xfrm>
           <a:prstGeom prst="rect">
             <a:avLst/>
           </a:prstGeom>
           <a:solidFill>
-            <a:srgbClr val="0B2E4F"/>
+            <a:srgbClr val="CC7A2E"/>
           </a:solidFill>
           <a:ln>
             <a:noFill/>
@@ -5685,14 +5852,14 @@
       </p:sp>
       <p:sp>
         <p:nvSpPr>
-          <p:cNvPr id="21" name="TextBox 20"/>
+          <p:cNvPr id="19" name="TextBox 18"/>
           <p:cNvSpPr txBox="1"/>
           <p:nvPr/>
         </p:nvSpPr>
         <p:spPr>
           <a:xfrm>
-            <a:off x="365760" y="6492240"/>
-            <a:ext cx="10515600" cy="365760"/>
+            <a:off x="7772400" y="3127248"/>
+            <a:ext cx="3886200" cy="274320"/>
           </a:xfrm>
           <a:prstGeom prst="rect">
             <a:avLst/>
@@ -5700,34 +5867,38 @@
           <a:noFill/>
         </p:spPr>
         <p:txBody>
-          <a:bodyPr wrap="square" lIns="45720" rIns="45720" tIns="18288" bIns="18288">
+          <a:bodyPr wrap="square" anchor="t" lIns="0" rIns="0" tIns="0" bIns="0">
             <a:spAutoFit/>
           </a:bodyPr>
           <a:lstStyle/>
           <a:p>
-            <a:pPr algn="l"/>
-            <a:r>
-              <a:rPr sz="900" b="0">
-                <a:solidFill>
-                  <a:srgbClr val="FFFFFF"/>
+            <a:pPr algn="l">
+              <a:lnSpc>
+                <a:spcPct val="115000"/>
+              </a:lnSpc>
+            </a:pPr>
+            <a:r>
+              <a:rPr sz="1100" b="1" i="0">
+                <a:solidFill>
+                  <a:srgbClr val="0A1F3D"/>
                 </a:solidFill>
                 <a:latin typeface="Calibri"/>
               </a:rPr>
-              <a:t>Sources: U.S. DOE REMS 2024 Report | IAEA Milestone Approach for New Nuclear Programs</a:t>
-            </a:r>
-          </a:p>
-        </p:txBody>
-      </p:sp>
-      <p:sp>
-        <p:nvSpPr>
-          <p:cNvPr id="22" name="TextBox 21"/>
+              <a:t>CONTAINED</a:t>
+            </a:r>
+          </a:p>
+        </p:txBody>
+      </p:sp>
+      <p:sp>
+        <p:nvSpPr>
+          <p:cNvPr id="20" name="TextBox 19"/>
           <p:cNvSpPr txBox="1"/>
           <p:nvPr/>
         </p:nvSpPr>
         <p:spPr>
           <a:xfrm>
-            <a:off x="11247120" y="6492240"/>
-            <a:ext cx="822960" cy="365760"/>
+            <a:off x="7772400" y="3383279"/>
+            <a:ext cx="3886200" cy="502920"/>
           </a:xfrm>
           <a:prstGeom prst="rect">
             <a:avLst/>
@@ -5735,20 +5906,479 @@
           <a:noFill/>
         </p:spPr>
         <p:txBody>
-          <a:bodyPr wrap="square" lIns="45720" rIns="45720" tIns="18288" bIns="18288">
+          <a:bodyPr wrap="square" anchor="t" lIns="0" rIns="0" tIns="0" bIns="0">
             <a:spAutoFit/>
           </a:bodyPr>
           <a:lstStyle/>
           <a:p>
-            <a:pPr algn="r"/>
-            <a:r>
-              <a:rPr sz="1000" b="1">
-                <a:solidFill>
-                  <a:srgbClr val="B86B2A"/>
+            <a:pPr algn="l">
+              <a:lnSpc>
+                <a:spcPct val="120000"/>
+              </a:lnSpc>
+            </a:pPr>
+            <a:r>
+              <a:rPr sz="1200" b="0" i="0">
+                <a:solidFill>
+                  <a:srgbClr val="121824"/>
                 </a:solidFill>
                 <a:latin typeface="Calibri"/>
               </a:rPr>
-              <a:t>3 / 5</a:t>
+              <a:t>98% external radiation — managed by shielding. 2% internal — controlled by protocol.</a:t>
+            </a:r>
+          </a:p>
+        </p:txBody>
+      </p:sp>
+      <p:sp>
+        <p:nvSpPr>
+          <p:cNvPr id="21" name="Rectangle 20"/>
+          <p:cNvSpPr/>
+          <p:nvPr/>
+        </p:nvSpPr>
+        <p:spPr>
+          <a:xfrm>
+            <a:off x="7543800" y="3959352"/>
+            <a:ext cx="4160520" cy="841248"/>
+          </a:xfrm>
+          <a:prstGeom prst="rect">
+            <a:avLst/>
+          </a:prstGeom>
+          <a:solidFill>
+            <a:srgbClr val="FFFFFF"/>
+          </a:solidFill>
+          <a:ln>
+            <a:noFill/>
+          </a:ln>
+          <a:effectLst/>
+        </p:spPr>
+        <p:style>
+          <a:lnRef idx="1">
+            <a:schemeClr val="accent1"/>
+          </a:lnRef>
+          <a:fillRef idx="3">
+            <a:schemeClr val="accent1"/>
+          </a:fillRef>
+          <a:effectRef idx="2">
+            <a:schemeClr val="accent1"/>
+          </a:effectRef>
+          <a:fontRef idx="minor">
+            <a:schemeClr val="lt1"/>
+          </a:fontRef>
+        </p:style>
+        <p:txBody>
+          <a:bodyPr rtlCol="0" anchor="ctr"/>
+          <a:lstStyle/>
+          <a:p>
+            <a:pPr algn="ctr"/>
+          </a:p>
+        </p:txBody>
+      </p:sp>
+      <p:sp>
+        <p:nvSpPr>
+          <p:cNvPr id="22" name="Rectangle 21"/>
+          <p:cNvSpPr/>
+          <p:nvPr/>
+        </p:nvSpPr>
+        <p:spPr>
+          <a:xfrm>
+            <a:off x="7543800" y="3959352"/>
+            <a:ext cx="91440" cy="841248"/>
+          </a:xfrm>
+          <a:prstGeom prst="rect">
+            <a:avLst/>
+          </a:prstGeom>
+          <a:solidFill>
+            <a:srgbClr val="CC7A2E"/>
+          </a:solidFill>
+          <a:ln>
+            <a:noFill/>
+          </a:ln>
+          <a:effectLst/>
+        </p:spPr>
+        <p:style>
+          <a:lnRef idx="1">
+            <a:schemeClr val="accent1"/>
+          </a:lnRef>
+          <a:fillRef idx="3">
+            <a:schemeClr val="accent1"/>
+          </a:fillRef>
+          <a:effectRef idx="2">
+            <a:schemeClr val="accent1"/>
+          </a:effectRef>
+          <a:fontRef idx="minor">
+            <a:schemeClr val="lt1"/>
+          </a:fontRef>
+        </p:style>
+        <p:txBody>
+          <a:bodyPr rtlCol="0" anchor="ctr"/>
+          <a:lstStyle/>
+          <a:p>
+            <a:pPr algn="ctr"/>
+          </a:p>
+        </p:txBody>
+      </p:sp>
+      <p:sp>
+        <p:nvSpPr>
+          <p:cNvPr id="23" name="TextBox 22"/>
+          <p:cNvSpPr txBox="1"/>
+          <p:nvPr/>
+        </p:nvSpPr>
+        <p:spPr>
+          <a:xfrm>
+            <a:off x="7772400" y="4032504"/>
+            <a:ext cx="3886200" cy="274320"/>
+          </a:xfrm>
+          <a:prstGeom prst="rect">
+            <a:avLst/>
+          </a:prstGeom>
+          <a:noFill/>
+        </p:spPr>
+        <p:txBody>
+          <a:bodyPr wrap="square" anchor="t" lIns="0" rIns="0" tIns="0" bIns="0">
+            <a:spAutoFit/>
+          </a:bodyPr>
+          <a:lstStyle/>
+          <a:p>
+            <a:pPr algn="l">
+              <a:lnSpc>
+                <a:spcPct val="115000"/>
+              </a:lnSpc>
+            </a:pPr>
+            <a:r>
+              <a:rPr sz="1100" b="1" i="0">
+                <a:solidFill>
+                  <a:srgbClr val="0A1F3D"/>
+                </a:solidFill>
+                <a:latin typeface="Calibri"/>
+              </a:rPr>
+              <a:t>REPLICABLE</a:t>
+            </a:r>
+          </a:p>
+        </p:txBody>
+      </p:sp>
+      <p:sp>
+        <p:nvSpPr>
+          <p:cNvPr id="24" name="TextBox 23"/>
+          <p:cNvSpPr txBox="1"/>
+          <p:nvPr/>
+        </p:nvSpPr>
+        <p:spPr>
+          <a:xfrm>
+            <a:off x="7772400" y="4288536"/>
+            <a:ext cx="3886200" cy="502920"/>
+          </a:xfrm>
+          <a:prstGeom prst="rect">
+            <a:avLst/>
+          </a:prstGeom>
+          <a:noFill/>
+        </p:spPr>
+        <p:txBody>
+          <a:bodyPr wrap="square" anchor="t" lIns="0" rIns="0" tIns="0" bIns="0">
+            <a:spAutoFit/>
+          </a:bodyPr>
+          <a:lstStyle/>
+          <a:p>
+            <a:pPr algn="l">
+              <a:lnSpc>
+                <a:spcPct val="120000"/>
+              </a:lnSpc>
+            </a:pPr>
+            <a:r>
+              <a:rPr sz="1200" b="0" i="0">
+                <a:solidFill>
+                  <a:srgbClr val="121824"/>
+                </a:solidFill>
+                <a:latin typeface="Calibri"/>
+              </a:rPr>
+              <a:t>IAEA Milestone Approach. The same roadmap Zambia is on, via RPA → NSPA.</a:t>
+            </a:r>
+          </a:p>
+        </p:txBody>
+      </p:sp>
+      <p:sp>
+        <p:nvSpPr>
+          <p:cNvPr id="25" name="Rectangle 24"/>
+          <p:cNvSpPr/>
+          <p:nvPr/>
+        </p:nvSpPr>
+        <p:spPr>
+          <a:xfrm>
+            <a:off x="7543800" y="4818888"/>
+            <a:ext cx="4160520" cy="841248"/>
+          </a:xfrm>
+          <a:prstGeom prst="rect">
+            <a:avLst/>
+          </a:prstGeom>
+          <a:solidFill>
+            <a:srgbClr val="B32B2B"/>
+          </a:solidFill>
+          <a:ln>
+            <a:noFill/>
+          </a:ln>
+          <a:effectLst/>
+        </p:spPr>
+        <p:style>
+          <a:lnRef idx="1">
+            <a:schemeClr val="accent1"/>
+          </a:lnRef>
+          <a:fillRef idx="3">
+            <a:schemeClr val="accent1"/>
+          </a:fillRef>
+          <a:effectRef idx="2">
+            <a:schemeClr val="accent1"/>
+          </a:effectRef>
+          <a:fontRef idx="minor">
+            <a:schemeClr val="lt1"/>
+          </a:fontRef>
+        </p:style>
+        <p:txBody>
+          <a:bodyPr rtlCol="0" anchor="ctr"/>
+          <a:lstStyle/>
+          <a:p>
+            <a:pPr algn="ctr"/>
+          </a:p>
+        </p:txBody>
+      </p:sp>
+      <p:sp>
+        <p:nvSpPr>
+          <p:cNvPr id="26" name="TextBox 25"/>
+          <p:cNvSpPr txBox="1"/>
+          <p:nvPr/>
+        </p:nvSpPr>
+        <p:spPr>
+          <a:xfrm>
+            <a:off x="7726679" y="4956048"/>
+            <a:ext cx="3886200" cy="640080"/>
+          </a:xfrm>
+          <a:prstGeom prst="rect">
+            <a:avLst/>
+          </a:prstGeom>
+          <a:noFill/>
+        </p:spPr>
+        <p:txBody>
+          <a:bodyPr wrap="square" anchor="t" lIns="0" rIns="0" tIns="0" bIns="0">
+            <a:spAutoFit/>
+          </a:bodyPr>
+          <a:lstStyle/>
+          <a:p>
+            <a:pPr algn="l">
+              <a:lnSpc>
+                <a:spcPct val="125000"/>
+              </a:lnSpc>
+            </a:pPr>
+            <a:r>
+              <a:rPr sz="1300" b="1" i="0">
+                <a:solidFill>
+                  <a:srgbClr val="FFFFFF"/>
+                </a:solidFill>
+                <a:latin typeface="Calibri"/>
+              </a:rPr>
+              <a:t>Zambia is not starting from zero.
+Zambia is starting from competence.</a:t>
+            </a:r>
+          </a:p>
+        </p:txBody>
+      </p:sp>
+      <p:sp>
+        <p:nvSpPr>
+          <p:cNvPr id="27" name="TextBox 26"/>
+          <p:cNvSpPr txBox="1"/>
+          <p:nvPr/>
+        </p:nvSpPr>
+        <p:spPr>
+          <a:xfrm>
+            <a:off x="548640" y="5989320"/>
+            <a:ext cx="11064240" cy="365760"/>
+          </a:xfrm>
+          <a:prstGeom prst="rect">
+            <a:avLst/>
+          </a:prstGeom>
+          <a:noFill/>
+        </p:spPr>
+        <p:txBody>
+          <a:bodyPr wrap="square" anchor="t" lIns="0" rIns="0" tIns="0" bIns="0">
+            <a:spAutoFit/>
+          </a:bodyPr>
+          <a:lstStyle/>
+          <a:p>
+            <a:pPr algn="ctr">
+              <a:lnSpc>
+                <a:spcPct val="115000"/>
+              </a:lnSpc>
+            </a:pPr>
+            <a:r>
+              <a:rPr sz="1400" b="0" i="1">
+                <a:solidFill>
+                  <a:srgbClr val="2A3344"/>
+                </a:solidFill>
+                <a:latin typeface="Calibri"/>
+              </a:rPr>
+              <a:t>If the U.S. can manage 22,000 workers at &lt; 2% of limit, Zambia can manage one regulator and one reactor.</a:t>
+            </a:r>
+          </a:p>
+        </p:txBody>
+      </p:sp>
+      <p:sp>
+        <p:nvSpPr>
+          <p:cNvPr id="28" name="Rectangle 27"/>
+          <p:cNvSpPr/>
+          <p:nvPr/>
+        </p:nvSpPr>
+        <p:spPr>
+          <a:xfrm>
+            <a:off x="0" y="6675120"/>
+            <a:ext cx="12191695" cy="182880"/>
+          </a:xfrm>
+          <a:prstGeom prst="rect">
+            <a:avLst/>
+          </a:prstGeom>
+          <a:solidFill>
+            <a:srgbClr val="C8CED6"/>
+          </a:solidFill>
+          <a:ln>
+            <a:noFill/>
+          </a:ln>
+          <a:effectLst/>
+        </p:spPr>
+        <p:style>
+          <a:lnRef idx="1">
+            <a:schemeClr val="accent1"/>
+          </a:lnRef>
+          <a:fillRef idx="3">
+            <a:schemeClr val="accent1"/>
+          </a:fillRef>
+          <a:effectRef idx="2">
+            <a:schemeClr val="accent1"/>
+          </a:effectRef>
+          <a:fontRef idx="minor">
+            <a:schemeClr val="lt1"/>
+          </a:fontRef>
+        </p:style>
+        <p:txBody>
+          <a:bodyPr rtlCol="0" anchor="ctr"/>
+          <a:lstStyle/>
+          <a:p>
+            <a:pPr algn="ctr"/>
+          </a:p>
+        </p:txBody>
+      </p:sp>
+      <p:sp>
+        <p:nvSpPr>
+          <p:cNvPr id="29" name="Rectangle 28"/>
+          <p:cNvSpPr/>
+          <p:nvPr/>
+        </p:nvSpPr>
+        <p:spPr>
+          <a:xfrm>
+            <a:off x="0" y="6675120"/>
+            <a:ext cx="640080" cy="182880"/>
+          </a:xfrm>
+          <a:prstGeom prst="rect">
+            <a:avLst/>
+          </a:prstGeom>
+          <a:solidFill>
+            <a:srgbClr val="CC7A2E"/>
+          </a:solidFill>
+          <a:ln>
+            <a:noFill/>
+          </a:ln>
+          <a:effectLst/>
+        </p:spPr>
+        <p:style>
+          <a:lnRef idx="1">
+            <a:schemeClr val="accent1"/>
+          </a:lnRef>
+          <a:fillRef idx="3">
+            <a:schemeClr val="accent1"/>
+          </a:fillRef>
+          <a:effectRef idx="2">
+            <a:schemeClr val="accent1"/>
+          </a:effectRef>
+          <a:fontRef idx="minor">
+            <a:schemeClr val="lt1"/>
+          </a:fontRef>
+        </p:style>
+        <p:txBody>
+          <a:bodyPr rtlCol="0" anchor="ctr"/>
+          <a:lstStyle/>
+          <a:p>
+            <a:pPr algn="ctr"/>
+          </a:p>
+        </p:txBody>
+      </p:sp>
+      <p:sp>
+        <p:nvSpPr>
+          <p:cNvPr id="30" name="TextBox 29"/>
+          <p:cNvSpPr txBox="1"/>
+          <p:nvPr/>
+        </p:nvSpPr>
+        <p:spPr>
+          <a:xfrm>
+            <a:off x="457200" y="6446520"/>
+            <a:ext cx="9601200" cy="228600"/>
+          </a:xfrm>
+          <a:prstGeom prst="rect">
+            <a:avLst/>
+          </a:prstGeom>
+          <a:noFill/>
+        </p:spPr>
+        <p:txBody>
+          <a:bodyPr wrap="square" anchor="t" lIns="0" rIns="0" tIns="0" bIns="0">
+            <a:spAutoFit/>
+          </a:bodyPr>
+          <a:lstStyle/>
+          <a:p>
+            <a:pPr algn="l">
+              <a:lnSpc>
+                <a:spcPct val="115000"/>
+              </a:lnSpc>
+            </a:pPr>
+            <a:r>
+              <a:rPr sz="900" b="0" i="1">
+                <a:solidFill>
+                  <a:srgbClr val="6B7280"/>
+                </a:solidFill>
+                <a:latin typeface="Calibri"/>
+              </a:rPr>
+              <a:t>Sources: U.S. DOE REMS 2024 Report · IAEA Milestone Approach for New Nuclear Programs</a:t>
+            </a:r>
+          </a:p>
+        </p:txBody>
+      </p:sp>
+      <p:sp>
+        <p:nvSpPr>
+          <p:cNvPr id="31" name="TextBox 30"/>
+          <p:cNvSpPr txBox="1"/>
+          <p:nvPr/>
+        </p:nvSpPr>
+        <p:spPr>
+          <a:xfrm>
+            <a:off x="10515600" y="6446520"/>
+            <a:ext cx="1463040" cy="228600"/>
+          </a:xfrm>
+          <a:prstGeom prst="rect">
+            <a:avLst/>
+          </a:prstGeom>
+          <a:noFill/>
+        </p:spPr>
+        <p:txBody>
+          <a:bodyPr wrap="square" anchor="t" lIns="0" rIns="0" tIns="0" bIns="0">
+            <a:spAutoFit/>
+          </a:bodyPr>
+          <a:lstStyle/>
+          <a:p>
+            <a:pPr algn="r">
+              <a:lnSpc>
+                <a:spcPct val="115000"/>
+              </a:lnSpc>
+            </a:pPr>
+            <a:r>
+              <a:rPr sz="900" b="1" i="0">
+                <a:solidFill>
+                  <a:srgbClr val="2A3344"/>
+                </a:solidFill>
+                <a:latin typeface="Calibri"/>
+              </a:rPr>
+              <a:t>3 / 5  ·  E. Mwaba</a:t>
             </a:r>
           </a:p>
         </p:txBody>
@@ -5767,7 +6397,7 @@
     <p:bg>
       <p:bgPr>
         <a:solidFill>
-          <a:srgbClr val="FFFFFF"/>
+          <a:srgbClr val="F7F5F0"/>
         </a:solidFill>
         <a:effectLst/>
       </p:bgPr>
@@ -5781,20 +6411,172 @@
       <p:grpSpPr/>
       <p:sp>
         <p:nvSpPr>
-          <p:cNvPr id="2" name="Rectangle 1"/>
+          <p:cNvPr id="2" name="TextBox 1"/>
+          <p:cNvSpPr txBox="1"/>
+          <p:nvPr/>
+        </p:nvSpPr>
+        <p:spPr>
+          <a:xfrm>
+            <a:off x="548640" y="411480"/>
+            <a:ext cx="7315200" cy="274320"/>
+          </a:xfrm>
+          <a:prstGeom prst="rect">
+            <a:avLst/>
+          </a:prstGeom>
+          <a:noFill/>
+        </p:spPr>
+        <p:txBody>
+          <a:bodyPr wrap="square" anchor="t" lIns="0" rIns="0" tIns="0" bIns="0">
+            <a:spAutoFit/>
+          </a:bodyPr>
+          <a:lstStyle/>
+          <a:p>
+            <a:pPr algn="l">
+              <a:lnSpc>
+                <a:spcPct val="115000"/>
+              </a:lnSpc>
+            </a:pPr>
+            <a:r>
+              <a:rPr sz="1100" b="1" i="0">
+                <a:solidFill>
+                  <a:srgbClr val="CC7A2E"/>
+                </a:solidFill>
+                <a:latin typeface="Calibri"/>
+              </a:rPr>
+              <a:t>03  ·  THE STAKES</a:t>
+            </a:r>
+          </a:p>
+        </p:txBody>
+      </p:sp>
+      <p:sp>
+        <p:nvSpPr>
+          <p:cNvPr id="3" name="TextBox 2"/>
+          <p:cNvSpPr txBox="1"/>
+          <p:nvPr/>
+        </p:nvSpPr>
+        <p:spPr>
+          <a:xfrm>
+            <a:off x="548640" y="685800"/>
+            <a:ext cx="11064240" cy="640080"/>
+          </a:xfrm>
+          <a:prstGeom prst="rect">
+            <a:avLst/>
+          </a:prstGeom>
+          <a:noFill/>
+        </p:spPr>
+        <p:txBody>
+          <a:bodyPr wrap="square" anchor="t" lIns="0" rIns="0" tIns="0" bIns="0">
+            <a:spAutoFit/>
+          </a:bodyPr>
+          <a:lstStyle/>
+          <a:p>
+            <a:pPr algn="l">
+              <a:lnSpc>
+                <a:spcPct val="115000"/>
+              </a:lnSpc>
+            </a:pPr>
+            <a:r>
+              <a:rPr sz="2800" b="1" i="0">
+                <a:solidFill>
+                  <a:srgbClr val="0A1F3D"/>
+                </a:solidFill>
+                <a:latin typeface="Calibri"/>
+              </a:rPr>
+              <a:t>Drought is the new normal. Hydropower is the old bet.</a:t>
+            </a:r>
+          </a:p>
+        </p:txBody>
+      </p:sp>
+      <p:cxnSp>
+        <p:nvCxnSpPr>
+          <p:cNvPr id="4" name="Connector 3"/>
+          <p:cNvCxnSpPr/>
+          <p:nvPr/>
+        </p:nvCxnSpPr>
+        <p:spPr>
+          <a:xfrm>
+            <a:off x="548640" y="1325880"/>
+            <a:ext cx="1097280" cy="0"/>
+          </a:xfrm>
+          <a:prstGeom prst="line">
+            <a:avLst/>
+          </a:prstGeom>
+          <a:ln w="19050">
+            <a:solidFill>
+              <a:srgbClr val="CC7A2E"/>
+            </a:solidFill>
+          </a:ln>
+        </p:spPr>
+        <p:style>
+          <a:lnRef idx="2">
+            <a:schemeClr val="accent1"/>
+          </a:lnRef>
+          <a:fillRef idx="0">
+            <a:schemeClr val="accent1"/>
+          </a:fillRef>
+          <a:effectRef idx="1">
+            <a:schemeClr val="accent1"/>
+          </a:effectRef>
+          <a:fontRef idx="minor">
+            <a:schemeClr val="tx1"/>
+          </a:fontRef>
+        </p:style>
+      </p:cxnSp>
+      <p:sp>
+        <p:nvSpPr>
+          <p:cNvPr id="5" name="TextBox 4"/>
+          <p:cNvSpPr txBox="1"/>
+          <p:nvPr/>
+        </p:nvSpPr>
+        <p:spPr>
+          <a:xfrm>
+            <a:off x="548640" y="1417320"/>
+            <a:ext cx="11064240" cy="457200"/>
+          </a:xfrm>
+          <a:prstGeom prst="rect">
+            <a:avLst/>
+          </a:prstGeom>
+          <a:noFill/>
+        </p:spPr>
+        <p:txBody>
+          <a:bodyPr wrap="square" anchor="t" lIns="0" rIns="0" tIns="0" bIns="0">
+            <a:spAutoFit/>
+          </a:bodyPr>
+          <a:lstStyle/>
+          <a:p>
+            <a:pPr algn="l">
+              <a:lnSpc>
+                <a:spcPct val="115000"/>
+              </a:lnSpc>
+            </a:pPr>
+            <a:r>
+              <a:rPr sz="1400" b="0" i="1">
+                <a:solidFill>
+                  <a:srgbClr val="6B7280"/>
+                </a:solidFill>
+                <a:latin typeface="Calibri"/>
+              </a:rPr>
+              <a:t>Every dry year, Zambia pays in megawatts and in dollars. We keep paying.</a:t>
+            </a:r>
+          </a:p>
+        </p:txBody>
+      </p:sp>
+      <p:sp>
+        <p:nvSpPr>
+          <p:cNvPr id="6" name="Rectangle 5"/>
           <p:cNvSpPr/>
           <p:nvPr/>
         </p:nvSpPr>
         <p:spPr>
           <a:xfrm>
-            <a:off x="0" y="0"/>
-            <a:ext cx="12191695" cy="960120"/>
+            <a:off x="548640" y="2148840"/>
+            <a:ext cx="2697480" cy="1463040"/>
           </a:xfrm>
           <a:prstGeom prst="rect">
             <a:avLst/>
           </a:prstGeom>
           <a:solidFill>
-            <a:srgbClr val="0B2E4F"/>
+            <a:srgbClr val="7C1818"/>
           </a:solidFill>
           <a:ln>
             <a:noFill/>
@@ -5825,20 +6607,20 @@
       </p:sp>
       <p:sp>
         <p:nvSpPr>
-          <p:cNvPr id="3" name="Rectangle 2"/>
+          <p:cNvPr id="7" name="Rectangle 6"/>
           <p:cNvSpPr/>
           <p:nvPr/>
         </p:nvSpPr>
         <p:spPr>
           <a:xfrm>
-            <a:off x="0" y="960120"/>
-            <a:ext cx="12191695" cy="73152"/>
+            <a:off x="548640" y="2148840"/>
+            <a:ext cx="2697480" cy="91440"/>
           </a:xfrm>
           <a:prstGeom prst="rect">
             <a:avLst/>
           </a:prstGeom>
           <a:solidFill>
-            <a:srgbClr val="B86B2A"/>
+            <a:srgbClr val="B32B2B"/>
           </a:solidFill>
           <a:ln>
             <a:noFill/>
@@ -5869,14 +6651,14 @@
       </p:sp>
       <p:sp>
         <p:nvSpPr>
-          <p:cNvPr id="4" name="TextBox 3"/>
+          <p:cNvPr id="8" name="TextBox 7"/>
           <p:cNvSpPr txBox="1"/>
           <p:nvPr/>
         </p:nvSpPr>
         <p:spPr>
           <a:xfrm>
-            <a:off x="457200" y="164592"/>
-            <a:ext cx="11430000" cy="548640"/>
+            <a:off x="731520" y="2331720"/>
+            <a:ext cx="2423160" cy="640080"/>
           </a:xfrm>
           <a:prstGeom prst="rect">
             <a:avLst/>
@@ -5884,34 +6666,38 @@
           <a:noFill/>
         </p:spPr>
         <p:txBody>
-          <a:bodyPr wrap="square" lIns="45720" rIns="45720" tIns="18288" bIns="18288">
+          <a:bodyPr wrap="square" anchor="t" lIns="0" rIns="0" tIns="0" bIns="0">
             <a:spAutoFit/>
           </a:bodyPr>
           <a:lstStyle/>
           <a:p>
-            <a:pPr algn="l"/>
-            <a:r>
-              <a:rPr sz="2800" b="1">
+            <a:pPr algn="l">
+              <a:lnSpc>
+                <a:spcPct val="115000"/>
+              </a:lnSpc>
+            </a:pPr>
+            <a:r>
+              <a:rPr sz="3000" b="1" i="0">
                 <a:solidFill>
                   <a:srgbClr val="FFFFFF"/>
                 </a:solidFill>
                 <a:latin typeface="Calibri"/>
               </a:rPr>
-              <a:t>The Zambian Need: Drought-Proofing 2,000 MW</a:t>
-            </a:r>
-          </a:p>
-        </p:txBody>
-      </p:sp>
-      <p:sp>
-        <p:nvSpPr>
-          <p:cNvPr id="5" name="TextBox 4"/>
+              <a:t>84%</a:t>
+            </a:r>
+          </a:p>
+        </p:txBody>
+      </p:sp>
+      <p:sp>
+        <p:nvSpPr>
+          <p:cNvPr id="9" name="TextBox 8"/>
           <p:cNvSpPr txBox="1"/>
           <p:nvPr/>
         </p:nvSpPr>
         <p:spPr>
           <a:xfrm>
-            <a:off x="457200" y="594360"/>
-            <a:ext cx="11430000" cy="320040"/>
+            <a:off x="731520" y="2990088"/>
+            <a:ext cx="2423160" cy="594360"/>
           </a:xfrm>
           <a:prstGeom prst="rect">
             <a:avLst/>
@@ -5919,40 +6705,45 @@
           <a:noFill/>
         </p:spPr>
         <p:txBody>
-          <a:bodyPr wrap="square" lIns="45720" rIns="45720" tIns="18288" bIns="18288">
+          <a:bodyPr wrap="square" anchor="t" lIns="0" rIns="0" tIns="0" bIns="0">
             <a:spAutoFit/>
           </a:bodyPr>
           <a:lstStyle/>
           <a:p>
-            <a:pPr algn="l"/>
-            <a:r>
-              <a:rPr sz="1400" b="0">
-                <a:solidFill>
-                  <a:srgbClr val="CFD8E3"/>
+            <a:pPr algn="l">
+              <a:lnSpc>
+                <a:spcPct val="120000"/>
+              </a:lnSpc>
+            </a:pPr>
+            <a:r>
+              <a:rPr sz="1100" b="0" i="0">
+                <a:solidFill>
+                  <a:srgbClr val="F2CFCF"/>
                 </a:solidFill>
                 <a:latin typeface="Calibri"/>
               </a:rPr>
-              <a:t>Why the status quo is not survivable</a:t>
-            </a:r>
-          </a:p>
-        </p:txBody>
-      </p:sp>
-      <p:sp>
-        <p:nvSpPr>
-          <p:cNvPr id="6" name="Rectangle 5"/>
+              <a:t>of generation
+from hydropower</a:t>
+            </a:r>
+          </a:p>
+        </p:txBody>
+      </p:sp>
+      <p:sp>
+        <p:nvSpPr>
+          <p:cNvPr id="10" name="Rectangle 9"/>
           <p:cNvSpPr/>
           <p:nvPr/>
         </p:nvSpPr>
         <p:spPr>
           <a:xfrm>
-            <a:off x="457200" y="1371600"/>
-            <a:ext cx="5577840" cy="4846320"/>
+            <a:off x="3337560" y="2148840"/>
+            <a:ext cx="2697480" cy="1463040"/>
           </a:xfrm>
           <a:prstGeom prst="rect">
             <a:avLst/>
           </a:prstGeom>
           <a:solidFill>
-            <a:srgbClr val="F2F4F7"/>
+            <a:srgbClr val="7C1818"/>
           </a:solidFill>
           <a:ln>
             <a:noFill/>
@@ -5983,196 +6774,20 @@
       </p:sp>
       <p:sp>
         <p:nvSpPr>
-          <p:cNvPr id="7" name="TextBox 6"/>
-          <p:cNvSpPr txBox="1"/>
-          <p:nvPr/>
-        </p:nvSpPr>
-        <p:spPr>
-          <a:xfrm>
-            <a:off x="640080" y="1508760"/>
-            <a:ext cx="5212080" cy="457200"/>
-          </a:xfrm>
-          <a:prstGeom prst="rect">
-            <a:avLst/>
-          </a:prstGeom>
-          <a:noFill/>
-        </p:spPr>
-        <p:txBody>
-          <a:bodyPr wrap="square" lIns="45720" rIns="45720" tIns="18288" bIns="18288">
-            <a:spAutoFit/>
-          </a:bodyPr>
-          <a:lstStyle/>
-          <a:p>
-            <a:pPr algn="l"/>
-            <a:r>
-              <a:rPr sz="1600" b="1">
-                <a:solidFill>
-                  <a:srgbClr val="C0392B"/>
-                </a:solidFill>
-                <a:latin typeface="Calibri"/>
-              </a:rPr>
-              <a:t>THE HYDRO TRAP</a:t>
-            </a:r>
-          </a:p>
-        </p:txBody>
-      </p:sp>
-      <p:sp>
-        <p:nvSpPr>
-          <p:cNvPr id="8" name="TextBox 7"/>
-          <p:cNvSpPr txBox="1"/>
-          <p:nvPr/>
-        </p:nvSpPr>
-        <p:spPr>
-          <a:xfrm>
-            <a:off x="640080" y="1965960"/>
-            <a:ext cx="5212080" cy="457200"/>
-          </a:xfrm>
-          <a:prstGeom prst="rect">
-            <a:avLst/>
-          </a:prstGeom>
-          <a:noFill/>
-        </p:spPr>
-        <p:txBody>
-          <a:bodyPr wrap="square" lIns="45720" rIns="45720" tIns="18288" bIns="18288">
-            <a:spAutoFit/>
-          </a:bodyPr>
-          <a:lstStyle/>
-          <a:p>
-            <a:pPr algn="l"/>
-            <a:r>
-              <a:rPr sz="4400" b="1">
-                <a:solidFill>
-                  <a:srgbClr val="0B2E4F"/>
-                </a:solidFill>
-                <a:latin typeface="Calibri"/>
-              </a:rPr>
-              <a:t>84%</a:t>
-            </a:r>
-          </a:p>
-        </p:txBody>
-      </p:sp>
-      <p:sp>
-        <p:nvSpPr>
-          <p:cNvPr id="9" name="TextBox 8"/>
-          <p:cNvSpPr txBox="1"/>
-          <p:nvPr/>
-        </p:nvSpPr>
-        <p:spPr>
-          <a:xfrm>
-            <a:off x="640080" y="2788920"/>
-            <a:ext cx="5212080" cy="457200"/>
-          </a:xfrm>
-          <a:prstGeom prst="rect">
-            <a:avLst/>
-          </a:prstGeom>
-          <a:noFill/>
-        </p:spPr>
-        <p:txBody>
-          <a:bodyPr wrap="square" lIns="45720" rIns="45720" tIns="18288" bIns="18288">
-            <a:spAutoFit/>
-          </a:bodyPr>
-          <a:lstStyle/>
-          <a:p>
-            <a:pPr algn="l"/>
-            <a:r>
-              <a:rPr sz="1300" b="0">
-                <a:solidFill>
-                  <a:srgbClr val="1A1A1A"/>
-                </a:solidFill>
-                <a:latin typeface="Calibri"/>
-              </a:rPr>
-              <a:t>of Zambia's electricity from hydropower</a:t>
-            </a:r>
-          </a:p>
-        </p:txBody>
-      </p:sp>
-      <p:sp>
-        <p:nvSpPr>
-          <p:cNvPr id="10" name="TextBox 9"/>
-          <p:cNvSpPr txBox="1"/>
-          <p:nvPr/>
-        </p:nvSpPr>
-        <p:spPr>
-          <a:xfrm>
-            <a:off x="640080" y="3291840"/>
-            <a:ext cx="5212080" cy="2743200"/>
-          </a:xfrm>
-          <a:prstGeom prst="rect">
-            <a:avLst/>
-          </a:prstGeom>
-          <a:noFill/>
-        </p:spPr>
-        <p:txBody>
-          <a:bodyPr wrap="square">
-            <a:spAutoFit/>
-          </a:bodyPr>
-          <a:lstStyle/>
-          <a:p>
-            <a:pPr>
-              <a:spcAft>
-                <a:spcPts val="600"/>
-              </a:spcAft>
-            </a:pPr>
-            <a:r>
-              <a:rPr sz="1300">
-                <a:solidFill>
-                  <a:srgbClr val="1A1A1A"/>
-                </a:solidFill>
-                <a:latin typeface="Calibri"/>
-              </a:rPr>
-              <a:t>•  2015/16 drought: 1,000 MW power deficit; ~USD 440M unbudgeted electricity imports.</a:t>
-            </a:r>
-          </a:p>
-          <a:p>
-            <a:pPr>
-              <a:spcAft>
-                <a:spcPts val="600"/>
-              </a:spcAft>
-            </a:pPr>
-            <a:r>
-              <a:rPr sz="1300">
-                <a:solidFill>
-                  <a:srgbClr val="1A1A1A"/>
-                </a:solidFill>
-                <a:latin typeface="Calibri"/>
-              </a:rPr>
-              <a:t>•  2023-2024 Kariba crisis: prolonged load-shedding; ZESCO reports continued generation shortfalls.</a:t>
-            </a:r>
-          </a:p>
-          <a:p>
-            <a:pPr>
-              <a:spcAft>
-                <a:spcPts val="600"/>
-              </a:spcAft>
-            </a:pPr>
-            <a:r>
-              <a:rPr sz="1300">
-                <a:solidFill>
-                  <a:srgbClr val="1A1A1A"/>
-                </a:solidFill>
-                <a:latin typeface="Calibri"/>
-              </a:rPr>
-              <a:t>•  Drought is no longer the exception — it is the trend.</a:t>
-            </a:r>
-          </a:p>
-        </p:txBody>
-      </p:sp>
-      <p:sp>
-        <p:nvSpPr>
           <p:cNvPr id="11" name="Rectangle 10"/>
           <p:cNvSpPr/>
           <p:nvPr/>
         </p:nvSpPr>
         <p:spPr>
           <a:xfrm>
-            <a:off x="6263640" y="1371600"/>
-            <a:ext cx="5486400" cy="4846320"/>
+            <a:off x="3337560" y="2148840"/>
+            <a:ext cx="2697480" cy="91440"/>
           </a:xfrm>
           <a:prstGeom prst="rect">
             <a:avLst/>
           </a:prstGeom>
           <a:solidFill>
-            <a:srgbClr val="0B2E4F"/>
+            <a:srgbClr val="B32B2B"/>
           </a:solidFill>
           <a:ln>
             <a:noFill/>
@@ -6209,8 +6824,8 @@
         </p:nvSpPr>
         <p:spPr>
           <a:xfrm>
-            <a:off x="6446520" y="1508760"/>
-            <a:ext cx="5212080" cy="457200"/>
+            <a:off x="3520440" y="2331720"/>
+            <a:ext cx="2423160" cy="640080"/>
           </a:xfrm>
           <a:prstGeom prst="rect">
             <a:avLst/>
@@ -6218,20 +6833,24 @@
           <a:noFill/>
         </p:spPr>
         <p:txBody>
-          <a:bodyPr wrap="square" lIns="45720" rIns="45720" tIns="18288" bIns="18288">
+          <a:bodyPr wrap="square" anchor="t" lIns="0" rIns="0" tIns="0" bIns="0">
             <a:spAutoFit/>
           </a:bodyPr>
           <a:lstStyle/>
           <a:p>
-            <a:pPr algn="l"/>
-            <a:r>
-              <a:rPr sz="1600" b="1">
-                <a:solidFill>
-                  <a:srgbClr val="B86B2A"/>
+            <a:pPr algn="l">
+              <a:lnSpc>
+                <a:spcPct val="115000"/>
+              </a:lnSpc>
+            </a:pPr>
+            <a:r>
+              <a:rPr sz="3000" b="1" i="0">
+                <a:solidFill>
+                  <a:srgbClr val="FFFFFF"/>
                 </a:solidFill>
                 <a:latin typeface="Calibri"/>
               </a:rPr>
-              <a:t>THE NUCLEAR ANSWER</a:t>
+              <a:t>1,000 MW</a:t>
             </a:r>
           </a:p>
         </p:txBody>
@@ -6244,8 +6863,8 @@
         </p:nvSpPr>
         <p:spPr>
           <a:xfrm>
-            <a:off x="6446520" y="1965960"/>
-            <a:ext cx="5212080" cy="457200"/>
+            <a:off x="3520440" y="2990088"/>
+            <a:ext cx="2423160" cy="594360"/>
           </a:xfrm>
           <a:prstGeom prst="rect">
             <a:avLst/>
@@ -6253,162 +6872,45 @@
           <a:noFill/>
         </p:spPr>
         <p:txBody>
-          <a:bodyPr wrap="square" lIns="45720" rIns="45720" tIns="18288" bIns="18288">
+          <a:bodyPr wrap="square" anchor="t" lIns="0" rIns="0" tIns="0" bIns="0">
             <a:spAutoFit/>
           </a:bodyPr>
           <a:lstStyle/>
           <a:p>
-            <a:pPr algn="l"/>
-            <a:r>
-              <a:rPr sz="4400" b="1">
-                <a:solidFill>
-                  <a:srgbClr val="FFFFFF"/>
+            <a:pPr algn="l">
+              <a:lnSpc>
+                <a:spcPct val="120000"/>
+              </a:lnSpc>
+            </a:pPr>
+            <a:r>
+              <a:rPr sz="1100" b="0" i="0">
+                <a:solidFill>
+                  <a:srgbClr val="F2CFCF"/>
                 </a:solidFill>
                 <a:latin typeface="Calibri"/>
               </a:rPr>
-              <a:t>2,000 MW</a:t>
-            </a:r>
-          </a:p>
-        </p:txBody>
-      </p:sp>
-      <p:sp>
-        <p:nvSpPr>
-          <p:cNvPr id="14" name="TextBox 13"/>
-          <p:cNvSpPr txBox="1"/>
-          <p:nvPr/>
-        </p:nvSpPr>
-        <p:spPr>
-          <a:xfrm>
-            <a:off x="6446520" y="2788920"/>
-            <a:ext cx="5212080" cy="457200"/>
-          </a:xfrm>
-          <a:prstGeom prst="rect">
-            <a:avLst/>
-          </a:prstGeom>
-          <a:noFill/>
-        </p:spPr>
-        <p:txBody>
-          <a:bodyPr wrap="square" lIns="45720" rIns="45720" tIns="18288" bIns="18288">
-            <a:spAutoFit/>
-          </a:bodyPr>
-          <a:lstStyle/>
-          <a:p>
-            <a:pPr algn="l"/>
-            <a:r>
-              <a:rPr sz="1300" b="0">
-                <a:solidFill>
-                  <a:srgbClr val="CFD8E3"/>
-                </a:solidFill>
-                <a:latin typeface="Calibri"/>
-              </a:rPr>
-              <a:t>national nuclear target (Vision 2030 / 7NDP)</a:t>
-            </a:r>
-          </a:p>
-        </p:txBody>
-      </p:sp>
-      <p:sp>
-        <p:nvSpPr>
-          <p:cNvPr id="15" name="TextBox 14"/>
-          <p:cNvSpPr txBox="1"/>
-          <p:nvPr/>
-        </p:nvSpPr>
-        <p:spPr>
-          <a:xfrm>
-            <a:off x="6446520" y="3291840"/>
-            <a:ext cx="5212080" cy="2743200"/>
-          </a:xfrm>
-          <a:prstGeom prst="rect">
-            <a:avLst/>
-          </a:prstGeom>
-          <a:noFill/>
-        </p:spPr>
-        <p:txBody>
-          <a:bodyPr wrap="square">
-            <a:spAutoFit/>
-          </a:bodyPr>
-          <a:lstStyle/>
-          <a:p>
-            <a:pPr>
-              <a:spcAft>
-                <a:spcPts val="600"/>
-              </a:spcAft>
-            </a:pPr>
-            <a:r>
-              <a:rPr sz="1300">
-                <a:solidFill>
-                  <a:srgbClr val="FFFFFF"/>
-                </a:solidFill>
-                <a:latin typeface="Calibri"/>
-              </a:rPr>
-              <a:t>•  Drought-proof baseload — independent of rainfall and Kariba reservoir levels.</a:t>
-            </a:r>
-          </a:p>
-          <a:p>
-            <a:pPr>
-              <a:spcAft>
-                <a:spcPts val="600"/>
-              </a:spcAft>
-            </a:pPr>
-            <a:r>
-              <a:rPr sz="1300">
-                <a:solidFill>
-                  <a:srgbClr val="FFFFFF"/>
-                </a:solidFill>
-                <a:latin typeface="Calibri"/>
-              </a:rPr>
-              <a:t>•  Domestic uranium reserves provide fuel-supply sovereignty.</a:t>
-            </a:r>
-          </a:p>
-          <a:p>
-            <a:pPr>
-              <a:spcAft>
-                <a:spcPts val="600"/>
-              </a:spcAft>
-            </a:pPr>
-            <a:r>
-              <a:rPr sz="1300">
-                <a:solidFill>
-                  <a:srgbClr val="FFFFFF"/>
-                </a:solidFill>
-                <a:latin typeface="Calibri"/>
-              </a:rPr>
-              <a:t>•  National Nuclear Policy (2020) and partnerships with ROSATOM, IP3/USA, and KAERI already in place.</a:t>
-            </a:r>
-          </a:p>
-          <a:p>
-            <a:pPr>
-              <a:spcAft>
-                <a:spcPts val="600"/>
-              </a:spcAft>
-            </a:pPr>
-            <a:r>
-              <a:rPr sz="1300">
-                <a:solidFill>
-                  <a:srgbClr val="FFFFFF"/>
-                </a:solidFill>
-                <a:latin typeface="Calibri"/>
-              </a:rPr>
-              <a:t>•  Closes the projected 2030 demand gap (forecast: ~27,000 MW) credibly.</a:t>
-            </a:r>
-          </a:p>
-        </p:txBody>
-      </p:sp>
-      <p:sp>
-        <p:nvSpPr>
-          <p:cNvPr id="16" name="Rectangle 15"/>
+              <a:t>deficit during the
+2015/16 drought</a:t>
+            </a:r>
+          </a:p>
+        </p:txBody>
+      </p:sp>
+      <p:sp>
+        <p:nvSpPr>
+          <p:cNvPr id="14" name="Rectangle 13"/>
           <p:cNvSpPr/>
           <p:nvPr/>
         </p:nvSpPr>
         <p:spPr>
           <a:xfrm>
-            <a:off x="0" y="6446520"/>
-            <a:ext cx="12191695" cy="411480"/>
+            <a:off x="6126480" y="2148840"/>
+            <a:ext cx="2697480" cy="1463040"/>
           </a:xfrm>
           <a:prstGeom prst="rect">
             <a:avLst/>
           </a:prstGeom>
           <a:solidFill>
-            <a:srgbClr val="0B2E4F"/>
+            <a:srgbClr val="7C1818"/>
           </a:solidFill>
           <a:ln>
             <a:noFill/>
@@ -6439,14 +6941,97 @@
       </p:sp>
       <p:sp>
         <p:nvSpPr>
+          <p:cNvPr id="15" name="Rectangle 14"/>
+          <p:cNvSpPr/>
+          <p:nvPr/>
+        </p:nvSpPr>
+        <p:spPr>
+          <a:xfrm>
+            <a:off x="6126480" y="2148840"/>
+            <a:ext cx="2697480" cy="91440"/>
+          </a:xfrm>
+          <a:prstGeom prst="rect">
+            <a:avLst/>
+          </a:prstGeom>
+          <a:solidFill>
+            <a:srgbClr val="B32B2B"/>
+          </a:solidFill>
+          <a:ln>
+            <a:noFill/>
+          </a:ln>
+          <a:effectLst/>
+        </p:spPr>
+        <p:style>
+          <a:lnRef idx="1">
+            <a:schemeClr val="accent1"/>
+          </a:lnRef>
+          <a:fillRef idx="3">
+            <a:schemeClr val="accent1"/>
+          </a:fillRef>
+          <a:effectRef idx="2">
+            <a:schemeClr val="accent1"/>
+          </a:effectRef>
+          <a:fontRef idx="minor">
+            <a:schemeClr val="lt1"/>
+          </a:fontRef>
+        </p:style>
+        <p:txBody>
+          <a:bodyPr rtlCol="0" anchor="ctr"/>
+          <a:lstStyle/>
+          <a:p>
+            <a:pPr algn="ctr"/>
+          </a:p>
+        </p:txBody>
+      </p:sp>
+      <p:sp>
+        <p:nvSpPr>
+          <p:cNvPr id="16" name="TextBox 15"/>
+          <p:cNvSpPr txBox="1"/>
+          <p:nvPr/>
+        </p:nvSpPr>
+        <p:spPr>
+          <a:xfrm>
+            <a:off x="6309360" y="2331720"/>
+            <a:ext cx="2423160" cy="640080"/>
+          </a:xfrm>
+          <a:prstGeom prst="rect">
+            <a:avLst/>
+          </a:prstGeom>
+          <a:noFill/>
+        </p:spPr>
+        <p:txBody>
+          <a:bodyPr wrap="square" anchor="t" lIns="0" rIns="0" tIns="0" bIns="0">
+            <a:spAutoFit/>
+          </a:bodyPr>
+          <a:lstStyle/>
+          <a:p>
+            <a:pPr algn="l">
+              <a:lnSpc>
+                <a:spcPct val="115000"/>
+              </a:lnSpc>
+            </a:pPr>
+            <a:r>
+              <a:rPr sz="3000" b="1" i="0">
+                <a:solidFill>
+                  <a:srgbClr val="FFFFFF"/>
+                </a:solidFill>
+                <a:latin typeface="Calibri"/>
+              </a:rPr>
+              <a:t>$440M</a:t>
+            </a:r>
+          </a:p>
+        </p:txBody>
+      </p:sp>
+      <p:sp>
+        <p:nvSpPr>
           <p:cNvPr id="17" name="TextBox 16"/>
           <p:cNvSpPr txBox="1"/>
           <p:nvPr/>
         </p:nvSpPr>
         <p:spPr>
           <a:xfrm>
-            <a:off x="365760" y="6492240"/>
-            <a:ext cx="10515600" cy="365760"/>
+            <a:off x="6309360" y="2990088"/>
+            <a:ext cx="2423160" cy="594360"/>
           </a:xfrm>
           <a:prstGeom prst="rect">
             <a:avLst/>
@@ -6454,34 +7039,127 @@
           <a:noFill/>
         </p:spPr>
         <p:txBody>
-          <a:bodyPr wrap="square" lIns="45720" rIns="45720" tIns="18288" bIns="18288">
+          <a:bodyPr wrap="square" anchor="t" lIns="0" rIns="0" tIns="0" bIns="0">
             <a:spAutoFit/>
           </a:bodyPr>
           <a:lstStyle/>
           <a:p>
-            <a:pPr algn="l"/>
-            <a:r>
-              <a:rPr sz="900" b="0">
-                <a:solidFill>
-                  <a:srgbClr val="FFFFFF"/>
+            <a:pPr algn="l">
+              <a:lnSpc>
+                <a:spcPct val="120000"/>
+              </a:lnSpc>
+            </a:pPr>
+            <a:r>
+              <a:rPr sz="1100" b="0" i="0">
+                <a:solidFill>
+                  <a:srgbClr val="F2CFCF"/>
                 </a:solidFill>
                 <a:latin typeface="Calibri"/>
               </a:rPr>
-              <a:t>Sources: ZESCO Annual Reports 2023-2024 | Zambia 7th National Development Plan (7NDP) &amp; Vision 2030</a:t>
-            </a:r>
-          </a:p>
-        </p:txBody>
-      </p:sp>
-      <p:sp>
-        <p:nvSpPr>
-          <p:cNvPr id="18" name="TextBox 17"/>
+              <a:t>in unbudgeted
+electricity imports</a:t>
+            </a:r>
+          </a:p>
+        </p:txBody>
+      </p:sp>
+      <p:sp>
+        <p:nvSpPr>
+          <p:cNvPr id="18" name="Rectangle 17"/>
+          <p:cNvSpPr/>
+          <p:nvPr/>
+        </p:nvSpPr>
+        <p:spPr>
+          <a:xfrm>
+            <a:off x="8915400" y="2148840"/>
+            <a:ext cx="2697480" cy="1463040"/>
+          </a:xfrm>
+          <a:prstGeom prst="rect">
+            <a:avLst/>
+          </a:prstGeom>
+          <a:solidFill>
+            <a:srgbClr val="7C1818"/>
+          </a:solidFill>
+          <a:ln>
+            <a:noFill/>
+          </a:ln>
+          <a:effectLst/>
+        </p:spPr>
+        <p:style>
+          <a:lnRef idx="1">
+            <a:schemeClr val="accent1"/>
+          </a:lnRef>
+          <a:fillRef idx="3">
+            <a:schemeClr val="accent1"/>
+          </a:fillRef>
+          <a:effectRef idx="2">
+            <a:schemeClr val="accent1"/>
+          </a:effectRef>
+          <a:fontRef idx="minor">
+            <a:schemeClr val="lt1"/>
+          </a:fontRef>
+        </p:style>
+        <p:txBody>
+          <a:bodyPr rtlCol="0" anchor="ctr"/>
+          <a:lstStyle/>
+          <a:p>
+            <a:pPr algn="ctr"/>
+          </a:p>
+        </p:txBody>
+      </p:sp>
+      <p:sp>
+        <p:nvSpPr>
+          <p:cNvPr id="19" name="Rectangle 18"/>
+          <p:cNvSpPr/>
+          <p:nvPr/>
+        </p:nvSpPr>
+        <p:spPr>
+          <a:xfrm>
+            <a:off x="8915400" y="2148840"/>
+            <a:ext cx="2697480" cy="91440"/>
+          </a:xfrm>
+          <a:prstGeom prst="rect">
+            <a:avLst/>
+          </a:prstGeom>
+          <a:solidFill>
+            <a:srgbClr val="B32B2B"/>
+          </a:solidFill>
+          <a:ln>
+            <a:noFill/>
+          </a:ln>
+          <a:effectLst/>
+        </p:spPr>
+        <p:style>
+          <a:lnRef idx="1">
+            <a:schemeClr val="accent1"/>
+          </a:lnRef>
+          <a:fillRef idx="3">
+            <a:schemeClr val="accent1"/>
+          </a:fillRef>
+          <a:effectRef idx="2">
+            <a:schemeClr val="accent1"/>
+          </a:effectRef>
+          <a:fontRef idx="minor">
+            <a:schemeClr val="lt1"/>
+          </a:fontRef>
+        </p:style>
+        <p:txBody>
+          <a:bodyPr rtlCol="0" anchor="ctr"/>
+          <a:lstStyle/>
+          <a:p>
+            <a:pPr algn="ctr"/>
+          </a:p>
+        </p:txBody>
+      </p:sp>
+      <p:sp>
+        <p:nvSpPr>
+          <p:cNvPr id="20" name="TextBox 19"/>
           <p:cNvSpPr txBox="1"/>
           <p:nvPr/>
         </p:nvSpPr>
         <p:spPr>
           <a:xfrm>
-            <a:off x="11247120" y="6492240"/>
-            <a:ext cx="822960" cy="365760"/>
+            <a:off x="9098280" y="2331720"/>
+            <a:ext cx="2423160" cy="640080"/>
           </a:xfrm>
           <a:prstGeom prst="rect">
             <a:avLst/>
@@ -6489,20 +7167,786 @@
           <a:noFill/>
         </p:spPr>
         <p:txBody>
-          <a:bodyPr wrap="square" lIns="45720" rIns="45720" tIns="18288" bIns="18288">
+          <a:bodyPr wrap="square" anchor="t" lIns="0" rIns="0" tIns="0" bIns="0">
             <a:spAutoFit/>
           </a:bodyPr>
           <a:lstStyle/>
           <a:p>
-            <a:pPr algn="r"/>
-            <a:r>
-              <a:rPr sz="1000" b="1">
-                <a:solidFill>
-                  <a:srgbClr val="B86B2A"/>
+            <a:pPr algn="l">
+              <a:lnSpc>
+                <a:spcPct val="115000"/>
+              </a:lnSpc>
+            </a:pPr>
+            <a:r>
+              <a:rPr sz="3000" b="1" i="0">
+                <a:solidFill>
+                  <a:srgbClr val="FFFFFF"/>
                 </a:solidFill>
                 <a:latin typeface="Calibri"/>
               </a:rPr>
-              <a:t>4 / 5</a:t>
+              <a:t>2023-24</a:t>
+            </a:r>
+          </a:p>
+        </p:txBody>
+      </p:sp>
+      <p:sp>
+        <p:nvSpPr>
+          <p:cNvPr id="21" name="TextBox 20"/>
+          <p:cNvSpPr txBox="1"/>
+          <p:nvPr/>
+        </p:nvSpPr>
+        <p:spPr>
+          <a:xfrm>
+            <a:off x="9098280" y="2990088"/>
+            <a:ext cx="2423160" cy="594360"/>
+          </a:xfrm>
+          <a:prstGeom prst="rect">
+            <a:avLst/>
+          </a:prstGeom>
+          <a:noFill/>
+        </p:spPr>
+        <p:txBody>
+          <a:bodyPr wrap="square" anchor="t" lIns="0" rIns="0" tIns="0" bIns="0">
+            <a:spAutoFit/>
+          </a:bodyPr>
+          <a:lstStyle/>
+          <a:p>
+            <a:pPr algn="l">
+              <a:lnSpc>
+                <a:spcPct val="120000"/>
+              </a:lnSpc>
+            </a:pPr>
+            <a:r>
+              <a:rPr sz="1100" b="0" i="0">
+                <a:solidFill>
+                  <a:srgbClr val="F2CFCF"/>
+                </a:solidFill>
+                <a:latin typeface="Calibri"/>
+              </a:rPr>
+              <a:t>Kariba crisis.
+It happened again.</a:t>
+            </a:r>
+          </a:p>
+        </p:txBody>
+      </p:sp>
+      <p:cxnSp>
+        <p:nvCxnSpPr>
+          <p:cNvPr id="22" name="Connector 21"/>
+          <p:cNvCxnSpPr/>
+          <p:nvPr/>
+        </p:nvCxnSpPr>
+        <p:spPr>
+          <a:xfrm>
+            <a:off x="548640" y="3840480"/>
+            <a:ext cx="11064240" cy="0"/>
+          </a:xfrm>
+          <a:prstGeom prst="line">
+            <a:avLst/>
+          </a:prstGeom>
+          <a:ln w="6350">
+            <a:solidFill>
+              <a:srgbClr val="C8CED6"/>
+            </a:solidFill>
+          </a:ln>
+        </p:spPr>
+        <p:style>
+          <a:lnRef idx="2">
+            <a:schemeClr val="accent1"/>
+          </a:lnRef>
+          <a:fillRef idx="0">
+            <a:schemeClr val="accent1"/>
+          </a:fillRef>
+          <a:effectRef idx="1">
+            <a:schemeClr val="accent1"/>
+          </a:effectRef>
+          <a:fontRef idx="minor">
+            <a:schemeClr val="tx1"/>
+          </a:fontRef>
+        </p:style>
+      </p:cxnSp>
+      <p:sp>
+        <p:nvSpPr>
+          <p:cNvPr id="23" name="TextBox 22"/>
+          <p:cNvSpPr txBox="1"/>
+          <p:nvPr/>
+        </p:nvSpPr>
+        <p:spPr>
+          <a:xfrm>
+            <a:off x="548640" y="3886200"/>
+            <a:ext cx="11064240" cy="365760"/>
+          </a:xfrm>
+          <a:prstGeom prst="rect">
+            <a:avLst/>
+          </a:prstGeom>
+          <a:noFill/>
+        </p:spPr>
+        <p:txBody>
+          <a:bodyPr wrap="square" anchor="t" lIns="0" rIns="0" tIns="0" bIns="0">
+            <a:spAutoFit/>
+          </a:bodyPr>
+          <a:lstStyle/>
+          <a:p>
+            <a:pPr algn="ctr">
+              <a:lnSpc>
+                <a:spcPct val="115000"/>
+              </a:lnSpc>
+            </a:pPr>
+            <a:r>
+              <a:rPr sz="1100" b="1" i="0">
+                <a:solidFill>
+                  <a:srgbClr val="CC7A2E"/>
+                </a:solidFill>
+                <a:latin typeface="Calibri"/>
+              </a:rPr>
+              <a:t>THE ANSWER  —  ALREADY  ON  PAPER</a:t>
+            </a:r>
+          </a:p>
+        </p:txBody>
+      </p:sp>
+      <p:sp>
+        <p:nvSpPr>
+          <p:cNvPr id="24" name="Rectangle 23"/>
+          <p:cNvSpPr/>
+          <p:nvPr/>
+        </p:nvSpPr>
+        <p:spPr>
+          <a:xfrm>
+            <a:off x="548640" y="4343400"/>
+            <a:ext cx="11064240" cy="1828800"/>
+          </a:xfrm>
+          <a:prstGeom prst="rect">
+            <a:avLst/>
+          </a:prstGeom>
+          <a:solidFill>
+            <a:srgbClr val="0A1F3D"/>
+          </a:solidFill>
+          <a:ln>
+            <a:noFill/>
+          </a:ln>
+          <a:effectLst/>
+        </p:spPr>
+        <p:style>
+          <a:lnRef idx="1">
+            <a:schemeClr val="accent1"/>
+          </a:lnRef>
+          <a:fillRef idx="3">
+            <a:schemeClr val="accent1"/>
+          </a:fillRef>
+          <a:effectRef idx="2">
+            <a:schemeClr val="accent1"/>
+          </a:effectRef>
+          <a:fontRef idx="minor">
+            <a:schemeClr val="lt1"/>
+          </a:fontRef>
+        </p:style>
+        <p:txBody>
+          <a:bodyPr rtlCol="0" anchor="ctr"/>
+          <a:lstStyle/>
+          <a:p>
+            <a:pPr algn="ctr"/>
+          </a:p>
+        </p:txBody>
+      </p:sp>
+      <p:sp>
+        <p:nvSpPr>
+          <p:cNvPr id="25" name="Rectangle 24"/>
+          <p:cNvSpPr/>
+          <p:nvPr/>
+        </p:nvSpPr>
+        <p:spPr>
+          <a:xfrm>
+            <a:off x="548640" y="4343400"/>
+            <a:ext cx="11064240" cy="73152"/>
+          </a:xfrm>
+          <a:prstGeom prst="rect">
+            <a:avLst/>
+          </a:prstGeom>
+          <a:solidFill>
+            <a:srgbClr val="CC7A2E"/>
+          </a:solidFill>
+          <a:ln>
+            <a:noFill/>
+          </a:ln>
+          <a:effectLst/>
+        </p:spPr>
+        <p:style>
+          <a:lnRef idx="1">
+            <a:schemeClr val="accent1"/>
+          </a:lnRef>
+          <a:fillRef idx="3">
+            <a:schemeClr val="accent1"/>
+          </a:fillRef>
+          <a:effectRef idx="2">
+            <a:schemeClr val="accent1"/>
+          </a:effectRef>
+          <a:fontRef idx="minor">
+            <a:schemeClr val="lt1"/>
+          </a:fontRef>
+        </p:style>
+        <p:txBody>
+          <a:bodyPr rtlCol="0" anchor="ctr"/>
+          <a:lstStyle/>
+          <a:p>
+            <a:pPr algn="ctr"/>
+          </a:p>
+        </p:txBody>
+      </p:sp>
+      <p:sp>
+        <p:nvSpPr>
+          <p:cNvPr id="26" name="TextBox 25"/>
+          <p:cNvSpPr txBox="1"/>
+          <p:nvPr/>
+        </p:nvSpPr>
+        <p:spPr>
+          <a:xfrm>
+            <a:off x="822960" y="4526280"/>
+            <a:ext cx="4572000" cy="1554480"/>
+          </a:xfrm>
+          <a:prstGeom prst="rect">
+            <a:avLst/>
+          </a:prstGeom>
+          <a:noFill/>
+        </p:spPr>
+        <p:txBody>
+          <a:bodyPr wrap="square" anchor="t" lIns="0" rIns="0" tIns="0" bIns="0">
+            <a:spAutoFit/>
+          </a:bodyPr>
+          <a:lstStyle/>
+          <a:p>
+            <a:pPr algn="l">
+              <a:lnSpc>
+                <a:spcPct val="105000"/>
+              </a:lnSpc>
+            </a:pPr>
+            <a:r>
+              <a:rPr sz="5200" b="1" i="0">
+                <a:solidFill>
+                  <a:srgbClr val="E8A860"/>
+                </a:solidFill>
+                <a:latin typeface="Calibri"/>
+              </a:rPr>
+              <a:t>2,000 MW</a:t>
+            </a:r>
+          </a:p>
+          <a:p>
+            <a:pPr algn="l">
+              <a:lnSpc>
+                <a:spcPct val="105000"/>
+              </a:lnSpc>
+              <a:spcAft>
+                <a:spcPts val="0"/>
+              </a:spcAft>
+            </a:pPr>
+            <a:r>
+              <a:rPr sz="1400" b="0" i="0">
+                <a:solidFill>
+                  <a:srgbClr val="FFFFFF"/>
+                </a:solidFill>
+                <a:latin typeface="Calibri"/>
+              </a:rPr>
+              <a:t>nuclear baseload target</a:t>
+            </a:r>
+          </a:p>
+          <a:p>
+            <a:pPr algn="l">
+              <a:lnSpc>
+                <a:spcPct val="105000"/>
+              </a:lnSpc>
+              <a:spcAft>
+                <a:spcPts val="0"/>
+              </a:spcAft>
+            </a:pPr>
+            <a:r>
+              <a:rPr sz="1100" b="0" i="0">
+                <a:solidFill>
+                  <a:srgbClr val="CFD8E3"/>
+                </a:solidFill>
+                <a:latin typeface="Calibri"/>
+              </a:rPr>
+              <a:t>Vision 2030  ·  7NDP</a:t>
+            </a:r>
+          </a:p>
+        </p:txBody>
+      </p:sp>
+      <p:sp>
+        <p:nvSpPr>
+          <p:cNvPr id="27" name="Rectangle 26"/>
+          <p:cNvSpPr/>
+          <p:nvPr/>
+        </p:nvSpPr>
+        <p:spPr>
+          <a:xfrm>
+            <a:off x="5577840" y="4572000"/>
+            <a:ext cx="18288" cy="1371600"/>
+          </a:xfrm>
+          <a:prstGeom prst="rect">
+            <a:avLst/>
+          </a:prstGeom>
+          <a:solidFill>
+            <a:srgbClr val="334466"/>
+          </a:solidFill>
+          <a:ln>
+            <a:noFill/>
+          </a:ln>
+          <a:effectLst/>
+        </p:spPr>
+        <p:style>
+          <a:lnRef idx="1">
+            <a:schemeClr val="accent1"/>
+          </a:lnRef>
+          <a:fillRef idx="3">
+            <a:schemeClr val="accent1"/>
+          </a:fillRef>
+          <a:effectRef idx="2">
+            <a:schemeClr val="accent1"/>
+          </a:effectRef>
+          <a:fontRef idx="minor">
+            <a:schemeClr val="lt1"/>
+          </a:fontRef>
+        </p:style>
+        <p:txBody>
+          <a:bodyPr rtlCol="0" anchor="ctr"/>
+          <a:lstStyle/>
+          <a:p>
+            <a:pPr algn="ctr"/>
+          </a:p>
+        </p:txBody>
+      </p:sp>
+      <p:sp>
+        <p:nvSpPr>
+          <p:cNvPr id="28" name="TextBox 27"/>
+          <p:cNvSpPr txBox="1"/>
+          <p:nvPr/>
+        </p:nvSpPr>
+        <p:spPr>
+          <a:xfrm>
+            <a:off x="5852160" y="4572000"/>
+            <a:ext cx="2103120" cy="274320"/>
+          </a:xfrm>
+          <a:prstGeom prst="rect">
+            <a:avLst/>
+          </a:prstGeom>
+          <a:noFill/>
+        </p:spPr>
+        <p:txBody>
+          <a:bodyPr wrap="square" anchor="t" lIns="0" rIns="0" tIns="0" bIns="0">
+            <a:spAutoFit/>
+          </a:bodyPr>
+          <a:lstStyle/>
+          <a:p>
+            <a:pPr algn="l">
+              <a:lnSpc>
+                <a:spcPct val="115000"/>
+              </a:lnSpc>
+            </a:pPr>
+            <a:r>
+              <a:rPr sz="1100" b="1" i="0">
+                <a:solidFill>
+                  <a:srgbClr val="E8A860"/>
+                </a:solidFill>
+                <a:latin typeface="Calibri"/>
+              </a:rPr>
+              <a:t>DROUGHT-PROOF</a:t>
+            </a:r>
+          </a:p>
+        </p:txBody>
+      </p:sp>
+      <p:sp>
+        <p:nvSpPr>
+          <p:cNvPr id="29" name="TextBox 28"/>
+          <p:cNvSpPr txBox="1"/>
+          <p:nvPr/>
+        </p:nvSpPr>
+        <p:spPr>
+          <a:xfrm>
+            <a:off x="7955279" y="4572000"/>
+            <a:ext cx="3749039" cy="365760"/>
+          </a:xfrm>
+          <a:prstGeom prst="rect">
+            <a:avLst/>
+          </a:prstGeom>
+          <a:noFill/>
+        </p:spPr>
+        <p:txBody>
+          <a:bodyPr wrap="square" anchor="t" lIns="0" rIns="0" tIns="0" bIns="0">
+            <a:spAutoFit/>
+          </a:bodyPr>
+          <a:lstStyle/>
+          <a:p>
+            <a:pPr algn="l">
+              <a:lnSpc>
+                <a:spcPct val="115000"/>
+              </a:lnSpc>
+            </a:pPr>
+            <a:r>
+              <a:rPr sz="1200" b="0" i="0">
+                <a:solidFill>
+                  <a:srgbClr val="FFFFFF"/>
+                </a:solidFill>
+                <a:latin typeface="Calibri"/>
+              </a:rPr>
+              <a:t>Baseload independent of Kariba levels.</a:t>
+            </a:r>
+          </a:p>
+        </p:txBody>
+      </p:sp>
+      <p:sp>
+        <p:nvSpPr>
+          <p:cNvPr id="30" name="TextBox 29"/>
+          <p:cNvSpPr txBox="1"/>
+          <p:nvPr/>
+        </p:nvSpPr>
+        <p:spPr>
+          <a:xfrm>
+            <a:off x="5852160" y="5029200"/>
+            <a:ext cx="2103120" cy="274320"/>
+          </a:xfrm>
+          <a:prstGeom prst="rect">
+            <a:avLst/>
+          </a:prstGeom>
+          <a:noFill/>
+        </p:spPr>
+        <p:txBody>
+          <a:bodyPr wrap="square" anchor="t" lIns="0" rIns="0" tIns="0" bIns="0">
+            <a:spAutoFit/>
+          </a:bodyPr>
+          <a:lstStyle/>
+          <a:p>
+            <a:pPr algn="l">
+              <a:lnSpc>
+                <a:spcPct val="115000"/>
+              </a:lnSpc>
+            </a:pPr>
+            <a:r>
+              <a:rPr sz="1100" b="1" i="0">
+                <a:solidFill>
+                  <a:srgbClr val="E8A860"/>
+                </a:solidFill>
+                <a:latin typeface="Calibri"/>
+              </a:rPr>
+              <a:t>FUEL-SOVEREIGN</a:t>
+            </a:r>
+          </a:p>
+        </p:txBody>
+      </p:sp>
+      <p:sp>
+        <p:nvSpPr>
+          <p:cNvPr id="31" name="TextBox 30"/>
+          <p:cNvSpPr txBox="1"/>
+          <p:nvPr/>
+        </p:nvSpPr>
+        <p:spPr>
+          <a:xfrm>
+            <a:off x="7955279" y="5029200"/>
+            <a:ext cx="3749039" cy="365760"/>
+          </a:xfrm>
+          <a:prstGeom prst="rect">
+            <a:avLst/>
+          </a:prstGeom>
+          <a:noFill/>
+        </p:spPr>
+        <p:txBody>
+          <a:bodyPr wrap="square" anchor="t" lIns="0" rIns="0" tIns="0" bIns="0">
+            <a:spAutoFit/>
+          </a:bodyPr>
+          <a:lstStyle/>
+          <a:p>
+            <a:pPr algn="l">
+              <a:lnSpc>
+                <a:spcPct val="115000"/>
+              </a:lnSpc>
+            </a:pPr>
+            <a:r>
+              <a:rPr sz="1200" b="0" i="0">
+                <a:solidFill>
+                  <a:srgbClr val="FFFFFF"/>
+                </a:solidFill>
+                <a:latin typeface="Calibri"/>
+              </a:rPr>
+              <a:t>Domestic uranium reserves. No fuel imports.</a:t>
+            </a:r>
+          </a:p>
+        </p:txBody>
+      </p:sp>
+      <p:sp>
+        <p:nvSpPr>
+          <p:cNvPr id="32" name="TextBox 31"/>
+          <p:cNvSpPr txBox="1"/>
+          <p:nvPr/>
+        </p:nvSpPr>
+        <p:spPr>
+          <a:xfrm>
+            <a:off x="5852160" y="5486400"/>
+            <a:ext cx="2103120" cy="274320"/>
+          </a:xfrm>
+          <a:prstGeom prst="rect">
+            <a:avLst/>
+          </a:prstGeom>
+          <a:noFill/>
+        </p:spPr>
+        <p:txBody>
+          <a:bodyPr wrap="square" anchor="t" lIns="0" rIns="0" tIns="0" bIns="0">
+            <a:spAutoFit/>
+          </a:bodyPr>
+          <a:lstStyle/>
+          <a:p>
+            <a:pPr algn="l">
+              <a:lnSpc>
+                <a:spcPct val="115000"/>
+              </a:lnSpc>
+            </a:pPr>
+            <a:r>
+              <a:rPr sz="1100" b="1" i="0">
+                <a:solidFill>
+                  <a:srgbClr val="E8A860"/>
+                </a:solidFill>
+                <a:latin typeface="Calibri"/>
+              </a:rPr>
+              <a:t>ALREADY MOBILISED</a:t>
+            </a:r>
+          </a:p>
+        </p:txBody>
+      </p:sp>
+      <p:sp>
+        <p:nvSpPr>
+          <p:cNvPr id="33" name="TextBox 32"/>
+          <p:cNvSpPr txBox="1"/>
+          <p:nvPr/>
+        </p:nvSpPr>
+        <p:spPr>
+          <a:xfrm>
+            <a:off x="7955279" y="5486400"/>
+            <a:ext cx="3749039" cy="365760"/>
+          </a:xfrm>
+          <a:prstGeom prst="rect">
+            <a:avLst/>
+          </a:prstGeom>
+          <a:noFill/>
+        </p:spPr>
+        <p:txBody>
+          <a:bodyPr wrap="square" anchor="t" lIns="0" rIns="0" tIns="0" bIns="0">
+            <a:spAutoFit/>
+          </a:bodyPr>
+          <a:lstStyle/>
+          <a:p>
+            <a:pPr algn="l">
+              <a:lnSpc>
+                <a:spcPct val="115000"/>
+              </a:lnSpc>
+            </a:pPr>
+            <a:r>
+              <a:rPr sz="1200" b="0" i="0">
+                <a:solidFill>
+                  <a:srgbClr val="FFFFFF"/>
+                </a:solidFill>
+                <a:latin typeface="Calibri"/>
+              </a:rPr>
+              <a:t>2020 Nuclear Policy approved. ROSATOM, IP3, KAERI signed.</a:t>
+            </a:r>
+          </a:p>
+        </p:txBody>
+      </p:sp>
+      <p:sp>
+        <p:nvSpPr>
+          <p:cNvPr id="34" name="TextBox 33"/>
+          <p:cNvSpPr txBox="1"/>
+          <p:nvPr/>
+        </p:nvSpPr>
+        <p:spPr>
+          <a:xfrm>
+            <a:off x="548640" y="6309360"/>
+            <a:ext cx="11064240" cy="365760"/>
+          </a:xfrm>
+          <a:prstGeom prst="rect">
+            <a:avLst/>
+          </a:prstGeom>
+          <a:noFill/>
+        </p:spPr>
+        <p:txBody>
+          <a:bodyPr wrap="square" anchor="t" lIns="0" rIns="0" tIns="0" bIns="0">
+            <a:spAutoFit/>
+          </a:bodyPr>
+          <a:lstStyle/>
+          <a:p>
+            <a:pPr algn="ctr">
+              <a:lnSpc>
+                <a:spcPct val="115000"/>
+              </a:lnSpc>
+            </a:pPr>
+            <a:r>
+              <a:rPr sz="1300" b="1" i="1">
+                <a:solidFill>
+                  <a:srgbClr val="B32B2B"/>
+                </a:solidFill>
+                <a:latin typeface="Calibri"/>
+              </a:rPr>
+              <a:t>We wrote the plan in 2020. The grid is still waiting in 2026.</a:t>
+            </a:r>
+          </a:p>
+        </p:txBody>
+      </p:sp>
+      <p:sp>
+        <p:nvSpPr>
+          <p:cNvPr id="35" name="Rectangle 34"/>
+          <p:cNvSpPr/>
+          <p:nvPr/>
+        </p:nvSpPr>
+        <p:spPr>
+          <a:xfrm>
+            <a:off x="0" y="6675120"/>
+            <a:ext cx="12191695" cy="182880"/>
+          </a:xfrm>
+          <a:prstGeom prst="rect">
+            <a:avLst/>
+          </a:prstGeom>
+          <a:solidFill>
+            <a:srgbClr val="C8CED6"/>
+          </a:solidFill>
+          <a:ln>
+            <a:noFill/>
+          </a:ln>
+          <a:effectLst/>
+        </p:spPr>
+        <p:style>
+          <a:lnRef idx="1">
+            <a:schemeClr val="accent1"/>
+          </a:lnRef>
+          <a:fillRef idx="3">
+            <a:schemeClr val="accent1"/>
+          </a:fillRef>
+          <a:effectRef idx="2">
+            <a:schemeClr val="accent1"/>
+          </a:effectRef>
+          <a:fontRef idx="minor">
+            <a:schemeClr val="lt1"/>
+          </a:fontRef>
+        </p:style>
+        <p:txBody>
+          <a:bodyPr rtlCol="0" anchor="ctr"/>
+          <a:lstStyle/>
+          <a:p>
+            <a:pPr algn="ctr"/>
+          </a:p>
+        </p:txBody>
+      </p:sp>
+      <p:sp>
+        <p:nvSpPr>
+          <p:cNvPr id="36" name="Rectangle 35"/>
+          <p:cNvSpPr/>
+          <p:nvPr/>
+        </p:nvSpPr>
+        <p:spPr>
+          <a:xfrm>
+            <a:off x="0" y="6675120"/>
+            <a:ext cx="640080" cy="182880"/>
+          </a:xfrm>
+          <a:prstGeom prst="rect">
+            <a:avLst/>
+          </a:prstGeom>
+          <a:solidFill>
+            <a:srgbClr val="CC7A2E"/>
+          </a:solidFill>
+          <a:ln>
+            <a:noFill/>
+          </a:ln>
+          <a:effectLst/>
+        </p:spPr>
+        <p:style>
+          <a:lnRef idx="1">
+            <a:schemeClr val="accent1"/>
+          </a:lnRef>
+          <a:fillRef idx="3">
+            <a:schemeClr val="accent1"/>
+          </a:fillRef>
+          <a:effectRef idx="2">
+            <a:schemeClr val="accent1"/>
+          </a:effectRef>
+          <a:fontRef idx="minor">
+            <a:schemeClr val="lt1"/>
+          </a:fontRef>
+        </p:style>
+        <p:txBody>
+          <a:bodyPr rtlCol="0" anchor="ctr"/>
+          <a:lstStyle/>
+          <a:p>
+            <a:pPr algn="ctr"/>
+          </a:p>
+        </p:txBody>
+      </p:sp>
+      <p:sp>
+        <p:nvSpPr>
+          <p:cNvPr id="37" name="TextBox 36"/>
+          <p:cNvSpPr txBox="1"/>
+          <p:nvPr/>
+        </p:nvSpPr>
+        <p:spPr>
+          <a:xfrm>
+            <a:off x="457200" y="6446520"/>
+            <a:ext cx="9601200" cy="228600"/>
+          </a:xfrm>
+          <a:prstGeom prst="rect">
+            <a:avLst/>
+          </a:prstGeom>
+          <a:noFill/>
+        </p:spPr>
+        <p:txBody>
+          <a:bodyPr wrap="square" anchor="t" lIns="0" rIns="0" tIns="0" bIns="0">
+            <a:spAutoFit/>
+          </a:bodyPr>
+          <a:lstStyle/>
+          <a:p>
+            <a:pPr algn="l">
+              <a:lnSpc>
+                <a:spcPct val="115000"/>
+              </a:lnSpc>
+            </a:pPr>
+            <a:r>
+              <a:rPr sz="900" b="0" i="1">
+                <a:solidFill>
+                  <a:srgbClr val="6B7280"/>
+                </a:solidFill>
+                <a:latin typeface="Calibri"/>
+              </a:rPr>
+              <a:t>Sources: ZESCO Annual Reports 2023-2024 · Zambia 7NDP &amp; Vision 2030</a:t>
+            </a:r>
+          </a:p>
+        </p:txBody>
+      </p:sp>
+      <p:sp>
+        <p:nvSpPr>
+          <p:cNvPr id="38" name="TextBox 37"/>
+          <p:cNvSpPr txBox="1"/>
+          <p:nvPr/>
+        </p:nvSpPr>
+        <p:spPr>
+          <a:xfrm>
+            <a:off x="10515600" y="6446520"/>
+            <a:ext cx="1463040" cy="228600"/>
+          </a:xfrm>
+          <a:prstGeom prst="rect">
+            <a:avLst/>
+          </a:prstGeom>
+          <a:noFill/>
+        </p:spPr>
+        <p:txBody>
+          <a:bodyPr wrap="square" anchor="t" lIns="0" rIns="0" tIns="0" bIns="0">
+            <a:spAutoFit/>
+          </a:bodyPr>
+          <a:lstStyle/>
+          <a:p>
+            <a:pPr algn="r">
+              <a:lnSpc>
+                <a:spcPct val="115000"/>
+              </a:lnSpc>
+            </a:pPr>
+            <a:r>
+              <a:rPr sz="900" b="1" i="0">
+                <a:solidFill>
+                  <a:srgbClr val="2A3344"/>
+                </a:solidFill>
+                <a:latin typeface="Calibri"/>
+              </a:rPr>
+              <a:t>4 / 5  ·  E. Mwaba</a:t>
             </a:r>
           </a:p>
         </p:txBody>
@@ -6521,7 +7965,7 @@
     <p:bg>
       <p:bgPr>
         <a:solidFill>
-          <a:srgbClr val="0B2E4F"/>
+          <a:srgbClr val="06142A"/>
         </a:solidFill>
         <a:effectLst/>
       </p:bgPr>
@@ -6542,13 +7986,13 @@
         <p:spPr>
           <a:xfrm>
             <a:off x="0" y="0"/>
-            <a:ext cx="12191695" cy="73152"/>
+            <a:ext cx="12191695" cy="91440"/>
           </a:xfrm>
           <a:prstGeom prst="rect">
             <a:avLst/>
           </a:prstGeom>
           <a:solidFill>
-            <a:srgbClr val="B86B2A"/>
+            <a:srgbClr val="CC7A2E"/>
           </a:solidFill>
           <a:ln>
             <a:noFill/>
@@ -6585,8 +8029,8 @@
         </p:nvSpPr>
         <p:spPr>
           <a:xfrm>
-            <a:off x="548640" y="365760"/>
-            <a:ext cx="11064240" cy="640080"/>
+            <a:off x="548640" y="502920"/>
+            <a:ext cx="9144000" cy="365760"/>
           </a:xfrm>
           <a:prstGeom prst="rect">
             <a:avLst/>
@@ -6594,20 +8038,24 @@
           <a:noFill/>
         </p:spPr>
         <p:txBody>
-          <a:bodyPr wrap="square" lIns="45720" rIns="45720" tIns="18288" bIns="18288">
+          <a:bodyPr wrap="square" anchor="t" lIns="0" rIns="0" tIns="0" bIns="0">
             <a:spAutoFit/>
           </a:bodyPr>
           <a:lstStyle/>
           <a:p>
-            <a:pPr algn="l"/>
-            <a:r>
-              <a:rPr sz="3400" b="1">
-                <a:solidFill>
-                  <a:srgbClr val="FFFFFF"/>
+            <a:pPr algn="l">
+              <a:lnSpc>
+                <a:spcPct val="115000"/>
+              </a:lnSpc>
+            </a:pPr>
+            <a:r>
+              <a:rPr sz="1100" b="1" i="0">
+                <a:solidFill>
+                  <a:srgbClr val="E8A860"/>
                 </a:solidFill>
                 <a:latin typeface="Calibri"/>
               </a:rPr>
-              <a:t>Call to Action: Enact the Nuclear Bill</a:t>
+              <a:t>04  ·  THE ASK</a:t>
             </a:r>
           </a:p>
         </p:txBody>
@@ -6620,8 +8068,8 @@
         </p:nvSpPr>
         <p:spPr>
           <a:xfrm>
-            <a:off x="548640" y="1005840"/>
-            <a:ext cx="11064240" cy="457200"/>
+            <a:off x="548640" y="777240"/>
+            <a:ext cx="11064240" cy="822960"/>
           </a:xfrm>
           <a:prstGeom prst="rect">
             <a:avLst/>
@@ -6629,34 +8077,73 @@
           <a:noFill/>
         </p:spPr>
         <p:txBody>
-          <a:bodyPr wrap="square" lIns="45720" rIns="45720" tIns="18288" bIns="18288">
+          <a:bodyPr wrap="square" anchor="t" lIns="0" rIns="0" tIns="0" bIns="0">
             <a:spAutoFit/>
           </a:bodyPr>
           <a:lstStyle/>
           <a:p>
-            <a:pPr algn="l"/>
-            <a:r>
-              <a:rPr sz="1800" b="0">
-                <a:solidFill>
-                  <a:srgbClr val="B86B2A"/>
+            <a:pPr algn="l">
+              <a:lnSpc>
+                <a:spcPct val="115000"/>
+              </a:lnSpc>
+            </a:pPr>
+            <a:r>
+              <a:rPr sz="3800" b="1" i="0">
+                <a:solidFill>
+                  <a:srgbClr val="FFFFFF"/>
                 </a:solidFill>
                 <a:latin typeface="Calibri"/>
               </a:rPr>
-              <a:t>Turning policy into power</a:t>
-            </a:r>
-          </a:p>
-        </p:txBody>
-      </p:sp>
-      <p:sp>
-        <p:nvSpPr>
-          <p:cNvPr id="5" name="TextBox 4"/>
+              <a:t>Three decisions. One generation.</a:t>
+            </a:r>
+          </a:p>
+        </p:txBody>
+      </p:sp>
+      <p:cxnSp>
+        <p:nvCxnSpPr>
+          <p:cNvPr id="5" name="Connector 4"/>
+          <p:cNvCxnSpPr/>
+          <p:nvPr/>
+        </p:nvCxnSpPr>
+        <p:spPr>
+          <a:xfrm>
+            <a:off x="548640" y="1554480"/>
+            <a:ext cx="1097280" cy="0"/>
+          </a:xfrm>
+          <a:prstGeom prst="line">
+            <a:avLst/>
+          </a:prstGeom>
+          <a:ln w="19050">
+            <a:solidFill>
+              <a:srgbClr val="CC7A2E"/>
+            </a:solidFill>
+          </a:ln>
+        </p:spPr>
+        <p:style>
+          <a:lnRef idx="2">
+            <a:schemeClr val="accent1"/>
+          </a:lnRef>
+          <a:fillRef idx="0">
+            <a:schemeClr val="accent1"/>
+          </a:fillRef>
+          <a:effectRef idx="1">
+            <a:schemeClr val="accent1"/>
+          </a:effectRef>
+          <a:fontRef idx="minor">
+            <a:schemeClr val="tx1"/>
+          </a:fontRef>
+        </p:style>
+      </p:cxnSp>
+      <p:sp>
+        <p:nvSpPr>
+          <p:cNvPr id="6" name="TextBox 5"/>
           <p:cNvSpPr txBox="1"/>
           <p:nvPr/>
         </p:nvSpPr>
         <p:spPr>
           <a:xfrm>
-            <a:off x="548640" y="1828800"/>
-            <a:ext cx="11064240" cy="548640"/>
+            <a:off x="548640" y="1645920"/>
+            <a:ext cx="11064240" cy="457200"/>
           </a:xfrm>
           <a:prstGeom prst="rect">
             <a:avLst/>
@@ -6664,40 +8151,44 @@
           <a:noFill/>
         </p:spPr>
         <p:txBody>
-          <a:bodyPr wrap="square" lIns="45720" rIns="45720" tIns="18288" bIns="18288">
+          <a:bodyPr wrap="square" anchor="t" lIns="0" rIns="0" tIns="0" bIns="0">
             <a:spAutoFit/>
           </a:bodyPr>
           <a:lstStyle/>
           <a:p>
-            <a:pPr algn="l"/>
-            <a:r>
-              <a:rPr sz="2200" b="1">
-                <a:solidFill>
-                  <a:srgbClr val="FFFFFF"/>
+            <a:pPr algn="l">
+              <a:lnSpc>
+                <a:spcPct val="115000"/>
+              </a:lnSpc>
+            </a:pPr>
+            <a:r>
+              <a:rPr sz="1400" b="0" i="1">
+                <a:solidFill>
+                  <a:srgbClr val="CFD8E3"/>
                 </a:solidFill>
                 <a:latin typeface="Calibri"/>
               </a:rPr>
-              <a:t>Three actions. One generation.</a:t>
-            </a:r>
-          </a:p>
-        </p:txBody>
-      </p:sp>
-      <p:sp>
-        <p:nvSpPr>
-          <p:cNvPr id="6" name="Rectangle 5"/>
+              <a:t>From radiological fear to industrial mastery — the choice is legislative, not technical.</a:t>
+            </a:r>
+          </a:p>
+        </p:txBody>
+      </p:sp>
+      <p:sp>
+        <p:nvSpPr>
+          <p:cNvPr id="7" name="Rectangle 6"/>
           <p:cNvSpPr/>
           <p:nvPr/>
         </p:nvSpPr>
         <p:spPr>
           <a:xfrm>
-            <a:off x="548640" y="2514600"/>
-            <a:ext cx="1920240" cy="868680"/>
+            <a:off x="548640" y="2423160"/>
+            <a:ext cx="1051560" cy="1097280"/>
           </a:xfrm>
           <a:prstGeom prst="rect">
             <a:avLst/>
           </a:prstGeom>
           <a:solidFill>
-            <a:srgbClr val="B86B2A"/>
+            <a:srgbClr val="CC7A2E"/>
           </a:solidFill>
           <a:ln>
             <a:noFill/>
@@ -6728,14 +8219,14 @@
       </p:sp>
       <p:sp>
         <p:nvSpPr>
-          <p:cNvPr id="7" name="TextBox 6"/>
+          <p:cNvPr id="8" name="TextBox 7"/>
           <p:cNvSpPr txBox="1"/>
           <p:nvPr/>
         </p:nvSpPr>
         <p:spPr>
           <a:xfrm>
             <a:off x="548640" y="2715768"/>
-            <a:ext cx="1920240" cy="457200"/>
+            <a:ext cx="1051560" cy="640080"/>
           </a:xfrm>
           <a:prstGeom prst="rect">
             <a:avLst/>
@@ -6743,40 +8234,44 @@
           <a:noFill/>
         </p:spPr>
         <p:txBody>
-          <a:bodyPr wrap="square" lIns="45720" rIns="45720" tIns="18288" bIns="18288">
+          <a:bodyPr wrap="square" anchor="t" lIns="0" rIns="0" tIns="0" bIns="0">
             <a:spAutoFit/>
           </a:bodyPr>
           <a:lstStyle/>
           <a:p>
-            <a:pPr algn="ctr"/>
-            <a:r>
-              <a:rPr sz="1800" b="1">
-                <a:solidFill>
-                  <a:srgbClr val="0B2E4F"/>
+            <a:pPr algn="ctr">
+              <a:lnSpc>
+                <a:spcPct val="115000"/>
+              </a:lnSpc>
+            </a:pPr>
+            <a:r>
+              <a:rPr sz="3400" b="1" i="0">
+                <a:solidFill>
+                  <a:srgbClr val="06142A"/>
                 </a:solidFill>
                 <a:latin typeface="Calibri"/>
               </a:rPr>
-              <a:t>1. ENACT</a:t>
-            </a:r>
-          </a:p>
-        </p:txBody>
-      </p:sp>
-      <p:sp>
-        <p:nvSpPr>
-          <p:cNvPr id="8" name="Rectangle 7"/>
+              <a:t>01</a:t>
+            </a:r>
+          </a:p>
+        </p:txBody>
+      </p:sp>
+      <p:sp>
+        <p:nvSpPr>
+          <p:cNvPr id="9" name="Rectangle 8"/>
           <p:cNvSpPr/>
           <p:nvPr/>
         </p:nvSpPr>
         <p:spPr>
           <a:xfrm>
-            <a:off x="2560320" y="2514600"/>
-            <a:ext cx="9144000" cy="868680"/>
+            <a:off x="1600200" y="2423160"/>
+            <a:ext cx="10058400" cy="1097280"/>
           </a:xfrm>
           <a:prstGeom prst="rect">
             <a:avLst/>
           </a:prstGeom>
           <a:solidFill>
-            <a:srgbClr val="143A60"/>
+            <a:srgbClr val="12284A"/>
           </a:solidFill>
           <a:ln>
             <a:noFill/>
@@ -6807,55 +8302,20 @@
       </p:sp>
       <p:sp>
         <p:nvSpPr>
-          <p:cNvPr id="9" name="TextBox 8"/>
-          <p:cNvSpPr txBox="1"/>
-          <p:nvPr/>
-        </p:nvSpPr>
-        <p:spPr>
-          <a:xfrm>
-            <a:off x="2743200" y="2679192"/>
-            <a:ext cx="8869680" cy="640080"/>
-          </a:xfrm>
-          <a:prstGeom prst="rect">
-            <a:avLst/>
-          </a:prstGeom>
-          <a:noFill/>
-        </p:spPr>
-        <p:txBody>
-          <a:bodyPr wrap="square" lIns="45720" rIns="45720" tIns="18288" bIns="18288">
-            <a:spAutoFit/>
-          </a:bodyPr>
-          <a:lstStyle/>
-          <a:p>
-            <a:pPr algn="l"/>
-            <a:r>
-              <a:rPr sz="1400" b="0">
-                <a:solidFill>
-                  <a:srgbClr val="FFFFFF"/>
-                </a:solidFill>
-                <a:latin typeface="Calibri"/>
-              </a:rPr>
-              <a:t>Pass the Nuclear Bill — formalise NSPA as independent regulator in line with the IAEA Milestone Approach.</a:t>
-            </a:r>
-          </a:p>
-        </p:txBody>
-      </p:sp>
-      <p:sp>
-        <p:nvSpPr>
           <p:cNvPr id="10" name="Rectangle 9"/>
           <p:cNvSpPr/>
           <p:nvPr/>
         </p:nvSpPr>
         <p:spPr>
           <a:xfrm>
-            <a:off x="548640" y="3566160"/>
-            <a:ext cx="1920240" cy="868680"/>
+            <a:off x="1600200" y="2423160"/>
+            <a:ext cx="10058400" cy="36576"/>
           </a:xfrm>
           <a:prstGeom prst="rect">
             <a:avLst/>
           </a:prstGeom>
           <a:solidFill>
-            <a:srgbClr val="B86B2A"/>
+            <a:srgbClr val="334466"/>
           </a:solidFill>
           <a:ln>
             <a:noFill/>
@@ -6892,8 +8352,8 @@
         </p:nvSpPr>
         <p:spPr>
           <a:xfrm>
-            <a:off x="548640" y="3767328"/>
-            <a:ext cx="1920240" cy="457200"/>
+            <a:off x="1828800" y="2542032"/>
+            <a:ext cx="1828800" cy="274320"/>
           </a:xfrm>
           <a:prstGeom prst="rect">
             <a:avLst/>
@@ -6901,40 +8361,122 @@
           <a:noFill/>
         </p:spPr>
         <p:txBody>
-          <a:bodyPr wrap="square" lIns="45720" rIns="45720" tIns="18288" bIns="18288">
+          <a:bodyPr wrap="square" anchor="t" lIns="0" rIns="0" tIns="0" bIns="0">
             <a:spAutoFit/>
           </a:bodyPr>
           <a:lstStyle/>
           <a:p>
-            <a:pPr algn="ctr"/>
-            <a:r>
-              <a:rPr sz="1800" b="1">
-                <a:solidFill>
-                  <a:srgbClr val="0B2E4F"/>
+            <a:pPr algn="l">
+              <a:lnSpc>
+                <a:spcPct val="115000"/>
+              </a:lnSpc>
+            </a:pPr>
+            <a:r>
+              <a:rPr sz="1100" b="1" i="0">
+                <a:solidFill>
+                  <a:srgbClr val="E8A860"/>
                 </a:solidFill>
                 <a:latin typeface="Calibri"/>
               </a:rPr>
-              <a:t>2. EQUIP</a:t>
-            </a:r>
-          </a:p>
-        </p:txBody>
-      </p:sp>
-      <p:sp>
-        <p:nvSpPr>
-          <p:cNvPr id="12" name="Rectangle 11"/>
+              <a:t>ENACT</a:t>
+            </a:r>
+          </a:p>
+        </p:txBody>
+      </p:sp>
+      <p:sp>
+        <p:nvSpPr>
+          <p:cNvPr id="12" name="TextBox 11"/>
+          <p:cNvSpPr txBox="1"/>
+          <p:nvPr/>
+        </p:nvSpPr>
+        <p:spPr>
+          <a:xfrm>
+            <a:off x="1828800" y="2788920"/>
+            <a:ext cx="9601200" cy="365760"/>
+          </a:xfrm>
+          <a:prstGeom prst="rect">
+            <a:avLst/>
+          </a:prstGeom>
+          <a:noFill/>
+        </p:spPr>
+        <p:txBody>
+          <a:bodyPr wrap="square" anchor="t" lIns="0" rIns="0" tIns="0" bIns="0">
+            <a:spAutoFit/>
+          </a:bodyPr>
+          <a:lstStyle/>
+          <a:p>
+            <a:pPr algn="l">
+              <a:lnSpc>
+                <a:spcPct val="115000"/>
+              </a:lnSpc>
+            </a:pPr>
+            <a:r>
+              <a:rPr sz="1800" b="1" i="0">
+                <a:solidFill>
+                  <a:srgbClr val="FFFFFF"/>
+                </a:solidFill>
+                <a:latin typeface="Calibri"/>
+              </a:rPr>
+              <a:t>Pass the Nuclear Bill.</a:t>
+            </a:r>
+          </a:p>
+        </p:txBody>
+      </p:sp>
+      <p:sp>
+        <p:nvSpPr>
+          <p:cNvPr id="13" name="TextBox 12"/>
+          <p:cNvSpPr txBox="1"/>
+          <p:nvPr/>
+        </p:nvSpPr>
+        <p:spPr>
+          <a:xfrm>
+            <a:off x="1828800" y="3108960"/>
+            <a:ext cx="9601200" cy="457200"/>
+          </a:xfrm>
+          <a:prstGeom prst="rect">
+            <a:avLst/>
+          </a:prstGeom>
+          <a:noFill/>
+        </p:spPr>
+        <p:txBody>
+          <a:bodyPr wrap="square" anchor="t" lIns="0" rIns="0" tIns="0" bIns="0">
+            <a:spAutoFit/>
+          </a:bodyPr>
+          <a:lstStyle/>
+          <a:p>
+            <a:pPr algn="l">
+              <a:lnSpc>
+                <a:spcPct val="125000"/>
+              </a:lnSpc>
+            </a:pPr>
+            <a:r>
+              <a:rPr sz="1200" b="0" i="0">
+                <a:solidFill>
+                  <a:srgbClr val="CFD8E3"/>
+                </a:solidFill>
+                <a:latin typeface="Calibri"/>
+              </a:rPr>
+              <a:t>Empower NSPA as an IAEA-aligned independent regulator. Without it, every other step is symbolic.</a:t>
+            </a:r>
+          </a:p>
+        </p:txBody>
+      </p:sp>
+      <p:sp>
+        <p:nvSpPr>
+          <p:cNvPr id="14" name="Rectangle 13"/>
           <p:cNvSpPr/>
           <p:nvPr/>
         </p:nvSpPr>
         <p:spPr>
           <a:xfrm>
-            <a:off x="2560320" y="3566160"/>
-            <a:ext cx="9144000" cy="868680"/>
+            <a:off x="548640" y="3611880"/>
+            <a:ext cx="1051560" cy="1097280"/>
           </a:xfrm>
           <a:prstGeom prst="rect">
             <a:avLst/>
           </a:prstGeom>
           <a:solidFill>
-            <a:srgbClr val="143A60"/>
+            <a:srgbClr val="CC7A2E"/>
           </a:solidFill>
           <a:ln>
             <a:noFill/>
@@ -6965,14 +8507,14 @@
       </p:sp>
       <p:sp>
         <p:nvSpPr>
-          <p:cNvPr id="13" name="TextBox 12"/>
+          <p:cNvPr id="15" name="TextBox 14"/>
           <p:cNvSpPr txBox="1"/>
           <p:nvPr/>
         </p:nvSpPr>
         <p:spPr>
           <a:xfrm>
-            <a:off x="2743200" y="3730752"/>
-            <a:ext cx="8869680" cy="640080"/>
+            <a:off x="548640" y="3904488"/>
+            <a:ext cx="1051560" cy="640080"/>
           </a:xfrm>
           <a:prstGeom prst="rect">
             <a:avLst/>
@@ -6980,40 +8522,44 @@
           <a:noFill/>
         </p:spPr>
         <p:txBody>
-          <a:bodyPr wrap="square" lIns="45720" rIns="45720" tIns="18288" bIns="18288">
+          <a:bodyPr wrap="square" anchor="t" lIns="0" rIns="0" tIns="0" bIns="0">
             <a:spAutoFit/>
           </a:bodyPr>
           <a:lstStyle/>
           <a:p>
-            <a:pPr algn="l"/>
-            <a:r>
-              <a:rPr sz="1400" b="0">
-                <a:solidFill>
-                  <a:srgbClr val="FFFFFF"/>
+            <a:pPr algn="ctr">
+              <a:lnSpc>
+                <a:spcPct val="115000"/>
+              </a:lnSpc>
+            </a:pPr>
+            <a:r>
+              <a:rPr sz="3400" b="1" i="0">
+                <a:solidFill>
+                  <a:srgbClr val="06142A"/>
                 </a:solidFill>
                 <a:latin typeface="Calibri"/>
               </a:rPr>
-              <a:t>Fund expansion of Zambia's radiological monitoring — starting with Siavonga — to convert invisible risk into measured data.</a:t>
-            </a:r>
-          </a:p>
-        </p:txBody>
-      </p:sp>
-      <p:sp>
-        <p:nvSpPr>
-          <p:cNvPr id="14" name="Rectangle 13"/>
+              <a:t>02</a:t>
+            </a:r>
+          </a:p>
+        </p:txBody>
+      </p:sp>
+      <p:sp>
+        <p:nvSpPr>
+          <p:cNvPr id="16" name="Rectangle 15"/>
           <p:cNvSpPr/>
           <p:nvPr/>
         </p:nvSpPr>
         <p:spPr>
           <a:xfrm>
-            <a:off x="548640" y="4617720"/>
-            <a:ext cx="1920240" cy="868680"/>
+            <a:off x="1600200" y="3611880"/>
+            <a:ext cx="10058400" cy="1097280"/>
           </a:xfrm>
           <a:prstGeom prst="rect">
             <a:avLst/>
           </a:prstGeom>
           <a:solidFill>
-            <a:srgbClr val="B86B2A"/>
+            <a:srgbClr val="12284A"/>
           </a:solidFill>
           <a:ln>
             <a:noFill/>
@@ -7044,55 +8590,20 @@
       </p:sp>
       <p:sp>
         <p:nvSpPr>
-          <p:cNvPr id="15" name="TextBox 14"/>
-          <p:cNvSpPr txBox="1"/>
-          <p:nvPr/>
-        </p:nvSpPr>
-        <p:spPr>
-          <a:xfrm>
-            <a:off x="548640" y="4818888"/>
-            <a:ext cx="1920240" cy="457200"/>
-          </a:xfrm>
-          <a:prstGeom prst="rect">
-            <a:avLst/>
-          </a:prstGeom>
-          <a:noFill/>
-        </p:spPr>
-        <p:txBody>
-          <a:bodyPr wrap="square" lIns="45720" rIns="45720" tIns="18288" bIns="18288">
-            <a:spAutoFit/>
-          </a:bodyPr>
-          <a:lstStyle/>
-          <a:p>
-            <a:pPr algn="ctr"/>
-            <a:r>
-              <a:rPr sz="1800" b="1">
-                <a:solidFill>
-                  <a:srgbClr val="0B2E4F"/>
-                </a:solidFill>
-                <a:latin typeface="Calibri"/>
-              </a:rPr>
-              <a:t>3. EXECUTE</a:t>
-            </a:r>
-          </a:p>
-        </p:txBody>
-      </p:sp>
-      <p:sp>
-        <p:nvSpPr>
-          <p:cNvPr id="16" name="Rectangle 15"/>
+          <p:cNvPr id="17" name="Rectangle 16"/>
           <p:cNvSpPr/>
           <p:nvPr/>
         </p:nvSpPr>
         <p:spPr>
           <a:xfrm>
-            <a:off x="2560320" y="4617720"/>
-            <a:ext cx="9144000" cy="868680"/>
+            <a:off x="1600200" y="3611880"/>
+            <a:ext cx="10058400" cy="36576"/>
           </a:xfrm>
           <a:prstGeom prst="rect">
             <a:avLst/>
           </a:prstGeom>
           <a:solidFill>
-            <a:srgbClr val="143A60"/>
+            <a:srgbClr val="334466"/>
           </a:solidFill>
           <a:ln>
             <a:noFill/>
@@ -7123,14 +8634,14 @@
       </p:sp>
       <p:sp>
         <p:nvSpPr>
-          <p:cNvPr id="17" name="TextBox 16"/>
+          <p:cNvPr id="18" name="TextBox 17"/>
           <p:cNvSpPr txBox="1"/>
           <p:nvPr/>
         </p:nvSpPr>
         <p:spPr>
           <a:xfrm>
-            <a:off x="2743200" y="4782312"/>
-            <a:ext cx="8869680" cy="640080"/>
+            <a:off x="1828800" y="3730752"/>
+            <a:ext cx="1828800" cy="274320"/>
           </a:xfrm>
           <a:prstGeom prst="rect">
             <a:avLst/>
@@ -7138,40 +8649,122 @@
           <a:noFill/>
         </p:spPr>
         <p:txBody>
-          <a:bodyPr wrap="square" lIns="45720" rIns="45720" tIns="18288" bIns="18288">
+          <a:bodyPr wrap="square" anchor="t" lIns="0" rIns="0" tIns="0" bIns="0">
             <a:spAutoFit/>
           </a:bodyPr>
           <a:lstStyle/>
           <a:p>
-            <a:pPr algn="l"/>
-            <a:r>
-              <a:rPr sz="1400" b="0">
-                <a:solidFill>
-                  <a:srgbClr val="FFFFFF"/>
+            <a:pPr algn="l">
+              <a:lnSpc>
+                <a:spcPct val="115000"/>
+              </a:lnSpc>
+            </a:pPr>
+            <a:r>
+              <a:rPr sz="1100" b="1" i="0">
+                <a:solidFill>
+                  <a:srgbClr val="E8A860"/>
                 </a:solidFill>
                 <a:latin typeface="Calibri"/>
               </a:rPr>
-              <a:t>Advance CNST and pre-feasibility for a 2,000 MW programme leveraging domestic uranium and existing partnerships.</a:t>
-            </a:r>
-          </a:p>
-        </p:txBody>
-      </p:sp>
-      <p:sp>
-        <p:nvSpPr>
-          <p:cNvPr id="18" name="Rectangle 17"/>
+              <a:t>EQUIP</a:t>
+            </a:r>
+          </a:p>
+        </p:txBody>
+      </p:sp>
+      <p:sp>
+        <p:nvSpPr>
+          <p:cNvPr id="19" name="TextBox 18"/>
+          <p:cNvSpPr txBox="1"/>
+          <p:nvPr/>
+        </p:nvSpPr>
+        <p:spPr>
+          <a:xfrm>
+            <a:off x="1828800" y="3977640"/>
+            <a:ext cx="9601200" cy="365760"/>
+          </a:xfrm>
+          <a:prstGeom prst="rect">
+            <a:avLst/>
+          </a:prstGeom>
+          <a:noFill/>
+        </p:spPr>
+        <p:txBody>
+          <a:bodyPr wrap="square" anchor="t" lIns="0" rIns="0" tIns="0" bIns="0">
+            <a:spAutoFit/>
+          </a:bodyPr>
+          <a:lstStyle/>
+          <a:p>
+            <a:pPr algn="l">
+              <a:lnSpc>
+                <a:spcPct val="115000"/>
+              </a:lnSpc>
+            </a:pPr>
+            <a:r>
+              <a:rPr sz="1800" b="1" i="0">
+                <a:solidFill>
+                  <a:srgbClr val="FFFFFF"/>
+                </a:solidFill>
+                <a:latin typeface="Calibri"/>
+              </a:rPr>
+              <a:t>Fund radiological monitoring — starting in Siavonga.</a:t>
+            </a:r>
+          </a:p>
+        </p:txBody>
+      </p:sp>
+      <p:sp>
+        <p:nvSpPr>
+          <p:cNvPr id="20" name="TextBox 19"/>
+          <p:cNvSpPr txBox="1"/>
+          <p:nvPr/>
+        </p:nvSpPr>
+        <p:spPr>
+          <a:xfrm>
+            <a:off x="1828800" y="4297680"/>
+            <a:ext cx="9601200" cy="457200"/>
+          </a:xfrm>
+          <a:prstGeom prst="rect">
+            <a:avLst/>
+          </a:prstGeom>
+          <a:noFill/>
+        </p:spPr>
+        <p:txBody>
+          <a:bodyPr wrap="square" anchor="t" lIns="0" rIns="0" tIns="0" bIns="0">
+            <a:spAutoFit/>
+          </a:bodyPr>
+          <a:lstStyle/>
+          <a:p>
+            <a:pPr algn="l">
+              <a:lnSpc>
+                <a:spcPct val="125000"/>
+              </a:lnSpc>
+            </a:pPr>
+            <a:r>
+              <a:rPr sz="1200" b="0" i="0">
+                <a:solidFill>
+                  <a:srgbClr val="CFD8E3"/>
+                </a:solidFill>
+                <a:latin typeface="Calibri"/>
+              </a:rPr>
+              <a:t>Convert invisible risk into measured data. No Zambian community should live next to uranium without instruments.</a:t>
+            </a:r>
+          </a:p>
+        </p:txBody>
+      </p:sp>
+      <p:sp>
+        <p:nvSpPr>
+          <p:cNvPr id="21" name="Rectangle 20"/>
           <p:cNvSpPr/>
           <p:nvPr/>
         </p:nvSpPr>
         <p:spPr>
           <a:xfrm>
-            <a:off x="548640" y="5669280"/>
-            <a:ext cx="11064240" cy="594360"/>
+            <a:off x="548640" y="4800600"/>
+            <a:ext cx="1051560" cy="1097280"/>
           </a:xfrm>
           <a:prstGeom prst="rect">
             <a:avLst/>
           </a:prstGeom>
           <a:solidFill>
-            <a:srgbClr val="B86B2A"/>
+            <a:srgbClr val="CC7A2E"/>
           </a:solidFill>
           <a:ln>
             <a:noFill/>
@@ -7202,14 +8795,14 @@
       </p:sp>
       <p:sp>
         <p:nvSpPr>
-          <p:cNvPr id="19" name="TextBox 18"/>
+          <p:cNvPr id="22" name="TextBox 21"/>
           <p:cNvSpPr txBox="1"/>
           <p:nvPr/>
         </p:nvSpPr>
         <p:spPr>
           <a:xfrm>
-            <a:off x="548640" y="5760720"/>
-            <a:ext cx="11064240" cy="457200"/>
+            <a:off x="548640" y="5093208"/>
+            <a:ext cx="1051560" cy="640080"/>
           </a:xfrm>
           <a:prstGeom prst="rect">
             <a:avLst/>
@@ -7217,40 +8810,44 @@
           <a:noFill/>
         </p:spPr>
         <p:txBody>
-          <a:bodyPr wrap="square" lIns="45720" rIns="45720" tIns="18288" bIns="18288">
+          <a:bodyPr wrap="square" anchor="t" lIns="0" rIns="0" tIns="0" bIns="0">
             <a:spAutoFit/>
           </a:bodyPr>
           <a:lstStyle/>
           <a:p>
-            <a:pPr algn="ctr"/>
-            <a:r>
-              <a:rPr sz="1500" b="1">
-                <a:solidFill>
-                  <a:srgbClr val="0B2E4F"/>
+            <a:pPr algn="ctr">
+              <a:lnSpc>
+                <a:spcPct val="115000"/>
+              </a:lnSpc>
+            </a:pPr>
+            <a:r>
+              <a:rPr sz="3400" b="1" i="0">
+                <a:solidFill>
+                  <a:srgbClr val="06142A"/>
                 </a:solidFill>
                 <a:latin typeface="Calibri"/>
               </a:rPr>
-              <a:t>From radiological FEAR to industrial MASTERY — the choice is legislative, not technical.</a:t>
-            </a:r>
-          </a:p>
-        </p:txBody>
-      </p:sp>
-      <p:sp>
-        <p:nvSpPr>
-          <p:cNvPr id="20" name="Rectangle 19"/>
+              <a:t>03</a:t>
+            </a:r>
+          </a:p>
+        </p:txBody>
+      </p:sp>
+      <p:sp>
+        <p:nvSpPr>
+          <p:cNvPr id="23" name="Rectangle 22"/>
           <p:cNvSpPr/>
           <p:nvPr/>
         </p:nvSpPr>
         <p:spPr>
           <a:xfrm>
-            <a:off x="0" y="6446520"/>
-            <a:ext cx="12191695" cy="411480"/>
+            <a:off x="1600200" y="4800600"/>
+            <a:ext cx="10058400" cy="1097280"/>
           </a:xfrm>
           <a:prstGeom prst="rect">
             <a:avLst/>
           </a:prstGeom>
           <a:solidFill>
-            <a:srgbClr val="0B2E4F"/>
+            <a:srgbClr val="12284A"/>
           </a:solidFill>
           <a:ln>
             <a:noFill/>
@@ -7281,14 +8878,58 @@
       </p:sp>
       <p:sp>
         <p:nvSpPr>
-          <p:cNvPr id="21" name="TextBox 20"/>
+          <p:cNvPr id="24" name="Rectangle 23"/>
+          <p:cNvSpPr/>
+          <p:nvPr/>
+        </p:nvSpPr>
+        <p:spPr>
+          <a:xfrm>
+            <a:off x="1600200" y="4800600"/>
+            <a:ext cx="10058400" cy="36576"/>
+          </a:xfrm>
+          <a:prstGeom prst="rect">
+            <a:avLst/>
+          </a:prstGeom>
+          <a:solidFill>
+            <a:srgbClr val="334466"/>
+          </a:solidFill>
+          <a:ln>
+            <a:noFill/>
+          </a:ln>
+          <a:effectLst/>
+        </p:spPr>
+        <p:style>
+          <a:lnRef idx="1">
+            <a:schemeClr val="accent1"/>
+          </a:lnRef>
+          <a:fillRef idx="3">
+            <a:schemeClr val="accent1"/>
+          </a:fillRef>
+          <a:effectRef idx="2">
+            <a:schemeClr val="accent1"/>
+          </a:effectRef>
+          <a:fontRef idx="minor">
+            <a:schemeClr val="lt1"/>
+          </a:fontRef>
+        </p:style>
+        <p:txBody>
+          <a:bodyPr rtlCol="0" anchor="ctr"/>
+          <a:lstStyle/>
+          <a:p>
+            <a:pPr algn="ctr"/>
+          </a:p>
+        </p:txBody>
+      </p:sp>
+      <p:sp>
+        <p:nvSpPr>
+          <p:cNvPr id="25" name="TextBox 24"/>
           <p:cNvSpPr txBox="1"/>
           <p:nvPr/>
         </p:nvSpPr>
         <p:spPr>
           <a:xfrm>
-            <a:off x="365760" y="6492240"/>
-            <a:ext cx="10515600" cy="365760"/>
+            <a:off x="1828800" y="4919472"/>
+            <a:ext cx="1828800" cy="274320"/>
           </a:xfrm>
           <a:prstGeom prst="rect">
             <a:avLst/>
@@ -7296,34 +8937,38 @@
           <a:noFill/>
         </p:spPr>
         <p:txBody>
-          <a:bodyPr wrap="square" lIns="45720" rIns="45720" tIns="18288" bIns="18288">
+          <a:bodyPr wrap="square" anchor="t" lIns="0" rIns="0" tIns="0" bIns="0">
             <a:spAutoFit/>
           </a:bodyPr>
           <a:lstStyle/>
           <a:p>
-            <a:pPr algn="l"/>
-            <a:r>
-              <a:rPr sz="900" b="0">
-                <a:solidFill>
-                  <a:srgbClr val="FFFFFF"/>
+            <a:pPr algn="l">
+              <a:lnSpc>
+                <a:spcPct val="115000"/>
+              </a:lnSpc>
+            </a:pPr>
+            <a:r>
+              <a:rPr sz="1100" b="1" i="0">
+                <a:solidFill>
+                  <a:srgbClr val="E8A860"/>
                 </a:solidFill>
                 <a:latin typeface="Calibri"/>
               </a:rPr>
-              <a:t>Sources: Zambia 7th National Development Plan (7NDP) &amp; Vision 2030 | IAEA Milestone Approach for New Nuclear Programs | Siavonga Uranium Baseline Survey (2024)</a:t>
-            </a:r>
-          </a:p>
-        </p:txBody>
-      </p:sp>
-      <p:sp>
-        <p:nvSpPr>
-          <p:cNvPr id="22" name="TextBox 21"/>
+              <a:t>EXECUTE</a:t>
+            </a:r>
+          </a:p>
+        </p:txBody>
+      </p:sp>
+      <p:sp>
+        <p:nvSpPr>
+          <p:cNvPr id="26" name="TextBox 25"/>
           <p:cNvSpPr txBox="1"/>
           <p:nvPr/>
         </p:nvSpPr>
         <p:spPr>
           <a:xfrm>
-            <a:off x="11247120" y="6492240"/>
-            <a:ext cx="822960" cy="365760"/>
+            <a:off x="1828800" y="5166360"/>
+            <a:ext cx="9601200" cy="365760"/>
           </a:xfrm>
           <a:prstGeom prst="rect">
             <a:avLst/>
@@ -7331,20 +8976,194 @@
           <a:noFill/>
         </p:spPr>
         <p:txBody>
-          <a:bodyPr wrap="square" lIns="45720" rIns="45720" tIns="18288" bIns="18288">
+          <a:bodyPr wrap="square" anchor="t" lIns="0" rIns="0" tIns="0" bIns="0">
             <a:spAutoFit/>
           </a:bodyPr>
           <a:lstStyle/>
           <a:p>
-            <a:pPr algn="r"/>
-            <a:r>
-              <a:rPr sz="1000" b="1">
-                <a:solidFill>
-                  <a:srgbClr val="B86B2A"/>
+            <a:pPr algn="l">
+              <a:lnSpc>
+                <a:spcPct val="115000"/>
+              </a:lnSpc>
+            </a:pPr>
+            <a:r>
+              <a:rPr sz="1800" b="1" i="0">
+                <a:solidFill>
+                  <a:srgbClr val="FFFFFF"/>
                 </a:solidFill>
                 <a:latin typeface="Calibri"/>
               </a:rPr>
-              <a:t>5 / 5</a:t>
+              <a:t>Greenlight CNST + pre-feasibility for 2,000 MW.</a:t>
+            </a:r>
+          </a:p>
+        </p:txBody>
+      </p:sp>
+      <p:sp>
+        <p:nvSpPr>
+          <p:cNvPr id="27" name="TextBox 26"/>
+          <p:cNvSpPr txBox="1"/>
+          <p:nvPr/>
+        </p:nvSpPr>
+        <p:spPr>
+          <a:xfrm>
+            <a:off x="1828800" y="5486400"/>
+            <a:ext cx="9601200" cy="457200"/>
+          </a:xfrm>
+          <a:prstGeom prst="rect">
+            <a:avLst/>
+          </a:prstGeom>
+          <a:noFill/>
+        </p:spPr>
+        <p:txBody>
+          <a:bodyPr wrap="square" anchor="t" lIns="0" rIns="0" tIns="0" bIns="0">
+            <a:spAutoFit/>
+          </a:bodyPr>
+          <a:lstStyle/>
+          <a:p>
+            <a:pPr algn="l">
+              <a:lnSpc>
+                <a:spcPct val="125000"/>
+              </a:lnSpc>
+            </a:pPr>
+            <a:r>
+              <a:rPr sz="1200" b="0" i="0">
+                <a:solidFill>
+                  <a:srgbClr val="CFD8E3"/>
+                </a:solidFill>
+                <a:latin typeface="Calibri"/>
+              </a:rPr>
+              <a:t>Use the partnerships we already signed. Stop re-debating what Cabinet already approved in 2020.</a:t>
+            </a:r>
+          </a:p>
+        </p:txBody>
+      </p:sp>
+      <p:cxnSp>
+        <p:nvCxnSpPr>
+          <p:cNvPr id="28" name="Connector 27"/>
+          <p:cNvCxnSpPr/>
+          <p:nvPr/>
+        </p:nvCxnSpPr>
+        <p:spPr>
+          <a:xfrm>
+            <a:off x="548640" y="6080760"/>
+            <a:ext cx="11064240" cy="0"/>
+          </a:xfrm>
+          <a:prstGeom prst="line">
+            <a:avLst/>
+          </a:prstGeom>
+          <a:ln w="6350">
+            <a:solidFill>
+              <a:srgbClr val="334466"/>
+            </a:solidFill>
+          </a:ln>
+        </p:spPr>
+        <p:style>
+          <a:lnRef idx="2">
+            <a:schemeClr val="accent1"/>
+          </a:lnRef>
+          <a:fillRef idx="0">
+            <a:schemeClr val="accent1"/>
+          </a:fillRef>
+          <a:effectRef idx="1">
+            <a:schemeClr val="accent1"/>
+          </a:effectRef>
+          <a:fontRef idx="minor">
+            <a:schemeClr val="tx1"/>
+          </a:fontRef>
+        </p:style>
+      </p:cxnSp>
+      <p:sp>
+        <p:nvSpPr>
+          <p:cNvPr id="29" name="TextBox 28"/>
+          <p:cNvSpPr txBox="1"/>
+          <p:nvPr/>
+        </p:nvSpPr>
+        <p:spPr>
+          <a:xfrm>
+            <a:off x="548640" y="6172200"/>
+            <a:ext cx="11064240" cy="457200"/>
+          </a:xfrm>
+          <a:prstGeom prst="rect">
+            <a:avLst/>
+          </a:prstGeom>
+          <a:noFill/>
+        </p:spPr>
+        <p:txBody>
+          <a:bodyPr wrap="square" anchor="t" lIns="0" rIns="0" tIns="0" bIns="0">
+            <a:spAutoFit/>
+          </a:bodyPr>
+          <a:lstStyle/>
+          <a:p>
+            <a:pPr algn="ctr">
+              <a:lnSpc>
+                <a:spcPct val="115000"/>
+              </a:lnSpc>
+            </a:pPr>
+            <a:r>
+              <a:rPr sz="1400" b="0" i="0">
+                <a:solidFill>
+                  <a:srgbClr val="FFFFFF"/>
+                </a:solidFill>
+                <a:latin typeface="Calibri"/>
+              </a:rPr>
+              <a:t>The fuel is under our feet.  </a:t>
+            </a:r>
+            <a:r>
+              <a:rPr sz="1400" b="0" i="0">
+                <a:solidFill>
+                  <a:srgbClr val="FFFFFF"/>
+                </a:solidFill>
+                <a:latin typeface="Calibri"/>
+              </a:rPr>
+              <a:t>The expertise is on our payroll.  </a:t>
+            </a:r>
+            <a:r>
+              <a:rPr sz="1400" b="1" i="0">
+                <a:solidFill>
+                  <a:srgbClr val="E8A860"/>
+                </a:solidFill>
+                <a:latin typeface="Calibri"/>
+              </a:rPr>
+              <a:t>The bill is on the table.</a:t>
+            </a:r>
+          </a:p>
+        </p:txBody>
+      </p:sp>
+      <p:sp>
+        <p:nvSpPr>
+          <p:cNvPr id="30" name="TextBox 29"/>
+          <p:cNvSpPr txBox="1"/>
+          <p:nvPr/>
+        </p:nvSpPr>
+        <p:spPr>
+          <a:xfrm>
+            <a:off x="548640" y="6492240"/>
+            <a:ext cx="11064240" cy="274320"/>
+          </a:xfrm>
+          <a:prstGeom prst="rect">
+            <a:avLst/>
+          </a:prstGeom>
+          <a:noFill/>
+        </p:spPr>
+        <p:txBody>
+          <a:bodyPr wrap="square" anchor="t" lIns="0" rIns="0" tIns="0" bIns="0">
+            <a:spAutoFit/>
+          </a:bodyPr>
+          <a:lstStyle/>
+          <a:p>
+            <a:pPr algn="ctr">
+              <a:lnSpc>
+                <a:spcPct val="115000"/>
+              </a:lnSpc>
+            </a:pPr>
+            <a:r>
+              <a:rPr sz="900" b="0" i="1">
+                <a:solidFill>
+                  <a:srgbClr val="8B97A8"/>
+                </a:solidFill>
+                <a:latin typeface="Calibri"/>
+              </a:rPr>
+              <a:t>5 / 5   ·   E. Mwaba   ·   Sources: 7NDP &amp; Vision 2030 · IAEA Milestones · Siavonga Uranium Baseline Survey 2024</a:t>
             </a:r>
           </a:p>
         </p:txBody>

--- a/The_Case_for_Nuclear_Power_in_Zambia.pptx
+++ b/The_Case_for_Nuclear_Power_in_Zambia.pptx
@@ -10,6 +10,9 @@
     <p:sldId id="258" r:id="rId10"/>
     <p:sldId id="259" r:id="rId11"/>
     <p:sldId id="260" r:id="rId12"/>
+    <p:sldId id="261" r:id="rId13"/>
+    <p:sldId id="262" r:id="rId14"/>
+    <p:sldId id="263" r:id="rId15"/>
   </p:sldIdLst>
   <p:sldSz cx="12191695" cy="6858000" type="screen4x3"/>
   <p:notesSz cx="6858000" cy="9144000"/>
@@ -109,6 +112,570 @@
     </a:lvl9pPr>
   </p:defaultTextStyle>
 </p:presentation>
+</file>
+
+<file path=ppt/charts/chart1.xml><?xml version="1.0" encoding="utf-8"?>
+<c:chartSpace xmlns:c="http://schemas.openxmlformats.org/drawingml/2006/chart" xmlns:a="http://schemas.openxmlformats.org/drawingml/2006/main" xmlns:r="http://schemas.openxmlformats.org/officeDocument/2006/relationships">
+  <c:date1904 val="0"/>
+  <c:roundedCorners val="0"/>
+  <c:chart>
+    <c:autoTitleDeleted val="1"/>
+    <c:plotArea>
+      <c:layout/>
+      <c:doughnutChart>
+        <c:varyColors val="1"/>
+        <c:ser>
+          <c:idx val="0"/>
+          <c:order val="0"/>
+          <c:tx>
+            <c:strRef>
+              <c:f>Sheet1!$B$1</c:f>
+              <c:strCache>
+                <c:ptCount val="1"/>
+                <c:pt idx="0">
+                  <c:v>2019 Mix</c:v>
+                </c:pt>
+              </c:strCache>
+            </c:strRef>
+          </c:tx>
+          <c:dPt>
+            <c:idx val="0"/>
+            <c:spPr>
+              <a:solidFill>
+                <a:srgbClr val="B32B2B"/>
+              </a:solidFill>
+              <a:ln>
+                <a:noFill/>
+              </a:ln>
+            </c:spPr>
+          </c:dPt>
+          <c:dPt>
+            <c:idx val="1"/>
+            <c:spPr>
+              <a:solidFill>
+                <a:srgbClr val="555B66"/>
+              </a:solidFill>
+              <a:ln>
+                <a:noFill/>
+              </a:ln>
+            </c:spPr>
+          </c:dPt>
+          <c:dPt>
+            <c:idx val="2"/>
+            <c:spPr>
+              <a:solidFill>
+                <a:srgbClr val="E8A860"/>
+              </a:solidFill>
+              <a:ln>
+                <a:noFill/>
+              </a:ln>
+            </c:spPr>
+          </c:dPt>
+          <c:dPt>
+            <c:idx val="3"/>
+            <c:spPr>
+              <a:solidFill>
+                <a:srgbClr val="996B3A"/>
+              </a:solidFill>
+              <a:ln>
+                <a:noFill/>
+              </a:ln>
+            </c:spPr>
+          </c:dPt>
+          <c:cat>
+            <c:strRef>
+              <c:f>Sheet1!$A$2:$A$5</c:f>
+              <c:strCache>
+                <c:ptCount val="4"/>
+                <c:pt idx="0">
+                  <c:v>Hydro</c:v>
+                </c:pt>
+                <c:pt idx="1">
+                  <c:v>Coal</c:v>
+                </c:pt>
+                <c:pt idx="2">
+                  <c:v>Solar</c:v>
+                </c:pt>
+                <c:pt idx="3">
+                  <c:v>HFO</c:v>
+                </c:pt>
+              </c:strCache>
+            </c:strRef>
+          </c:cat>
+          <c:val>
+            <c:numRef>
+              <c:f>Sheet1!$B$2:$B$5</c:f>
+              <c:numCache>
+                <c:formatCode>General</c:formatCode>
+                <c:ptCount val="4"/>
+                <c:pt idx="0">
+                  <c:v>84</c:v>
+                </c:pt>
+                <c:pt idx="1">
+                  <c:v>10</c:v>
+                </c:pt>
+                <c:pt idx="2">
+                  <c:v>3</c:v>
+                </c:pt>
+                <c:pt idx="3">
+                  <c:v>3</c:v>
+                </c:pt>
+              </c:numCache>
+            </c:numRef>
+          </c:val>
+        </c:ser>
+        <c:dLbls>
+          <c:txPr>
+            <a:bodyPr/>
+            <a:lstStyle/>
+            <a:p>
+              <a:pPr>
+                <a:defRPr sz="1100" b="1">
+                  <a:solidFill>
+                    <a:srgbClr val="FFFFFF"/>
+                  </a:solidFill>
+                </a:defRPr>
+              </a:pPr>
+            </a:p>
+          </c:txPr>
+          <c:showLegendKey val="0"/>
+          <c:showVal val="1"/>
+          <c:showCatName val="0"/>
+          <c:showSerName val="0"/>
+          <c:showPercent val="0"/>
+          <c:showBubbleSize val="0"/>
+          <c:showLeaderLines val="1"/>
+        </c:dLbls>
+        <c:firstSliceAng val="0"/>
+        <c:holeSize val="50"/>
+      </c:doughnutChart>
+    </c:plotArea>
+    <c:legend>
+      <c:legendPos val="b"/>
+      <c:layout/>
+      <c:overlay val="0"/>
+      <c:txPr>
+        <a:bodyPr/>
+        <a:lstStyle/>
+        <a:p>
+          <a:pPr>
+            <a:defRPr sz="1000">
+              <a:solidFill>
+                <a:srgbClr val="121824"/>
+              </a:solidFill>
+            </a:defRPr>
+          </a:pPr>
+        </a:p>
+      </c:txPr>
+    </c:legend>
+    <c:plotVisOnly val="1"/>
+    <c:dispBlanksAs val="gap"/>
+    <c:showDLblsOverMax val="0"/>
+  </c:chart>
+  <c:txPr>
+    <a:bodyPr/>
+    <a:lstStyle/>
+    <a:p>
+      <a:pPr>
+        <a:defRPr sz="1800"/>
+      </a:pPr>
+      <a:endParaRPr/>
+    </a:p>
+  </c:txPr>
+  <c:externalData r:id="rId1">
+    <c:autoUpdate val="0"/>
+  </c:externalData>
+</c:chartSpace>
+</file>
+
+<file path=ppt/charts/chart2.xml><?xml version="1.0" encoding="utf-8"?>
+<c:chartSpace xmlns:c="http://schemas.openxmlformats.org/drawingml/2006/chart" xmlns:a="http://schemas.openxmlformats.org/drawingml/2006/main" xmlns:r="http://schemas.openxmlformats.org/officeDocument/2006/relationships">
+  <c:date1904 val="0"/>
+  <c:chart>
+    <c:autoTitleDeleted val="1"/>
+    <c:plotArea>
+      <c:barChart>
+        <c:barDir val="bar"/>
+        <c:grouping val="clustered"/>
+        <c:ser>
+          <c:idx val="0"/>
+          <c:order val="0"/>
+          <c:tx>
+            <c:strRef>
+              <c:f>Sheet1!$B$1</c:f>
+              <c:strCache>
+                <c:ptCount val="1"/>
+                <c:pt idx="0">
+                  <c:v>mrem / year</c:v>
+                </c:pt>
+              </c:strCache>
+            </c:strRef>
+          </c:tx>
+          <c:dPt>
+            <c:idx val="0"/>
+            <c:spPr>
+              <a:solidFill>
+                <a:srgbClr val="1B5E3A"/>
+              </a:solidFill>
+              <a:ln>
+                <a:noFill/>
+              </a:ln>
+            </c:spPr>
+          </c:dPt>
+          <c:dPt>
+            <c:idx val="1"/>
+            <c:spPr>
+              <a:solidFill>
+                <a:srgbClr val="CC7A2E"/>
+              </a:solidFill>
+              <a:ln>
+                <a:noFill/>
+              </a:ln>
+            </c:spPr>
+          </c:dPt>
+          <c:dPt>
+            <c:idx val="2"/>
+            <c:spPr>
+              <a:solidFill>
+                <a:srgbClr val="B32B2B"/>
+              </a:solidFill>
+              <a:ln>
+                <a:noFill/>
+              </a:ln>
+            </c:spPr>
+          </c:dPt>
+          <c:cat>
+            <c:strRef>
+              <c:f>Sheet1!$A$2:$A$4</c:f>
+              <c:strCache>
+                <c:ptCount val="3"/>
+                <c:pt idx="0">
+                  <c:v>Avg. Technician (DOE 2024)</c:v>
+                </c:pt>
+                <c:pt idx="1">
+                  <c:v>Natural Background</c:v>
+                </c:pt>
+                <c:pt idx="2">
+                  <c:v>Federal Occupational Limit</c:v>
+                </c:pt>
+              </c:strCache>
+            </c:strRef>
+          </c:cat>
+          <c:val>
+            <c:numRef>
+              <c:f>Sheet1!$B$2:$B$4</c:f>
+              <c:numCache>
+                <c:formatCode>General</c:formatCode>
+                <c:ptCount val="3"/>
+                <c:pt idx="0">
+                  <c:v>59.12</c:v>
+                </c:pt>
+                <c:pt idx="1">
+                  <c:v>300</c:v>
+                </c:pt>
+                <c:pt idx="2">
+                  <c:v>5000</c:v>
+                </c:pt>
+              </c:numCache>
+            </c:numRef>
+          </c:val>
+        </c:ser>
+        <c:dLbls>
+          <c:txPr>
+            <a:bodyPr/>
+            <a:lstStyle/>
+            <a:p>
+              <a:pPr>
+                <a:defRPr sz="1000" b="1">
+                  <a:solidFill>
+                    <a:srgbClr val="121824"/>
+                  </a:solidFill>
+                  <a:latin typeface="Calibri"/>
+                </a:defRPr>
+              </a:pPr>
+            </a:p>
+          </c:txPr>
+          <c:dLblPos val="outEnd"/>
+          <c:showLegendKey val="0"/>
+          <c:showVal val="1"/>
+          <c:showCatName val="0"/>
+          <c:showSerName val="0"/>
+          <c:showPercent val="0"/>
+          <c:showBubbleSize val="0"/>
+          <c:showLeaderLines val="1"/>
+        </c:dLbls>
+        <c:axId val="-2068027336"/>
+        <c:axId val="-2113994440"/>
+      </c:barChart>
+      <c:catAx>
+        <c:axId val="-2068027336"/>
+        <c:scaling>
+          <c:orientation val="minMax"/>
+        </c:scaling>
+        <c:delete val="0"/>
+        <c:axPos val="l"/>
+        <c:majorTickMark val="out"/>
+        <c:minorTickMark val="none"/>
+        <c:tickLblPos val="nextTo"/>
+        <c:txPr>
+          <a:bodyPr/>
+          <a:lstStyle/>
+          <a:p>
+            <a:pPr>
+              <a:defRPr sz="1000">
+                <a:solidFill>
+                  <a:srgbClr val="121824"/>
+                </a:solidFill>
+                <a:latin typeface="Calibri"/>
+              </a:defRPr>
+            </a:pPr>
+          </a:p>
+        </c:txPr>
+        <c:crossAx val="-2113994440"/>
+        <c:crosses val="autoZero"/>
+        <c:auto val="1"/>
+        <c:lblAlgn val="ctr"/>
+        <c:lblOffset val="100"/>
+        <c:noMultiLvlLbl val="0"/>
+      </c:catAx>
+      <c:valAx>
+        <c:axId val="-2113994440"/>
+        <c:scaling/>
+        <c:delete val="0"/>
+        <c:axPos val="b"/>
+        <c:majorGridlines/>
+        <c:majorTickMark val="out"/>
+        <c:minorTickMark val="none"/>
+        <c:tickLblPos val="nextTo"/>
+        <c:txPr>
+          <a:bodyPr/>
+          <a:lstStyle/>
+          <a:p>
+            <a:pPr>
+              <a:defRPr sz="1000">
+                <a:solidFill>
+                  <a:srgbClr val="121824"/>
+                </a:solidFill>
+                <a:latin typeface="Calibri"/>
+              </a:defRPr>
+            </a:pPr>
+          </a:p>
+        </c:txPr>
+        <c:crossAx val="-2068027336"/>
+        <c:crosses val="autoZero"/>
+      </c:valAx>
+    </c:plotArea>
+    <c:dispBlanksAs val="gap"/>
+  </c:chart>
+  <c:txPr>
+    <a:bodyPr/>
+    <a:lstStyle/>
+    <a:p>
+      <a:pPr>
+        <a:defRPr sz="1800"/>
+      </a:pPr>
+      <a:endParaRPr lang="en-US"/>
+    </a:p>
+  </c:txPr>
+  <c:externalData r:id="rId1">
+    <c:autoUpdate val="0"/>
+  </c:externalData>
+</c:chartSpace>
+</file>
+
+<file path=ppt/charts/chart3.xml><?xml version="1.0" encoding="utf-8"?>
+<c:chartSpace xmlns:c="http://schemas.openxmlformats.org/drawingml/2006/chart" xmlns:a="http://schemas.openxmlformats.org/drawingml/2006/main" xmlns:r="http://schemas.openxmlformats.org/officeDocument/2006/relationships">
+  <c:date1904 val="0"/>
+  <c:chart>
+    <c:autoTitleDeleted val="1"/>
+    <c:plotArea>
+      <c:barChart>
+        <c:barDir val="col"/>
+        <c:grouping val="clustered"/>
+        <c:ser>
+          <c:idx val="0"/>
+          <c:order val="0"/>
+          <c:tx>
+            <c:strRef>
+              <c:f>Sheet1!$B$1</c:f>
+              <c:strCache>
+                <c:ptCount val="1"/>
+                <c:pt idx="0">
+                  <c:v>MW continuous (mining only)</c:v>
+                </c:pt>
+              </c:strCache>
+            </c:strRef>
+          </c:tx>
+          <c:dPt>
+            <c:idx val="0"/>
+            <c:spPr>
+              <a:solidFill>
+                <a:srgbClr val="CC7A2E"/>
+              </a:solidFill>
+              <a:ln>
+                <a:noFill/>
+              </a:ln>
+            </c:spPr>
+          </c:dPt>
+          <c:dPt>
+            <c:idx val="1"/>
+            <c:spPr>
+              <a:solidFill>
+                <a:srgbClr val="CC7A2E"/>
+              </a:solidFill>
+              <a:ln>
+                <a:noFill/>
+              </a:ln>
+            </c:spPr>
+          </c:dPt>
+          <c:dPt>
+            <c:idx val="2"/>
+            <c:spPr>
+              <a:solidFill>
+                <a:srgbClr val="B32B2B"/>
+              </a:solidFill>
+              <a:ln>
+                <a:noFill/>
+              </a:ln>
+            </c:spPr>
+          </c:dPt>
+          <c:cat>
+            <c:strRef>
+              <c:f>Sheet1!$A$2:$A$4</c:f>
+              <c:strCache>
+                <c:ptCount val="3"/>
+                <c:pt idx="0">
+                  <c:v>Current (~0.8 Mt)</c:v>
+                </c:pt>
+                <c:pt idx="1">
+                  <c:v>Mid-Path (~1.5 Mt)</c:v>
+                </c:pt>
+                <c:pt idx="2">
+                  <c:v>Target (3.0 Mt)</c:v>
+                </c:pt>
+              </c:strCache>
+            </c:strRef>
+          </c:cat>
+          <c:val>
+            <c:numRef>
+              <c:f>Sheet1!$B$2:$B$4</c:f>
+              <c:numCache>
+                <c:formatCode>General</c:formatCode>
+                <c:ptCount val="3"/>
+                <c:pt idx="0">
+                  <c:v>320</c:v>
+                </c:pt>
+                <c:pt idx="1">
+                  <c:v>600</c:v>
+                </c:pt>
+                <c:pt idx="2">
+                  <c:v>1200</c:v>
+                </c:pt>
+              </c:numCache>
+            </c:numRef>
+          </c:val>
+        </c:ser>
+        <c:dLbls>
+          <c:txPr>
+            <a:bodyPr/>
+            <a:lstStyle/>
+            <a:p>
+              <a:pPr>
+                <a:defRPr sz="1000" b="1">
+                  <a:solidFill>
+                    <a:srgbClr val="121824"/>
+                  </a:solidFill>
+                  <a:latin typeface="Calibri"/>
+                </a:defRPr>
+              </a:pPr>
+            </a:p>
+          </c:txPr>
+          <c:dLblPos val="outEnd"/>
+          <c:showLegendKey val="0"/>
+          <c:showVal val="1"/>
+          <c:showCatName val="0"/>
+          <c:showSerName val="0"/>
+          <c:showPercent val="0"/>
+          <c:showBubbleSize val="0"/>
+          <c:showLeaderLines val="1"/>
+        </c:dLbls>
+        <c:axId val="-2068027336"/>
+        <c:axId val="-2113994440"/>
+      </c:barChart>
+      <c:catAx>
+        <c:axId val="-2068027336"/>
+        <c:scaling>
+          <c:orientation val="minMax"/>
+        </c:scaling>
+        <c:delete val="0"/>
+        <c:axPos val="b"/>
+        <c:majorTickMark val="out"/>
+        <c:minorTickMark val="none"/>
+        <c:tickLblPos val="nextTo"/>
+        <c:txPr>
+          <a:bodyPr/>
+          <a:lstStyle/>
+          <a:p>
+            <a:pPr>
+              <a:defRPr sz="1000">
+                <a:solidFill>
+                  <a:srgbClr val="121824"/>
+                </a:solidFill>
+                <a:latin typeface="Calibri"/>
+              </a:defRPr>
+            </a:pPr>
+          </a:p>
+        </c:txPr>
+        <c:crossAx val="-2113994440"/>
+        <c:crosses val="autoZero"/>
+        <c:auto val="1"/>
+        <c:lblAlgn val="ctr"/>
+        <c:lblOffset val="100"/>
+        <c:noMultiLvlLbl val="0"/>
+      </c:catAx>
+      <c:valAx>
+        <c:axId val="-2113994440"/>
+        <c:scaling/>
+        <c:delete val="0"/>
+        <c:axPos val="l"/>
+        <c:majorGridlines/>
+        <c:majorTickMark val="out"/>
+        <c:minorTickMark val="none"/>
+        <c:tickLblPos val="nextTo"/>
+        <c:txPr>
+          <a:bodyPr/>
+          <a:lstStyle/>
+          <a:p>
+            <a:pPr>
+              <a:defRPr sz="1000">
+                <a:solidFill>
+                  <a:srgbClr val="121824"/>
+                </a:solidFill>
+                <a:latin typeface="Calibri"/>
+              </a:defRPr>
+            </a:pPr>
+          </a:p>
+        </c:txPr>
+        <c:crossAx val="-2068027336"/>
+        <c:crosses val="autoZero"/>
+      </c:valAx>
+    </c:plotArea>
+    <c:dispBlanksAs val="gap"/>
+  </c:chart>
+  <c:txPr>
+    <a:bodyPr/>
+    <a:lstStyle/>
+    <a:p>
+      <a:pPr>
+        <a:defRPr sz="1800"/>
+      </a:pPr>
+      <a:endParaRPr lang="en-US"/>
+    </a:p>
+  </c:txPr>
+  <c:externalData r:id="rId1">
+    <c:autoUpdate val="0"/>
+  </c:externalData>
+</c:chartSpace>
 </file>
 
 <file path=ppt/notesMasters/notesMaster1.xml><?xml version="1.0" encoding="utf-8"?>
@@ -506,7 +1073,7 @@
           <a:lstStyle/>
           <a:p>
             <a:r>
-              <a:t>[0:00-0:30 — SETUP]  Three minutes. One argument. Zambia does not have to choose between energy poverty and environmental risk — because we already own the solution. We have uranium in the ground. We have a Radiation Protection Authority that has spent decades managing radiological risk. And we have a Cabinet-approved 2020 Nuclear Policy. What we do not yet have is the legislative signature that turns those assets into megawatts. That signature is what I am here to argue for.</a:t>
+              <a:t>[Opening] Three minutes. One argument. The case I'm making is captured in one sentence — Zambia must convert its domestic uranium and its existing radiological safety expertise into nuclear baseload power, because hydropower alone has stopped being a strategy and become a climate gamble we cannot keep paying for.</a:t>
             </a:r>
           </a:p>
         </p:txBody>
@@ -576,7 +1143,7 @@
           <a:lstStyle/>
           <a:p>
             <a:r>
-              <a:t>[0:30-1:15 — CONFLICT]  Picture two scenes. Siavonga, Zambia: the 2024 Uranium Baseline Survey found uranium in the drinking water and uranium in the dust. People live on top of the resource — with no dosimetry, no baseline, no regulator on the ground. That is radiological fear. Now picture the U.S. nuclear enterprise: twenty-two thousand workers, the average technician absorbs fifty-nine point one two mrem a year — less than two percent of the federal limit. Every dose tracked. Every year. Same element. Same physics. Two completely different outcomes. The variable is not the uranium. The variable is the system wrapped around it.</a:t>
+              <a:t>[Use this slide if asked 'give me the pitch in one breath.' Read or paraphrase the paragraph as drafted; it lands on the final imperative: Sign it.]</a:t>
             </a:r>
           </a:p>
         </p:txBody>
@@ -646,7 +1213,7 @@
           <a:lstStyle/>
           <a:p>
             <a:r>
-              <a:t>[1:15-2:00 — EVIDENCE]  Can the system actually be trusted? Fifty-nine point one two mrem. Across a decade. Across twenty-two thousand workers. That is the U.S. DOE Radiation Exposure Monitoring System record — under two percent of the federal limit. And the line that matters most for us: between 2021 and 2024 the monitored workforce grew, and individual dose did not move. Safety scales. Ninety-eight percent of exposure is external — managed by shielding we already use in our copper mines. The IAEA Milestone Approach is the exact roadmap Zambia is already on through the Radiation Protection Authority. We are not starting from zero. We are starting from competence.</a:t>
+              <a:t>[The Hook] Picture two scenes. Siavonga: uranium in water, uranium in dust, no instruments — radiological fear. The U.S. nuclear enterprise: twenty-two thousand workers, 59.12 mrem average, every dose tracked for a decade — industrial mastery. Same element, two different outcomes. The variable is the system, not the uranium. Zambia must close that gap, and the expertise to do it already lives inside our Radiation Protection Authority.</a:t>
             </a:r>
           </a:p>
         </p:txBody>
@@ -716,7 +1283,7 @@
           <a:lstStyle/>
           <a:p>
             <a:r>
-              <a:t>[2:00-2:30 — STAKES]  Now bring it home. Eighty-four percent of our electricity comes from hydropower. In the 2015/16 drought we lost a thousand megawatts and spent roughly four hundred and forty million U.S. dollars on unbudgeted imports. The 2023-24 ZESCO reports show the Kariba crisis is not a one-off — it is the new climate baseline. Meanwhile our 2020 Nuclear Policy commits to a two thousand megawatt target. ROSATOM, IP3, and KAERI partnerships are signed. The uranium is in the ground. We wrote the plan in 2020. Six years later, the grid is still waiting.</a:t>
+              <a:t>[The Vision] Eighty-four percent of Zambia's electricity comes from hydropower. That is not diversification — that is a single point of failure with a weather dependency. Nuclear, by contrast, runs at roughly ninety percent capacity factor regardless of rainfall. And Zambia is not starting cold: we are an IAEA Member State, and our Radiation Protection Authority has been managing radiological risk for decades. We cannot industrialise a country on intermittent power. Nuclear isn't just an option; it is a necessity for a drought-resilient Zambia.</a:t>
             </a:r>
           </a:p>
         </p:txBody>
@@ -786,7 +1353,217 @@
           <a:lstStyle/>
           <a:p>
             <a:r>
-              <a:t>[2:30-3:00 — RESOLUTION]  So what am I asking for? Three decisions. First, ENACT — pass the Nuclear Bill and formalise the Nuclear Safety and Protection Authority as an independent regulator, aligned with the IAEA Milestone Approach. Without that signature, every other step is symbolic. Second, EQUIP — fund radiological monitoring, starting in Siavonga, so no community lives beside uranium without instruments. Third, EXECUTE — greenlight the Centre for Nuclear Science and Technology and the pre-feasibility studies for the two thousand megawatt programme. The fuel is under our feet. The expertise is on our payroll. The bill is on the table. Sign it. Thank you.</a:t>
+              <a:t>[Safety Mastery] My analysis of the U.S. DOE Radiation Exposure Monitoring System shows the average nuclear technician absorbs 59.12 mrem per year — that is one point two percent of the five thousand mrem federal limit. Less than the dose from routine medical imaging. The biggest fear in Zambia about nuclear is safety; this data says modern monitoring keeps workers safer than most office radiation environments. And between 2021 and 2024 the workforce grew while individual dose stayed flat. Safety scales. We have the analytical tools — this dashboard — to oversee a national programme today.</a:t>
+            </a:r>
+          </a:p>
+        </p:txBody>
+      </p:sp>
+      <p:sp>
+        <p:nvSpPr>
+          <p:cNvPr id="4" name="Slide Number Placeholder 3"/>
+          <p:cNvSpPr>
+            <a:spLocks noGrp="1"/>
+          </p:cNvSpPr>
+          <p:nvPr>
+            <p:ph type="sldNum" idx="5" sz="quarter"/>
+          </p:nvPr>
+        </p:nvSpPr>
+        <p:spPr/>
+      </p:sp>
+    </p:spTree>
+  </p:cSld>
+  <p:clrMapOvr>
+    <a:masterClrMapping/>
+  </p:clrMapOvr>
+</p:notes>
+</file>
+
+<file path=ppt/notesSlides/notesSlide6.xml><?xml version="1.0" encoding="utf-8"?>
+<p:notes xmlns:a="http://schemas.openxmlformats.org/drawingml/2006/main" xmlns:p="http://schemas.openxmlformats.org/presentationml/2006/main" xmlns:r="http://schemas.openxmlformats.org/officeDocument/2006/relationships">
+  <p:cSld>
+    <p:spTree>
+      <p:nvGrpSpPr>
+        <p:cNvPr id="1" name=""/>
+        <p:cNvGrpSpPr/>
+        <p:nvPr/>
+      </p:nvGrpSpPr>
+      <p:grpSpPr>
+        <a:xfrm>
+          <a:off x="0" y="0"/>
+          <a:ext cx="0" cy="0"/>
+          <a:chOff x="0" y="0"/>
+          <a:chExt cx="0" cy="0"/>
+        </a:xfrm>
+      </p:grpSpPr>
+      <p:sp>
+        <p:nvSpPr>
+          <p:cNvPr id="2" name="Slide Image Placeholder 1"/>
+          <p:cNvSpPr>
+            <a:spLocks noGrp="1"/>
+          </p:cNvSpPr>
+          <p:nvPr>
+            <p:ph type="sldImg" idx="2"/>
+          </p:nvPr>
+        </p:nvSpPr>
+        <p:spPr/>
+      </p:sp>
+      <p:sp>
+        <p:nvSpPr>
+          <p:cNvPr id="3" name="Notes Placeholder 2"/>
+          <p:cNvSpPr>
+            <a:spLocks noGrp="1"/>
+          </p:cNvSpPr>
+          <p:nvPr>
+            <p:ph type="body" idx="3" sz="quarter"/>
+          </p:nvPr>
+        </p:nvSpPr>
+        <p:spPr/>
+        <p:txBody>
+          <a:bodyPr/>
+          <a:lstStyle/>
+          <a:p>
+            <a:r>
+              <a:t>[Strategic Resource] Zambia has known uranium-bearing zones across the North-Western and Southern provinces — Lumwana, Gwembe Valley, Mutanga. We currently export uranium as a raw mineral. Why? By developing nuclear power we move from raw-material exporter to high-tech energy producer. We capture the value-chain, we anchor high-skill jobs, and we stop paying to import fuel that we are already sending abroad. Why should we export our uranium as a raw mineral when we could be using it to power our own mines and factories?</a:t>
+            </a:r>
+          </a:p>
+        </p:txBody>
+      </p:sp>
+      <p:sp>
+        <p:nvSpPr>
+          <p:cNvPr id="4" name="Slide Number Placeholder 3"/>
+          <p:cNvSpPr>
+            <a:spLocks noGrp="1"/>
+          </p:cNvSpPr>
+          <p:nvPr>
+            <p:ph type="sldNum" idx="5" sz="quarter"/>
+          </p:nvPr>
+        </p:nvSpPr>
+        <p:spPr/>
+      </p:sp>
+    </p:spTree>
+  </p:cSld>
+  <p:clrMapOvr>
+    <a:masterClrMapping/>
+  </p:clrMapOvr>
+</p:notes>
+</file>
+
+<file path=ppt/notesSlides/notesSlide7.xml><?xml version="1.0" encoding="utf-8"?>
+<p:notes xmlns:a="http://schemas.openxmlformats.org/drawingml/2006/main" xmlns:p="http://schemas.openxmlformats.org/presentationml/2006/main" xmlns:r="http://schemas.openxmlformats.org/officeDocument/2006/relationships">
+  <p:cSld>
+    <p:spTree>
+      <p:nvGrpSpPr>
+        <p:cNvPr id="1" name=""/>
+        <p:cNvGrpSpPr/>
+        <p:nvPr/>
+      </p:nvGrpSpPr>
+      <p:grpSpPr>
+        <a:xfrm>
+          <a:off x="0" y="0"/>
+          <a:ext cx="0" cy="0"/>
+          <a:chOff x="0" y="0"/>
+          <a:chExt cx="0" cy="0"/>
+        </a:xfrm>
+      </p:grpSpPr>
+      <p:sp>
+        <p:nvSpPr>
+          <p:cNvPr id="2" name="Slide Image Placeholder 1"/>
+          <p:cNvSpPr>
+            <a:spLocks noGrp="1"/>
+          </p:cNvSpPr>
+          <p:nvPr>
+            <p:ph type="sldImg" idx="2"/>
+          </p:nvPr>
+        </p:nvSpPr>
+        <p:spPr/>
+      </p:sp>
+      <p:sp>
+        <p:nvSpPr>
+          <p:cNvPr id="3" name="Notes Placeholder 2"/>
+          <p:cNvSpPr>
+            <a:spLocks noGrp="1"/>
+          </p:cNvSpPr>
+          <p:nvPr>
+            <p:ph type="body" idx="3" sz="quarter"/>
+          </p:nvPr>
+        </p:nvSpPr>
+        <p:spPr/>
+        <p:txBody>
+          <a:bodyPr/>
+          <a:lstStyle/>
+          <a:p>
+            <a:r>
+              <a:t>[Economic Impact] Zambia has set a public target of three million tonnes of copper annually. At industry-standard energy intensity that requires roughly twelve hundred megawatts of continuous power — for mining alone, before smelting, before households, before industrial diversification. Hydropower cannot deliver that reliably and drought after drought has proved it. Nuclear can. The 2,000 MW nuclear target maps almost exactly onto the copper-driven power gap. This is not ideology — it is arithmetic.</a:t>
+            </a:r>
+          </a:p>
+        </p:txBody>
+      </p:sp>
+      <p:sp>
+        <p:nvSpPr>
+          <p:cNvPr id="4" name="Slide Number Placeholder 3"/>
+          <p:cNvSpPr>
+            <a:spLocks noGrp="1"/>
+          </p:cNvSpPr>
+          <p:nvPr>
+            <p:ph type="sldNum" idx="5" sz="quarter"/>
+          </p:nvPr>
+        </p:nvSpPr>
+        <p:spPr/>
+      </p:sp>
+    </p:spTree>
+  </p:cSld>
+  <p:clrMapOvr>
+    <a:masterClrMapping/>
+  </p:clrMapOvr>
+</p:notes>
+</file>
+
+<file path=ppt/notesSlides/notesSlide8.xml><?xml version="1.0" encoding="utf-8"?>
+<p:notes xmlns:a="http://schemas.openxmlformats.org/drawingml/2006/main" xmlns:p="http://schemas.openxmlformats.org/presentationml/2006/main" xmlns:r="http://schemas.openxmlformats.org/officeDocument/2006/relationships">
+  <p:cSld>
+    <p:spTree>
+      <p:nvGrpSpPr>
+        <p:cNvPr id="1" name=""/>
+        <p:cNvGrpSpPr/>
+        <p:nvPr/>
+      </p:nvGrpSpPr>
+      <p:grpSpPr>
+        <a:xfrm>
+          <a:off x="0" y="0"/>
+          <a:ext cx="0" cy="0"/>
+          <a:chOff x="0" y="0"/>
+          <a:chExt cx="0" cy="0"/>
+        </a:xfrm>
+      </p:grpSpPr>
+      <p:sp>
+        <p:nvSpPr>
+          <p:cNvPr id="2" name="Slide Image Placeholder 1"/>
+          <p:cNvSpPr>
+            <a:spLocks noGrp="1"/>
+          </p:cNvSpPr>
+          <p:nvPr>
+            <p:ph type="sldImg" idx="2"/>
+          </p:nvPr>
+        </p:nvSpPr>
+        <p:spPr/>
+      </p:sp>
+      <p:sp>
+        <p:nvSpPr>
+          <p:cNvPr id="3" name="Notes Placeholder 2"/>
+          <p:cNvSpPr>
+            <a:spLocks noGrp="1"/>
+          </p:cNvSpPr>
+          <p:nvPr>
+            <p:ph type="body" idx="3" sz="quarter"/>
+          </p:nvPr>
+        </p:nvSpPr>
+        <p:spPr/>
+        <p:txBody>
+          <a:bodyPr/>
+          <a:lstStyle/>
+          <a:p>
+            <a:r>
+              <a:t>[Roadmap] Three workstreams run in parallel. Policy and regulation lands first: pass the Nuclear Bill in 2026, formalise NSPA, begin site licensing. Human capital builds alongside: Medical Physics and Nuclear Engineering cohorts leveraging local universities, plus data-analytics talent — the same skill set that built this dashboard. SMR implementation begins around 2028 with partner selection drawing on the ROSATOM, IP3 / NuScale, and Westinghouse relationships already in motion, targeting first criticality before 2036. We have the minerals, we have the regulatory framework, and as I've shown today, we have the data capacity. Zambia is ready to start the nuclear conversation.</a:t>
             </a:r>
           </a:p>
         </p:txBody>
@@ -3868,7 +4645,7 @@
           <a:p>
             <a:pPr algn="l">
               <a:lnSpc>
-                <a:spcPct val="115000"/>
+                <a:spcPct val="120000"/>
               </a:lnSpc>
             </a:pPr>
             <a:r>
@@ -3891,7 +4668,7 @@
         </p:nvSpPr>
         <p:spPr>
           <a:xfrm>
-            <a:off x="548640" y="1554480"/>
+            <a:off x="548640" y="1417320"/>
             <a:ext cx="11064240" cy="2286000"/>
           </a:xfrm>
           <a:prstGeom prst="rect">
@@ -3911,7 +4688,7 @@
               </a:lnSpc>
             </a:pPr>
             <a:r>
-              <a:rPr sz="6400" b="1" i="0">
+              <a:rPr sz="6000" b="1" i="0">
                 <a:solidFill>
                   <a:srgbClr val="FFFFFF"/>
                 </a:solidFill>
@@ -3930,7 +4707,7 @@
               </a:spcAft>
             </a:pPr>
             <a:r>
-              <a:rPr sz="6400" b="1" i="0">
+              <a:rPr sz="6000" b="1" i="0">
                 <a:solidFill>
                   <a:srgbClr val="E8A860"/>
                 </a:solidFill>
@@ -3949,7 +4726,7 @@
         </p:nvCxnSpPr>
         <p:spPr>
           <a:xfrm>
-            <a:off x="548640" y="3977639"/>
+            <a:off x="548640" y="3794760"/>
             <a:ext cx="2286000" cy="0"/>
           </a:xfrm>
           <a:prstGeom prst="line">
@@ -3984,7 +4761,7 @@
         </p:nvSpPr>
         <p:spPr>
           <a:xfrm>
-            <a:off x="548640" y="4114800"/>
+            <a:off x="548640" y="3931920"/>
             <a:ext cx="11064240" cy="457200"/>
           </a:xfrm>
           <a:prstGeom prst="rect">
@@ -4000,11 +4777,11 @@
           <a:p>
             <a:pPr algn="l">
               <a:lnSpc>
-                <a:spcPct val="115000"/>
+                <a:spcPct val="120000"/>
               </a:lnSpc>
             </a:pPr>
             <a:r>
-              <a:rPr sz="2600" b="0" i="0">
+              <a:rPr sz="2400" b="0" i="0">
                 <a:solidFill>
                   <a:srgbClr val="FFFFFF"/>
                 </a:solidFill>
@@ -4023,14 +4800,14 @@
         </p:nvSpPr>
         <p:spPr>
           <a:xfrm>
-            <a:off x="548640" y="4846320"/>
-            <a:ext cx="11064240" cy="36576"/>
+            <a:off x="548640" y="4663440"/>
+            <a:ext cx="11064240" cy="1371600"/>
           </a:xfrm>
           <a:prstGeom prst="rect">
             <a:avLst/>
           </a:prstGeom>
           <a:solidFill>
-            <a:srgbClr val="334466"/>
+            <a:srgbClr val="12284A"/>
           </a:solidFill>
           <a:ln>
             <a:noFill/>
@@ -4061,14 +4838,58 @@
       </p:sp>
       <p:sp>
         <p:nvSpPr>
-          <p:cNvPr id="8" name="TextBox 7"/>
+          <p:cNvPr id="8" name="Rectangle 7"/>
+          <p:cNvSpPr/>
+          <p:nvPr/>
+        </p:nvSpPr>
+        <p:spPr>
+          <a:xfrm>
+            <a:off x="548640" y="4663440"/>
+            <a:ext cx="91440" cy="1371600"/>
+          </a:xfrm>
+          <a:prstGeom prst="rect">
+            <a:avLst/>
+          </a:prstGeom>
+          <a:solidFill>
+            <a:srgbClr val="CC7A2E"/>
+          </a:solidFill>
+          <a:ln>
+            <a:noFill/>
+          </a:ln>
+          <a:effectLst/>
+        </p:spPr>
+        <p:style>
+          <a:lnRef idx="1">
+            <a:schemeClr val="accent1"/>
+          </a:lnRef>
+          <a:fillRef idx="3">
+            <a:schemeClr val="accent1"/>
+          </a:fillRef>
+          <a:effectRef idx="2">
+            <a:schemeClr val="accent1"/>
+          </a:effectRef>
+          <a:fontRef idx="minor">
+            <a:schemeClr val="lt1"/>
+          </a:fontRef>
+        </p:style>
+        <p:txBody>
+          <a:bodyPr rtlCol="0" anchor="ctr"/>
+          <a:lstStyle/>
+          <a:p>
+            <a:pPr algn="ctr"/>
+          </a:p>
+        </p:txBody>
+      </p:sp>
+      <p:sp>
+        <p:nvSpPr>
+          <p:cNvPr id="9" name="TextBox 8"/>
           <p:cNvSpPr txBox="1"/>
           <p:nvPr/>
         </p:nvSpPr>
         <p:spPr>
           <a:xfrm>
-            <a:off x="548640" y="5029200"/>
-            <a:ext cx="11064240" cy="1005840"/>
+            <a:off x="777240" y="4754880"/>
+            <a:ext cx="10698480" cy="274320"/>
           </a:xfrm>
           <a:prstGeom prst="rect">
             <a:avLst/>
@@ -4083,31 +4904,31 @@
           <a:p>
             <a:pPr algn="l">
               <a:lnSpc>
-                <a:spcPct val="125000"/>
+                <a:spcPct val="120000"/>
               </a:lnSpc>
             </a:pPr>
             <a:r>
-              <a:rPr sz="1500" b="0" i="1">
-                <a:solidFill>
-                  <a:srgbClr val="CFD8E3"/>
+              <a:rPr sz="1100" b="1" i="0">
+                <a:solidFill>
+                  <a:srgbClr val="E8A860"/>
                 </a:solidFill>
                 <a:latin typeface="Calibri"/>
               </a:rPr>
-              <a:t>Zambia must leverage its existing radiological safety expertise and uranium resources to transition to nuclear power as a drought-proof solution for national energy security.</a:t>
-            </a:r>
-          </a:p>
-        </p:txBody>
-      </p:sp>
-      <p:sp>
-        <p:nvSpPr>
-          <p:cNvPr id="9" name="TextBox 8"/>
+              <a:t>THE  BIG  IDEA</a:t>
+            </a:r>
+          </a:p>
+        </p:txBody>
+      </p:sp>
+      <p:sp>
+        <p:nvSpPr>
+          <p:cNvPr id="10" name="TextBox 9"/>
           <p:cNvSpPr txBox="1"/>
           <p:nvPr/>
         </p:nvSpPr>
         <p:spPr>
           <a:xfrm>
-            <a:off x="548640" y="6263640"/>
-            <a:ext cx="7315200" cy="274320"/>
+            <a:off x="777240" y="5029200"/>
+            <a:ext cx="10698480" cy="960120"/>
           </a:xfrm>
           <a:prstGeom prst="rect">
             <a:avLst/>
@@ -4122,11 +4943,50 @@
           <a:p>
             <a:pPr algn="l">
               <a:lnSpc>
-                <a:spcPct val="115000"/>
+                <a:spcPct val="130000"/>
               </a:lnSpc>
             </a:pPr>
             <a:r>
-              <a:rPr sz="1100" b="1" i="0">
+              <a:rPr sz="1400" b="0" i="1">
+                <a:solidFill>
+                  <a:srgbClr val="FFFFFF"/>
+                </a:solidFill>
+                <a:latin typeface="Calibri"/>
+              </a:rPr>
+              <a:t>Zambia must convert its domestic uranium reserves and existing radiological safety expertise into nuclear baseload power — because every drought year proves that hydropower alone is no longer an energy strategy, it is a gamble against a climate we can no longer afford to lose.</a:t>
+            </a:r>
+          </a:p>
+        </p:txBody>
+      </p:sp>
+      <p:sp>
+        <p:nvSpPr>
+          <p:cNvPr id="11" name="TextBox 10"/>
+          <p:cNvSpPr txBox="1"/>
+          <p:nvPr/>
+        </p:nvSpPr>
+        <p:spPr>
+          <a:xfrm>
+            <a:off x="548640" y="6263640"/>
+            <a:ext cx="7315200" cy="228600"/>
+          </a:xfrm>
+          <a:prstGeom prst="rect">
+            <a:avLst/>
+          </a:prstGeom>
+          <a:noFill/>
+        </p:spPr>
+        <p:txBody>
+          <a:bodyPr wrap="square" anchor="t" lIns="0" rIns="0" tIns="0" bIns="0">
+            <a:spAutoFit/>
+          </a:bodyPr>
+          <a:lstStyle/>
+          <a:p>
+            <a:pPr algn="l">
+              <a:lnSpc>
+                <a:spcPct val="120000"/>
+              </a:lnSpc>
+            </a:pPr>
+            <a:r>
+              <a:rPr sz="1000" b="1" i="0">
                 <a:solidFill>
                   <a:srgbClr val="FFFFFF"/>
                 </a:solidFill>
@@ -4139,14 +4999,14 @@
       </p:sp>
       <p:sp>
         <p:nvSpPr>
-          <p:cNvPr id="10" name="TextBox 9"/>
+          <p:cNvPr id="12" name="TextBox 11"/>
           <p:cNvSpPr txBox="1"/>
           <p:nvPr/>
         </p:nvSpPr>
         <p:spPr>
           <a:xfrm>
             <a:off x="548640" y="6492240"/>
-            <a:ext cx="7315200" cy="228600"/>
+            <a:ext cx="7315200" cy="182880"/>
           </a:xfrm>
           <a:prstGeom prst="rect">
             <a:avLst/>
@@ -4161,11 +5021,11 @@
           <a:p>
             <a:pPr algn="l">
               <a:lnSpc>
-                <a:spcPct val="115000"/>
+                <a:spcPct val="120000"/>
               </a:lnSpc>
             </a:pPr>
             <a:r>
-              <a:rPr sz="900" b="0" i="0">
+              <a:rPr sz="800" b="0" i="0">
                 <a:solidFill>
                   <a:srgbClr val="99A3B3"/>
                 </a:solidFill>
@@ -4211,7 +5071,7 @@
         <p:spPr>
           <a:xfrm>
             <a:off x="548640" y="411480"/>
-            <a:ext cx="7315200" cy="274320"/>
+            <a:ext cx="9144000" cy="274320"/>
           </a:xfrm>
           <a:prstGeom prst="rect">
             <a:avLst/>
@@ -4226,7 +5086,7 @@
           <a:p>
             <a:pPr algn="l">
               <a:lnSpc>
-                <a:spcPct val="115000"/>
+                <a:spcPct val="120000"/>
               </a:lnSpc>
             </a:pPr>
             <a:r>
@@ -4236,7 +5096,7 @@
                 </a:solidFill>
                 <a:latin typeface="Calibri"/>
               </a:rPr>
-              <a:t>01  ·  THE HOOK</a:t>
+              <a:t>PROLOGUE  ·  THE 3-MINUTE STORY</a:t>
             </a:r>
           </a:p>
         </p:txBody>
@@ -4250,7 +5110,7 @@
         <p:spPr>
           <a:xfrm>
             <a:off x="548640" y="685800"/>
-            <a:ext cx="11064240" cy="640080"/>
+            <a:ext cx="11064240" cy="685800"/>
           </a:xfrm>
           <a:prstGeom prst="rect">
             <a:avLst/>
@@ -4265,17 +5125,17 @@
           <a:p>
             <a:pPr algn="l">
               <a:lnSpc>
-                <a:spcPct val="115000"/>
+                <a:spcPct val="120000"/>
               </a:lnSpc>
             </a:pPr>
             <a:r>
-              <a:rPr sz="3400" b="1" i="0">
+              <a:rPr sz="3000" b="1" i="0">
                 <a:solidFill>
                   <a:srgbClr val="0A1F3D"/>
                 </a:solidFill>
                 <a:latin typeface="Calibri"/>
               </a:rPr>
-              <a:t>Same element. Two realities.</a:t>
+              <a:t>If I had no slides, this is what I would say.</a:t>
             </a:r>
           </a:p>
         </p:txBody>
@@ -4324,7 +5184,7 @@
         <p:spPr>
           <a:xfrm>
             <a:off x="548640" y="1417320"/>
-            <a:ext cx="11064240" cy="457200"/>
+            <a:ext cx="11064240" cy="365760"/>
           </a:xfrm>
           <a:prstGeom prst="rect">
             <a:avLst/>
@@ -4339,17 +5199,17 @@
           <a:p>
             <a:pPr algn="l">
               <a:lnSpc>
-                <a:spcPct val="115000"/>
+                <a:spcPct val="120000"/>
               </a:lnSpc>
             </a:pPr>
             <a:r>
-              <a:rPr sz="1500" b="0" i="1">
+              <a:rPr sz="1300" b="0" i="1">
                 <a:solidFill>
                   <a:srgbClr val="6B7280"/>
                 </a:solidFill>
                 <a:latin typeface="Calibri"/>
               </a:rPr>
-              <a:t>Zambians and Americans both live with uranium. Only one nation measures it.</a:t>
+              <a:t>One paragraph. Three minutes. The full argument.</a:t>
             </a:r>
           </a:p>
         </p:txBody>
@@ -4362,14 +5222,14 @@
         </p:nvSpPr>
         <p:spPr>
           <a:xfrm>
-            <a:off x="548640" y="2240280"/>
-            <a:ext cx="5532120" cy="3657600"/>
+            <a:off x="548640" y="1965960"/>
+            <a:ext cx="11064240" cy="4434840"/>
           </a:xfrm>
           <a:prstGeom prst="rect">
             <a:avLst/>
           </a:prstGeom>
           <a:solidFill>
-            <a:srgbClr val="7C1818"/>
+            <a:srgbClr val="FFFFFF"/>
           </a:solidFill>
           <a:ln>
             <a:noFill/>
@@ -4406,289 +5266,8 @@
         </p:nvSpPr>
         <p:spPr>
           <a:xfrm>
-            <a:off x="548640" y="2240280"/>
-            <a:ext cx="109728" cy="3657600"/>
-          </a:xfrm>
-          <a:prstGeom prst="rect">
-            <a:avLst/>
-          </a:prstGeom>
-          <a:solidFill>
-            <a:srgbClr val="B32B2B"/>
-          </a:solidFill>
-          <a:ln>
-            <a:noFill/>
-          </a:ln>
-          <a:effectLst/>
-        </p:spPr>
-        <p:style>
-          <a:lnRef idx="1">
-            <a:schemeClr val="accent1"/>
-          </a:lnRef>
-          <a:fillRef idx="3">
-            <a:schemeClr val="accent1"/>
-          </a:fillRef>
-          <a:effectRef idx="2">
-            <a:schemeClr val="accent1"/>
-          </a:effectRef>
-          <a:fontRef idx="minor">
-            <a:schemeClr val="lt1"/>
-          </a:fontRef>
-        </p:style>
-        <p:txBody>
-          <a:bodyPr rtlCol="0" anchor="ctr"/>
-          <a:lstStyle/>
-          <a:p>
-            <a:pPr algn="ctr"/>
-          </a:p>
-        </p:txBody>
-      </p:sp>
-      <p:sp>
-        <p:nvSpPr>
-          <p:cNvPr id="8" name="TextBox 7"/>
-          <p:cNvSpPr txBox="1"/>
-          <p:nvPr/>
-        </p:nvSpPr>
-        <p:spPr>
-          <a:xfrm>
-            <a:off x="777240" y="2377440"/>
-            <a:ext cx="5120640" cy="274320"/>
-          </a:xfrm>
-          <a:prstGeom prst="rect">
-            <a:avLst/>
-          </a:prstGeom>
-          <a:noFill/>
-        </p:spPr>
-        <p:txBody>
-          <a:bodyPr wrap="square" anchor="t" lIns="0" rIns="0" tIns="0" bIns="0">
-            <a:spAutoFit/>
-          </a:bodyPr>
-          <a:lstStyle/>
-          <a:p>
-            <a:pPr algn="l">
-              <a:lnSpc>
-                <a:spcPct val="115000"/>
-              </a:lnSpc>
-            </a:pPr>
-            <a:r>
-              <a:rPr sz="1100" b="1" i="0">
-                <a:solidFill>
-                  <a:srgbClr val="E8A860"/>
-                </a:solidFill>
-                <a:latin typeface="Calibri"/>
-              </a:rPr>
-              <a:t>ZAMBIA  ·  SIAVONGA</a:t>
-            </a:r>
-          </a:p>
-        </p:txBody>
-      </p:sp>
-      <p:sp>
-        <p:nvSpPr>
-          <p:cNvPr id="9" name="TextBox 8"/>
-          <p:cNvSpPr txBox="1"/>
-          <p:nvPr/>
-        </p:nvSpPr>
-        <p:spPr>
-          <a:xfrm>
-            <a:off x="777240" y="2697480"/>
-            <a:ext cx="5120640" cy="1280160"/>
-          </a:xfrm>
-          <a:prstGeom prst="rect">
-            <a:avLst/>
-          </a:prstGeom>
-          <a:noFill/>
-        </p:spPr>
-        <p:txBody>
-          <a:bodyPr wrap="square" anchor="t" lIns="0" rIns="0" tIns="0" bIns="0">
-            <a:spAutoFit/>
-          </a:bodyPr>
-          <a:lstStyle/>
-          <a:p>
-            <a:pPr algn="l">
-              <a:lnSpc>
-                <a:spcPct val="105000"/>
-              </a:lnSpc>
-            </a:pPr>
-            <a:r>
-              <a:rPr sz="2600" b="1" i="0">
-                <a:solidFill>
-                  <a:srgbClr val="FFFFFF"/>
-                </a:solidFill>
-                <a:latin typeface="Calibri"/>
-              </a:rPr>
-              <a:t>Uranium in the water.
-Uranium in the dust.</a:t>
-            </a:r>
-          </a:p>
-        </p:txBody>
-      </p:sp>
-      <p:sp>
-        <p:nvSpPr>
-          <p:cNvPr id="10" name="TextBox 9"/>
-          <p:cNvSpPr txBox="1"/>
-          <p:nvPr/>
-        </p:nvSpPr>
-        <p:spPr>
-          <a:xfrm>
-            <a:off x="777240" y="4160520"/>
-            <a:ext cx="5120640" cy="914400"/>
-          </a:xfrm>
-          <a:prstGeom prst="rect">
-            <a:avLst/>
-          </a:prstGeom>
-          <a:noFill/>
-        </p:spPr>
-        <p:txBody>
-          <a:bodyPr wrap="square" anchor="t" lIns="0" rIns="0" tIns="0" bIns="0">
-            <a:spAutoFit/>
-          </a:bodyPr>
-          <a:lstStyle/>
-          <a:p>
-            <a:pPr algn="l">
-              <a:lnSpc>
-                <a:spcPct val="130000"/>
-              </a:lnSpc>
-            </a:pPr>
-            <a:r>
-              <a:rPr sz="1300" b="0" i="0">
-                <a:solidFill>
-                  <a:srgbClr val="F2CFCF"/>
-                </a:solidFill>
-                <a:latin typeface="Calibri"/>
-              </a:rPr>
-              <a:t>Zero monitoring.  Zero baseline.
-Zero accountability.</a:t>
-            </a:r>
-          </a:p>
-        </p:txBody>
-      </p:sp>
-      <p:cxnSp>
-        <p:nvCxnSpPr>
-          <p:cNvPr id="11" name="Connector 10"/>
-          <p:cNvCxnSpPr/>
-          <p:nvPr/>
-        </p:nvCxnSpPr>
-        <p:spPr>
-          <a:xfrm>
-            <a:off x="777240" y="5166360"/>
-            <a:ext cx="914400" cy="0"/>
-          </a:xfrm>
-          <a:prstGeom prst="line">
-            <a:avLst/>
-          </a:prstGeom>
-          <a:ln w="12700">
-            <a:solidFill>
-              <a:srgbClr val="CC7A2E"/>
-            </a:solidFill>
-          </a:ln>
-        </p:spPr>
-        <p:style>
-          <a:lnRef idx="2">
-            <a:schemeClr val="accent1"/>
-          </a:lnRef>
-          <a:fillRef idx="0">
-            <a:schemeClr val="accent1"/>
-          </a:fillRef>
-          <a:effectRef idx="1">
-            <a:schemeClr val="accent1"/>
-          </a:effectRef>
-          <a:fontRef idx="minor">
-            <a:schemeClr val="tx1"/>
-          </a:fontRef>
-        </p:style>
-      </p:cxnSp>
-      <p:sp>
-        <p:nvSpPr>
-          <p:cNvPr id="12" name="TextBox 11"/>
-          <p:cNvSpPr txBox="1"/>
-          <p:nvPr/>
-        </p:nvSpPr>
-        <p:spPr>
-          <a:xfrm>
-            <a:off x="777240" y="5257800"/>
-            <a:ext cx="5120640" cy="457200"/>
-          </a:xfrm>
-          <a:prstGeom prst="rect">
-            <a:avLst/>
-          </a:prstGeom>
-          <a:noFill/>
-        </p:spPr>
-        <p:txBody>
-          <a:bodyPr wrap="square" anchor="t" lIns="0" rIns="0" tIns="0" bIns="0">
-            <a:spAutoFit/>
-          </a:bodyPr>
-          <a:lstStyle/>
-          <a:p>
-            <a:pPr algn="l">
-              <a:lnSpc>
-                <a:spcPct val="115000"/>
-              </a:lnSpc>
-            </a:pPr>
-            <a:r>
-              <a:rPr sz="1400" b="1" i="0">
-                <a:solidFill>
-                  <a:srgbClr val="E8A860"/>
-                </a:solidFill>
-                <a:latin typeface="Calibri"/>
-              </a:rPr>
-              <a:t>RADIOLOGICAL  FEAR</a:t>
-            </a:r>
-          </a:p>
-        </p:txBody>
-      </p:sp>
-      <p:sp>
-        <p:nvSpPr>
-          <p:cNvPr id="13" name="Rectangle 12"/>
-          <p:cNvSpPr/>
-          <p:nvPr/>
-        </p:nvSpPr>
-        <p:spPr>
-          <a:xfrm>
-            <a:off x="6263640" y="2240280"/>
-            <a:ext cx="5349240" cy="3657600"/>
-          </a:xfrm>
-          <a:prstGeom prst="rect">
-            <a:avLst/>
-          </a:prstGeom>
-          <a:solidFill>
-            <a:srgbClr val="0A1F3D"/>
-          </a:solidFill>
-          <a:ln>
-            <a:noFill/>
-          </a:ln>
-          <a:effectLst/>
-        </p:spPr>
-        <p:style>
-          <a:lnRef idx="1">
-            <a:schemeClr val="accent1"/>
-          </a:lnRef>
-          <a:fillRef idx="3">
-            <a:schemeClr val="accent1"/>
-          </a:fillRef>
-          <a:effectRef idx="2">
-            <a:schemeClr val="accent1"/>
-          </a:effectRef>
-          <a:fontRef idx="minor">
-            <a:schemeClr val="lt1"/>
-          </a:fontRef>
-        </p:style>
-        <p:txBody>
-          <a:bodyPr rtlCol="0" anchor="ctr"/>
-          <a:lstStyle/>
-          <a:p>
-            <a:pPr algn="ctr"/>
-          </a:p>
-        </p:txBody>
-      </p:sp>
-      <p:sp>
-        <p:nvSpPr>
-          <p:cNvPr id="14" name="Rectangle 13"/>
-          <p:cNvSpPr/>
-          <p:nvPr/>
-        </p:nvSpPr>
-        <p:spPr>
-          <a:xfrm>
-            <a:off x="6263640" y="2240280"/>
-            <a:ext cx="109728" cy="3657600"/>
+            <a:off x="548640" y="1965960"/>
+            <a:ext cx="109728" cy="4434840"/>
           </a:xfrm>
           <a:prstGeom prst="rect">
             <a:avLst/>
@@ -4725,14 +5304,14 @@
       </p:sp>
       <p:sp>
         <p:nvSpPr>
-          <p:cNvPr id="15" name="TextBox 14"/>
+          <p:cNvPr id="8" name="TextBox 7"/>
           <p:cNvSpPr txBox="1"/>
           <p:nvPr/>
         </p:nvSpPr>
         <p:spPr>
           <a:xfrm>
-            <a:off x="6492240" y="2377440"/>
-            <a:ext cx="5029200" cy="274320"/>
+            <a:off x="868680" y="2103120"/>
+            <a:ext cx="10515600" cy="274320"/>
           </a:xfrm>
           <a:prstGeom prst="rect">
             <a:avLst/>
@@ -4747,31 +5326,31 @@
           <a:p>
             <a:pPr algn="l">
               <a:lnSpc>
-                <a:spcPct val="115000"/>
+                <a:spcPct val="120000"/>
               </a:lnSpc>
             </a:pPr>
             <a:r>
-              <a:rPr sz="1100" b="1" i="0">
-                <a:solidFill>
-                  <a:srgbClr val="E8A860"/>
+              <a:rPr sz="1000" b="1" i="0">
+                <a:solidFill>
+                  <a:srgbClr val="CC7A2E"/>
                 </a:solidFill>
                 <a:latin typeface="Calibri"/>
               </a:rPr>
-              <a:t>USA  ·  DOE NUCLEAR ENTERPRISE</a:t>
-            </a:r>
-          </a:p>
-        </p:txBody>
-      </p:sp>
-      <p:sp>
-        <p:nvSpPr>
-          <p:cNvPr id="16" name="TextBox 15"/>
+              <a:t>DELIVERED AT EXECUTIVE CADENCE  ·  ~360 WORDS</a:t>
+            </a:r>
+          </a:p>
+        </p:txBody>
+      </p:sp>
+      <p:sp>
+        <p:nvSpPr>
+          <p:cNvPr id="9" name="TextBox 8"/>
           <p:cNvSpPr txBox="1"/>
           <p:nvPr/>
         </p:nvSpPr>
         <p:spPr>
           <a:xfrm>
-            <a:off x="6492240" y="2697480"/>
-            <a:ext cx="5029200" cy="1280160"/>
+            <a:off x="868680" y="2423160"/>
+            <a:ext cx="10515600" cy="3931920"/>
           </a:xfrm>
           <a:prstGeom prst="rect">
             <a:avLst/>
@@ -4786,79 +5365,38 @@
           <a:p>
             <a:pPr algn="l">
               <a:lnSpc>
-                <a:spcPct val="105000"/>
+                <a:spcPct val="132000"/>
               </a:lnSpc>
             </a:pPr>
             <a:r>
-              <a:rPr sz="2600" b="1" i="0">
-                <a:solidFill>
-                  <a:srgbClr val="FFFFFF"/>
+              <a:rPr sz="1100" b="0" i="0">
+                <a:solidFill>
+                  <a:srgbClr val="121824"/>
                 </a:solidFill>
                 <a:latin typeface="Calibri"/>
               </a:rPr>
-              <a:t>22,000 workers.
-59.12 mrem average.</a:t>
-            </a:r>
-          </a:p>
-        </p:txBody>
-      </p:sp>
-      <p:sp>
-        <p:nvSpPr>
-          <p:cNvPr id="17" name="TextBox 16"/>
-          <p:cNvSpPr txBox="1"/>
-          <p:nvPr/>
-        </p:nvSpPr>
-        <p:spPr>
-          <a:xfrm>
-            <a:off x="6492240" y="4160520"/>
-            <a:ext cx="5029200" cy="914400"/>
-          </a:xfrm>
-          <a:prstGeom prst="rect">
-            <a:avLst/>
-          </a:prstGeom>
-          <a:noFill/>
-        </p:spPr>
-        <p:txBody>
-          <a:bodyPr wrap="square" anchor="t" lIns="0" rIns="0" tIns="0" bIns="0">
-            <a:spAutoFit/>
-          </a:bodyPr>
-          <a:lstStyle/>
-          <a:p>
-            <a:pPr algn="l">
-              <a:lnSpc>
-                <a:spcPct val="130000"/>
-              </a:lnSpc>
-            </a:pPr>
-            <a:r>
-              <a:rPr sz="1300" b="0" i="0">
-                <a:solidFill>
-                  <a:srgbClr val="CFD8E3"/>
-                </a:solidFill>
-                <a:latin typeface="Calibri"/>
-              </a:rPr>
-              <a:t>Every dose tracked.  Every site audited.
-Every year. For a decade.</a:t>
+              <a:t>Imagine a country that owns its uranium, runs a Radiation Protection Authority, has a Cabinet-approved Nuclear Policy, and has signed cooperation agreements with ROSATOM, the U.S. IP3 Allied Nuclear Partners, and South Korea's KAERI — and yet, in 2026, still depends on a single river system for eighty-four percent of its electricity. That country is Zambia. Every drought repeats the same story: the 2015/16 dry year cost us roughly one thousand megawatts of generation and four hundred and forty million U.S. dollars in unbudgeted imports; the 2023–2024 Kariba crisis triggered months of load-shedding that stalled the very copper mines that fund the national budget. Meanwhile, in Siavonga, the 2024 Uranium Baseline Survey detected unmonitored uranium in water and household dust — communities living beside the resource itself, without instruments, without a baseline, without accountability. That is radiological fear. Contrast that with the United States, where my analysis of the Department of Energy Radiation Exposure Monitoring System tracks twenty-two thousand workers and shows an average individual dose of just fifty-nine point one two millirem per year — about one point two percent of the federal occupational limit, with workforce growth producing zero increase in individual exposure. That is industrial mastery. Same element, two completely different outcomes; the variable is the system. Zambia already participates in that system through the IAEA Milestone Approach. We have the uranium. We have the safety institution. We have the policy. We have the partners. And we have a three-million-tonne copper ambition that no hydropower fleet on this continent can power reliably. The missing piece is legislative: pass the Nuclear Bill, fund radiological monitoring nationwide starting in Siavonga, and greenlight Small Modular Reactor pre-feasibility. The fuel is under our feet. The expertise is on our payroll. The bill is on the table. Sign it.</a:t>
             </a:r>
           </a:p>
         </p:txBody>
       </p:sp>
       <p:cxnSp>
         <p:nvCxnSpPr>
-          <p:cNvPr id="18" name="Connector 17"/>
+          <p:cNvPr id="10" name="Connector 9"/>
           <p:cNvCxnSpPr/>
           <p:nvPr/>
         </p:nvCxnSpPr>
         <p:spPr>
           <a:xfrm>
-            <a:off x="6492240" y="5166360"/>
-            <a:ext cx="914400" cy="0"/>
+            <a:off x="0" y="6629400"/>
+            <a:ext cx="12191695" cy="0"/>
           </a:xfrm>
           <a:prstGeom prst="line">
             <a:avLst/>
           </a:prstGeom>
-          <a:ln w="12700">
+          <a:ln w="6350">
             <a:solidFill>
-              <a:srgbClr val="CC7A2E"/>
+              <a:srgbClr val="C8CED6"/>
             </a:solidFill>
           </a:ln>
         </p:spPr>
@@ -4879,136 +5417,14 @@
       </p:cxnSp>
       <p:sp>
         <p:nvSpPr>
-          <p:cNvPr id="19" name="TextBox 18"/>
-          <p:cNvSpPr txBox="1"/>
-          <p:nvPr/>
-        </p:nvSpPr>
-        <p:spPr>
-          <a:xfrm>
-            <a:off x="6492240" y="5257800"/>
-            <a:ext cx="5029200" cy="457200"/>
-          </a:xfrm>
-          <a:prstGeom prst="rect">
-            <a:avLst/>
-          </a:prstGeom>
-          <a:noFill/>
-        </p:spPr>
-        <p:txBody>
-          <a:bodyPr wrap="square" anchor="t" lIns="0" rIns="0" tIns="0" bIns="0">
-            <a:spAutoFit/>
-          </a:bodyPr>
-          <a:lstStyle/>
-          <a:p>
-            <a:pPr algn="l">
-              <a:lnSpc>
-                <a:spcPct val="115000"/>
-              </a:lnSpc>
-            </a:pPr>
-            <a:r>
-              <a:rPr sz="1400" b="1" i="0">
-                <a:solidFill>
-                  <a:srgbClr val="E8A860"/>
-                </a:solidFill>
-                <a:latin typeface="Calibri"/>
-              </a:rPr>
-              <a:t>INDUSTRIAL  MASTERY</a:t>
-            </a:r>
-          </a:p>
-        </p:txBody>
-      </p:sp>
-      <p:sp>
-        <p:nvSpPr>
-          <p:cNvPr id="20" name="TextBox 19"/>
-          <p:cNvSpPr txBox="1"/>
-          <p:nvPr/>
-        </p:nvSpPr>
-        <p:spPr>
-          <a:xfrm>
-            <a:off x="548640" y="6080760"/>
-            <a:ext cx="11064240" cy="365760"/>
-          </a:xfrm>
-          <a:prstGeom prst="rect">
-            <a:avLst/>
-          </a:prstGeom>
-          <a:noFill/>
-        </p:spPr>
-        <p:txBody>
-          <a:bodyPr wrap="square" anchor="t" lIns="0" rIns="0" tIns="0" bIns="0">
-            <a:spAutoFit/>
-          </a:bodyPr>
-          <a:lstStyle/>
-          <a:p>
-            <a:pPr algn="ctr">
-              <a:lnSpc>
-                <a:spcPct val="115000"/>
-              </a:lnSpc>
-            </a:pPr>
-            <a:r>
-              <a:rPr sz="1500" b="1" i="0">
-                <a:solidFill>
-                  <a:srgbClr val="0A1F3D"/>
-                </a:solidFill>
-                <a:latin typeface="Calibri"/>
-              </a:rPr>
-              <a:t>The gap is not the science. It is the system.</a:t>
-            </a:r>
-          </a:p>
-        </p:txBody>
-      </p:sp>
-      <p:sp>
-        <p:nvSpPr>
-          <p:cNvPr id="21" name="Rectangle 20"/>
+          <p:cNvPr id="11" name="Rectangle 10"/>
           <p:cNvSpPr/>
           <p:nvPr/>
         </p:nvSpPr>
         <p:spPr>
           <a:xfrm>
-            <a:off x="0" y="6675120"/>
-            <a:ext cx="12191695" cy="182880"/>
-          </a:xfrm>
-          <a:prstGeom prst="rect">
-            <a:avLst/>
-          </a:prstGeom>
-          <a:solidFill>
-            <a:srgbClr val="C8CED6"/>
-          </a:solidFill>
-          <a:ln>
-            <a:noFill/>
-          </a:ln>
-          <a:effectLst/>
-        </p:spPr>
-        <p:style>
-          <a:lnRef idx="1">
-            <a:schemeClr val="accent1"/>
-          </a:lnRef>
-          <a:fillRef idx="3">
-            <a:schemeClr val="accent1"/>
-          </a:fillRef>
-          <a:effectRef idx="2">
-            <a:schemeClr val="accent1"/>
-          </a:effectRef>
-          <a:fontRef idx="minor">
-            <a:schemeClr val="lt1"/>
-          </a:fontRef>
-        </p:style>
-        <p:txBody>
-          <a:bodyPr rtlCol="0" anchor="ctr"/>
-          <a:lstStyle/>
-          <a:p>
-            <a:pPr algn="ctr"/>
-          </a:p>
-        </p:txBody>
-      </p:sp>
-      <p:sp>
-        <p:nvSpPr>
-          <p:cNvPr id="22" name="Rectangle 21"/>
-          <p:cNvSpPr/>
-          <p:nvPr/>
-        </p:nvSpPr>
-        <p:spPr>
-          <a:xfrm>
-            <a:off x="0" y="6675120"/>
-            <a:ext cx="640080" cy="182880"/>
+            <a:off x="0" y="6629400"/>
+            <a:ext cx="640080" cy="45720"/>
           </a:xfrm>
           <a:prstGeom prst="rect">
             <a:avLst/>
@@ -5045,14 +5461,14 @@
       </p:sp>
       <p:sp>
         <p:nvSpPr>
-          <p:cNvPr id="23" name="TextBox 22"/>
+          <p:cNvPr id="12" name="TextBox 11"/>
           <p:cNvSpPr txBox="1"/>
           <p:nvPr/>
         </p:nvSpPr>
         <p:spPr>
           <a:xfrm>
-            <a:off x="457200" y="6446520"/>
-            <a:ext cx="9601200" cy="228600"/>
+            <a:off x="457200" y="6675120"/>
+            <a:ext cx="9601200" cy="182880"/>
           </a:xfrm>
           <a:prstGeom prst="rect">
             <a:avLst/>
@@ -5067,31 +5483,31 @@
           <a:p>
             <a:pPr algn="l">
               <a:lnSpc>
-                <a:spcPct val="115000"/>
+                <a:spcPct val="120000"/>
               </a:lnSpc>
             </a:pPr>
             <a:r>
-              <a:rPr sz="900" b="0" i="1">
+              <a:rPr sz="800" b="0" i="1">
                 <a:solidFill>
                   <a:srgbClr val="6B7280"/>
                 </a:solidFill>
                 <a:latin typeface="Calibri"/>
               </a:rPr>
-              <a:t>Sources: Siavonga Uranium Baseline Survey (2024) · U.S. DOE REMS 2024 Report</a:t>
-            </a:r>
-          </a:p>
-        </p:txBody>
-      </p:sp>
-      <p:sp>
-        <p:nvSpPr>
-          <p:cNvPr id="24" name="TextBox 23"/>
+              <a:t>Sources: U.S. DOE REMS 2024 Report · ZESCO Annual Reports 2023-2024 · Siavonga Uranium Baseline Survey (2024) · Zambia 7NDP &amp; Vision 2030</a:t>
+            </a:r>
+          </a:p>
+        </p:txBody>
+      </p:sp>
+      <p:sp>
+        <p:nvSpPr>
+          <p:cNvPr id="13" name="TextBox 12"/>
           <p:cNvSpPr txBox="1"/>
           <p:nvPr/>
         </p:nvSpPr>
         <p:spPr>
           <a:xfrm>
-            <a:off x="10515600" y="6446520"/>
-            <a:ext cx="1463040" cy="228600"/>
+            <a:off x="10424160" y="6675120"/>
+            <a:ext cx="1554480" cy="182880"/>
           </a:xfrm>
           <a:prstGeom prst="rect">
             <a:avLst/>
@@ -5106,17 +5522,17 @@
           <a:p>
             <a:pPr algn="r">
               <a:lnSpc>
-                <a:spcPct val="115000"/>
+                <a:spcPct val="120000"/>
               </a:lnSpc>
             </a:pPr>
             <a:r>
-              <a:rPr sz="900" b="1" i="0">
+              <a:rPr sz="800" b="1" i="0">
                 <a:solidFill>
                   <a:srgbClr val="2A3344"/>
                 </a:solidFill>
                 <a:latin typeface="Calibri"/>
               </a:rPr>
-              <a:t>2 / 5  ·  E. Mwaba</a:t>
+              <a:t>2 / 8  ·  E. Mwaba</a:t>
             </a:r>
           </a:p>
         </p:txBody>
@@ -5156,7 +5572,7 @@
         <p:spPr>
           <a:xfrm>
             <a:off x="548640" y="411480"/>
-            <a:ext cx="7315200" cy="274320"/>
+            <a:ext cx="9144000" cy="274320"/>
           </a:xfrm>
           <a:prstGeom prst="rect">
             <a:avLst/>
@@ -5171,7 +5587,7 @@
           <a:p>
             <a:pPr algn="l">
               <a:lnSpc>
-                <a:spcPct val="115000"/>
+                <a:spcPct val="120000"/>
               </a:lnSpc>
             </a:pPr>
             <a:r>
@@ -5181,7 +5597,7 @@
                 </a:solidFill>
                 <a:latin typeface="Calibri"/>
               </a:rPr>
-              <a:t>02  ·  THE EVIDENCE</a:t>
+              <a:t>01  ·  THE HOOK</a:t>
             </a:r>
           </a:p>
         </p:txBody>
@@ -5195,7 +5611,7 @@
         <p:spPr>
           <a:xfrm>
             <a:off x="548640" y="685800"/>
-            <a:ext cx="11064240" cy="640080"/>
+            <a:ext cx="11064240" cy="685800"/>
           </a:xfrm>
           <a:prstGeom prst="rect">
             <a:avLst/>
@@ -5210,7 +5626,7 @@
           <a:p>
             <a:pPr algn="l">
               <a:lnSpc>
-                <a:spcPct val="115000"/>
+                <a:spcPct val="120000"/>
               </a:lnSpc>
             </a:pPr>
             <a:r>
@@ -5220,7 +5636,7 @@
                 </a:solidFill>
                 <a:latin typeface="Calibri"/>
               </a:rPr>
-              <a:t>Nuclear safety is not theory. It's a track record.</a:t>
+              <a:t>Same element. Two realities.</a:t>
             </a:r>
           </a:p>
         </p:txBody>
@@ -5269,7 +5685,7 @@
         <p:spPr>
           <a:xfrm>
             <a:off x="548640" y="1417320"/>
-            <a:ext cx="11064240" cy="457200"/>
+            <a:ext cx="11064240" cy="365760"/>
           </a:xfrm>
           <a:prstGeom prst="rect">
             <a:avLst/>
@@ -5284,17 +5700,17 @@
           <a:p>
             <a:pPr algn="l">
               <a:lnSpc>
-                <a:spcPct val="115000"/>
+                <a:spcPct val="120000"/>
               </a:lnSpc>
             </a:pPr>
             <a:r>
-              <a:rPr sz="1400" b="0" i="1">
+              <a:rPr sz="1300" b="0" i="1">
                 <a:solidFill>
                   <a:srgbClr val="6B7280"/>
                 </a:solidFill>
                 <a:latin typeface="Calibri"/>
               </a:rPr>
-              <a:t>A decade of U.S. data (2014-2024) — and a regulatory playbook Zambia is already following.</a:t>
+              <a:t>Zambians and Americans both live with uranium. Only one nation measures it.</a:t>
             </a:r>
           </a:p>
         </p:txBody>
@@ -5307,8 +5723,289 @@
         </p:nvSpPr>
         <p:spPr>
           <a:xfrm>
-            <a:off x="548640" y="2148840"/>
-            <a:ext cx="6766560" cy="2651760"/>
+            <a:off x="548640" y="2103120"/>
+            <a:ext cx="5532120" cy="3931920"/>
+          </a:xfrm>
+          <a:prstGeom prst="rect">
+            <a:avLst/>
+          </a:prstGeom>
+          <a:solidFill>
+            <a:srgbClr val="7C1818"/>
+          </a:solidFill>
+          <a:ln>
+            <a:noFill/>
+          </a:ln>
+          <a:effectLst/>
+        </p:spPr>
+        <p:style>
+          <a:lnRef idx="1">
+            <a:schemeClr val="accent1"/>
+          </a:lnRef>
+          <a:fillRef idx="3">
+            <a:schemeClr val="accent1"/>
+          </a:fillRef>
+          <a:effectRef idx="2">
+            <a:schemeClr val="accent1"/>
+          </a:effectRef>
+          <a:fontRef idx="minor">
+            <a:schemeClr val="lt1"/>
+          </a:fontRef>
+        </p:style>
+        <p:txBody>
+          <a:bodyPr rtlCol="0" anchor="ctr"/>
+          <a:lstStyle/>
+          <a:p>
+            <a:pPr algn="ctr"/>
+          </a:p>
+        </p:txBody>
+      </p:sp>
+      <p:sp>
+        <p:nvSpPr>
+          <p:cNvPr id="7" name="Rectangle 6"/>
+          <p:cNvSpPr/>
+          <p:nvPr/>
+        </p:nvSpPr>
+        <p:spPr>
+          <a:xfrm>
+            <a:off x="548640" y="2103120"/>
+            <a:ext cx="109728" cy="3931920"/>
+          </a:xfrm>
+          <a:prstGeom prst="rect">
+            <a:avLst/>
+          </a:prstGeom>
+          <a:solidFill>
+            <a:srgbClr val="B32B2B"/>
+          </a:solidFill>
+          <a:ln>
+            <a:noFill/>
+          </a:ln>
+          <a:effectLst/>
+        </p:spPr>
+        <p:style>
+          <a:lnRef idx="1">
+            <a:schemeClr val="accent1"/>
+          </a:lnRef>
+          <a:fillRef idx="3">
+            <a:schemeClr val="accent1"/>
+          </a:fillRef>
+          <a:effectRef idx="2">
+            <a:schemeClr val="accent1"/>
+          </a:effectRef>
+          <a:fontRef idx="minor">
+            <a:schemeClr val="lt1"/>
+          </a:fontRef>
+        </p:style>
+        <p:txBody>
+          <a:bodyPr rtlCol="0" anchor="ctr"/>
+          <a:lstStyle/>
+          <a:p>
+            <a:pPr algn="ctr"/>
+          </a:p>
+        </p:txBody>
+      </p:sp>
+      <p:sp>
+        <p:nvSpPr>
+          <p:cNvPr id="8" name="TextBox 7"/>
+          <p:cNvSpPr txBox="1"/>
+          <p:nvPr/>
+        </p:nvSpPr>
+        <p:spPr>
+          <a:xfrm>
+            <a:off x="777240" y="2240280"/>
+            <a:ext cx="5120640" cy="274320"/>
+          </a:xfrm>
+          <a:prstGeom prst="rect">
+            <a:avLst/>
+          </a:prstGeom>
+          <a:noFill/>
+        </p:spPr>
+        <p:txBody>
+          <a:bodyPr wrap="square" anchor="t" lIns="0" rIns="0" tIns="0" bIns="0">
+            <a:spAutoFit/>
+          </a:bodyPr>
+          <a:lstStyle/>
+          <a:p>
+            <a:pPr algn="l">
+              <a:lnSpc>
+                <a:spcPct val="120000"/>
+              </a:lnSpc>
+            </a:pPr>
+            <a:r>
+              <a:rPr sz="1000" b="1" i="0">
+                <a:solidFill>
+                  <a:srgbClr val="E8A860"/>
+                </a:solidFill>
+                <a:latin typeface="Calibri"/>
+              </a:rPr>
+              <a:t>ZAMBIA  ·  SIAVONGA  ·  2024</a:t>
+            </a:r>
+          </a:p>
+        </p:txBody>
+      </p:sp>
+      <p:sp>
+        <p:nvSpPr>
+          <p:cNvPr id="9" name="TextBox 8"/>
+          <p:cNvSpPr txBox="1"/>
+          <p:nvPr/>
+        </p:nvSpPr>
+        <p:spPr>
+          <a:xfrm>
+            <a:off x="777240" y="2560320"/>
+            <a:ext cx="5120640" cy="1463040"/>
+          </a:xfrm>
+          <a:prstGeom prst="rect">
+            <a:avLst/>
+          </a:prstGeom>
+          <a:noFill/>
+        </p:spPr>
+        <p:txBody>
+          <a:bodyPr wrap="square" anchor="t" lIns="0" rIns="0" tIns="0" bIns="0">
+            <a:spAutoFit/>
+          </a:bodyPr>
+          <a:lstStyle/>
+          <a:p>
+            <a:pPr algn="l">
+              <a:lnSpc>
+                <a:spcPct val="105000"/>
+              </a:lnSpc>
+            </a:pPr>
+            <a:r>
+              <a:rPr sz="2800" b="1" i="0">
+                <a:solidFill>
+                  <a:srgbClr val="FFFFFF"/>
+                </a:solidFill>
+                <a:latin typeface="Calibri"/>
+              </a:rPr>
+              <a:t>Uranium in the water.
+Uranium in the dust.</a:t>
+            </a:r>
+          </a:p>
+        </p:txBody>
+      </p:sp>
+      <p:sp>
+        <p:nvSpPr>
+          <p:cNvPr id="10" name="TextBox 9"/>
+          <p:cNvSpPr txBox="1"/>
+          <p:nvPr/>
+        </p:nvSpPr>
+        <p:spPr>
+          <a:xfrm>
+            <a:off x="777240" y="4251960"/>
+            <a:ext cx="5120640" cy="1005840"/>
+          </a:xfrm>
+          <a:prstGeom prst="rect">
+            <a:avLst/>
+          </a:prstGeom>
+          <a:noFill/>
+        </p:spPr>
+        <p:txBody>
+          <a:bodyPr wrap="square" anchor="t" lIns="0" rIns="0" tIns="0" bIns="0">
+            <a:spAutoFit/>
+          </a:bodyPr>
+          <a:lstStyle/>
+          <a:p>
+            <a:pPr algn="l">
+              <a:lnSpc>
+                <a:spcPct val="130000"/>
+              </a:lnSpc>
+            </a:pPr>
+            <a:r>
+              <a:rPr sz="1300" b="0" i="0">
+                <a:solidFill>
+                  <a:srgbClr val="F2CFCF"/>
+                </a:solidFill>
+                <a:latin typeface="Calibri"/>
+              </a:rPr>
+              <a:t>Zero monitoring.  Zero baseline.
+Zero accountability.</a:t>
+            </a:r>
+          </a:p>
+        </p:txBody>
+      </p:sp>
+      <p:cxnSp>
+        <p:nvCxnSpPr>
+          <p:cNvPr id="11" name="Connector 10"/>
+          <p:cNvCxnSpPr/>
+          <p:nvPr/>
+        </p:nvCxnSpPr>
+        <p:spPr>
+          <a:xfrm>
+            <a:off x="777240" y="5349240"/>
+            <a:ext cx="914400" cy="0"/>
+          </a:xfrm>
+          <a:prstGeom prst="line">
+            <a:avLst/>
+          </a:prstGeom>
+          <a:ln w="12700">
+            <a:solidFill>
+              <a:srgbClr val="CC7A2E"/>
+            </a:solidFill>
+          </a:ln>
+        </p:spPr>
+        <p:style>
+          <a:lnRef idx="2">
+            <a:schemeClr val="accent1"/>
+          </a:lnRef>
+          <a:fillRef idx="0">
+            <a:schemeClr val="accent1"/>
+          </a:fillRef>
+          <a:effectRef idx="1">
+            <a:schemeClr val="accent1"/>
+          </a:effectRef>
+          <a:fontRef idx="minor">
+            <a:schemeClr val="tx1"/>
+          </a:fontRef>
+        </p:style>
+      </p:cxnSp>
+      <p:sp>
+        <p:nvSpPr>
+          <p:cNvPr id="12" name="TextBox 11"/>
+          <p:cNvSpPr txBox="1"/>
+          <p:nvPr/>
+        </p:nvSpPr>
+        <p:spPr>
+          <a:xfrm>
+            <a:off x="777240" y="5440680"/>
+            <a:ext cx="5120640" cy="457200"/>
+          </a:xfrm>
+          <a:prstGeom prst="rect">
+            <a:avLst/>
+          </a:prstGeom>
+          <a:noFill/>
+        </p:spPr>
+        <p:txBody>
+          <a:bodyPr wrap="square" anchor="t" lIns="0" rIns="0" tIns="0" bIns="0">
+            <a:spAutoFit/>
+          </a:bodyPr>
+          <a:lstStyle/>
+          <a:p>
+            <a:pPr algn="l">
+              <a:lnSpc>
+                <a:spcPct val="120000"/>
+              </a:lnSpc>
+            </a:pPr>
+            <a:r>
+              <a:rPr sz="1400" b="1" i="0">
+                <a:solidFill>
+                  <a:srgbClr val="E8A860"/>
+                </a:solidFill>
+                <a:latin typeface="Calibri"/>
+              </a:rPr>
+              <a:t>RADIOLOGICAL  FEAR</a:t>
+            </a:r>
+          </a:p>
+        </p:txBody>
+      </p:sp>
+      <p:sp>
+        <p:nvSpPr>
+          <p:cNvPr id="13" name="Rectangle 12"/>
+          <p:cNvSpPr/>
+          <p:nvPr/>
+        </p:nvSpPr>
+        <p:spPr>
+          <a:xfrm>
+            <a:off x="6263640" y="2103120"/>
+            <a:ext cx="5349240" cy="3931920"/>
           </a:xfrm>
           <a:prstGeom prst="rect">
             <a:avLst/>
@@ -5345,14 +6042,14 @@
       </p:sp>
       <p:sp>
         <p:nvSpPr>
-          <p:cNvPr id="7" name="Rectangle 6"/>
+          <p:cNvPr id="14" name="Rectangle 13"/>
           <p:cNvSpPr/>
           <p:nvPr/>
         </p:nvSpPr>
         <p:spPr>
           <a:xfrm>
-            <a:off x="548640" y="2148840"/>
-            <a:ext cx="137160" cy="2651760"/>
+            <a:off x="6263640" y="2103120"/>
+            <a:ext cx="109728" cy="3931920"/>
           </a:xfrm>
           <a:prstGeom prst="rect">
             <a:avLst/>
@@ -5389,14 +6086,14 @@
       </p:sp>
       <p:sp>
         <p:nvSpPr>
-          <p:cNvPr id="8" name="TextBox 7"/>
+          <p:cNvPr id="15" name="TextBox 14"/>
           <p:cNvSpPr txBox="1"/>
           <p:nvPr/>
         </p:nvSpPr>
         <p:spPr>
           <a:xfrm>
-            <a:off x="868680" y="2286000"/>
-            <a:ext cx="6400800" cy="320040"/>
+            <a:off x="6492240" y="2240280"/>
+            <a:ext cx="5029200" cy="274320"/>
           </a:xfrm>
           <a:prstGeom prst="rect">
             <a:avLst/>
@@ -5411,31 +6108,31 @@
           <a:p>
             <a:pPr algn="l">
               <a:lnSpc>
-                <a:spcPct val="115000"/>
+                <a:spcPct val="120000"/>
               </a:lnSpc>
             </a:pPr>
             <a:r>
-              <a:rPr sz="1200" b="1" i="0">
+              <a:rPr sz="1000" b="1" i="0">
                 <a:solidFill>
                   <a:srgbClr val="E8A860"/>
                 </a:solidFill>
                 <a:latin typeface="Calibri"/>
               </a:rPr>
-              <a:t>AVERAGE  INDIVIDUAL  DOSE</a:t>
-            </a:r>
-          </a:p>
-        </p:txBody>
-      </p:sp>
-      <p:sp>
-        <p:nvSpPr>
-          <p:cNvPr id="9" name="TextBox 8"/>
+              <a:t>USA  ·  DOE NUCLEAR ENTERPRISE  ·  2014-2024</a:t>
+            </a:r>
+          </a:p>
+        </p:txBody>
+      </p:sp>
+      <p:sp>
+        <p:nvSpPr>
+          <p:cNvPr id="16" name="TextBox 15"/>
           <p:cNvSpPr txBox="1"/>
           <p:nvPr/>
         </p:nvSpPr>
         <p:spPr>
           <a:xfrm>
-            <a:off x="868680" y="2697480"/>
-            <a:ext cx="6400800" cy="1737360"/>
+            <a:off x="6492240" y="2560320"/>
+            <a:ext cx="5029200" cy="1463040"/>
           </a:xfrm>
           <a:prstGeom prst="rect">
             <a:avLst/>
@@ -5450,40 +6147,32 @@
           <a:p>
             <a:pPr algn="l">
               <a:lnSpc>
-                <a:spcPct val="100000"/>
+                <a:spcPct val="105000"/>
               </a:lnSpc>
             </a:pPr>
             <a:r>
-              <a:rPr sz="11000" b="1" i="0">
+              <a:rPr sz="2800" b="1" i="0">
                 <a:solidFill>
                   <a:srgbClr val="FFFFFF"/>
                 </a:solidFill>
                 <a:latin typeface="Calibri"/>
               </a:rPr>
-              <a:t>59.12</a:t>
-            </a:r>
-            <a:r>
-              <a:rPr sz="2800" b="0" i="0">
-                <a:solidFill>
-                  <a:srgbClr val="E8A860"/>
-                </a:solidFill>
-                <a:latin typeface="Calibri"/>
-              </a:rPr>
-              <a:t>  mrem</a:t>
-            </a:r>
-          </a:p>
-        </p:txBody>
-      </p:sp>
-      <p:sp>
-        <p:nvSpPr>
-          <p:cNvPr id="10" name="TextBox 9"/>
+              <a:t>22,000 workers.
+59.12 mrem average.</a:t>
+            </a:r>
+          </a:p>
+        </p:txBody>
+      </p:sp>
+      <p:sp>
+        <p:nvSpPr>
+          <p:cNvPr id="17" name="TextBox 16"/>
           <p:cNvSpPr txBox="1"/>
           <p:nvPr/>
         </p:nvSpPr>
         <p:spPr>
           <a:xfrm>
-            <a:off x="868680" y="4160520"/>
-            <a:ext cx="6400800" cy="365760"/>
+            <a:off x="6492240" y="4251960"/>
+            <a:ext cx="5029200" cy="1005840"/>
           </a:xfrm>
           <a:prstGeom prst="rect">
             <a:avLst/>
@@ -5498,38 +6187,39 @@
           <a:p>
             <a:pPr algn="l">
               <a:lnSpc>
-                <a:spcPct val="115000"/>
+                <a:spcPct val="130000"/>
               </a:lnSpc>
             </a:pPr>
             <a:r>
-              <a:rPr sz="1200" b="0" i="0">
+              <a:rPr sz="1300" b="0" i="0">
                 <a:solidFill>
                   <a:srgbClr val="CFD8E3"/>
                 </a:solidFill>
                 <a:latin typeface="Calibri"/>
               </a:rPr>
-              <a:t>per technician  ·  per year  ·  10-year mean</a:t>
+              <a:t>Every dose tracked.  Every site audited.
+Every year. For a decade.</a:t>
             </a:r>
           </a:p>
         </p:txBody>
       </p:sp>
       <p:cxnSp>
         <p:nvCxnSpPr>
-          <p:cNvPr id="11" name="Connector 10"/>
+          <p:cNvPr id="18" name="Connector 17"/>
           <p:cNvCxnSpPr/>
           <p:nvPr/>
         </p:nvCxnSpPr>
         <p:spPr>
           <a:xfrm>
-            <a:off x="868680" y="4526280"/>
-            <a:ext cx="6400800" cy="0"/>
+            <a:off x="6492240" y="5349240"/>
+            <a:ext cx="914400" cy="0"/>
           </a:xfrm>
           <a:prstGeom prst="line">
             <a:avLst/>
           </a:prstGeom>
-          <a:ln w="9525">
+          <a:ln w="12700">
             <a:solidFill>
-              <a:srgbClr val="334466"/>
+              <a:srgbClr val="CC7A2E"/>
             </a:solidFill>
           </a:ln>
         </p:spPr>
@@ -5550,14 +6240,14 @@
       </p:cxnSp>
       <p:sp>
         <p:nvSpPr>
-          <p:cNvPr id="12" name="TextBox 11"/>
+          <p:cNvPr id="19" name="TextBox 18"/>
           <p:cNvSpPr txBox="1"/>
           <p:nvPr/>
         </p:nvSpPr>
         <p:spPr>
           <a:xfrm>
-            <a:off x="868680" y="4572000"/>
-            <a:ext cx="6400800" cy="365760"/>
+            <a:off x="6492240" y="5440680"/>
+            <a:ext cx="5029200" cy="457200"/>
           </a:xfrm>
           <a:prstGeom prst="rect">
             <a:avLst/>
@@ -5572,84 +6262,105 @@
           <a:p>
             <a:pPr algn="l">
               <a:lnSpc>
-                <a:spcPct val="115000"/>
+                <a:spcPct val="120000"/>
               </a:lnSpc>
             </a:pPr>
             <a:r>
-              <a:rPr sz="1800" b="1" i="0">
+              <a:rPr sz="1400" b="1" i="0">
                 <a:solidFill>
                   <a:srgbClr val="E8A860"/>
                 </a:solidFill>
                 <a:latin typeface="Calibri"/>
               </a:rPr>
-              <a:t>&lt; 2%</a:t>
-            </a:r>
-            <a:r>
-              <a:rPr sz="1300" b="0" i="0">
-                <a:solidFill>
-                  <a:srgbClr val="FFFFFF"/>
+              <a:t>INDUSTRIAL  MASTERY</a:t>
+            </a:r>
+          </a:p>
+        </p:txBody>
+      </p:sp>
+      <p:sp>
+        <p:nvSpPr>
+          <p:cNvPr id="20" name="TextBox 19"/>
+          <p:cNvSpPr txBox="1"/>
+          <p:nvPr/>
+        </p:nvSpPr>
+        <p:spPr>
+          <a:xfrm>
+            <a:off x="548640" y="6217920"/>
+            <a:ext cx="11064240" cy="365760"/>
+          </a:xfrm>
+          <a:prstGeom prst="rect">
+            <a:avLst/>
+          </a:prstGeom>
+          <a:noFill/>
+        </p:spPr>
+        <p:txBody>
+          <a:bodyPr wrap="square" anchor="t" lIns="0" rIns="0" tIns="0" bIns="0">
+            <a:spAutoFit/>
+          </a:bodyPr>
+          <a:lstStyle/>
+          <a:p>
+            <a:pPr algn="ctr">
+              <a:lnSpc>
+                <a:spcPct val="120000"/>
+              </a:lnSpc>
+            </a:pPr>
+            <a:r>
+              <a:rPr sz="1400" b="1" i="0">
+                <a:solidFill>
+                  <a:srgbClr val="0A1F3D"/>
                 </a:solidFill>
                 <a:latin typeface="Calibri"/>
               </a:rPr>
-              <a:t>  of the 5,000 mrem federal occupational limit</a:t>
-            </a:r>
-          </a:p>
-        </p:txBody>
-      </p:sp>
-      <p:sp>
-        <p:nvSpPr>
-          <p:cNvPr id="13" name="Rectangle 12"/>
-          <p:cNvSpPr/>
-          <p:nvPr/>
-        </p:nvSpPr>
-        <p:spPr>
-          <a:xfrm>
-            <a:off x="7543800" y="2148840"/>
-            <a:ext cx="4160520" cy="841248"/>
-          </a:xfrm>
-          <a:prstGeom prst="rect">
-            <a:avLst/>
-          </a:prstGeom>
-          <a:solidFill>
-            <a:srgbClr val="FFFFFF"/>
-          </a:solidFill>
-          <a:ln>
-            <a:noFill/>
+              <a:t>The gap is not the science. It is the system.</a:t>
+            </a:r>
+          </a:p>
+        </p:txBody>
+      </p:sp>
+      <p:cxnSp>
+        <p:nvCxnSpPr>
+          <p:cNvPr id="21" name="Connector 20"/>
+          <p:cNvCxnSpPr/>
+          <p:nvPr/>
+        </p:nvCxnSpPr>
+        <p:spPr>
+          <a:xfrm>
+            <a:off x="0" y="6629400"/>
+            <a:ext cx="12191695" cy="0"/>
+          </a:xfrm>
+          <a:prstGeom prst="line">
+            <a:avLst/>
+          </a:prstGeom>
+          <a:ln w="6350">
+            <a:solidFill>
+              <a:srgbClr val="C8CED6"/>
+            </a:solidFill>
           </a:ln>
-          <a:effectLst/>
         </p:spPr>
         <p:style>
-          <a:lnRef idx="1">
+          <a:lnRef idx="2">
             <a:schemeClr val="accent1"/>
           </a:lnRef>
-          <a:fillRef idx="3">
+          <a:fillRef idx="0">
             <a:schemeClr val="accent1"/>
           </a:fillRef>
-          <a:effectRef idx="2">
+          <a:effectRef idx="1">
             <a:schemeClr val="accent1"/>
           </a:effectRef>
           <a:fontRef idx="minor">
-            <a:schemeClr val="lt1"/>
+            <a:schemeClr val="tx1"/>
           </a:fontRef>
         </p:style>
-        <p:txBody>
-          <a:bodyPr rtlCol="0" anchor="ctr"/>
-          <a:lstStyle/>
-          <a:p>
-            <a:pPr algn="ctr"/>
-          </a:p>
-        </p:txBody>
-      </p:sp>
-      <p:sp>
-        <p:nvSpPr>
-          <p:cNvPr id="14" name="Rectangle 13"/>
+      </p:cxnSp>
+      <p:sp>
+        <p:nvSpPr>
+          <p:cNvPr id="22" name="Rectangle 21"/>
           <p:cNvSpPr/>
           <p:nvPr/>
         </p:nvSpPr>
         <p:spPr>
           <a:xfrm>
-            <a:off x="7543800" y="2148840"/>
-            <a:ext cx="91440" cy="841248"/>
+            <a:off x="0" y="6629400"/>
+            <a:ext cx="640080" cy="45720"/>
           </a:xfrm>
           <a:prstGeom prst="rect">
             <a:avLst/>
@@ -5686,53 +6397,14 @@
       </p:sp>
       <p:sp>
         <p:nvSpPr>
-          <p:cNvPr id="15" name="TextBox 14"/>
+          <p:cNvPr id="23" name="TextBox 22"/>
           <p:cNvSpPr txBox="1"/>
           <p:nvPr/>
         </p:nvSpPr>
         <p:spPr>
           <a:xfrm>
-            <a:off x="7772400" y="2221992"/>
-            <a:ext cx="3886200" cy="274320"/>
-          </a:xfrm>
-          <a:prstGeom prst="rect">
-            <a:avLst/>
-          </a:prstGeom>
-          <a:noFill/>
-        </p:spPr>
-        <p:txBody>
-          <a:bodyPr wrap="square" anchor="t" lIns="0" rIns="0" tIns="0" bIns="0">
-            <a:spAutoFit/>
-          </a:bodyPr>
-          <a:lstStyle/>
-          <a:p>
-            <a:pPr algn="l">
-              <a:lnSpc>
-                <a:spcPct val="115000"/>
-              </a:lnSpc>
-            </a:pPr>
-            <a:r>
-              <a:rPr sz="1100" b="1" i="0">
-                <a:solidFill>
-                  <a:srgbClr val="0A1F3D"/>
-                </a:solidFill>
-                <a:latin typeface="Calibri"/>
-              </a:rPr>
-              <a:t>SCALABLE</a:t>
-            </a:r>
-          </a:p>
-        </p:txBody>
-      </p:sp>
-      <p:sp>
-        <p:nvSpPr>
-          <p:cNvPr id="16" name="TextBox 15"/>
-          <p:cNvSpPr txBox="1"/>
-          <p:nvPr/>
-        </p:nvSpPr>
-        <p:spPr>
-          <a:xfrm>
-            <a:off x="7772400" y="2478024"/>
-            <a:ext cx="3886200" cy="502920"/>
+            <a:off x="457200" y="6675120"/>
+            <a:ext cx="9601200" cy="182880"/>
           </a:xfrm>
           <a:prstGeom prst="rect">
             <a:avLst/>
@@ -5751,115 +6423,27 @@
               </a:lnSpc>
             </a:pPr>
             <a:r>
-              <a:rPr sz="1200" b="0" i="0">
-                <a:solidFill>
-                  <a:srgbClr val="121824"/>
+              <a:rPr sz="800" b="0" i="1">
+                <a:solidFill>
+                  <a:srgbClr val="6B7280"/>
                 </a:solidFill>
                 <a:latin typeface="Calibri"/>
               </a:rPr>
-              <a:t>Workforce grew 1,133 → 1,167. Average dose did not move.</a:t>
-            </a:r>
-          </a:p>
-        </p:txBody>
-      </p:sp>
-      <p:sp>
-        <p:nvSpPr>
-          <p:cNvPr id="17" name="Rectangle 16"/>
-          <p:cNvSpPr/>
-          <p:nvPr/>
-        </p:nvSpPr>
-        <p:spPr>
-          <a:xfrm>
-            <a:off x="7543800" y="3054096"/>
-            <a:ext cx="4160520" cy="841248"/>
-          </a:xfrm>
-          <a:prstGeom prst="rect">
-            <a:avLst/>
-          </a:prstGeom>
-          <a:solidFill>
-            <a:srgbClr val="FFFFFF"/>
-          </a:solidFill>
-          <a:ln>
-            <a:noFill/>
-          </a:ln>
-          <a:effectLst/>
-        </p:spPr>
-        <p:style>
-          <a:lnRef idx="1">
-            <a:schemeClr val="accent1"/>
-          </a:lnRef>
-          <a:fillRef idx="3">
-            <a:schemeClr val="accent1"/>
-          </a:fillRef>
-          <a:effectRef idx="2">
-            <a:schemeClr val="accent1"/>
-          </a:effectRef>
-          <a:fontRef idx="minor">
-            <a:schemeClr val="lt1"/>
-          </a:fontRef>
-        </p:style>
-        <p:txBody>
-          <a:bodyPr rtlCol="0" anchor="ctr"/>
-          <a:lstStyle/>
-          <a:p>
-            <a:pPr algn="ctr"/>
-          </a:p>
-        </p:txBody>
-      </p:sp>
-      <p:sp>
-        <p:nvSpPr>
-          <p:cNvPr id="18" name="Rectangle 17"/>
-          <p:cNvSpPr/>
-          <p:nvPr/>
-        </p:nvSpPr>
-        <p:spPr>
-          <a:xfrm>
-            <a:off x="7543800" y="3054096"/>
-            <a:ext cx="91440" cy="841248"/>
-          </a:xfrm>
-          <a:prstGeom prst="rect">
-            <a:avLst/>
-          </a:prstGeom>
-          <a:solidFill>
-            <a:srgbClr val="CC7A2E"/>
-          </a:solidFill>
-          <a:ln>
-            <a:noFill/>
-          </a:ln>
-          <a:effectLst/>
-        </p:spPr>
-        <p:style>
-          <a:lnRef idx="1">
-            <a:schemeClr val="accent1"/>
-          </a:lnRef>
-          <a:fillRef idx="3">
-            <a:schemeClr val="accent1"/>
-          </a:fillRef>
-          <a:effectRef idx="2">
-            <a:schemeClr val="accent1"/>
-          </a:effectRef>
-          <a:fontRef idx="minor">
-            <a:schemeClr val="lt1"/>
-          </a:fontRef>
-        </p:style>
-        <p:txBody>
-          <a:bodyPr rtlCol="0" anchor="ctr"/>
-          <a:lstStyle/>
-          <a:p>
-            <a:pPr algn="ctr"/>
-          </a:p>
-        </p:txBody>
-      </p:sp>
-      <p:sp>
-        <p:nvSpPr>
-          <p:cNvPr id="19" name="TextBox 18"/>
+              <a:t>Sources: Siavonga Uranium Baseline Survey (2024) · U.S. DOE REMS 2024 Report</a:t>
+            </a:r>
+          </a:p>
+        </p:txBody>
+      </p:sp>
+      <p:sp>
+        <p:nvSpPr>
+          <p:cNvPr id="24" name="TextBox 23"/>
           <p:cNvSpPr txBox="1"/>
           <p:nvPr/>
         </p:nvSpPr>
         <p:spPr>
           <a:xfrm>
-            <a:off x="7772400" y="3127248"/>
-            <a:ext cx="3886200" cy="274320"/>
+            <a:off x="10424160" y="6675120"/>
+            <a:ext cx="1554480" cy="182880"/>
           </a:xfrm>
           <a:prstGeom prst="rect">
             <a:avLst/>
@@ -5872,513 +6456,19 @@
           </a:bodyPr>
           <a:lstStyle/>
           <a:p>
-            <a:pPr algn="l">
-              <a:lnSpc>
-                <a:spcPct val="115000"/>
-              </a:lnSpc>
-            </a:pPr>
-            <a:r>
-              <a:rPr sz="1100" b="1" i="0">
-                <a:solidFill>
-                  <a:srgbClr val="0A1F3D"/>
-                </a:solidFill>
-                <a:latin typeface="Calibri"/>
-              </a:rPr>
-              <a:t>CONTAINED</a:t>
-            </a:r>
-          </a:p>
-        </p:txBody>
-      </p:sp>
-      <p:sp>
-        <p:nvSpPr>
-          <p:cNvPr id="20" name="TextBox 19"/>
-          <p:cNvSpPr txBox="1"/>
-          <p:nvPr/>
-        </p:nvSpPr>
-        <p:spPr>
-          <a:xfrm>
-            <a:off x="7772400" y="3383279"/>
-            <a:ext cx="3886200" cy="502920"/>
-          </a:xfrm>
-          <a:prstGeom prst="rect">
-            <a:avLst/>
-          </a:prstGeom>
-          <a:noFill/>
-        </p:spPr>
-        <p:txBody>
-          <a:bodyPr wrap="square" anchor="t" lIns="0" rIns="0" tIns="0" bIns="0">
-            <a:spAutoFit/>
-          </a:bodyPr>
-          <a:lstStyle/>
-          <a:p>
-            <a:pPr algn="l">
+            <a:pPr algn="r">
               <a:lnSpc>
                 <a:spcPct val="120000"/>
               </a:lnSpc>
             </a:pPr>
             <a:r>
-              <a:rPr sz="1200" b="0" i="0">
-                <a:solidFill>
-                  <a:srgbClr val="121824"/>
+              <a:rPr sz="800" b="1" i="0">
+                <a:solidFill>
+                  <a:srgbClr val="2A3344"/>
                 </a:solidFill>
                 <a:latin typeface="Calibri"/>
               </a:rPr>
-              <a:t>98% external radiation — managed by shielding. 2% internal — controlled by protocol.</a:t>
-            </a:r>
-          </a:p>
-        </p:txBody>
-      </p:sp>
-      <p:sp>
-        <p:nvSpPr>
-          <p:cNvPr id="21" name="Rectangle 20"/>
-          <p:cNvSpPr/>
-          <p:nvPr/>
-        </p:nvSpPr>
-        <p:spPr>
-          <a:xfrm>
-            <a:off x="7543800" y="3959352"/>
-            <a:ext cx="4160520" cy="841248"/>
-          </a:xfrm>
-          <a:prstGeom prst="rect">
-            <a:avLst/>
-          </a:prstGeom>
-          <a:solidFill>
-            <a:srgbClr val="FFFFFF"/>
-          </a:solidFill>
-          <a:ln>
-            <a:noFill/>
-          </a:ln>
-          <a:effectLst/>
-        </p:spPr>
-        <p:style>
-          <a:lnRef idx="1">
-            <a:schemeClr val="accent1"/>
-          </a:lnRef>
-          <a:fillRef idx="3">
-            <a:schemeClr val="accent1"/>
-          </a:fillRef>
-          <a:effectRef idx="2">
-            <a:schemeClr val="accent1"/>
-          </a:effectRef>
-          <a:fontRef idx="minor">
-            <a:schemeClr val="lt1"/>
-          </a:fontRef>
-        </p:style>
-        <p:txBody>
-          <a:bodyPr rtlCol="0" anchor="ctr"/>
-          <a:lstStyle/>
-          <a:p>
-            <a:pPr algn="ctr"/>
-          </a:p>
-        </p:txBody>
-      </p:sp>
-      <p:sp>
-        <p:nvSpPr>
-          <p:cNvPr id="22" name="Rectangle 21"/>
-          <p:cNvSpPr/>
-          <p:nvPr/>
-        </p:nvSpPr>
-        <p:spPr>
-          <a:xfrm>
-            <a:off x="7543800" y="3959352"/>
-            <a:ext cx="91440" cy="841248"/>
-          </a:xfrm>
-          <a:prstGeom prst="rect">
-            <a:avLst/>
-          </a:prstGeom>
-          <a:solidFill>
-            <a:srgbClr val="CC7A2E"/>
-          </a:solidFill>
-          <a:ln>
-            <a:noFill/>
-          </a:ln>
-          <a:effectLst/>
-        </p:spPr>
-        <p:style>
-          <a:lnRef idx="1">
-            <a:schemeClr val="accent1"/>
-          </a:lnRef>
-          <a:fillRef idx="3">
-            <a:schemeClr val="accent1"/>
-          </a:fillRef>
-          <a:effectRef idx="2">
-            <a:schemeClr val="accent1"/>
-          </a:effectRef>
-          <a:fontRef idx="minor">
-            <a:schemeClr val="lt1"/>
-          </a:fontRef>
-        </p:style>
-        <p:txBody>
-          <a:bodyPr rtlCol="0" anchor="ctr"/>
-          <a:lstStyle/>
-          <a:p>
-            <a:pPr algn="ctr"/>
-          </a:p>
-        </p:txBody>
-      </p:sp>
-      <p:sp>
-        <p:nvSpPr>
-          <p:cNvPr id="23" name="TextBox 22"/>
-          <p:cNvSpPr txBox="1"/>
-          <p:nvPr/>
-        </p:nvSpPr>
-        <p:spPr>
-          <a:xfrm>
-            <a:off x="7772400" y="4032504"/>
-            <a:ext cx="3886200" cy="274320"/>
-          </a:xfrm>
-          <a:prstGeom prst="rect">
-            <a:avLst/>
-          </a:prstGeom>
-          <a:noFill/>
-        </p:spPr>
-        <p:txBody>
-          <a:bodyPr wrap="square" anchor="t" lIns="0" rIns="0" tIns="0" bIns="0">
-            <a:spAutoFit/>
-          </a:bodyPr>
-          <a:lstStyle/>
-          <a:p>
-            <a:pPr algn="l">
-              <a:lnSpc>
-                <a:spcPct val="115000"/>
-              </a:lnSpc>
-            </a:pPr>
-            <a:r>
-              <a:rPr sz="1100" b="1" i="0">
-                <a:solidFill>
-                  <a:srgbClr val="0A1F3D"/>
-                </a:solidFill>
-                <a:latin typeface="Calibri"/>
-              </a:rPr>
-              <a:t>REPLICABLE</a:t>
-            </a:r>
-          </a:p>
-        </p:txBody>
-      </p:sp>
-      <p:sp>
-        <p:nvSpPr>
-          <p:cNvPr id="24" name="TextBox 23"/>
-          <p:cNvSpPr txBox="1"/>
-          <p:nvPr/>
-        </p:nvSpPr>
-        <p:spPr>
-          <a:xfrm>
-            <a:off x="7772400" y="4288536"/>
-            <a:ext cx="3886200" cy="502920"/>
-          </a:xfrm>
-          <a:prstGeom prst="rect">
-            <a:avLst/>
-          </a:prstGeom>
-          <a:noFill/>
-        </p:spPr>
-        <p:txBody>
-          <a:bodyPr wrap="square" anchor="t" lIns="0" rIns="0" tIns="0" bIns="0">
-            <a:spAutoFit/>
-          </a:bodyPr>
-          <a:lstStyle/>
-          <a:p>
-            <a:pPr algn="l">
-              <a:lnSpc>
-                <a:spcPct val="120000"/>
-              </a:lnSpc>
-            </a:pPr>
-            <a:r>
-              <a:rPr sz="1200" b="0" i="0">
-                <a:solidFill>
-                  <a:srgbClr val="121824"/>
-                </a:solidFill>
-                <a:latin typeface="Calibri"/>
-              </a:rPr>
-              <a:t>IAEA Milestone Approach. The same roadmap Zambia is on, via RPA → NSPA.</a:t>
-            </a:r>
-          </a:p>
-        </p:txBody>
-      </p:sp>
-      <p:sp>
-        <p:nvSpPr>
-          <p:cNvPr id="25" name="Rectangle 24"/>
-          <p:cNvSpPr/>
-          <p:nvPr/>
-        </p:nvSpPr>
-        <p:spPr>
-          <a:xfrm>
-            <a:off x="7543800" y="4818888"/>
-            <a:ext cx="4160520" cy="841248"/>
-          </a:xfrm>
-          <a:prstGeom prst="rect">
-            <a:avLst/>
-          </a:prstGeom>
-          <a:solidFill>
-            <a:srgbClr val="B32B2B"/>
-          </a:solidFill>
-          <a:ln>
-            <a:noFill/>
-          </a:ln>
-          <a:effectLst/>
-        </p:spPr>
-        <p:style>
-          <a:lnRef idx="1">
-            <a:schemeClr val="accent1"/>
-          </a:lnRef>
-          <a:fillRef idx="3">
-            <a:schemeClr val="accent1"/>
-          </a:fillRef>
-          <a:effectRef idx="2">
-            <a:schemeClr val="accent1"/>
-          </a:effectRef>
-          <a:fontRef idx="minor">
-            <a:schemeClr val="lt1"/>
-          </a:fontRef>
-        </p:style>
-        <p:txBody>
-          <a:bodyPr rtlCol="0" anchor="ctr"/>
-          <a:lstStyle/>
-          <a:p>
-            <a:pPr algn="ctr"/>
-          </a:p>
-        </p:txBody>
-      </p:sp>
-      <p:sp>
-        <p:nvSpPr>
-          <p:cNvPr id="26" name="TextBox 25"/>
-          <p:cNvSpPr txBox="1"/>
-          <p:nvPr/>
-        </p:nvSpPr>
-        <p:spPr>
-          <a:xfrm>
-            <a:off x="7726679" y="4956048"/>
-            <a:ext cx="3886200" cy="640080"/>
-          </a:xfrm>
-          <a:prstGeom prst="rect">
-            <a:avLst/>
-          </a:prstGeom>
-          <a:noFill/>
-        </p:spPr>
-        <p:txBody>
-          <a:bodyPr wrap="square" anchor="t" lIns="0" rIns="0" tIns="0" bIns="0">
-            <a:spAutoFit/>
-          </a:bodyPr>
-          <a:lstStyle/>
-          <a:p>
-            <a:pPr algn="l">
-              <a:lnSpc>
-                <a:spcPct val="125000"/>
-              </a:lnSpc>
-            </a:pPr>
-            <a:r>
-              <a:rPr sz="1300" b="1" i="0">
-                <a:solidFill>
-                  <a:srgbClr val="FFFFFF"/>
-                </a:solidFill>
-                <a:latin typeface="Calibri"/>
-              </a:rPr>
-              <a:t>Zambia is not starting from zero.
-Zambia is starting from competence.</a:t>
-            </a:r>
-          </a:p>
-        </p:txBody>
-      </p:sp>
-      <p:sp>
-        <p:nvSpPr>
-          <p:cNvPr id="27" name="TextBox 26"/>
-          <p:cNvSpPr txBox="1"/>
-          <p:nvPr/>
-        </p:nvSpPr>
-        <p:spPr>
-          <a:xfrm>
-            <a:off x="548640" y="5989320"/>
-            <a:ext cx="11064240" cy="365760"/>
-          </a:xfrm>
-          <a:prstGeom prst="rect">
-            <a:avLst/>
-          </a:prstGeom>
-          <a:noFill/>
-        </p:spPr>
-        <p:txBody>
-          <a:bodyPr wrap="square" anchor="t" lIns="0" rIns="0" tIns="0" bIns="0">
-            <a:spAutoFit/>
-          </a:bodyPr>
-          <a:lstStyle/>
-          <a:p>
-            <a:pPr algn="ctr">
-              <a:lnSpc>
-                <a:spcPct val="115000"/>
-              </a:lnSpc>
-            </a:pPr>
-            <a:r>
-              <a:rPr sz="1400" b="0" i="1">
-                <a:solidFill>
-                  <a:srgbClr val="2A3344"/>
-                </a:solidFill>
-                <a:latin typeface="Calibri"/>
-              </a:rPr>
-              <a:t>If the U.S. can manage 22,000 workers at &lt; 2% of limit, Zambia can manage one regulator and one reactor.</a:t>
-            </a:r>
-          </a:p>
-        </p:txBody>
-      </p:sp>
-      <p:sp>
-        <p:nvSpPr>
-          <p:cNvPr id="28" name="Rectangle 27"/>
-          <p:cNvSpPr/>
-          <p:nvPr/>
-        </p:nvSpPr>
-        <p:spPr>
-          <a:xfrm>
-            <a:off x="0" y="6675120"/>
-            <a:ext cx="12191695" cy="182880"/>
-          </a:xfrm>
-          <a:prstGeom prst="rect">
-            <a:avLst/>
-          </a:prstGeom>
-          <a:solidFill>
-            <a:srgbClr val="C8CED6"/>
-          </a:solidFill>
-          <a:ln>
-            <a:noFill/>
-          </a:ln>
-          <a:effectLst/>
-        </p:spPr>
-        <p:style>
-          <a:lnRef idx="1">
-            <a:schemeClr val="accent1"/>
-          </a:lnRef>
-          <a:fillRef idx="3">
-            <a:schemeClr val="accent1"/>
-          </a:fillRef>
-          <a:effectRef idx="2">
-            <a:schemeClr val="accent1"/>
-          </a:effectRef>
-          <a:fontRef idx="minor">
-            <a:schemeClr val="lt1"/>
-          </a:fontRef>
-        </p:style>
-        <p:txBody>
-          <a:bodyPr rtlCol="0" anchor="ctr"/>
-          <a:lstStyle/>
-          <a:p>
-            <a:pPr algn="ctr"/>
-          </a:p>
-        </p:txBody>
-      </p:sp>
-      <p:sp>
-        <p:nvSpPr>
-          <p:cNvPr id="29" name="Rectangle 28"/>
-          <p:cNvSpPr/>
-          <p:nvPr/>
-        </p:nvSpPr>
-        <p:spPr>
-          <a:xfrm>
-            <a:off x="0" y="6675120"/>
-            <a:ext cx="640080" cy="182880"/>
-          </a:xfrm>
-          <a:prstGeom prst="rect">
-            <a:avLst/>
-          </a:prstGeom>
-          <a:solidFill>
-            <a:srgbClr val="CC7A2E"/>
-          </a:solidFill>
-          <a:ln>
-            <a:noFill/>
-          </a:ln>
-          <a:effectLst/>
-        </p:spPr>
-        <p:style>
-          <a:lnRef idx="1">
-            <a:schemeClr val="accent1"/>
-          </a:lnRef>
-          <a:fillRef idx="3">
-            <a:schemeClr val="accent1"/>
-          </a:fillRef>
-          <a:effectRef idx="2">
-            <a:schemeClr val="accent1"/>
-          </a:effectRef>
-          <a:fontRef idx="minor">
-            <a:schemeClr val="lt1"/>
-          </a:fontRef>
-        </p:style>
-        <p:txBody>
-          <a:bodyPr rtlCol="0" anchor="ctr"/>
-          <a:lstStyle/>
-          <a:p>
-            <a:pPr algn="ctr"/>
-          </a:p>
-        </p:txBody>
-      </p:sp>
-      <p:sp>
-        <p:nvSpPr>
-          <p:cNvPr id="30" name="TextBox 29"/>
-          <p:cNvSpPr txBox="1"/>
-          <p:nvPr/>
-        </p:nvSpPr>
-        <p:spPr>
-          <a:xfrm>
-            <a:off x="457200" y="6446520"/>
-            <a:ext cx="9601200" cy="228600"/>
-          </a:xfrm>
-          <a:prstGeom prst="rect">
-            <a:avLst/>
-          </a:prstGeom>
-          <a:noFill/>
-        </p:spPr>
-        <p:txBody>
-          <a:bodyPr wrap="square" anchor="t" lIns="0" rIns="0" tIns="0" bIns="0">
-            <a:spAutoFit/>
-          </a:bodyPr>
-          <a:lstStyle/>
-          <a:p>
-            <a:pPr algn="l">
-              <a:lnSpc>
-                <a:spcPct val="115000"/>
-              </a:lnSpc>
-            </a:pPr>
-            <a:r>
-              <a:rPr sz="900" b="0" i="1">
-                <a:solidFill>
-                  <a:srgbClr val="6B7280"/>
-                </a:solidFill>
-                <a:latin typeface="Calibri"/>
-              </a:rPr>
-              <a:t>Sources: U.S. DOE REMS 2024 Report · IAEA Milestone Approach for New Nuclear Programs</a:t>
-            </a:r>
-          </a:p>
-        </p:txBody>
-      </p:sp>
-      <p:sp>
-        <p:nvSpPr>
-          <p:cNvPr id="31" name="TextBox 30"/>
-          <p:cNvSpPr txBox="1"/>
-          <p:nvPr/>
-        </p:nvSpPr>
-        <p:spPr>
-          <a:xfrm>
-            <a:off x="10515600" y="6446520"/>
-            <a:ext cx="1463040" cy="228600"/>
-          </a:xfrm>
-          <a:prstGeom prst="rect">
-            <a:avLst/>
-          </a:prstGeom>
-          <a:noFill/>
-        </p:spPr>
-        <p:txBody>
-          <a:bodyPr wrap="square" anchor="t" lIns="0" rIns="0" tIns="0" bIns="0">
-            <a:spAutoFit/>
-          </a:bodyPr>
-          <a:lstStyle/>
-          <a:p>
-            <a:pPr algn="r">
-              <a:lnSpc>
-                <a:spcPct val="115000"/>
-              </a:lnSpc>
-            </a:pPr>
-            <a:r>
-              <a:rPr sz="900" b="1" i="0">
-                <a:solidFill>
-                  <a:srgbClr val="2A3344"/>
-                </a:solidFill>
-                <a:latin typeface="Calibri"/>
-              </a:rPr>
-              <a:t>3 / 5  ·  E. Mwaba</a:t>
+              <a:t>3 / 8  ·  E. Mwaba</a:t>
             </a:r>
           </a:p>
         </p:txBody>
@@ -6418,7 +6508,7 @@
         <p:spPr>
           <a:xfrm>
             <a:off x="548640" y="411480"/>
-            <a:ext cx="7315200" cy="274320"/>
+            <a:ext cx="9144000" cy="274320"/>
           </a:xfrm>
           <a:prstGeom prst="rect">
             <a:avLst/>
@@ -6433,7 +6523,7 @@
           <a:p>
             <a:pPr algn="l">
               <a:lnSpc>
-                <a:spcPct val="115000"/>
+                <a:spcPct val="120000"/>
               </a:lnSpc>
             </a:pPr>
             <a:r>
@@ -6443,7 +6533,7 @@
                 </a:solidFill>
                 <a:latin typeface="Calibri"/>
               </a:rPr>
-              <a:t>03  ·  THE STAKES</a:t>
+              <a:t>02  ·  THE VISION</a:t>
             </a:r>
           </a:p>
         </p:txBody>
@@ -6457,7 +6547,7 @@
         <p:spPr>
           <a:xfrm>
             <a:off x="548640" y="685800"/>
-            <a:ext cx="11064240" cy="640080"/>
+            <a:ext cx="11064240" cy="685800"/>
           </a:xfrm>
           <a:prstGeom prst="rect">
             <a:avLst/>
@@ -6472,17 +6562,17 @@
           <a:p>
             <a:pPr algn="l">
               <a:lnSpc>
-                <a:spcPct val="115000"/>
+                <a:spcPct val="120000"/>
               </a:lnSpc>
             </a:pPr>
             <a:r>
-              <a:rPr sz="2800" b="1" i="0">
+              <a:rPr sz="3000" b="1" i="0">
                 <a:solidFill>
                   <a:srgbClr val="0A1F3D"/>
                 </a:solidFill>
                 <a:latin typeface="Calibri"/>
               </a:rPr>
-              <a:t>Drought is the new normal. Hydropower is the old bet.</a:t>
+              <a:t>Nuclear as Zambia's baseload future.</a:t>
             </a:r>
           </a:p>
         </p:txBody>
@@ -6531,7 +6621,7 @@
         <p:spPr>
           <a:xfrm>
             <a:off x="548640" y="1417320"/>
-            <a:ext cx="11064240" cy="457200"/>
+            <a:ext cx="11064240" cy="365760"/>
           </a:xfrm>
           <a:prstGeom prst="rect">
             <a:avLst/>
@@ -6546,37 +6636,94 @@
           <a:p>
             <a:pPr algn="l">
               <a:lnSpc>
-                <a:spcPct val="115000"/>
+                <a:spcPct val="120000"/>
               </a:lnSpc>
             </a:pPr>
             <a:r>
-              <a:rPr sz="1400" b="0" i="1">
+              <a:rPr sz="1300" b="0" i="1">
                 <a:solidFill>
                   <a:srgbClr val="6B7280"/>
                 </a:solidFill>
                 <a:latin typeface="Calibri"/>
               </a:rPr>
-              <a:t>Every dry year, Zambia pays in megawatts and in dollars. We keep paying.</a:t>
-            </a:r>
-          </a:p>
-        </p:txBody>
-      </p:sp>
-      <p:sp>
-        <p:nvSpPr>
-          <p:cNvPr id="6" name="Rectangle 5"/>
+              <a:t>We cannot industrialise a country on rainfall. Nuclear is weather-proof power.</a:t>
+            </a:r>
+          </a:p>
+        </p:txBody>
+      </p:sp>
+      <p:graphicFrame>
+        <p:nvGraphicFramePr>
+          <p:cNvPr id="6" name="Chart 5"/>
+          <p:cNvGraphicFramePr>
+            <a:graphicFrameLocks noGrp="1"/>
+          </p:cNvGraphicFramePr>
+          <p:nvPr/>
+        </p:nvGraphicFramePr>
+        <p:xfrm>
+          <a:off x="548640" y="2011680"/>
+          <a:ext cx="5303520" cy="4206240"/>
+        </p:xfrm>
+        <a:graphic>
+          <a:graphicData uri="http://schemas.openxmlformats.org/drawingml/2006/chart">
+            <c:chart xmlns:c="http://schemas.openxmlformats.org/drawingml/2006/chart" r:id="rId2"/>
+          </a:graphicData>
+        </a:graphic>
+      </p:graphicFrame>
+      <p:sp>
+        <p:nvSpPr>
+          <p:cNvPr id="7" name="TextBox 6"/>
+          <p:cNvSpPr txBox="1"/>
+          <p:nvPr/>
+        </p:nvSpPr>
+        <p:spPr>
+          <a:xfrm>
+            <a:off x="548640" y="6172200"/>
+            <a:ext cx="5303520" cy="365760"/>
+          </a:xfrm>
+          <a:prstGeom prst="rect">
+            <a:avLst/>
+          </a:prstGeom>
+          <a:noFill/>
+        </p:spPr>
+        <p:txBody>
+          <a:bodyPr wrap="square" anchor="t" lIns="0" rIns="0" tIns="0" bIns="0">
+            <a:spAutoFit/>
+          </a:bodyPr>
+          <a:lstStyle/>
+          <a:p>
+            <a:pPr algn="ctr">
+              <a:lnSpc>
+                <a:spcPct val="120000"/>
+              </a:lnSpc>
+            </a:pPr>
+            <a:r>
+              <a:rPr sz="900" b="0" i="1">
+                <a:solidFill>
+                  <a:srgbClr val="6B7280"/>
+                </a:solidFill>
+                <a:latin typeface="Calibri"/>
+              </a:rPr>
+              <a:t>Zambia's 2019 generation mix (%). Source: MoE / ZESCO 2019.</a:t>
+            </a:r>
+          </a:p>
+        </p:txBody>
+      </p:sp>
+      <p:sp>
+        <p:nvSpPr>
+          <p:cNvPr id="8" name="Rectangle 7"/>
           <p:cNvSpPr/>
           <p:nvPr/>
         </p:nvSpPr>
         <p:spPr>
           <a:xfrm>
-            <a:off x="548640" y="2148840"/>
-            <a:ext cx="2697480" cy="1463040"/>
+            <a:off x="6263640" y="2011680"/>
+            <a:ext cx="5349240" cy="4206240"/>
           </a:xfrm>
           <a:prstGeom prst="rect">
             <a:avLst/>
           </a:prstGeom>
           <a:solidFill>
-            <a:srgbClr val="7C1818"/>
+            <a:srgbClr val="FFFFFF"/>
           </a:solidFill>
           <a:ln>
             <a:noFill/>
@@ -6607,756 +6754,14 @@
       </p:sp>
       <p:sp>
         <p:nvSpPr>
-          <p:cNvPr id="7" name="Rectangle 6"/>
+          <p:cNvPr id="9" name="Rectangle 8"/>
           <p:cNvSpPr/>
           <p:nvPr/>
         </p:nvSpPr>
         <p:spPr>
           <a:xfrm>
-            <a:off x="548640" y="2148840"/>
-            <a:ext cx="2697480" cy="91440"/>
-          </a:xfrm>
-          <a:prstGeom prst="rect">
-            <a:avLst/>
-          </a:prstGeom>
-          <a:solidFill>
-            <a:srgbClr val="B32B2B"/>
-          </a:solidFill>
-          <a:ln>
-            <a:noFill/>
-          </a:ln>
-          <a:effectLst/>
-        </p:spPr>
-        <p:style>
-          <a:lnRef idx="1">
-            <a:schemeClr val="accent1"/>
-          </a:lnRef>
-          <a:fillRef idx="3">
-            <a:schemeClr val="accent1"/>
-          </a:fillRef>
-          <a:effectRef idx="2">
-            <a:schemeClr val="accent1"/>
-          </a:effectRef>
-          <a:fontRef idx="minor">
-            <a:schemeClr val="lt1"/>
-          </a:fontRef>
-        </p:style>
-        <p:txBody>
-          <a:bodyPr rtlCol="0" anchor="ctr"/>
-          <a:lstStyle/>
-          <a:p>
-            <a:pPr algn="ctr"/>
-          </a:p>
-        </p:txBody>
-      </p:sp>
-      <p:sp>
-        <p:nvSpPr>
-          <p:cNvPr id="8" name="TextBox 7"/>
-          <p:cNvSpPr txBox="1"/>
-          <p:nvPr/>
-        </p:nvSpPr>
-        <p:spPr>
-          <a:xfrm>
-            <a:off x="731520" y="2331720"/>
-            <a:ext cx="2423160" cy="640080"/>
-          </a:xfrm>
-          <a:prstGeom prst="rect">
-            <a:avLst/>
-          </a:prstGeom>
-          <a:noFill/>
-        </p:spPr>
-        <p:txBody>
-          <a:bodyPr wrap="square" anchor="t" lIns="0" rIns="0" tIns="0" bIns="0">
-            <a:spAutoFit/>
-          </a:bodyPr>
-          <a:lstStyle/>
-          <a:p>
-            <a:pPr algn="l">
-              <a:lnSpc>
-                <a:spcPct val="115000"/>
-              </a:lnSpc>
-            </a:pPr>
-            <a:r>
-              <a:rPr sz="3000" b="1" i="0">
-                <a:solidFill>
-                  <a:srgbClr val="FFFFFF"/>
-                </a:solidFill>
-                <a:latin typeface="Calibri"/>
-              </a:rPr>
-              <a:t>84%</a:t>
-            </a:r>
-          </a:p>
-        </p:txBody>
-      </p:sp>
-      <p:sp>
-        <p:nvSpPr>
-          <p:cNvPr id="9" name="TextBox 8"/>
-          <p:cNvSpPr txBox="1"/>
-          <p:nvPr/>
-        </p:nvSpPr>
-        <p:spPr>
-          <a:xfrm>
-            <a:off x="731520" y="2990088"/>
-            <a:ext cx="2423160" cy="594360"/>
-          </a:xfrm>
-          <a:prstGeom prst="rect">
-            <a:avLst/>
-          </a:prstGeom>
-          <a:noFill/>
-        </p:spPr>
-        <p:txBody>
-          <a:bodyPr wrap="square" anchor="t" lIns="0" rIns="0" tIns="0" bIns="0">
-            <a:spAutoFit/>
-          </a:bodyPr>
-          <a:lstStyle/>
-          <a:p>
-            <a:pPr algn="l">
-              <a:lnSpc>
-                <a:spcPct val="120000"/>
-              </a:lnSpc>
-            </a:pPr>
-            <a:r>
-              <a:rPr sz="1100" b="0" i="0">
-                <a:solidFill>
-                  <a:srgbClr val="F2CFCF"/>
-                </a:solidFill>
-                <a:latin typeface="Calibri"/>
-              </a:rPr>
-              <a:t>of generation
-from hydropower</a:t>
-            </a:r>
-          </a:p>
-        </p:txBody>
-      </p:sp>
-      <p:sp>
-        <p:nvSpPr>
-          <p:cNvPr id="10" name="Rectangle 9"/>
-          <p:cNvSpPr/>
-          <p:nvPr/>
-        </p:nvSpPr>
-        <p:spPr>
-          <a:xfrm>
-            <a:off x="3337560" y="2148840"/>
-            <a:ext cx="2697480" cy="1463040"/>
-          </a:xfrm>
-          <a:prstGeom prst="rect">
-            <a:avLst/>
-          </a:prstGeom>
-          <a:solidFill>
-            <a:srgbClr val="7C1818"/>
-          </a:solidFill>
-          <a:ln>
-            <a:noFill/>
-          </a:ln>
-          <a:effectLst/>
-        </p:spPr>
-        <p:style>
-          <a:lnRef idx="1">
-            <a:schemeClr val="accent1"/>
-          </a:lnRef>
-          <a:fillRef idx="3">
-            <a:schemeClr val="accent1"/>
-          </a:fillRef>
-          <a:effectRef idx="2">
-            <a:schemeClr val="accent1"/>
-          </a:effectRef>
-          <a:fontRef idx="minor">
-            <a:schemeClr val="lt1"/>
-          </a:fontRef>
-        </p:style>
-        <p:txBody>
-          <a:bodyPr rtlCol="0" anchor="ctr"/>
-          <a:lstStyle/>
-          <a:p>
-            <a:pPr algn="ctr"/>
-          </a:p>
-        </p:txBody>
-      </p:sp>
-      <p:sp>
-        <p:nvSpPr>
-          <p:cNvPr id="11" name="Rectangle 10"/>
-          <p:cNvSpPr/>
-          <p:nvPr/>
-        </p:nvSpPr>
-        <p:spPr>
-          <a:xfrm>
-            <a:off x="3337560" y="2148840"/>
-            <a:ext cx="2697480" cy="91440"/>
-          </a:xfrm>
-          <a:prstGeom prst="rect">
-            <a:avLst/>
-          </a:prstGeom>
-          <a:solidFill>
-            <a:srgbClr val="B32B2B"/>
-          </a:solidFill>
-          <a:ln>
-            <a:noFill/>
-          </a:ln>
-          <a:effectLst/>
-        </p:spPr>
-        <p:style>
-          <a:lnRef idx="1">
-            <a:schemeClr val="accent1"/>
-          </a:lnRef>
-          <a:fillRef idx="3">
-            <a:schemeClr val="accent1"/>
-          </a:fillRef>
-          <a:effectRef idx="2">
-            <a:schemeClr val="accent1"/>
-          </a:effectRef>
-          <a:fontRef idx="minor">
-            <a:schemeClr val="lt1"/>
-          </a:fontRef>
-        </p:style>
-        <p:txBody>
-          <a:bodyPr rtlCol="0" anchor="ctr"/>
-          <a:lstStyle/>
-          <a:p>
-            <a:pPr algn="ctr"/>
-          </a:p>
-        </p:txBody>
-      </p:sp>
-      <p:sp>
-        <p:nvSpPr>
-          <p:cNvPr id="12" name="TextBox 11"/>
-          <p:cNvSpPr txBox="1"/>
-          <p:nvPr/>
-        </p:nvSpPr>
-        <p:spPr>
-          <a:xfrm>
-            <a:off x="3520440" y="2331720"/>
-            <a:ext cx="2423160" cy="640080"/>
-          </a:xfrm>
-          <a:prstGeom prst="rect">
-            <a:avLst/>
-          </a:prstGeom>
-          <a:noFill/>
-        </p:spPr>
-        <p:txBody>
-          <a:bodyPr wrap="square" anchor="t" lIns="0" rIns="0" tIns="0" bIns="0">
-            <a:spAutoFit/>
-          </a:bodyPr>
-          <a:lstStyle/>
-          <a:p>
-            <a:pPr algn="l">
-              <a:lnSpc>
-                <a:spcPct val="115000"/>
-              </a:lnSpc>
-            </a:pPr>
-            <a:r>
-              <a:rPr sz="3000" b="1" i="0">
-                <a:solidFill>
-                  <a:srgbClr val="FFFFFF"/>
-                </a:solidFill>
-                <a:latin typeface="Calibri"/>
-              </a:rPr>
-              <a:t>1,000 MW</a:t>
-            </a:r>
-          </a:p>
-        </p:txBody>
-      </p:sp>
-      <p:sp>
-        <p:nvSpPr>
-          <p:cNvPr id="13" name="TextBox 12"/>
-          <p:cNvSpPr txBox="1"/>
-          <p:nvPr/>
-        </p:nvSpPr>
-        <p:spPr>
-          <a:xfrm>
-            <a:off x="3520440" y="2990088"/>
-            <a:ext cx="2423160" cy="594360"/>
-          </a:xfrm>
-          <a:prstGeom prst="rect">
-            <a:avLst/>
-          </a:prstGeom>
-          <a:noFill/>
-        </p:spPr>
-        <p:txBody>
-          <a:bodyPr wrap="square" anchor="t" lIns="0" rIns="0" tIns="0" bIns="0">
-            <a:spAutoFit/>
-          </a:bodyPr>
-          <a:lstStyle/>
-          <a:p>
-            <a:pPr algn="l">
-              <a:lnSpc>
-                <a:spcPct val="120000"/>
-              </a:lnSpc>
-            </a:pPr>
-            <a:r>
-              <a:rPr sz="1100" b="0" i="0">
-                <a:solidFill>
-                  <a:srgbClr val="F2CFCF"/>
-                </a:solidFill>
-                <a:latin typeface="Calibri"/>
-              </a:rPr>
-              <a:t>deficit during the
-2015/16 drought</a:t>
-            </a:r>
-          </a:p>
-        </p:txBody>
-      </p:sp>
-      <p:sp>
-        <p:nvSpPr>
-          <p:cNvPr id="14" name="Rectangle 13"/>
-          <p:cNvSpPr/>
-          <p:nvPr/>
-        </p:nvSpPr>
-        <p:spPr>
-          <a:xfrm>
-            <a:off x="6126480" y="2148840"/>
-            <a:ext cx="2697480" cy="1463040"/>
-          </a:xfrm>
-          <a:prstGeom prst="rect">
-            <a:avLst/>
-          </a:prstGeom>
-          <a:solidFill>
-            <a:srgbClr val="7C1818"/>
-          </a:solidFill>
-          <a:ln>
-            <a:noFill/>
-          </a:ln>
-          <a:effectLst/>
-        </p:spPr>
-        <p:style>
-          <a:lnRef idx="1">
-            <a:schemeClr val="accent1"/>
-          </a:lnRef>
-          <a:fillRef idx="3">
-            <a:schemeClr val="accent1"/>
-          </a:fillRef>
-          <a:effectRef idx="2">
-            <a:schemeClr val="accent1"/>
-          </a:effectRef>
-          <a:fontRef idx="minor">
-            <a:schemeClr val="lt1"/>
-          </a:fontRef>
-        </p:style>
-        <p:txBody>
-          <a:bodyPr rtlCol="0" anchor="ctr"/>
-          <a:lstStyle/>
-          <a:p>
-            <a:pPr algn="ctr"/>
-          </a:p>
-        </p:txBody>
-      </p:sp>
-      <p:sp>
-        <p:nvSpPr>
-          <p:cNvPr id="15" name="Rectangle 14"/>
-          <p:cNvSpPr/>
-          <p:nvPr/>
-        </p:nvSpPr>
-        <p:spPr>
-          <a:xfrm>
-            <a:off x="6126480" y="2148840"/>
-            <a:ext cx="2697480" cy="91440"/>
-          </a:xfrm>
-          <a:prstGeom prst="rect">
-            <a:avLst/>
-          </a:prstGeom>
-          <a:solidFill>
-            <a:srgbClr val="B32B2B"/>
-          </a:solidFill>
-          <a:ln>
-            <a:noFill/>
-          </a:ln>
-          <a:effectLst/>
-        </p:spPr>
-        <p:style>
-          <a:lnRef idx="1">
-            <a:schemeClr val="accent1"/>
-          </a:lnRef>
-          <a:fillRef idx="3">
-            <a:schemeClr val="accent1"/>
-          </a:fillRef>
-          <a:effectRef idx="2">
-            <a:schemeClr val="accent1"/>
-          </a:effectRef>
-          <a:fontRef idx="minor">
-            <a:schemeClr val="lt1"/>
-          </a:fontRef>
-        </p:style>
-        <p:txBody>
-          <a:bodyPr rtlCol="0" anchor="ctr"/>
-          <a:lstStyle/>
-          <a:p>
-            <a:pPr algn="ctr"/>
-          </a:p>
-        </p:txBody>
-      </p:sp>
-      <p:sp>
-        <p:nvSpPr>
-          <p:cNvPr id="16" name="TextBox 15"/>
-          <p:cNvSpPr txBox="1"/>
-          <p:nvPr/>
-        </p:nvSpPr>
-        <p:spPr>
-          <a:xfrm>
-            <a:off x="6309360" y="2331720"/>
-            <a:ext cx="2423160" cy="640080"/>
-          </a:xfrm>
-          <a:prstGeom prst="rect">
-            <a:avLst/>
-          </a:prstGeom>
-          <a:noFill/>
-        </p:spPr>
-        <p:txBody>
-          <a:bodyPr wrap="square" anchor="t" lIns="0" rIns="0" tIns="0" bIns="0">
-            <a:spAutoFit/>
-          </a:bodyPr>
-          <a:lstStyle/>
-          <a:p>
-            <a:pPr algn="l">
-              <a:lnSpc>
-                <a:spcPct val="115000"/>
-              </a:lnSpc>
-            </a:pPr>
-            <a:r>
-              <a:rPr sz="3000" b="1" i="0">
-                <a:solidFill>
-                  <a:srgbClr val="FFFFFF"/>
-                </a:solidFill>
-                <a:latin typeface="Calibri"/>
-              </a:rPr>
-              <a:t>$440M</a:t>
-            </a:r>
-          </a:p>
-        </p:txBody>
-      </p:sp>
-      <p:sp>
-        <p:nvSpPr>
-          <p:cNvPr id="17" name="TextBox 16"/>
-          <p:cNvSpPr txBox="1"/>
-          <p:nvPr/>
-        </p:nvSpPr>
-        <p:spPr>
-          <a:xfrm>
-            <a:off x="6309360" y="2990088"/>
-            <a:ext cx="2423160" cy="594360"/>
-          </a:xfrm>
-          <a:prstGeom prst="rect">
-            <a:avLst/>
-          </a:prstGeom>
-          <a:noFill/>
-        </p:spPr>
-        <p:txBody>
-          <a:bodyPr wrap="square" anchor="t" lIns="0" rIns="0" tIns="0" bIns="0">
-            <a:spAutoFit/>
-          </a:bodyPr>
-          <a:lstStyle/>
-          <a:p>
-            <a:pPr algn="l">
-              <a:lnSpc>
-                <a:spcPct val="120000"/>
-              </a:lnSpc>
-            </a:pPr>
-            <a:r>
-              <a:rPr sz="1100" b="0" i="0">
-                <a:solidFill>
-                  <a:srgbClr val="F2CFCF"/>
-                </a:solidFill>
-                <a:latin typeface="Calibri"/>
-              </a:rPr>
-              <a:t>in unbudgeted
-electricity imports</a:t>
-            </a:r>
-          </a:p>
-        </p:txBody>
-      </p:sp>
-      <p:sp>
-        <p:nvSpPr>
-          <p:cNvPr id="18" name="Rectangle 17"/>
-          <p:cNvSpPr/>
-          <p:nvPr/>
-        </p:nvSpPr>
-        <p:spPr>
-          <a:xfrm>
-            <a:off x="8915400" y="2148840"/>
-            <a:ext cx="2697480" cy="1463040"/>
-          </a:xfrm>
-          <a:prstGeom prst="rect">
-            <a:avLst/>
-          </a:prstGeom>
-          <a:solidFill>
-            <a:srgbClr val="7C1818"/>
-          </a:solidFill>
-          <a:ln>
-            <a:noFill/>
-          </a:ln>
-          <a:effectLst/>
-        </p:spPr>
-        <p:style>
-          <a:lnRef idx="1">
-            <a:schemeClr val="accent1"/>
-          </a:lnRef>
-          <a:fillRef idx="3">
-            <a:schemeClr val="accent1"/>
-          </a:fillRef>
-          <a:effectRef idx="2">
-            <a:schemeClr val="accent1"/>
-          </a:effectRef>
-          <a:fontRef idx="minor">
-            <a:schemeClr val="lt1"/>
-          </a:fontRef>
-        </p:style>
-        <p:txBody>
-          <a:bodyPr rtlCol="0" anchor="ctr"/>
-          <a:lstStyle/>
-          <a:p>
-            <a:pPr algn="ctr"/>
-          </a:p>
-        </p:txBody>
-      </p:sp>
-      <p:sp>
-        <p:nvSpPr>
-          <p:cNvPr id="19" name="Rectangle 18"/>
-          <p:cNvSpPr/>
-          <p:nvPr/>
-        </p:nvSpPr>
-        <p:spPr>
-          <a:xfrm>
-            <a:off x="8915400" y="2148840"/>
-            <a:ext cx="2697480" cy="91440"/>
-          </a:xfrm>
-          <a:prstGeom prst="rect">
-            <a:avLst/>
-          </a:prstGeom>
-          <a:solidFill>
-            <a:srgbClr val="B32B2B"/>
-          </a:solidFill>
-          <a:ln>
-            <a:noFill/>
-          </a:ln>
-          <a:effectLst/>
-        </p:spPr>
-        <p:style>
-          <a:lnRef idx="1">
-            <a:schemeClr val="accent1"/>
-          </a:lnRef>
-          <a:fillRef idx="3">
-            <a:schemeClr val="accent1"/>
-          </a:fillRef>
-          <a:effectRef idx="2">
-            <a:schemeClr val="accent1"/>
-          </a:effectRef>
-          <a:fontRef idx="minor">
-            <a:schemeClr val="lt1"/>
-          </a:fontRef>
-        </p:style>
-        <p:txBody>
-          <a:bodyPr rtlCol="0" anchor="ctr"/>
-          <a:lstStyle/>
-          <a:p>
-            <a:pPr algn="ctr"/>
-          </a:p>
-        </p:txBody>
-      </p:sp>
-      <p:sp>
-        <p:nvSpPr>
-          <p:cNvPr id="20" name="TextBox 19"/>
-          <p:cNvSpPr txBox="1"/>
-          <p:nvPr/>
-        </p:nvSpPr>
-        <p:spPr>
-          <a:xfrm>
-            <a:off x="9098280" y="2331720"/>
-            <a:ext cx="2423160" cy="640080"/>
-          </a:xfrm>
-          <a:prstGeom prst="rect">
-            <a:avLst/>
-          </a:prstGeom>
-          <a:noFill/>
-        </p:spPr>
-        <p:txBody>
-          <a:bodyPr wrap="square" anchor="t" lIns="0" rIns="0" tIns="0" bIns="0">
-            <a:spAutoFit/>
-          </a:bodyPr>
-          <a:lstStyle/>
-          <a:p>
-            <a:pPr algn="l">
-              <a:lnSpc>
-                <a:spcPct val="115000"/>
-              </a:lnSpc>
-            </a:pPr>
-            <a:r>
-              <a:rPr sz="3000" b="1" i="0">
-                <a:solidFill>
-                  <a:srgbClr val="FFFFFF"/>
-                </a:solidFill>
-                <a:latin typeface="Calibri"/>
-              </a:rPr>
-              <a:t>2023-24</a:t>
-            </a:r>
-          </a:p>
-        </p:txBody>
-      </p:sp>
-      <p:sp>
-        <p:nvSpPr>
-          <p:cNvPr id="21" name="TextBox 20"/>
-          <p:cNvSpPr txBox="1"/>
-          <p:nvPr/>
-        </p:nvSpPr>
-        <p:spPr>
-          <a:xfrm>
-            <a:off x="9098280" y="2990088"/>
-            <a:ext cx="2423160" cy="594360"/>
-          </a:xfrm>
-          <a:prstGeom prst="rect">
-            <a:avLst/>
-          </a:prstGeom>
-          <a:noFill/>
-        </p:spPr>
-        <p:txBody>
-          <a:bodyPr wrap="square" anchor="t" lIns="0" rIns="0" tIns="0" bIns="0">
-            <a:spAutoFit/>
-          </a:bodyPr>
-          <a:lstStyle/>
-          <a:p>
-            <a:pPr algn="l">
-              <a:lnSpc>
-                <a:spcPct val="120000"/>
-              </a:lnSpc>
-            </a:pPr>
-            <a:r>
-              <a:rPr sz="1100" b="0" i="0">
-                <a:solidFill>
-                  <a:srgbClr val="F2CFCF"/>
-                </a:solidFill>
-                <a:latin typeface="Calibri"/>
-              </a:rPr>
-              <a:t>Kariba crisis.
-It happened again.</a:t>
-            </a:r>
-          </a:p>
-        </p:txBody>
-      </p:sp>
-      <p:cxnSp>
-        <p:nvCxnSpPr>
-          <p:cNvPr id="22" name="Connector 21"/>
-          <p:cNvCxnSpPr/>
-          <p:nvPr/>
-        </p:nvCxnSpPr>
-        <p:spPr>
-          <a:xfrm>
-            <a:off x="548640" y="3840480"/>
-            <a:ext cx="11064240" cy="0"/>
-          </a:xfrm>
-          <a:prstGeom prst="line">
-            <a:avLst/>
-          </a:prstGeom>
-          <a:ln w="6350">
-            <a:solidFill>
-              <a:srgbClr val="C8CED6"/>
-            </a:solidFill>
-          </a:ln>
-        </p:spPr>
-        <p:style>
-          <a:lnRef idx="2">
-            <a:schemeClr val="accent1"/>
-          </a:lnRef>
-          <a:fillRef idx="0">
-            <a:schemeClr val="accent1"/>
-          </a:fillRef>
-          <a:effectRef idx="1">
-            <a:schemeClr val="accent1"/>
-          </a:effectRef>
-          <a:fontRef idx="minor">
-            <a:schemeClr val="tx1"/>
-          </a:fontRef>
-        </p:style>
-      </p:cxnSp>
-      <p:sp>
-        <p:nvSpPr>
-          <p:cNvPr id="23" name="TextBox 22"/>
-          <p:cNvSpPr txBox="1"/>
-          <p:nvPr/>
-        </p:nvSpPr>
-        <p:spPr>
-          <a:xfrm>
-            <a:off x="548640" y="3886200"/>
-            <a:ext cx="11064240" cy="365760"/>
-          </a:xfrm>
-          <a:prstGeom prst="rect">
-            <a:avLst/>
-          </a:prstGeom>
-          <a:noFill/>
-        </p:spPr>
-        <p:txBody>
-          <a:bodyPr wrap="square" anchor="t" lIns="0" rIns="0" tIns="0" bIns="0">
-            <a:spAutoFit/>
-          </a:bodyPr>
-          <a:lstStyle/>
-          <a:p>
-            <a:pPr algn="ctr">
-              <a:lnSpc>
-                <a:spcPct val="115000"/>
-              </a:lnSpc>
-            </a:pPr>
-            <a:r>
-              <a:rPr sz="1100" b="1" i="0">
-                <a:solidFill>
-                  <a:srgbClr val="CC7A2E"/>
-                </a:solidFill>
-                <a:latin typeface="Calibri"/>
-              </a:rPr>
-              <a:t>THE ANSWER  —  ALREADY  ON  PAPER</a:t>
-            </a:r>
-          </a:p>
-        </p:txBody>
-      </p:sp>
-      <p:sp>
-        <p:nvSpPr>
-          <p:cNvPr id="24" name="Rectangle 23"/>
-          <p:cNvSpPr/>
-          <p:nvPr/>
-        </p:nvSpPr>
-        <p:spPr>
-          <a:xfrm>
-            <a:off x="548640" y="4343400"/>
-            <a:ext cx="11064240" cy="1828800"/>
-          </a:xfrm>
-          <a:prstGeom prst="rect">
-            <a:avLst/>
-          </a:prstGeom>
-          <a:solidFill>
-            <a:srgbClr val="0A1F3D"/>
-          </a:solidFill>
-          <a:ln>
-            <a:noFill/>
-          </a:ln>
-          <a:effectLst/>
-        </p:spPr>
-        <p:style>
-          <a:lnRef idx="1">
-            <a:schemeClr val="accent1"/>
-          </a:lnRef>
-          <a:fillRef idx="3">
-            <a:schemeClr val="accent1"/>
-          </a:fillRef>
-          <a:effectRef idx="2">
-            <a:schemeClr val="accent1"/>
-          </a:effectRef>
-          <a:fontRef idx="minor">
-            <a:schemeClr val="lt1"/>
-          </a:fontRef>
-        </p:style>
-        <p:txBody>
-          <a:bodyPr rtlCol="0" anchor="ctr"/>
-          <a:lstStyle/>
-          <a:p>
-            <a:pPr algn="ctr"/>
-          </a:p>
-        </p:txBody>
-      </p:sp>
-      <p:sp>
-        <p:nvSpPr>
-          <p:cNvPr id="25" name="Rectangle 24"/>
-          <p:cNvSpPr/>
-          <p:nvPr/>
-        </p:nvSpPr>
-        <p:spPr>
-          <a:xfrm>
-            <a:off x="548640" y="4343400"/>
-            <a:ext cx="11064240" cy="73152"/>
+            <a:off x="6263640" y="2011680"/>
+            <a:ext cx="109728" cy="4206240"/>
           </a:xfrm>
           <a:prstGeom prst="rect">
             <a:avLst/>
@@ -7393,14 +6798,14 @@
       </p:sp>
       <p:sp>
         <p:nvSpPr>
-          <p:cNvPr id="26" name="TextBox 25"/>
+          <p:cNvPr id="10" name="TextBox 9"/>
           <p:cNvSpPr txBox="1"/>
           <p:nvPr/>
         </p:nvSpPr>
         <p:spPr>
           <a:xfrm>
-            <a:off x="822960" y="4526280"/>
-            <a:ext cx="4572000" cy="1554480"/>
+            <a:off x="6492240" y="2148840"/>
+            <a:ext cx="4937760" cy="274320"/>
           </a:xfrm>
           <a:prstGeom prst="rect">
             <a:avLst/>
@@ -7415,113 +6820,31 @@
           <a:p>
             <a:pPr algn="l">
               <a:lnSpc>
-                <a:spcPct val="105000"/>
+                <a:spcPct val="120000"/>
               </a:lnSpc>
             </a:pPr>
             <a:r>
-              <a:rPr sz="5200" b="1" i="0">
-                <a:solidFill>
-                  <a:srgbClr val="E8A860"/>
+              <a:rPr sz="1100" b="1" i="0">
+                <a:solidFill>
+                  <a:srgbClr val="CC7A2E"/>
                 </a:solidFill>
                 <a:latin typeface="Calibri"/>
               </a:rPr>
-              <a:t>2,000 MW</a:t>
-            </a:r>
-          </a:p>
-          <a:p>
-            <a:pPr algn="l">
-              <a:lnSpc>
-                <a:spcPct val="105000"/>
-              </a:lnSpc>
-              <a:spcAft>
-                <a:spcPts val="0"/>
-              </a:spcAft>
-            </a:pPr>
-            <a:r>
-              <a:rPr sz="1400" b="0" i="0">
-                <a:solidFill>
-                  <a:srgbClr val="FFFFFF"/>
-                </a:solidFill>
-                <a:latin typeface="Calibri"/>
-              </a:rPr>
-              <a:t>nuclear baseload target</a:t>
-            </a:r>
-          </a:p>
-          <a:p>
-            <a:pPr algn="l">
-              <a:lnSpc>
-                <a:spcPct val="105000"/>
-              </a:lnSpc>
-              <a:spcAft>
-                <a:spcPts val="0"/>
-              </a:spcAft>
-            </a:pPr>
-            <a:r>
-              <a:rPr sz="1100" b="0" i="0">
-                <a:solidFill>
-                  <a:srgbClr val="CFD8E3"/>
-                </a:solidFill>
-                <a:latin typeface="Calibri"/>
-              </a:rPr>
-              <a:t>Vision 2030  ·  7NDP</a:t>
-            </a:r>
-          </a:p>
-        </p:txBody>
-      </p:sp>
-      <p:sp>
-        <p:nvSpPr>
-          <p:cNvPr id="27" name="Rectangle 26"/>
-          <p:cNvSpPr/>
-          <p:nvPr/>
-        </p:nvSpPr>
-        <p:spPr>
-          <a:xfrm>
-            <a:off x="5577840" y="4572000"/>
-            <a:ext cx="18288" cy="1371600"/>
-          </a:xfrm>
-          <a:prstGeom prst="rect">
-            <a:avLst/>
-          </a:prstGeom>
-          <a:solidFill>
-            <a:srgbClr val="334466"/>
-          </a:solidFill>
-          <a:ln>
-            <a:noFill/>
-          </a:ln>
-          <a:effectLst/>
-        </p:spPr>
-        <p:style>
-          <a:lnRef idx="1">
-            <a:schemeClr val="accent1"/>
-          </a:lnRef>
-          <a:fillRef idx="3">
-            <a:schemeClr val="accent1"/>
-          </a:fillRef>
-          <a:effectRef idx="2">
-            <a:schemeClr val="accent1"/>
-          </a:effectRef>
-          <a:fontRef idx="minor">
-            <a:schemeClr val="lt1"/>
-          </a:fontRef>
-        </p:style>
-        <p:txBody>
-          <a:bodyPr rtlCol="0" anchor="ctr"/>
-          <a:lstStyle/>
-          <a:p>
-            <a:pPr algn="ctr"/>
-          </a:p>
-        </p:txBody>
-      </p:sp>
-      <p:sp>
-        <p:nvSpPr>
-          <p:cNvPr id="28" name="TextBox 27"/>
+              <a:t>WHY THIS MATTERS</a:t>
+            </a:r>
+          </a:p>
+        </p:txBody>
+      </p:sp>
+      <p:sp>
+        <p:nvSpPr>
+          <p:cNvPr id="11" name="TextBox 10"/>
           <p:cNvSpPr txBox="1"/>
           <p:nvPr/>
         </p:nvSpPr>
         <p:spPr>
           <a:xfrm>
-            <a:off x="5852160" y="4572000"/>
-            <a:ext cx="2103120" cy="274320"/>
+            <a:off x="6492240" y="2514600"/>
+            <a:ext cx="4937760" cy="274320"/>
           </a:xfrm>
           <a:prstGeom prst="rect">
             <a:avLst/>
@@ -7536,31 +6859,31 @@
           <a:p>
             <a:pPr algn="l">
               <a:lnSpc>
-                <a:spcPct val="115000"/>
+                <a:spcPct val="120000"/>
               </a:lnSpc>
             </a:pPr>
             <a:r>
               <a:rPr sz="1100" b="1" i="0">
                 <a:solidFill>
-                  <a:srgbClr val="E8A860"/>
+                  <a:srgbClr val="0A1F3D"/>
                 </a:solidFill>
                 <a:latin typeface="Calibri"/>
               </a:rPr>
-              <a:t>DROUGHT-PROOF</a:t>
-            </a:r>
-          </a:p>
-        </p:txBody>
-      </p:sp>
-      <p:sp>
-        <p:nvSpPr>
-          <p:cNvPr id="29" name="TextBox 28"/>
+              <a:t>THE PROBLEM</a:t>
+            </a:r>
+          </a:p>
+        </p:txBody>
+      </p:sp>
+      <p:sp>
+        <p:nvSpPr>
+          <p:cNvPr id="12" name="TextBox 11"/>
           <p:cNvSpPr txBox="1"/>
           <p:nvPr/>
         </p:nvSpPr>
         <p:spPr>
           <a:xfrm>
-            <a:off x="7955279" y="4572000"/>
-            <a:ext cx="3749039" cy="365760"/>
+            <a:off x="6492240" y="2807208"/>
+            <a:ext cx="4937760" cy="960120"/>
           </a:xfrm>
           <a:prstGeom prst="rect">
             <a:avLst/>
@@ -7575,31 +6898,31 @@
           <a:p>
             <a:pPr algn="l">
               <a:lnSpc>
-                <a:spcPct val="115000"/>
+                <a:spcPct val="130000"/>
               </a:lnSpc>
             </a:pPr>
             <a:r>
               <a:rPr sz="1200" b="0" i="0">
                 <a:solidFill>
-                  <a:srgbClr val="FFFFFF"/>
+                  <a:srgbClr val="121824"/>
                 </a:solidFill>
                 <a:latin typeface="Calibri"/>
               </a:rPr>
-              <a:t>Baseload independent of Kariba levels.</a:t>
-            </a:r>
-          </a:p>
-        </p:txBody>
-      </p:sp>
-      <p:sp>
-        <p:nvSpPr>
-          <p:cNvPr id="30" name="TextBox 29"/>
+              <a:t>84% hydropower dependence makes Zambia's economy a hostage to the rain.</a:t>
+            </a:r>
+          </a:p>
+        </p:txBody>
+      </p:sp>
+      <p:sp>
+        <p:nvSpPr>
+          <p:cNvPr id="13" name="TextBox 12"/>
           <p:cNvSpPr txBox="1"/>
           <p:nvPr/>
         </p:nvSpPr>
         <p:spPr>
           <a:xfrm>
-            <a:off x="5852160" y="5029200"/>
-            <a:ext cx="2103120" cy="274320"/>
+            <a:off x="6492240" y="3749039"/>
+            <a:ext cx="4937760" cy="274320"/>
           </a:xfrm>
           <a:prstGeom prst="rect">
             <a:avLst/>
@@ -7614,31 +6937,31 @@
           <a:p>
             <a:pPr algn="l">
               <a:lnSpc>
-                <a:spcPct val="115000"/>
+                <a:spcPct val="120000"/>
               </a:lnSpc>
             </a:pPr>
             <a:r>
               <a:rPr sz="1100" b="1" i="0">
                 <a:solidFill>
-                  <a:srgbClr val="E8A860"/>
+                  <a:srgbClr val="0A1F3D"/>
                 </a:solidFill>
                 <a:latin typeface="Calibri"/>
               </a:rPr>
-              <a:t>FUEL-SOVEREIGN</a:t>
-            </a:r>
-          </a:p>
-        </p:txBody>
-      </p:sp>
-      <p:sp>
-        <p:nvSpPr>
-          <p:cNvPr id="31" name="TextBox 30"/>
+              <a:t>THE SOLUTION</a:t>
+            </a:r>
+          </a:p>
+        </p:txBody>
+      </p:sp>
+      <p:sp>
+        <p:nvSpPr>
+          <p:cNvPr id="14" name="TextBox 13"/>
           <p:cNvSpPr txBox="1"/>
           <p:nvPr/>
         </p:nvSpPr>
         <p:spPr>
           <a:xfrm>
-            <a:off x="7955279" y="5029200"/>
-            <a:ext cx="3749039" cy="365760"/>
+            <a:off x="6492240" y="4041648"/>
+            <a:ext cx="4937760" cy="960120"/>
           </a:xfrm>
           <a:prstGeom prst="rect">
             <a:avLst/>
@@ -7653,31 +6976,31 @@
           <a:p>
             <a:pPr algn="l">
               <a:lnSpc>
-                <a:spcPct val="115000"/>
+                <a:spcPct val="130000"/>
               </a:lnSpc>
             </a:pPr>
             <a:r>
               <a:rPr sz="1200" b="0" i="0">
                 <a:solidFill>
-                  <a:srgbClr val="FFFFFF"/>
+                  <a:srgbClr val="121824"/>
                 </a:solidFill>
                 <a:latin typeface="Calibri"/>
               </a:rPr>
-              <a:t>Domestic uranium reserves. No fuel imports.</a:t>
-            </a:r>
-          </a:p>
-        </p:txBody>
-      </p:sp>
-      <p:sp>
-        <p:nvSpPr>
-          <p:cNvPr id="32" name="TextBox 31"/>
+              <a:t>Nuclear delivers 24/7, weather-proof baseload independent of Kariba reservoir levels.</a:t>
+            </a:r>
+          </a:p>
+        </p:txBody>
+      </p:sp>
+      <p:sp>
+        <p:nvSpPr>
+          <p:cNvPr id="15" name="TextBox 14"/>
           <p:cNvSpPr txBox="1"/>
           <p:nvPr/>
         </p:nvSpPr>
         <p:spPr>
           <a:xfrm>
-            <a:off x="5852160" y="5486400"/>
-            <a:ext cx="2103120" cy="274320"/>
+            <a:off x="6492240" y="4983479"/>
+            <a:ext cx="4937760" cy="274320"/>
           </a:xfrm>
           <a:prstGeom prst="rect">
             <a:avLst/>
@@ -7692,31 +7015,31 @@
           <a:p>
             <a:pPr algn="l">
               <a:lnSpc>
-                <a:spcPct val="115000"/>
+                <a:spcPct val="120000"/>
               </a:lnSpc>
             </a:pPr>
             <a:r>
               <a:rPr sz="1100" b="1" i="0">
                 <a:solidFill>
-                  <a:srgbClr val="E8A860"/>
+                  <a:srgbClr val="0A1F3D"/>
                 </a:solidFill>
                 <a:latin typeface="Calibri"/>
               </a:rPr>
-              <a:t>ALREADY MOBILISED</a:t>
-            </a:r>
-          </a:p>
-        </p:txBody>
-      </p:sp>
-      <p:sp>
-        <p:nvSpPr>
-          <p:cNvPr id="33" name="TextBox 32"/>
+              <a:t>THE READINESS</a:t>
+            </a:r>
+          </a:p>
+        </p:txBody>
+      </p:sp>
+      <p:sp>
+        <p:nvSpPr>
+          <p:cNvPr id="16" name="TextBox 15"/>
           <p:cNvSpPr txBox="1"/>
           <p:nvPr/>
         </p:nvSpPr>
         <p:spPr>
           <a:xfrm>
-            <a:off x="7955279" y="5486400"/>
-            <a:ext cx="3749039" cy="365760"/>
+            <a:off x="6492240" y="5276088"/>
+            <a:ext cx="4937760" cy="960120"/>
           </a:xfrm>
           <a:prstGeom prst="rect">
             <a:avLst/>
@@ -7731,114 +7054,66 @@
           <a:p>
             <a:pPr algn="l">
               <a:lnSpc>
-                <a:spcPct val="115000"/>
+                <a:spcPct val="130000"/>
               </a:lnSpc>
             </a:pPr>
             <a:r>
               <a:rPr sz="1200" b="0" i="0">
                 <a:solidFill>
-                  <a:srgbClr val="FFFFFF"/>
+                  <a:srgbClr val="121824"/>
                 </a:solidFill>
                 <a:latin typeface="Calibri"/>
               </a:rPr>
-              <a:t>2020 Nuclear Policy approved. ROSATOM, IP3, KAERI signed.</a:t>
-            </a:r>
-          </a:p>
-        </p:txBody>
-      </p:sp>
-      <p:sp>
-        <p:nvSpPr>
-          <p:cNvPr id="34" name="TextBox 33"/>
-          <p:cNvSpPr txBox="1"/>
-          <p:nvPr/>
-        </p:nvSpPr>
-        <p:spPr>
-          <a:xfrm>
-            <a:off x="548640" y="6309360"/>
-            <a:ext cx="11064240" cy="365760"/>
-          </a:xfrm>
-          <a:prstGeom prst="rect">
-            <a:avLst/>
-          </a:prstGeom>
-          <a:noFill/>
-        </p:spPr>
-        <p:txBody>
-          <a:bodyPr wrap="square" anchor="t" lIns="0" rIns="0" tIns="0" bIns="0">
-            <a:spAutoFit/>
-          </a:bodyPr>
-          <a:lstStyle/>
-          <a:p>
-            <a:pPr algn="ctr">
-              <a:lnSpc>
-                <a:spcPct val="115000"/>
-              </a:lnSpc>
-            </a:pPr>
-            <a:r>
-              <a:rPr sz="1300" b="1" i="1">
-                <a:solidFill>
-                  <a:srgbClr val="B32B2B"/>
-                </a:solidFill>
-                <a:latin typeface="Calibri"/>
-              </a:rPr>
-              <a:t>We wrote the plan in 2020. The grid is still waiting in 2026.</a:t>
-            </a:r>
-          </a:p>
-        </p:txBody>
-      </p:sp>
-      <p:sp>
-        <p:nvSpPr>
-          <p:cNvPr id="35" name="Rectangle 34"/>
-          <p:cNvSpPr/>
-          <p:nvPr/>
-        </p:nvSpPr>
-        <p:spPr>
-          <a:xfrm>
-            <a:off x="0" y="6675120"/>
-            <a:ext cx="12191695" cy="182880"/>
-          </a:xfrm>
-          <a:prstGeom prst="rect">
-            <a:avLst/>
-          </a:prstGeom>
-          <a:solidFill>
-            <a:srgbClr val="C8CED6"/>
-          </a:solidFill>
-          <a:ln>
-            <a:noFill/>
+              <a:t>Zambia is an IAEA Member State and the Radiation Protection Authority (RPA) is already in place.</a:t>
+            </a:r>
+          </a:p>
+        </p:txBody>
+      </p:sp>
+      <p:cxnSp>
+        <p:nvCxnSpPr>
+          <p:cNvPr id="17" name="Connector 16"/>
+          <p:cNvCxnSpPr/>
+          <p:nvPr/>
+        </p:nvCxnSpPr>
+        <p:spPr>
+          <a:xfrm>
+            <a:off x="0" y="6629400"/>
+            <a:ext cx="12191695" cy="0"/>
+          </a:xfrm>
+          <a:prstGeom prst="line">
+            <a:avLst/>
+          </a:prstGeom>
+          <a:ln w="6350">
+            <a:solidFill>
+              <a:srgbClr val="C8CED6"/>
+            </a:solidFill>
           </a:ln>
-          <a:effectLst/>
         </p:spPr>
         <p:style>
-          <a:lnRef idx="1">
+          <a:lnRef idx="2">
             <a:schemeClr val="accent1"/>
           </a:lnRef>
-          <a:fillRef idx="3">
+          <a:fillRef idx="0">
             <a:schemeClr val="accent1"/>
           </a:fillRef>
-          <a:effectRef idx="2">
+          <a:effectRef idx="1">
             <a:schemeClr val="accent1"/>
           </a:effectRef>
           <a:fontRef idx="minor">
-            <a:schemeClr val="lt1"/>
+            <a:schemeClr val="tx1"/>
           </a:fontRef>
         </p:style>
-        <p:txBody>
-          <a:bodyPr rtlCol="0" anchor="ctr"/>
-          <a:lstStyle/>
-          <a:p>
-            <a:pPr algn="ctr"/>
-          </a:p>
-        </p:txBody>
-      </p:sp>
-      <p:sp>
-        <p:nvSpPr>
-          <p:cNvPr id="36" name="Rectangle 35"/>
+      </p:cxnSp>
+      <p:sp>
+        <p:nvSpPr>
+          <p:cNvPr id="18" name="Rectangle 17"/>
           <p:cNvSpPr/>
           <p:nvPr/>
         </p:nvSpPr>
         <p:spPr>
           <a:xfrm>
-            <a:off x="0" y="6675120"/>
-            <a:ext cx="640080" cy="182880"/>
+            <a:off x="0" y="6629400"/>
+            <a:ext cx="640080" cy="45720"/>
           </a:xfrm>
           <a:prstGeom prst="rect">
             <a:avLst/>
@@ -7875,14 +7150,14 @@
       </p:sp>
       <p:sp>
         <p:nvSpPr>
-          <p:cNvPr id="37" name="TextBox 36"/>
+          <p:cNvPr id="19" name="TextBox 18"/>
           <p:cNvSpPr txBox="1"/>
           <p:nvPr/>
         </p:nvSpPr>
         <p:spPr>
           <a:xfrm>
-            <a:off x="457200" y="6446520"/>
-            <a:ext cx="9601200" cy="228600"/>
+            <a:off x="457200" y="6675120"/>
+            <a:ext cx="9601200" cy="182880"/>
           </a:xfrm>
           <a:prstGeom prst="rect">
             <a:avLst/>
@@ -7897,31 +7172,31 @@
           <a:p>
             <a:pPr algn="l">
               <a:lnSpc>
-                <a:spcPct val="115000"/>
+                <a:spcPct val="120000"/>
               </a:lnSpc>
             </a:pPr>
             <a:r>
-              <a:rPr sz="900" b="0" i="1">
+              <a:rPr sz="800" b="0" i="1">
                 <a:solidFill>
                   <a:srgbClr val="6B7280"/>
                 </a:solidFill>
                 <a:latin typeface="Calibri"/>
               </a:rPr>
-              <a:t>Sources: ZESCO Annual Reports 2023-2024 · Zambia 7NDP &amp; Vision 2030</a:t>
-            </a:r>
-          </a:p>
-        </p:txBody>
-      </p:sp>
-      <p:sp>
-        <p:nvSpPr>
-          <p:cNvPr id="38" name="TextBox 37"/>
+              <a:t>Sources: ZESCO Annual Reports 2023-2024 · Zambia 7NDP &amp; Vision 2030 · IAEA Milestone Approach</a:t>
+            </a:r>
+          </a:p>
+        </p:txBody>
+      </p:sp>
+      <p:sp>
+        <p:nvSpPr>
+          <p:cNvPr id="20" name="TextBox 19"/>
           <p:cNvSpPr txBox="1"/>
           <p:nvPr/>
         </p:nvSpPr>
         <p:spPr>
           <a:xfrm>
-            <a:off x="10515600" y="6446520"/>
-            <a:ext cx="1463040" cy="228600"/>
+            <a:off x="10424160" y="6675120"/>
+            <a:ext cx="1554480" cy="182880"/>
           </a:xfrm>
           <a:prstGeom prst="rect">
             <a:avLst/>
@@ -7936,17 +7211,17 @@
           <a:p>
             <a:pPr algn="r">
               <a:lnSpc>
-                <a:spcPct val="115000"/>
+                <a:spcPct val="120000"/>
               </a:lnSpc>
             </a:pPr>
             <a:r>
-              <a:rPr sz="900" b="1" i="0">
+              <a:rPr sz="800" b="1" i="0">
                 <a:solidFill>
                   <a:srgbClr val="2A3344"/>
                 </a:solidFill>
                 <a:latin typeface="Calibri"/>
               </a:rPr>
-              <a:t>4 / 5  ·  E. Mwaba</a:t>
+              <a:t>4 / 8  ·  E. Mwaba</a:t>
             </a:r>
           </a:p>
         </p:txBody>
@@ -7960,6 +7235,3292 @@
 </file>
 
 <file path=ppt/slides/slide5.xml><?xml version="1.0" encoding="utf-8"?>
+<p:sld xmlns:a="http://schemas.openxmlformats.org/drawingml/2006/main" xmlns:p="http://schemas.openxmlformats.org/presentationml/2006/main" xmlns:r="http://schemas.openxmlformats.org/officeDocument/2006/relationships">
+  <p:cSld>
+    <p:bg>
+      <p:bgPr>
+        <a:solidFill>
+          <a:srgbClr val="F7F5F0"/>
+        </a:solidFill>
+        <a:effectLst/>
+      </p:bgPr>
+    </p:bg>
+    <p:spTree>
+      <p:nvGrpSpPr>
+        <p:cNvPr id="1" name=""/>
+        <p:cNvGrpSpPr/>
+        <p:nvPr/>
+      </p:nvGrpSpPr>
+      <p:grpSpPr/>
+      <p:sp>
+        <p:nvSpPr>
+          <p:cNvPr id="2" name="TextBox 1"/>
+          <p:cNvSpPr txBox="1"/>
+          <p:nvPr/>
+        </p:nvSpPr>
+        <p:spPr>
+          <a:xfrm>
+            <a:off x="548640" y="411480"/>
+            <a:ext cx="9144000" cy="274320"/>
+          </a:xfrm>
+          <a:prstGeom prst="rect">
+            <a:avLst/>
+          </a:prstGeom>
+          <a:noFill/>
+        </p:spPr>
+        <p:txBody>
+          <a:bodyPr wrap="square" anchor="t" lIns="0" rIns="0" tIns="0" bIns="0">
+            <a:spAutoFit/>
+          </a:bodyPr>
+          <a:lstStyle/>
+          <a:p>
+            <a:pPr algn="l">
+              <a:lnSpc>
+                <a:spcPct val="120000"/>
+              </a:lnSpc>
+            </a:pPr>
+            <a:r>
+              <a:rPr sz="1100" b="1" i="0">
+                <a:solidFill>
+                  <a:srgbClr val="CC7A2E"/>
+                </a:solidFill>
+                <a:latin typeface="Calibri"/>
+              </a:rPr>
+              <a:t>03  ·  SAFETY MASTERY</a:t>
+            </a:r>
+          </a:p>
+        </p:txBody>
+      </p:sp>
+      <p:sp>
+        <p:nvSpPr>
+          <p:cNvPr id="3" name="TextBox 2"/>
+          <p:cNvSpPr txBox="1"/>
+          <p:nvPr/>
+        </p:nvSpPr>
+        <p:spPr>
+          <a:xfrm>
+            <a:off x="548640" y="685800"/>
+            <a:ext cx="11064240" cy="685800"/>
+          </a:xfrm>
+          <a:prstGeom prst="rect">
+            <a:avLst/>
+          </a:prstGeom>
+          <a:noFill/>
+        </p:spPr>
+        <p:txBody>
+          <a:bodyPr wrap="square" anchor="t" lIns="0" rIns="0" tIns="0" bIns="0">
+            <a:spAutoFit/>
+          </a:bodyPr>
+          <a:lstStyle/>
+          <a:p>
+            <a:pPr algn="l">
+              <a:lnSpc>
+                <a:spcPct val="120000"/>
+              </a:lnSpc>
+            </a:pPr>
+            <a:r>
+              <a:rPr sz="3000" b="1" i="0">
+                <a:solidFill>
+                  <a:srgbClr val="0A1F3D"/>
+                </a:solidFill>
+                <a:latin typeface="Calibri"/>
+              </a:rPr>
+              <a:t>The proof is in the data.</a:t>
+            </a:r>
+          </a:p>
+        </p:txBody>
+      </p:sp>
+      <p:cxnSp>
+        <p:nvCxnSpPr>
+          <p:cNvPr id="4" name="Connector 3"/>
+          <p:cNvCxnSpPr/>
+          <p:nvPr/>
+        </p:nvCxnSpPr>
+        <p:spPr>
+          <a:xfrm>
+            <a:off x="548640" y="1325880"/>
+            <a:ext cx="1097280" cy="0"/>
+          </a:xfrm>
+          <a:prstGeom prst="line">
+            <a:avLst/>
+          </a:prstGeom>
+          <a:ln w="19050">
+            <a:solidFill>
+              <a:srgbClr val="CC7A2E"/>
+            </a:solidFill>
+          </a:ln>
+        </p:spPr>
+        <p:style>
+          <a:lnRef idx="2">
+            <a:schemeClr val="accent1"/>
+          </a:lnRef>
+          <a:fillRef idx="0">
+            <a:schemeClr val="accent1"/>
+          </a:fillRef>
+          <a:effectRef idx="1">
+            <a:schemeClr val="accent1"/>
+          </a:effectRef>
+          <a:fontRef idx="minor">
+            <a:schemeClr val="tx1"/>
+          </a:fontRef>
+        </p:style>
+      </p:cxnSp>
+      <p:sp>
+        <p:nvSpPr>
+          <p:cNvPr id="5" name="TextBox 4"/>
+          <p:cNvSpPr txBox="1"/>
+          <p:nvPr/>
+        </p:nvSpPr>
+        <p:spPr>
+          <a:xfrm>
+            <a:off x="548640" y="1417320"/>
+            <a:ext cx="11064240" cy="365760"/>
+          </a:xfrm>
+          <a:prstGeom prst="rect">
+            <a:avLst/>
+          </a:prstGeom>
+          <a:noFill/>
+        </p:spPr>
+        <p:txBody>
+          <a:bodyPr wrap="square" anchor="t" lIns="0" rIns="0" tIns="0" bIns="0">
+            <a:spAutoFit/>
+          </a:bodyPr>
+          <a:lstStyle/>
+          <a:p>
+            <a:pPr algn="l">
+              <a:lnSpc>
+                <a:spcPct val="120000"/>
+              </a:lnSpc>
+            </a:pPr>
+            <a:r>
+              <a:rPr sz="1300" b="0" i="1">
+                <a:solidFill>
+                  <a:srgbClr val="6B7280"/>
+                </a:solidFill>
+                <a:latin typeface="Calibri"/>
+              </a:rPr>
+              <a:t>10-year DOE record across 22,000 workers — the safety model Zambia would inherit.</a:t>
+            </a:r>
+          </a:p>
+        </p:txBody>
+      </p:sp>
+      <p:graphicFrame>
+        <p:nvGraphicFramePr>
+          <p:cNvPr id="6" name="Chart 5"/>
+          <p:cNvGraphicFramePr>
+            <a:graphicFrameLocks noGrp="1"/>
+          </p:cNvGraphicFramePr>
+          <p:nvPr/>
+        </p:nvGraphicFramePr>
+        <p:xfrm>
+          <a:off x="548640" y="2011680"/>
+          <a:ext cx="6766560" cy="4023360"/>
+        </p:xfrm>
+        <a:graphic>
+          <a:graphicData uri="http://schemas.openxmlformats.org/drawingml/2006/chart">
+            <c:chart xmlns:c="http://schemas.openxmlformats.org/drawingml/2006/chart" r:id="rId2"/>
+          </a:graphicData>
+        </a:graphic>
+      </p:graphicFrame>
+      <p:sp>
+        <p:nvSpPr>
+          <p:cNvPr id="7" name="TextBox 6"/>
+          <p:cNvSpPr txBox="1"/>
+          <p:nvPr/>
+        </p:nvSpPr>
+        <p:spPr>
+          <a:xfrm>
+            <a:off x="548640" y="6080760"/>
+            <a:ext cx="6766560" cy="365760"/>
+          </a:xfrm>
+          <a:prstGeom prst="rect">
+            <a:avLst/>
+          </a:prstGeom>
+          <a:noFill/>
+        </p:spPr>
+        <p:txBody>
+          <a:bodyPr wrap="square" anchor="t" lIns="0" rIns="0" tIns="0" bIns="0">
+            <a:spAutoFit/>
+          </a:bodyPr>
+          <a:lstStyle/>
+          <a:p>
+            <a:pPr algn="ctr">
+              <a:lnSpc>
+                <a:spcPct val="120000"/>
+              </a:lnSpc>
+            </a:pPr>
+            <a:r>
+              <a:rPr sz="900" b="0" i="1">
+                <a:solidFill>
+                  <a:srgbClr val="6B7280"/>
+                </a:solidFill>
+                <a:latin typeface="Calibri"/>
+              </a:rPr>
+              <a:t>Radiation exposure (mrem/yr). Source: U.S. DOE REMS 2024.</a:t>
+            </a:r>
+          </a:p>
+        </p:txBody>
+      </p:sp>
+      <p:sp>
+        <p:nvSpPr>
+          <p:cNvPr id="8" name="Rectangle 7"/>
+          <p:cNvSpPr/>
+          <p:nvPr/>
+        </p:nvSpPr>
+        <p:spPr>
+          <a:xfrm>
+            <a:off x="7543800" y="2011680"/>
+            <a:ext cx="4160520" cy="1828800"/>
+          </a:xfrm>
+          <a:prstGeom prst="rect">
+            <a:avLst/>
+          </a:prstGeom>
+          <a:solidFill>
+            <a:srgbClr val="0A1F3D"/>
+          </a:solidFill>
+          <a:ln>
+            <a:noFill/>
+          </a:ln>
+          <a:effectLst/>
+        </p:spPr>
+        <p:style>
+          <a:lnRef idx="1">
+            <a:schemeClr val="accent1"/>
+          </a:lnRef>
+          <a:fillRef idx="3">
+            <a:schemeClr val="accent1"/>
+          </a:fillRef>
+          <a:effectRef idx="2">
+            <a:schemeClr val="accent1"/>
+          </a:effectRef>
+          <a:fontRef idx="minor">
+            <a:schemeClr val="lt1"/>
+          </a:fontRef>
+        </p:style>
+        <p:txBody>
+          <a:bodyPr rtlCol="0" anchor="ctr"/>
+          <a:lstStyle/>
+          <a:p>
+            <a:pPr algn="ctr"/>
+          </a:p>
+        </p:txBody>
+      </p:sp>
+      <p:sp>
+        <p:nvSpPr>
+          <p:cNvPr id="9" name="Rectangle 8"/>
+          <p:cNvSpPr/>
+          <p:nvPr/>
+        </p:nvSpPr>
+        <p:spPr>
+          <a:xfrm>
+            <a:off x="7543800" y="2011680"/>
+            <a:ext cx="109728" cy="1828800"/>
+          </a:xfrm>
+          <a:prstGeom prst="rect">
+            <a:avLst/>
+          </a:prstGeom>
+          <a:solidFill>
+            <a:srgbClr val="CC7A2E"/>
+          </a:solidFill>
+          <a:ln>
+            <a:noFill/>
+          </a:ln>
+          <a:effectLst/>
+        </p:spPr>
+        <p:style>
+          <a:lnRef idx="1">
+            <a:schemeClr val="accent1"/>
+          </a:lnRef>
+          <a:fillRef idx="3">
+            <a:schemeClr val="accent1"/>
+          </a:fillRef>
+          <a:effectRef idx="2">
+            <a:schemeClr val="accent1"/>
+          </a:effectRef>
+          <a:fontRef idx="minor">
+            <a:schemeClr val="lt1"/>
+          </a:fontRef>
+        </p:style>
+        <p:txBody>
+          <a:bodyPr rtlCol="0" anchor="ctr"/>
+          <a:lstStyle/>
+          <a:p>
+            <a:pPr algn="ctr"/>
+          </a:p>
+        </p:txBody>
+      </p:sp>
+      <p:sp>
+        <p:nvSpPr>
+          <p:cNvPr id="10" name="TextBox 9"/>
+          <p:cNvSpPr txBox="1"/>
+          <p:nvPr/>
+        </p:nvSpPr>
+        <p:spPr>
+          <a:xfrm>
+            <a:off x="7772400" y="2103120"/>
+            <a:ext cx="3840480" cy="274320"/>
+          </a:xfrm>
+          <a:prstGeom prst="rect">
+            <a:avLst/>
+          </a:prstGeom>
+          <a:noFill/>
+        </p:spPr>
+        <p:txBody>
+          <a:bodyPr wrap="square" anchor="t" lIns="0" rIns="0" tIns="0" bIns="0">
+            <a:spAutoFit/>
+          </a:bodyPr>
+          <a:lstStyle/>
+          <a:p>
+            <a:pPr algn="l">
+              <a:lnSpc>
+                <a:spcPct val="120000"/>
+              </a:lnSpc>
+            </a:pPr>
+            <a:r>
+              <a:rPr sz="1100" b="1" i="0">
+                <a:solidFill>
+                  <a:srgbClr val="E8A860"/>
+                </a:solidFill>
+                <a:latin typeface="Calibri"/>
+              </a:rPr>
+              <a:t>OF THE FEDERAL LIMIT</a:t>
+            </a:r>
+          </a:p>
+        </p:txBody>
+      </p:sp>
+      <p:sp>
+        <p:nvSpPr>
+          <p:cNvPr id="11" name="TextBox 10"/>
+          <p:cNvSpPr txBox="1"/>
+          <p:nvPr/>
+        </p:nvSpPr>
+        <p:spPr>
+          <a:xfrm>
+            <a:off x="7772400" y="2423160"/>
+            <a:ext cx="3840480" cy="1005840"/>
+          </a:xfrm>
+          <a:prstGeom prst="rect">
+            <a:avLst/>
+          </a:prstGeom>
+          <a:noFill/>
+        </p:spPr>
+        <p:txBody>
+          <a:bodyPr wrap="square" anchor="t" lIns="0" rIns="0" tIns="0" bIns="0">
+            <a:spAutoFit/>
+          </a:bodyPr>
+          <a:lstStyle/>
+          <a:p>
+            <a:pPr algn="l">
+              <a:lnSpc>
+                <a:spcPct val="120000"/>
+              </a:lnSpc>
+            </a:pPr>
+            <a:r>
+              <a:rPr sz="7200" b="1" i="0">
+                <a:solidFill>
+                  <a:srgbClr val="FFFFFF"/>
+                </a:solidFill>
+                <a:latin typeface="Calibri"/>
+              </a:rPr>
+              <a:t>1.2%</a:t>
+            </a:r>
+          </a:p>
+        </p:txBody>
+      </p:sp>
+      <p:sp>
+        <p:nvSpPr>
+          <p:cNvPr id="12" name="TextBox 11"/>
+          <p:cNvSpPr txBox="1"/>
+          <p:nvPr/>
+        </p:nvSpPr>
+        <p:spPr>
+          <a:xfrm>
+            <a:off x="7772400" y="3429000"/>
+            <a:ext cx="3840480" cy="365760"/>
+          </a:xfrm>
+          <a:prstGeom prst="rect">
+            <a:avLst/>
+          </a:prstGeom>
+          <a:noFill/>
+        </p:spPr>
+        <p:txBody>
+          <a:bodyPr wrap="square" anchor="t" lIns="0" rIns="0" tIns="0" bIns="0">
+            <a:spAutoFit/>
+          </a:bodyPr>
+          <a:lstStyle/>
+          <a:p>
+            <a:pPr algn="l">
+              <a:lnSpc>
+                <a:spcPct val="120000"/>
+              </a:lnSpc>
+            </a:pPr>
+            <a:r>
+              <a:rPr sz="1200" b="0" i="0">
+                <a:solidFill>
+                  <a:srgbClr val="CFD8E3"/>
+                </a:solidFill>
+                <a:latin typeface="Calibri"/>
+              </a:rPr>
+              <a:t>59.12 ÷ 5,000 mrem</a:t>
+            </a:r>
+          </a:p>
+        </p:txBody>
+      </p:sp>
+      <p:sp>
+        <p:nvSpPr>
+          <p:cNvPr id="13" name="Rectangle 12"/>
+          <p:cNvSpPr/>
+          <p:nvPr/>
+        </p:nvSpPr>
+        <p:spPr>
+          <a:xfrm>
+            <a:off x="7543800" y="3977639"/>
+            <a:ext cx="4160520" cy="676656"/>
+          </a:xfrm>
+          <a:prstGeom prst="rect">
+            <a:avLst/>
+          </a:prstGeom>
+          <a:solidFill>
+            <a:srgbClr val="FFFFFF"/>
+          </a:solidFill>
+          <a:ln>
+            <a:noFill/>
+          </a:ln>
+          <a:effectLst/>
+        </p:spPr>
+        <p:style>
+          <a:lnRef idx="1">
+            <a:schemeClr val="accent1"/>
+          </a:lnRef>
+          <a:fillRef idx="3">
+            <a:schemeClr val="accent1"/>
+          </a:fillRef>
+          <a:effectRef idx="2">
+            <a:schemeClr val="accent1"/>
+          </a:effectRef>
+          <a:fontRef idx="minor">
+            <a:schemeClr val="lt1"/>
+          </a:fontRef>
+        </p:style>
+        <p:txBody>
+          <a:bodyPr rtlCol="0" anchor="ctr"/>
+          <a:lstStyle/>
+          <a:p>
+            <a:pPr algn="ctr"/>
+          </a:p>
+        </p:txBody>
+      </p:sp>
+      <p:sp>
+        <p:nvSpPr>
+          <p:cNvPr id="14" name="Rectangle 13"/>
+          <p:cNvSpPr/>
+          <p:nvPr/>
+        </p:nvSpPr>
+        <p:spPr>
+          <a:xfrm>
+            <a:off x="7543800" y="3977639"/>
+            <a:ext cx="73152" cy="676656"/>
+          </a:xfrm>
+          <a:prstGeom prst="rect">
+            <a:avLst/>
+          </a:prstGeom>
+          <a:solidFill>
+            <a:srgbClr val="CC7A2E"/>
+          </a:solidFill>
+          <a:ln>
+            <a:noFill/>
+          </a:ln>
+          <a:effectLst/>
+        </p:spPr>
+        <p:style>
+          <a:lnRef idx="1">
+            <a:schemeClr val="accent1"/>
+          </a:lnRef>
+          <a:fillRef idx="3">
+            <a:schemeClr val="accent1"/>
+          </a:fillRef>
+          <a:effectRef idx="2">
+            <a:schemeClr val="accent1"/>
+          </a:effectRef>
+          <a:fontRef idx="minor">
+            <a:schemeClr val="lt1"/>
+          </a:fontRef>
+        </p:style>
+        <p:txBody>
+          <a:bodyPr rtlCol="0" anchor="ctr"/>
+          <a:lstStyle/>
+          <a:p>
+            <a:pPr algn="ctr"/>
+          </a:p>
+        </p:txBody>
+      </p:sp>
+      <p:sp>
+        <p:nvSpPr>
+          <p:cNvPr id="15" name="TextBox 14"/>
+          <p:cNvSpPr txBox="1"/>
+          <p:nvPr/>
+        </p:nvSpPr>
+        <p:spPr>
+          <a:xfrm>
+            <a:off x="7726679" y="4023359"/>
+            <a:ext cx="3931920" cy="228600"/>
+          </a:xfrm>
+          <a:prstGeom prst="rect">
+            <a:avLst/>
+          </a:prstGeom>
+          <a:noFill/>
+        </p:spPr>
+        <p:txBody>
+          <a:bodyPr wrap="square" anchor="t" lIns="0" rIns="0" tIns="0" bIns="0">
+            <a:spAutoFit/>
+          </a:bodyPr>
+          <a:lstStyle/>
+          <a:p>
+            <a:pPr algn="l">
+              <a:lnSpc>
+                <a:spcPct val="120000"/>
+              </a:lnSpc>
+            </a:pPr>
+            <a:r>
+              <a:rPr sz="1000" b="1" i="0">
+                <a:solidFill>
+                  <a:srgbClr val="0A1F3D"/>
+                </a:solidFill>
+                <a:latin typeface="Calibri"/>
+              </a:rPr>
+              <a:t>SCALABLE</a:t>
+            </a:r>
+          </a:p>
+        </p:txBody>
+      </p:sp>
+      <p:sp>
+        <p:nvSpPr>
+          <p:cNvPr id="16" name="TextBox 15"/>
+          <p:cNvSpPr txBox="1"/>
+          <p:nvPr/>
+        </p:nvSpPr>
+        <p:spPr>
+          <a:xfrm>
+            <a:off x="7726679" y="4251959"/>
+            <a:ext cx="3931920" cy="384048"/>
+          </a:xfrm>
+          <a:prstGeom prst="rect">
+            <a:avLst/>
+          </a:prstGeom>
+          <a:noFill/>
+        </p:spPr>
+        <p:txBody>
+          <a:bodyPr wrap="square" anchor="t" lIns="0" rIns="0" tIns="0" bIns="0">
+            <a:spAutoFit/>
+          </a:bodyPr>
+          <a:lstStyle/>
+          <a:p>
+            <a:pPr algn="l">
+              <a:lnSpc>
+                <a:spcPct val="120000"/>
+              </a:lnSpc>
+            </a:pPr>
+            <a:r>
+              <a:rPr sz="1000" b="0" i="0">
+                <a:solidFill>
+                  <a:srgbClr val="121824"/>
+                </a:solidFill>
+                <a:latin typeface="Calibri"/>
+              </a:rPr>
+              <a:t>Workforce grew 1,133 → 1,167. Dose did not move.</a:t>
+            </a:r>
+          </a:p>
+        </p:txBody>
+      </p:sp>
+      <p:sp>
+        <p:nvSpPr>
+          <p:cNvPr id="17" name="Rectangle 16"/>
+          <p:cNvSpPr/>
+          <p:nvPr/>
+        </p:nvSpPr>
+        <p:spPr>
+          <a:xfrm>
+            <a:off x="7543800" y="4709159"/>
+            <a:ext cx="4160520" cy="676656"/>
+          </a:xfrm>
+          <a:prstGeom prst="rect">
+            <a:avLst/>
+          </a:prstGeom>
+          <a:solidFill>
+            <a:srgbClr val="FFFFFF"/>
+          </a:solidFill>
+          <a:ln>
+            <a:noFill/>
+          </a:ln>
+          <a:effectLst/>
+        </p:spPr>
+        <p:style>
+          <a:lnRef idx="1">
+            <a:schemeClr val="accent1"/>
+          </a:lnRef>
+          <a:fillRef idx="3">
+            <a:schemeClr val="accent1"/>
+          </a:fillRef>
+          <a:effectRef idx="2">
+            <a:schemeClr val="accent1"/>
+          </a:effectRef>
+          <a:fontRef idx="minor">
+            <a:schemeClr val="lt1"/>
+          </a:fontRef>
+        </p:style>
+        <p:txBody>
+          <a:bodyPr rtlCol="0" anchor="ctr"/>
+          <a:lstStyle/>
+          <a:p>
+            <a:pPr algn="ctr"/>
+          </a:p>
+        </p:txBody>
+      </p:sp>
+      <p:sp>
+        <p:nvSpPr>
+          <p:cNvPr id="18" name="Rectangle 17"/>
+          <p:cNvSpPr/>
+          <p:nvPr/>
+        </p:nvSpPr>
+        <p:spPr>
+          <a:xfrm>
+            <a:off x="7543800" y="4709159"/>
+            <a:ext cx="73152" cy="676656"/>
+          </a:xfrm>
+          <a:prstGeom prst="rect">
+            <a:avLst/>
+          </a:prstGeom>
+          <a:solidFill>
+            <a:srgbClr val="CC7A2E"/>
+          </a:solidFill>
+          <a:ln>
+            <a:noFill/>
+          </a:ln>
+          <a:effectLst/>
+        </p:spPr>
+        <p:style>
+          <a:lnRef idx="1">
+            <a:schemeClr val="accent1"/>
+          </a:lnRef>
+          <a:fillRef idx="3">
+            <a:schemeClr val="accent1"/>
+          </a:fillRef>
+          <a:effectRef idx="2">
+            <a:schemeClr val="accent1"/>
+          </a:effectRef>
+          <a:fontRef idx="minor">
+            <a:schemeClr val="lt1"/>
+          </a:fontRef>
+        </p:style>
+        <p:txBody>
+          <a:bodyPr rtlCol="0" anchor="ctr"/>
+          <a:lstStyle/>
+          <a:p>
+            <a:pPr algn="ctr"/>
+          </a:p>
+        </p:txBody>
+      </p:sp>
+      <p:sp>
+        <p:nvSpPr>
+          <p:cNvPr id="19" name="TextBox 18"/>
+          <p:cNvSpPr txBox="1"/>
+          <p:nvPr/>
+        </p:nvSpPr>
+        <p:spPr>
+          <a:xfrm>
+            <a:off x="7726679" y="4754879"/>
+            <a:ext cx="3931920" cy="228600"/>
+          </a:xfrm>
+          <a:prstGeom prst="rect">
+            <a:avLst/>
+          </a:prstGeom>
+          <a:noFill/>
+        </p:spPr>
+        <p:txBody>
+          <a:bodyPr wrap="square" anchor="t" lIns="0" rIns="0" tIns="0" bIns="0">
+            <a:spAutoFit/>
+          </a:bodyPr>
+          <a:lstStyle/>
+          <a:p>
+            <a:pPr algn="l">
+              <a:lnSpc>
+                <a:spcPct val="120000"/>
+              </a:lnSpc>
+            </a:pPr>
+            <a:r>
+              <a:rPr sz="1000" b="1" i="0">
+                <a:solidFill>
+                  <a:srgbClr val="0A1F3D"/>
+                </a:solidFill>
+                <a:latin typeface="Calibri"/>
+              </a:rPr>
+              <a:t>CONTAINED</a:t>
+            </a:r>
+          </a:p>
+        </p:txBody>
+      </p:sp>
+      <p:sp>
+        <p:nvSpPr>
+          <p:cNvPr id="20" name="TextBox 19"/>
+          <p:cNvSpPr txBox="1"/>
+          <p:nvPr/>
+        </p:nvSpPr>
+        <p:spPr>
+          <a:xfrm>
+            <a:off x="7726679" y="4983479"/>
+            <a:ext cx="3931920" cy="384048"/>
+          </a:xfrm>
+          <a:prstGeom prst="rect">
+            <a:avLst/>
+          </a:prstGeom>
+          <a:noFill/>
+        </p:spPr>
+        <p:txBody>
+          <a:bodyPr wrap="square" anchor="t" lIns="0" rIns="0" tIns="0" bIns="0">
+            <a:spAutoFit/>
+          </a:bodyPr>
+          <a:lstStyle/>
+          <a:p>
+            <a:pPr algn="l">
+              <a:lnSpc>
+                <a:spcPct val="120000"/>
+              </a:lnSpc>
+            </a:pPr>
+            <a:r>
+              <a:rPr sz="1000" b="0" i="0">
+                <a:solidFill>
+                  <a:srgbClr val="121824"/>
+                </a:solidFill>
+                <a:latin typeface="Calibri"/>
+              </a:rPr>
+              <a:t>98% external (shielding). 2% internal (protocol).</a:t>
+            </a:r>
+          </a:p>
+        </p:txBody>
+      </p:sp>
+      <p:sp>
+        <p:nvSpPr>
+          <p:cNvPr id="21" name="Rectangle 20"/>
+          <p:cNvSpPr/>
+          <p:nvPr/>
+        </p:nvSpPr>
+        <p:spPr>
+          <a:xfrm>
+            <a:off x="7543800" y="5440679"/>
+            <a:ext cx="4160520" cy="676656"/>
+          </a:xfrm>
+          <a:prstGeom prst="rect">
+            <a:avLst/>
+          </a:prstGeom>
+          <a:solidFill>
+            <a:srgbClr val="FFFFFF"/>
+          </a:solidFill>
+          <a:ln>
+            <a:noFill/>
+          </a:ln>
+          <a:effectLst/>
+        </p:spPr>
+        <p:style>
+          <a:lnRef idx="1">
+            <a:schemeClr val="accent1"/>
+          </a:lnRef>
+          <a:fillRef idx="3">
+            <a:schemeClr val="accent1"/>
+          </a:fillRef>
+          <a:effectRef idx="2">
+            <a:schemeClr val="accent1"/>
+          </a:effectRef>
+          <a:fontRef idx="minor">
+            <a:schemeClr val="lt1"/>
+          </a:fontRef>
+        </p:style>
+        <p:txBody>
+          <a:bodyPr rtlCol="0" anchor="ctr"/>
+          <a:lstStyle/>
+          <a:p>
+            <a:pPr algn="ctr"/>
+          </a:p>
+        </p:txBody>
+      </p:sp>
+      <p:sp>
+        <p:nvSpPr>
+          <p:cNvPr id="22" name="Rectangle 21"/>
+          <p:cNvSpPr/>
+          <p:nvPr/>
+        </p:nvSpPr>
+        <p:spPr>
+          <a:xfrm>
+            <a:off x="7543800" y="5440679"/>
+            <a:ext cx="73152" cy="676656"/>
+          </a:xfrm>
+          <a:prstGeom prst="rect">
+            <a:avLst/>
+          </a:prstGeom>
+          <a:solidFill>
+            <a:srgbClr val="CC7A2E"/>
+          </a:solidFill>
+          <a:ln>
+            <a:noFill/>
+          </a:ln>
+          <a:effectLst/>
+        </p:spPr>
+        <p:style>
+          <a:lnRef idx="1">
+            <a:schemeClr val="accent1"/>
+          </a:lnRef>
+          <a:fillRef idx="3">
+            <a:schemeClr val="accent1"/>
+          </a:fillRef>
+          <a:effectRef idx="2">
+            <a:schemeClr val="accent1"/>
+          </a:effectRef>
+          <a:fontRef idx="minor">
+            <a:schemeClr val="lt1"/>
+          </a:fontRef>
+        </p:style>
+        <p:txBody>
+          <a:bodyPr rtlCol="0" anchor="ctr"/>
+          <a:lstStyle/>
+          <a:p>
+            <a:pPr algn="ctr"/>
+          </a:p>
+        </p:txBody>
+      </p:sp>
+      <p:sp>
+        <p:nvSpPr>
+          <p:cNvPr id="23" name="TextBox 22"/>
+          <p:cNvSpPr txBox="1"/>
+          <p:nvPr/>
+        </p:nvSpPr>
+        <p:spPr>
+          <a:xfrm>
+            <a:off x="7726679" y="5486399"/>
+            <a:ext cx="3931920" cy="228600"/>
+          </a:xfrm>
+          <a:prstGeom prst="rect">
+            <a:avLst/>
+          </a:prstGeom>
+          <a:noFill/>
+        </p:spPr>
+        <p:txBody>
+          <a:bodyPr wrap="square" anchor="t" lIns="0" rIns="0" tIns="0" bIns="0">
+            <a:spAutoFit/>
+          </a:bodyPr>
+          <a:lstStyle/>
+          <a:p>
+            <a:pPr algn="l">
+              <a:lnSpc>
+                <a:spcPct val="120000"/>
+              </a:lnSpc>
+            </a:pPr>
+            <a:r>
+              <a:rPr sz="1000" b="1" i="0">
+                <a:solidFill>
+                  <a:srgbClr val="0A1F3D"/>
+                </a:solidFill>
+                <a:latin typeface="Calibri"/>
+              </a:rPr>
+              <a:t>REPLICABLE</a:t>
+            </a:r>
+          </a:p>
+        </p:txBody>
+      </p:sp>
+      <p:sp>
+        <p:nvSpPr>
+          <p:cNvPr id="24" name="TextBox 23"/>
+          <p:cNvSpPr txBox="1"/>
+          <p:nvPr/>
+        </p:nvSpPr>
+        <p:spPr>
+          <a:xfrm>
+            <a:off x="7726679" y="5714999"/>
+            <a:ext cx="3931920" cy="384048"/>
+          </a:xfrm>
+          <a:prstGeom prst="rect">
+            <a:avLst/>
+          </a:prstGeom>
+          <a:noFill/>
+        </p:spPr>
+        <p:txBody>
+          <a:bodyPr wrap="square" anchor="t" lIns="0" rIns="0" tIns="0" bIns="0">
+            <a:spAutoFit/>
+          </a:bodyPr>
+          <a:lstStyle/>
+          <a:p>
+            <a:pPr algn="l">
+              <a:lnSpc>
+                <a:spcPct val="120000"/>
+              </a:lnSpc>
+            </a:pPr>
+            <a:r>
+              <a:rPr sz="1000" b="0" i="0">
+                <a:solidFill>
+                  <a:srgbClr val="121824"/>
+                </a:solidFill>
+                <a:latin typeface="Calibri"/>
+              </a:rPr>
+              <a:t>IAEA Milestones — the same path Zambia (RPA → NSPA) is on.</a:t>
+            </a:r>
+          </a:p>
+        </p:txBody>
+      </p:sp>
+      <p:cxnSp>
+        <p:nvCxnSpPr>
+          <p:cNvPr id="25" name="Connector 24"/>
+          <p:cNvCxnSpPr/>
+          <p:nvPr/>
+        </p:nvCxnSpPr>
+        <p:spPr>
+          <a:xfrm>
+            <a:off x="0" y="6629400"/>
+            <a:ext cx="12191695" cy="0"/>
+          </a:xfrm>
+          <a:prstGeom prst="line">
+            <a:avLst/>
+          </a:prstGeom>
+          <a:ln w="6350">
+            <a:solidFill>
+              <a:srgbClr val="C8CED6"/>
+            </a:solidFill>
+          </a:ln>
+        </p:spPr>
+        <p:style>
+          <a:lnRef idx="2">
+            <a:schemeClr val="accent1"/>
+          </a:lnRef>
+          <a:fillRef idx="0">
+            <a:schemeClr val="accent1"/>
+          </a:fillRef>
+          <a:effectRef idx="1">
+            <a:schemeClr val="accent1"/>
+          </a:effectRef>
+          <a:fontRef idx="minor">
+            <a:schemeClr val="tx1"/>
+          </a:fontRef>
+        </p:style>
+      </p:cxnSp>
+      <p:sp>
+        <p:nvSpPr>
+          <p:cNvPr id="26" name="Rectangle 25"/>
+          <p:cNvSpPr/>
+          <p:nvPr/>
+        </p:nvSpPr>
+        <p:spPr>
+          <a:xfrm>
+            <a:off x="0" y="6629400"/>
+            <a:ext cx="640080" cy="45720"/>
+          </a:xfrm>
+          <a:prstGeom prst="rect">
+            <a:avLst/>
+          </a:prstGeom>
+          <a:solidFill>
+            <a:srgbClr val="CC7A2E"/>
+          </a:solidFill>
+          <a:ln>
+            <a:noFill/>
+          </a:ln>
+          <a:effectLst/>
+        </p:spPr>
+        <p:style>
+          <a:lnRef idx="1">
+            <a:schemeClr val="accent1"/>
+          </a:lnRef>
+          <a:fillRef idx="3">
+            <a:schemeClr val="accent1"/>
+          </a:fillRef>
+          <a:effectRef idx="2">
+            <a:schemeClr val="accent1"/>
+          </a:effectRef>
+          <a:fontRef idx="minor">
+            <a:schemeClr val="lt1"/>
+          </a:fontRef>
+        </p:style>
+        <p:txBody>
+          <a:bodyPr rtlCol="0" anchor="ctr"/>
+          <a:lstStyle/>
+          <a:p>
+            <a:pPr algn="ctr"/>
+          </a:p>
+        </p:txBody>
+      </p:sp>
+      <p:sp>
+        <p:nvSpPr>
+          <p:cNvPr id="27" name="TextBox 26"/>
+          <p:cNvSpPr txBox="1"/>
+          <p:nvPr/>
+        </p:nvSpPr>
+        <p:spPr>
+          <a:xfrm>
+            <a:off x="457200" y="6675120"/>
+            <a:ext cx="9601200" cy="182880"/>
+          </a:xfrm>
+          <a:prstGeom prst="rect">
+            <a:avLst/>
+          </a:prstGeom>
+          <a:noFill/>
+        </p:spPr>
+        <p:txBody>
+          <a:bodyPr wrap="square" anchor="t" lIns="0" rIns="0" tIns="0" bIns="0">
+            <a:spAutoFit/>
+          </a:bodyPr>
+          <a:lstStyle/>
+          <a:p>
+            <a:pPr algn="l">
+              <a:lnSpc>
+                <a:spcPct val="120000"/>
+              </a:lnSpc>
+            </a:pPr>
+            <a:r>
+              <a:rPr sz="800" b="0" i="1">
+                <a:solidFill>
+                  <a:srgbClr val="6B7280"/>
+                </a:solidFill>
+                <a:latin typeface="Calibri"/>
+              </a:rPr>
+              <a:t>Sources: U.S. DOE REMS 2024 Report · IAEA Milestone Approach</a:t>
+            </a:r>
+          </a:p>
+        </p:txBody>
+      </p:sp>
+      <p:sp>
+        <p:nvSpPr>
+          <p:cNvPr id="28" name="TextBox 27"/>
+          <p:cNvSpPr txBox="1"/>
+          <p:nvPr/>
+        </p:nvSpPr>
+        <p:spPr>
+          <a:xfrm>
+            <a:off x="10424160" y="6675120"/>
+            <a:ext cx="1554480" cy="182880"/>
+          </a:xfrm>
+          <a:prstGeom prst="rect">
+            <a:avLst/>
+          </a:prstGeom>
+          <a:noFill/>
+        </p:spPr>
+        <p:txBody>
+          <a:bodyPr wrap="square" anchor="t" lIns="0" rIns="0" tIns="0" bIns="0">
+            <a:spAutoFit/>
+          </a:bodyPr>
+          <a:lstStyle/>
+          <a:p>
+            <a:pPr algn="r">
+              <a:lnSpc>
+                <a:spcPct val="120000"/>
+              </a:lnSpc>
+            </a:pPr>
+            <a:r>
+              <a:rPr sz="800" b="1" i="0">
+                <a:solidFill>
+                  <a:srgbClr val="2A3344"/>
+                </a:solidFill>
+                <a:latin typeface="Calibri"/>
+              </a:rPr>
+              <a:t>5 / 8  ·  E. Mwaba</a:t>
+            </a:r>
+          </a:p>
+        </p:txBody>
+      </p:sp>
+    </p:spTree>
+  </p:cSld>
+  <p:clrMapOvr>
+    <a:masterClrMapping/>
+  </p:clrMapOvr>
+</p:sld>
+</file>
+
+<file path=ppt/slides/slide6.xml><?xml version="1.0" encoding="utf-8"?>
+<p:sld xmlns:a="http://schemas.openxmlformats.org/drawingml/2006/main" xmlns:p="http://schemas.openxmlformats.org/presentationml/2006/main" xmlns:r="http://schemas.openxmlformats.org/officeDocument/2006/relationships">
+  <p:cSld>
+    <p:bg>
+      <p:bgPr>
+        <a:solidFill>
+          <a:srgbClr val="F7F5F0"/>
+        </a:solidFill>
+        <a:effectLst/>
+      </p:bgPr>
+    </p:bg>
+    <p:spTree>
+      <p:nvGrpSpPr>
+        <p:cNvPr id="1" name=""/>
+        <p:cNvGrpSpPr/>
+        <p:nvPr/>
+      </p:nvGrpSpPr>
+      <p:grpSpPr/>
+      <p:sp>
+        <p:nvSpPr>
+          <p:cNvPr id="2" name="TextBox 1"/>
+          <p:cNvSpPr txBox="1"/>
+          <p:nvPr/>
+        </p:nvSpPr>
+        <p:spPr>
+          <a:xfrm>
+            <a:off x="548640" y="411480"/>
+            <a:ext cx="9144000" cy="274320"/>
+          </a:xfrm>
+          <a:prstGeom prst="rect">
+            <a:avLst/>
+          </a:prstGeom>
+          <a:noFill/>
+        </p:spPr>
+        <p:txBody>
+          <a:bodyPr wrap="square" anchor="t" lIns="0" rIns="0" tIns="0" bIns="0">
+            <a:spAutoFit/>
+          </a:bodyPr>
+          <a:lstStyle/>
+          <a:p>
+            <a:pPr algn="l">
+              <a:lnSpc>
+                <a:spcPct val="120000"/>
+              </a:lnSpc>
+            </a:pPr>
+            <a:r>
+              <a:rPr sz="1100" b="1" i="0">
+                <a:solidFill>
+                  <a:srgbClr val="CC7A2E"/>
+                </a:solidFill>
+                <a:latin typeface="Calibri"/>
+              </a:rPr>
+              <a:t>04  ·  STRATEGIC RESOURCE</a:t>
+            </a:r>
+          </a:p>
+        </p:txBody>
+      </p:sp>
+      <p:sp>
+        <p:nvSpPr>
+          <p:cNvPr id="3" name="TextBox 2"/>
+          <p:cNvSpPr txBox="1"/>
+          <p:nvPr/>
+        </p:nvSpPr>
+        <p:spPr>
+          <a:xfrm>
+            <a:off x="548640" y="685800"/>
+            <a:ext cx="11064240" cy="685800"/>
+          </a:xfrm>
+          <a:prstGeom prst="rect">
+            <a:avLst/>
+          </a:prstGeom>
+          <a:noFill/>
+        </p:spPr>
+        <p:txBody>
+          <a:bodyPr wrap="square" anchor="t" lIns="0" rIns="0" tIns="0" bIns="0">
+            <a:spAutoFit/>
+          </a:bodyPr>
+          <a:lstStyle/>
+          <a:p>
+            <a:pPr algn="l">
+              <a:lnSpc>
+                <a:spcPct val="120000"/>
+              </a:lnSpc>
+            </a:pPr>
+            <a:r>
+              <a:rPr sz="3000" b="1" i="0">
+                <a:solidFill>
+                  <a:srgbClr val="0A1F3D"/>
+                </a:solidFill>
+                <a:latin typeface="Calibri"/>
+              </a:rPr>
+              <a:t>We are sitting on our own fuel.</a:t>
+            </a:r>
+          </a:p>
+        </p:txBody>
+      </p:sp>
+      <p:cxnSp>
+        <p:nvCxnSpPr>
+          <p:cNvPr id="4" name="Connector 3"/>
+          <p:cNvCxnSpPr/>
+          <p:nvPr/>
+        </p:nvCxnSpPr>
+        <p:spPr>
+          <a:xfrm>
+            <a:off x="548640" y="1325880"/>
+            <a:ext cx="1097280" cy="0"/>
+          </a:xfrm>
+          <a:prstGeom prst="line">
+            <a:avLst/>
+          </a:prstGeom>
+          <a:ln w="19050">
+            <a:solidFill>
+              <a:srgbClr val="CC7A2E"/>
+            </a:solidFill>
+          </a:ln>
+        </p:spPr>
+        <p:style>
+          <a:lnRef idx="2">
+            <a:schemeClr val="accent1"/>
+          </a:lnRef>
+          <a:fillRef idx="0">
+            <a:schemeClr val="accent1"/>
+          </a:fillRef>
+          <a:effectRef idx="1">
+            <a:schemeClr val="accent1"/>
+          </a:effectRef>
+          <a:fontRef idx="minor">
+            <a:schemeClr val="tx1"/>
+          </a:fontRef>
+        </p:style>
+      </p:cxnSp>
+      <p:sp>
+        <p:nvSpPr>
+          <p:cNvPr id="5" name="TextBox 4"/>
+          <p:cNvSpPr txBox="1"/>
+          <p:nvPr/>
+        </p:nvSpPr>
+        <p:spPr>
+          <a:xfrm>
+            <a:off x="548640" y="1417320"/>
+            <a:ext cx="11064240" cy="365760"/>
+          </a:xfrm>
+          <a:prstGeom prst="rect">
+            <a:avLst/>
+          </a:prstGeom>
+          <a:noFill/>
+        </p:spPr>
+        <p:txBody>
+          <a:bodyPr wrap="square" anchor="t" lIns="0" rIns="0" tIns="0" bIns="0">
+            <a:spAutoFit/>
+          </a:bodyPr>
+          <a:lstStyle/>
+          <a:p>
+            <a:pPr algn="l">
+              <a:lnSpc>
+                <a:spcPct val="120000"/>
+              </a:lnSpc>
+            </a:pPr>
+            <a:r>
+              <a:rPr sz="1300" b="0" i="1">
+                <a:solidFill>
+                  <a:srgbClr val="6B7280"/>
+                </a:solidFill>
+                <a:latin typeface="Calibri"/>
+              </a:rPr>
+              <a:t>Zambia exports raw uranium today. It can fuel domestic reactors tomorrow.</a:t>
+            </a:r>
+          </a:p>
+        </p:txBody>
+      </p:sp>
+      <p:sp>
+        <p:nvSpPr>
+          <p:cNvPr id="6" name="Rectangle 5"/>
+          <p:cNvSpPr/>
+          <p:nvPr/>
+        </p:nvSpPr>
+        <p:spPr>
+          <a:xfrm>
+            <a:off x="548640" y="2011680"/>
+            <a:ext cx="5943600" cy="4206240"/>
+          </a:xfrm>
+          <a:prstGeom prst="rect">
+            <a:avLst/>
+          </a:prstGeom>
+          <a:solidFill>
+            <a:srgbClr val="0A1F3D"/>
+          </a:solidFill>
+          <a:ln>
+            <a:noFill/>
+          </a:ln>
+          <a:effectLst/>
+        </p:spPr>
+        <p:style>
+          <a:lnRef idx="1">
+            <a:schemeClr val="accent1"/>
+          </a:lnRef>
+          <a:fillRef idx="3">
+            <a:schemeClr val="accent1"/>
+          </a:fillRef>
+          <a:effectRef idx="2">
+            <a:schemeClr val="accent1"/>
+          </a:effectRef>
+          <a:fontRef idx="minor">
+            <a:schemeClr val="lt1"/>
+          </a:fontRef>
+        </p:style>
+        <p:txBody>
+          <a:bodyPr rtlCol="0" anchor="ctr"/>
+          <a:lstStyle/>
+          <a:p>
+            <a:pPr algn="ctr"/>
+          </a:p>
+        </p:txBody>
+      </p:sp>
+      <p:sp>
+        <p:nvSpPr>
+          <p:cNvPr id="7" name="Rectangle 6"/>
+          <p:cNvSpPr/>
+          <p:nvPr/>
+        </p:nvSpPr>
+        <p:spPr>
+          <a:xfrm>
+            <a:off x="548640" y="2011680"/>
+            <a:ext cx="5943600" cy="91440"/>
+          </a:xfrm>
+          <a:prstGeom prst="rect">
+            <a:avLst/>
+          </a:prstGeom>
+          <a:solidFill>
+            <a:srgbClr val="CC7A2E"/>
+          </a:solidFill>
+          <a:ln>
+            <a:noFill/>
+          </a:ln>
+          <a:effectLst/>
+        </p:spPr>
+        <p:style>
+          <a:lnRef idx="1">
+            <a:schemeClr val="accent1"/>
+          </a:lnRef>
+          <a:fillRef idx="3">
+            <a:schemeClr val="accent1"/>
+          </a:fillRef>
+          <a:effectRef idx="2">
+            <a:schemeClr val="accent1"/>
+          </a:effectRef>
+          <a:fontRef idx="minor">
+            <a:schemeClr val="lt1"/>
+          </a:fontRef>
+        </p:style>
+        <p:txBody>
+          <a:bodyPr rtlCol="0" anchor="ctr"/>
+          <a:lstStyle/>
+          <a:p>
+            <a:pPr algn="ctr"/>
+          </a:p>
+        </p:txBody>
+      </p:sp>
+      <p:sp>
+        <p:nvSpPr>
+          <p:cNvPr id="8" name="TextBox 7"/>
+          <p:cNvSpPr txBox="1"/>
+          <p:nvPr/>
+        </p:nvSpPr>
+        <p:spPr>
+          <a:xfrm>
+            <a:off x="777240" y="2194560"/>
+            <a:ext cx="5486400" cy="320040"/>
+          </a:xfrm>
+          <a:prstGeom prst="rect">
+            <a:avLst/>
+          </a:prstGeom>
+          <a:noFill/>
+        </p:spPr>
+        <p:txBody>
+          <a:bodyPr wrap="square" anchor="t" lIns="0" rIns="0" tIns="0" bIns="0">
+            <a:spAutoFit/>
+          </a:bodyPr>
+          <a:lstStyle/>
+          <a:p>
+            <a:pPr algn="l">
+              <a:lnSpc>
+                <a:spcPct val="120000"/>
+              </a:lnSpc>
+            </a:pPr>
+            <a:r>
+              <a:rPr sz="1100" b="1" i="0">
+                <a:solidFill>
+                  <a:srgbClr val="E8A860"/>
+                </a:solidFill>
+                <a:latin typeface="Calibri"/>
+              </a:rPr>
+              <a:t>KNOWN URANIUM-BEARING ZONES — ZAMBIA</a:t>
+            </a:r>
+          </a:p>
+        </p:txBody>
+      </p:sp>
+      <p:sp>
+        <p:nvSpPr>
+          <p:cNvPr id="9" name="Rectangle 8"/>
+          <p:cNvSpPr/>
+          <p:nvPr/>
+        </p:nvSpPr>
+        <p:spPr>
+          <a:xfrm>
+            <a:off x="777240" y="2606040"/>
+            <a:ext cx="5486400" cy="1051560"/>
+          </a:xfrm>
+          <a:prstGeom prst="rect">
+            <a:avLst/>
+          </a:prstGeom>
+          <a:solidFill>
+            <a:srgbClr val="12284A"/>
+          </a:solidFill>
+          <a:ln>
+            <a:noFill/>
+          </a:ln>
+          <a:effectLst/>
+        </p:spPr>
+        <p:style>
+          <a:lnRef idx="1">
+            <a:schemeClr val="accent1"/>
+          </a:lnRef>
+          <a:fillRef idx="3">
+            <a:schemeClr val="accent1"/>
+          </a:fillRef>
+          <a:effectRef idx="2">
+            <a:schemeClr val="accent1"/>
+          </a:effectRef>
+          <a:fontRef idx="minor">
+            <a:schemeClr val="lt1"/>
+          </a:fontRef>
+        </p:style>
+        <p:txBody>
+          <a:bodyPr rtlCol="0" anchor="ctr"/>
+          <a:lstStyle/>
+          <a:p>
+            <a:pPr algn="ctr"/>
+          </a:p>
+        </p:txBody>
+      </p:sp>
+      <p:sp>
+        <p:nvSpPr>
+          <p:cNvPr id="10" name="Rectangle 9"/>
+          <p:cNvSpPr/>
+          <p:nvPr/>
+        </p:nvSpPr>
+        <p:spPr>
+          <a:xfrm>
+            <a:off x="777240" y="2606040"/>
+            <a:ext cx="73152" cy="1051560"/>
+          </a:xfrm>
+          <a:prstGeom prst="rect">
+            <a:avLst/>
+          </a:prstGeom>
+          <a:solidFill>
+            <a:srgbClr val="CC7A2E"/>
+          </a:solidFill>
+          <a:ln>
+            <a:noFill/>
+          </a:ln>
+          <a:effectLst/>
+        </p:spPr>
+        <p:style>
+          <a:lnRef idx="1">
+            <a:schemeClr val="accent1"/>
+          </a:lnRef>
+          <a:fillRef idx="3">
+            <a:schemeClr val="accent1"/>
+          </a:fillRef>
+          <a:effectRef idx="2">
+            <a:schemeClr val="accent1"/>
+          </a:effectRef>
+          <a:fontRef idx="minor">
+            <a:schemeClr val="lt1"/>
+          </a:fontRef>
+        </p:style>
+        <p:txBody>
+          <a:bodyPr rtlCol="0" anchor="ctr"/>
+          <a:lstStyle/>
+          <a:p>
+            <a:pPr algn="ctr"/>
+          </a:p>
+        </p:txBody>
+      </p:sp>
+      <p:sp>
+        <p:nvSpPr>
+          <p:cNvPr id="11" name="TextBox 10"/>
+          <p:cNvSpPr txBox="1"/>
+          <p:nvPr/>
+        </p:nvSpPr>
+        <p:spPr>
+          <a:xfrm>
+            <a:off x="960120" y="2679192"/>
+            <a:ext cx="5303520" cy="274320"/>
+          </a:xfrm>
+          <a:prstGeom prst="rect">
+            <a:avLst/>
+          </a:prstGeom>
+          <a:noFill/>
+        </p:spPr>
+        <p:txBody>
+          <a:bodyPr wrap="square" anchor="t" lIns="0" rIns="0" tIns="0" bIns="0">
+            <a:spAutoFit/>
+          </a:bodyPr>
+          <a:lstStyle/>
+          <a:p>
+            <a:pPr algn="l">
+              <a:lnSpc>
+                <a:spcPct val="120000"/>
+              </a:lnSpc>
+            </a:pPr>
+            <a:r>
+              <a:rPr sz="1300" b="1" i="0">
+                <a:solidFill>
+                  <a:srgbClr val="FFFFFF"/>
+                </a:solidFill>
+                <a:latin typeface="Calibri"/>
+              </a:rPr>
+              <a:t>LUMWANA / KANYEMBA</a:t>
+            </a:r>
+          </a:p>
+        </p:txBody>
+      </p:sp>
+      <p:sp>
+        <p:nvSpPr>
+          <p:cNvPr id="12" name="TextBox 11"/>
+          <p:cNvSpPr txBox="1"/>
+          <p:nvPr/>
+        </p:nvSpPr>
+        <p:spPr>
+          <a:xfrm>
+            <a:off x="960120" y="2935224"/>
+            <a:ext cx="5303520" cy="274320"/>
+          </a:xfrm>
+          <a:prstGeom prst="rect">
+            <a:avLst/>
+          </a:prstGeom>
+          <a:noFill/>
+        </p:spPr>
+        <p:txBody>
+          <a:bodyPr wrap="square" anchor="t" lIns="0" rIns="0" tIns="0" bIns="0">
+            <a:spAutoFit/>
+          </a:bodyPr>
+          <a:lstStyle/>
+          <a:p>
+            <a:pPr algn="l">
+              <a:lnSpc>
+                <a:spcPct val="120000"/>
+              </a:lnSpc>
+            </a:pPr>
+            <a:r>
+              <a:rPr sz="1000" b="0" i="1">
+                <a:solidFill>
+                  <a:srgbClr val="E8A860"/>
+                </a:solidFill>
+                <a:latin typeface="Calibri"/>
+              </a:rPr>
+              <a:t>North-Western Province</a:t>
+            </a:r>
+          </a:p>
+        </p:txBody>
+      </p:sp>
+      <p:sp>
+        <p:nvSpPr>
+          <p:cNvPr id="13" name="TextBox 12"/>
+          <p:cNvSpPr txBox="1"/>
+          <p:nvPr/>
+        </p:nvSpPr>
+        <p:spPr>
+          <a:xfrm>
+            <a:off x="960120" y="3172968"/>
+            <a:ext cx="5303520" cy="457200"/>
+          </a:xfrm>
+          <a:prstGeom prst="rect">
+            <a:avLst/>
+          </a:prstGeom>
+          <a:noFill/>
+        </p:spPr>
+        <p:txBody>
+          <a:bodyPr wrap="square" anchor="t" lIns="0" rIns="0" tIns="0" bIns="0">
+            <a:spAutoFit/>
+          </a:bodyPr>
+          <a:lstStyle/>
+          <a:p>
+            <a:pPr algn="l">
+              <a:lnSpc>
+                <a:spcPct val="130000"/>
+              </a:lnSpc>
+            </a:pPr>
+            <a:r>
+              <a:rPr sz="1100" b="0" i="0">
+                <a:solidFill>
+                  <a:srgbClr val="CFD8E3"/>
+                </a:solidFill>
+                <a:latin typeface="Calibri"/>
+              </a:rPr>
+              <a:t>Uranium recovered as by-product of copper mining; previously stockpiled by Barrick.</a:t>
+            </a:r>
+          </a:p>
+        </p:txBody>
+      </p:sp>
+      <p:sp>
+        <p:nvSpPr>
+          <p:cNvPr id="14" name="Rectangle 13"/>
+          <p:cNvSpPr/>
+          <p:nvPr/>
+        </p:nvSpPr>
+        <p:spPr>
+          <a:xfrm>
+            <a:off x="777240" y="3767328"/>
+            <a:ext cx="5486400" cy="1051560"/>
+          </a:xfrm>
+          <a:prstGeom prst="rect">
+            <a:avLst/>
+          </a:prstGeom>
+          <a:solidFill>
+            <a:srgbClr val="12284A"/>
+          </a:solidFill>
+          <a:ln>
+            <a:noFill/>
+          </a:ln>
+          <a:effectLst/>
+        </p:spPr>
+        <p:style>
+          <a:lnRef idx="1">
+            <a:schemeClr val="accent1"/>
+          </a:lnRef>
+          <a:fillRef idx="3">
+            <a:schemeClr val="accent1"/>
+          </a:fillRef>
+          <a:effectRef idx="2">
+            <a:schemeClr val="accent1"/>
+          </a:effectRef>
+          <a:fontRef idx="minor">
+            <a:schemeClr val="lt1"/>
+          </a:fontRef>
+        </p:style>
+        <p:txBody>
+          <a:bodyPr rtlCol="0" anchor="ctr"/>
+          <a:lstStyle/>
+          <a:p>
+            <a:pPr algn="ctr"/>
+          </a:p>
+        </p:txBody>
+      </p:sp>
+      <p:sp>
+        <p:nvSpPr>
+          <p:cNvPr id="15" name="Rectangle 14"/>
+          <p:cNvSpPr/>
+          <p:nvPr/>
+        </p:nvSpPr>
+        <p:spPr>
+          <a:xfrm>
+            <a:off x="777240" y="3767328"/>
+            <a:ext cx="73152" cy="1051560"/>
+          </a:xfrm>
+          <a:prstGeom prst="rect">
+            <a:avLst/>
+          </a:prstGeom>
+          <a:solidFill>
+            <a:srgbClr val="CC7A2E"/>
+          </a:solidFill>
+          <a:ln>
+            <a:noFill/>
+          </a:ln>
+          <a:effectLst/>
+        </p:spPr>
+        <p:style>
+          <a:lnRef idx="1">
+            <a:schemeClr val="accent1"/>
+          </a:lnRef>
+          <a:fillRef idx="3">
+            <a:schemeClr val="accent1"/>
+          </a:fillRef>
+          <a:effectRef idx="2">
+            <a:schemeClr val="accent1"/>
+          </a:effectRef>
+          <a:fontRef idx="minor">
+            <a:schemeClr val="lt1"/>
+          </a:fontRef>
+        </p:style>
+        <p:txBody>
+          <a:bodyPr rtlCol="0" anchor="ctr"/>
+          <a:lstStyle/>
+          <a:p>
+            <a:pPr algn="ctr"/>
+          </a:p>
+        </p:txBody>
+      </p:sp>
+      <p:sp>
+        <p:nvSpPr>
+          <p:cNvPr id="16" name="TextBox 15"/>
+          <p:cNvSpPr txBox="1"/>
+          <p:nvPr/>
+        </p:nvSpPr>
+        <p:spPr>
+          <a:xfrm>
+            <a:off x="960120" y="3840480"/>
+            <a:ext cx="5303520" cy="274320"/>
+          </a:xfrm>
+          <a:prstGeom prst="rect">
+            <a:avLst/>
+          </a:prstGeom>
+          <a:noFill/>
+        </p:spPr>
+        <p:txBody>
+          <a:bodyPr wrap="square" anchor="t" lIns="0" rIns="0" tIns="0" bIns="0">
+            <a:spAutoFit/>
+          </a:bodyPr>
+          <a:lstStyle/>
+          <a:p>
+            <a:pPr algn="l">
+              <a:lnSpc>
+                <a:spcPct val="120000"/>
+              </a:lnSpc>
+            </a:pPr>
+            <a:r>
+              <a:rPr sz="1300" b="1" i="0">
+                <a:solidFill>
+                  <a:srgbClr val="FFFFFF"/>
+                </a:solidFill>
+                <a:latin typeface="Calibri"/>
+              </a:rPr>
+              <a:t>GWEMBE / SIAVONGA BELT</a:t>
+            </a:r>
+          </a:p>
+        </p:txBody>
+      </p:sp>
+      <p:sp>
+        <p:nvSpPr>
+          <p:cNvPr id="17" name="TextBox 16"/>
+          <p:cNvSpPr txBox="1"/>
+          <p:nvPr/>
+        </p:nvSpPr>
+        <p:spPr>
+          <a:xfrm>
+            <a:off x="960120" y="4096512"/>
+            <a:ext cx="5303520" cy="274320"/>
+          </a:xfrm>
+          <a:prstGeom prst="rect">
+            <a:avLst/>
+          </a:prstGeom>
+          <a:noFill/>
+        </p:spPr>
+        <p:txBody>
+          <a:bodyPr wrap="square" anchor="t" lIns="0" rIns="0" tIns="0" bIns="0">
+            <a:spAutoFit/>
+          </a:bodyPr>
+          <a:lstStyle/>
+          <a:p>
+            <a:pPr algn="l">
+              <a:lnSpc>
+                <a:spcPct val="120000"/>
+              </a:lnSpc>
+            </a:pPr>
+            <a:r>
+              <a:rPr sz="1000" b="0" i="1">
+                <a:solidFill>
+                  <a:srgbClr val="E8A860"/>
+                </a:solidFill>
+                <a:latin typeface="Calibri"/>
+              </a:rPr>
+              <a:t>Southern Province</a:t>
+            </a:r>
+          </a:p>
+        </p:txBody>
+      </p:sp>
+      <p:sp>
+        <p:nvSpPr>
+          <p:cNvPr id="18" name="TextBox 17"/>
+          <p:cNvSpPr txBox="1"/>
+          <p:nvPr/>
+        </p:nvSpPr>
+        <p:spPr>
+          <a:xfrm>
+            <a:off x="960120" y="4334256"/>
+            <a:ext cx="5303520" cy="457200"/>
+          </a:xfrm>
+          <a:prstGeom prst="rect">
+            <a:avLst/>
+          </a:prstGeom>
+          <a:noFill/>
+        </p:spPr>
+        <p:txBody>
+          <a:bodyPr wrap="square" anchor="t" lIns="0" rIns="0" tIns="0" bIns="0">
+            <a:spAutoFit/>
+          </a:bodyPr>
+          <a:lstStyle/>
+          <a:p>
+            <a:pPr algn="l">
+              <a:lnSpc>
+                <a:spcPct val="130000"/>
+              </a:lnSpc>
+            </a:pPr>
+            <a:r>
+              <a:rPr sz="1100" b="0" i="0">
+                <a:solidFill>
+                  <a:srgbClr val="CFD8E3"/>
+                </a:solidFill>
+                <a:latin typeface="Calibri"/>
+              </a:rPr>
+              <a:t>Karoo-type sandstone uranium; site of the 2024 Siavonga Baseline Survey.</a:t>
+            </a:r>
+          </a:p>
+        </p:txBody>
+      </p:sp>
+      <p:sp>
+        <p:nvSpPr>
+          <p:cNvPr id="19" name="Rectangle 18"/>
+          <p:cNvSpPr/>
+          <p:nvPr/>
+        </p:nvSpPr>
+        <p:spPr>
+          <a:xfrm>
+            <a:off x="777240" y="4928616"/>
+            <a:ext cx="5486400" cy="1051560"/>
+          </a:xfrm>
+          <a:prstGeom prst="rect">
+            <a:avLst/>
+          </a:prstGeom>
+          <a:solidFill>
+            <a:srgbClr val="12284A"/>
+          </a:solidFill>
+          <a:ln>
+            <a:noFill/>
+          </a:ln>
+          <a:effectLst/>
+        </p:spPr>
+        <p:style>
+          <a:lnRef idx="1">
+            <a:schemeClr val="accent1"/>
+          </a:lnRef>
+          <a:fillRef idx="3">
+            <a:schemeClr val="accent1"/>
+          </a:fillRef>
+          <a:effectRef idx="2">
+            <a:schemeClr val="accent1"/>
+          </a:effectRef>
+          <a:fontRef idx="minor">
+            <a:schemeClr val="lt1"/>
+          </a:fontRef>
+        </p:style>
+        <p:txBody>
+          <a:bodyPr rtlCol="0" anchor="ctr"/>
+          <a:lstStyle/>
+          <a:p>
+            <a:pPr algn="ctr"/>
+          </a:p>
+        </p:txBody>
+      </p:sp>
+      <p:sp>
+        <p:nvSpPr>
+          <p:cNvPr id="20" name="Rectangle 19"/>
+          <p:cNvSpPr/>
+          <p:nvPr/>
+        </p:nvSpPr>
+        <p:spPr>
+          <a:xfrm>
+            <a:off x="777240" y="4928616"/>
+            <a:ext cx="73152" cy="1051560"/>
+          </a:xfrm>
+          <a:prstGeom prst="rect">
+            <a:avLst/>
+          </a:prstGeom>
+          <a:solidFill>
+            <a:srgbClr val="CC7A2E"/>
+          </a:solidFill>
+          <a:ln>
+            <a:noFill/>
+          </a:ln>
+          <a:effectLst/>
+        </p:spPr>
+        <p:style>
+          <a:lnRef idx="1">
+            <a:schemeClr val="accent1"/>
+          </a:lnRef>
+          <a:fillRef idx="3">
+            <a:schemeClr val="accent1"/>
+          </a:fillRef>
+          <a:effectRef idx="2">
+            <a:schemeClr val="accent1"/>
+          </a:effectRef>
+          <a:fontRef idx="minor">
+            <a:schemeClr val="lt1"/>
+          </a:fontRef>
+        </p:style>
+        <p:txBody>
+          <a:bodyPr rtlCol="0" anchor="ctr"/>
+          <a:lstStyle/>
+          <a:p>
+            <a:pPr algn="ctr"/>
+          </a:p>
+        </p:txBody>
+      </p:sp>
+      <p:sp>
+        <p:nvSpPr>
+          <p:cNvPr id="21" name="TextBox 20"/>
+          <p:cNvSpPr txBox="1"/>
+          <p:nvPr/>
+        </p:nvSpPr>
+        <p:spPr>
+          <a:xfrm>
+            <a:off x="960120" y="5001768"/>
+            <a:ext cx="5303520" cy="274320"/>
+          </a:xfrm>
+          <a:prstGeom prst="rect">
+            <a:avLst/>
+          </a:prstGeom>
+          <a:noFill/>
+        </p:spPr>
+        <p:txBody>
+          <a:bodyPr wrap="square" anchor="t" lIns="0" rIns="0" tIns="0" bIns="0">
+            <a:spAutoFit/>
+          </a:bodyPr>
+          <a:lstStyle/>
+          <a:p>
+            <a:pPr algn="l">
+              <a:lnSpc>
+                <a:spcPct val="120000"/>
+              </a:lnSpc>
+            </a:pPr>
+            <a:r>
+              <a:rPr sz="1300" b="1" i="0">
+                <a:solidFill>
+                  <a:srgbClr val="FFFFFF"/>
+                </a:solidFill>
+                <a:latin typeface="Calibri"/>
+              </a:rPr>
+              <a:t>MUTANGA / DIBWE</a:t>
+            </a:r>
+          </a:p>
+        </p:txBody>
+      </p:sp>
+      <p:sp>
+        <p:nvSpPr>
+          <p:cNvPr id="22" name="TextBox 21"/>
+          <p:cNvSpPr txBox="1"/>
+          <p:nvPr/>
+        </p:nvSpPr>
+        <p:spPr>
+          <a:xfrm>
+            <a:off x="960120" y="5257800"/>
+            <a:ext cx="5303520" cy="274320"/>
+          </a:xfrm>
+          <a:prstGeom prst="rect">
+            <a:avLst/>
+          </a:prstGeom>
+          <a:noFill/>
+        </p:spPr>
+        <p:txBody>
+          <a:bodyPr wrap="square" anchor="t" lIns="0" rIns="0" tIns="0" bIns="0">
+            <a:spAutoFit/>
+          </a:bodyPr>
+          <a:lstStyle/>
+          <a:p>
+            <a:pPr algn="l">
+              <a:lnSpc>
+                <a:spcPct val="120000"/>
+              </a:lnSpc>
+            </a:pPr>
+            <a:r>
+              <a:rPr sz="1000" b="0" i="1">
+                <a:solidFill>
+                  <a:srgbClr val="E8A860"/>
+                </a:solidFill>
+                <a:latin typeface="Calibri"/>
+              </a:rPr>
+              <a:t>Southern Province</a:t>
+            </a:r>
+          </a:p>
+        </p:txBody>
+      </p:sp>
+      <p:sp>
+        <p:nvSpPr>
+          <p:cNvPr id="23" name="TextBox 22"/>
+          <p:cNvSpPr txBox="1"/>
+          <p:nvPr/>
+        </p:nvSpPr>
+        <p:spPr>
+          <a:xfrm>
+            <a:off x="960120" y="5495544"/>
+            <a:ext cx="5303520" cy="457200"/>
+          </a:xfrm>
+          <a:prstGeom prst="rect">
+            <a:avLst/>
+          </a:prstGeom>
+          <a:noFill/>
+        </p:spPr>
+        <p:txBody>
+          <a:bodyPr wrap="square" anchor="t" lIns="0" rIns="0" tIns="0" bIns="0">
+            <a:spAutoFit/>
+          </a:bodyPr>
+          <a:lstStyle/>
+          <a:p>
+            <a:pPr algn="l">
+              <a:lnSpc>
+                <a:spcPct val="130000"/>
+              </a:lnSpc>
+            </a:pPr>
+            <a:r>
+              <a:rPr sz="1100" b="0" i="0">
+                <a:solidFill>
+                  <a:srgbClr val="CFD8E3"/>
+                </a:solidFill>
+                <a:latin typeface="Calibri"/>
+              </a:rPr>
+              <a:t>Defined uranium resource under historical GoviEx / African Energy permits.</a:t>
+            </a:r>
+          </a:p>
+        </p:txBody>
+      </p:sp>
+      <p:sp>
+        <p:nvSpPr>
+          <p:cNvPr id="24" name="Rectangle 23"/>
+          <p:cNvSpPr/>
+          <p:nvPr/>
+        </p:nvSpPr>
+        <p:spPr>
+          <a:xfrm>
+            <a:off x="6675120" y="2011680"/>
+            <a:ext cx="4937760" cy="4206240"/>
+          </a:xfrm>
+          <a:prstGeom prst="rect">
+            <a:avLst/>
+          </a:prstGeom>
+          <a:solidFill>
+            <a:srgbClr val="FFFFFF"/>
+          </a:solidFill>
+          <a:ln>
+            <a:noFill/>
+          </a:ln>
+          <a:effectLst/>
+        </p:spPr>
+        <p:style>
+          <a:lnRef idx="1">
+            <a:schemeClr val="accent1"/>
+          </a:lnRef>
+          <a:fillRef idx="3">
+            <a:schemeClr val="accent1"/>
+          </a:fillRef>
+          <a:effectRef idx="2">
+            <a:schemeClr val="accent1"/>
+          </a:effectRef>
+          <a:fontRef idx="minor">
+            <a:schemeClr val="lt1"/>
+          </a:fontRef>
+        </p:style>
+        <p:txBody>
+          <a:bodyPr rtlCol="0" anchor="ctr"/>
+          <a:lstStyle/>
+          <a:p>
+            <a:pPr algn="ctr"/>
+          </a:p>
+        </p:txBody>
+      </p:sp>
+      <p:sp>
+        <p:nvSpPr>
+          <p:cNvPr id="25" name="Rectangle 24"/>
+          <p:cNvSpPr/>
+          <p:nvPr/>
+        </p:nvSpPr>
+        <p:spPr>
+          <a:xfrm>
+            <a:off x="6675120" y="2011680"/>
+            <a:ext cx="109728" cy="4206240"/>
+          </a:xfrm>
+          <a:prstGeom prst="rect">
+            <a:avLst/>
+          </a:prstGeom>
+          <a:solidFill>
+            <a:srgbClr val="CC7A2E"/>
+          </a:solidFill>
+          <a:ln>
+            <a:noFill/>
+          </a:ln>
+          <a:effectLst/>
+        </p:spPr>
+        <p:style>
+          <a:lnRef idx="1">
+            <a:schemeClr val="accent1"/>
+          </a:lnRef>
+          <a:fillRef idx="3">
+            <a:schemeClr val="accent1"/>
+          </a:fillRef>
+          <a:effectRef idx="2">
+            <a:schemeClr val="accent1"/>
+          </a:effectRef>
+          <a:fontRef idx="minor">
+            <a:schemeClr val="lt1"/>
+          </a:fontRef>
+        </p:style>
+        <p:txBody>
+          <a:bodyPr rtlCol="0" anchor="ctr"/>
+          <a:lstStyle/>
+          <a:p>
+            <a:pPr algn="ctr"/>
+          </a:p>
+        </p:txBody>
+      </p:sp>
+      <p:sp>
+        <p:nvSpPr>
+          <p:cNvPr id="26" name="TextBox 25"/>
+          <p:cNvSpPr txBox="1"/>
+          <p:nvPr/>
+        </p:nvSpPr>
+        <p:spPr>
+          <a:xfrm>
+            <a:off x="6903720" y="2148840"/>
+            <a:ext cx="4572000" cy="320040"/>
+          </a:xfrm>
+          <a:prstGeom prst="rect">
+            <a:avLst/>
+          </a:prstGeom>
+          <a:noFill/>
+        </p:spPr>
+        <p:txBody>
+          <a:bodyPr wrap="square" anchor="t" lIns="0" rIns="0" tIns="0" bIns="0">
+            <a:spAutoFit/>
+          </a:bodyPr>
+          <a:lstStyle/>
+          <a:p>
+            <a:pPr algn="l">
+              <a:lnSpc>
+                <a:spcPct val="120000"/>
+              </a:lnSpc>
+            </a:pPr>
+            <a:r>
+              <a:rPr sz="1100" b="1" i="0">
+                <a:solidFill>
+                  <a:srgbClr val="CC7A2E"/>
+                </a:solidFill>
+                <a:latin typeface="Calibri"/>
+              </a:rPr>
+              <a:t>THE VALUE-CHAIN PIVOT</a:t>
+            </a:r>
+          </a:p>
+        </p:txBody>
+      </p:sp>
+      <p:sp>
+        <p:nvSpPr>
+          <p:cNvPr id="27" name="TextBox 26"/>
+          <p:cNvSpPr txBox="1"/>
+          <p:nvPr/>
+        </p:nvSpPr>
+        <p:spPr>
+          <a:xfrm>
+            <a:off x="6903720" y="2606040"/>
+            <a:ext cx="4572000" cy="274320"/>
+          </a:xfrm>
+          <a:prstGeom prst="rect">
+            <a:avLst/>
+          </a:prstGeom>
+          <a:noFill/>
+        </p:spPr>
+        <p:txBody>
+          <a:bodyPr wrap="square" anchor="t" lIns="0" rIns="0" tIns="0" bIns="0">
+            <a:spAutoFit/>
+          </a:bodyPr>
+          <a:lstStyle/>
+          <a:p>
+            <a:pPr algn="l">
+              <a:lnSpc>
+                <a:spcPct val="120000"/>
+              </a:lnSpc>
+            </a:pPr>
+            <a:r>
+              <a:rPr sz="1100" b="1" i="0">
+                <a:solidFill>
+                  <a:srgbClr val="0A1F3D"/>
+                </a:solidFill>
+                <a:latin typeface="Calibri"/>
+              </a:rPr>
+              <a:t>TODAY</a:t>
+            </a:r>
+          </a:p>
+        </p:txBody>
+      </p:sp>
+      <p:sp>
+        <p:nvSpPr>
+          <p:cNvPr id="28" name="TextBox 27"/>
+          <p:cNvSpPr txBox="1"/>
+          <p:nvPr/>
+        </p:nvSpPr>
+        <p:spPr>
+          <a:xfrm>
+            <a:off x="6903720" y="2880360"/>
+            <a:ext cx="4572000" cy="960120"/>
+          </a:xfrm>
+          <a:prstGeom prst="rect">
+            <a:avLst/>
+          </a:prstGeom>
+          <a:noFill/>
+        </p:spPr>
+        <p:txBody>
+          <a:bodyPr wrap="square" anchor="t" lIns="0" rIns="0" tIns="0" bIns="0">
+            <a:spAutoFit/>
+          </a:bodyPr>
+          <a:lstStyle/>
+          <a:p>
+            <a:pPr algn="l">
+              <a:lnSpc>
+                <a:spcPct val="130000"/>
+              </a:lnSpc>
+            </a:pPr>
+            <a:r>
+              <a:rPr sz="1100" b="0" i="0">
+                <a:solidFill>
+                  <a:srgbClr val="121824"/>
+                </a:solidFill>
+                <a:latin typeface="Calibri"/>
+              </a:rPr>
+              <a:t>Raw-mineral exporter — uranium leaves Zambia for enrichment elsewhere; we capture wellhead value only.</a:t>
+            </a:r>
+          </a:p>
+        </p:txBody>
+      </p:sp>
+      <p:sp>
+        <p:nvSpPr>
+          <p:cNvPr id="29" name="TextBox 28"/>
+          <p:cNvSpPr txBox="1"/>
+          <p:nvPr/>
+        </p:nvSpPr>
+        <p:spPr>
+          <a:xfrm>
+            <a:off x="6903720" y="3794760"/>
+            <a:ext cx="4572000" cy="274320"/>
+          </a:xfrm>
+          <a:prstGeom prst="rect">
+            <a:avLst/>
+          </a:prstGeom>
+          <a:noFill/>
+        </p:spPr>
+        <p:txBody>
+          <a:bodyPr wrap="square" anchor="t" lIns="0" rIns="0" tIns="0" bIns="0">
+            <a:spAutoFit/>
+          </a:bodyPr>
+          <a:lstStyle/>
+          <a:p>
+            <a:pPr algn="l">
+              <a:lnSpc>
+                <a:spcPct val="120000"/>
+              </a:lnSpc>
+            </a:pPr>
+            <a:r>
+              <a:rPr sz="1100" b="1" i="0">
+                <a:solidFill>
+                  <a:srgbClr val="0A1F3D"/>
+                </a:solidFill>
+                <a:latin typeface="Calibri"/>
+              </a:rPr>
+              <a:t>WITH NUCLEAR POWER</a:t>
+            </a:r>
+          </a:p>
+        </p:txBody>
+      </p:sp>
+      <p:sp>
+        <p:nvSpPr>
+          <p:cNvPr id="30" name="TextBox 29"/>
+          <p:cNvSpPr txBox="1"/>
+          <p:nvPr/>
+        </p:nvSpPr>
+        <p:spPr>
+          <a:xfrm>
+            <a:off x="6903720" y="4069080"/>
+            <a:ext cx="4572000" cy="960120"/>
+          </a:xfrm>
+          <a:prstGeom prst="rect">
+            <a:avLst/>
+          </a:prstGeom>
+          <a:noFill/>
+        </p:spPr>
+        <p:txBody>
+          <a:bodyPr wrap="square" anchor="t" lIns="0" rIns="0" tIns="0" bIns="0">
+            <a:spAutoFit/>
+          </a:bodyPr>
+          <a:lstStyle/>
+          <a:p>
+            <a:pPr algn="l">
+              <a:lnSpc>
+                <a:spcPct val="130000"/>
+              </a:lnSpc>
+            </a:pPr>
+            <a:r>
+              <a:rPr sz="1100" b="0" i="0">
+                <a:solidFill>
+                  <a:srgbClr val="121824"/>
+                </a:solidFill>
+                <a:latin typeface="Calibri"/>
+              </a:rPr>
+              <a:t>High-tech energy producer — domestic fuel flows into domestic baseload supporting mines, smelters, hospitals.</a:t>
+            </a:r>
+          </a:p>
+        </p:txBody>
+      </p:sp>
+      <p:sp>
+        <p:nvSpPr>
+          <p:cNvPr id="31" name="TextBox 30"/>
+          <p:cNvSpPr txBox="1"/>
+          <p:nvPr/>
+        </p:nvSpPr>
+        <p:spPr>
+          <a:xfrm>
+            <a:off x="6903720" y="4983480"/>
+            <a:ext cx="4572000" cy="274320"/>
+          </a:xfrm>
+          <a:prstGeom prst="rect">
+            <a:avLst/>
+          </a:prstGeom>
+          <a:noFill/>
+        </p:spPr>
+        <p:txBody>
+          <a:bodyPr wrap="square" anchor="t" lIns="0" rIns="0" tIns="0" bIns="0">
+            <a:spAutoFit/>
+          </a:bodyPr>
+          <a:lstStyle/>
+          <a:p>
+            <a:pPr algn="l">
+              <a:lnSpc>
+                <a:spcPct val="120000"/>
+              </a:lnSpc>
+            </a:pPr>
+            <a:r>
+              <a:rPr sz="1100" b="1" i="0">
+                <a:solidFill>
+                  <a:srgbClr val="0A1F3D"/>
+                </a:solidFill>
+                <a:latin typeface="Calibri"/>
+              </a:rPr>
+              <a:t>STRATEGIC UPSIDE</a:t>
+            </a:r>
+          </a:p>
+        </p:txBody>
+      </p:sp>
+      <p:sp>
+        <p:nvSpPr>
+          <p:cNvPr id="32" name="TextBox 31"/>
+          <p:cNvSpPr txBox="1"/>
+          <p:nvPr/>
+        </p:nvSpPr>
+        <p:spPr>
+          <a:xfrm>
+            <a:off x="6903720" y="5257800"/>
+            <a:ext cx="4572000" cy="960120"/>
+          </a:xfrm>
+          <a:prstGeom prst="rect">
+            <a:avLst/>
+          </a:prstGeom>
+          <a:noFill/>
+        </p:spPr>
+        <p:txBody>
+          <a:bodyPr wrap="square" anchor="t" lIns="0" rIns="0" tIns="0" bIns="0">
+            <a:spAutoFit/>
+          </a:bodyPr>
+          <a:lstStyle/>
+          <a:p>
+            <a:pPr algn="l">
+              <a:lnSpc>
+                <a:spcPct val="130000"/>
+              </a:lnSpc>
+            </a:pPr>
+            <a:r>
+              <a:rPr sz="1100" b="0" i="0">
+                <a:solidFill>
+                  <a:srgbClr val="121824"/>
+                </a:solidFill>
+                <a:latin typeface="Calibri"/>
+              </a:rPr>
+              <a:t>Import independence; price-stable electricity; high-skill jobs anchored to a regulated, exportable competency.</a:t>
+            </a:r>
+          </a:p>
+        </p:txBody>
+      </p:sp>
+      <p:cxnSp>
+        <p:nvCxnSpPr>
+          <p:cNvPr id="33" name="Connector 32"/>
+          <p:cNvCxnSpPr/>
+          <p:nvPr/>
+        </p:nvCxnSpPr>
+        <p:spPr>
+          <a:xfrm>
+            <a:off x="0" y="6629400"/>
+            <a:ext cx="12191695" cy="0"/>
+          </a:xfrm>
+          <a:prstGeom prst="line">
+            <a:avLst/>
+          </a:prstGeom>
+          <a:ln w="6350">
+            <a:solidFill>
+              <a:srgbClr val="C8CED6"/>
+            </a:solidFill>
+          </a:ln>
+        </p:spPr>
+        <p:style>
+          <a:lnRef idx="2">
+            <a:schemeClr val="accent1"/>
+          </a:lnRef>
+          <a:fillRef idx="0">
+            <a:schemeClr val="accent1"/>
+          </a:fillRef>
+          <a:effectRef idx="1">
+            <a:schemeClr val="accent1"/>
+          </a:effectRef>
+          <a:fontRef idx="minor">
+            <a:schemeClr val="tx1"/>
+          </a:fontRef>
+        </p:style>
+      </p:cxnSp>
+      <p:sp>
+        <p:nvSpPr>
+          <p:cNvPr id="34" name="Rectangle 33"/>
+          <p:cNvSpPr/>
+          <p:nvPr/>
+        </p:nvSpPr>
+        <p:spPr>
+          <a:xfrm>
+            <a:off x="0" y="6629400"/>
+            <a:ext cx="640080" cy="45720"/>
+          </a:xfrm>
+          <a:prstGeom prst="rect">
+            <a:avLst/>
+          </a:prstGeom>
+          <a:solidFill>
+            <a:srgbClr val="CC7A2E"/>
+          </a:solidFill>
+          <a:ln>
+            <a:noFill/>
+          </a:ln>
+          <a:effectLst/>
+        </p:spPr>
+        <p:style>
+          <a:lnRef idx="1">
+            <a:schemeClr val="accent1"/>
+          </a:lnRef>
+          <a:fillRef idx="3">
+            <a:schemeClr val="accent1"/>
+          </a:fillRef>
+          <a:effectRef idx="2">
+            <a:schemeClr val="accent1"/>
+          </a:effectRef>
+          <a:fontRef idx="minor">
+            <a:schemeClr val="lt1"/>
+          </a:fontRef>
+        </p:style>
+        <p:txBody>
+          <a:bodyPr rtlCol="0" anchor="ctr"/>
+          <a:lstStyle/>
+          <a:p>
+            <a:pPr algn="ctr"/>
+          </a:p>
+        </p:txBody>
+      </p:sp>
+      <p:sp>
+        <p:nvSpPr>
+          <p:cNvPr id="35" name="TextBox 34"/>
+          <p:cNvSpPr txBox="1"/>
+          <p:nvPr/>
+        </p:nvSpPr>
+        <p:spPr>
+          <a:xfrm>
+            <a:off x="457200" y="6675120"/>
+            <a:ext cx="9601200" cy="182880"/>
+          </a:xfrm>
+          <a:prstGeom prst="rect">
+            <a:avLst/>
+          </a:prstGeom>
+          <a:noFill/>
+        </p:spPr>
+        <p:txBody>
+          <a:bodyPr wrap="square" anchor="t" lIns="0" rIns="0" tIns="0" bIns="0">
+            <a:spAutoFit/>
+          </a:bodyPr>
+          <a:lstStyle/>
+          <a:p>
+            <a:pPr algn="l">
+              <a:lnSpc>
+                <a:spcPct val="120000"/>
+              </a:lnSpc>
+            </a:pPr>
+            <a:r>
+              <a:rPr sz="800" b="0" i="1">
+                <a:solidFill>
+                  <a:srgbClr val="6B7280"/>
+                </a:solidFill>
+                <a:latin typeface="Calibri"/>
+              </a:rPr>
+              <a:t>Sources: Zambia Ministry of Mines — Annual Mining Statistics · Zambia 7NDP &amp; Vision 2030</a:t>
+            </a:r>
+          </a:p>
+        </p:txBody>
+      </p:sp>
+      <p:sp>
+        <p:nvSpPr>
+          <p:cNvPr id="36" name="TextBox 35"/>
+          <p:cNvSpPr txBox="1"/>
+          <p:nvPr/>
+        </p:nvSpPr>
+        <p:spPr>
+          <a:xfrm>
+            <a:off x="10424160" y="6675120"/>
+            <a:ext cx="1554480" cy="182880"/>
+          </a:xfrm>
+          <a:prstGeom prst="rect">
+            <a:avLst/>
+          </a:prstGeom>
+          <a:noFill/>
+        </p:spPr>
+        <p:txBody>
+          <a:bodyPr wrap="square" anchor="t" lIns="0" rIns="0" tIns="0" bIns="0">
+            <a:spAutoFit/>
+          </a:bodyPr>
+          <a:lstStyle/>
+          <a:p>
+            <a:pPr algn="r">
+              <a:lnSpc>
+                <a:spcPct val="120000"/>
+              </a:lnSpc>
+            </a:pPr>
+            <a:r>
+              <a:rPr sz="800" b="1" i="0">
+                <a:solidFill>
+                  <a:srgbClr val="2A3344"/>
+                </a:solidFill>
+                <a:latin typeface="Calibri"/>
+              </a:rPr>
+              <a:t>6 / 8  ·  E. Mwaba</a:t>
+            </a:r>
+          </a:p>
+        </p:txBody>
+      </p:sp>
+    </p:spTree>
+  </p:cSld>
+  <p:clrMapOvr>
+    <a:masterClrMapping/>
+  </p:clrMapOvr>
+</p:sld>
+</file>
+
+<file path=ppt/slides/slide7.xml><?xml version="1.0" encoding="utf-8"?>
+<p:sld xmlns:a="http://schemas.openxmlformats.org/drawingml/2006/main" xmlns:p="http://schemas.openxmlformats.org/presentationml/2006/main" xmlns:r="http://schemas.openxmlformats.org/officeDocument/2006/relationships">
+  <p:cSld>
+    <p:bg>
+      <p:bgPr>
+        <a:solidFill>
+          <a:srgbClr val="F7F5F0"/>
+        </a:solidFill>
+        <a:effectLst/>
+      </p:bgPr>
+    </p:bg>
+    <p:spTree>
+      <p:nvGrpSpPr>
+        <p:cNvPr id="1" name=""/>
+        <p:cNvGrpSpPr/>
+        <p:nvPr/>
+      </p:nvGrpSpPr>
+      <p:grpSpPr/>
+      <p:sp>
+        <p:nvSpPr>
+          <p:cNvPr id="2" name="TextBox 1"/>
+          <p:cNvSpPr txBox="1"/>
+          <p:nvPr/>
+        </p:nvSpPr>
+        <p:spPr>
+          <a:xfrm>
+            <a:off x="548640" y="411480"/>
+            <a:ext cx="9144000" cy="274320"/>
+          </a:xfrm>
+          <a:prstGeom prst="rect">
+            <a:avLst/>
+          </a:prstGeom>
+          <a:noFill/>
+        </p:spPr>
+        <p:txBody>
+          <a:bodyPr wrap="square" anchor="t" lIns="0" rIns="0" tIns="0" bIns="0">
+            <a:spAutoFit/>
+          </a:bodyPr>
+          <a:lstStyle/>
+          <a:p>
+            <a:pPr algn="l">
+              <a:lnSpc>
+                <a:spcPct val="120000"/>
+              </a:lnSpc>
+            </a:pPr>
+            <a:r>
+              <a:rPr sz="1100" b="1" i="0">
+                <a:solidFill>
+                  <a:srgbClr val="CC7A2E"/>
+                </a:solidFill>
+                <a:latin typeface="Calibri"/>
+              </a:rPr>
+              <a:t>05  ·  ECONOMIC IMPACT</a:t>
+            </a:r>
+          </a:p>
+        </p:txBody>
+      </p:sp>
+      <p:sp>
+        <p:nvSpPr>
+          <p:cNvPr id="3" name="TextBox 2"/>
+          <p:cNvSpPr txBox="1"/>
+          <p:nvPr/>
+        </p:nvSpPr>
+        <p:spPr>
+          <a:xfrm>
+            <a:off x="548640" y="685800"/>
+            <a:ext cx="11064240" cy="685800"/>
+          </a:xfrm>
+          <a:prstGeom prst="rect">
+            <a:avLst/>
+          </a:prstGeom>
+          <a:noFill/>
+        </p:spPr>
+        <p:txBody>
+          <a:bodyPr wrap="square" anchor="t" lIns="0" rIns="0" tIns="0" bIns="0">
+            <a:spAutoFit/>
+          </a:bodyPr>
+          <a:lstStyle/>
+          <a:p>
+            <a:pPr algn="l">
+              <a:lnSpc>
+                <a:spcPct val="120000"/>
+              </a:lnSpc>
+            </a:pPr>
+            <a:r>
+              <a:rPr sz="3000" b="1" i="0">
+                <a:solidFill>
+                  <a:srgbClr val="0A1F3D"/>
+                </a:solidFill>
+                <a:latin typeface="Calibri"/>
+              </a:rPr>
+              <a:t>Powering the 3-million-tonne copper ambition.</a:t>
+            </a:r>
+          </a:p>
+        </p:txBody>
+      </p:sp>
+      <p:cxnSp>
+        <p:nvCxnSpPr>
+          <p:cNvPr id="4" name="Connector 3"/>
+          <p:cNvCxnSpPr/>
+          <p:nvPr/>
+        </p:nvCxnSpPr>
+        <p:spPr>
+          <a:xfrm>
+            <a:off x="548640" y="1325880"/>
+            <a:ext cx="1097280" cy="0"/>
+          </a:xfrm>
+          <a:prstGeom prst="line">
+            <a:avLst/>
+          </a:prstGeom>
+          <a:ln w="19050">
+            <a:solidFill>
+              <a:srgbClr val="CC7A2E"/>
+            </a:solidFill>
+          </a:ln>
+        </p:spPr>
+        <p:style>
+          <a:lnRef idx="2">
+            <a:schemeClr val="accent1"/>
+          </a:lnRef>
+          <a:fillRef idx="0">
+            <a:schemeClr val="accent1"/>
+          </a:fillRef>
+          <a:effectRef idx="1">
+            <a:schemeClr val="accent1"/>
+          </a:effectRef>
+          <a:fontRef idx="minor">
+            <a:schemeClr val="tx1"/>
+          </a:fontRef>
+        </p:style>
+      </p:cxnSp>
+      <p:sp>
+        <p:nvSpPr>
+          <p:cNvPr id="5" name="TextBox 4"/>
+          <p:cNvSpPr txBox="1"/>
+          <p:nvPr/>
+        </p:nvSpPr>
+        <p:spPr>
+          <a:xfrm>
+            <a:off x="548640" y="1417320"/>
+            <a:ext cx="11064240" cy="365760"/>
+          </a:xfrm>
+          <a:prstGeom prst="rect">
+            <a:avLst/>
+          </a:prstGeom>
+          <a:noFill/>
+        </p:spPr>
+        <p:txBody>
+          <a:bodyPr wrap="square" anchor="t" lIns="0" rIns="0" tIns="0" bIns="0">
+            <a:spAutoFit/>
+          </a:bodyPr>
+          <a:lstStyle/>
+          <a:p>
+            <a:pPr algn="l">
+              <a:lnSpc>
+                <a:spcPct val="120000"/>
+              </a:lnSpc>
+            </a:pPr>
+            <a:r>
+              <a:rPr sz="1300" b="0" i="1">
+                <a:solidFill>
+                  <a:srgbClr val="6B7280"/>
+                </a:solidFill>
+                <a:latin typeface="Calibri"/>
+              </a:rPr>
+              <a:t>Zambia's flagship industrial target needs high-density, drought-proof power.</a:t>
+            </a:r>
+          </a:p>
+        </p:txBody>
+      </p:sp>
+      <p:graphicFrame>
+        <p:nvGraphicFramePr>
+          <p:cNvPr id="6" name="Chart 5"/>
+          <p:cNvGraphicFramePr>
+            <a:graphicFrameLocks noGrp="1"/>
+          </p:cNvGraphicFramePr>
+          <p:nvPr/>
+        </p:nvGraphicFramePr>
+        <p:xfrm>
+          <a:off x="548640" y="2011680"/>
+          <a:ext cx="6766560" cy="4023360"/>
+        </p:xfrm>
+        <a:graphic>
+          <a:graphicData uri="http://schemas.openxmlformats.org/drawingml/2006/chart">
+            <c:chart xmlns:c="http://schemas.openxmlformats.org/drawingml/2006/chart" r:id="rId2"/>
+          </a:graphicData>
+        </a:graphic>
+      </p:graphicFrame>
+      <p:sp>
+        <p:nvSpPr>
+          <p:cNvPr id="7" name="TextBox 6"/>
+          <p:cNvSpPr txBox="1"/>
+          <p:nvPr/>
+        </p:nvSpPr>
+        <p:spPr>
+          <a:xfrm>
+            <a:off x="548640" y="6080760"/>
+            <a:ext cx="6766560" cy="365760"/>
+          </a:xfrm>
+          <a:prstGeom prst="rect">
+            <a:avLst/>
+          </a:prstGeom>
+          <a:noFill/>
+        </p:spPr>
+        <p:txBody>
+          <a:bodyPr wrap="square" anchor="t" lIns="0" rIns="0" tIns="0" bIns="0">
+            <a:spAutoFit/>
+          </a:bodyPr>
+          <a:lstStyle/>
+          <a:p>
+            <a:pPr algn="ctr">
+              <a:lnSpc>
+                <a:spcPct val="120000"/>
+              </a:lnSpc>
+            </a:pPr>
+            <a:r>
+              <a:rPr sz="900" b="0" i="1">
+                <a:solidFill>
+                  <a:srgbClr val="6B7280"/>
+                </a:solidFill>
+                <a:latin typeface="Calibri"/>
+              </a:rPr>
+              <a:t>Estimated continuous power for copper mining at ~3,500 kWh/t. Sources: MoMMD; ZESCO.</a:t>
+            </a:r>
+          </a:p>
+        </p:txBody>
+      </p:sp>
+      <p:sp>
+        <p:nvSpPr>
+          <p:cNvPr id="8" name="Rectangle 7"/>
+          <p:cNvSpPr/>
+          <p:nvPr/>
+        </p:nvSpPr>
+        <p:spPr>
+          <a:xfrm>
+            <a:off x="7543800" y="2011680"/>
+            <a:ext cx="4160520" cy="4206240"/>
+          </a:xfrm>
+          <a:prstGeom prst="rect">
+            <a:avLst/>
+          </a:prstGeom>
+          <a:solidFill>
+            <a:srgbClr val="FFFFFF"/>
+          </a:solidFill>
+          <a:ln>
+            <a:noFill/>
+          </a:ln>
+          <a:effectLst/>
+        </p:spPr>
+        <p:style>
+          <a:lnRef idx="1">
+            <a:schemeClr val="accent1"/>
+          </a:lnRef>
+          <a:fillRef idx="3">
+            <a:schemeClr val="accent1"/>
+          </a:fillRef>
+          <a:effectRef idx="2">
+            <a:schemeClr val="accent1"/>
+          </a:effectRef>
+          <a:fontRef idx="minor">
+            <a:schemeClr val="lt1"/>
+          </a:fontRef>
+        </p:style>
+        <p:txBody>
+          <a:bodyPr rtlCol="0" anchor="ctr"/>
+          <a:lstStyle/>
+          <a:p>
+            <a:pPr algn="ctr"/>
+          </a:p>
+        </p:txBody>
+      </p:sp>
+      <p:sp>
+        <p:nvSpPr>
+          <p:cNvPr id="9" name="Rectangle 8"/>
+          <p:cNvSpPr/>
+          <p:nvPr/>
+        </p:nvSpPr>
+        <p:spPr>
+          <a:xfrm>
+            <a:off x="7543800" y="2011680"/>
+            <a:ext cx="109728" cy="4206240"/>
+          </a:xfrm>
+          <a:prstGeom prst="rect">
+            <a:avLst/>
+          </a:prstGeom>
+          <a:solidFill>
+            <a:srgbClr val="CC7A2E"/>
+          </a:solidFill>
+          <a:ln>
+            <a:noFill/>
+          </a:ln>
+          <a:effectLst/>
+        </p:spPr>
+        <p:style>
+          <a:lnRef idx="1">
+            <a:schemeClr val="accent1"/>
+          </a:lnRef>
+          <a:fillRef idx="3">
+            <a:schemeClr val="accent1"/>
+          </a:fillRef>
+          <a:effectRef idx="2">
+            <a:schemeClr val="accent1"/>
+          </a:effectRef>
+          <a:fontRef idx="minor">
+            <a:schemeClr val="lt1"/>
+          </a:fontRef>
+        </p:style>
+        <p:txBody>
+          <a:bodyPr rtlCol="0" anchor="ctr"/>
+          <a:lstStyle/>
+          <a:p>
+            <a:pPr algn="ctr"/>
+          </a:p>
+        </p:txBody>
+      </p:sp>
+      <p:sp>
+        <p:nvSpPr>
+          <p:cNvPr id="10" name="TextBox 9"/>
+          <p:cNvSpPr txBox="1"/>
+          <p:nvPr/>
+        </p:nvSpPr>
+        <p:spPr>
+          <a:xfrm>
+            <a:off x="7772400" y="2148840"/>
+            <a:ext cx="3749039" cy="274320"/>
+          </a:xfrm>
+          <a:prstGeom prst="rect">
+            <a:avLst/>
+          </a:prstGeom>
+          <a:noFill/>
+        </p:spPr>
+        <p:txBody>
+          <a:bodyPr wrap="square" anchor="t" lIns="0" rIns="0" tIns="0" bIns="0">
+            <a:spAutoFit/>
+          </a:bodyPr>
+          <a:lstStyle/>
+          <a:p>
+            <a:pPr algn="l">
+              <a:lnSpc>
+                <a:spcPct val="120000"/>
+              </a:lnSpc>
+            </a:pPr>
+            <a:r>
+              <a:rPr sz="1100" b="1" i="0">
+                <a:solidFill>
+                  <a:srgbClr val="CC7A2E"/>
+                </a:solidFill>
+                <a:latin typeface="Calibri"/>
+              </a:rPr>
+              <a:t>WHAT THIS MEANS</a:t>
+            </a:r>
+          </a:p>
+        </p:txBody>
+      </p:sp>
+      <p:sp>
+        <p:nvSpPr>
+          <p:cNvPr id="11" name="TextBox 10"/>
+          <p:cNvSpPr txBox="1"/>
+          <p:nvPr/>
+        </p:nvSpPr>
+        <p:spPr>
+          <a:xfrm>
+            <a:off x="7772400" y="2514600"/>
+            <a:ext cx="3749039" cy="274320"/>
+          </a:xfrm>
+          <a:prstGeom prst="rect">
+            <a:avLst/>
+          </a:prstGeom>
+          <a:noFill/>
+        </p:spPr>
+        <p:txBody>
+          <a:bodyPr wrap="square" anchor="t" lIns="0" rIns="0" tIns="0" bIns="0">
+            <a:spAutoFit/>
+          </a:bodyPr>
+          <a:lstStyle/>
+          <a:p>
+            <a:pPr algn="l">
+              <a:lnSpc>
+                <a:spcPct val="120000"/>
+              </a:lnSpc>
+            </a:pPr>
+            <a:r>
+              <a:rPr sz="1100" b="1" i="0">
+                <a:solidFill>
+                  <a:srgbClr val="0A1F3D"/>
+                </a:solidFill>
+                <a:latin typeface="Calibri"/>
+              </a:rPr>
+              <a:t>MINING INTENSITY</a:t>
+            </a:r>
+          </a:p>
+        </p:txBody>
+      </p:sp>
+      <p:sp>
+        <p:nvSpPr>
+          <p:cNvPr id="12" name="TextBox 11"/>
+          <p:cNvSpPr txBox="1"/>
+          <p:nvPr/>
+        </p:nvSpPr>
+        <p:spPr>
+          <a:xfrm>
+            <a:off x="7772400" y="2788920"/>
+            <a:ext cx="3749039" cy="914400"/>
+          </a:xfrm>
+          <a:prstGeom prst="rect">
+            <a:avLst/>
+          </a:prstGeom>
+          <a:noFill/>
+        </p:spPr>
+        <p:txBody>
+          <a:bodyPr wrap="square" anchor="t" lIns="0" rIns="0" tIns="0" bIns="0">
+            <a:spAutoFit/>
+          </a:bodyPr>
+          <a:lstStyle/>
+          <a:p>
+            <a:pPr algn="l">
+              <a:lnSpc>
+                <a:spcPct val="130000"/>
+              </a:lnSpc>
+            </a:pPr>
+            <a:r>
+              <a:rPr sz="1100" b="0" i="0">
+                <a:solidFill>
+                  <a:srgbClr val="121824"/>
+                </a:solidFill>
+                <a:latin typeface="Calibri"/>
+              </a:rPr>
+              <a:t>Deep-level copper requires massive, uninterrupted power — hydropower is structurally mismatched.</a:t>
+            </a:r>
+          </a:p>
+        </p:txBody>
+      </p:sp>
+      <p:sp>
+        <p:nvSpPr>
+          <p:cNvPr id="13" name="TextBox 12"/>
+          <p:cNvSpPr txBox="1"/>
+          <p:nvPr/>
+        </p:nvSpPr>
+        <p:spPr>
+          <a:xfrm>
+            <a:off x="7772400" y="3703320"/>
+            <a:ext cx="3749039" cy="274320"/>
+          </a:xfrm>
+          <a:prstGeom prst="rect">
+            <a:avLst/>
+          </a:prstGeom>
+          <a:noFill/>
+        </p:spPr>
+        <p:txBody>
+          <a:bodyPr wrap="square" anchor="t" lIns="0" rIns="0" tIns="0" bIns="0">
+            <a:spAutoFit/>
+          </a:bodyPr>
+          <a:lstStyle/>
+          <a:p>
+            <a:pPr algn="l">
+              <a:lnSpc>
+                <a:spcPct val="120000"/>
+              </a:lnSpc>
+            </a:pPr>
+            <a:r>
+              <a:rPr sz="1100" b="1" i="0">
+                <a:solidFill>
+                  <a:srgbClr val="0A1F3D"/>
+                </a:solidFill>
+                <a:latin typeface="Calibri"/>
+              </a:rPr>
+              <a:t>COST STABILITY</a:t>
+            </a:r>
+          </a:p>
+        </p:txBody>
+      </p:sp>
+      <p:sp>
+        <p:nvSpPr>
+          <p:cNvPr id="14" name="TextBox 13"/>
+          <p:cNvSpPr txBox="1"/>
+          <p:nvPr/>
+        </p:nvSpPr>
+        <p:spPr>
+          <a:xfrm>
+            <a:off x="7772400" y="3977639"/>
+            <a:ext cx="3749039" cy="914400"/>
+          </a:xfrm>
+          <a:prstGeom prst="rect">
+            <a:avLst/>
+          </a:prstGeom>
+          <a:noFill/>
+        </p:spPr>
+        <p:txBody>
+          <a:bodyPr wrap="square" anchor="t" lIns="0" rIns="0" tIns="0" bIns="0">
+            <a:spAutoFit/>
+          </a:bodyPr>
+          <a:lstStyle/>
+          <a:p>
+            <a:pPr algn="l">
+              <a:lnSpc>
+                <a:spcPct val="130000"/>
+              </a:lnSpc>
+            </a:pPr>
+            <a:r>
+              <a:rPr sz="1100" b="0" i="0">
+                <a:solidFill>
+                  <a:srgbClr val="121824"/>
+                </a:solidFill>
+                <a:latin typeface="Calibri"/>
+              </a:rPr>
+              <a:t>Nuclear fuel costs are decade-stable vs. volatile diesel imports and emergency electricity buys.</a:t>
+            </a:r>
+          </a:p>
+        </p:txBody>
+      </p:sp>
+      <p:sp>
+        <p:nvSpPr>
+          <p:cNvPr id="15" name="TextBox 14"/>
+          <p:cNvSpPr txBox="1"/>
+          <p:nvPr/>
+        </p:nvSpPr>
+        <p:spPr>
+          <a:xfrm>
+            <a:off x="7772400" y="4892040"/>
+            <a:ext cx="3749039" cy="274320"/>
+          </a:xfrm>
+          <a:prstGeom prst="rect">
+            <a:avLst/>
+          </a:prstGeom>
+          <a:noFill/>
+        </p:spPr>
+        <p:txBody>
+          <a:bodyPr wrap="square" anchor="t" lIns="0" rIns="0" tIns="0" bIns="0">
+            <a:spAutoFit/>
+          </a:bodyPr>
+          <a:lstStyle/>
+          <a:p>
+            <a:pPr algn="l">
+              <a:lnSpc>
+                <a:spcPct val="120000"/>
+              </a:lnSpc>
+            </a:pPr>
+            <a:r>
+              <a:rPr sz="1100" b="1" i="0">
+                <a:solidFill>
+                  <a:srgbClr val="0A1F3D"/>
+                </a:solidFill>
+                <a:latin typeface="Calibri"/>
+              </a:rPr>
+              <a:t>STRATEGIC FIT</a:t>
+            </a:r>
+          </a:p>
+        </p:txBody>
+      </p:sp>
+      <p:sp>
+        <p:nvSpPr>
+          <p:cNvPr id="16" name="TextBox 15"/>
+          <p:cNvSpPr txBox="1"/>
+          <p:nvPr/>
+        </p:nvSpPr>
+        <p:spPr>
+          <a:xfrm>
+            <a:off x="7772400" y="5166359"/>
+            <a:ext cx="3749039" cy="914400"/>
+          </a:xfrm>
+          <a:prstGeom prst="rect">
+            <a:avLst/>
+          </a:prstGeom>
+          <a:noFill/>
+        </p:spPr>
+        <p:txBody>
+          <a:bodyPr wrap="square" anchor="t" lIns="0" rIns="0" tIns="0" bIns="0">
+            <a:spAutoFit/>
+          </a:bodyPr>
+          <a:lstStyle/>
+          <a:p>
+            <a:pPr algn="l">
+              <a:lnSpc>
+                <a:spcPct val="130000"/>
+              </a:lnSpc>
+            </a:pPr>
+            <a:r>
+              <a:rPr sz="1100" b="0" i="0">
+                <a:solidFill>
+                  <a:srgbClr val="121824"/>
+                </a:solidFill>
+                <a:latin typeface="Calibri"/>
+              </a:rPr>
+              <a:t>The 2,000 MW nuclear target maps directly onto the 3 Mt copper power gap.</a:t>
+            </a:r>
+          </a:p>
+        </p:txBody>
+      </p:sp>
+      <p:cxnSp>
+        <p:nvCxnSpPr>
+          <p:cNvPr id="17" name="Connector 16"/>
+          <p:cNvCxnSpPr/>
+          <p:nvPr/>
+        </p:nvCxnSpPr>
+        <p:spPr>
+          <a:xfrm>
+            <a:off x="0" y="6629400"/>
+            <a:ext cx="12191695" cy="0"/>
+          </a:xfrm>
+          <a:prstGeom prst="line">
+            <a:avLst/>
+          </a:prstGeom>
+          <a:ln w="6350">
+            <a:solidFill>
+              <a:srgbClr val="C8CED6"/>
+            </a:solidFill>
+          </a:ln>
+        </p:spPr>
+        <p:style>
+          <a:lnRef idx="2">
+            <a:schemeClr val="accent1"/>
+          </a:lnRef>
+          <a:fillRef idx="0">
+            <a:schemeClr val="accent1"/>
+          </a:fillRef>
+          <a:effectRef idx="1">
+            <a:schemeClr val="accent1"/>
+          </a:effectRef>
+          <a:fontRef idx="minor">
+            <a:schemeClr val="tx1"/>
+          </a:fontRef>
+        </p:style>
+      </p:cxnSp>
+      <p:sp>
+        <p:nvSpPr>
+          <p:cNvPr id="18" name="Rectangle 17"/>
+          <p:cNvSpPr/>
+          <p:nvPr/>
+        </p:nvSpPr>
+        <p:spPr>
+          <a:xfrm>
+            <a:off x="0" y="6629400"/>
+            <a:ext cx="640080" cy="45720"/>
+          </a:xfrm>
+          <a:prstGeom prst="rect">
+            <a:avLst/>
+          </a:prstGeom>
+          <a:solidFill>
+            <a:srgbClr val="CC7A2E"/>
+          </a:solidFill>
+          <a:ln>
+            <a:noFill/>
+          </a:ln>
+          <a:effectLst/>
+        </p:spPr>
+        <p:style>
+          <a:lnRef idx="1">
+            <a:schemeClr val="accent1"/>
+          </a:lnRef>
+          <a:fillRef idx="3">
+            <a:schemeClr val="accent1"/>
+          </a:fillRef>
+          <a:effectRef idx="2">
+            <a:schemeClr val="accent1"/>
+          </a:effectRef>
+          <a:fontRef idx="minor">
+            <a:schemeClr val="lt1"/>
+          </a:fontRef>
+        </p:style>
+        <p:txBody>
+          <a:bodyPr rtlCol="0" anchor="ctr"/>
+          <a:lstStyle/>
+          <a:p>
+            <a:pPr algn="ctr"/>
+          </a:p>
+        </p:txBody>
+      </p:sp>
+      <p:sp>
+        <p:nvSpPr>
+          <p:cNvPr id="19" name="TextBox 18"/>
+          <p:cNvSpPr txBox="1"/>
+          <p:nvPr/>
+        </p:nvSpPr>
+        <p:spPr>
+          <a:xfrm>
+            <a:off x="457200" y="6675120"/>
+            <a:ext cx="9601200" cy="182880"/>
+          </a:xfrm>
+          <a:prstGeom prst="rect">
+            <a:avLst/>
+          </a:prstGeom>
+          <a:noFill/>
+        </p:spPr>
+        <p:txBody>
+          <a:bodyPr wrap="square" anchor="t" lIns="0" rIns="0" tIns="0" bIns="0">
+            <a:spAutoFit/>
+          </a:bodyPr>
+          <a:lstStyle/>
+          <a:p>
+            <a:pPr algn="l">
+              <a:lnSpc>
+                <a:spcPct val="120000"/>
+              </a:lnSpc>
+            </a:pPr>
+            <a:r>
+              <a:rPr sz="800" b="0" i="1">
+                <a:solidFill>
+                  <a:srgbClr val="6B7280"/>
+                </a:solidFill>
+                <a:latin typeface="Calibri"/>
+              </a:rPr>
+              <a:t>Sources: Zambia Ministry of Mines — Annual Mining Statistics · ZESCO Annual Reports 2023-2024</a:t>
+            </a:r>
+          </a:p>
+        </p:txBody>
+      </p:sp>
+      <p:sp>
+        <p:nvSpPr>
+          <p:cNvPr id="20" name="TextBox 19"/>
+          <p:cNvSpPr txBox="1"/>
+          <p:nvPr/>
+        </p:nvSpPr>
+        <p:spPr>
+          <a:xfrm>
+            <a:off x="10424160" y="6675120"/>
+            <a:ext cx="1554480" cy="182880"/>
+          </a:xfrm>
+          <a:prstGeom prst="rect">
+            <a:avLst/>
+          </a:prstGeom>
+          <a:noFill/>
+        </p:spPr>
+        <p:txBody>
+          <a:bodyPr wrap="square" anchor="t" lIns="0" rIns="0" tIns="0" bIns="0">
+            <a:spAutoFit/>
+          </a:bodyPr>
+          <a:lstStyle/>
+          <a:p>
+            <a:pPr algn="r">
+              <a:lnSpc>
+                <a:spcPct val="120000"/>
+              </a:lnSpc>
+            </a:pPr>
+            <a:r>
+              <a:rPr sz="800" b="1" i="0">
+                <a:solidFill>
+                  <a:srgbClr val="2A3344"/>
+                </a:solidFill>
+                <a:latin typeface="Calibri"/>
+              </a:rPr>
+              <a:t>7 / 8  ·  E. Mwaba</a:t>
+            </a:r>
+          </a:p>
+        </p:txBody>
+      </p:sp>
+    </p:spTree>
+  </p:cSld>
+  <p:clrMapOvr>
+    <a:masterClrMapping/>
+  </p:clrMapOvr>
+</p:sld>
+</file>
+
+<file path=ppt/slides/slide8.xml><?xml version="1.0" encoding="utf-8"?>
 <p:sld xmlns:a="http://schemas.openxmlformats.org/drawingml/2006/main" xmlns:p="http://schemas.openxmlformats.org/presentationml/2006/main" xmlns:r="http://schemas.openxmlformats.org/officeDocument/2006/relationships">
   <p:cSld>
     <p:bg>
@@ -8029,8 +10590,8 @@
         </p:nvSpPr>
         <p:spPr>
           <a:xfrm>
-            <a:off x="548640" y="502920"/>
-            <a:ext cx="9144000" cy="365760"/>
+            <a:off x="548640" y="457200"/>
+            <a:ext cx="9144000" cy="274320"/>
           </a:xfrm>
           <a:prstGeom prst="rect">
             <a:avLst/>
@@ -8045,7 +10606,7 @@
           <a:p>
             <a:pPr algn="l">
               <a:lnSpc>
-                <a:spcPct val="115000"/>
+                <a:spcPct val="120000"/>
               </a:lnSpc>
             </a:pPr>
             <a:r>
@@ -8055,7 +10616,7 @@
                 </a:solidFill>
                 <a:latin typeface="Calibri"/>
               </a:rPr>
-              <a:t>04  ·  THE ASK</a:t>
+              <a:t>06  ·  THE ROADMAP</a:t>
             </a:r>
           </a:p>
         </p:txBody>
@@ -8068,8 +10629,8 @@
         </p:nvSpPr>
         <p:spPr>
           <a:xfrm>
-            <a:off x="548640" y="777240"/>
-            <a:ext cx="11064240" cy="822960"/>
+            <a:off x="548640" y="731520"/>
+            <a:ext cx="11064240" cy="640080"/>
           </a:xfrm>
           <a:prstGeom prst="rect">
             <a:avLst/>
@@ -8084,17 +10645,17 @@
           <a:p>
             <a:pPr algn="l">
               <a:lnSpc>
-                <a:spcPct val="115000"/>
+                <a:spcPct val="120000"/>
               </a:lnSpc>
             </a:pPr>
             <a:r>
-              <a:rPr sz="3800" b="1" i="0">
+              <a:rPr sz="2800" b="1" i="0">
                 <a:solidFill>
                   <a:srgbClr val="FFFFFF"/>
                 </a:solidFill>
                 <a:latin typeface="Calibri"/>
               </a:rPr>
-              <a:t>Three decisions. One generation.</a:t>
+              <a:t>From policy approval to first SMR — one decade.</a:t>
             </a:r>
           </a:p>
         </p:txBody>
@@ -8107,7 +10668,7 @@
         </p:nvCxnSpPr>
         <p:spPr>
           <a:xfrm>
-            <a:off x="548640" y="1554480"/>
+            <a:off x="548640" y="1417320"/>
             <a:ext cx="1097280" cy="0"/>
           </a:xfrm>
           <a:prstGeom prst="line">
@@ -8142,8 +10703,8 @@
         </p:nvSpPr>
         <p:spPr>
           <a:xfrm>
-            <a:off x="548640" y="1645920"/>
-            <a:ext cx="11064240" cy="457200"/>
+            <a:off x="548640" y="1508760"/>
+            <a:ext cx="11064240" cy="365760"/>
           </a:xfrm>
           <a:prstGeom prst="rect">
             <a:avLst/>
@@ -8158,31 +10719,300 @@
           <a:p>
             <a:pPr algn="l">
               <a:lnSpc>
-                <a:spcPct val="115000"/>
+                <a:spcPct val="120000"/>
               </a:lnSpc>
             </a:pPr>
             <a:r>
-              <a:rPr sz="1400" b="0" i="1">
+              <a:rPr sz="1300" b="0" i="1">
                 <a:solidFill>
                   <a:srgbClr val="CFD8E3"/>
                 </a:solidFill>
                 <a:latin typeface="Calibri"/>
               </a:rPr>
-              <a:t>From radiological fear to industrial mastery — the choice is legislative, not technical.</a:t>
-            </a:r>
-          </a:p>
-        </p:txBody>
-      </p:sp>
-      <p:sp>
-        <p:nvSpPr>
-          <p:cNvPr id="7" name="Rectangle 6"/>
+              <a:t>Three workstreams. Visible milestones. Accountability windows.</a:t>
+            </a:r>
+          </a:p>
+        </p:txBody>
+      </p:sp>
+      <p:sp>
+        <p:nvSpPr>
+          <p:cNvPr id="7" name="TextBox 6"/>
+          <p:cNvSpPr txBox="1"/>
+          <p:nvPr/>
+        </p:nvSpPr>
+        <p:spPr>
+          <a:xfrm>
+            <a:off x="1005839" y="2148840"/>
+            <a:ext cx="548640" cy="274320"/>
+          </a:xfrm>
+          <a:prstGeom prst="rect">
+            <a:avLst/>
+          </a:prstGeom>
+          <a:noFill/>
+        </p:spPr>
+        <p:txBody>
+          <a:bodyPr wrap="square" anchor="t" lIns="0" rIns="0" tIns="0" bIns="0">
+            <a:spAutoFit/>
+          </a:bodyPr>
+          <a:lstStyle/>
+          <a:p>
+            <a:pPr algn="ctr">
+              <a:lnSpc>
+                <a:spcPct val="120000"/>
+              </a:lnSpc>
+            </a:pPr>
+            <a:r>
+              <a:rPr sz="1000" b="1" i="0">
+                <a:solidFill>
+                  <a:srgbClr val="E8A860"/>
+                </a:solidFill>
+                <a:latin typeface="Calibri"/>
+              </a:rPr>
+              <a:t>2026</a:t>
+            </a:r>
+          </a:p>
+        </p:txBody>
+      </p:sp>
+      <p:sp>
+        <p:nvSpPr>
+          <p:cNvPr id="8" name="TextBox 7"/>
+          <p:cNvSpPr txBox="1"/>
+          <p:nvPr/>
+        </p:nvSpPr>
+        <p:spPr>
+          <a:xfrm>
+            <a:off x="3072384" y="2148840"/>
+            <a:ext cx="548640" cy="274320"/>
+          </a:xfrm>
+          <a:prstGeom prst="rect">
+            <a:avLst/>
+          </a:prstGeom>
+          <a:noFill/>
+        </p:spPr>
+        <p:txBody>
+          <a:bodyPr wrap="square" anchor="t" lIns="0" rIns="0" tIns="0" bIns="0">
+            <a:spAutoFit/>
+          </a:bodyPr>
+          <a:lstStyle/>
+          <a:p>
+            <a:pPr algn="ctr">
+              <a:lnSpc>
+                <a:spcPct val="120000"/>
+              </a:lnSpc>
+            </a:pPr>
+            <a:r>
+              <a:rPr sz="1000" b="1" i="0">
+                <a:solidFill>
+                  <a:srgbClr val="E8A860"/>
+                </a:solidFill>
+                <a:latin typeface="Calibri"/>
+              </a:rPr>
+              <a:t>2028</a:t>
+            </a:r>
+          </a:p>
+        </p:txBody>
+      </p:sp>
+      <p:sp>
+        <p:nvSpPr>
+          <p:cNvPr id="9" name="TextBox 8"/>
+          <p:cNvSpPr txBox="1"/>
+          <p:nvPr/>
+        </p:nvSpPr>
+        <p:spPr>
+          <a:xfrm>
+            <a:off x="5138928" y="2148840"/>
+            <a:ext cx="548640" cy="274320"/>
+          </a:xfrm>
+          <a:prstGeom prst="rect">
+            <a:avLst/>
+          </a:prstGeom>
+          <a:noFill/>
+        </p:spPr>
+        <p:txBody>
+          <a:bodyPr wrap="square" anchor="t" lIns="0" rIns="0" tIns="0" bIns="0">
+            <a:spAutoFit/>
+          </a:bodyPr>
+          <a:lstStyle/>
+          <a:p>
+            <a:pPr algn="ctr">
+              <a:lnSpc>
+                <a:spcPct val="120000"/>
+              </a:lnSpc>
+            </a:pPr>
+            <a:r>
+              <a:rPr sz="1000" b="1" i="0">
+                <a:solidFill>
+                  <a:srgbClr val="E8A860"/>
+                </a:solidFill>
+                <a:latin typeface="Calibri"/>
+              </a:rPr>
+              <a:t>2030</a:t>
+            </a:r>
+          </a:p>
+        </p:txBody>
+      </p:sp>
+      <p:sp>
+        <p:nvSpPr>
+          <p:cNvPr id="10" name="TextBox 9"/>
+          <p:cNvSpPr txBox="1"/>
+          <p:nvPr/>
+        </p:nvSpPr>
+        <p:spPr>
+          <a:xfrm>
+            <a:off x="7205472" y="2148840"/>
+            <a:ext cx="548640" cy="274320"/>
+          </a:xfrm>
+          <a:prstGeom prst="rect">
+            <a:avLst/>
+          </a:prstGeom>
+          <a:noFill/>
+        </p:spPr>
+        <p:txBody>
+          <a:bodyPr wrap="square" anchor="t" lIns="0" rIns="0" tIns="0" bIns="0">
+            <a:spAutoFit/>
+          </a:bodyPr>
+          <a:lstStyle/>
+          <a:p>
+            <a:pPr algn="ctr">
+              <a:lnSpc>
+                <a:spcPct val="120000"/>
+              </a:lnSpc>
+            </a:pPr>
+            <a:r>
+              <a:rPr sz="1000" b="1" i="0">
+                <a:solidFill>
+                  <a:srgbClr val="E8A860"/>
+                </a:solidFill>
+                <a:latin typeface="Calibri"/>
+              </a:rPr>
+              <a:t>2032</a:t>
+            </a:r>
+          </a:p>
+        </p:txBody>
+      </p:sp>
+      <p:sp>
+        <p:nvSpPr>
+          <p:cNvPr id="11" name="TextBox 10"/>
+          <p:cNvSpPr txBox="1"/>
+          <p:nvPr/>
+        </p:nvSpPr>
+        <p:spPr>
+          <a:xfrm>
+            <a:off x="9272015" y="2148840"/>
+            <a:ext cx="548640" cy="274320"/>
+          </a:xfrm>
+          <a:prstGeom prst="rect">
+            <a:avLst/>
+          </a:prstGeom>
+          <a:noFill/>
+        </p:spPr>
+        <p:txBody>
+          <a:bodyPr wrap="square" anchor="t" lIns="0" rIns="0" tIns="0" bIns="0">
+            <a:spAutoFit/>
+          </a:bodyPr>
+          <a:lstStyle/>
+          <a:p>
+            <a:pPr algn="ctr">
+              <a:lnSpc>
+                <a:spcPct val="120000"/>
+              </a:lnSpc>
+            </a:pPr>
+            <a:r>
+              <a:rPr sz="1000" b="1" i="0">
+                <a:solidFill>
+                  <a:srgbClr val="E8A860"/>
+                </a:solidFill>
+                <a:latin typeface="Calibri"/>
+              </a:rPr>
+              <a:t>2034</a:t>
+            </a:r>
+          </a:p>
+        </p:txBody>
+      </p:sp>
+      <p:sp>
+        <p:nvSpPr>
+          <p:cNvPr id="12" name="TextBox 11"/>
+          <p:cNvSpPr txBox="1"/>
+          <p:nvPr/>
+        </p:nvSpPr>
+        <p:spPr>
+          <a:xfrm>
+            <a:off x="11338559" y="2148840"/>
+            <a:ext cx="548640" cy="274320"/>
+          </a:xfrm>
+          <a:prstGeom prst="rect">
+            <a:avLst/>
+          </a:prstGeom>
+          <a:noFill/>
+        </p:spPr>
+        <p:txBody>
+          <a:bodyPr wrap="square" anchor="t" lIns="0" rIns="0" tIns="0" bIns="0">
+            <a:spAutoFit/>
+          </a:bodyPr>
+          <a:lstStyle/>
+          <a:p>
+            <a:pPr algn="ctr">
+              <a:lnSpc>
+                <a:spcPct val="120000"/>
+              </a:lnSpc>
+            </a:pPr>
+            <a:r>
+              <a:rPr sz="1000" b="1" i="0">
+                <a:solidFill>
+                  <a:srgbClr val="E8A860"/>
+                </a:solidFill>
+                <a:latin typeface="Calibri"/>
+              </a:rPr>
+              <a:t>2036+</a:t>
+            </a:r>
+          </a:p>
+        </p:txBody>
+      </p:sp>
+      <p:cxnSp>
+        <p:nvCxnSpPr>
+          <p:cNvPr id="13" name="Connector 12"/>
+          <p:cNvCxnSpPr/>
+          <p:nvPr/>
+        </p:nvCxnSpPr>
+        <p:spPr>
+          <a:xfrm>
+            <a:off x="1280160" y="2514600"/>
+            <a:ext cx="10332719" cy="0"/>
+          </a:xfrm>
+          <a:prstGeom prst="line">
+            <a:avLst/>
+          </a:prstGeom>
+          <a:ln w="9525">
+            <a:solidFill>
+              <a:srgbClr val="334466"/>
+            </a:solidFill>
+          </a:ln>
+        </p:spPr>
+        <p:style>
+          <a:lnRef idx="2">
+            <a:schemeClr val="accent1"/>
+          </a:lnRef>
+          <a:fillRef idx="0">
+            <a:schemeClr val="accent1"/>
+          </a:fillRef>
+          <a:effectRef idx="1">
+            <a:schemeClr val="accent1"/>
+          </a:effectRef>
+          <a:fontRef idx="minor">
+            <a:schemeClr val="tx1"/>
+          </a:fontRef>
+        </p:style>
+      </p:cxnSp>
+      <p:sp>
+        <p:nvSpPr>
+          <p:cNvPr id="14" name="Rectangle 13"/>
           <p:cNvSpPr/>
           <p:nvPr/>
         </p:nvSpPr>
         <p:spPr>
           <a:xfrm>
-            <a:off x="548640" y="2423160"/>
-            <a:ext cx="1051560" cy="1097280"/>
+            <a:off x="1280160" y="3063239"/>
+            <a:ext cx="4133087" cy="411480"/>
           </a:xfrm>
           <a:prstGeom prst="rect">
             <a:avLst/>
@@ -8219,14 +11049,58 @@
       </p:sp>
       <p:sp>
         <p:nvSpPr>
-          <p:cNvPr id="8" name="TextBox 7"/>
+          <p:cNvPr id="15" name="Rectangle 14"/>
+          <p:cNvSpPr/>
+          <p:nvPr/>
+        </p:nvSpPr>
+        <p:spPr>
+          <a:xfrm>
+            <a:off x="1280160" y="3063239"/>
+            <a:ext cx="73152" cy="411480"/>
+          </a:xfrm>
+          <a:prstGeom prst="rect">
+            <a:avLst/>
+          </a:prstGeom>
+          <a:solidFill>
+            <a:srgbClr val="FFFFFF"/>
+          </a:solidFill>
+          <a:ln>
+            <a:noFill/>
+          </a:ln>
+          <a:effectLst/>
+        </p:spPr>
+        <p:style>
+          <a:lnRef idx="1">
+            <a:schemeClr val="accent1"/>
+          </a:lnRef>
+          <a:fillRef idx="3">
+            <a:schemeClr val="accent1"/>
+          </a:fillRef>
+          <a:effectRef idx="2">
+            <a:schemeClr val="accent1"/>
+          </a:effectRef>
+          <a:fontRef idx="minor">
+            <a:schemeClr val="lt1"/>
+          </a:fontRef>
+        </p:style>
+        <p:txBody>
+          <a:bodyPr rtlCol="0" anchor="ctr"/>
+          <a:lstStyle/>
+          <a:p>
+            <a:pPr algn="ctr"/>
+          </a:p>
+        </p:txBody>
+      </p:sp>
+      <p:sp>
+        <p:nvSpPr>
+          <p:cNvPr id="16" name="TextBox 15"/>
           <p:cNvSpPr txBox="1"/>
           <p:nvPr/>
         </p:nvSpPr>
         <p:spPr>
           <a:xfrm>
-            <a:off x="548640" y="2715768"/>
-            <a:ext cx="1051560" cy="640080"/>
+            <a:off x="1389888" y="3081527"/>
+            <a:ext cx="3995927" cy="365760"/>
           </a:xfrm>
           <a:prstGeom prst="rect">
             <a:avLst/>
@@ -8239,33 +11113,404 @@
           </a:bodyPr>
           <a:lstStyle/>
           <a:p>
-            <a:pPr algn="ctr">
+            <a:pPr algn="l">
               <a:lnSpc>
-                <a:spcPct val="115000"/>
+                <a:spcPct val="120000"/>
               </a:lnSpc>
             </a:pPr>
             <a:r>
-              <a:rPr sz="3400" b="1" i="0">
+              <a:rPr sz="1100" b="1" i="0">
                 <a:solidFill>
                   <a:srgbClr val="06142A"/>
                 </a:solidFill>
                 <a:latin typeface="Calibri"/>
               </a:rPr>
-              <a:t>01</a:t>
-            </a:r>
-          </a:p>
-        </p:txBody>
-      </p:sp>
-      <p:sp>
-        <p:nvSpPr>
-          <p:cNvPr id="9" name="Rectangle 8"/>
+              <a:t>POLICY  &amp;  REGULATION</a:t>
+            </a:r>
+          </a:p>
+        </p:txBody>
+      </p:sp>
+      <p:sp>
+        <p:nvSpPr>
+          <p:cNvPr id="17" name="TextBox 16"/>
+          <p:cNvSpPr txBox="1"/>
+          <p:nvPr/>
+        </p:nvSpPr>
+        <p:spPr>
+          <a:xfrm>
+            <a:off x="1280160" y="3520439"/>
+            <a:ext cx="10332719" cy="274320"/>
+          </a:xfrm>
+          <a:prstGeom prst="rect">
+            <a:avLst/>
+          </a:prstGeom>
+          <a:noFill/>
+        </p:spPr>
+        <p:txBody>
+          <a:bodyPr wrap="square" anchor="t" lIns="0" rIns="0" tIns="0" bIns="0">
+            <a:spAutoFit/>
+          </a:bodyPr>
+          <a:lstStyle/>
+          <a:p>
+            <a:pPr algn="l">
+              <a:lnSpc>
+                <a:spcPct val="120000"/>
+              </a:lnSpc>
+            </a:pPr>
+            <a:r>
+              <a:rPr sz="1000" b="0" i="0">
+                <a:solidFill>
+                  <a:srgbClr val="CFD8E3"/>
+                </a:solidFill>
+                <a:latin typeface="Calibri"/>
+              </a:rPr>
+              <a:t>Enact Nuclear Bill · Formalise NSPA · Site licensing</a:t>
+            </a:r>
+          </a:p>
+        </p:txBody>
+      </p:sp>
+      <p:sp>
+        <p:nvSpPr>
+          <p:cNvPr id="18" name="Rectangle 17"/>
           <p:cNvSpPr/>
           <p:nvPr/>
         </p:nvSpPr>
         <p:spPr>
           <a:xfrm>
-            <a:off x="1600200" y="2423160"/>
-            <a:ext cx="10058400" cy="1097280"/>
+            <a:off x="2313432" y="4069080"/>
+            <a:ext cx="8266175" cy="411480"/>
+          </a:xfrm>
+          <a:prstGeom prst="rect">
+            <a:avLst/>
+          </a:prstGeom>
+          <a:solidFill>
+            <a:srgbClr val="E8A860"/>
+          </a:solidFill>
+          <a:ln>
+            <a:noFill/>
+          </a:ln>
+          <a:effectLst/>
+        </p:spPr>
+        <p:style>
+          <a:lnRef idx="1">
+            <a:schemeClr val="accent1"/>
+          </a:lnRef>
+          <a:fillRef idx="3">
+            <a:schemeClr val="accent1"/>
+          </a:fillRef>
+          <a:effectRef idx="2">
+            <a:schemeClr val="accent1"/>
+          </a:effectRef>
+          <a:fontRef idx="minor">
+            <a:schemeClr val="lt1"/>
+          </a:fontRef>
+        </p:style>
+        <p:txBody>
+          <a:bodyPr rtlCol="0" anchor="ctr"/>
+          <a:lstStyle/>
+          <a:p>
+            <a:pPr algn="ctr"/>
+          </a:p>
+        </p:txBody>
+      </p:sp>
+      <p:sp>
+        <p:nvSpPr>
+          <p:cNvPr id="19" name="Rectangle 18"/>
+          <p:cNvSpPr/>
+          <p:nvPr/>
+        </p:nvSpPr>
+        <p:spPr>
+          <a:xfrm>
+            <a:off x="2313432" y="4069080"/>
+            <a:ext cx="73152" cy="411480"/>
+          </a:xfrm>
+          <a:prstGeom prst="rect">
+            <a:avLst/>
+          </a:prstGeom>
+          <a:solidFill>
+            <a:srgbClr val="FFFFFF"/>
+          </a:solidFill>
+          <a:ln>
+            <a:noFill/>
+          </a:ln>
+          <a:effectLst/>
+        </p:spPr>
+        <p:style>
+          <a:lnRef idx="1">
+            <a:schemeClr val="accent1"/>
+          </a:lnRef>
+          <a:fillRef idx="3">
+            <a:schemeClr val="accent1"/>
+          </a:fillRef>
+          <a:effectRef idx="2">
+            <a:schemeClr val="accent1"/>
+          </a:effectRef>
+          <a:fontRef idx="minor">
+            <a:schemeClr val="lt1"/>
+          </a:fontRef>
+        </p:style>
+        <p:txBody>
+          <a:bodyPr rtlCol="0" anchor="ctr"/>
+          <a:lstStyle/>
+          <a:p>
+            <a:pPr algn="ctr"/>
+          </a:p>
+        </p:txBody>
+      </p:sp>
+      <p:sp>
+        <p:nvSpPr>
+          <p:cNvPr id="20" name="TextBox 19"/>
+          <p:cNvSpPr txBox="1"/>
+          <p:nvPr/>
+        </p:nvSpPr>
+        <p:spPr>
+          <a:xfrm>
+            <a:off x="2423160" y="4087368"/>
+            <a:ext cx="8129015" cy="365760"/>
+          </a:xfrm>
+          <a:prstGeom prst="rect">
+            <a:avLst/>
+          </a:prstGeom>
+          <a:noFill/>
+        </p:spPr>
+        <p:txBody>
+          <a:bodyPr wrap="square" anchor="t" lIns="0" rIns="0" tIns="0" bIns="0">
+            <a:spAutoFit/>
+          </a:bodyPr>
+          <a:lstStyle/>
+          <a:p>
+            <a:pPr algn="l">
+              <a:lnSpc>
+                <a:spcPct val="120000"/>
+              </a:lnSpc>
+            </a:pPr>
+            <a:r>
+              <a:rPr sz="1100" b="1" i="0">
+                <a:solidFill>
+                  <a:srgbClr val="06142A"/>
+                </a:solidFill>
+                <a:latin typeface="Calibri"/>
+              </a:rPr>
+              <a:t>HUMAN  CAPITAL</a:t>
+            </a:r>
+          </a:p>
+        </p:txBody>
+      </p:sp>
+      <p:sp>
+        <p:nvSpPr>
+          <p:cNvPr id="21" name="TextBox 20"/>
+          <p:cNvSpPr txBox="1"/>
+          <p:nvPr/>
+        </p:nvSpPr>
+        <p:spPr>
+          <a:xfrm>
+            <a:off x="1280160" y="4526280"/>
+            <a:ext cx="10332719" cy="274320"/>
+          </a:xfrm>
+          <a:prstGeom prst="rect">
+            <a:avLst/>
+          </a:prstGeom>
+          <a:noFill/>
+        </p:spPr>
+        <p:txBody>
+          <a:bodyPr wrap="square" anchor="t" lIns="0" rIns="0" tIns="0" bIns="0">
+            <a:spAutoFit/>
+          </a:bodyPr>
+          <a:lstStyle/>
+          <a:p>
+            <a:pPr algn="l">
+              <a:lnSpc>
+                <a:spcPct val="120000"/>
+              </a:lnSpc>
+            </a:pPr>
+            <a:r>
+              <a:rPr sz="1000" b="0" i="0">
+                <a:solidFill>
+                  <a:srgbClr val="CFD8E3"/>
+                </a:solidFill>
+                <a:latin typeface="Calibri"/>
+              </a:rPr>
+              <a:t>Medical Physics · Nuclear Eng. · Data Analytics cohorts</a:t>
+            </a:r>
+          </a:p>
+        </p:txBody>
+      </p:sp>
+      <p:sp>
+        <p:nvSpPr>
+          <p:cNvPr id="22" name="Rectangle 21"/>
+          <p:cNvSpPr/>
+          <p:nvPr/>
+        </p:nvSpPr>
+        <p:spPr>
+          <a:xfrm>
+            <a:off x="5413248" y="5074920"/>
+            <a:ext cx="6199631" cy="411480"/>
+          </a:xfrm>
+          <a:prstGeom prst="rect">
+            <a:avLst/>
+          </a:prstGeom>
+          <a:solidFill>
+            <a:srgbClr val="B32B2B"/>
+          </a:solidFill>
+          <a:ln>
+            <a:noFill/>
+          </a:ln>
+          <a:effectLst/>
+        </p:spPr>
+        <p:style>
+          <a:lnRef idx="1">
+            <a:schemeClr val="accent1"/>
+          </a:lnRef>
+          <a:fillRef idx="3">
+            <a:schemeClr val="accent1"/>
+          </a:fillRef>
+          <a:effectRef idx="2">
+            <a:schemeClr val="accent1"/>
+          </a:effectRef>
+          <a:fontRef idx="minor">
+            <a:schemeClr val="lt1"/>
+          </a:fontRef>
+        </p:style>
+        <p:txBody>
+          <a:bodyPr rtlCol="0" anchor="ctr"/>
+          <a:lstStyle/>
+          <a:p>
+            <a:pPr algn="ctr"/>
+          </a:p>
+        </p:txBody>
+      </p:sp>
+      <p:sp>
+        <p:nvSpPr>
+          <p:cNvPr id="23" name="Rectangle 22"/>
+          <p:cNvSpPr/>
+          <p:nvPr/>
+        </p:nvSpPr>
+        <p:spPr>
+          <a:xfrm>
+            <a:off x="5413248" y="5074920"/>
+            <a:ext cx="73152" cy="411480"/>
+          </a:xfrm>
+          <a:prstGeom prst="rect">
+            <a:avLst/>
+          </a:prstGeom>
+          <a:solidFill>
+            <a:srgbClr val="FFFFFF"/>
+          </a:solidFill>
+          <a:ln>
+            <a:noFill/>
+          </a:ln>
+          <a:effectLst/>
+        </p:spPr>
+        <p:style>
+          <a:lnRef idx="1">
+            <a:schemeClr val="accent1"/>
+          </a:lnRef>
+          <a:fillRef idx="3">
+            <a:schemeClr val="accent1"/>
+          </a:fillRef>
+          <a:effectRef idx="2">
+            <a:schemeClr val="accent1"/>
+          </a:effectRef>
+          <a:fontRef idx="minor">
+            <a:schemeClr val="lt1"/>
+          </a:fontRef>
+        </p:style>
+        <p:txBody>
+          <a:bodyPr rtlCol="0" anchor="ctr"/>
+          <a:lstStyle/>
+          <a:p>
+            <a:pPr algn="ctr"/>
+          </a:p>
+        </p:txBody>
+      </p:sp>
+      <p:sp>
+        <p:nvSpPr>
+          <p:cNvPr id="24" name="TextBox 23"/>
+          <p:cNvSpPr txBox="1"/>
+          <p:nvPr/>
+        </p:nvSpPr>
+        <p:spPr>
+          <a:xfrm>
+            <a:off x="5522976" y="5093208"/>
+            <a:ext cx="6062471" cy="365760"/>
+          </a:xfrm>
+          <a:prstGeom prst="rect">
+            <a:avLst/>
+          </a:prstGeom>
+          <a:noFill/>
+        </p:spPr>
+        <p:txBody>
+          <a:bodyPr wrap="square" anchor="t" lIns="0" rIns="0" tIns="0" bIns="0">
+            <a:spAutoFit/>
+          </a:bodyPr>
+          <a:lstStyle/>
+          <a:p>
+            <a:pPr algn="l">
+              <a:lnSpc>
+                <a:spcPct val="120000"/>
+              </a:lnSpc>
+            </a:pPr>
+            <a:r>
+              <a:rPr sz="1100" b="1" i="0">
+                <a:solidFill>
+                  <a:srgbClr val="06142A"/>
+                </a:solidFill>
+                <a:latin typeface="Calibri"/>
+              </a:rPr>
+              <a:t>SMR  IMPLEMENTATION</a:t>
+            </a:r>
+          </a:p>
+        </p:txBody>
+      </p:sp>
+      <p:sp>
+        <p:nvSpPr>
+          <p:cNvPr id="25" name="TextBox 24"/>
+          <p:cNvSpPr txBox="1"/>
+          <p:nvPr/>
+        </p:nvSpPr>
+        <p:spPr>
+          <a:xfrm>
+            <a:off x="1280160" y="5532120"/>
+            <a:ext cx="10332719" cy="274320"/>
+          </a:xfrm>
+          <a:prstGeom prst="rect">
+            <a:avLst/>
+          </a:prstGeom>
+          <a:noFill/>
+        </p:spPr>
+        <p:txBody>
+          <a:bodyPr wrap="square" anchor="t" lIns="0" rIns="0" tIns="0" bIns="0">
+            <a:spAutoFit/>
+          </a:bodyPr>
+          <a:lstStyle/>
+          <a:p>
+            <a:pPr algn="l">
+              <a:lnSpc>
+                <a:spcPct val="120000"/>
+              </a:lnSpc>
+            </a:pPr>
+            <a:r>
+              <a:rPr sz="1000" b="0" i="0">
+                <a:solidFill>
+                  <a:srgbClr val="CFD8E3"/>
+                </a:solidFill>
+                <a:latin typeface="Calibri"/>
+              </a:rPr>
+              <a:t>Partner selection (ROSATOM / NuScale / Westinghouse) · Pre-feas · EPC · First criticality</a:t>
+            </a:r>
+          </a:p>
+        </p:txBody>
+      </p:sp>
+      <p:sp>
+        <p:nvSpPr>
+          <p:cNvPr id="26" name="Rectangle 25"/>
+          <p:cNvSpPr/>
+          <p:nvPr/>
+        </p:nvSpPr>
+        <p:spPr>
+          <a:xfrm>
+            <a:off x="548640" y="5989320"/>
+            <a:ext cx="11064240" cy="502920"/>
           </a:xfrm>
           <a:prstGeom prst="rect">
             <a:avLst/>
@@ -8302,175 +11547,14 @@
       </p:sp>
       <p:sp>
         <p:nvSpPr>
-          <p:cNvPr id="10" name="Rectangle 9"/>
+          <p:cNvPr id="27" name="Rectangle 26"/>
           <p:cNvSpPr/>
           <p:nvPr/>
         </p:nvSpPr>
         <p:spPr>
           <a:xfrm>
-            <a:off x="1600200" y="2423160"/>
-            <a:ext cx="10058400" cy="36576"/>
-          </a:xfrm>
-          <a:prstGeom prst="rect">
-            <a:avLst/>
-          </a:prstGeom>
-          <a:solidFill>
-            <a:srgbClr val="334466"/>
-          </a:solidFill>
-          <a:ln>
-            <a:noFill/>
-          </a:ln>
-          <a:effectLst/>
-        </p:spPr>
-        <p:style>
-          <a:lnRef idx="1">
-            <a:schemeClr val="accent1"/>
-          </a:lnRef>
-          <a:fillRef idx="3">
-            <a:schemeClr val="accent1"/>
-          </a:fillRef>
-          <a:effectRef idx="2">
-            <a:schemeClr val="accent1"/>
-          </a:effectRef>
-          <a:fontRef idx="minor">
-            <a:schemeClr val="lt1"/>
-          </a:fontRef>
-        </p:style>
-        <p:txBody>
-          <a:bodyPr rtlCol="0" anchor="ctr"/>
-          <a:lstStyle/>
-          <a:p>
-            <a:pPr algn="ctr"/>
-          </a:p>
-        </p:txBody>
-      </p:sp>
-      <p:sp>
-        <p:nvSpPr>
-          <p:cNvPr id="11" name="TextBox 10"/>
-          <p:cNvSpPr txBox="1"/>
-          <p:nvPr/>
-        </p:nvSpPr>
-        <p:spPr>
-          <a:xfrm>
-            <a:off x="1828800" y="2542032"/>
-            <a:ext cx="1828800" cy="274320"/>
-          </a:xfrm>
-          <a:prstGeom prst="rect">
-            <a:avLst/>
-          </a:prstGeom>
-          <a:noFill/>
-        </p:spPr>
-        <p:txBody>
-          <a:bodyPr wrap="square" anchor="t" lIns="0" rIns="0" tIns="0" bIns="0">
-            <a:spAutoFit/>
-          </a:bodyPr>
-          <a:lstStyle/>
-          <a:p>
-            <a:pPr algn="l">
-              <a:lnSpc>
-                <a:spcPct val="115000"/>
-              </a:lnSpc>
-            </a:pPr>
-            <a:r>
-              <a:rPr sz="1100" b="1" i="0">
-                <a:solidFill>
-                  <a:srgbClr val="E8A860"/>
-                </a:solidFill>
-                <a:latin typeface="Calibri"/>
-              </a:rPr>
-              <a:t>ENACT</a:t>
-            </a:r>
-          </a:p>
-        </p:txBody>
-      </p:sp>
-      <p:sp>
-        <p:nvSpPr>
-          <p:cNvPr id="12" name="TextBox 11"/>
-          <p:cNvSpPr txBox="1"/>
-          <p:nvPr/>
-        </p:nvSpPr>
-        <p:spPr>
-          <a:xfrm>
-            <a:off x="1828800" y="2788920"/>
-            <a:ext cx="9601200" cy="365760"/>
-          </a:xfrm>
-          <a:prstGeom prst="rect">
-            <a:avLst/>
-          </a:prstGeom>
-          <a:noFill/>
-        </p:spPr>
-        <p:txBody>
-          <a:bodyPr wrap="square" anchor="t" lIns="0" rIns="0" tIns="0" bIns="0">
-            <a:spAutoFit/>
-          </a:bodyPr>
-          <a:lstStyle/>
-          <a:p>
-            <a:pPr algn="l">
-              <a:lnSpc>
-                <a:spcPct val="115000"/>
-              </a:lnSpc>
-            </a:pPr>
-            <a:r>
-              <a:rPr sz="1800" b="1" i="0">
-                <a:solidFill>
-                  <a:srgbClr val="FFFFFF"/>
-                </a:solidFill>
-                <a:latin typeface="Calibri"/>
-              </a:rPr>
-              <a:t>Pass the Nuclear Bill.</a:t>
-            </a:r>
-          </a:p>
-        </p:txBody>
-      </p:sp>
-      <p:sp>
-        <p:nvSpPr>
-          <p:cNvPr id="13" name="TextBox 12"/>
-          <p:cNvSpPr txBox="1"/>
-          <p:nvPr/>
-        </p:nvSpPr>
-        <p:spPr>
-          <a:xfrm>
-            <a:off x="1828800" y="3108960"/>
-            <a:ext cx="9601200" cy="457200"/>
-          </a:xfrm>
-          <a:prstGeom prst="rect">
-            <a:avLst/>
-          </a:prstGeom>
-          <a:noFill/>
-        </p:spPr>
-        <p:txBody>
-          <a:bodyPr wrap="square" anchor="t" lIns="0" rIns="0" tIns="0" bIns="0">
-            <a:spAutoFit/>
-          </a:bodyPr>
-          <a:lstStyle/>
-          <a:p>
-            <a:pPr algn="l">
-              <a:lnSpc>
-                <a:spcPct val="125000"/>
-              </a:lnSpc>
-            </a:pPr>
-            <a:r>
-              <a:rPr sz="1200" b="0" i="0">
-                <a:solidFill>
-                  <a:srgbClr val="CFD8E3"/>
-                </a:solidFill>
-                <a:latin typeface="Calibri"/>
-              </a:rPr>
-              <a:t>Empower NSPA as an IAEA-aligned independent regulator. Without it, every other step is symbolic.</a:t>
-            </a:r>
-          </a:p>
-        </p:txBody>
-      </p:sp>
-      <p:sp>
-        <p:nvSpPr>
-          <p:cNvPr id="14" name="Rectangle 13"/>
-          <p:cNvSpPr/>
-          <p:nvPr/>
-        </p:nvSpPr>
-        <p:spPr>
-          <a:xfrm>
-            <a:off x="548640" y="3611880"/>
-            <a:ext cx="1051560" cy="1097280"/>
+            <a:off x="548640" y="5989320"/>
+            <a:ext cx="91440" cy="502920"/>
           </a:xfrm>
           <a:prstGeom prst="rect">
             <a:avLst/>
@@ -8507,141 +11591,14 @@
       </p:sp>
       <p:sp>
         <p:nvSpPr>
-          <p:cNvPr id="15" name="TextBox 14"/>
+          <p:cNvPr id="28" name="TextBox 27"/>
           <p:cNvSpPr txBox="1"/>
           <p:nvPr/>
         </p:nvSpPr>
         <p:spPr>
           <a:xfrm>
-            <a:off x="548640" y="3904488"/>
-            <a:ext cx="1051560" cy="640080"/>
-          </a:xfrm>
-          <a:prstGeom prst="rect">
-            <a:avLst/>
-          </a:prstGeom>
-          <a:noFill/>
-        </p:spPr>
-        <p:txBody>
-          <a:bodyPr wrap="square" anchor="t" lIns="0" rIns="0" tIns="0" bIns="0">
-            <a:spAutoFit/>
-          </a:bodyPr>
-          <a:lstStyle/>
-          <a:p>
-            <a:pPr algn="ctr">
-              <a:lnSpc>
-                <a:spcPct val="115000"/>
-              </a:lnSpc>
-            </a:pPr>
-            <a:r>
-              <a:rPr sz="3400" b="1" i="0">
-                <a:solidFill>
-                  <a:srgbClr val="06142A"/>
-                </a:solidFill>
-                <a:latin typeface="Calibri"/>
-              </a:rPr>
-              <a:t>02</a:t>
-            </a:r>
-          </a:p>
-        </p:txBody>
-      </p:sp>
-      <p:sp>
-        <p:nvSpPr>
-          <p:cNvPr id="16" name="Rectangle 15"/>
-          <p:cNvSpPr/>
-          <p:nvPr/>
-        </p:nvSpPr>
-        <p:spPr>
-          <a:xfrm>
-            <a:off x="1600200" y="3611880"/>
-            <a:ext cx="10058400" cy="1097280"/>
-          </a:xfrm>
-          <a:prstGeom prst="rect">
-            <a:avLst/>
-          </a:prstGeom>
-          <a:solidFill>
-            <a:srgbClr val="12284A"/>
-          </a:solidFill>
-          <a:ln>
-            <a:noFill/>
-          </a:ln>
-          <a:effectLst/>
-        </p:spPr>
-        <p:style>
-          <a:lnRef idx="1">
-            <a:schemeClr val="accent1"/>
-          </a:lnRef>
-          <a:fillRef idx="3">
-            <a:schemeClr val="accent1"/>
-          </a:fillRef>
-          <a:effectRef idx="2">
-            <a:schemeClr val="accent1"/>
-          </a:effectRef>
-          <a:fontRef idx="minor">
-            <a:schemeClr val="lt1"/>
-          </a:fontRef>
-        </p:style>
-        <p:txBody>
-          <a:bodyPr rtlCol="0" anchor="ctr"/>
-          <a:lstStyle/>
-          <a:p>
-            <a:pPr algn="ctr"/>
-          </a:p>
-        </p:txBody>
-      </p:sp>
-      <p:sp>
-        <p:nvSpPr>
-          <p:cNvPr id="17" name="Rectangle 16"/>
-          <p:cNvSpPr/>
-          <p:nvPr/>
-        </p:nvSpPr>
-        <p:spPr>
-          <a:xfrm>
-            <a:off x="1600200" y="3611880"/>
-            <a:ext cx="10058400" cy="36576"/>
-          </a:xfrm>
-          <a:prstGeom prst="rect">
-            <a:avLst/>
-          </a:prstGeom>
-          <a:solidFill>
-            <a:srgbClr val="334466"/>
-          </a:solidFill>
-          <a:ln>
-            <a:noFill/>
-          </a:ln>
-          <a:effectLst/>
-        </p:spPr>
-        <p:style>
-          <a:lnRef idx="1">
-            <a:schemeClr val="accent1"/>
-          </a:lnRef>
-          <a:fillRef idx="3">
-            <a:schemeClr val="accent1"/>
-          </a:fillRef>
-          <a:effectRef idx="2">
-            <a:schemeClr val="accent1"/>
-          </a:effectRef>
-          <a:fontRef idx="minor">
-            <a:schemeClr val="lt1"/>
-          </a:fontRef>
-        </p:style>
-        <p:txBody>
-          <a:bodyPr rtlCol="0" anchor="ctr"/>
-          <a:lstStyle/>
-          <a:p>
-            <a:pPr algn="ctr"/>
-          </a:p>
-        </p:txBody>
-      </p:sp>
-      <p:sp>
-        <p:nvSpPr>
-          <p:cNvPr id="18" name="TextBox 17"/>
-          <p:cNvSpPr txBox="1"/>
-          <p:nvPr/>
-        </p:nvSpPr>
-        <p:spPr>
-          <a:xfrm>
-            <a:off x="1828800" y="3730752"/>
-            <a:ext cx="1828800" cy="274320"/>
+            <a:off x="777240" y="6053328"/>
+            <a:ext cx="10698480" cy="411480"/>
           </a:xfrm>
           <a:prstGeom prst="rect">
             <a:avLst/>
@@ -8660,27 +11617,36 @@
               </a:lnSpc>
             </a:pPr>
             <a:r>
-              <a:rPr sz="1100" b="1" i="0">
-                <a:solidFill>
-                  <a:srgbClr val="E8A860"/>
+              <a:rPr sz="1300" b="0" i="0">
+                <a:solidFill>
+                  <a:srgbClr val="FFFFFF"/>
                 </a:solidFill>
                 <a:latin typeface="Calibri"/>
               </a:rPr>
-              <a:t>EQUIP</a:t>
-            </a:r>
-          </a:p>
-        </p:txBody>
-      </p:sp>
-      <p:sp>
-        <p:nvSpPr>
-          <p:cNvPr id="19" name="TextBox 18"/>
+              <a:t>We have the minerals. We have the regulator. We have the data capacity. </a:t>
+            </a:r>
+            <a:r>
+              <a:rPr sz="1300" b="1" i="0">
+                <a:solidFill>
+                  <a:srgbClr val="E8A860"/>
+                </a:solidFill>
+                <a:latin typeface="Calibri"/>
+              </a:rPr>
+              <a:t>Zambia is ready to start the nuclear conversation.</a:t>
+            </a:r>
+          </a:p>
+        </p:txBody>
+      </p:sp>
+      <p:sp>
+        <p:nvSpPr>
+          <p:cNvPr id="29" name="TextBox 28"/>
           <p:cNvSpPr txBox="1"/>
           <p:nvPr/>
         </p:nvSpPr>
         <p:spPr>
           <a:xfrm>
-            <a:off x="1828800" y="3977640"/>
-            <a:ext cx="9601200" cy="365760"/>
+            <a:off x="548640" y="6583680"/>
+            <a:ext cx="11064240" cy="228600"/>
           </a:xfrm>
           <a:prstGeom prst="rect">
             <a:avLst/>
@@ -8693,477 +11659,19 @@
           </a:bodyPr>
           <a:lstStyle/>
           <a:p>
-            <a:pPr algn="l">
+            <a:pPr algn="ctr">
               <a:lnSpc>
-                <a:spcPct val="115000"/>
+                <a:spcPct val="120000"/>
               </a:lnSpc>
             </a:pPr>
             <a:r>
-              <a:rPr sz="1800" b="1" i="0">
-                <a:solidFill>
-                  <a:srgbClr val="FFFFFF"/>
+              <a:rPr sz="800" b="0" i="1">
+                <a:solidFill>
+                  <a:srgbClr val="8B97A8"/>
                 </a:solidFill>
                 <a:latin typeface="Calibri"/>
               </a:rPr>
-              <a:t>Fund radiological monitoring — starting in Siavonga.</a:t>
-            </a:r>
-          </a:p>
-        </p:txBody>
-      </p:sp>
-      <p:sp>
-        <p:nvSpPr>
-          <p:cNvPr id="20" name="TextBox 19"/>
-          <p:cNvSpPr txBox="1"/>
-          <p:nvPr/>
-        </p:nvSpPr>
-        <p:spPr>
-          <a:xfrm>
-            <a:off x="1828800" y="4297680"/>
-            <a:ext cx="9601200" cy="457200"/>
-          </a:xfrm>
-          <a:prstGeom prst="rect">
-            <a:avLst/>
-          </a:prstGeom>
-          <a:noFill/>
-        </p:spPr>
-        <p:txBody>
-          <a:bodyPr wrap="square" anchor="t" lIns="0" rIns="0" tIns="0" bIns="0">
-            <a:spAutoFit/>
-          </a:bodyPr>
-          <a:lstStyle/>
-          <a:p>
-            <a:pPr algn="l">
-              <a:lnSpc>
-                <a:spcPct val="125000"/>
-              </a:lnSpc>
-            </a:pPr>
-            <a:r>
-              <a:rPr sz="1200" b="0" i="0">
-                <a:solidFill>
-                  <a:srgbClr val="CFD8E3"/>
-                </a:solidFill>
-                <a:latin typeface="Calibri"/>
-              </a:rPr>
-              <a:t>Convert invisible risk into measured data. No Zambian community should live next to uranium without instruments.</a:t>
-            </a:r>
-          </a:p>
-        </p:txBody>
-      </p:sp>
-      <p:sp>
-        <p:nvSpPr>
-          <p:cNvPr id="21" name="Rectangle 20"/>
-          <p:cNvSpPr/>
-          <p:nvPr/>
-        </p:nvSpPr>
-        <p:spPr>
-          <a:xfrm>
-            <a:off x="548640" y="4800600"/>
-            <a:ext cx="1051560" cy="1097280"/>
-          </a:xfrm>
-          <a:prstGeom prst="rect">
-            <a:avLst/>
-          </a:prstGeom>
-          <a:solidFill>
-            <a:srgbClr val="CC7A2E"/>
-          </a:solidFill>
-          <a:ln>
-            <a:noFill/>
-          </a:ln>
-          <a:effectLst/>
-        </p:spPr>
-        <p:style>
-          <a:lnRef idx="1">
-            <a:schemeClr val="accent1"/>
-          </a:lnRef>
-          <a:fillRef idx="3">
-            <a:schemeClr val="accent1"/>
-          </a:fillRef>
-          <a:effectRef idx="2">
-            <a:schemeClr val="accent1"/>
-          </a:effectRef>
-          <a:fontRef idx="minor">
-            <a:schemeClr val="lt1"/>
-          </a:fontRef>
-        </p:style>
-        <p:txBody>
-          <a:bodyPr rtlCol="0" anchor="ctr"/>
-          <a:lstStyle/>
-          <a:p>
-            <a:pPr algn="ctr"/>
-          </a:p>
-        </p:txBody>
-      </p:sp>
-      <p:sp>
-        <p:nvSpPr>
-          <p:cNvPr id="22" name="TextBox 21"/>
-          <p:cNvSpPr txBox="1"/>
-          <p:nvPr/>
-        </p:nvSpPr>
-        <p:spPr>
-          <a:xfrm>
-            <a:off x="548640" y="5093208"/>
-            <a:ext cx="1051560" cy="640080"/>
-          </a:xfrm>
-          <a:prstGeom prst="rect">
-            <a:avLst/>
-          </a:prstGeom>
-          <a:noFill/>
-        </p:spPr>
-        <p:txBody>
-          <a:bodyPr wrap="square" anchor="t" lIns="0" rIns="0" tIns="0" bIns="0">
-            <a:spAutoFit/>
-          </a:bodyPr>
-          <a:lstStyle/>
-          <a:p>
-            <a:pPr algn="ctr">
-              <a:lnSpc>
-                <a:spcPct val="115000"/>
-              </a:lnSpc>
-            </a:pPr>
-            <a:r>
-              <a:rPr sz="3400" b="1" i="0">
-                <a:solidFill>
-                  <a:srgbClr val="06142A"/>
-                </a:solidFill>
-                <a:latin typeface="Calibri"/>
-              </a:rPr>
-              <a:t>03</a:t>
-            </a:r>
-          </a:p>
-        </p:txBody>
-      </p:sp>
-      <p:sp>
-        <p:nvSpPr>
-          <p:cNvPr id="23" name="Rectangle 22"/>
-          <p:cNvSpPr/>
-          <p:nvPr/>
-        </p:nvSpPr>
-        <p:spPr>
-          <a:xfrm>
-            <a:off x="1600200" y="4800600"/>
-            <a:ext cx="10058400" cy="1097280"/>
-          </a:xfrm>
-          <a:prstGeom prst="rect">
-            <a:avLst/>
-          </a:prstGeom>
-          <a:solidFill>
-            <a:srgbClr val="12284A"/>
-          </a:solidFill>
-          <a:ln>
-            <a:noFill/>
-          </a:ln>
-          <a:effectLst/>
-        </p:spPr>
-        <p:style>
-          <a:lnRef idx="1">
-            <a:schemeClr val="accent1"/>
-          </a:lnRef>
-          <a:fillRef idx="3">
-            <a:schemeClr val="accent1"/>
-          </a:fillRef>
-          <a:effectRef idx="2">
-            <a:schemeClr val="accent1"/>
-          </a:effectRef>
-          <a:fontRef idx="minor">
-            <a:schemeClr val="lt1"/>
-          </a:fontRef>
-        </p:style>
-        <p:txBody>
-          <a:bodyPr rtlCol="0" anchor="ctr"/>
-          <a:lstStyle/>
-          <a:p>
-            <a:pPr algn="ctr"/>
-          </a:p>
-        </p:txBody>
-      </p:sp>
-      <p:sp>
-        <p:nvSpPr>
-          <p:cNvPr id="24" name="Rectangle 23"/>
-          <p:cNvSpPr/>
-          <p:nvPr/>
-        </p:nvSpPr>
-        <p:spPr>
-          <a:xfrm>
-            <a:off x="1600200" y="4800600"/>
-            <a:ext cx="10058400" cy="36576"/>
-          </a:xfrm>
-          <a:prstGeom prst="rect">
-            <a:avLst/>
-          </a:prstGeom>
-          <a:solidFill>
-            <a:srgbClr val="334466"/>
-          </a:solidFill>
-          <a:ln>
-            <a:noFill/>
-          </a:ln>
-          <a:effectLst/>
-        </p:spPr>
-        <p:style>
-          <a:lnRef idx="1">
-            <a:schemeClr val="accent1"/>
-          </a:lnRef>
-          <a:fillRef idx="3">
-            <a:schemeClr val="accent1"/>
-          </a:fillRef>
-          <a:effectRef idx="2">
-            <a:schemeClr val="accent1"/>
-          </a:effectRef>
-          <a:fontRef idx="minor">
-            <a:schemeClr val="lt1"/>
-          </a:fontRef>
-        </p:style>
-        <p:txBody>
-          <a:bodyPr rtlCol="0" anchor="ctr"/>
-          <a:lstStyle/>
-          <a:p>
-            <a:pPr algn="ctr"/>
-          </a:p>
-        </p:txBody>
-      </p:sp>
-      <p:sp>
-        <p:nvSpPr>
-          <p:cNvPr id="25" name="TextBox 24"/>
-          <p:cNvSpPr txBox="1"/>
-          <p:nvPr/>
-        </p:nvSpPr>
-        <p:spPr>
-          <a:xfrm>
-            <a:off x="1828800" y="4919472"/>
-            <a:ext cx="1828800" cy="274320"/>
-          </a:xfrm>
-          <a:prstGeom prst="rect">
-            <a:avLst/>
-          </a:prstGeom>
-          <a:noFill/>
-        </p:spPr>
-        <p:txBody>
-          <a:bodyPr wrap="square" anchor="t" lIns="0" rIns="0" tIns="0" bIns="0">
-            <a:spAutoFit/>
-          </a:bodyPr>
-          <a:lstStyle/>
-          <a:p>
-            <a:pPr algn="l">
-              <a:lnSpc>
-                <a:spcPct val="115000"/>
-              </a:lnSpc>
-            </a:pPr>
-            <a:r>
-              <a:rPr sz="1100" b="1" i="0">
-                <a:solidFill>
-                  <a:srgbClr val="E8A860"/>
-                </a:solidFill>
-                <a:latin typeface="Calibri"/>
-              </a:rPr>
-              <a:t>EXECUTE</a:t>
-            </a:r>
-          </a:p>
-        </p:txBody>
-      </p:sp>
-      <p:sp>
-        <p:nvSpPr>
-          <p:cNvPr id="26" name="TextBox 25"/>
-          <p:cNvSpPr txBox="1"/>
-          <p:nvPr/>
-        </p:nvSpPr>
-        <p:spPr>
-          <a:xfrm>
-            <a:off x="1828800" y="5166360"/>
-            <a:ext cx="9601200" cy="365760"/>
-          </a:xfrm>
-          <a:prstGeom prst="rect">
-            <a:avLst/>
-          </a:prstGeom>
-          <a:noFill/>
-        </p:spPr>
-        <p:txBody>
-          <a:bodyPr wrap="square" anchor="t" lIns="0" rIns="0" tIns="0" bIns="0">
-            <a:spAutoFit/>
-          </a:bodyPr>
-          <a:lstStyle/>
-          <a:p>
-            <a:pPr algn="l">
-              <a:lnSpc>
-                <a:spcPct val="115000"/>
-              </a:lnSpc>
-            </a:pPr>
-            <a:r>
-              <a:rPr sz="1800" b="1" i="0">
-                <a:solidFill>
-                  <a:srgbClr val="FFFFFF"/>
-                </a:solidFill>
-                <a:latin typeface="Calibri"/>
-              </a:rPr>
-              <a:t>Greenlight CNST + pre-feasibility for 2,000 MW.</a:t>
-            </a:r>
-          </a:p>
-        </p:txBody>
-      </p:sp>
-      <p:sp>
-        <p:nvSpPr>
-          <p:cNvPr id="27" name="TextBox 26"/>
-          <p:cNvSpPr txBox="1"/>
-          <p:nvPr/>
-        </p:nvSpPr>
-        <p:spPr>
-          <a:xfrm>
-            <a:off x="1828800" y="5486400"/>
-            <a:ext cx="9601200" cy="457200"/>
-          </a:xfrm>
-          <a:prstGeom prst="rect">
-            <a:avLst/>
-          </a:prstGeom>
-          <a:noFill/>
-        </p:spPr>
-        <p:txBody>
-          <a:bodyPr wrap="square" anchor="t" lIns="0" rIns="0" tIns="0" bIns="0">
-            <a:spAutoFit/>
-          </a:bodyPr>
-          <a:lstStyle/>
-          <a:p>
-            <a:pPr algn="l">
-              <a:lnSpc>
-                <a:spcPct val="125000"/>
-              </a:lnSpc>
-            </a:pPr>
-            <a:r>
-              <a:rPr sz="1200" b="0" i="0">
-                <a:solidFill>
-                  <a:srgbClr val="CFD8E3"/>
-                </a:solidFill>
-                <a:latin typeface="Calibri"/>
-              </a:rPr>
-              <a:t>Use the partnerships we already signed. Stop re-debating what Cabinet already approved in 2020.</a:t>
-            </a:r>
-          </a:p>
-        </p:txBody>
-      </p:sp>
-      <p:cxnSp>
-        <p:nvCxnSpPr>
-          <p:cNvPr id="28" name="Connector 27"/>
-          <p:cNvCxnSpPr/>
-          <p:nvPr/>
-        </p:nvCxnSpPr>
-        <p:spPr>
-          <a:xfrm>
-            <a:off x="548640" y="6080760"/>
-            <a:ext cx="11064240" cy="0"/>
-          </a:xfrm>
-          <a:prstGeom prst="line">
-            <a:avLst/>
-          </a:prstGeom>
-          <a:ln w="6350">
-            <a:solidFill>
-              <a:srgbClr val="334466"/>
-            </a:solidFill>
-          </a:ln>
-        </p:spPr>
-        <p:style>
-          <a:lnRef idx="2">
-            <a:schemeClr val="accent1"/>
-          </a:lnRef>
-          <a:fillRef idx="0">
-            <a:schemeClr val="accent1"/>
-          </a:fillRef>
-          <a:effectRef idx="1">
-            <a:schemeClr val="accent1"/>
-          </a:effectRef>
-          <a:fontRef idx="minor">
-            <a:schemeClr val="tx1"/>
-          </a:fontRef>
-        </p:style>
-      </p:cxnSp>
-      <p:sp>
-        <p:nvSpPr>
-          <p:cNvPr id="29" name="TextBox 28"/>
-          <p:cNvSpPr txBox="1"/>
-          <p:nvPr/>
-        </p:nvSpPr>
-        <p:spPr>
-          <a:xfrm>
-            <a:off x="548640" y="6172200"/>
-            <a:ext cx="11064240" cy="457200"/>
-          </a:xfrm>
-          <a:prstGeom prst="rect">
-            <a:avLst/>
-          </a:prstGeom>
-          <a:noFill/>
-        </p:spPr>
-        <p:txBody>
-          <a:bodyPr wrap="square" anchor="t" lIns="0" rIns="0" tIns="0" bIns="0">
-            <a:spAutoFit/>
-          </a:bodyPr>
-          <a:lstStyle/>
-          <a:p>
-            <a:pPr algn="ctr">
-              <a:lnSpc>
-                <a:spcPct val="115000"/>
-              </a:lnSpc>
-            </a:pPr>
-            <a:r>
-              <a:rPr sz="1400" b="0" i="0">
-                <a:solidFill>
-                  <a:srgbClr val="FFFFFF"/>
-                </a:solidFill>
-                <a:latin typeface="Calibri"/>
-              </a:rPr>
-              <a:t>The fuel is under our feet.  </a:t>
-            </a:r>
-            <a:r>
-              <a:rPr sz="1400" b="0" i="0">
-                <a:solidFill>
-                  <a:srgbClr val="FFFFFF"/>
-                </a:solidFill>
-                <a:latin typeface="Calibri"/>
-              </a:rPr>
-              <a:t>The expertise is on our payroll.  </a:t>
-            </a:r>
-            <a:r>
-              <a:rPr sz="1400" b="1" i="0">
-                <a:solidFill>
-                  <a:srgbClr val="E8A860"/>
-                </a:solidFill>
-                <a:latin typeface="Calibri"/>
-              </a:rPr>
-              <a:t>The bill is on the table.</a:t>
-            </a:r>
-          </a:p>
-        </p:txBody>
-      </p:sp>
-      <p:sp>
-        <p:nvSpPr>
-          <p:cNvPr id="30" name="TextBox 29"/>
-          <p:cNvSpPr txBox="1"/>
-          <p:nvPr/>
-        </p:nvSpPr>
-        <p:spPr>
-          <a:xfrm>
-            <a:off x="548640" y="6492240"/>
-            <a:ext cx="11064240" cy="274320"/>
-          </a:xfrm>
-          <a:prstGeom prst="rect">
-            <a:avLst/>
-          </a:prstGeom>
-          <a:noFill/>
-        </p:spPr>
-        <p:txBody>
-          <a:bodyPr wrap="square" anchor="t" lIns="0" rIns="0" tIns="0" bIns="0">
-            <a:spAutoFit/>
-          </a:bodyPr>
-          <a:lstStyle/>
-          <a:p>
-            <a:pPr algn="ctr">
-              <a:lnSpc>
-                <a:spcPct val="115000"/>
-              </a:lnSpc>
-            </a:pPr>
-            <a:r>
-              <a:rPr sz="900" b="0" i="1">
-                <a:solidFill>
-                  <a:srgbClr val="8B97A8"/>
-                </a:solidFill>
-                <a:latin typeface="Calibri"/>
-              </a:rPr>
-              <a:t>5 / 5   ·   E. Mwaba   ·   Sources: 7NDP &amp; Vision 2030 · IAEA Milestones · Siavonga Uranium Baseline Survey 2024</a:t>
+              <a:t>8 / 8   ·   E. Mwaba   ·   Sources: DOE REMS 2024 · IAEA Milestones · 7NDP &amp; Vision 2030 · ZESCO 2023-24 · MoMMD · Siavonga Baseline 2024</a:t>
             </a:r>
           </a:p>
         </p:txBody>

--- a/The_Case_for_Nuclear_Power_in_Zambia.pptx
+++ b/The_Case_for_Nuclear_Power_in_Zambia.pptx
@@ -117,13 +117,12 @@
 <file path=ppt/charts/chart1.xml><?xml version="1.0" encoding="utf-8"?>
 <c:chartSpace xmlns:c="http://schemas.openxmlformats.org/drawingml/2006/chart" xmlns:a="http://schemas.openxmlformats.org/drawingml/2006/main" xmlns:r="http://schemas.openxmlformats.org/officeDocument/2006/relationships">
   <c:date1904 val="0"/>
-  <c:roundedCorners val="0"/>
   <c:chart>
     <c:autoTitleDeleted val="1"/>
     <c:plotArea>
-      <c:layout/>
-      <c:doughnutChart>
-        <c:varyColors val="1"/>
+      <c:barChart>
+        <c:barDir val="col"/>
+        <c:grouping val="clustered"/>
         <c:ser>
           <c:idx val="0"/>
           <c:order val="0"/>
@@ -133,7 +132,7 @@
               <c:strCache>
                 <c:ptCount val="1"/>
                 <c:pt idx="0">
-                  <c:v>2019 Mix</c:v>
+                  <c:v>MW lost to drought</c:v>
                 </c:pt>
               </c:strCache>
             </c:strRef>
@@ -142,7 +141,7 @@
             <c:idx val="0"/>
             <c:spPr>
               <a:solidFill>
-                <a:srgbClr val="B32B2B"/>
+                <a:srgbClr val="8C1F1F"/>
               </a:solidFill>
               <a:ln>
                 <a:noFill/>
@@ -153,7 +152,7 @@
             <c:idx val="1"/>
             <c:spPr>
               <a:solidFill>
-                <a:srgbClr val="555B66"/>
+                <a:srgbClr val="8C1F1F"/>
               </a:solidFill>
               <a:ln>
                 <a:noFill/>
@@ -164,18 +163,7 @@
             <c:idx val="2"/>
             <c:spPr>
               <a:solidFill>
-                <a:srgbClr val="E8A860"/>
-              </a:solidFill>
-              <a:ln>
-                <a:noFill/>
-              </a:ln>
-            </c:spPr>
-          </c:dPt>
-          <c:dPt>
-            <c:idx val="3"/>
-            <c:spPr>
-              <a:solidFill>
-                <a:srgbClr val="996B3A"/>
+                <a:srgbClr val="5C1212"/>
               </a:solidFill>
               <a:ln>
                 <a:noFill/>
@@ -184,41 +172,35 @@
           </c:dPt>
           <c:cat>
             <c:strRef>
-              <c:f>Sheet1!$A$2:$A$5</c:f>
+              <c:f>Sheet1!$A$2:$A$4</c:f>
               <c:strCache>
-                <c:ptCount val="4"/>
+                <c:ptCount val="3"/>
                 <c:pt idx="0">
-                  <c:v>Hydro</c:v>
+                  <c:v>2015/16</c:v>
                 </c:pt>
                 <c:pt idx="1">
-                  <c:v>Coal</c:v>
+                  <c:v>2018/19</c:v>
                 </c:pt>
                 <c:pt idx="2">
-                  <c:v>Solar</c:v>
-                </c:pt>
-                <c:pt idx="3">
-                  <c:v>HFO</c:v>
+                  <c:v>2023/24</c:v>
                 </c:pt>
               </c:strCache>
             </c:strRef>
           </c:cat>
           <c:val>
             <c:numRef>
-              <c:f>Sheet1!$B$2:$B$5</c:f>
+              <c:f>Sheet1!$B$2:$B$4</c:f>
               <c:numCache>
                 <c:formatCode>General</c:formatCode>
-                <c:ptCount val="4"/>
+                <c:ptCount val="3"/>
                 <c:pt idx="0">
-                  <c:v>84</c:v>
+                  <c:v>1000</c:v>
                 </c:pt>
                 <c:pt idx="1">
-                  <c:v>10</c:v>
+                  <c:v>872</c:v>
                 </c:pt>
                 <c:pt idx="2">
-                  <c:v>3</c:v>
-                </c:pt>
-                <c:pt idx="3">
-                  <c:v>3</c:v>
+                  <c:v>1430</c:v>
                 </c:pt>
               </c:numCache>
             </c:numRef>
@@ -232,12 +214,14 @@
               <a:pPr>
                 <a:defRPr sz="1100" b="1">
                   <a:solidFill>
-                    <a:srgbClr val="FFFFFF"/>
+                    <a:srgbClr val="5C1212"/>
                   </a:solidFill>
+                  <a:latin typeface="Calibri"/>
                 </a:defRPr>
               </a:pPr>
             </a:p>
           </c:txPr>
+          <c:dLblPos val="outEnd"/>
           <c:showLegendKey val="0"/>
           <c:showVal val="1"/>
           <c:showCatName val="0"/>
@@ -246,31 +230,68 @@
           <c:showBubbleSize val="0"/>
           <c:showLeaderLines val="1"/>
         </c:dLbls>
-        <c:firstSliceAng val="0"/>
-        <c:holeSize val="50"/>
-      </c:doughnutChart>
+        <c:axId val="-2068027336"/>
+        <c:axId val="-2113994440"/>
+      </c:barChart>
+      <c:catAx>
+        <c:axId val="-2068027336"/>
+        <c:scaling>
+          <c:orientation val="minMax"/>
+        </c:scaling>
+        <c:delete val="0"/>
+        <c:axPos val="b"/>
+        <c:majorTickMark val="out"/>
+        <c:minorTickMark val="none"/>
+        <c:tickLblPos val="nextTo"/>
+        <c:txPr>
+          <a:bodyPr/>
+          <a:lstStyle/>
+          <a:p>
+            <a:pPr>
+              <a:defRPr sz="1000">
+                <a:solidFill>
+                  <a:srgbClr val="3A404A"/>
+                </a:solidFill>
+                <a:latin typeface="Calibri"/>
+              </a:defRPr>
+            </a:pPr>
+          </a:p>
+        </c:txPr>
+        <c:crossAx val="-2113994440"/>
+        <c:crosses val="autoZero"/>
+        <c:auto val="1"/>
+        <c:lblAlgn val="ctr"/>
+        <c:lblOffset val="100"/>
+        <c:noMultiLvlLbl val="0"/>
+      </c:catAx>
+      <c:valAx>
+        <c:axId val="-2113994440"/>
+        <c:scaling/>
+        <c:delete val="0"/>
+        <c:axPos val="l"/>
+        <c:majorGridlines/>
+        <c:majorTickMark val="out"/>
+        <c:minorTickMark val="none"/>
+        <c:tickLblPos val="nextTo"/>
+        <c:txPr>
+          <a:bodyPr/>
+          <a:lstStyle/>
+          <a:p>
+            <a:pPr>
+              <a:defRPr sz="1000">
+                <a:solidFill>
+                  <a:srgbClr val="3A404A"/>
+                </a:solidFill>
+                <a:latin typeface="Calibri"/>
+              </a:defRPr>
+            </a:pPr>
+          </a:p>
+        </c:txPr>
+        <c:crossAx val="-2068027336"/>
+        <c:crosses val="autoZero"/>
+      </c:valAx>
     </c:plotArea>
-    <c:legend>
-      <c:legendPos val="b"/>
-      <c:layout/>
-      <c:overlay val="0"/>
-      <c:txPr>
-        <a:bodyPr/>
-        <a:lstStyle/>
-        <a:p>
-          <a:pPr>
-            <a:defRPr sz="1000">
-              <a:solidFill>
-                <a:srgbClr val="121824"/>
-              </a:solidFill>
-            </a:defRPr>
-          </a:pPr>
-        </a:p>
-      </c:txPr>
-    </c:legend>
-    <c:plotVisOnly val="1"/>
     <c:dispBlanksAs val="gap"/>
-    <c:showDLblsOverMax val="0"/>
   </c:chart>
   <c:txPr>
     <a:bodyPr/>
@@ -279,7 +300,7 @@
       <a:pPr>
         <a:defRPr sz="1800"/>
       </a:pPr>
-      <a:endParaRPr/>
+      <a:endParaRPr lang="en-US"/>
     </a:p>
   </c:txPr>
   <c:externalData r:id="rId1">
@@ -315,7 +336,7 @@
             <c:idx val="0"/>
             <c:spPr>
               <a:solidFill>
-                <a:srgbClr val="1B5E3A"/>
+                <a:srgbClr val="14402C"/>
               </a:solidFill>
               <a:ln>
                 <a:noFill/>
@@ -326,7 +347,7 @@
             <c:idx val="1"/>
             <c:spPr>
               <a:solidFill>
-                <a:srgbClr val="CC7A2E"/>
+                <a:srgbClr val="CFA33C"/>
               </a:solidFill>
               <a:ln>
                 <a:noFill/>
@@ -337,7 +358,7 @@
             <c:idx val="2"/>
             <c:spPr>
               <a:solidFill>
-                <a:srgbClr val="B32B2B"/>
+                <a:srgbClr val="8C1F1F"/>
               </a:solidFill>
               <a:ln>
                 <a:noFill/>
@@ -386,9 +407,9 @@
             <a:lstStyle/>
             <a:p>
               <a:pPr>
-                <a:defRPr sz="1000" b="1">
+                <a:defRPr sz="1100" b="1">
                   <a:solidFill>
-                    <a:srgbClr val="121824"/>
+                    <a:srgbClr val="082618"/>
                   </a:solidFill>
                   <a:latin typeface="Calibri"/>
                 </a:defRPr>
@@ -424,7 +445,7 @@
             <a:pPr>
               <a:defRPr sz="1000">
                 <a:solidFill>
-                  <a:srgbClr val="121824"/>
+                  <a:srgbClr val="3A404A"/>
                 </a:solidFill>
                 <a:latin typeface="Calibri"/>
               </a:defRPr>
@@ -454,7 +475,7 @@
             <a:pPr>
               <a:defRPr sz="1000">
                 <a:solidFill>
-                  <a:srgbClr val="121824"/>
+                  <a:srgbClr val="3A404A"/>
                 </a:solidFill>
                 <a:latin typeface="Calibri"/>
               </a:defRPr>
@@ -510,7 +531,7 @@
             <c:idx val="0"/>
             <c:spPr>
               <a:solidFill>
-                <a:srgbClr val="CC7A2E"/>
+                <a:srgbClr val="CFA33C"/>
               </a:solidFill>
               <a:ln>
                 <a:noFill/>
@@ -521,7 +542,7 @@
             <c:idx val="1"/>
             <c:spPr>
               <a:solidFill>
-                <a:srgbClr val="CC7A2E"/>
+                <a:srgbClr val="B54C1A"/>
               </a:solidFill>
               <a:ln>
                 <a:noFill/>
@@ -532,7 +553,7 @@
             <c:idx val="2"/>
             <c:spPr>
               <a:solidFill>
-                <a:srgbClr val="B32B2B"/>
+                <a:srgbClr val="8C1F1F"/>
               </a:solidFill>
               <a:ln>
                 <a:noFill/>
@@ -545,7 +566,7 @@
               <c:strCache>
                 <c:ptCount val="3"/>
                 <c:pt idx="0">
-                  <c:v>Current (~0.8 Mt)</c:v>
+                  <c:v>Today (~0.8 Mt)</c:v>
                 </c:pt>
                 <c:pt idx="1">
                   <c:v>Mid-Path (~1.5 Mt)</c:v>
@@ -581,9 +602,9 @@
             <a:lstStyle/>
             <a:p>
               <a:pPr>
-                <a:defRPr sz="1000" b="1">
+                <a:defRPr sz="1100" b="1">
                   <a:solidFill>
-                    <a:srgbClr val="121824"/>
+                    <a:srgbClr val="082618"/>
                   </a:solidFill>
                   <a:latin typeface="Calibri"/>
                 </a:defRPr>
@@ -619,7 +640,7 @@
             <a:pPr>
               <a:defRPr sz="1000">
                 <a:solidFill>
-                  <a:srgbClr val="121824"/>
+                  <a:srgbClr val="3A404A"/>
                 </a:solidFill>
                 <a:latin typeface="Calibri"/>
               </a:defRPr>
@@ -649,7 +670,7 @@
             <a:pPr>
               <a:defRPr sz="1000">
                 <a:solidFill>
-                  <a:srgbClr val="121824"/>
+                  <a:srgbClr val="3A404A"/>
                 </a:solidFill>
                 <a:latin typeface="Calibri"/>
               </a:defRPr>
@@ -1073,7 +1094,7 @@
           <a:lstStyle/>
           <a:p>
             <a:r>
-              <a:t>[Opening] Three minutes. One argument. The case I'm making is captured in one sentence — Zambia must convert its domestic uranium and its existing radiological safety expertise into nuclear baseload power, because hydropower alone has stopped being a strategy and become a climate gamble we cannot keep paying for.</a:t>
+              <a:t>[Opening] Three minutes. One argument. Captured in one sentence on this slide: Zambia is among the very few nations on earth that already owns the uranium, the regulator, and the nuclear policy — yet still loses billions every drought cycle. Only enacting the Nuclear Bill converts that paradox into drought-proof energy. Let me walk you through why this is no longer optional.</a:t>
             </a:r>
           </a:p>
         </p:txBody>
@@ -1143,7 +1164,7 @@
           <a:lstStyle/>
           <a:p>
             <a:r>
-              <a:t>[Use this slide if asked 'give me the pitch in one breath.' Read or paraphrase the paragraph as drafted; it lands on the final imperative: Sign it.]</a:t>
+              <a:t>[Read or paraphrase the paragraph at executive cadence. Build tension: paradox → drought cost ledger → Siavonga fear → DOE mastery proof → African competition → ask. End on the imperative: Sign it.]</a:t>
             </a:r>
           </a:p>
         </p:txBody>
@@ -1213,7 +1234,7 @@
           <a:lstStyle/>
           <a:p>
             <a:r>
-              <a:t>[The Hook] Picture two scenes. Siavonga: uranium in water, uranium in dust, no instruments — radiological fear. The U.S. nuclear enterprise: twenty-two thousand workers, 59.12 mrem average, every dose tracked for a decade — industrial mastery. Same element, two different outcomes. The variable is the system, not the uranium. Zambia must close that gap, and the expertise to do it already lives inside our Radiation Protection Authority.</a:t>
+              <a:t>[The Hook] Picture two scenes. Siavonga: uranium in the water, uranium in the dust, no instruments — radiological fear. The U.S. nuclear enterprise: twenty-two thousand workers, an average of 59.12 mrem a year, every dose tracked, every year, for a decade — industrial mastery. Same element. Same physics. Two completely different outcomes. The variable is the system around it. The Radiation Protection Authority already builds part of that system in Zambia. We just have not finished it.</a:t>
             </a:r>
           </a:p>
         </p:txBody>
@@ -1283,7 +1304,7 @@
           <a:lstStyle/>
           <a:p>
             <a:r>
-              <a:t>[The Vision] Eighty-four percent of Zambia's electricity comes from hydropower. That is not diversification — that is a single point of failure with a weather dependency. Nuclear, by contrast, runs at roughly ninety percent capacity factor regardless of rainfall. And Zambia is not starting cold: we are an IAEA Member State, and our Radiation Protection Authority has been managing radiological risk for decades. We cannot industrialise a country on intermittent power. Nuclear isn't just an option; it is a necessity for a drought-resilient Zambia.</a:t>
+              <a:t>[Hostage Math] Eighty-four percent of our electricity comes from hydropower. That single point of failure has now cost us three major drought events in a decade — each bigger than the last. The 2023-24 Kariba crisis triggered up to twenty-one hours of load-shedding a day in late 2024, throttling our copper mines and, by IMF estimates, evaporating about two percent of GDP. We cannot industrialise a country on rainfall. Nuclear is not an option here; it is a necessity.</a:t>
             </a:r>
           </a:p>
         </p:txBody>
@@ -1353,7 +1374,7 @@
           <a:lstStyle/>
           <a:p>
             <a:r>
-              <a:t>[Safety Mastery] My analysis of the U.S. DOE Radiation Exposure Monitoring System shows the average nuclear technician absorbs 59.12 mrem per year — that is one point two percent of the five thousand mrem federal limit. Less than the dose from routine medical imaging. The biggest fear in Zambia about nuclear is safety; this data says modern monitoring keeps workers safer than most office radiation environments. And between 2021 and 2024 the workforce grew while individual dose stayed flat. Safety scales. We have the analytical tools — this dashboard — to oversee a national programme today.</a:t>
+              <a:t>[Safety Mastery] Zambians fear nuclear the way most people fear flying — disproportionate to the data. My analysis of the U.S. Department of Energy REMS dataset shows the average nuclear technician absorbs 59.12 mrem per year. That is one point two percent of the federal occupational limit and roughly one fifth of the natural background dose any of us absorb just walking around. The biggest fear in Zambia is safety; the data says modern monitoring keeps workers safer than most office radiation environments. And the system scales — workforce grew while individual dose stayed flat. This is the analytical capacity we have already built locally; we are ready to oversee a national programme.</a:t>
             </a:r>
           </a:p>
         </p:txBody>
@@ -1423,7 +1444,7 @@
           <a:lstStyle/>
           <a:p>
             <a:r>
-              <a:t>[Strategic Resource] Zambia has known uranium-bearing zones across the North-Western and Southern provinces — Lumwana, Gwembe Valley, Mutanga. We currently export uranium as a raw mineral. Why? By developing nuclear power we move from raw-material exporter to high-tech energy producer. We capture the value-chain, we anchor high-skill jobs, and we stop paying to import fuel that we are already sending abroad. Why should we export our uranium as a raw mineral when we could be using it to power our own mines and factories?</a:t>
+              <a:t>[Strategic Resource] Zambia exports uranium today. We are a raw-mineral economy. Why should we ship the very element that could fuel our own copper mines abroad — only to import the electricity it produces? Lumwana, Gwembe, Mutanga: known uranium-bearing zones. By developing nuclear power we move from raw-material exporter to high-tech energy producer; we anchor high-skill jobs; we capture the value chain. Why ship our uranium when we could use it to power our own factories?</a:t>
             </a:r>
           </a:p>
         </p:txBody>
@@ -1493,7 +1514,7 @@
           <a:lstStyle/>
           <a:p>
             <a:r>
-              <a:t>[Economic Impact] Zambia has set a public target of three million tonnes of copper annually. At industry-standard energy intensity that requires roughly twelve hundred megawatts of continuous power — for mining alone, before smelting, before households, before industrial diversification. Hydropower cannot deliver that reliably and drought after drought has proved it. Nuclear can. The 2,000 MW nuclear target maps almost exactly onto the copper-driven power gap. This is not ideology — it is arithmetic.</a:t>
+              <a:t>[Economic Impact] Zambia has set a public target of three million tonnes of copper annually. At industry-standard energy intensity that is roughly twelve hundred megawatts of continuous power — for mining alone. Hydropower cannot deliver that drought after drought. Nuclear can. And there is a window closing: Egypt is building four reactors at El Dabaa; Kenya targets first criticality by 2034; South Africa has been nuclear for over forty years. If we wait, we end up buying drought-proof electricity from neighbours. This is not ideology. It is arithmetic.</a:t>
             </a:r>
           </a:p>
         </p:txBody>
@@ -1563,7 +1584,7 @@
           <a:lstStyle/>
           <a:p>
             <a:r>
-              <a:t>[Roadmap] Three workstreams run in parallel. Policy and regulation lands first: pass the Nuclear Bill in 2026, formalise NSPA, begin site licensing. Human capital builds alongside: Medical Physics and Nuclear Engineering cohorts leveraging local universities, plus data-analytics talent — the same skill set that built this dashboard. SMR implementation begins around 2028 with partner selection drawing on the ROSATOM, IP3 / NuScale, and Westinghouse relationships already in motion, targeting first criticality before 2036. We have the minerals, we have the regulatory framework, and as I've shown today, we have the data capacity. Zambia is ready to start the nuclear conversation.</a:t>
+              <a:t>[The Ask] Three decisions. ENACT: pass the Nuclear Bill, formalise NSPA as IAEA-aligned regulator. EQUIP: fund radiological monitoring nationwide, starting with the very communities in Siavonga that prompted the 2024 Baseline Survey. EXECUTE: greenlight the Centre for Nuclear Science and Technology and SMR pre-feasibility using ROSATOM, IP3, KAERI agreements already on file. The fuel is under our feet. The expertise is on our payroll. The bill is on the table. Sign it. Thank you.</a:t>
             </a:r>
           </a:p>
         </p:txBody>
@@ -4565,7 +4586,7 @@
     <p:bg>
       <p:bgPr>
         <a:solidFill>
-          <a:srgbClr val="06142A"/>
+          <a:srgbClr val="F4EFE4"/>
         </a:solidFill>
         <a:effectLst/>
       </p:bgPr>
@@ -4585,14 +4606,14 @@
         </p:nvSpPr>
         <p:spPr>
           <a:xfrm>
-            <a:off x="548640" y="548640"/>
-            <a:ext cx="73152" cy="411480"/>
+            <a:off x="0" y="0"/>
+            <a:ext cx="411480" cy="6858000"/>
           </a:xfrm>
           <a:prstGeom prst="rect">
             <a:avLst/>
           </a:prstGeom>
           <a:solidFill>
-            <a:srgbClr val="CC7A2E"/>
+            <a:srgbClr val="082618"/>
           </a:solidFill>
           <a:ln>
             <a:noFill/>
@@ -4623,14 +4644,102 @@
       </p:sp>
       <p:sp>
         <p:nvSpPr>
-          <p:cNvPr id="3" name="TextBox 2"/>
+          <p:cNvPr id="3" name="Rectangle 2"/>
+          <p:cNvSpPr/>
+          <p:nvPr/>
+        </p:nvSpPr>
+        <p:spPr>
+          <a:xfrm>
+            <a:off x="411480" y="0"/>
+            <a:ext cx="73152" cy="6858000"/>
+          </a:xfrm>
+          <a:prstGeom prst="rect">
+            <a:avLst/>
+          </a:prstGeom>
+          <a:solidFill>
+            <a:srgbClr val="B54C1A"/>
+          </a:solidFill>
+          <a:ln>
+            <a:noFill/>
+          </a:ln>
+          <a:effectLst/>
+        </p:spPr>
+        <p:style>
+          <a:lnRef idx="1">
+            <a:schemeClr val="accent1"/>
+          </a:lnRef>
+          <a:fillRef idx="3">
+            <a:schemeClr val="accent1"/>
+          </a:fillRef>
+          <a:effectRef idx="2">
+            <a:schemeClr val="accent1"/>
+          </a:effectRef>
+          <a:fontRef idx="minor">
+            <a:schemeClr val="lt1"/>
+          </a:fontRef>
+        </p:style>
+        <p:txBody>
+          <a:bodyPr rtlCol="0" anchor="ctr"/>
+          <a:lstStyle/>
+          <a:p>
+            <a:pPr algn="ctr"/>
+          </a:p>
+        </p:txBody>
+      </p:sp>
+      <p:sp>
+        <p:nvSpPr>
+          <p:cNvPr id="4" name="Rectangle 3"/>
+          <p:cNvSpPr/>
+          <p:nvPr/>
+        </p:nvSpPr>
+        <p:spPr>
+          <a:xfrm>
+            <a:off x="484632" y="0"/>
+            <a:ext cx="36576" cy="6858000"/>
+          </a:xfrm>
+          <a:prstGeom prst="rect">
+            <a:avLst/>
+          </a:prstGeom>
+          <a:solidFill>
+            <a:srgbClr val="CFA33C"/>
+          </a:solidFill>
+          <a:ln>
+            <a:noFill/>
+          </a:ln>
+          <a:effectLst/>
+        </p:spPr>
+        <p:style>
+          <a:lnRef idx="1">
+            <a:schemeClr val="accent1"/>
+          </a:lnRef>
+          <a:fillRef idx="3">
+            <a:schemeClr val="accent1"/>
+          </a:fillRef>
+          <a:effectRef idx="2">
+            <a:schemeClr val="accent1"/>
+          </a:effectRef>
+          <a:fontRef idx="minor">
+            <a:schemeClr val="lt1"/>
+          </a:fontRef>
+        </p:style>
+        <p:txBody>
+          <a:bodyPr rtlCol="0" anchor="ctr"/>
+          <a:lstStyle/>
+          <a:p>
+            <a:pPr algn="ctr"/>
+          </a:p>
+        </p:txBody>
+      </p:sp>
+      <p:sp>
+        <p:nvSpPr>
+          <p:cNvPr id="5" name="TextBox 4"/>
           <p:cNvSpPr txBox="1"/>
           <p:nvPr/>
         </p:nvSpPr>
         <p:spPr>
           <a:xfrm>
-            <a:off x="777240" y="530352"/>
-            <a:ext cx="9144000" cy="365760"/>
+            <a:off x="914400" y="594360"/>
+            <a:ext cx="10058400" cy="274320"/>
           </a:xfrm>
           <a:prstGeom prst="rect">
             <a:avLst/>
@@ -4645,31 +4754,66 @@
           <a:p>
             <a:pPr algn="l">
               <a:lnSpc>
-                <a:spcPct val="120000"/>
+                <a:spcPct val="125000"/>
               </a:lnSpc>
             </a:pPr>
             <a:r>
-              <a:rPr sz="1200" b="1" i="0">
-                <a:solidFill>
-                  <a:srgbClr val="E8A860"/>
+              <a:rPr sz="1100" b="1" i="0">
+                <a:solidFill>
+                  <a:srgbClr val="B54C1A"/>
                 </a:solidFill>
                 <a:latin typeface="Calibri"/>
               </a:rPr>
-              <a:t>ENERGY SECURITY  ·  REPUBLIC OF ZAMBIA  ·  2026</a:t>
-            </a:r>
-          </a:p>
-        </p:txBody>
-      </p:sp>
-      <p:sp>
-        <p:nvSpPr>
-          <p:cNvPr id="4" name="TextBox 3"/>
+              <a:t>A POLICY BRIEF  ·  REPUBLIC OF ZAMBIA  ·  2026</a:t>
+            </a:r>
+          </a:p>
+        </p:txBody>
+      </p:sp>
+      <p:cxnSp>
+        <p:nvCxnSpPr>
+          <p:cNvPr id="6" name="Connector 5"/>
+          <p:cNvCxnSpPr/>
+          <p:nvPr/>
+        </p:nvCxnSpPr>
+        <p:spPr>
+          <a:xfrm>
+            <a:off x="914400" y="868680"/>
+            <a:ext cx="548640" cy="0"/>
+          </a:xfrm>
+          <a:prstGeom prst="line">
+            <a:avLst/>
+          </a:prstGeom>
+          <a:ln w="19050">
+            <a:solidFill>
+              <a:srgbClr val="B54C1A"/>
+            </a:solidFill>
+          </a:ln>
+        </p:spPr>
+        <p:style>
+          <a:lnRef idx="2">
+            <a:schemeClr val="accent1"/>
+          </a:lnRef>
+          <a:fillRef idx="0">
+            <a:schemeClr val="accent1"/>
+          </a:fillRef>
+          <a:effectRef idx="1">
+            <a:schemeClr val="accent1"/>
+          </a:effectRef>
+          <a:fontRef idx="minor">
+            <a:schemeClr val="tx1"/>
+          </a:fontRef>
+        </p:style>
+      </p:cxnSp>
+      <p:sp>
+        <p:nvSpPr>
+          <p:cNvPr id="7" name="TextBox 6"/>
           <p:cNvSpPr txBox="1"/>
           <p:nvPr/>
         </p:nvSpPr>
         <p:spPr>
           <a:xfrm>
-            <a:off x="548640" y="1417320"/>
-            <a:ext cx="11064240" cy="2286000"/>
+            <a:off x="914400" y="1188720"/>
+            <a:ext cx="10515600" cy="2377440"/>
           </a:xfrm>
           <a:prstGeom prst="rect">
             <a:avLst/>
@@ -4688,13 +4832,13 @@
               </a:lnSpc>
             </a:pPr>
             <a:r>
-              <a:rPr sz="6000" b="1" i="0">
-                <a:solidFill>
-                  <a:srgbClr val="FFFFFF"/>
-                </a:solidFill>
-                <a:latin typeface="Calibri"/>
+              <a:rPr sz="4400" b="0" i="1">
+                <a:solidFill>
+                  <a:srgbClr val="3A404A"/>
+                </a:solidFill>
+                <a:latin typeface="Georgia"/>
               </a:rPr>
-              <a:t>We already own</a:t>
+              <a:t>The Case for</a:t>
             </a:r>
           </a:p>
           <a:p>
@@ -4707,107 +4851,52 @@
               </a:spcAft>
             </a:pPr>
             <a:r>
-              <a:rPr sz="6000" b="1" i="0">
-                <a:solidFill>
-                  <a:srgbClr val="E8A860"/>
-                </a:solidFill>
-                <a:latin typeface="Calibri"/>
+              <a:rPr sz="6400" b="1" i="0">
+                <a:solidFill>
+                  <a:srgbClr val="082618"/>
+                </a:solidFill>
+                <a:latin typeface="Georgia"/>
               </a:rPr>
-              <a:t>the solution.</a:t>
-            </a:r>
-          </a:p>
-        </p:txBody>
-      </p:sp>
-      <p:cxnSp>
-        <p:nvCxnSpPr>
-          <p:cNvPr id="5" name="Connector 4"/>
-          <p:cNvCxnSpPr/>
-          <p:nvPr/>
-        </p:nvCxnSpPr>
-        <p:spPr>
-          <a:xfrm>
-            <a:off x="548640" y="3794760"/>
-            <a:ext cx="2286000" cy="0"/>
-          </a:xfrm>
-          <a:prstGeom prst="line">
-            <a:avLst/>
-          </a:prstGeom>
-          <a:ln w="19050">
-            <a:solidFill>
-              <a:srgbClr val="CC7A2E"/>
-            </a:solidFill>
-          </a:ln>
-        </p:spPr>
-        <p:style>
-          <a:lnRef idx="2">
-            <a:schemeClr val="accent1"/>
-          </a:lnRef>
-          <a:fillRef idx="0">
-            <a:schemeClr val="accent1"/>
-          </a:fillRef>
-          <a:effectRef idx="1">
-            <a:schemeClr val="accent1"/>
-          </a:effectRef>
-          <a:fontRef idx="minor">
-            <a:schemeClr val="tx1"/>
-          </a:fontRef>
-        </p:style>
-      </p:cxnSp>
-      <p:sp>
-        <p:nvSpPr>
-          <p:cNvPr id="6" name="TextBox 5"/>
-          <p:cNvSpPr txBox="1"/>
-          <p:nvPr/>
-        </p:nvSpPr>
-        <p:spPr>
-          <a:xfrm>
-            <a:off x="548640" y="3931920"/>
-            <a:ext cx="11064240" cy="457200"/>
-          </a:xfrm>
-          <a:prstGeom prst="rect">
-            <a:avLst/>
-          </a:prstGeom>
-          <a:noFill/>
-        </p:spPr>
-        <p:txBody>
-          <a:bodyPr wrap="square" anchor="t" lIns="0" rIns="0" tIns="0" bIns="0">
-            <a:spAutoFit/>
-          </a:bodyPr>
-          <a:lstStyle/>
+              <a:t>Nuclear Power</a:t>
+            </a:r>
+          </a:p>
           <a:p>
             <a:pPr algn="l">
               <a:lnSpc>
-                <a:spcPct val="120000"/>
+                <a:spcPct val="100000"/>
               </a:lnSpc>
+              <a:spcAft>
+                <a:spcPts val="0"/>
+              </a:spcAft>
             </a:pPr>
             <a:r>
-              <a:rPr sz="2400" b="0" i="0">
-                <a:solidFill>
-                  <a:srgbClr val="FFFFFF"/>
-                </a:solidFill>
-                <a:latin typeface="Calibri"/>
+              <a:rPr sz="6400" b="1" i="0">
+                <a:solidFill>
+                  <a:srgbClr val="B54C1A"/>
+                </a:solidFill>
+                <a:latin typeface="Georgia"/>
               </a:rPr>
-              <a:t>The Case for Nuclear Power in Zambia</a:t>
-            </a:r>
-          </a:p>
-        </p:txBody>
-      </p:sp>
-      <p:sp>
-        <p:nvSpPr>
-          <p:cNvPr id="7" name="Rectangle 6"/>
+              <a:t>in Zambia.</a:t>
+            </a:r>
+          </a:p>
+        </p:txBody>
+      </p:sp>
+      <p:sp>
+        <p:nvSpPr>
+          <p:cNvPr id="8" name="Rectangle 7"/>
           <p:cNvSpPr/>
           <p:nvPr/>
         </p:nvSpPr>
         <p:spPr>
           <a:xfrm>
-            <a:off x="548640" y="4663440"/>
-            <a:ext cx="11064240" cy="1371600"/>
+            <a:off x="914400" y="4434840"/>
+            <a:ext cx="10515600" cy="1691640"/>
           </a:xfrm>
           <a:prstGeom prst="rect">
             <a:avLst/>
           </a:prstGeom>
           <a:solidFill>
-            <a:srgbClr val="12284A"/>
+            <a:srgbClr val="082618"/>
           </a:solidFill>
           <a:ln>
             <a:noFill/>
@@ -4838,20 +4927,20 @@
       </p:sp>
       <p:sp>
         <p:nvSpPr>
-          <p:cNvPr id="8" name="Rectangle 7"/>
+          <p:cNvPr id="9" name="Rectangle 8"/>
           <p:cNvSpPr/>
           <p:nvPr/>
         </p:nvSpPr>
         <p:spPr>
           <a:xfrm>
-            <a:off x="548640" y="4663440"/>
-            <a:ext cx="91440" cy="1371600"/>
+            <a:off x="914400" y="4434840"/>
+            <a:ext cx="91440" cy="1691640"/>
           </a:xfrm>
           <a:prstGeom prst="rect">
             <a:avLst/>
           </a:prstGeom>
           <a:solidFill>
-            <a:srgbClr val="CC7A2E"/>
+            <a:srgbClr val="B54C1A"/>
           </a:solidFill>
           <a:ln>
             <a:noFill/>
@@ -4882,14 +4971,14 @@
       </p:sp>
       <p:sp>
         <p:nvSpPr>
-          <p:cNvPr id="9" name="TextBox 8"/>
+          <p:cNvPr id="10" name="TextBox 9"/>
           <p:cNvSpPr txBox="1"/>
           <p:nvPr/>
         </p:nvSpPr>
         <p:spPr>
           <a:xfrm>
-            <a:off x="777240" y="4754880"/>
-            <a:ext cx="10698480" cy="274320"/>
+            <a:off x="1188720" y="4526280"/>
+            <a:ext cx="10058400" cy="274320"/>
           </a:xfrm>
           <a:prstGeom prst="rect">
             <a:avLst/>
@@ -4904,13 +4993,13 @@
           <a:p>
             <a:pPr algn="l">
               <a:lnSpc>
-                <a:spcPct val="120000"/>
+                <a:spcPct val="125000"/>
               </a:lnSpc>
             </a:pPr>
             <a:r>
-              <a:rPr sz="1100" b="1" i="0">
-                <a:solidFill>
-                  <a:srgbClr val="E8A860"/>
+              <a:rPr sz="1000" b="1" i="0">
+                <a:solidFill>
+                  <a:srgbClr val="CFA33C"/>
                 </a:solidFill>
                 <a:latin typeface="Calibri"/>
               </a:rPr>
@@ -4921,14 +5010,14 @@
       </p:sp>
       <p:sp>
         <p:nvSpPr>
-          <p:cNvPr id="10" name="TextBox 9"/>
+          <p:cNvPr id="11" name="TextBox 10"/>
           <p:cNvSpPr txBox="1"/>
           <p:nvPr/>
         </p:nvSpPr>
         <p:spPr>
           <a:xfrm>
-            <a:off x="777240" y="5029200"/>
-            <a:ext cx="10698480" cy="960120"/>
+            <a:off x="1188720" y="4800600"/>
+            <a:ext cx="10058400" cy="1371600"/>
           </a:xfrm>
           <a:prstGeom prst="rect">
             <a:avLst/>
@@ -4951,22 +5040,22 @@
                 <a:solidFill>
                   <a:srgbClr val="FFFFFF"/>
                 </a:solidFill>
-                <a:latin typeface="Calibri"/>
+                <a:latin typeface="Georgia"/>
               </a:rPr>
-              <a:t>Zambia must convert its domestic uranium reserves and existing radiological safety expertise into nuclear baseload power — because every drought year proves that hydropower alone is no longer an energy strategy, it is a gamble against a climate we can no longer afford to lose.</a:t>
-            </a:r>
-          </a:p>
-        </p:txBody>
-      </p:sp>
-      <p:sp>
-        <p:nvSpPr>
-          <p:cNvPr id="11" name="TextBox 10"/>
+              <a:t>Zambia is one of the few nations on earth that sits on its own uranium, runs a 50-year radiological regulator, and holds a Cabinet-approved nuclear policy — yet still loses billions to drought every cycle; only enacting the Nuclear Bill turns that paradox into the drought-proof power our industrialisation demands.</a:t>
+            </a:r>
+          </a:p>
+        </p:txBody>
+      </p:sp>
+      <p:sp>
+        <p:nvSpPr>
+          <p:cNvPr id="12" name="TextBox 11"/>
           <p:cNvSpPr txBox="1"/>
           <p:nvPr/>
         </p:nvSpPr>
         <p:spPr>
           <a:xfrm>
-            <a:off x="548640" y="6263640"/>
+            <a:off x="914400" y="6355080"/>
             <a:ext cx="7315200" cy="228600"/>
           </a:xfrm>
           <a:prstGeom prst="rect">
@@ -4982,31 +5071,31 @@
           <a:p>
             <a:pPr algn="l">
               <a:lnSpc>
-                <a:spcPct val="120000"/>
+                <a:spcPct val="125000"/>
               </a:lnSpc>
             </a:pPr>
             <a:r>
               <a:rPr sz="1000" b="1" i="0">
                 <a:solidFill>
-                  <a:srgbClr val="FFFFFF"/>
+                  <a:srgbClr val="14181F"/>
                 </a:solidFill>
                 <a:latin typeface="Calibri"/>
               </a:rPr>
-              <a:t>Prepared by  ELIZABETH MWABA</a:t>
-            </a:r>
-          </a:p>
-        </p:txBody>
-      </p:sp>
-      <p:sp>
-        <p:nvSpPr>
-          <p:cNvPr id="12" name="TextBox 11"/>
+              <a:t>PREPARED BY  ELIZABETH MWABA</a:t>
+            </a:r>
+          </a:p>
+        </p:txBody>
+      </p:sp>
+      <p:sp>
+        <p:nvSpPr>
+          <p:cNvPr id="13" name="TextBox 12"/>
           <p:cNvSpPr txBox="1"/>
           <p:nvPr/>
         </p:nvSpPr>
         <p:spPr>
           <a:xfrm>
-            <a:off x="548640" y="6492240"/>
-            <a:ext cx="7315200" cy="182880"/>
+            <a:off x="914400" y="6565392"/>
+            <a:ext cx="7315200" cy="228600"/>
           </a:xfrm>
           <a:prstGeom prst="rect">
             <a:avLst/>
@@ -5021,13 +5110,13 @@
           <a:p>
             <a:pPr algn="l">
               <a:lnSpc>
-                <a:spcPct val="120000"/>
+                <a:spcPct val="125000"/>
               </a:lnSpc>
             </a:pPr>
             <a:r>
-              <a:rPr sz="800" b="0" i="0">
-                <a:solidFill>
-                  <a:srgbClr val="99A3B3"/>
+              <a:rPr sz="900" b="0" i="1">
+                <a:solidFill>
+                  <a:srgbClr val="6B7078"/>
                 </a:solidFill>
                 <a:latin typeface="Calibri"/>
               </a:rPr>
@@ -5050,7 +5139,7 @@
     <p:bg>
       <p:bgPr>
         <a:solidFill>
-          <a:srgbClr val="F7F5F0"/>
+          <a:srgbClr val="F4EFE4"/>
         </a:solidFill>
         <a:effectLst/>
       </p:bgPr>
@@ -5070,7 +5159,7 @@
         </p:nvSpPr>
         <p:spPr>
           <a:xfrm>
-            <a:off x="548640" y="411480"/>
+            <a:off x="548640" y="457200"/>
             <a:ext cx="9144000" cy="274320"/>
           </a:xfrm>
           <a:prstGeom prst="rect">
@@ -5086,13 +5175,13 @@
           <a:p>
             <a:pPr algn="l">
               <a:lnSpc>
-                <a:spcPct val="120000"/>
+                <a:spcPct val="125000"/>
               </a:lnSpc>
             </a:pPr>
             <a:r>
-              <a:rPr sz="1100" b="1" i="0">
-                <a:solidFill>
-                  <a:srgbClr val="CC7A2E"/>
+              <a:rPr sz="1000" b="1" i="0">
+                <a:solidFill>
+                  <a:srgbClr val="B54C1A"/>
                 </a:solidFill>
                 <a:latin typeface="Calibri"/>
               </a:rPr>
@@ -5109,8 +5198,8 @@
         </p:nvSpPr>
         <p:spPr>
           <a:xfrm>
-            <a:off x="548640" y="685800"/>
-            <a:ext cx="11064240" cy="685800"/>
+            <a:off x="548640" y="731520"/>
+            <a:ext cx="11064240" cy="777240"/>
           </a:xfrm>
           <a:prstGeom prst="rect">
             <a:avLst/>
@@ -5125,15 +5214,15 @@
           <a:p>
             <a:pPr algn="l">
               <a:lnSpc>
-                <a:spcPct val="120000"/>
+                <a:spcPct val="105000"/>
               </a:lnSpc>
             </a:pPr>
             <a:r>
               <a:rPr sz="3000" b="1" i="0">
                 <a:solidFill>
-                  <a:srgbClr val="0A1F3D"/>
-                </a:solidFill>
-                <a:latin typeface="Calibri"/>
+                  <a:srgbClr val="082618"/>
+                </a:solidFill>
+                <a:latin typeface="Georgia"/>
               </a:rPr>
               <a:t>If I had no slides, this is what I would say.</a:t>
             </a:r>
@@ -5148,15 +5237,15 @@
         </p:nvCxnSpPr>
         <p:spPr>
           <a:xfrm>
-            <a:off x="548640" y="1325880"/>
-            <a:ext cx="1097280" cy="0"/>
+            <a:off x="548640" y="1508760"/>
+            <a:ext cx="731520" cy="0"/>
           </a:xfrm>
           <a:prstGeom prst="line">
             <a:avLst/>
           </a:prstGeom>
-          <a:ln w="19050">
+          <a:ln w="25400">
             <a:solidFill>
-              <a:srgbClr val="CC7A2E"/>
+              <a:srgbClr val="B54C1A"/>
             </a:solidFill>
           </a:ln>
         </p:spPr>
@@ -5183,7 +5272,7 @@
         </p:nvSpPr>
         <p:spPr>
           <a:xfrm>
-            <a:off x="548640" y="1417320"/>
+            <a:off x="548640" y="1627632"/>
             <a:ext cx="11064240" cy="365760"/>
           </a:xfrm>
           <a:prstGeom prst="rect">
@@ -5199,13 +5288,13 @@
           <a:p>
             <a:pPr algn="l">
               <a:lnSpc>
-                <a:spcPct val="120000"/>
+                <a:spcPct val="125000"/>
               </a:lnSpc>
             </a:pPr>
             <a:r>
               <a:rPr sz="1300" b="0" i="1">
                 <a:solidFill>
-                  <a:srgbClr val="6B7280"/>
+                  <a:srgbClr val="3A404A"/>
                 </a:solidFill>
                 <a:latin typeface="Calibri"/>
               </a:rPr>
@@ -5222,14 +5311,14 @@
         </p:nvSpPr>
         <p:spPr>
           <a:xfrm>
-            <a:off x="548640" y="1965960"/>
-            <a:ext cx="11064240" cy="4434840"/>
+            <a:off x="548640" y="2103120"/>
+            <a:ext cx="11064240" cy="4251960"/>
           </a:xfrm>
           <a:prstGeom prst="rect">
             <a:avLst/>
           </a:prstGeom>
           <a:solidFill>
-            <a:srgbClr val="FFFFFF"/>
+            <a:srgbClr val="FAF7F0"/>
           </a:solidFill>
           <a:ln>
             <a:noFill/>
@@ -5266,14 +5355,14 @@
         </p:nvSpPr>
         <p:spPr>
           <a:xfrm>
-            <a:off x="548640" y="1965960"/>
-            <a:ext cx="109728" cy="4434840"/>
+            <a:off x="548640" y="2103120"/>
+            <a:ext cx="109728" cy="4251960"/>
           </a:xfrm>
           <a:prstGeom prst="rect">
             <a:avLst/>
           </a:prstGeom>
           <a:solidFill>
-            <a:srgbClr val="CC7A2E"/>
+            <a:srgbClr val="B54C1A"/>
           </a:solidFill>
           <a:ln>
             <a:noFill/>
@@ -5304,13 +5393,57 @@
       </p:sp>
       <p:sp>
         <p:nvSpPr>
-          <p:cNvPr id="8" name="TextBox 7"/>
+          <p:cNvPr id="8" name="Rectangle 7"/>
+          <p:cNvSpPr/>
+          <p:nvPr/>
+        </p:nvSpPr>
+        <p:spPr>
+          <a:xfrm>
+            <a:off x="11503152" y="2103120"/>
+            <a:ext cx="109728" cy="4251960"/>
+          </a:xfrm>
+          <a:prstGeom prst="rect">
+            <a:avLst/>
+          </a:prstGeom>
+          <a:solidFill>
+            <a:srgbClr val="082618"/>
+          </a:solidFill>
+          <a:ln>
+            <a:noFill/>
+          </a:ln>
+          <a:effectLst/>
+        </p:spPr>
+        <p:style>
+          <a:lnRef idx="1">
+            <a:schemeClr val="accent1"/>
+          </a:lnRef>
+          <a:fillRef idx="3">
+            <a:schemeClr val="accent1"/>
+          </a:fillRef>
+          <a:effectRef idx="2">
+            <a:schemeClr val="accent1"/>
+          </a:effectRef>
+          <a:fontRef idx="minor">
+            <a:schemeClr val="lt1"/>
+          </a:fontRef>
+        </p:style>
+        <p:txBody>
+          <a:bodyPr rtlCol="0" anchor="ctr"/>
+          <a:lstStyle/>
+          <a:p>
+            <a:pPr algn="ctr"/>
+          </a:p>
+        </p:txBody>
+      </p:sp>
+      <p:sp>
+        <p:nvSpPr>
+          <p:cNvPr id="9" name="TextBox 8"/>
           <p:cNvSpPr txBox="1"/>
           <p:nvPr/>
         </p:nvSpPr>
         <p:spPr>
           <a:xfrm>
-            <a:off x="868680" y="2103120"/>
+            <a:off x="868680" y="2240280"/>
             <a:ext cx="10515600" cy="274320"/>
           </a:xfrm>
           <a:prstGeom prst="rect">
@@ -5326,31 +5459,31 @@
           <a:p>
             <a:pPr algn="l">
               <a:lnSpc>
-                <a:spcPct val="120000"/>
+                <a:spcPct val="125000"/>
               </a:lnSpc>
             </a:pPr>
             <a:r>
-              <a:rPr sz="1000" b="1" i="0">
-                <a:solidFill>
-                  <a:srgbClr val="CC7A2E"/>
+              <a:rPr sz="900" b="1" i="0">
+                <a:solidFill>
+                  <a:srgbClr val="B54C1A"/>
                 </a:solidFill>
                 <a:latin typeface="Calibri"/>
               </a:rPr>
-              <a:t>DELIVERED AT EXECUTIVE CADENCE  ·  ~360 WORDS</a:t>
-            </a:r>
-          </a:p>
-        </p:txBody>
-      </p:sp>
-      <p:sp>
-        <p:nvSpPr>
-          <p:cNvPr id="9" name="TextBox 8"/>
+              <a:t>EXECUTIVE  CADENCE  ·  ~390 WORDS  ·  ~3:00</a:t>
+            </a:r>
+          </a:p>
+        </p:txBody>
+      </p:sp>
+      <p:sp>
+        <p:nvSpPr>
+          <p:cNvPr id="10" name="TextBox 9"/>
           <p:cNvSpPr txBox="1"/>
           <p:nvPr/>
         </p:nvSpPr>
         <p:spPr>
           <a:xfrm>
-            <a:off x="868680" y="2423160"/>
-            <a:ext cx="10515600" cy="3931920"/>
+            <a:off x="868680" y="2560320"/>
+            <a:ext cx="10515600" cy="3749039"/>
           </a:xfrm>
           <a:prstGeom prst="rect">
             <a:avLst/>
@@ -5365,38 +5498,38 @@
           <a:p>
             <a:pPr algn="l">
               <a:lnSpc>
-                <a:spcPct val="132000"/>
+                <a:spcPct val="134000"/>
               </a:lnSpc>
             </a:pPr>
             <a:r>
               <a:rPr sz="1100" b="0" i="0">
                 <a:solidFill>
-                  <a:srgbClr val="121824"/>
+                  <a:srgbClr val="14181F"/>
                 </a:solidFill>
                 <a:latin typeface="Calibri"/>
               </a:rPr>
-              <a:t>Imagine a country that owns its uranium, runs a Radiation Protection Authority, has a Cabinet-approved Nuclear Policy, and has signed cooperation agreements with ROSATOM, the U.S. IP3 Allied Nuclear Partners, and South Korea's KAERI — and yet, in 2026, still depends on a single river system for eighty-four percent of its electricity. That country is Zambia. Every drought repeats the same story: the 2015/16 dry year cost us roughly one thousand megawatts of generation and four hundred and forty million U.S. dollars in unbudgeted imports; the 2023–2024 Kariba crisis triggered months of load-shedding that stalled the very copper mines that fund the national budget. Meanwhile, in Siavonga, the 2024 Uranium Baseline Survey detected unmonitored uranium in water and household dust — communities living beside the resource itself, without instruments, without a baseline, without accountability. That is radiological fear. Contrast that with the United States, where my analysis of the Department of Energy Radiation Exposure Monitoring System tracks twenty-two thousand workers and shows an average individual dose of just fifty-nine point one two millirem per year — about one point two percent of the federal occupational limit, with workforce growth producing zero increase in individual exposure. That is industrial mastery. Same element, two completely different outcomes; the variable is the system. Zambia already participates in that system through the IAEA Milestone Approach. We have the uranium. We have the safety institution. We have the policy. We have the partners. And we have a three-million-tonne copper ambition that no hydropower fleet on this continent can power reliably. The missing piece is legislative: pass the Nuclear Bill, fund radiological monitoring nationwide starting in Siavonga, and greenlight Small Modular Reactor pre-feasibility. The fuel is under our feet. The expertise is on our payroll. The bill is on the table. Sign it.</a:t>
+              <a:t>Zambia is one of a handful of countries on earth that exports its own uranium, runs a fifty-year-old Radiation Protection Authority, holds a Cabinet-approved 2020 Nuclear Policy, and has signed cooperation agreements with ROSATOM, the U.S. IP3 Allied Nuclear Partners, and South Korea's KAERI — and yet, in 2026, still depends on a single river system for eighty-four percent of its electricity. In late 2024 that single dependency cost us up to twenty-one hours of load-shedding per day. Copper mines throttled. The kwacha wobbled. The IMF estimated roughly two percent of GDP evaporated in drought-driven blackouts. And it is not a one-off: 2015/16 cost us a thousand megawatts and four hundred and forty million dollars in emergency imports; 2018/19 took eight hundred and seventy-two megawatts; 2023/24 was the worst drought in forty years. Meanwhile, in Siavonga, the 2024 Uranium Baseline Survey detected unmonitored uranium in drinking water and household dust — communities living beside the very resource that should be fuelling our future, with no instruments and no baseline. That is radiological fear. Contrast that with the United States, where my analysis of the Department of Energy Radiation Exposure Monitoring System covers twenty-two thousand workers averaging just fifty-nine point one-two millirem of exposure per year — about one point two percent of the federal occupational limit, with workforce growth producing zero rise in individual dose. That is industrial mastery. Same element, two opposite outcomes; the variable is the system. While we debate, Egypt is building four reactors at El Dabaa, Kenya is targeting first criticality by 2034, and South Africa has been operating Koeberg for over forty years. We have the uranium. We have the regulator. We have the policy. We have the partners. We have a three-million-tonne copper ambition that no hydropower fleet on this continent can power. What we do not have is the legislative signature. Pass the Nuclear Bill, fund radiological monitoring nationwide starting in Siavonga, and greenlight Small Modular Reactor pre-feasibility. The fuel is under our feet. The expertise is on our payroll. The bill is on the table. Sign it.</a:t>
             </a:r>
           </a:p>
         </p:txBody>
       </p:sp>
       <p:cxnSp>
         <p:nvCxnSpPr>
-          <p:cNvPr id="10" name="Connector 9"/>
+          <p:cNvPr id="11" name="Connector 10"/>
           <p:cNvCxnSpPr/>
           <p:nvPr/>
         </p:nvCxnSpPr>
         <p:spPr>
           <a:xfrm>
-            <a:off x="0" y="6629400"/>
-            <a:ext cx="12191695" cy="0"/>
+            <a:off x="548640" y="6565392"/>
+            <a:ext cx="11064240" cy="0"/>
           </a:xfrm>
           <a:prstGeom prst="line">
             <a:avLst/>
           </a:prstGeom>
           <a:ln w="6350">
             <a:solidFill>
-              <a:srgbClr val="C8CED6"/>
+              <a:srgbClr val="C2B8A0"/>
             </a:solidFill>
           </a:ln>
         </p:spPr>
@@ -5417,57 +5550,13 @@
       </p:cxnSp>
       <p:sp>
         <p:nvSpPr>
-          <p:cNvPr id="11" name="Rectangle 10"/>
-          <p:cNvSpPr/>
-          <p:nvPr/>
-        </p:nvSpPr>
-        <p:spPr>
-          <a:xfrm>
-            <a:off x="0" y="6629400"/>
-            <a:ext cx="640080" cy="45720"/>
-          </a:xfrm>
-          <a:prstGeom prst="rect">
-            <a:avLst/>
-          </a:prstGeom>
-          <a:solidFill>
-            <a:srgbClr val="CC7A2E"/>
-          </a:solidFill>
-          <a:ln>
-            <a:noFill/>
-          </a:ln>
-          <a:effectLst/>
-        </p:spPr>
-        <p:style>
-          <a:lnRef idx="1">
-            <a:schemeClr val="accent1"/>
-          </a:lnRef>
-          <a:fillRef idx="3">
-            <a:schemeClr val="accent1"/>
-          </a:fillRef>
-          <a:effectRef idx="2">
-            <a:schemeClr val="accent1"/>
-          </a:effectRef>
-          <a:fontRef idx="minor">
-            <a:schemeClr val="lt1"/>
-          </a:fontRef>
-        </p:style>
-        <p:txBody>
-          <a:bodyPr rtlCol="0" anchor="ctr"/>
-          <a:lstStyle/>
-          <a:p>
-            <a:pPr algn="ctr"/>
-          </a:p>
-        </p:txBody>
-      </p:sp>
-      <p:sp>
-        <p:nvSpPr>
           <p:cNvPr id="12" name="TextBox 11"/>
           <p:cNvSpPr txBox="1"/>
           <p:nvPr/>
         </p:nvSpPr>
         <p:spPr>
           <a:xfrm>
-            <a:off x="457200" y="6675120"/>
+            <a:off x="548640" y="6620256"/>
             <a:ext cx="9601200" cy="182880"/>
           </a:xfrm>
           <a:prstGeom prst="rect">
@@ -5483,17 +5572,17 @@
           <a:p>
             <a:pPr algn="l">
               <a:lnSpc>
-                <a:spcPct val="120000"/>
+                <a:spcPct val="125000"/>
               </a:lnSpc>
             </a:pPr>
             <a:r>
               <a:rPr sz="800" b="0" i="1">
                 <a:solidFill>
-                  <a:srgbClr val="6B7280"/>
+                  <a:srgbClr val="6B7078"/>
                 </a:solidFill>
                 <a:latin typeface="Calibri"/>
               </a:rPr>
-              <a:t>Sources: U.S. DOE REMS 2024 Report · ZESCO Annual Reports 2023-2024 · Siavonga Uranium Baseline Survey (2024) · Zambia 7NDP &amp; Vision 2030</a:t>
+              <a:t>SOURCES: U.S. DOE REMS 2024 Report · ZESCO Annual Reports 2023-2024 · Siavonga Uranium Baseline Survey (2024) · IMF Article IV Consultation — Zambia 2024</a:t>
             </a:r>
           </a:p>
         </p:txBody>
@@ -5506,8 +5595,8 @@
         </p:nvSpPr>
         <p:spPr>
           <a:xfrm>
-            <a:off x="10424160" y="6675120"/>
-            <a:ext cx="1554480" cy="182880"/>
+            <a:off x="10332720" y="6620256"/>
+            <a:ext cx="1645920" cy="182880"/>
           </a:xfrm>
           <a:prstGeom prst="rect">
             <a:avLst/>
@@ -5522,17 +5611,17 @@
           <a:p>
             <a:pPr algn="r">
               <a:lnSpc>
-                <a:spcPct val="120000"/>
+                <a:spcPct val="125000"/>
               </a:lnSpc>
             </a:pPr>
             <a:r>
               <a:rPr sz="800" b="1" i="0">
                 <a:solidFill>
-                  <a:srgbClr val="2A3344"/>
+                  <a:srgbClr val="3A404A"/>
                 </a:solidFill>
                 <a:latin typeface="Calibri"/>
               </a:rPr>
-              <a:t>2 / 8  ·  E. Mwaba</a:t>
+              <a:t>2 / 8   E. MWABA</a:t>
             </a:r>
           </a:p>
         </p:txBody>
@@ -5551,7 +5640,7 @@
     <p:bg>
       <p:bgPr>
         <a:solidFill>
-          <a:srgbClr val="F7F5F0"/>
+          <a:srgbClr val="F4EFE4"/>
         </a:solidFill>
         <a:effectLst/>
       </p:bgPr>
@@ -5571,7 +5660,7 @@
         </p:nvSpPr>
         <p:spPr>
           <a:xfrm>
-            <a:off x="548640" y="411480"/>
+            <a:off x="548640" y="457200"/>
             <a:ext cx="9144000" cy="274320"/>
           </a:xfrm>
           <a:prstGeom prst="rect">
@@ -5587,13 +5676,13 @@
           <a:p>
             <a:pPr algn="l">
               <a:lnSpc>
-                <a:spcPct val="120000"/>
+                <a:spcPct val="125000"/>
               </a:lnSpc>
             </a:pPr>
             <a:r>
-              <a:rPr sz="1100" b="1" i="0">
-                <a:solidFill>
-                  <a:srgbClr val="CC7A2E"/>
+              <a:rPr sz="1000" b="1" i="0">
+                <a:solidFill>
+                  <a:srgbClr val="B54C1A"/>
                 </a:solidFill>
                 <a:latin typeface="Calibri"/>
               </a:rPr>
@@ -5610,8 +5699,8 @@
         </p:nvSpPr>
         <p:spPr>
           <a:xfrm>
-            <a:off x="548640" y="685800"/>
-            <a:ext cx="11064240" cy="685800"/>
+            <a:off x="548640" y="731520"/>
+            <a:ext cx="11064240" cy="777240"/>
           </a:xfrm>
           <a:prstGeom prst="rect">
             <a:avLst/>
@@ -5626,15 +5715,15 @@
           <a:p>
             <a:pPr algn="l">
               <a:lnSpc>
-                <a:spcPct val="120000"/>
+                <a:spcPct val="105000"/>
               </a:lnSpc>
             </a:pPr>
             <a:r>
               <a:rPr sz="3000" b="1" i="0">
                 <a:solidFill>
-                  <a:srgbClr val="0A1F3D"/>
-                </a:solidFill>
-                <a:latin typeface="Calibri"/>
+                  <a:srgbClr val="082618"/>
+                </a:solidFill>
+                <a:latin typeface="Georgia"/>
               </a:rPr>
               <a:t>Same element. Two realities.</a:t>
             </a:r>
@@ -5649,15 +5738,15 @@
         </p:nvCxnSpPr>
         <p:spPr>
           <a:xfrm>
-            <a:off x="548640" y="1325880"/>
-            <a:ext cx="1097280" cy="0"/>
+            <a:off x="548640" y="1508760"/>
+            <a:ext cx="731520" cy="0"/>
           </a:xfrm>
           <a:prstGeom prst="line">
             <a:avLst/>
           </a:prstGeom>
-          <a:ln w="19050">
+          <a:ln w="25400">
             <a:solidFill>
-              <a:srgbClr val="CC7A2E"/>
+              <a:srgbClr val="B54C1A"/>
             </a:solidFill>
           </a:ln>
         </p:spPr>
@@ -5684,7 +5773,7 @@
         </p:nvSpPr>
         <p:spPr>
           <a:xfrm>
-            <a:off x="548640" y="1417320"/>
+            <a:off x="548640" y="1627632"/>
             <a:ext cx="11064240" cy="365760"/>
           </a:xfrm>
           <a:prstGeom prst="rect">
@@ -5700,13 +5789,13 @@
           <a:p>
             <a:pPr algn="l">
               <a:lnSpc>
-                <a:spcPct val="120000"/>
+                <a:spcPct val="125000"/>
               </a:lnSpc>
             </a:pPr>
             <a:r>
               <a:rPr sz="1300" b="0" i="1">
                 <a:solidFill>
-                  <a:srgbClr val="6B7280"/>
+                  <a:srgbClr val="3A404A"/>
                 </a:solidFill>
                 <a:latin typeface="Calibri"/>
               </a:rPr>
@@ -5723,14 +5812,14 @@
         </p:nvSpPr>
         <p:spPr>
           <a:xfrm>
-            <a:off x="548640" y="2103120"/>
-            <a:ext cx="5532120" cy="3931920"/>
+            <a:off x="548640" y="2194560"/>
+            <a:ext cx="5532120" cy="3886200"/>
           </a:xfrm>
           <a:prstGeom prst="rect">
             <a:avLst/>
           </a:prstGeom>
           <a:solidFill>
-            <a:srgbClr val="7C1818"/>
+            <a:srgbClr val="5C1212"/>
           </a:solidFill>
           <a:ln>
             <a:noFill/>
@@ -5767,14 +5856,14 @@
         </p:nvSpPr>
         <p:spPr>
           <a:xfrm>
-            <a:off x="548640" y="2103120"/>
-            <a:ext cx="109728" cy="3931920"/>
+            <a:off x="548640" y="2194560"/>
+            <a:ext cx="109728" cy="3886200"/>
           </a:xfrm>
           <a:prstGeom prst="rect">
             <a:avLst/>
           </a:prstGeom>
           <a:solidFill>
-            <a:srgbClr val="B32B2B"/>
+            <a:srgbClr val="CFA33C"/>
           </a:solidFill>
           <a:ln>
             <a:noFill/>
@@ -5811,8 +5900,8 @@
         </p:nvSpPr>
         <p:spPr>
           <a:xfrm>
-            <a:off x="777240" y="2240280"/>
-            <a:ext cx="5120640" cy="274320"/>
+            <a:off x="868680" y="2331720"/>
+            <a:ext cx="5029200" cy="274320"/>
           </a:xfrm>
           <a:prstGeom prst="rect">
             <a:avLst/>
@@ -5827,13 +5916,13 @@
           <a:p>
             <a:pPr algn="l">
               <a:lnSpc>
-                <a:spcPct val="120000"/>
+                <a:spcPct val="125000"/>
               </a:lnSpc>
             </a:pPr>
             <a:r>
               <a:rPr sz="1000" b="1" i="0">
                 <a:solidFill>
-                  <a:srgbClr val="E8A860"/>
+                  <a:srgbClr val="CFA33C"/>
                 </a:solidFill>
                 <a:latin typeface="Calibri"/>
               </a:rPr>
@@ -5850,8 +5939,8 @@
         </p:nvSpPr>
         <p:spPr>
           <a:xfrm>
-            <a:off x="777240" y="2560320"/>
-            <a:ext cx="5120640" cy="1463040"/>
+            <a:off x="868680" y="2651760"/>
+            <a:ext cx="5029200" cy="1554480"/>
           </a:xfrm>
           <a:prstGeom prst="rect">
             <a:avLst/>
@@ -5870,11 +5959,11 @@
               </a:lnSpc>
             </a:pPr>
             <a:r>
-              <a:rPr sz="2800" b="1" i="0">
+              <a:rPr sz="3000" b="1" i="0">
                 <a:solidFill>
                   <a:srgbClr val="FFFFFF"/>
                 </a:solidFill>
-                <a:latin typeface="Calibri"/>
+                <a:latin typeface="Georgia"/>
               </a:rPr>
               <a:t>Uranium in the water.
 Uranium in the dust.</a:t>
@@ -5890,8 +5979,8 @@
         </p:nvSpPr>
         <p:spPr>
           <a:xfrm>
-            <a:off x="777240" y="4251960"/>
-            <a:ext cx="5120640" cy="1005840"/>
+            <a:off x="868680" y="4434840"/>
+            <a:ext cx="5029200" cy="1005840"/>
           </a:xfrm>
           <a:prstGeom prst="rect">
             <a:avLst/>
@@ -5910,7 +5999,7 @@
               </a:lnSpc>
             </a:pPr>
             <a:r>
-              <a:rPr sz="1300" b="0" i="0">
+              <a:rPr sz="1300" b="0" i="1">
                 <a:solidFill>
                   <a:srgbClr val="F2CFCF"/>
                 </a:solidFill>
@@ -5930,15 +6019,15 @@
         </p:nvCxnSpPr>
         <p:spPr>
           <a:xfrm>
-            <a:off x="777240" y="5349240"/>
-            <a:ext cx="914400" cy="0"/>
+            <a:off x="868680" y="5440680"/>
+            <a:ext cx="640080" cy="0"/>
           </a:xfrm>
           <a:prstGeom prst="line">
             <a:avLst/>
           </a:prstGeom>
-          <a:ln w="12700">
+          <a:ln w="19050">
             <a:solidFill>
-              <a:srgbClr val="CC7A2E"/>
+              <a:srgbClr val="CFA33C"/>
             </a:solidFill>
           </a:ln>
         </p:spPr>
@@ -5965,8 +6054,8 @@
         </p:nvSpPr>
         <p:spPr>
           <a:xfrm>
-            <a:off x="777240" y="5440680"/>
-            <a:ext cx="5120640" cy="457200"/>
+            <a:off x="868680" y="5532120"/>
+            <a:ext cx="5029200" cy="365760"/>
           </a:xfrm>
           <a:prstGeom prst="rect">
             <a:avLst/>
@@ -5981,13 +6070,13 @@
           <a:p>
             <a:pPr algn="l">
               <a:lnSpc>
-                <a:spcPct val="120000"/>
+                <a:spcPct val="125000"/>
               </a:lnSpc>
             </a:pPr>
             <a:r>
-              <a:rPr sz="1400" b="1" i="0">
-                <a:solidFill>
-                  <a:srgbClr val="E8A860"/>
+              <a:rPr sz="1200" b="1" i="0">
+                <a:solidFill>
+                  <a:srgbClr val="CFA33C"/>
                 </a:solidFill>
                 <a:latin typeface="Calibri"/>
               </a:rPr>
@@ -6004,14 +6093,14 @@
         </p:nvSpPr>
         <p:spPr>
           <a:xfrm>
-            <a:off x="6263640" y="2103120"/>
-            <a:ext cx="5349240" cy="3931920"/>
+            <a:off x="6263640" y="2194560"/>
+            <a:ext cx="5349240" cy="3886200"/>
           </a:xfrm>
           <a:prstGeom prst="rect">
             <a:avLst/>
           </a:prstGeom>
           <a:solidFill>
-            <a:srgbClr val="0A1F3D"/>
+            <a:srgbClr val="082618"/>
           </a:solidFill>
           <a:ln>
             <a:noFill/>
@@ -6048,14 +6137,14 @@
         </p:nvSpPr>
         <p:spPr>
           <a:xfrm>
-            <a:off x="6263640" y="2103120"/>
-            <a:ext cx="109728" cy="3931920"/>
+            <a:off x="6263640" y="2194560"/>
+            <a:ext cx="109728" cy="3886200"/>
           </a:xfrm>
           <a:prstGeom prst="rect">
             <a:avLst/>
           </a:prstGeom>
           <a:solidFill>
-            <a:srgbClr val="CC7A2E"/>
+            <a:srgbClr val="D97933"/>
           </a:solidFill>
           <a:ln>
             <a:noFill/>
@@ -6092,8 +6181,8 @@
         </p:nvSpPr>
         <p:spPr>
           <a:xfrm>
-            <a:off x="6492240" y="2240280"/>
-            <a:ext cx="5029200" cy="274320"/>
+            <a:off x="6583680" y="2331720"/>
+            <a:ext cx="4937760" cy="274320"/>
           </a:xfrm>
           <a:prstGeom prst="rect">
             <a:avLst/>
@@ -6108,13 +6197,13 @@
           <a:p>
             <a:pPr algn="l">
               <a:lnSpc>
-                <a:spcPct val="120000"/>
+                <a:spcPct val="125000"/>
               </a:lnSpc>
             </a:pPr>
             <a:r>
               <a:rPr sz="1000" b="1" i="0">
                 <a:solidFill>
-                  <a:srgbClr val="E8A860"/>
+                  <a:srgbClr val="D97933"/>
                 </a:solidFill>
                 <a:latin typeface="Calibri"/>
               </a:rPr>
@@ -6131,8 +6220,8 @@
         </p:nvSpPr>
         <p:spPr>
           <a:xfrm>
-            <a:off x="6492240" y="2560320"/>
-            <a:ext cx="5029200" cy="1463040"/>
+            <a:off x="6583680" y="2651760"/>
+            <a:ext cx="4937760" cy="1554480"/>
           </a:xfrm>
           <a:prstGeom prst="rect">
             <a:avLst/>
@@ -6151,11 +6240,11 @@
               </a:lnSpc>
             </a:pPr>
             <a:r>
-              <a:rPr sz="2800" b="1" i="0">
+              <a:rPr sz="3000" b="1" i="0">
                 <a:solidFill>
                   <a:srgbClr val="FFFFFF"/>
                 </a:solidFill>
-                <a:latin typeface="Calibri"/>
+                <a:latin typeface="Georgia"/>
               </a:rPr>
               <a:t>22,000 workers.
 59.12 mrem average.</a:t>
@@ -6171,8 +6260,8 @@
         </p:nvSpPr>
         <p:spPr>
           <a:xfrm>
-            <a:off x="6492240" y="4251960"/>
-            <a:ext cx="5029200" cy="1005840"/>
+            <a:off x="6583680" y="4434840"/>
+            <a:ext cx="4937760" cy="1005840"/>
           </a:xfrm>
           <a:prstGeom prst="rect">
             <a:avLst/>
@@ -6191,9 +6280,9 @@
               </a:lnSpc>
             </a:pPr>
             <a:r>
-              <a:rPr sz="1300" b="0" i="0">
-                <a:solidFill>
-                  <a:srgbClr val="CFD8E3"/>
+              <a:rPr sz="1300" b="0" i="1">
+                <a:solidFill>
+                  <a:srgbClr val="CFE0D2"/>
                 </a:solidFill>
                 <a:latin typeface="Calibri"/>
               </a:rPr>
@@ -6211,15 +6300,15 @@
         </p:nvCxnSpPr>
         <p:spPr>
           <a:xfrm>
-            <a:off x="6492240" y="5349240"/>
-            <a:ext cx="914400" cy="0"/>
+            <a:off x="6583680" y="5440680"/>
+            <a:ext cx="640080" cy="0"/>
           </a:xfrm>
           <a:prstGeom prst="line">
             <a:avLst/>
           </a:prstGeom>
-          <a:ln w="12700">
+          <a:ln w="19050">
             <a:solidFill>
-              <a:srgbClr val="CC7A2E"/>
+              <a:srgbClr val="D97933"/>
             </a:solidFill>
           </a:ln>
         </p:spPr>
@@ -6246,8 +6335,8 @@
         </p:nvSpPr>
         <p:spPr>
           <a:xfrm>
-            <a:off x="6492240" y="5440680"/>
-            <a:ext cx="5029200" cy="457200"/>
+            <a:off x="6583680" y="5532120"/>
+            <a:ext cx="4937760" cy="365760"/>
           </a:xfrm>
           <a:prstGeom prst="rect">
             <a:avLst/>
@@ -6262,13 +6351,13 @@
           <a:p>
             <a:pPr algn="l">
               <a:lnSpc>
-                <a:spcPct val="120000"/>
+                <a:spcPct val="125000"/>
               </a:lnSpc>
             </a:pPr>
             <a:r>
-              <a:rPr sz="1400" b="1" i="0">
-                <a:solidFill>
-                  <a:srgbClr val="E8A860"/>
+              <a:rPr sz="1200" b="1" i="0">
+                <a:solidFill>
+                  <a:srgbClr val="D97933"/>
                 </a:solidFill>
                 <a:latin typeface="Calibri"/>
               </a:rPr>
@@ -6285,8 +6374,8 @@
         </p:nvSpPr>
         <p:spPr>
           <a:xfrm>
-            <a:off x="548640" y="6217920"/>
-            <a:ext cx="11064240" cy="365760"/>
+            <a:off x="548640" y="6263640"/>
+            <a:ext cx="11064240" cy="274320"/>
           </a:xfrm>
           <a:prstGeom prst="rect">
             <a:avLst/>
@@ -6301,15 +6390,15 @@
           <a:p>
             <a:pPr algn="ctr">
               <a:lnSpc>
-                <a:spcPct val="120000"/>
+                <a:spcPct val="125000"/>
               </a:lnSpc>
             </a:pPr>
             <a:r>
-              <a:rPr sz="1400" b="1" i="0">
-                <a:solidFill>
-                  <a:srgbClr val="0A1F3D"/>
-                </a:solidFill>
-                <a:latin typeface="Calibri"/>
+              <a:rPr sz="1300" b="1" i="1">
+                <a:solidFill>
+                  <a:srgbClr val="082618"/>
+                </a:solidFill>
+                <a:latin typeface="Georgia"/>
               </a:rPr>
               <a:t>The gap is not the science. It is the system.</a:t>
             </a:r>
@@ -6324,15 +6413,15 @@
         </p:nvCxnSpPr>
         <p:spPr>
           <a:xfrm>
-            <a:off x="0" y="6629400"/>
-            <a:ext cx="12191695" cy="0"/>
+            <a:off x="548640" y="6565392"/>
+            <a:ext cx="11064240" cy="0"/>
           </a:xfrm>
           <a:prstGeom prst="line">
             <a:avLst/>
           </a:prstGeom>
           <a:ln w="6350">
             <a:solidFill>
-              <a:srgbClr val="C8CED6"/>
+              <a:srgbClr val="C2B8A0"/>
             </a:solidFill>
           </a:ln>
         </p:spPr>
@@ -6353,57 +6442,13 @@
       </p:cxnSp>
       <p:sp>
         <p:nvSpPr>
-          <p:cNvPr id="22" name="Rectangle 21"/>
-          <p:cNvSpPr/>
-          <p:nvPr/>
-        </p:nvSpPr>
-        <p:spPr>
-          <a:xfrm>
-            <a:off x="0" y="6629400"/>
-            <a:ext cx="640080" cy="45720"/>
-          </a:xfrm>
-          <a:prstGeom prst="rect">
-            <a:avLst/>
-          </a:prstGeom>
-          <a:solidFill>
-            <a:srgbClr val="CC7A2E"/>
-          </a:solidFill>
-          <a:ln>
-            <a:noFill/>
-          </a:ln>
-          <a:effectLst/>
-        </p:spPr>
-        <p:style>
-          <a:lnRef idx="1">
-            <a:schemeClr val="accent1"/>
-          </a:lnRef>
-          <a:fillRef idx="3">
-            <a:schemeClr val="accent1"/>
-          </a:fillRef>
-          <a:effectRef idx="2">
-            <a:schemeClr val="accent1"/>
-          </a:effectRef>
-          <a:fontRef idx="minor">
-            <a:schemeClr val="lt1"/>
-          </a:fontRef>
-        </p:style>
-        <p:txBody>
-          <a:bodyPr rtlCol="0" anchor="ctr"/>
-          <a:lstStyle/>
-          <a:p>
-            <a:pPr algn="ctr"/>
-          </a:p>
-        </p:txBody>
-      </p:sp>
-      <p:sp>
-        <p:nvSpPr>
-          <p:cNvPr id="23" name="TextBox 22"/>
+          <p:cNvPr id="22" name="TextBox 21"/>
           <p:cNvSpPr txBox="1"/>
           <p:nvPr/>
         </p:nvSpPr>
         <p:spPr>
           <a:xfrm>
-            <a:off x="457200" y="6675120"/>
+            <a:off x="548640" y="6620256"/>
             <a:ext cx="9601200" cy="182880"/>
           </a:xfrm>
           <a:prstGeom prst="rect">
@@ -6419,31 +6464,31 @@
           <a:p>
             <a:pPr algn="l">
               <a:lnSpc>
-                <a:spcPct val="120000"/>
+                <a:spcPct val="125000"/>
               </a:lnSpc>
             </a:pPr>
             <a:r>
               <a:rPr sz="800" b="0" i="1">
                 <a:solidFill>
-                  <a:srgbClr val="6B7280"/>
+                  <a:srgbClr val="6B7078"/>
                 </a:solidFill>
                 <a:latin typeface="Calibri"/>
               </a:rPr>
-              <a:t>Sources: Siavonga Uranium Baseline Survey (2024) · U.S. DOE REMS 2024 Report</a:t>
-            </a:r>
-          </a:p>
-        </p:txBody>
-      </p:sp>
-      <p:sp>
-        <p:nvSpPr>
-          <p:cNvPr id="24" name="TextBox 23"/>
+              <a:t>SOURCES: Siavonga Uranium Baseline Survey (2024) · U.S. DOE REMS 2024 Report</a:t>
+            </a:r>
+          </a:p>
+        </p:txBody>
+      </p:sp>
+      <p:sp>
+        <p:nvSpPr>
+          <p:cNvPr id="23" name="TextBox 22"/>
           <p:cNvSpPr txBox="1"/>
           <p:nvPr/>
         </p:nvSpPr>
         <p:spPr>
           <a:xfrm>
-            <a:off x="10424160" y="6675120"/>
-            <a:ext cx="1554480" cy="182880"/>
+            <a:off x="10332720" y="6620256"/>
+            <a:ext cx="1645920" cy="182880"/>
           </a:xfrm>
           <a:prstGeom prst="rect">
             <a:avLst/>
@@ -6458,17 +6503,17 @@
           <a:p>
             <a:pPr algn="r">
               <a:lnSpc>
-                <a:spcPct val="120000"/>
+                <a:spcPct val="125000"/>
               </a:lnSpc>
             </a:pPr>
             <a:r>
               <a:rPr sz="800" b="1" i="0">
                 <a:solidFill>
-                  <a:srgbClr val="2A3344"/>
+                  <a:srgbClr val="3A404A"/>
                 </a:solidFill>
                 <a:latin typeface="Calibri"/>
               </a:rPr>
-              <a:t>3 / 8  ·  E. Mwaba</a:t>
+              <a:t>3 / 8   E. MWABA</a:t>
             </a:r>
           </a:p>
         </p:txBody>
@@ -6487,7 +6532,7 @@
     <p:bg>
       <p:bgPr>
         <a:solidFill>
-          <a:srgbClr val="F7F5F0"/>
+          <a:srgbClr val="F4EFE4"/>
         </a:solidFill>
         <a:effectLst/>
       </p:bgPr>
@@ -6507,7 +6552,7 @@
         </p:nvSpPr>
         <p:spPr>
           <a:xfrm>
-            <a:off x="548640" y="411480"/>
+            <a:off x="548640" y="457200"/>
             <a:ext cx="9144000" cy="274320"/>
           </a:xfrm>
           <a:prstGeom prst="rect">
@@ -6523,17 +6568,17 @@
           <a:p>
             <a:pPr algn="l">
               <a:lnSpc>
-                <a:spcPct val="120000"/>
+                <a:spcPct val="125000"/>
               </a:lnSpc>
             </a:pPr>
             <a:r>
-              <a:rPr sz="1100" b="1" i="0">
-                <a:solidFill>
-                  <a:srgbClr val="CC7A2E"/>
+              <a:rPr sz="1000" b="1" i="0">
+                <a:solidFill>
+                  <a:srgbClr val="B54C1A"/>
                 </a:solidFill>
                 <a:latin typeface="Calibri"/>
               </a:rPr>
-              <a:t>02  ·  THE VISION</a:t>
+              <a:t>02  ·  THE HOSTAGE MATH</a:t>
             </a:r>
           </a:p>
         </p:txBody>
@@ -6546,8 +6591,8 @@
         </p:nvSpPr>
         <p:spPr>
           <a:xfrm>
-            <a:off x="548640" y="685800"/>
-            <a:ext cx="11064240" cy="685800"/>
+            <a:off x="548640" y="731520"/>
+            <a:ext cx="11064240" cy="777240"/>
           </a:xfrm>
           <a:prstGeom prst="rect">
             <a:avLst/>
@@ -6562,17 +6607,17 @@
           <a:p>
             <a:pPr algn="l">
               <a:lnSpc>
-                <a:spcPct val="120000"/>
+                <a:spcPct val="105000"/>
               </a:lnSpc>
             </a:pPr>
             <a:r>
               <a:rPr sz="3000" b="1" i="0">
                 <a:solidFill>
-                  <a:srgbClr val="0A1F3D"/>
-                </a:solidFill>
-                <a:latin typeface="Calibri"/>
+                  <a:srgbClr val="082618"/>
+                </a:solidFill>
+                <a:latin typeface="Georgia"/>
               </a:rPr>
-              <a:t>Nuclear as Zambia's baseload future.</a:t>
+              <a:t>Zambia's economy is hostage to the rain.</a:t>
             </a:r>
           </a:p>
         </p:txBody>
@@ -6585,15 +6630,15 @@
         </p:nvCxnSpPr>
         <p:spPr>
           <a:xfrm>
-            <a:off x="548640" y="1325880"/>
-            <a:ext cx="1097280" cy="0"/>
+            <a:off x="548640" y="1508760"/>
+            <a:ext cx="731520" cy="0"/>
           </a:xfrm>
           <a:prstGeom prst="line">
             <a:avLst/>
           </a:prstGeom>
-          <a:ln w="19050">
+          <a:ln w="25400">
             <a:solidFill>
-              <a:srgbClr val="CC7A2E"/>
+              <a:srgbClr val="B54C1A"/>
             </a:solidFill>
           </a:ln>
         </p:spPr>
@@ -6620,7 +6665,7 @@
         </p:nvSpPr>
         <p:spPr>
           <a:xfrm>
-            <a:off x="548640" y="1417320"/>
+            <a:off x="548640" y="1627632"/>
             <a:ext cx="11064240" cy="365760"/>
           </a:xfrm>
           <a:prstGeom prst="rect">
@@ -6636,17 +6681,17 @@
           <a:p>
             <a:pPr algn="l">
               <a:lnSpc>
-                <a:spcPct val="120000"/>
+                <a:spcPct val="125000"/>
               </a:lnSpc>
             </a:pPr>
             <a:r>
               <a:rPr sz="1300" b="0" i="1">
                 <a:solidFill>
-                  <a:srgbClr val="6B7280"/>
+                  <a:srgbClr val="3A404A"/>
                 </a:solidFill>
                 <a:latin typeface="Calibri"/>
               </a:rPr>
-              <a:t>We cannot industrialise a country on rainfall. Nuclear is weather-proof power.</a:t>
+              <a:t>Eight in every ten kilowatts depend on rainfall we no longer get.</a:t>
             </a:r>
           </a:p>
         </p:txBody>
@@ -6660,8 +6705,8 @@
           <p:nvPr/>
         </p:nvGraphicFramePr>
         <p:xfrm>
-          <a:off x="548640" y="2011680"/>
-          <a:ext cx="5303520" cy="4206240"/>
+          <a:off x="548640" y="2103120"/>
+          <a:ext cx="6766560" cy="4114800"/>
         </p:xfrm>
         <a:graphic>
           <a:graphicData uri="http://schemas.openxmlformats.org/drawingml/2006/chart">
@@ -6677,8 +6722,8 @@
         </p:nvSpPr>
         <p:spPr>
           <a:xfrm>
-            <a:off x="548640" y="6172200"/>
-            <a:ext cx="5303520" cy="365760"/>
+            <a:off x="548640" y="6263640"/>
+            <a:ext cx="6766560" cy="274320"/>
           </a:xfrm>
           <a:prstGeom prst="rect">
             <a:avLst/>
@@ -6693,17 +6738,17 @@
           <a:p>
             <a:pPr algn="ctr">
               <a:lnSpc>
-                <a:spcPct val="120000"/>
+                <a:spcPct val="125000"/>
               </a:lnSpc>
             </a:pPr>
             <a:r>
               <a:rPr sz="900" b="0" i="1">
                 <a:solidFill>
-                  <a:srgbClr val="6B7280"/>
+                  <a:srgbClr val="6B7078"/>
                 </a:solidFill>
                 <a:latin typeface="Calibri"/>
               </a:rPr>
-              <a:t>Zambia's 2019 generation mix (%). Source: MoE / ZESCO 2019.</a:t>
+              <a:t>Generation deficit, megawatts (rounded). Sources: ZESCO; MoE.</a:t>
             </a:r>
           </a:p>
         </p:txBody>
@@ -6716,14 +6761,14 @@
         </p:nvSpPr>
         <p:spPr>
           <a:xfrm>
-            <a:off x="6263640" y="2011680"/>
-            <a:ext cx="5349240" cy="4206240"/>
+            <a:off x="7543800" y="2103120"/>
+            <a:ext cx="4160520" cy="4114800"/>
           </a:xfrm>
           <a:prstGeom prst="rect">
             <a:avLst/>
           </a:prstGeom>
           <a:solidFill>
-            <a:srgbClr val="FFFFFF"/>
+            <a:srgbClr val="FAF7F0"/>
           </a:solidFill>
           <a:ln>
             <a:noFill/>
@@ -6760,14 +6805,14 @@
         </p:nvSpPr>
         <p:spPr>
           <a:xfrm>
-            <a:off x="6263640" y="2011680"/>
-            <a:ext cx="109728" cy="4206240"/>
+            <a:off x="7543800" y="2103120"/>
+            <a:ext cx="109728" cy="4114800"/>
           </a:xfrm>
           <a:prstGeom prst="rect">
             <a:avLst/>
           </a:prstGeom>
           <a:solidFill>
-            <a:srgbClr val="CC7A2E"/>
+            <a:srgbClr val="082618"/>
           </a:solidFill>
           <a:ln>
             <a:noFill/>
@@ -6804,8 +6849,8 @@
         </p:nvSpPr>
         <p:spPr>
           <a:xfrm>
-            <a:off x="6492240" y="2148840"/>
-            <a:ext cx="4937760" cy="274320"/>
+            <a:off x="7772400" y="2240280"/>
+            <a:ext cx="3749039" cy="274320"/>
           </a:xfrm>
           <a:prstGeom prst="rect">
             <a:avLst/>
@@ -6820,17 +6865,17 @@
           <a:p>
             <a:pPr algn="l">
               <a:lnSpc>
-                <a:spcPct val="120000"/>
+                <a:spcPct val="125000"/>
               </a:lnSpc>
             </a:pPr>
             <a:r>
-              <a:rPr sz="1100" b="1" i="0">
-                <a:solidFill>
-                  <a:srgbClr val="CC7A2E"/>
+              <a:rPr sz="1000" b="1" i="0">
+                <a:solidFill>
+                  <a:srgbClr val="B54C1A"/>
                 </a:solidFill>
                 <a:latin typeface="Calibri"/>
               </a:rPr>
-              <a:t>WHY THIS MATTERS</a:t>
+              <a:t>WHAT DROUGHT COSTS US</a:t>
             </a:r>
           </a:p>
         </p:txBody>
@@ -6843,8 +6888,8 @@
         </p:nvSpPr>
         <p:spPr>
           <a:xfrm>
-            <a:off x="6492240" y="2514600"/>
-            <a:ext cx="4937760" cy="274320"/>
+            <a:off x="7772400" y="2606040"/>
+            <a:ext cx="3749039" cy="502920"/>
           </a:xfrm>
           <a:prstGeom prst="rect">
             <a:avLst/>
@@ -6859,17 +6904,17 @@
           <a:p>
             <a:pPr algn="l">
               <a:lnSpc>
-                <a:spcPct val="120000"/>
+                <a:spcPct val="125000"/>
               </a:lnSpc>
             </a:pPr>
             <a:r>
-              <a:rPr sz="1100" b="1" i="0">
-                <a:solidFill>
-                  <a:srgbClr val="0A1F3D"/>
-                </a:solidFill>
-                <a:latin typeface="Calibri"/>
+              <a:rPr sz="2600" b="1" i="0">
+                <a:solidFill>
+                  <a:srgbClr val="5C1212"/>
+                </a:solidFill>
+                <a:latin typeface="Georgia"/>
               </a:rPr>
-              <a:t>THE PROBLEM</a:t>
+              <a:t>84%</a:t>
             </a:r>
           </a:p>
         </p:txBody>
@@ -6882,8 +6927,8 @@
         </p:nvSpPr>
         <p:spPr>
           <a:xfrm>
-            <a:off x="6492240" y="2807208"/>
-            <a:ext cx="4937760" cy="960120"/>
+            <a:off x="7772400" y="3108960"/>
+            <a:ext cx="3749039" cy="292608"/>
           </a:xfrm>
           <a:prstGeom prst="rect">
             <a:avLst/>
@@ -6898,194 +6943,38 @@
           <a:p>
             <a:pPr algn="l">
               <a:lnSpc>
-                <a:spcPct val="130000"/>
+                <a:spcPct val="125000"/>
               </a:lnSpc>
             </a:pPr>
             <a:r>
-              <a:rPr sz="1200" b="0" i="0">
-                <a:solidFill>
-                  <a:srgbClr val="121824"/>
+              <a:rPr sz="1000" b="0" i="0">
+                <a:solidFill>
+                  <a:srgbClr val="14181F"/>
                 </a:solidFill>
                 <a:latin typeface="Calibri"/>
               </a:rPr>
-              <a:t>84% hydropower dependence makes Zambia's economy a hostage to the rain.</a:t>
-            </a:r>
-          </a:p>
-        </p:txBody>
-      </p:sp>
-      <p:sp>
-        <p:nvSpPr>
-          <p:cNvPr id="13" name="TextBox 12"/>
-          <p:cNvSpPr txBox="1"/>
-          <p:nvPr/>
-        </p:nvSpPr>
-        <p:spPr>
-          <a:xfrm>
-            <a:off x="6492240" y="3749039"/>
-            <a:ext cx="4937760" cy="274320"/>
-          </a:xfrm>
-          <a:prstGeom prst="rect">
-            <a:avLst/>
-          </a:prstGeom>
-          <a:noFill/>
-        </p:spPr>
-        <p:txBody>
-          <a:bodyPr wrap="square" anchor="t" lIns="0" rIns="0" tIns="0" bIns="0">
-            <a:spAutoFit/>
-          </a:bodyPr>
-          <a:lstStyle/>
-          <a:p>
-            <a:pPr algn="l">
-              <a:lnSpc>
-                <a:spcPct val="120000"/>
-              </a:lnSpc>
-            </a:pPr>
-            <a:r>
-              <a:rPr sz="1100" b="1" i="0">
-                <a:solidFill>
-                  <a:srgbClr val="0A1F3D"/>
-                </a:solidFill>
-                <a:latin typeface="Calibri"/>
-              </a:rPr>
-              <a:t>THE SOLUTION</a:t>
-            </a:r>
-          </a:p>
-        </p:txBody>
-      </p:sp>
-      <p:sp>
-        <p:nvSpPr>
-          <p:cNvPr id="14" name="TextBox 13"/>
-          <p:cNvSpPr txBox="1"/>
-          <p:nvPr/>
-        </p:nvSpPr>
-        <p:spPr>
-          <a:xfrm>
-            <a:off x="6492240" y="4041648"/>
-            <a:ext cx="4937760" cy="960120"/>
-          </a:xfrm>
-          <a:prstGeom prst="rect">
-            <a:avLst/>
-          </a:prstGeom>
-          <a:noFill/>
-        </p:spPr>
-        <p:txBody>
-          <a:bodyPr wrap="square" anchor="t" lIns="0" rIns="0" tIns="0" bIns="0">
-            <a:spAutoFit/>
-          </a:bodyPr>
-          <a:lstStyle/>
-          <a:p>
-            <a:pPr algn="l">
-              <a:lnSpc>
-                <a:spcPct val="130000"/>
-              </a:lnSpc>
-            </a:pPr>
-            <a:r>
-              <a:rPr sz="1200" b="0" i="0">
-                <a:solidFill>
-                  <a:srgbClr val="121824"/>
-                </a:solidFill>
-                <a:latin typeface="Calibri"/>
-              </a:rPr>
-              <a:t>Nuclear delivers 24/7, weather-proof baseload independent of Kariba reservoir levels.</a:t>
-            </a:r>
-          </a:p>
-        </p:txBody>
-      </p:sp>
-      <p:sp>
-        <p:nvSpPr>
-          <p:cNvPr id="15" name="TextBox 14"/>
-          <p:cNvSpPr txBox="1"/>
-          <p:nvPr/>
-        </p:nvSpPr>
-        <p:spPr>
-          <a:xfrm>
-            <a:off x="6492240" y="4983479"/>
-            <a:ext cx="4937760" cy="274320"/>
-          </a:xfrm>
-          <a:prstGeom prst="rect">
-            <a:avLst/>
-          </a:prstGeom>
-          <a:noFill/>
-        </p:spPr>
-        <p:txBody>
-          <a:bodyPr wrap="square" anchor="t" lIns="0" rIns="0" tIns="0" bIns="0">
-            <a:spAutoFit/>
-          </a:bodyPr>
-          <a:lstStyle/>
-          <a:p>
-            <a:pPr algn="l">
-              <a:lnSpc>
-                <a:spcPct val="120000"/>
-              </a:lnSpc>
-            </a:pPr>
-            <a:r>
-              <a:rPr sz="1100" b="1" i="0">
-                <a:solidFill>
-                  <a:srgbClr val="0A1F3D"/>
-                </a:solidFill>
-                <a:latin typeface="Calibri"/>
-              </a:rPr>
-              <a:t>THE READINESS</a:t>
-            </a:r>
-          </a:p>
-        </p:txBody>
-      </p:sp>
-      <p:sp>
-        <p:nvSpPr>
-          <p:cNvPr id="16" name="TextBox 15"/>
-          <p:cNvSpPr txBox="1"/>
-          <p:nvPr/>
-        </p:nvSpPr>
-        <p:spPr>
-          <a:xfrm>
-            <a:off x="6492240" y="5276088"/>
-            <a:ext cx="4937760" cy="960120"/>
-          </a:xfrm>
-          <a:prstGeom prst="rect">
-            <a:avLst/>
-          </a:prstGeom>
-          <a:noFill/>
-        </p:spPr>
-        <p:txBody>
-          <a:bodyPr wrap="square" anchor="t" lIns="0" rIns="0" tIns="0" bIns="0">
-            <a:spAutoFit/>
-          </a:bodyPr>
-          <a:lstStyle/>
-          <a:p>
-            <a:pPr algn="l">
-              <a:lnSpc>
-                <a:spcPct val="130000"/>
-              </a:lnSpc>
-            </a:pPr>
-            <a:r>
-              <a:rPr sz="1200" b="0" i="0">
-                <a:solidFill>
-                  <a:srgbClr val="121824"/>
-                </a:solidFill>
-                <a:latin typeface="Calibri"/>
-              </a:rPr>
-              <a:t>Zambia is an IAEA Member State and the Radiation Protection Authority (RPA) is already in place.</a:t>
+              <a:t>of generation  from hydropower</a:t>
             </a:r>
           </a:p>
         </p:txBody>
       </p:sp>
       <p:cxnSp>
         <p:nvCxnSpPr>
-          <p:cNvPr id="17" name="Connector 16"/>
+          <p:cNvPr id="13" name="Connector 12"/>
           <p:cNvCxnSpPr/>
           <p:nvPr/>
         </p:nvCxnSpPr>
         <p:spPr>
           <a:xfrm>
-            <a:off x="0" y="6629400"/>
-            <a:ext cx="12191695" cy="0"/>
+            <a:off x="7772400" y="3447288"/>
+            <a:ext cx="3474720" cy="0"/>
           </a:xfrm>
           <a:prstGeom prst="line">
             <a:avLst/>
           </a:prstGeom>
           <a:ln w="6350">
             <a:solidFill>
-              <a:srgbClr val="C8CED6"/>
+              <a:srgbClr val="C2B8A0"/>
             </a:solidFill>
           </a:ln>
         </p:spPr>
@@ -7106,58 +6995,14 @@
       </p:cxnSp>
       <p:sp>
         <p:nvSpPr>
-          <p:cNvPr id="18" name="Rectangle 17"/>
-          <p:cNvSpPr/>
-          <p:nvPr/>
-        </p:nvSpPr>
-        <p:spPr>
-          <a:xfrm>
-            <a:off x="0" y="6629400"/>
-            <a:ext cx="640080" cy="45720"/>
-          </a:xfrm>
-          <a:prstGeom prst="rect">
-            <a:avLst/>
-          </a:prstGeom>
-          <a:solidFill>
-            <a:srgbClr val="CC7A2E"/>
-          </a:solidFill>
-          <a:ln>
-            <a:noFill/>
-          </a:ln>
-          <a:effectLst/>
-        </p:spPr>
-        <p:style>
-          <a:lnRef idx="1">
-            <a:schemeClr val="accent1"/>
-          </a:lnRef>
-          <a:fillRef idx="3">
-            <a:schemeClr val="accent1"/>
-          </a:fillRef>
-          <a:effectRef idx="2">
-            <a:schemeClr val="accent1"/>
-          </a:effectRef>
-          <a:fontRef idx="minor">
-            <a:schemeClr val="lt1"/>
-          </a:fontRef>
-        </p:style>
-        <p:txBody>
-          <a:bodyPr rtlCol="0" anchor="ctr"/>
-          <a:lstStyle/>
-          <a:p>
-            <a:pPr algn="ctr"/>
-          </a:p>
-        </p:txBody>
-      </p:sp>
-      <p:sp>
-        <p:nvSpPr>
-          <p:cNvPr id="19" name="TextBox 18"/>
+          <p:cNvPr id="14" name="TextBox 13"/>
           <p:cNvSpPr txBox="1"/>
           <p:nvPr/>
         </p:nvSpPr>
         <p:spPr>
           <a:xfrm>
-            <a:off x="457200" y="6675120"/>
-            <a:ext cx="9601200" cy="182880"/>
+            <a:off x="7772400" y="3520440"/>
+            <a:ext cx="3749039" cy="502920"/>
           </a:xfrm>
           <a:prstGeom prst="rect">
             <a:avLst/>
@@ -7172,31 +7017,31 @@
           <a:p>
             <a:pPr algn="l">
               <a:lnSpc>
-                <a:spcPct val="120000"/>
+                <a:spcPct val="125000"/>
               </a:lnSpc>
             </a:pPr>
             <a:r>
-              <a:rPr sz="800" b="0" i="1">
-                <a:solidFill>
-                  <a:srgbClr val="6B7280"/>
-                </a:solidFill>
-                <a:latin typeface="Calibri"/>
+              <a:rPr sz="2600" b="1" i="0">
+                <a:solidFill>
+                  <a:srgbClr val="5C1212"/>
+                </a:solidFill>
+                <a:latin typeface="Georgia"/>
               </a:rPr>
-              <a:t>Sources: ZESCO Annual Reports 2023-2024 · Zambia 7NDP &amp; Vision 2030 · IAEA Milestone Approach</a:t>
-            </a:r>
-          </a:p>
-        </p:txBody>
-      </p:sp>
-      <p:sp>
-        <p:nvSpPr>
-          <p:cNvPr id="20" name="TextBox 19"/>
+              <a:t>21 hrs</a:t>
+            </a:r>
+          </a:p>
+        </p:txBody>
+      </p:sp>
+      <p:sp>
+        <p:nvSpPr>
+          <p:cNvPr id="15" name="TextBox 14"/>
           <p:cNvSpPr txBox="1"/>
           <p:nvPr/>
         </p:nvSpPr>
         <p:spPr>
           <a:xfrm>
-            <a:off x="10424160" y="6675120"/>
-            <a:ext cx="1554480" cy="182880"/>
+            <a:off x="7772400" y="4023360"/>
+            <a:ext cx="3749039" cy="292608"/>
           </a:xfrm>
           <a:prstGeom prst="rect">
             <a:avLst/>
@@ -7209,19 +7054,432 @@
           </a:bodyPr>
           <a:lstStyle/>
           <a:p>
+            <a:pPr algn="l">
+              <a:lnSpc>
+                <a:spcPct val="125000"/>
+              </a:lnSpc>
+            </a:pPr>
+            <a:r>
+              <a:rPr sz="1000" b="0" i="0">
+                <a:solidFill>
+                  <a:srgbClr val="14181F"/>
+                </a:solidFill>
+                <a:latin typeface="Calibri"/>
+              </a:rPr>
+              <a:t>of load-shedding  per day, late 2024</a:t>
+            </a:r>
+          </a:p>
+        </p:txBody>
+      </p:sp>
+      <p:cxnSp>
+        <p:nvCxnSpPr>
+          <p:cNvPr id="16" name="Connector 15"/>
+          <p:cNvCxnSpPr/>
+          <p:nvPr/>
+        </p:nvCxnSpPr>
+        <p:spPr>
+          <a:xfrm>
+            <a:off x="7772400" y="4361688"/>
+            <a:ext cx="3474720" cy="0"/>
+          </a:xfrm>
+          <a:prstGeom prst="line">
+            <a:avLst/>
+          </a:prstGeom>
+          <a:ln w="6350">
+            <a:solidFill>
+              <a:srgbClr val="C2B8A0"/>
+            </a:solidFill>
+          </a:ln>
+        </p:spPr>
+        <p:style>
+          <a:lnRef idx="2">
+            <a:schemeClr val="accent1"/>
+          </a:lnRef>
+          <a:fillRef idx="0">
+            <a:schemeClr val="accent1"/>
+          </a:fillRef>
+          <a:effectRef idx="1">
+            <a:schemeClr val="accent1"/>
+          </a:effectRef>
+          <a:fontRef idx="minor">
+            <a:schemeClr val="tx1"/>
+          </a:fontRef>
+        </p:style>
+      </p:cxnSp>
+      <p:sp>
+        <p:nvSpPr>
+          <p:cNvPr id="17" name="TextBox 16"/>
+          <p:cNvSpPr txBox="1"/>
+          <p:nvPr/>
+        </p:nvSpPr>
+        <p:spPr>
+          <a:xfrm>
+            <a:off x="7772400" y="4434840"/>
+            <a:ext cx="3749039" cy="502920"/>
+          </a:xfrm>
+          <a:prstGeom prst="rect">
+            <a:avLst/>
+          </a:prstGeom>
+          <a:noFill/>
+        </p:spPr>
+        <p:txBody>
+          <a:bodyPr wrap="square" anchor="t" lIns="0" rIns="0" tIns="0" bIns="0">
+            <a:spAutoFit/>
+          </a:bodyPr>
+          <a:lstStyle/>
+          <a:p>
+            <a:pPr algn="l">
+              <a:lnSpc>
+                <a:spcPct val="125000"/>
+              </a:lnSpc>
+            </a:pPr>
+            <a:r>
+              <a:rPr sz="2600" b="1" i="0">
+                <a:solidFill>
+                  <a:srgbClr val="5C1212"/>
+                </a:solidFill>
+                <a:latin typeface="Georgia"/>
+              </a:rPr>
+              <a:t>$440M</a:t>
+            </a:r>
+          </a:p>
+        </p:txBody>
+      </p:sp>
+      <p:sp>
+        <p:nvSpPr>
+          <p:cNvPr id="18" name="TextBox 17"/>
+          <p:cNvSpPr txBox="1"/>
+          <p:nvPr/>
+        </p:nvSpPr>
+        <p:spPr>
+          <a:xfrm>
+            <a:off x="7772400" y="4937759"/>
+            <a:ext cx="3749039" cy="292608"/>
+          </a:xfrm>
+          <a:prstGeom prst="rect">
+            <a:avLst/>
+          </a:prstGeom>
+          <a:noFill/>
+        </p:spPr>
+        <p:txBody>
+          <a:bodyPr wrap="square" anchor="t" lIns="0" rIns="0" tIns="0" bIns="0">
+            <a:spAutoFit/>
+          </a:bodyPr>
+          <a:lstStyle/>
+          <a:p>
+            <a:pPr algn="l">
+              <a:lnSpc>
+                <a:spcPct val="125000"/>
+              </a:lnSpc>
+            </a:pPr>
+            <a:r>
+              <a:rPr sz="1000" b="0" i="0">
+                <a:solidFill>
+                  <a:srgbClr val="14181F"/>
+                </a:solidFill>
+                <a:latin typeface="Calibri"/>
+              </a:rPr>
+              <a:t>in emergency  imports — 2015/16 alone</a:t>
+            </a:r>
+          </a:p>
+        </p:txBody>
+      </p:sp>
+      <p:cxnSp>
+        <p:nvCxnSpPr>
+          <p:cNvPr id="19" name="Connector 18"/>
+          <p:cNvCxnSpPr/>
+          <p:nvPr/>
+        </p:nvCxnSpPr>
+        <p:spPr>
+          <a:xfrm>
+            <a:off x="7772400" y="5276088"/>
+            <a:ext cx="3474720" cy="0"/>
+          </a:xfrm>
+          <a:prstGeom prst="line">
+            <a:avLst/>
+          </a:prstGeom>
+          <a:ln w="6350">
+            <a:solidFill>
+              <a:srgbClr val="C2B8A0"/>
+            </a:solidFill>
+          </a:ln>
+        </p:spPr>
+        <p:style>
+          <a:lnRef idx="2">
+            <a:schemeClr val="accent1"/>
+          </a:lnRef>
+          <a:fillRef idx="0">
+            <a:schemeClr val="accent1"/>
+          </a:fillRef>
+          <a:effectRef idx="1">
+            <a:schemeClr val="accent1"/>
+          </a:effectRef>
+          <a:fontRef idx="minor">
+            <a:schemeClr val="tx1"/>
+          </a:fontRef>
+        </p:style>
+      </p:cxnSp>
+      <p:sp>
+        <p:nvSpPr>
+          <p:cNvPr id="20" name="TextBox 19"/>
+          <p:cNvSpPr txBox="1"/>
+          <p:nvPr/>
+        </p:nvSpPr>
+        <p:spPr>
+          <a:xfrm>
+            <a:off x="7772400" y="5349240"/>
+            <a:ext cx="3749039" cy="502920"/>
+          </a:xfrm>
+          <a:prstGeom prst="rect">
+            <a:avLst/>
+          </a:prstGeom>
+          <a:noFill/>
+        </p:spPr>
+        <p:txBody>
+          <a:bodyPr wrap="square" anchor="t" lIns="0" rIns="0" tIns="0" bIns="0">
+            <a:spAutoFit/>
+          </a:bodyPr>
+          <a:lstStyle/>
+          <a:p>
+            <a:pPr algn="l">
+              <a:lnSpc>
+                <a:spcPct val="125000"/>
+              </a:lnSpc>
+            </a:pPr>
+            <a:r>
+              <a:rPr sz="2600" b="1" i="0">
+                <a:solidFill>
+                  <a:srgbClr val="5C1212"/>
+                </a:solidFill>
+                <a:latin typeface="Georgia"/>
+              </a:rPr>
+              <a:t>~2%</a:t>
+            </a:r>
+          </a:p>
+        </p:txBody>
+      </p:sp>
+      <p:sp>
+        <p:nvSpPr>
+          <p:cNvPr id="21" name="TextBox 20"/>
+          <p:cNvSpPr txBox="1"/>
+          <p:nvPr/>
+        </p:nvSpPr>
+        <p:spPr>
+          <a:xfrm>
+            <a:off x="7772400" y="5852159"/>
+            <a:ext cx="3749039" cy="292608"/>
+          </a:xfrm>
+          <a:prstGeom prst="rect">
+            <a:avLst/>
+          </a:prstGeom>
+          <a:noFill/>
+        </p:spPr>
+        <p:txBody>
+          <a:bodyPr wrap="square" anchor="t" lIns="0" rIns="0" tIns="0" bIns="0">
+            <a:spAutoFit/>
+          </a:bodyPr>
+          <a:lstStyle/>
+          <a:p>
+            <a:pPr algn="l">
+              <a:lnSpc>
+                <a:spcPct val="125000"/>
+              </a:lnSpc>
+            </a:pPr>
+            <a:r>
+              <a:rPr sz="1000" b="0" i="0">
+                <a:solidFill>
+                  <a:srgbClr val="14181F"/>
+                </a:solidFill>
+                <a:latin typeface="Calibri"/>
+              </a:rPr>
+              <a:t>of GDP lost  to 2024 blackouts (IMF)</a:t>
+            </a:r>
+          </a:p>
+        </p:txBody>
+      </p:sp>
+      <p:cxnSp>
+        <p:nvCxnSpPr>
+          <p:cNvPr id="22" name="Connector 21"/>
+          <p:cNvCxnSpPr/>
+          <p:nvPr/>
+        </p:nvCxnSpPr>
+        <p:spPr>
+          <a:xfrm>
+            <a:off x="7772400" y="6190488"/>
+            <a:ext cx="3474720" cy="0"/>
+          </a:xfrm>
+          <a:prstGeom prst="line">
+            <a:avLst/>
+          </a:prstGeom>
+          <a:ln w="6350">
+            <a:solidFill>
+              <a:srgbClr val="C2B8A0"/>
+            </a:solidFill>
+          </a:ln>
+        </p:spPr>
+        <p:style>
+          <a:lnRef idx="2">
+            <a:schemeClr val="accent1"/>
+          </a:lnRef>
+          <a:fillRef idx="0">
+            <a:schemeClr val="accent1"/>
+          </a:fillRef>
+          <a:effectRef idx="1">
+            <a:schemeClr val="accent1"/>
+          </a:effectRef>
+          <a:fontRef idx="minor">
+            <a:schemeClr val="tx1"/>
+          </a:fontRef>
+        </p:style>
+      </p:cxnSp>
+      <p:sp>
+        <p:nvSpPr>
+          <p:cNvPr id="23" name="TextBox 22"/>
+          <p:cNvSpPr txBox="1"/>
+          <p:nvPr/>
+        </p:nvSpPr>
+        <p:spPr>
+          <a:xfrm>
+            <a:off x="548640" y="6565392"/>
+            <a:ext cx="6766560" cy="274320"/>
+          </a:xfrm>
+          <a:prstGeom prst="rect">
+            <a:avLst/>
+          </a:prstGeom>
+          <a:noFill/>
+        </p:spPr>
+        <p:txBody>
+          <a:bodyPr wrap="square" anchor="t" lIns="0" rIns="0" tIns="0" bIns="0">
+            <a:spAutoFit/>
+          </a:bodyPr>
+          <a:lstStyle/>
+          <a:p>
+            <a:pPr algn="ctr">
+              <a:lnSpc>
+                <a:spcPct val="125000"/>
+              </a:lnSpc>
+            </a:pPr>
+            <a:r>
+              <a:rPr sz="1100" b="1" i="1">
+                <a:solidFill>
+                  <a:srgbClr val="5C1212"/>
+                </a:solidFill>
+                <a:latin typeface="Calibri"/>
+              </a:rPr>
+              <a:t>Three droughts in a decade. The trend, not the exception.</a:t>
+            </a:r>
+          </a:p>
+        </p:txBody>
+      </p:sp>
+      <p:cxnSp>
+        <p:nvCxnSpPr>
+          <p:cNvPr id="24" name="Connector 23"/>
+          <p:cNvCxnSpPr/>
+          <p:nvPr/>
+        </p:nvCxnSpPr>
+        <p:spPr>
+          <a:xfrm>
+            <a:off x="548640" y="6565392"/>
+            <a:ext cx="11064240" cy="0"/>
+          </a:xfrm>
+          <a:prstGeom prst="line">
+            <a:avLst/>
+          </a:prstGeom>
+          <a:ln w="6350">
+            <a:solidFill>
+              <a:srgbClr val="C2B8A0"/>
+            </a:solidFill>
+          </a:ln>
+        </p:spPr>
+        <p:style>
+          <a:lnRef idx="2">
+            <a:schemeClr val="accent1"/>
+          </a:lnRef>
+          <a:fillRef idx="0">
+            <a:schemeClr val="accent1"/>
+          </a:fillRef>
+          <a:effectRef idx="1">
+            <a:schemeClr val="accent1"/>
+          </a:effectRef>
+          <a:fontRef idx="minor">
+            <a:schemeClr val="tx1"/>
+          </a:fontRef>
+        </p:style>
+      </p:cxnSp>
+      <p:sp>
+        <p:nvSpPr>
+          <p:cNvPr id="25" name="TextBox 24"/>
+          <p:cNvSpPr txBox="1"/>
+          <p:nvPr/>
+        </p:nvSpPr>
+        <p:spPr>
+          <a:xfrm>
+            <a:off x="548640" y="6620256"/>
+            <a:ext cx="9601200" cy="182880"/>
+          </a:xfrm>
+          <a:prstGeom prst="rect">
+            <a:avLst/>
+          </a:prstGeom>
+          <a:noFill/>
+        </p:spPr>
+        <p:txBody>
+          <a:bodyPr wrap="square" anchor="t" lIns="0" rIns="0" tIns="0" bIns="0">
+            <a:spAutoFit/>
+          </a:bodyPr>
+          <a:lstStyle/>
+          <a:p>
+            <a:pPr algn="l">
+              <a:lnSpc>
+                <a:spcPct val="125000"/>
+              </a:lnSpc>
+            </a:pPr>
+            <a:r>
+              <a:rPr sz="800" b="0" i="1">
+                <a:solidFill>
+                  <a:srgbClr val="6B7078"/>
+                </a:solidFill>
+                <a:latin typeface="Calibri"/>
+              </a:rPr>
+              <a:t>SOURCES: ZESCO Annual Reports 2023-2024 · IMF Article IV Consultation — Zambia 2024 · Zambia 7NDP &amp; Vision 2030</a:t>
+            </a:r>
+          </a:p>
+        </p:txBody>
+      </p:sp>
+      <p:sp>
+        <p:nvSpPr>
+          <p:cNvPr id="26" name="TextBox 25"/>
+          <p:cNvSpPr txBox="1"/>
+          <p:nvPr/>
+        </p:nvSpPr>
+        <p:spPr>
+          <a:xfrm>
+            <a:off x="10332720" y="6620256"/>
+            <a:ext cx="1645920" cy="182880"/>
+          </a:xfrm>
+          <a:prstGeom prst="rect">
+            <a:avLst/>
+          </a:prstGeom>
+          <a:noFill/>
+        </p:spPr>
+        <p:txBody>
+          <a:bodyPr wrap="square" anchor="t" lIns="0" rIns="0" tIns="0" bIns="0">
+            <a:spAutoFit/>
+          </a:bodyPr>
+          <a:lstStyle/>
+          <a:p>
             <a:pPr algn="r">
               <a:lnSpc>
-                <a:spcPct val="120000"/>
+                <a:spcPct val="125000"/>
               </a:lnSpc>
             </a:pPr>
             <a:r>
               <a:rPr sz="800" b="1" i="0">
                 <a:solidFill>
-                  <a:srgbClr val="2A3344"/>
+                  <a:srgbClr val="3A404A"/>
                 </a:solidFill>
                 <a:latin typeface="Calibri"/>
               </a:rPr>
-              <a:t>4 / 8  ·  E. Mwaba</a:t>
+              <a:t>4 / 8   E. MWABA</a:t>
             </a:r>
           </a:p>
         </p:txBody>
@@ -7240,7 +7498,7 @@
     <p:bg>
       <p:bgPr>
         <a:solidFill>
-          <a:srgbClr val="F7F5F0"/>
+          <a:srgbClr val="F4EFE4"/>
         </a:solidFill>
         <a:effectLst/>
       </p:bgPr>
@@ -7260,7 +7518,7 @@
         </p:nvSpPr>
         <p:spPr>
           <a:xfrm>
-            <a:off x="548640" y="411480"/>
+            <a:off x="548640" y="457200"/>
             <a:ext cx="9144000" cy="274320"/>
           </a:xfrm>
           <a:prstGeom prst="rect">
@@ -7276,13 +7534,13 @@
           <a:p>
             <a:pPr algn="l">
               <a:lnSpc>
-                <a:spcPct val="120000"/>
+                <a:spcPct val="125000"/>
               </a:lnSpc>
             </a:pPr>
             <a:r>
-              <a:rPr sz="1100" b="1" i="0">
-                <a:solidFill>
-                  <a:srgbClr val="CC7A2E"/>
+              <a:rPr sz="1000" b="1" i="0">
+                <a:solidFill>
+                  <a:srgbClr val="B54C1A"/>
                 </a:solidFill>
                 <a:latin typeface="Calibri"/>
               </a:rPr>
@@ -7299,8 +7557,8 @@
         </p:nvSpPr>
         <p:spPr>
           <a:xfrm>
-            <a:off x="548640" y="685800"/>
-            <a:ext cx="11064240" cy="685800"/>
+            <a:off x="548640" y="731520"/>
+            <a:ext cx="11064240" cy="777240"/>
           </a:xfrm>
           <a:prstGeom prst="rect">
             <a:avLst/>
@@ -7315,17 +7573,17 @@
           <a:p>
             <a:pPr algn="l">
               <a:lnSpc>
-                <a:spcPct val="120000"/>
+                <a:spcPct val="105000"/>
               </a:lnSpc>
             </a:pPr>
             <a:r>
               <a:rPr sz="3000" b="1" i="0">
                 <a:solidFill>
-                  <a:srgbClr val="0A1F3D"/>
-                </a:solidFill>
-                <a:latin typeface="Calibri"/>
+                  <a:srgbClr val="082618"/>
+                </a:solidFill>
+                <a:latin typeface="Georgia"/>
               </a:rPr>
-              <a:t>The proof is in the data.</a:t>
+              <a:t>Nuclear is the safest energy we don't yet use.</a:t>
             </a:r>
           </a:p>
         </p:txBody>
@@ -7338,15 +7596,15 @@
         </p:nvCxnSpPr>
         <p:spPr>
           <a:xfrm>
-            <a:off x="548640" y="1325880"/>
-            <a:ext cx="1097280" cy="0"/>
+            <a:off x="548640" y="1508760"/>
+            <a:ext cx="731520" cy="0"/>
           </a:xfrm>
           <a:prstGeom prst="line">
             <a:avLst/>
           </a:prstGeom>
-          <a:ln w="19050">
+          <a:ln w="25400">
             <a:solidFill>
-              <a:srgbClr val="CC7A2E"/>
+              <a:srgbClr val="B54C1A"/>
             </a:solidFill>
           </a:ln>
         </p:spPr>
@@ -7373,7 +7631,7 @@
         </p:nvSpPr>
         <p:spPr>
           <a:xfrm>
-            <a:off x="548640" y="1417320"/>
+            <a:off x="548640" y="1627632"/>
             <a:ext cx="11064240" cy="365760"/>
           </a:xfrm>
           <a:prstGeom prst="rect">
@@ -7389,17 +7647,17 @@
           <a:p>
             <a:pPr algn="l">
               <a:lnSpc>
-                <a:spcPct val="120000"/>
+                <a:spcPct val="125000"/>
               </a:lnSpc>
             </a:pPr>
             <a:r>
               <a:rPr sz="1300" b="0" i="1">
                 <a:solidFill>
-                  <a:srgbClr val="6B7280"/>
+                  <a:srgbClr val="3A404A"/>
                 </a:solidFill>
                 <a:latin typeface="Calibri"/>
               </a:rPr>
-              <a:t>10-year DOE record across 22,000 workers — the safety model Zambia would inherit.</a:t>
+              <a:t>A decade of U.S. DOE data — the playbook Zambia would inherit.</a:t>
             </a:r>
           </a:p>
         </p:txBody>
@@ -7413,8 +7671,8 @@
           <p:nvPr/>
         </p:nvGraphicFramePr>
         <p:xfrm>
-          <a:off x="548640" y="2011680"/>
-          <a:ext cx="6766560" cy="4023360"/>
+          <a:off x="548640" y="2103120"/>
+          <a:ext cx="6766560" cy="4069080"/>
         </p:xfrm>
         <a:graphic>
           <a:graphicData uri="http://schemas.openxmlformats.org/drawingml/2006/chart">
@@ -7430,8 +7688,8 @@
         </p:nvSpPr>
         <p:spPr>
           <a:xfrm>
-            <a:off x="548640" y="6080760"/>
-            <a:ext cx="6766560" cy="365760"/>
+            <a:off x="548640" y="6263640"/>
+            <a:ext cx="6766560" cy="274320"/>
           </a:xfrm>
           <a:prstGeom prst="rect">
             <a:avLst/>
@@ -7446,17 +7704,17 @@
           <a:p>
             <a:pPr algn="ctr">
               <a:lnSpc>
-                <a:spcPct val="120000"/>
+                <a:spcPct val="125000"/>
               </a:lnSpc>
             </a:pPr>
             <a:r>
               <a:rPr sz="900" b="0" i="1">
                 <a:solidFill>
-                  <a:srgbClr val="6B7280"/>
+                  <a:srgbClr val="6B7078"/>
                 </a:solidFill>
                 <a:latin typeface="Calibri"/>
               </a:rPr>
-              <a:t>Radiation exposure (mrem/yr). Source: U.S. DOE REMS 2024.</a:t>
+              <a:t>Annual radiation exposure (mrem). Source: U.S. DOE REMS 2024.</a:t>
             </a:r>
           </a:p>
         </p:txBody>
@@ -7469,14 +7727,14 @@
         </p:nvSpPr>
         <p:spPr>
           <a:xfrm>
-            <a:off x="7543800" y="2011680"/>
-            <a:ext cx="4160520" cy="1828800"/>
+            <a:off x="7543800" y="2103120"/>
+            <a:ext cx="4160520" cy="1783080"/>
           </a:xfrm>
           <a:prstGeom prst="rect">
             <a:avLst/>
           </a:prstGeom>
           <a:solidFill>
-            <a:srgbClr val="0A1F3D"/>
+            <a:srgbClr val="082618"/>
           </a:solidFill>
           <a:ln>
             <a:noFill/>
@@ -7513,14 +7771,14 @@
         </p:nvSpPr>
         <p:spPr>
           <a:xfrm>
-            <a:off x="7543800" y="2011680"/>
-            <a:ext cx="109728" cy="1828800"/>
+            <a:off x="7543800" y="2103120"/>
+            <a:ext cx="109728" cy="1783080"/>
           </a:xfrm>
           <a:prstGeom prst="rect">
             <a:avLst/>
           </a:prstGeom>
           <a:solidFill>
-            <a:srgbClr val="CC7A2E"/>
+            <a:srgbClr val="B54C1A"/>
           </a:solidFill>
           <a:ln>
             <a:noFill/>
@@ -7557,8 +7815,252 @@
         </p:nvSpPr>
         <p:spPr>
           <a:xfrm>
-            <a:off x="7772400" y="2103120"/>
+            <a:off x="7772400" y="2212848"/>
             <a:ext cx="3840480" cy="274320"/>
+          </a:xfrm>
+          <a:prstGeom prst="rect">
+            <a:avLst/>
+          </a:prstGeom>
+          <a:noFill/>
+        </p:spPr>
+        <p:txBody>
+          <a:bodyPr wrap="square" anchor="t" lIns="0" rIns="0" tIns="0" bIns="0">
+            <a:spAutoFit/>
+          </a:bodyPr>
+          <a:lstStyle/>
+          <a:p>
+            <a:pPr algn="l">
+              <a:lnSpc>
+                <a:spcPct val="125000"/>
+              </a:lnSpc>
+            </a:pPr>
+            <a:r>
+              <a:rPr sz="1000" b="1" i="0">
+                <a:solidFill>
+                  <a:srgbClr val="CFA33C"/>
+                </a:solidFill>
+                <a:latin typeface="Calibri"/>
+              </a:rPr>
+              <a:t>OF THE FEDERAL LIMIT</a:t>
+            </a:r>
+          </a:p>
+        </p:txBody>
+      </p:sp>
+      <p:sp>
+        <p:nvSpPr>
+          <p:cNvPr id="11" name="TextBox 10"/>
+          <p:cNvSpPr txBox="1"/>
+          <p:nvPr/>
+        </p:nvSpPr>
+        <p:spPr>
+          <a:xfrm>
+            <a:off x="7772400" y="2487168"/>
+            <a:ext cx="3840480" cy="914400"/>
+          </a:xfrm>
+          <a:prstGeom prst="rect">
+            <a:avLst/>
+          </a:prstGeom>
+          <a:noFill/>
+        </p:spPr>
+        <p:txBody>
+          <a:bodyPr wrap="square" anchor="t" lIns="0" rIns="0" tIns="0" bIns="0">
+            <a:spAutoFit/>
+          </a:bodyPr>
+          <a:lstStyle/>
+          <a:p>
+            <a:pPr algn="l">
+              <a:lnSpc>
+                <a:spcPct val="125000"/>
+              </a:lnSpc>
+            </a:pPr>
+            <a:r>
+              <a:rPr sz="7200" b="1" i="0">
+                <a:solidFill>
+                  <a:srgbClr val="FFFFFF"/>
+                </a:solidFill>
+                <a:latin typeface="Georgia"/>
+              </a:rPr>
+              <a:t>1.2%</a:t>
+            </a:r>
+          </a:p>
+        </p:txBody>
+      </p:sp>
+      <p:sp>
+        <p:nvSpPr>
+          <p:cNvPr id="12" name="TextBox 11"/>
+          <p:cNvSpPr txBox="1"/>
+          <p:nvPr/>
+        </p:nvSpPr>
+        <p:spPr>
+          <a:xfrm>
+            <a:off x="7772400" y="3456432"/>
+            <a:ext cx="3840480" cy="274320"/>
+          </a:xfrm>
+          <a:prstGeom prst="rect">
+            <a:avLst/>
+          </a:prstGeom>
+          <a:noFill/>
+        </p:spPr>
+        <p:txBody>
+          <a:bodyPr wrap="square" anchor="t" lIns="0" rIns="0" tIns="0" bIns="0">
+            <a:spAutoFit/>
+          </a:bodyPr>
+          <a:lstStyle/>
+          <a:p>
+            <a:pPr algn="l">
+              <a:lnSpc>
+                <a:spcPct val="125000"/>
+              </a:lnSpc>
+            </a:pPr>
+            <a:r>
+              <a:rPr sz="1100" b="0" i="0">
+                <a:solidFill>
+                  <a:srgbClr val="CFE0D2"/>
+                </a:solidFill>
+                <a:latin typeface="Calibri"/>
+              </a:rPr>
+              <a:t>59.12 ÷ 5,000 mrem</a:t>
+            </a:r>
+          </a:p>
+        </p:txBody>
+      </p:sp>
+      <p:sp>
+        <p:nvSpPr>
+          <p:cNvPr id="13" name="Rectangle 12"/>
+          <p:cNvSpPr/>
+          <p:nvPr/>
+        </p:nvSpPr>
+        <p:spPr>
+          <a:xfrm>
+            <a:off x="7543800" y="4023360"/>
+            <a:ext cx="4160520" cy="676656"/>
+          </a:xfrm>
+          <a:prstGeom prst="rect">
+            <a:avLst/>
+          </a:prstGeom>
+          <a:solidFill>
+            <a:srgbClr val="FAF7F0"/>
+          </a:solidFill>
+          <a:ln>
+            <a:noFill/>
+          </a:ln>
+          <a:effectLst/>
+        </p:spPr>
+        <p:style>
+          <a:lnRef idx="1">
+            <a:schemeClr val="accent1"/>
+          </a:lnRef>
+          <a:fillRef idx="3">
+            <a:schemeClr val="accent1"/>
+          </a:fillRef>
+          <a:effectRef idx="2">
+            <a:schemeClr val="accent1"/>
+          </a:effectRef>
+          <a:fontRef idx="minor">
+            <a:schemeClr val="lt1"/>
+          </a:fontRef>
+        </p:style>
+        <p:txBody>
+          <a:bodyPr rtlCol="0" anchor="ctr"/>
+          <a:lstStyle/>
+          <a:p>
+            <a:pPr algn="ctr"/>
+          </a:p>
+        </p:txBody>
+      </p:sp>
+      <p:sp>
+        <p:nvSpPr>
+          <p:cNvPr id="14" name="Rectangle 13"/>
+          <p:cNvSpPr/>
+          <p:nvPr/>
+        </p:nvSpPr>
+        <p:spPr>
+          <a:xfrm>
+            <a:off x="7543800" y="4023360"/>
+            <a:ext cx="73152" cy="676656"/>
+          </a:xfrm>
+          <a:prstGeom prst="rect">
+            <a:avLst/>
+          </a:prstGeom>
+          <a:solidFill>
+            <a:srgbClr val="B54C1A"/>
+          </a:solidFill>
+          <a:ln>
+            <a:noFill/>
+          </a:ln>
+          <a:effectLst/>
+        </p:spPr>
+        <p:style>
+          <a:lnRef idx="1">
+            <a:schemeClr val="accent1"/>
+          </a:lnRef>
+          <a:fillRef idx="3">
+            <a:schemeClr val="accent1"/>
+          </a:fillRef>
+          <a:effectRef idx="2">
+            <a:schemeClr val="accent1"/>
+          </a:effectRef>
+          <a:fontRef idx="minor">
+            <a:schemeClr val="lt1"/>
+          </a:fontRef>
+        </p:style>
+        <p:txBody>
+          <a:bodyPr rtlCol="0" anchor="ctr"/>
+          <a:lstStyle/>
+          <a:p>
+            <a:pPr algn="ctr"/>
+          </a:p>
+        </p:txBody>
+      </p:sp>
+      <p:sp>
+        <p:nvSpPr>
+          <p:cNvPr id="15" name="TextBox 14"/>
+          <p:cNvSpPr txBox="1"/>
+          <p:nvPr/>
+        </p:nvSpPr>
+        <p:spPr>
+          <a:xfrm>
+            <a:off x="7726679" y="4078224"/>
+            <a:ext cx="3931920" cy="228600"/>
+          </a:xfrm>
+          <a:prstGeom prst="rect">
+            <a:avLst/>
+          </a:prstGeom>
+          <a:noFill/>
+        </p:spPr>
+        <p:txBody>
+          <a:bodyPr wrap="square" anchor="t" lIns="0" rIns="0" tIns="0" bIns="0">
+            <a:spAutoFit/>
+          </a:bodyPr>
+          <a:lstStyle/>
+          <a:p>
+            <a:pPr algn="l">
+              <a:lnSpc>
+                <a:spcPct val="125000"/>
+              </a:lnSpc>
+            </a:pPr>
+            <a:r>
+              <a:rPr sz="1000" b="1" i="0">
+                <a:solidFill>
+                  <a:srgbClr val="082618"/>
+                </a:solidFill>
+                <a:latin typeface="Calibri"/>
+              </a:rPr>
+              <a:t>SCALABLE</a:t>
+            </a:r>
+          </a:p>
+        </p:txBody>
+      </p:sp>
+      <p:sp>
+        <p:nvSpPr>
+          <p:cNvPr id="16" name="TextBox 15"/>
+          <p:cNvSpPr txBox="1"/>
+          <p:nvPr/>
+        </p:nvSpPr>
+        <p:spPr>
+          <a:xfrm>
+            <a:off x="7726679" y="4315968"/>
+            <a:ext cx="3931920" cy="384048"/>
           </a:xfrm>
           <a:prstGeom prst="rect">
             <a:avLst/>
@@ -7577,27 +8079,154 @@
               </a:lnSpc>
             </a:pPr>
             <a:r>
-              <a:rPr sz="1100" b="1" i="0">
-                <a:solidFill>
-                  <a:srgbClr val="E8A860"/>
+              <a:rPr sz="1000" b="0" i="0">
+                <a:solidFill>
+                  <a:srgbClr val="14181F"/>
                 </a:solidFill>
                 <a:latin typeface="Calibri"/>
               </a:rPr>
-              <a:t>OF THE FEDERAL LIMIT</a:t>
-            </a:r>
-          </a:p>
-        </p:txBody>
-      </p:sp>
-      <p:sp>
-        <p:nvSpPr>
-          <p:cNvPr id="11" name="TextBox 10"/>
+              <a:t>Workforce grew 1,133 → 1,167. Average dose did not move.</a:t>
+            </a:r>
+          </a:p>
+        </p:txBody>
+      </p:sp>
+      <p:sp>
+        <p:nvSpPr>
+          <p:cNvPr id="17" name="Rectangle 16"/>
+          <p:cNvSpPr/>
+          <p:nvPr/>
+        </p:nvSpPr>
+        <p:spPr>
+          <a:xfrm>
+            <a:off x="7543800" y="4754880"/>
+            <a:ext cx="4160520" cy="676656"/>
+          </a:xfrm>
+          <a:prstGeom prst="rect">
+            <a:avLst/>
+          </a:prstGeom>
+          <a:solidFill>
+            <a:srgbClr val="FAF7F0"/>
+          </a:solidFill>
+          <a:ln>
+            <a:noFill/>
+          </a:ln>
+          <a:effectLst/>
+        </p:spPr>
+        <p:style>
+          <a:lnRef idx="1">
+            <a:schemeClr val="accent1"/>
+          </a:lnRef>
+          <a:fillRef idx="3">
+            <a:schemeClr val="accent1"/>
+          </a:fillRef>
+          <a:effectRef idx="2">
+            <a:schemeClr val="accent1"/>
+          </a:effectRef>
+          <a:fontRef idx="minor">
+            <a:schemeClr val="lt1"/>
+          </a:fontRef>
+        </p:style>
+        <p:txBody>
+          <a:bodyPr rtlCol="0" anchor="ctr"/>
+          <a:lstStyle/>
+          <a:p>
+            <a:pPr algn="ctr"/>
+          </a:p>
+        </p:txBody>
+      </p:sp>
+      <p:sp>
+        <p:nvSpPr>
+          <p:cNvPr id="18" name="Rectangle 17"/>
+          <p:cNvSpPr/>
+          <p:nvPr/>
+        </p:nvSpPr>
+        <p:spPr>
+          <a:xfrm>
+            <a:off x="7543800" y="4754880"/>
+            <a:ext cx="73152" cy="676656"/>
+          </a:xfrm>
+          <a:prstGeom prst="rect">
+            <a:avLst/>
+          </a:prstGeom>
+          <a:solidFill>
+            <a:srgbClr val="B54C1A"/>
+          </a:solidFill>
+          <a:ln>
+            <a:noFill/>
+          </a:ln>
+          <a:effectLst/>
+        </p:spPr>
+        <p:style>
+          <a:lnRef idx="1">
+            <a:schemeClr val="accent1"/>
+          </a:lnRef>
+          <a:fillRef idx="3">
+            <a:schemeClr val="accent1"/>
+          </a:fillRef>
+          <a:effectRef idx="2">
+            <a:schemeClr val="accent1"/>
+          </a:effectRef>
+          <a:fontRef idx="minor">
+            <a:schemeClr val="lt1"/>
+          </a:fontRef>
+        </p:style>
+        <p:txBody>
+          <a:bodyPr rtlCol="0" anchor="ctr"/>
+          <a:lstStyle/>
+          <a:p>
+            <a:pPr algn="ctr"/>
+          </a:p>
+        </p:txBody>
+      </p:sp>
+      <p:sp>
+        <p:nvSpPr>
+          <p:cNvPr id="19" name="TextBox 18"/>
           <p:cNvSpPr txBox="1"/>
           <p:nvPr/>
         </p:nvSpPr>
         <p:spPr>
           <a:xfrm>
-            <a:off x="7772400" y="2423160"/>
-            <a:ext cx="3840480" cy="1005840"/>
+            <a:off x="7726679" y="4809744"/>
+            <a:ext cx="3931920" cy="228600"/>
+          </a:xfrm>
+          <a:prstGeom prst="rect">
+            <a:avLst/>
+          </a:prstGeom>
+          <a:noFill/>
+        </p:spPr>
+        <p:txBody>
+          <a:bodyPr wrap="square" anchor="t" lIns="0" rIns="0" tIns="0" bIns="0">
+            <a:spAutoFit/>
+          </a:bodyPr>
+          <a:lstStyle/>
+          <a:p>
+            <a:pPr algn="l">
+              <a:lnSpc>
+                <a:spcPct val="125000"/>
+              </a:lnSpc>
+            </a:pPr>
+            <a:r>
+              <a:rPr sz="1000" b="1" i="0">
+                <a:solidFill>
+                  <a:srgbClr val="082618"/>
+                </a:solidFill>
+                <a:latin typeface="Calibri"/>
+              </a:rPr>
+              <a:t>CONTAINED</a:t>
+            </a:r>
+          </a:p>
+        </p:txBody>
+      </p:sp>
+      <p:sp>
+        <p:nvSpPr>
+          <p:cNvPr id="20" name="TextBox 19"/>
+          <p:cNvSpPr txBox="1"/>
+          <p:nvPr/>
+        </p:nvSpPr>
+        <p:spPr>
+          <a:xfrm>
+            <a:off x="7726679" y="5047488"/>
+            <a:ext cx="3931920" cy="384048"/>
           </a:xfrm>
           <a:prstGeom prst="rect">
             <a:avLst/>
@@ -7616,27 +8245,154 @@
               </a:lnSpc>
             </a:pPr>
             <a:r>
-              <a:rPr sz="7200" b="1" i="0">
-                <a:solidFill>
-                  <a:srgbClr val="FFFFFF"/>
+              <a:rPr sz="1000" b="0" i="0">
+                <a:solidFill>
+                  <a:srgbClr val="14181F"/>
                 </a:solidFill>
                 <a:latin typeface="Calibri"/>
               </a:rPr>
-              <a:t>1.2%</a:t>
-            </a:r>
-          </a:p>
-        </p:txBody>
-      </p:sp>
-      <p:sp>
-        <p:nvSpPr>
-          <p:cNvPr id="12" name="TextBox 11"/>
+              <a:t>98% external (shielding). 2% internal (protocol).</a:t>
+            </a:r>
+          </a:p>
+        </p:txBody>
+      </p:sp>
+      <p:sp>
+        <p:nvSpPr>
+          <p:cNvPr id="21" name="Rectangle 20"/>
+          <p:cNvSpPr/>
+          <p:nvPr/>
+        </p:nvSpPr>
+        <p:spPr>
+          <a:xfrm>
+            <a:off x="7543800" y="5486400"/>
+            <a:ext cx="4160520" cy="676656"/>
+          </a:xfrm>
+          <a:prstGeom prst="rect">
+            <a:avLst/>
+          </a:prstGeom>
+          <a:solidFill>
+            <a:srgbClr val="FAF7F0"/>
+          </a:solidFill>
+          <a:ln>
+            <a:noFill/>
+          </a:ln>
+          <a:effectLst/>
+        </p:spPr>
+        <p:style>
+          <a:lnRef idx="1">
+            <a:schemeClr val="accent1"/>
+          </a:lnRef>
+          <a:fillRef idx="3">
+            <a:schemeClr val="accent1"/>
+          </a:fillRef>
+          <a:effectRef idx="2">
+            <a:schemeClr val="accent1"/>
+          </a:effectRef>
+          <a:fontRef idx="minor">
+            <a:schemeClr val="lt1"/>
+          </a:fontRef>
+        </p:style>
+        <p:txBody>
+          <a:bodyPr rtlCol="0" anchor="ctr"/>
+          <a:lstStyle/>
+          <a:p>
+            <a:pPr algn="ctr"/>
+          </a:p>
+        </p:txBody>
+      </p:sp>
+      <p:sp>
+        <p:nvSpPr>
+          <p:cNvPr id="22" name="Rectangle 21"/>
+          <p:cNvSpPr/>
+          <p:nvPr/>
+        </p:nvSpPr>
+        <p:spPr>
+          <a:xfrm>
+            <a:off x="7543800" y="5486400"/>
+            <a:ext cx="73152" cy="676656"/>
+          </a:xfrm>
+          <a:prstGeom prst="rect">
+            <a:avLst/>
+          </a:prstGeom>
+          <a:solidFill>
+            <a:srgbClr val="B54C1A"/>
+          </a:solidFill>
+          <a:ln>
+            <a:noFill/>
+          </a:ln>
+          <a:effectLst/>
+        </p:spPr>
+        <p:style>
+          <a:lnRef idx="1">
+            <a:schemeClr val="accent1"/>
+          </a:lnRef>
+          <a:fillRef idx="3">
+            <a:schemeClr val="accent1"/>
+          </a:fillRef>
+          <a:effectRef idx="2">
+            <a:schemeClr val="accent1"/>
+          </a:effectRef>
+          <a:fontRef idx="minor">
+            <a:schemeClr val="lt1"/>
+          </a:fontRef>
+        </p:style>
+        <p:txBody>
+          <a:bodyPr rtlCol="0" anchor="ctr"/>
+          <a:lstStyle/>
+          <a:p>
+            <a:pPr algn="ctr"/>
+          </a:p>
+        </p:txBody>
+      </p:sp>
+      <p:sp>
+        <p:nvSpPr>
+          <p:cNvPr id="23" name="TextBox 22"/>
           <p:cNvSpPr txBox="1"/>
           <p:nvPr/>
         </p:nvSpPr>
         <p:spPr>
           <a:xfrm>
-            <a:off x="7772400" y="3429000"/>
-            <a:ext cx="3840480" cy="365760"/>
+            <a:off x="7726679" y="5541264"/>
+            <a:ext cx="3931920" cy="228600"/>
+          </a:xfrm>
+          <a:prstGeom prst="rect">
+            <a:avLst/>
+          </a:prstGeom>
+          <a:noFill/>
+        </p:spPr>
+        <p:txBody>
+          <a:bodyPr wrap="square" anchor="t" lIns="0" rIns="0" tIns="0" bIns="0">
+            <a:spAutoFit/>
+          </a:bodyPr>
+          <a:lstStyle/>
+          <a:p>
+            <a:pPr algn="l">
+              <a:lnSpc>
+                <a:spcPct val="125000"/>
+              </a:lnSpc>
+            </a:pPr>
+            <a:r>
+              <a:rPr sz="1000" b="1" i="0">
+                <a:solidFill>
+                  <a:srgbClr val="082618"/>
+                </a:solidFill>
+                <a:latin typeface="Calibri"/>
+              </a:rPr>
+              <a:t>REPLICABLE</a:t>
+            </a:r>
+          </a:p>
+        </p:txBody>
+      </p:sp>
+      <p:sp>
+        <p:nvSpPr>
+          <p:cNvPr id="24" name="TextBox 23"/>
+          <p:cNvSpPr txBox="1"/>
+          <p:nvPr/>
+        </p:nvSpPr>
+        <p:spPr>
+          <a:xfrm>
+            <a:off x="7726679" y="5779008"/>
+            <a:ext cx="3931920" cy="384048"/>
           </a:xfrm>
           <a:prstGeom prst="rect">
             <a:avLst/>
@@ -7655,511 +8411,13 @@
               </a:lnSpc>
             </a:pPr>
             <a:r>
-              <a:rPr sz="1200" b="0" i="0">
-                <a:solidFill>
-                  <a:srgbClr val="CFD8E3"/>
+              <a:rPr sz="1000" b="0" i="0">
+                <a:solidFill>
+                  <a:srgbClr val="14181F"/>
                 </a:solidFill>
                 <a:latin typeface="Calibri"/>
               </a:rPr>
-              <a:t>59.12 ÷ 5,000 mrem</a:t>
-            </a:r>
-          </a:p>
-        </p:txBody>
-      </p:sp>
-      <p:sp>
-        <p:nvSpPr>
-          <p:cNvPr id="13" name="Rectangle 12"/>
-          <p:cNvSpPr/>
-          <p:nvPr/>
-        </p:nvSpPr>
-        <p:spPr>
-          <a:xfrm>
-            <a:off x="7543800" y="3977639"/>
-            <a:ext cx="4160520" cy="676656"/>
-          </a:xfrm>
-          <a:prstGeom prst="rect">
-            <a:avLst/>
-          </a:prstGeom>
-          <a:solidFill>
-            <a:srgbClr val="FFFFFF"/>
-          </a:solidFill>
-          <a:ln>
-            <a:noFill/>
-          </a:ln>
-          <a:effectLst/>
-        </p:spPr>
-        <p:style>
-          <a:lnRef idx="1">
-            <a:schemeClr val="accent1"/>
-          </a:lnRef>
-          <a:fillRef idx="3">
-            <a:schemeClr val="accent1"/>
-          </a:fillRef>
-          <a:effectRef idx="2">
-            <a:schemeClr val="accent1"/>
-          </a:effectRef>
-          <a:fontRef idx="minor">
-            <a:schemeClr val="lt1"/>
-          </a:fontRef>
-        </p:style>
-        <p:txBody>
-          <a:bodyPr rtlCol="0" anchor="ctr"/>
-          <a:lstStyle/>
-          <a:p>
-            <a:pPr algn="ctr"/>
-          </a:p>
-        </p:txBody>
-      </p:sp>
-      <p:sp>
-        <p:nvSpPr>
-          <p:cNvPr id="14" name="Rectangle 13"/>
-          <p:cNvSpPr/>
-          <p:nvPr/>
-        </p:nvSpPr>
-        <p:spPr>
-          <a:xfrm>
-            <a:off x="7543800" y="3977639"/>
-            <a:ext cx="73152" cy="676656"/>
-          </a:xfrm>
-          <a:prstGeom prst="rect">
-            <a:avLst/>
-          </a:prstGeom>
-          <a:solidFill>
-            <a:srgbClr val="CC7A2E"/>
-          </a:solidFill>
-          <a:ln>
-            <a:noFill/>
-          </a:ln>
-          <a:effectLst/>
-        </p:spPr>
-        <p:style>
-          <a:lnRef idx="1">
-            <a:schemeClr val="accent1"/>
-          </a:lnRef>
-          <a:fillRef idx="3">
-            <a:schemeClr val="accent1"/>
-          </a:fillRef>
-          <a:effectRef idx="2">
-            <a:schemeClr val="accent1"/>
-          </a:effectRef>
-          <a:fontRef idx="minor">
-            <a:schemeClr val="lt1"/>
-          </a:fontRef>
-        </p:style>
-        <p:txBody>
-          <a:bodyPr rtlCol="0" anchor="ctr"/>
-          <a:lstStyle/>
-          <a:p>
-            <a:pPr algn="ctr"/>
-          </a:p>
-        </p:txBody>
-      </p:sp>
-      <p:sp>
-        <p:nvSpPr>
-          <p:cNvPr id="15" name="TextBox 14"/>
-          <p:cNvSpPr txBox="1"/>
-          <p:nvPr/>
-        </p:nvSpPr>
-        <p:spPr>
-          <a:xfrm>
-            <a:off x="7726679" y="4023359"/>
-            <a:ext cx="3931920" cy="228600"/>
-          </a:xfrm>
-          <a:prstGeom prst="rect">
-            <a:avLst/>
-          </a:prstGeom>
-          <a:noFill/>
-        </p:spPr>
-        <p:txBody>
-          <a:bodyPr wrap="square" anchor="t" lIns="0" rIns="0" tIns="0" bIns="0">
-            <a:spAutoFit/>
-          </a:bodyPr>
-          <a:lstStyle/>
-          <a:p>
-            <a:pPr algn="l">
-              <a:lnSpc>
-                <a:spcPct val="120000"/>
-              </a:lnSpc>
-            </a:pPr>
-            <a:r>
-              <a:rPr sz="1000" b="1" i="0">
-                <a:solidFill>
-                  <a:srgbClr val="0A1F3D"/>
-                </a:solidFill>
-                <a:latin typeface="Calibri"/>
-              </a:rPr>
-              <a:t>SCALABLE</a:t>
-            </a:r>
-          </a:p>
-        </p:txBody>
-      </p:sp>
-      <p:sp>
-        <p:nvSpPr>
-          <p:cNvPr id="16" name="TextBox 15"/>
-          <p:cNvSpPr txBox="1"/>
-          <p:nvPr/>
-        </p:nvSpPr>
-        <p:spPr>
-          <a:xfrm>
-            <a:off x="7726679" y="4251959"/>
-            <a:ext cx="3931920" cy="384048"/>
-          </a:xfrm>
-          <a:prstGeom prst="rect">
-            <a:avLst/>
-          </a:prstGeom>
-          <a:noFill/>
-        </p:spPr>
-        <p:txBody>
-          <a:bodyPr wrap="square" anchor="t" lIns="0" rIns="0" tIns="0" bIns="0">
-            <a:spAutoFit/>
-          </a:bodyPr>
-          <a:lstStyle/>
-          <a:p>
-            <a:pPr algn="l">
-              <a:lnSpc>
-                <a:spcPct val="120000"/>
-              </a:lnSpc>
-            </a:pPr>
-            <a:r>
-              <a:rPr sz="1000" b="0" i="0">
-                <a:solidFill>
-                  <a:srgbClr val="121824"/>
-                </a:solidFill>
-                <a:latin typeface="Calibri"/>
-              </a:rPr>
-              <a:t>Workforce grew 1,133 → 1,167. Dose did not move.</a:t>
-            </a:r>
-          </a:p>
-        </p:txBody>
-      </p:sp>
-      <p:sp>
-        <p:nvSpPr>
-          <p:cNvPr id="17" name="Rectangle 16"/>
-          <p:cNvSpPr/>
-          <p:nvPr/>
-        </p:nvSpPr>
-        <p:spPr>
-          <a:xfrm>
-            <a:off x="7543800" y="4709159"/>
-            <a:ext cx="4160520" cy="676656"/>
-          </a:xfrm>
-          <a:prstGeom prst="rect">
-            <a:avLst/>
-          </a:prstGeom>
-          <a:solidFill>
-            <a:srgbClr val="FFFFFF"/>
-          </a:solidFill>
-          <a:ln>
-            <a:noFill/>
-          </a:ln>
-          <a:effectLst/>
-        </p:spPr>
-        <p:style>
-          <a:lnRef idx="1">
-            <a:schemeClr val="accent1"/>
-          </a:lnRef>
-          <a:fillRef idx="3">
-            <a:schemeClr val="accent1"/>
-          </a:fillRef>
-          <a:effectRef idx="2">
-            <a:schemeClr val="accent1"/>
-          </a:effectRef>
-          <a:fontRef idx="minor">
-            <a:schemeClr val="lt1"/>
-          </a:fontRef>
-        </p:style>
-        <p:txBody>
-          <a:bodyPr rtlCol="0" anchor="ctr"/>
-          <a:lstStyle/>
-          <a:p>
-            <a:pPr algn="ctr"/>
-          </a:p>
-        </p:txBody>
-      </p:sp>
-      <p:sp>
-        <p:nvSpPr>
-          <p:cNvPr id="18" name="Rectangle 17"/>
-          <p:cNvSpPr/>
-          <p:nvPr/>
-        </p:nvSpPr>
-        <p:spPr>
-          <a:xfrm>
-            <a:off x="7543800" y="4709159"/>
-            <a:ext cx="73152" cy="676656"/>
-          </a:xfrm>
-          <a:prstGeom prst="rect">
-            <a:avLst/>
-          </a:prstGeom>
-          <a:solidFill>
-            <a:srgbClr val="CC7A2E"/>
-          </a:solidFill>
-          <a:ln>
-            <a:noFill/>
-          </a:ln>
-          <a:effectLst/>
-        </p:spPr>
-        <p:style>
-          <a:lnRef idx="1">
-            <a:schemeClr val="accent1"/>
-          </a:lnRef>
-          <a:fillRef idx="3">
-            <a:schemeClr val="accent1"/>
-          </a:fillRef>
-          <a:effectRef idx="2">
-            <a:schemeClr val="accent1"/>
-          </a:effectRef>
-          <a:fontRef idx="minor">
-            <a:schemeClr val="lt1"/>
-          </a:fontRef>
-        </p:style>
-        <p:txBody>
-          <a:bodyPr rtlCol="0" anchor="ctr"/>
-          <a:lstStyle/>
-          <a:p>
-            <a:pPr algn="ctr"/>
-          </a:p>
-        </p:txBody>
-      </p:sp>
-      <p:sp>
-        <p:nvSpPr>
-          <p:cNvPr id="19" name="TextBox 18"/>
-          <p:cNvSpPr txBox="1"/>
-          <p:nvPr/>
-        </p:nvSpPr>
-        <p:spPr>
-          <a:xfrm>
-            <a:off x="7726679" y="4754879"/>
-            <a:ext cx="3931920" cy="228600"/>
-          </a:xfrm>
-          <a:prstGeom prst="rect">
-            <a:avLst/>
-          </a:prstGeom>
-          <a:noFill/>
-        </p:spPr>
-        <p:txBody>
-          <a:bodyPr wrap="square" anchor="t" lIns="0" rIns="0" tIns="0" bIns="0">
-            <a:spAutoFit/>
-          </a:bodyPr>
-          <a:lstStyle/>
-          <a:p>
-            <a:pPr algn="l">
-              <a:lnSpc>
-                <a:spcPct val="120000"/>
-              </a:lnSpc>
-            </a:pPr>
-            <a:r>
-              <a:rPr sz="1000" b="1" i="0">
-                <a:solidFill>
-                  <a:srgbClr val="0A1F3D"/>
-                </a:solidFill>
-                <a:latin typeface="Calibri"/>
-              </a:rPr>
-              <a:t>CONTAINED</a:t>
-            </a:r>
-          </a:p>
-        </p:txBody>
-      </p:sp>
-      <p:sp>
-        <p:nvSpPr>
-          <p:cNvPr id="20" name="TextBox 19"/>
-          <p:cNvSpPr txBox="1"/>
-          <p:nvPr/>
-        </p:nvSpPr>
-        <p:spPr>
-          <a:xfrm>
-            <a:off x="7726679" y="4983479"/>
-            <a:ext cx="3931920" cy="384048"/>
-          </a:xfrm>
-          <a:prstGeom prst="rect">
-            <a:avLst/>
-          </a:prstGeom>
-          <a:noFill/>
-        </p:spPr>
-        <p:txBody>
-          <a:bodyPr wrap="square" anchor="t" lIns="0" rIns="0" tIns="0" bIns="0">
-            <a:spAutoFit/>
-          </a:bodyPr>
-          <a:lstStyle/>
-          <a:p>
-            <a:pPr algn="l">
-              <a:lnSpc>
-                <a:spcPct val="120000"/>
-              </a:lnSpc>
-            </a:pPr>
-            <a:r>
-              <a:rPr sz="1000" b="0" i="0">
-                <a:solidFill>
-                  <a:srgbClr val="121824"/>
-                </a:solidFill>
-                <a:latin typeface="Calibri"/>
-              </a:rPr>
-              <a:t>98% external (shielding). 2% internal (protocol).</a:t>
-            </a:r>
-          </a:p>
-        </p:txBody>
-      </p:sp>
-      <p:sp>
-        <p:nvSpPr>
-          <p:cNvPr id="21" name="Rectangle 20"/>
-          <p:cNvSpPr/>
-          <p:nvPr/>
-        </p:nvSpPr>
-        <p:spPr>
-          <a:xfrm>
-            <a:off x="7543800" y="5440679"/>
-            <a:ext cx="4160520" cy="676656"/>
-          </a:xfrm>
-          <a:prstGeom prst="rect">
-            <a:avLst/>
-          </a:prstGeom>
-          <a:solidFill>
-            <a:srgbClr val="FFFFFF"/>
-          </a:solidFill>
-          <a:ln>
-            <a:noFill/>
-          </a:ln>
-          <a:effectLst/>
-        </p:spPr>
-        <p:style>
-          <a:lnRef idx="1">
-            <a:schemeClr val="accent1"/>
-          </a:lnRef>
-          <a:fillRef idx="3">
-            <a:schemeClr val="accent1"/>
-          </a:fillRef>
-          <a:effectRef idx="2">
-            <a:schemeClr val="accent1"/>
-          </a:effectRef>
-          <a:fontRef idx="minor">
-            <a:schemeClr val="lt1"/>
-          </a:fontRef>
-        </p:style>
-        <p:txBody>
-          <a:bodyPr rtlCol="0" anchor="ctr"/>
-          <a:lstStyle/>
-          <a:p>
-            <a:pPr algn="ctr"/>
-          </a:p>
-        </p:txBody>
-      </p:sp>
-      <p:sp>
-        <p:nvSpPr>
-          <p:cNvPr id="22" name="Rectangle 21"/>
-          <p:cNvSpPr/>
-          <p:nvPr/>
-        </p:nvSpPr>
-        <p:spPr>
-          <a:xfrm>
-            <a:off x="7543800" y="5440679"/>
-            <a:ext cx="73152" cy="676656"/>
-          </a:xfrm>
-          <a:prstGeom prst="rect">
-            <a:avLst/>
-          </a:prstGeom>
-          <a:solidFill>
-            <a:srgbClr val="CC7A2E"/>
-          </a:solidFill>
-          <a:ln>
-            <a:noFill/>
-          </a:ln>
-          <a:effectLst/>
-        </p:spPr>
-        <p:style>
-          <a:lnRef idx="1">
-            <a:schemeClr val="accent1"/>
-          </a:lnRef>
-          <a:fillRef idx="3">
-            <a:schemeClr val="accent1"/>
-          </a:fillRef>
-          <a:effectRef idx="2">
-            <a:schemeClr val="accent1"/>
-          </a:effectRef>
-          <a:fontRef idx="minor">
-            <a:schemeClr val="lt1"/>
-          </a:fontRef>
-        </p:style>
-        <p:txBody>
-          <a:bodyPr rtlCol="0" anchor="ctr"/>
-          <a:lstStyle/>
-          <a:p>
-            <a:pPr algn="ctr"/>
-          </a:p>
-        </p:txBody>
-      </p:sp>
-      <p:sp>
-        <p:nvSpPr>
-          <p:cNvPr id="23" name="TextBox 22"/>
-          <p:cNvSpPr txBox="1"/>
-          <p:nvPr/>
-        </p:nvSpPr>
-        <p:spPr>
-          <a:xfrm>
-            <a:off x="7726679" y="5486399"/>
-            <a:ext cx="3931920" cy="228600"/>
-          </a:xfrm>
-          <a:prstGeom prst="rect">
-            <a:avLst/>
-          </a:prstGeom>
-          <a:noFill/>
-        </p:spPr>
-        <p:txBody>
-          <a:bodyPr wrap="square" anchor="t" lIns="0" rIns="0" tIns="0" bIns="0">
-            <a:spAutoFit/>
-          </a:bodyPr>
-          <a:lstStyle/>
-          <a:p>
-            <a:pPr algn="l">
-              <a:lnSpc>
-                <a:spcPct val="120000"/>
-              </a:lnSpc>
-            </a:pPr>
-            <a:r>
-              <a:rPr sz="1000" b="1" i="0">
-                <a:solidFill>
-                  <a:srgbClr val="0A1F3D"/>
-                </a:solidFill>
-                <a:latin typeface="Calibri"/>
-              </a:rPr>
-              <a:t>REPLICABLE</a:t>
-            </a:r>
-          </a:p>
-        </p:txBody>
-      </p:sp>
-      <p:sp>
-        <p:nvSpPr>
-          <p:cNvPr id="24" name="TextBox 23"/>
-          <p:cNvSpPr txBox="1"/>
-          <p:nvPr/>
-        </p:nvSpPr>
-        <p:spPr>
-          <a:xfrm>
-            <a:off x="7726679" y="5714999"/>
-            <a:ext cx="3931920" cy="384048"/>
-          </a:xfrm>
-          <a:prstGeom prst="rect">
-            <a:avLst/>
-          </a:prstGeom>
-          <a:noFill/>
-        </p:spPr>
-        <p:txBody>
-          <a:bodyPr wrap="square" anchor="t" lIns="0" rIns="0" tIns="0" bIns="0">
-            <a:spAutoFit/>
-          </a:bodyPr>
-          <a:lstStyle/>
-          <a:p>
-            <a:pPr algn="l">
-              <a:lnSpc>
-                <a:spcPct val="120000"/>
-              </a:lnSpc>
-            </a:pPr>
-            <a:r>
-              <a:rPr sz="1000" b="0" i="0">
-                <a:solidFill>
-                  <a:srgbClr val="121824"/>
-                </a:solidFill>
-                <a:latin typeface="Calibri"/>
-              </a:rPr>
-              <a:t>IAEA Milestones — the same path Zambia (RPA → NSPA) is on.</a:t>
+              <a:t>IAEA Milestones — the regulatory path Zambia (RPA → NSPA) is already on.</a:t>
             </a:r>
           </a:p>
         </p:txBody>
@@ -8172,15 +8430,15 @@
         </p:nvCxnSpPr>
         <p:spPr>
           <a:xfrm>
-            <a:off x="0" y="6629400"/>
-            <a:ext cx="12191695" cy="0"/>
+            <a:off x="548640" y="6565392"/>
+            <a:ext cx="11064240" cy="0"/>
           </a:xfrm>
           <a:prstGeom prst="line">
             <a:avLst/>
           </a:prstGeom>
           <a:ln w="6350">
             <a:solidFill>
-              <a:srgbClr val="C8CED6"/>
+              <a:srgbClr val="C2B8A0"/>
             </a:solidFill>
           </a:ln>
         </p:spPr>
@@ -8201,57 +8459,13 @@
       </p:cxnSp>
       <p:sp>
         <p:nvSpPr>
-          <p:cNvPr id="26" name="Rectangle 25"/>
-          <p:cNvSpPr/>
-          <p:nvPr/>
-        </p:nvSpPr>
-        <p:spPr>
-          <a:xfrm>
-            <a:off x="0" y="6629400"/>
-            <a:ext cx="640080" cy="45720"/>
-          </a:xfrm>
-          <a:prstGeom prst="rect">
-            <a:avLst/>
-          </a:prstGeom>
-          <a:solidFill>
-            <a:srgbClr val="CC7A2E"/>
-          </a:solidFill>
-          <a:ln>
-            <a:noFill/>
-          </a:ln>
-          <a:effectLst/>
-        </p:spPr>
-        <p:style>
-          <a:lnRef idx="1">
-            <a:schemeClr val="accent1"/>
-          </a:lnRef>
-          <a:fillRef idx="3">
-            <a:schemeClr val="accent1"/>
-          </a:fillRef>
-          <a:effectRef idx="2">
-            <a:schemeClr val="accent1"/>
-          </a:effectRef>
-          <a:fontRef idx="minor">
-            <a:schemeClr val="lt1"/>
-          </a:fontRef>
-        </p:style>
-        <p:txBody>
-          <a:bodyPr rtlCol="0" anchor="ctr"/>
-          <a:lstStyle/>
-          <a:p>
-            <a:pPr algn="ctr"/>
-          </a:p>
-        </p:txBody>
-      </p:sp>
-      <p:sp>
-        <p:nvSpPr>
-          <p:cNvPr id="27" name="TextBox 26"/>
+          <p:cNvPr id="26" name="TextBox 25"/>
           <p:cNvSpPr txBox="1"/>
           <p:nvPr/>
         </p:nvSpPr>
         <p:spPr>
           <a:xfrm>
-            <a:off x="457200" y="6675120"/>
+            <a:off x="548640" y="6620256"/>
             <a:ext cx="9601200" cy="182880"/>
           </a:xfrm>
           <a:prstGeom prst="rect">
@@ -8267,31 +8481,31 @@
           <a:p>
             <a:pPr algn="l">
               <a:lnSpc>
-                <a:spcPct val="120000"/>
+                <a:spcPct val="125000"/>
               </a:lnSpc>
             </a:pPr>
             <a:r>
               <a:rPr sz="800" b="0" i="1">
                 <a:solidFill>
-                  <a:srgbClr val="6B7280"/>
+                  <a:srgbClr val="6B7078"/>
                 </a:solidFill>
                 <a:latin typeface="Calibri"/>
               </a:rPr>
-              <a:t>Sources: U.S. DOE REMS 2024 Report · IAEA Milestone Approach</a:t>
-            </a:r>
-          </a:p>
-        </p:txBody>
-      </p:sp>
-      <p:sp>
-        <p:nvSpPr>
-          <p:cNvPr id="28" name="TextBox 27"/>
+              <a:t>SOURCES: U.S. DOE REMS 2024 Report · IAEA Milestone Approach</a:t>
+            </a:r>
+          </a:p>
+        </p:txBody>
+      </p:sp>
+      <p:sp>
+        <p:nvSpPr>
+          <p:cNvPr id="27" name="TextBox 26"/>
           <p:cNvSpPr txBox="1"/>
           <p:nvPr/>
         </p:nvSpPr>
         <p:spPr>
           <a:xfrm>
-            <a:off x="10424160" y="6675120"/>
-            <a:ext cx="1554480" cy="182880"/>
+            <a:off x="10332720" y="6620256"/>
+            <a:ext cx="1645920" cy="182880"/>
           </a:xfrm>
           <a:prstGeom prst="rect">
             <a:avLst/>
@@ -8306,17 +8520,17 @@
           <a:p>
             <a:pPr algn="r">
               <a:lnSpc>
-                <a:spcPct val="120000"/>
+                <a:spcPct val="125000"/>
               </a:lnSpc>
             </a:pPr>
             <a:r>
               <a:rPr sz="800" b="1" i="0">
                 <a:solidFill>
-                  <a:srgbClr val="2A3344"/>
+                  <a:srgbClr val="3A404A"/>
                 </a:solidFill>
                 <a:latin typeface="Calibri"/>
               </a:rPr>
-              <a:t>5 / 8  ·  E. Mwaba</a:t>
+              <a:t>5 / 8   E. MWABA</a:t>
             </a:r>
           </a:p>
         </p:txBody>
@@ -8335,7 +8549,7 @@
     <p:bg>
       <p:bgPr>
         <a:solidFill>
-          <a:srgbClr val="F7F5F0"/>
+          <a:srgbClr val="F4EFE4"/>
         </a:solidFill>
         <a:effectLst/>
       </p:bgPr>
@@ -8355,7 +8569,7 @@
         </p:nvSpPr>
         <p:spPr>
           <a:xfrm>
-            <a:off x="548640" y="411480"/>
+            <a:off x="548640" y="457200"/>
             <a:ext cx="9144000" cy="274320"/>
           </a:xfrm>
           <a:prstGeom prst="rect">
@@ -8371,13 +8585,13 @@
           <a:p>
             <a:pPr algn="l">
               <a:lnSpc>
-                <a:spcPct val="120000"/>
+                <a:spcPct val="125000"/>
               </a:lnSpc>
             </a:pPr>
             <a:r>
-              <a:rPr sz="1100" b="1" i="0">
-                <a:solidFill>
-                  <a:srgbClr val="CC7A2E"/>
+              <a:rPr sz="1000" b="1" i="0">
+                <a:solidFill>
+                  <a:srgbClr val="B54C1A"/>
                 </a:solidFill>
                 <a:latin typeface="Calibri"/>
               </a:rPr>
@@ -8394,8 +8608,8 @@
         </p:nvSpPr>
         <p:spPr>
           <a:xfrm>
-            <a:off x="548640" y="685800"/>
-            <a:ext cx="11064240" cy="685800"/>
+            <a:off x="548640" y="731520"/>
+            <a:ext cx="11064240" cy="777240"/>
           </a:xfrm>
           <a:prstGeom prst="rect">
             <a:avLst/>
@@ -8410,17 +8624,17 @@
           <a:p>
             <a:pPr algn="l">
               <a:lnSpc>
-                <a:spcPct val="120000"/>
+                <a:spcPct val="105000"/>
               </a:lnSpc>
             </a:pPr>
             <a:r>
               <a:rPr sz="3000" b="1" i="0">
                 <a:solidFill>
-                  <a:srgbClr val="0A1F3D"/>
-                </a:solidFill>
-                <a:latin typeface="Calibri"/>
+                  <a:srgbClr val="082618"/>
+                </a:solidFill>
+                <a:latin typeface="Georgia"/>
               </a:rPr>
-              <a:t>We are sitting on our own fuel.</a:t>
+              <a:t>We are exporting our future.</a:t>
             </a:r>
           </a:p>
         </p:txBody>
@@ -8433,15 +8647,15 @@
         </p:nvCxnSpPr>
         <p:spPr>
           <a:xfrm>
-            <a:off x="548640" y="1325880"/>
-            <a:ext cx="1097280" cy="0"/>
+            <a:off x="548640" y="1508760"/>
+            <a:ext cx="731520" cy="0"/>
           </a:xfrm>
           <a:prstGeom prst="line">
             <a:avLst/>
           </a:prstGeom>
-          <a:ln w="19050">
+          <a:ln w="25400">
             <a:solidFill>
-              <a:srgbClr val="CC7A2E"/>
+              <a:srgbClr val="B54C1A"/>
             </a:solidFill>
           </a:ln>
         </p:spPr>
@@ -8468,7 +8682,7 @@
         </p:nvSpPr>
         <p:spPr>
           <a:xfrm>
-            <a:off x="548640" y="1417320"/>
+            <a:off x="548640" y="1627632"/>
             <a:ext cx="11064240" cy="365760"/>
           </a:xfrm>
           <a:prstGeom prst="rect">
@@ -8484,17 +8698,17 @@
           <a:p>
             <a:pPr algn="l">
               <a:lnSpc>
-                <a:spcPct val="120000"/>
+                <a:spcPct val="125000"/>
               </a:lnSpc>
             </a:pPr>
             <a:r>
               <a:rPr sz="1300" b="0" i="1">
                 <a:solidFill>
-                  <a:srgbClr val="6B7280"/>
+                  <a:srgbClr val="3A404A"/>
                 </a:solidFill>
                 <a:latin typeface="Calibri"/>
               </a:rPr>
-              <a:t>Zambia exports raw uranium today. It can fuel domestic reactors tomorrow.</a:t>
+              <a:t>Zambian uranium fuels other countries' reactors. We import the electricity it makes.</a:t>
             </a:r>
           </a:p>
         </p:txBody>
@@ -8507,14 +8721,14 @@
         </p:nvSpPr>
         <p:spPr>
           <a:xfrm>
-            <a:off x="548640" y="2011680"/>
-            <a:ext cx="5943600" cy="4206240"/>
+            <a:off x="548640" y="2103120"/>
+            <a:ext cx="5943600" cy="4114800"/>
           </a:xfrm>
           <a:prstGeom prst="rect">
             <a:avLst/>
           </a:prstGeom>
           <a:solidFill>
-            <a:srgbClr val="0A1F3D"/>
+            <a:srgbClr val="082618"/>
           </a:solidFill>
           <a:ln>
             <a:noFill/>
@@ -8551,14 +8765,14 @@
         </p:nvSpPr>
         <p:spPr>
           <a:xfrm>
-            <a:off x="548640" y="2011680"/>
+            <a:off x="548640" y="2103120"/>
             <a:ext cx="5943600" cy="91440"/>
           </a:xfrm>
           <a:prstGeom prst="rect">
             <a:avLst/>
           </a:prstGeom>
           <a:solidFill>
-            <a:srgbClr val="CC7A2E"/>
+            <a:srgbClr val="B54C1A"/>
           </a:solidFill>
           <a:ln>
             <a:noFill/>
@@ -8595,8 +8809,8 @@
         </p:nvSpPr>
         <p:spPr>
           <a:xfrm>
-            <a:off x="777240" y="2194560"/>
-            <a:ext cx="5486400" cy="320040"/>
+            <a:off x="777240" y="2286000"/>
+            <a:ext cx="5486400" cy="274320"/>
           </a:xfrm>
           <a:prstGeom prst="rect">
             <a:avLst/>
@@ -8611,17 +8825,17 @@
           <a:p>
             <a:pPr algn="l">
               <a:lnSpc>
-                <a:spcPct val="120000"/>
+                <a:spcPct val="125000"/>
               </a:lnSpc>
             </a:pPr>
             <a:r>
-              <a:rPr sz="1100" b="1" i="0">
-                <a:solidFill>
-                  <a:srgbClr val="E8A860"/>
+              <a:rPr sz="1000" b="1" i="0">
+                <a:solidFill>
+                  <a:srgbClr val="CFA33C"/>
                 </a:solidFill>
                 <a:latin typeface="Calibri"/>
               </a:rPr>
-              <a:t>KNOWN URANIUM-BEARING ZONES — ZAMBIA</a:t>
+              <a:t>KNOWN URANIUM-BEARING ZONES  ·  ZAMBIA</a:t>
             </a:r>
           </a:p>
         </p:txBody>
@@ -8634,14 +8848,14 @@
         </p:nvSpPr>
         <p:spPr>
           <a:xfrm>
-            <a:off x="777240" y="2606040"/>
-            <a:ext cx="5486400" cy="1051560"/>
+            <a:off x="777240" y="2670048"/>
+            <a:ext cx="5486400" cy="1005840"/>
           </a:xfrm>
           <a:prstGeom prst="rect">
             <a:avLst/>
           </a:prstGeom>
           <a:solidFill>
-            <a:srgbClr val="12284A"/>
+            <a:srgbClr val="103624"/>
           </a:solidFill>
           <a:ln>
             <a:noFill/>
@@ -8678,14 +8892,14 @@
         </p:nvSpPr>
         <p:spPr>
           <a:xfrm>
-            <a:off x="777240" y="2606040"/>
-            <a:ext cx="73152" cy="1051560"/>
+            <a:off x="777240" y="2670048"/>
+            <a:ext cx="73152" cy="1005840"/>
           </a:xfrm>
           <a:prstGeom prst="rect">
             <a:avLst/>
           </a:prstGeom>
           <a:solidFill>
-            <a:srgbClr val="CC7A2E"/>
+            <a:srgbClr val="B54C1A"/>
           </a:solidFill>
           <a:ln>
             <a:noFill/>
@@ -8722,7 +8936,7 @@
         </p:nvSpPr>
         <p:spPr>
           <a:xfrm>
-            <a:off x="960120" y="2679192"/>
+            <a:off x="960120" y="2743200"/>
             <a:ext cx="5303520" cy="274320"/>
           </a:xfrm>
           <a:prstGeom prst="rect">
@@ -8738,7 +8952,7 @@
           <a:p>
             <a:pPr algn="l">
               <a:lnSpc>
-                <a:spcPct val="120000"/>
+                <a:spcPct val="125000"/>
               </a:lnSpc>
             </a:pPr>
             <a:r>
@@ -8746,9 +8960,9 @@
                 <a:solidFill>
                   <a:srgbClr val="FFFFFF"/>
                 </a:solidFill>
-                <a:latin typeface="Calibri"/>
+                <a:latin typeface="Georgia"/>
               </a:rPr>
-              <a:t>LUMWANA / KANYEMBA</a:t>
+              <a:t>LUMWANA  /  KANYEMBA</a:t>
             </a:r>
           </a:p>
         </p:txBody>
@@ -8761,7 +8975,7 @@
         </p:nvSpPr>
         <p:spPr>
           <a:xfrm>
-            <a:off x="960120" y="2935224"/>
+            <a:off x="960120" y="2999232"/>
             <a:ext cx="5303520" cy="274320"/>
           </a:xfrm>
           <a:prstGeom prst="rect">
@@ -8777,13 +8991,13 @@
           <a:p>
             <a:pPr algn="l">
               <a:lnSpc>
-                <a:spcPct val="120000"/>
+                <a:spcPct val="125000"/>
               </a:lnSpc>
             </a:pPr>
             <a:r>
               <a:rPr sz="1000" b="0" i="1">
                 <a:solidFill>
-                  <a:srgbClr val="E8A860"/>
+                  <a:srgbClr val="CFA33C"/>
                 </a:solidFill>
                 <a:latin typeface="Calibri"/>
               </a:rPr>
@@ -8800,7 +9014,7 @@
         </p:nvSpPr>
         <p:spPr>
           <a:xfrm>
-            <a:off x="960120" y="3172968"/>
+            <a:off x="960120" y="3218688"/>
             <a:ext cx="5303520" cy="457200"/>
           </a:xfrm>
           <a:prstGeom prst="rect">
@@ -8822,11 +9036,11 @@
             <a:r>
               <a:rPr sz="1100" b="0" i="0">
                 <a:solidFill>
-                  <a:srgbClr val="CFD8E3"/>
+                  <a:srgbClr val="D5E0D5"/>
                 </a:solidFill>
                 <a:latin typeface="Calibri"/>
               </a:rPr>
-              <a:t>Uranium recovered as by-product of copper mining; previously stockpiled by Barrick.</a:t>
+              <a:t>Uranium recovered as by-product of copper mining; stockpiled historically by Barrick.</a:t>
             </a:r>
           </a:p>
         </p:txBody>
@@ -8839,14 +9053,14 @@
         </p:nvSpPr>
         <p:spPr>
           <a:xfrm>
-            <a:off x="777240" y="3767328"/>
-            <a:ext cx="5486400" cy="1051560"/>
+            <a:off x="777240" y="3785615"/>
+            <a:ext cx="5486400" cy="1005840"/>
           </a:xfrm>
           <a:prstGeom prst="rect">
             <a:avLst/>
           </a:prstGeom>
           <a:solidFill>
-            <a:srgbClr val="12284A"/>
+            <a:srgbClr val="103624"/>
           </a:solidFill>
           <a:ln>
             <a:noFill/>
@@ -8883,14 +9097,14 @@
         </p:nvSpPr>
         <p:spPr>
           <a:xfrm>
-            <a:off x="777240" y="3767328"/>
-            <a:ext cx="73152" cy="1051560"/>
+            <a:off x="777240" y="3785615"/>
+            <a:ext cx="73152" cy="1005840"/>
           </a:xfrm>
           <a:prstGeom prst="rect">
             <a:avLst/>
           </a:prstGeom>
           <a:solidFill>
-            <a:srgbClr val="CC7A2E"/>
+            <a:srgbClr val="B54C1A"/>
           </a:solidFill>
           <a:ln>
             <a:noFill/>
@@ -8927,7 +9141,7 @@
         </p:nvSpPr>
         <p:spPr>
           <a:xfrm>
-            <a:off x="960120" y="3840480"/>
+            <a:off x="960120" y="3858768"/>
             <a:ext cx="5303520" cy="274320"/>
           </a:xfrm>
           <a:prstGeom prst="rect">
@@ -8943,7 +9157,7 @@
           <a:p>
             <a:pPr algn="l">
               <a:lnSpc>
-                <a:spcPct val="120000"/>
+                <a:spcPct val="125000"/>
               </a:lnSpc>
             </a:pPr>
             <a:r>
@@ -8951,9 +9165,9 @@
                 <a:solidFill>
                   <a:srgbClr val="FFFFFF"/>
                 </a:solidFill>
-                <a:latin typeface="Calibri"/>
+                <a:latin typeface="Georgia"/>
               </a:rPr>
-              <a:t>GWEMBE / SIAVONGA BELT</a:t>
+              <a:t>GWEMBE  /  SIAVONGA BELT</a:t>
             </a:r>
           </a:p>
         </p:txBody>
@@ -8966,7 +9180,7 @@
         </p:nvSpPr>
         <p:spPr>
           <a:xfrm>
-            <a:off x="960120" y="4096512"/>
+            <a:off x="960120" y="4114800"/>
             <a:ext cx="5303520" cy="274320"/>
           </a:xfrm>
           <a:prstGeom prst="rect">
@@ -8982,13 +9196,13 @@
           <a:p>
             <a:pPr algn="l">
               <a:lnSpc>
-                <a:spcPct val="120000"/>
+                <a:spcPct val="125000"/>
               </a:lnSpc>
             </a:pPr>
             <a:r>
               <a:rPr sz="1000" b="0" i="1">
                 <a:solidFill>
-                  <a:srgbClr val="E8A860"/>
+                  <a:srgbClr val="CFA33C"/>
                 </a:solidFill>
                 <a:latin typeface="Calibri"/>
               </a:rPr>
@@ -9005,7 +9219,7 @@
         </p:nvSpPr>
         <p:spPr>
           <a:xfrm>
-            <a:off x="960120" y="4334256"/>
+            <a:off x="960120" y="4334255"/>
             <a:ext cx="5303520" cy="457200"/>
           </a:xfrm>
           <a:prstGeom prst="rect">
@@ -9027,11 +9241,11 @@
             <a:r>
               <a:rPr sz="1100" b="0" i="0">
                 <a:solidFill>
-                  <a:srgbClr val="CFD8E3"/>
+                  <a:srgbClr val="D5E0D5"/>
                 </a:solidFill>
                 <a:latin typeface="Calibri"/>
               </a:rPr>
-              <a:t>Karoo-type sandstone uranium; site of the 2024 Siavonga Baseline Survey.</a:t>
+              <a:t>Karoo-type sandstone uranium — site of the 2024 Siavonga Baseline Survey.</a:t>
             </a:r>
           </a:p>
         </p:txBody>
@@ -9044,14 +9258,14 @@
         </p:nvSpPr>
         <p:spPr>
           <a:xfrm>
-            <a:off x="777240" y="4928616"/>
-            <a:ext cx="5486400" cy="1051560"/>
+            <a:off x="777240" y="4901183"/>
+            <a:ext cx="5486400" cy="1005840"/>
           </a:xfrm>
           <a:prstGeom prst="rect">
             <a:avLst/>
           </a:prstGeom>
           <a:solidFill>
-            <a:srgbClr val="12284A"/>
+            <a:srgbClr val="103624"/>
           </a:solidFill>
           <a:ln>
             <a:noFill/>
@@ -9088,14 +9302,14 @@
         </p:nvSpPr>
         <p:spPr>
           <a:xfrm>
-            <a:off x="777240" y="4928616"/>
-            <a:ext cx="73152" cy="1051560"/>
+            <a:off x="777240" y="4901183"/>
+            <a:ext cx="73152" cy="1005840"/>
           </a:xfrm>
           <a:prstGeom prst="rect">
             <a:avLst/>
           </a:prstGeom>
           <a:solidFill>
-            <a:srgbClr val="CC7A2E"/>
+            <a:srgbClr val="B54C1A"/>
           </a:solidFill>
           <a:ln>
             <a:noFill/>
@@ -9132,7 +9346,7 @@
         </p:nvSpPr>
         <p:spPr>
           <a:xfrm>
-            <a:off x="960120" y="5001768"/>
+            <a:off x="960120" y="4974336"/>
             <a:ext cx="5303520" cy="274320"/>
           </a:xfrm>
           <a:prstGeom prst="rect">
@@ -9148,7 +9362,7 @@
           <a:p>
             <a:pPr algn="l">
               <a:lnSpc>
-                <a:spcPct val="120000"/>
+                <a:spcPct val="125000"/>
               </a:lnSpc>
             </a:pPr>
             <a:r>
@@ -9156,9 +9370,9 @@
                 <a:solidFill>
                   <a:srgbClr val="FFFFFF"/>
                 </a:solidFill>
-                <a:latin typeface="Calibri"/>
+                <a:latin typeface="Georgia"/>
               </a:rPr>
-              <a:t>MUTANGA / DIBWE</a:t>
+              <a:t>MUTANGA  /  DIBWE</a:t>
             </a:r>
           </a:p>
         </p:txBody>
@@ -9171,7 +9385,7 @@
         </p:nvSpPr>
         <p:spPr>
           <a:xfrm>
-            <a:off x="960120" y="5257800"/>
+            <a:off x="960120" y="5230368"/>
             <a:ext cx="5303520" cy="274320"/>
           </a:xfrm>
           <a:prstGeom prst="rect">
@@ -9187,13 +9401,13 @@
           <a:p>
             <a:pPr algn="l">
               <a:lnSpc>
-                <a:spcPct val="120000"/>
+                <a:spcPct val="125000"/>
               </a:lnSpc>
             </a:pPr>
             <a:r>
               <a:rPr sz="1000" b="0" i="1">
                 <a:solidFill>
-                  <a:srgbClr val="E8A860"/>
+                  <a:srgbClr val="CFA33C"/>
                 </a:solidFill>
                 <a:latin typeface="Calibri"/>
               </a:rPr>
@@ -9210,7 +9424,7 @@
         </p:nvSpPr>
         <p:spPr>
           <a:xfrm>
-            <a:off x="960120" y="5495544"/>
+            <a:off x="960120" y="5449823"/>
             <a:ext cx="5303520" cy="457200"/>
           </a:xfrm>
           <a:prstGeom prst="rect">
@@ -9232,7 +9446,7 @@
             <a:r>
               <a:rPr sz="1100" b="0" i="0">
                 <a:solidFill>
-                  <a:srgbClr val="CFD8E3"/>
+                  <a:srgbClr val="D5E0D5"/>
                 </a:solidFill>
                 <a:latin typeface="Calibri"/>
               </a:rPr>
@@ -9243,102 +9457,14 @@
       </p:sp>
       <p:sp>
         <p:nvSpPr>
-          <p:cNvPr id="24" name="Rectangle 23"/>
-          <p:cNvSpPr/>
-          <p:nvPr/>
-        </p:nvSpPr>
-        <p:spPr>
-          <a:xfrm>
-            <a:off x="6675120" y="2011680"/>
-            <a:ext cx="4937760" cy="4206240"/>
-          </a:xfrm>
-          <a:prstGeom prst="rect">
-            <a:avLst/>
-          </a:prstGeom>
-          <a:solidFill>
-            <a:srgbClr val="FFFFFF"/>
-          </a:solidFill>
-          <a:ln>
-            <a:noFill/>
-          </a:ln>
-          <a:effectLst/>
-        </p:spPr>
-        <p:style>
-          <a:lnRef idx="1">
-            <a:schemeClr val="accent1"/>
-          </a:lnRef>
-          <a:fillRef idx="3">
-            <a:schemeClr val="accent1"/>
-          </a:fillRef>
-          <a:effectRef idx="2">
-            <a:schemeClr val="accent1"/>
-          </a:effectRef>
-          <a:fontRef idx="minor">
-            <a:schemeClr val="lt1"/>
-          </a:fontRef>
-        </p:style>
-        <p:txBody>
-          <a:bodyPr rtlCol="0" anchor="ctr"/>
-          <a:lstStyle/>
-          <a:p>
-            <a:pPr algn="ctr"/>
-          </a:p>
-        </p:txBody>
-      </p:sp>
-      <p:sp>
-        <p:nvSpPr>
-          <p:cNvPr id="25" name="Rectangle 24"/>
-          <p:cNvSpPr/>
-          <p:nvPr/>
-        </p:nvSpPr>
-        <p:spPr>
-          <a:xfrm>
-            <a:off x="6675120" y="2011680"/>
-            <a:ext cx="109728" cy="4206240"/>
-          </a:xfrm>
-          <a:prstGeom prst="rect">
-            <a:avLst/>
-          </a:prstGeom>
-          <a:solidFill>
-            <a:srgbClr val="CC7A2E"/>
-          </a:solidFill>
-          <a:ln>
-            <a:noFill/>
-          </a:ln>
-          <a:effectLst/>
-        </p:spPr>
-        <p:style>
-          <a:lnRef idx="1">
-            <a:schemeClr val="accent1"/>
-          </a:lnRef>
-          <a:fillRef idx="3">
-            <a:schemeClr val="accent1"/>
-          </a:fillRef>
-          <a:effectRef idx="2">
-            <a:schemeClr val="accent1"/>
-          </a:effectRef>
-          <a:fontRef idx="minor">
-            <a:schemeClr val="lt1"/>
-          </a:fontRef>
-        </p:style>
-        <p:txBody>
-          <a:bodyPr rtlCol="0" anchor="ctr"/>
-          <a:lstStyle/>
-          <a:p>
-            <a:pPr algn="ctr"/>
-          </a:p>
-        </p:txBody>
-      </p:sp>
-      <p:sp>
-        <p:nvSpPr>
-          <p:cNvPr id="26" name="TextBox 25"/>
+          <p:cNvPr id="24" name="TextBox 23"/>
           <p:cNvSpPr txBox="1"/>
           <p:nvPr/>
         </p:nvSpPr>
         <p:spPr>
           <a:xfrm>
-            <a:off x="6903720" y="2148840"/>
-            <a:ext cx="4572000" cy="320040"/>
+            <a:off x="6766560" y="2240280"/>
+            <a:ext cx="4937760" cy="365760"/>
           </a:xfrm>
           <a:prstGeom prst="rect">
             <a:avLst/>
@@ -9353,272 +9479,38 @@
           <a:p>
             <a:pPr algn="l">
               <a:lnSpc>
-                <a:spcPct val="120000"/>
+                <a:spcPct val="125000"/>
               </a:lnSpc>
             </a:pPr>
             <a:r>
-              <a:rPr sz="1100" b="1" i="0">
-                <a:solidFill>
-                  <a:srgbClr val="CC7A2E"/>
+              <a:rPr sz="1000" b="1" i="0">
+                <a:solidFill>
+                  <a:srgbClr val="B54C1A"/>
                 </a:solidFill>
                 <a:latin typeface="Calibri"/>
               </a:rPr>
-              <a:t>THE VALUE-CHAIN PIVOT</a:t>
-            </a:r>
-          </a:p>
-        </p:txBody>
-      </p:sp>
-      <p:sp>
-        <p:nvSpPr>
-          <p:cNvPr id="27" name="TextBox 26"/>
-          <p:cNvSpPr txBox="1"/>
-          <p:nvPr/>
-        </p:nvSpPr>
-        <p:spPr>
-          <a:xfrm>
-            <a:off x="6903720" y="2606040"/>
-            <a:ext cx="4572000" cy="274320"/>
-          </a:xfrm>
-          <a:prstGeom prst="rect">
-            <a:avLst/>
-          </a:prstGeom>
-          <a:noFill/>
-        </p:spPr>
-        <p:txBody>
-          <a:bodyPr wrap="square" anchor="t" lIns="0" rIns="0" tIns="0" bIns="0">
-            <a:spAutoFit/>
-          </a:bodyPr>
-          <a:lstStyle/>
-          <a:p>
-            <a:pPr algn="l">
-              <a:lnSpc>
-                <a:spcPct val="120000"/>
-              </a:lnSpc>
-            </a:pPr>
-            <a:r>
-              <a:rPr sz="1100" b="1" i="0">
-                <a:solidFill>
-                  <a:srgbClr val="0A1F3D"/>
-                </a:solidFill>
-                <a:latin typeface="Calibri"/>
-              </a:rPr>
-              <a:t>TODAY</a:t>
-            </a:r>
-          </a:p>
-        </p:txBody>
-      </p:sp>
-      <p:sp>
-        <p:nvSpPr>
-          <p:cNvPr id="28" name="TextBox 27"/>
-          <p:cNvSpPr txBox="1"/>
-          <p:nvPr/>
-        </p:nvSpPr>
-        <p:spPr>
-          <a:xfrm>
-            <a:off x="6903720" y="2880360"/>
-            <a:ext cx="4572000" cy="960120"/>
-          </a:xfrm>
-          <a:prstGeom prst="rect">
-            <a:avLst/>
-          </a:prstGeom>
-          <a:noFill/>
-        </p:spPr>
-        <p:txBody>
-          <a:bodyPr wrap="square" anchor="t" lIns="0" rIns="0" tIns="0" bIns="0">
-            <a:spAutoFit/>
-          </a:bodyPr>
-          <a:lstStyle/>
-          <a:p>
-            <a:pPr algn="l">
-              <a:lnSpc>
-                <a:spcPct val="130000"/>
-              </a:lnSpc>
-            </a:pPr>
-            <a:r>
-              <a:rPr sz="1100" b="0" i="0">
-                <a:solidFill>
-                  <a:srgbClr val="121824"/>
-                </a:solidFill>
-                <a:latin typeface="Calibri"/>
-              </a:rPr>
-              <a:t>Raw-mineral exporter — uranium leaves Zambia for enrichment elsewhere; we capture wellhead value only.</a:t>
-            </a:r>
-          </a:p>
-        </p:txBody>
-      </p:sp>
-      <p:sp>
-        <p:nvSpPr>
-          <p:cNvPr id="29" name="TextBox 28"/>
-          <p:cNvSpPr txBox="1"/>
-          <p:nvPr/>
-        </p:nvSpPr>
-        <p:spPr>
-          <a:xfrm>
-            <a:off x="6903720" y="3794760"/>
-            <a:ext cx="4572000" cy="274320"/>
-          </a:xfrm>
-          <a:prstGeom prst="rect">
-            <a:avLst/>
-          </a:prstGeom>
-          <a:noFill/>
-        </p:spPr>
-        <p:txBody>
-          <a:bodyPr wrap="square" anchor="t" lIns="0" rIns="0" tIns="0" bIns="0">
-            <a:spAutoFit/>
-          </a:bodyPr>
-          <a:lstStyle/>
-          <a:p>
-            <a:pPr algn="l">
-              <a:lnSpc>
-                <a:spcPct val="120000"/>
-              </a:lnSpc>
-            </a:pPr>
-            <a:r>
-              <a:rPr sz="1100" b="1" i="0">
-                <a:solidFill>
-                  <a:srgbClr val="0A1F3D"/>
-                </a:solidFill>
-                <a:latin typeface="Calibri"/>
-              </a:rPr>
-              <a:t>WITH NUCLEAR POWER</a:t>
-            </a:r>
-          </a:p>
-        </p:txBody>
-      </p:sp>
-      <p:sp>
-        <p:nvSpPr>
-          <p:cNvPr id="30" name="TextBox 29"/>
-          <p:cNvSpPr txBox="1"/>
-          <p:nvPr/>
-        </p:nvSpPr>
-        <p:spPr>
-          <a:xfrm>
-            <a:off x="6903720" y="4069080"/>
-            <a:ext cx="4572000" cy="960120"/>
-          </a:xfrm>
-          <a:prstGeom prst="rect">
-            <a:avLst/>
-          </a:prstGeom>
-          <a:noFill/>
-        </p:spPr>
-        <p:txBody>
-          <a:bodyPr wrap="square" anchor="t" lIns="0" rIns="0" tIns="0" bIns="0">
-            <a:spAutoFit/>
-          </a:bodyPr>
-          <a:lstStyle/>
-          <a:p>
-            <a:pPr algn="l">
-              <a:lnSpc>
-                <a:spcPct val="130000"/>
-              </a:lnSpc>
-            </a:pPr>
-            <a:r>
-              <a:rPr sz="1100" b="0" i="0">
-                <a:solidFill>
-                  <a:srgbClr val="121824"/>
-                </a:solidFill>
-                <a:latin typeface="Calibri"/>
-              </a:rPr>
-              <a:t>High-tech energy producer — domestic fuel flows into domestic baseload supporting mines, smelters, hospitals.</a:t>
-            </a:r>
-          </a:p>
-        </p:txBody>
-      </p:sp>
-      <p:sp>
-        <p:nvSpPr>
-          <p:cNvPr id="31" name="TextBox 30"/>
-          <p:cNvSpPr txBox="1"/>
-          <p:nvPr/>
-        </p:nvSpPr>
-        <p:spPr>
-          <a:xfrm>
-            <a:off x="6903720" y="4983480"/>
-            <a:ext cx="4572000" cy="274320"/>
-          </a:xfrm>
-          <a:prstGeom prst="rect">
-            <a:avLst/>
-          </a:prstGeom>
-          <a:noFill/>
-        </p:spPr>
-        <p:txBody>
-          <a:bodyPr wrap="square" anchor="t" lIns="0" rIns="0" tIns="0" bIns="0">
-            <a:spAutoFit/>
-          </a:bodyPr>
-          <a:lstStyle/>
-          <a:p>
-            <a:pPr algn="l">
-              <a:lnSpc>
-                <a:spcPct val="120000"/>
-              </a:lnSpc>
-            </a:pPr>
-            <a:r>
-              <a:rPr sz="1100" b="1" i="0">
-                <a:solidFill>
-                  <a:srgbClr val="0A1F3D"/>
-                </a:solidFill>
-                <a:latin typeface="Calibri"/>
-              </a:rPr>
-              <a:t>STRATEGIC UPSIDE</a:t>
-            </a:r>
-          </a:p>
-        </p:txBody>
-      </p:sp>
-      <p:sp>
-        <p:nvSpPr>
-          <p:cNvPr id="32" name="TextBox 31"/>
-          <p:cNvSpPr txBox="1"/>
-          <p:nvPr/>
-        </p:nvSpPr>
-        <p:spPr>
-          <a:xfrm>
-            <a:off x="6903720" y="5257800"/>
-            <a:ext cx="4572000" cy="960120"/>
-          </a:xfrm>
-          <a:prstGeom prst="rect">
-            <a:avLst/>
-          </a:prstGeom>
-          <a:noFill/>
-        </p:spPr>
-        <p:txBody>
-          <a:bodyPr wrap="square" anchor="t" lIns="0" rIns="0" tIns="0" bIns="0">
-            <a:spAutoFit/>
-          </a:bodyPr>
-          <a:lstStyle/>
-          <a:p>
-            <a:pPr algn="l">
-              <a:lnSpc>
-                <a:spcPct val="130000"/>
-              </a:lnSpc>
-            </a:pPr>
-            <a:r>
-              <a:rPr sz="1100" b="0" i="0">
-                <a:solidFill>
-                  <a:srgbClr val="121824"/>
-                </a:solidFill>
-                <a:latin typeface="Calibri"/>
-              </a:rPr>
-              <a:t>Import independence; price-stable electricity; high-skill jobs anchored to a regulated, exportable competency.</a:t>
+              <a:t>THE  VALUE-CHAIN  PIVOT</a:t>
             </a:r>
           </a:p>
         </p:txBody>
       </p:sp>
       <p:cxnSp>
         <p:nvCxnSpPr>
-          <p:cNvPr id="33" name="Connector 32"/>
+          <p:cNvPr id="25" name="Connector 24"/>
           <p:cNvCxnSpPr/>
           <p:nvPr/>
         </p:nvCxnSpPr>
         <p:spPr>
           <a:xfrm>
-            <a:off x="0" y="6629400"/>
-            <a:ext cx="12191695" cy="0"/>
+            <a:off x="6766560" y="2542032"/>
+            <a:ext cx="548640" cy="0"/>
           </a:xfrm>
           <a:prstGeom prst="line">
             <a:avLst/>
           </a:prstGeom>
-          <a:ln w="6350">
+          <a:ln w="19050">
             <a:solidFill>
-              <a:srgbClr val="C8CED6"/>
+              <a:srgbClr val="B54C1A"/>
             </a:solidFill>
           </a:ln>
         </p:spPr>
@@ -9639,58 +9531,14 @@
       </p:cxnSp>
       <p:sp>
         <p:nvSpPr>
-          <p:cNvPr id="34" name="Rectangle 33"/>
-          <p:cNvSpPr/>
-          <p:nvPr/>
-        </p:nvSpPr>
-        <p:spPr>
-          <a:xfrm>
-            <a:off x="0" y="6629400"/>
-            <a:ext cx="640080" cy="45720"/>
-          </a:xfrm>
-          <a:prstGeom prst="rect">
-            <a:avLst/>
-          </a:prstGeom>
-          <a:solidFill>
-            <a:srgbClr val="CC7A2E"/>
-          </a:solidFill>
-          <a:ln>
-            <a:noFill/>
-          </a:ln>
-          <a:effectLst/>
-        </p:spPr>
-        <p:style>
-          <a:lnRef idx="1">
-            <a:schemeClr val="accent1"/>
-          </a:lnRef>
-          <a:fillRef idx="3">
-            <a:schemeClr val="accent1"/>
-          </a:fillRef>
-          <a:effectRef idx="2">
-            <a:schemeClr val="accent1"/>
-          </a:effectRef>
-          <a:fontRef idx="minor">
-            <a:schemeClr val="lt1"/>
-          </a:fontRef>
-        </p:style>
-        <p:txBody>
-          <a:bodyPr rtlCol="0" anchor="ctr"/>
-          <a:lstStyle/>
-          <a:p>
-            <a:pPr algn="ctr"/>
-          </a:p>
-        </p:txBody>
-      </p:sp>
-      <p:sp>
-        <p:nvSpPr>
-          <p:cNvPr id="35" name="TextBox 34"/>
+          <p:cNvPr id="26" name="TextBox 25"/>
           <p:cNvSpPr txBox="1"/>
           <p:nvPr/>
         </p:nvSpPr>
         <p:spPr>
           <a:xfrm>
-            <a:off x="457200" y="6675120"/>
-            <a:ext cx="9601200" cy="182880"/>
+            <a:off x="6766560" y="2743200"/>
+            <a:ext cx="4937760" cy="274320"/>
           </a:xfrm>
           <a:prstGeom prst="rect">
             <a:avLst/>
@@ -9705,31 +9553,31 @@
           <a:p>
             <a:pPr algn="l">
               <a:lnSpc>
-                <a:spcPct val="120000"/>
+                <a:spcPct val="125000"/>
               </a:lnSpc>
             </a:pPr>
             <a:r>
-              <a:rPr sz="800" b="0" i="1">
-                <a:solidFill>
-                  <a:srgbClr val="6B7280"/>
+              <a:rPr sz="1100" b="1" i="0">
+                <a:solidFill>
+                  <a:srgbClr val="8C1F1F"/>
                 </a:solidFill>
                 <a:latin typeface="Calibri"/>
               </a:rPr>
-              <a:t>Sources: Zambia Ministry of Mines — Annual Mining Statistics · Zambia 7NDP &amp; Vision 2030</a:t>
-            </a:r>
-          </a:p>
-        </p:txBody>
-      </p:sp>
-      <p:sp>
-        <p:nvSpPr>
-          <p:cNvPr id="36" name="TextBox 35"/>
+              <a:t>TODAY</a:t>
+            </a:r>
+          </a:p>
+        </p:txBody>
+      </p:sp>
+      <p:sp>
+        <p:nvSpPr>
+          <p:cNvPr id="27" name="TextBox 26"/>
           <p:cNvSpPr txBox="1"/>
           <p:nvPr/>
         </p:nvSpPr>
         <p:spPr>
           <a:xfrm>
-            <a:off x="10424160" y="6675120"/>
-            <a:ext cx="1554480" cy="182880"/>
+            <a:off x="6766560" y="3017520"/>
+            <a:ext cx="4937760" cy="1005840"/>
           </a:xfrm>
           <a:prstGeom prst="rect">
             <a:avLst/>
@@ -9742,19 +9590,288 @@
           </a:bodyPr>
           <a:lstStyle/>
           <a:p>
+            <a:pPr algn="l">
+              <a:lnSpc>
+                <a:spcPct val="132000"/>
+              </a:lnSpc>
+            </a:pPr>
+            <a:r>
+              <a:rPr sz="1150" b="0" i="0">
+                <a:solidFill>
+                  <a:srgbClr val="14181F"/>
+                </a:solidFill>
+                <a:latin typeface="Calibri"/>
+              </a:rPr>
+              <a:t>Raw-mineral exporter. Uranium leaves Zambia for enrichment abroad; we capture wellhead value only.</a:t>
+            </a:r>
+          </a:p>
+        </p:txBody>
+      </p:sp>
+      <p:sp>
+        <p:nvSpPr>
+          <p:cNvPr id="28" name="TextBox 27"/>
+          <p:cNvSpPr txBox="1"/>
+          <p:nvPr/>
+        </p:nvSpPr>
+        <p:spPr>
+          <a:xfrm>
+            <a:off x="6766560" y="3931920"/>
+            <a:ext cx="4937760" cy="274320"/>
+          </a:xfrm>
+          <a:prstGeom prst="rect">
+            <a:avLst/>
+          </a:prstGeom>
+          <a:noFill/>
+        </p:spPr>
+        <p:txBody>
+          <a:bodyPr wrap="square" anchor="t" lIns="0" rIns="0" tIns="0" bIns="0">
+            <a:spAutoFit/>
+          </a:bodyPr>
+          <a:lstStyle/>
+          <a:p>
+            <a:pPr algn="l">
+              <a:lnSpc>
+                <a:spcPct val="125000"/>
+              </a:lnSpc>
+            </a:pPr>
+            <a:r>
+              <a:rPr sz="1100" b="1" i="0">
+                <a:solidFill>
+                  <a:srgbClr val="082618"/>
+                </a:solidFill>
+                <a:latin typeface="Calibri"/>
+              </a:rPr>
+              <a:t>WITH NUCLEAR POWER</a:t>
+            </a:r>
+          </a:p>
+        </p:txBody>
+      </p:sp>
+      <p:sp>
+        <p:nvSpPr>
+          <p:cNvPr id="29" name="TextBox 28"/>
+          <p:cNvSpPr txBox="1"/>
+          <p:nvPr/>
+        </p:nvSpPr>
+        <p:spPr>
+          <a:xfrm>
+            <a:off x="6766560" y="4206240"/>
+            <a:ext cx="4937760" cy="1005840"/>
+          </a:xfrm>
+          <a:prstGeom prst="rect">
+            <a:avLst/>
+          </a:prstGeom>
+          <a:noFill/>
+        </p:spPr>
+        <p:txBody>
+          <a:bodyPr wrap="square" anchor="t" lIns="0" rIns="0" tIns="0" bIns="0">
+            <a:spAutoFit/>
+          </a:bodyPr>
+          <a:lstStyle/>
+          <a:p>
+            <a:pPr algn="l">
+              <a:lnSpc>
+                <a:spcPct val="132000"/>
+              </a:lnSpc>
+            </a:pPr>
+            <a:r>
+              <a:rPr sz="1150" b="0" i="0">
+                <a:solidFill>
+                  <a:srgbClr val="14181F"/>
+                </a:solidFill>
+                <a:latin typeface="Calibri"/>
+              </a:rPr>
+              <a:t>High-tech energy producer. Domestic fuel feeds domestic baseload — mines, smelters, hospitals, factories.</a:t>
+            </a:r>
+          </a:p>
+        </p:txBody>
+      </p:sp>
+      <p:sp>
+        <p:nvSpPr>
+          <p:cNvPr id="30" name="TextBox 29"/>
+          <p:cNvSpPr txBox="1"/>
+          <p:nvPr/>
+        </p:nvSpPr>
+        <p:spPr>
+          <a:xfrm>
+            <a:off x="6766560" y="5120640"/>
+            <a:ext cx="4937760" cy="274320"/>
+          </a:xfrm>
+          <a:prstGeom prst="rect">
+            <a:avLst/>
+          </a:prstGeom>
+          <a:noFill/>
+        </p:spPr>
+        <p:txBody>
+          <a:bodyPr wrap="square" anchor="t" lIns="0" rIns="0" tIns="0" bIns="0">
+            <a:spAutoFit/>
+          </a:bodyPr>
+          <a:lstStyle/>
+          <a:p>
+            <a:pPr algn="l">
+              <a:lnSpc>
+                <a:spcPct val="125000"/>
+              </a:lnSpc>
+            </a:pPr>
+            <a:r>
+              <a:rPr sz="1100" b="1" i="0">
+                <a:solidFill>
+                  <a:srgbClr val="B54C1A"/>
+                </a:solidFill>
+                <a:latin typeface="Calibri"/>
+              </a:rPr>
+              <a:t>STRATEGIC UPSIDE</a:t>
+            </a:r>
+          </a:p>
+        </p:txBody>
+      </p:sp>
+      <p:sp>
+        <p:nvSpPr>
+          <p:cNvPr id="31" name="TextBox 30"/>
+          <p:cNvSpPr txBox="1"/>
+          <p:nvPr/>
+        </p:nvSpPr>
+        <p:spPr>
+          <a:xfrm>
+            <a:off x="6766560" y="5394959"/>
+            <a:ext cx="4937760" cy="1005840"/>
+          </a:xfrm>
+          <a:prstGeom prst="rect">
+            <a:avLst/>
+          </a:prstGeom>
+          <a:noFill/>
+        </p:spPr>
+        <p:txBody>
+          <a:bodyPr wrap="square" anchor="t" lIns="0" rIns="0" tIns="0" bIns="0">
+            <a:spAutoFit/>
+          </a:bodyPr>
+          <a:lstStyle/>
+          <a:p>
+            <a:pPr algn="l">
+              <a:lnSpc>
+                <a:spcPct val="132000"/>
+              </a:lnSpc>
+            </a:pPr>
+            <a:r>
+              <a:rPr sz="1150" b="0" i="0">
+                <a:solidFill>
+                  <a:srgbClr val="14181F"/>
+                </a:solidFill>
+                <a:latin typeface="Calibri"/>
+              </a:rPr>
+              <a:t>Import independence. Price-stable electricity. High-skill jobs anchored to a regulated, exportable competency.</a:t>
+            </a:r>
+          </a:p>
+        </p:txBody>
+      </p:sp>
+      <p:cxnSp>
+        <p:nvCxnSpPr>
+          <p:cNvPr id="32" name="Connector 31"/>
+          <p:cNvCxnSpPr/>
+          <p:nvPr/>
+        </p:nvCxnSpPr>
+        <p:spPr>
+          <a:xfrm>
+            <a:off x="548640" y="6565392"/>
+            <a:ext cx="11064240" cy="0"/>
+          </a:xfrm>
+          <a:prstGeom prst="line">
+            <a:avLst/>
+          </a:prstGeom>
+          <a:ln w="6350">
+            <a:solidFill>
+              <a:srgbClr val="C2B8A0"/>
+            </a:solidFill>
+          </a:ln>
+        </p:spPr>
+        <p:style>
+          <a:lnRef idx="2">
+            <a:schemeClr val="accent1"/>
+          </a:lnRef>
+          <a:fillRef idx="0">
+            <a:schemeClr val="accent1"/>
+          </a:fillRef>
+          <a:effectRef idx="1">
+            <a:schemeClr val="accent1"/>
+          </a:effectRef>
+          <a:fontRef idx="minor">
+            <a:schemeClr val="tx1"/>
+          </a:fontRef>
+        </p:style>
+      </p:cxnSp>
+      <p:sp>
+        <p:nvSpPr>
+          <p:cNvPr id="33" name="TextBox 32"/>
+          <p:cNvSpPr txBox="1"/>
+          <p:nvPr/>
+        </p:nvSpPr>
+        <p:spPr>
+          <a:xfrm>
+            <a:off x="548640" y="6620256"/>
+            <a:ext cx="9601200" cy="182880"/>
+          </a:xfrm>
+          <a:prstGeom prst="rect">
+            <a:avLst/>
+          </a:prstGeom>
+          <a:noFill/>
+        </p:spPr>
+        <p:txBody>
+          <a:bodyPr wrap="square" anchor="t" lIns="0" rIns="0" tIns="0" bIns="0">
+            <a:spAutoFit/>
+          </a:bodyPr>
+          <a:lstStyle/>
+          <a:p>
+            <a:pPr algn="l">
+              <a:lnSpc>
+                <a:spcPct val="125000"/>
+              </a:lnSpc>
+            </a:pPr>
+            <a:r>
+              <a:rPr sz="800" b="0" i="1">
+                <a:solidFill>
+                  <a:srgbClr val="6B7078"/>
+                </a:solidFill>
+                <a:latin typeface="Calibri"/>
+              </a:rPr>
+              <a:t>SOURCES: Zambia Ministry of Mines — Annual Mining Statistics · World Nuclear Association Country Profiles (2024) · Zambia 7NDP &amp; Vision 2030</a:t>
+            </a:r>
+          </a:p>
+        </p:txBody>
+      </p:sp>
+      <p:sp>
+        <p:nvSpPr>
+          <p:cNvPr id="34" name="TextBox 33"/>
+          <p:cNvSpPr txBox="1"/>
+          <p:nvPr/>
+        </p:nvSpPr>
+        <p:spPr>
+          <a:xfrm>
+            <a:off x="10332720" y="6620256"/>
+            <a:ext cx="1645920" cy="182880"/>
+          </a:xfrm>
+          <a:prstGeom prst="rect">
+            <a:avLst/>
+          </a:prstGeom>
+          <a:noFill/>
+        </p:spPr>
+        <p:txBody>
+          <a:bodyPr wrap="square" anchor="t" lIns="0" rIns="0" tIns="0" bIns="0">
+            <a:spAutoFit/>
+          </a:bodyPr>
+          <a:lstStyle/>
+          <a:p>
             <a:pPr algn="r">
               <a:lnSpc>
-                <a:spcPct val="120000"/>
+                <a:spcPct val="125000"/>
               </a:lnSpc>
             </a:pPr>
             <a:r>
               <a:rPr sz="800" b="1" i="0">
                 <a:solidFill>
-                  <a:srgbClr val="2A3344"/>
+                  <a:srgbClr val="3A404A"/>
                 </a:solidFill>
                 <a:latin typeface="Calibri"/>
               </a:rPr>
-              <a:t>6 / 8  ·  E. Mwaba</a:t>
+              <a:t>6 / 8   E. MWABA</a:t>
             </a:r>
           </a:p>
         </p:txBody>
@@ -9773,7 +9890,7 @@
     <p:bg>
       <p:bgPr>
         <a:solidFill>
-          <a:srgbClr val="F7F5F0"/>
+          <a:srgbClr val="F4EFE4"/>
         </a:solidFill>
         <a:effectLst/>
       </p:bgPr>
@@ -9793,7 +9910,7 @@
         </p:nvSpPr>
         <p:spPr>
           <a:xfrm>
-            <a:off x="548640" y="411480"/>
+            <a:off x="548640" y="457200"/>
             <a:ext cx="9144000" cy="274320"/>
           </a:xfrm>
           <a:prstGeom prst="rect">
@@ -9809,13 +9926,13 @@
           <a:p>
             <a:pPr algn="l">
               <a:lnSpc>
-                <a:spcPct val="120000"/>
+                <a:spcPct val="125000"/>
               </a:lnSpc>
             </a:pPr>
             <a:r>
-              <a:rPr sz="1100" b="1" i="0">
-                <a:solidFill>
-                  <a:srgbClr val="CC7A2E"/>
+              <a:rPr sz="1000" b="1" i="0">
+                <a:solidFill>
+                  <a:srgbClr val="B54C1A"/>
                 </a:solidFill>
                 <a:latin typeface="Calibri"/>
               </a:rPr>
@@ -9832,8 +9949,8 @@
         </p:nvSpPr>
         <p:spPr>
           <a:xfrm>
-            <a:off x="548640" y="685800"/>
-            <a:ext cx="11064240" cy="685800"/>
+            <a:off x="548640" y="731520"/>
+            <a:ext cx="11064240" cy="777240"/>
           </a:xfrm>
           <a:prstGeom prst="rect">
             <a:avLst/>
@@ -9848,17 +9965,17 @@
           <a:p>
             <a:pPr algn="l">
               <a:lnSpc>
-                <a:spcPct val="120000"/>
+                <a:spcPct val="105000"/>
               </a:lnSpc>
             </a:pPr>
             <a:r>
               <a:rPr sz="3000" b="1" i="0">
                 <a:solidFill>
-                  <a:srgbClr val="0A1F3D"/>
-                </a:solidFill>
-                <a:latin typeface="Calibri"/>
+                  <a:srgbClr val="082618"/>
+                </a:solidFill>
+                <a:latin typeface="Georgia"/>
               </a:rPr>
-              <a:t>Powering the 3-million-tonne copper ambition.</a:t>
+              <a:t>3 million tonnes of copper need a power source. Rain isn't it.</a:t>
             </a:r>
           </a:p>
         </p:txBody>
@@ -9871,15 +9988,15 @@
         </p:nvCxnSpPr>
         <p:spPr>
           <a:xfrm>
-            <a:off x="548640" y="1325880"/>
-            <a:ext cx="1097280" cy="0"/>
+            <a:off x="548640" y="1508760"/>
+            <a:ext cx="731520" cy="0"/>
           </a:xfrm>
           <a:prstGeom prst="line">
             <a:avLst/>
           </a:prstGeom>
-          <a:ln w="19050">
+          <a:ln w="25400">
             <a:solidFill>
-              <a:srgbClr val="CC7A2E"/>
+              <a:srgbClr val="B54C1A"/>
             </a:solidFill>
           </a:ln>
         </p:spPr>
@@ -9906,7 +10023,7 @@
         </p:nvSpPr>
         <p:spPr>
           <a:xfrm>
-            <a:off x="548640" y="1417320"/>
+            <a:off x="548640" y="1627632"/>
             <a:ext cx="11064240" cy="365760"/>
           </a:xfrm>
           <a:prstGeom prst="rect">
@@ -9922,17 +10039,17 @@
           <a:p>
             <a:pPr algn="l">
               <a:lnSpc>
-                <a:spcPct val="120000"/>
+                <a:spcPct val="125000"/>
               </a:lnSpc>
             </a:pPr>
             <a:r>
               <a:rPr sz="1300" b="0" i="1">
                 <a:solidFill>
-                  <a:srgbClr val="6B7280"/>
+                  <a:srgbClr val="3A404A"/>
                 </a:solidFill>
                 <a:latin typeface="Calibri"/>
               </a:rPr>
-              <a:t>Zambia's flagship industrial target needs high-density, drought-proof power.</a:t>
+              <a:t>Zambia's flagship industrial target needs high-density, weather-proof power — now.</a:t>
             </a:r>
           </a:p>
         </p:txBody>
@@ -9946,8 +10063,8 @@
           <p:nvPr/>
         </p:nvGraphicFramePr>
         <p:xfrm>
-          <a:off x="548640" y="2011680"/>
-          <a:ext cx="6766560" cy="4023360"/>
+          <a:off x="548640" y="2103120"/>
+          <a:ext cx="6766560" cy="3017520"/>
         </p:xfrm>
         <a:graphic>
           <a:graphicData uri="http://schemas.openxmlformats.org/drawingml/2006/chart">
@@ -9963,8 +10080,8 @@
         </p:nvSpPr>
         <p:spPr>
           <a:xfrm>
-            <a:off x="548640" y="6080760"/>
-            <a:ext cx="6766560" cy="365760"/>
+            <a:off x="548640" y="5166360"/>
+            <a:ext cx="6766560" cy="274320"/>
           </a:xfrm>
           <a:prstGeom prst="rect">
             <a:avLst/>
@@ -9979,17 +10096,17 @@
           <a:p>
             <a:pPr algn="ctr">
               <a:lnSpc>
-                <a:spcPct val="120000"/>
+                <a:spcPct val="125000"/>
               </a:lnSpc>
             </a:pPr>
             <a:r>
               <a:rPr sz="900" b="0" i="1">
                 <a:solidFill>
-                  <a:srgbClr val="6B7280"/>
+                  <a:srgbClr val="6B7078"/>
                 </a:solidFill>
                 <a:latin typeface="Calibri"/>
               </a:rPr>
-              <a:t>Estimated continuous power for copper mining at ~3,500 kWh/t. Sources: MoMMD; ZESCO.</a:t>
+              <a:t>Continuous power for copper mining at ~3,500 kWh/t. Sources: MoMMD; ZESCO.</a:t>
             </a:r>
           </a:p>
         </p:txBody>
@@ -10002,14 +10119,14 @@
         </p:nvSpPr>
         <p:spPr>
           <a:xfrm>
-            <a:off x="7543800" y="2011680"/>
-            <a:ext cx="4160520" cy="4206240"/>
+            <a:off x="548640" y="5532120"/>
+            <a:ext cx="6766560" cy="960120"/>
           </a:xfrm>
           <a:prstGeom prst="rect">
             <a:avLst/>
           </a:prstGeom>
           <a:solidFill>
-            <a:srgbClr val="FFFFFF"/>
+            <a:srgbClr val="082618"/>
           </a:solidFill>
           <a:ln>
             <a:noFill/>
@@ -10046,14 +10163,14 @@
         </p:nvSpPr>
         <p:spPr>
           <a:xfrm>
-            <a:off x="7543800" y="2011680"/>
-            <a:ext cx="109728" cy="4206240"/>
+            <a:off x="548640" y="5532120"/>
+            <a:ext cx="91440" cy="960120"/>
           </a:xfrm>
           <a:prstGeom prst="rect">
             <a:avLst/>
           </a:prstGeom>
           <a:solidFill>
-            <a:srgbClr val="CC7A2E"/>
+            <a:srgbClr val="B54C1A"/>
           </a:solidFill>
           <a:ln>
             <a:noFill/>
@@ -10090,8 +10207,8 @@
         </p:nvSpPr>
         <p:spPr>
           <a:xfrm>
-            <a:off x="7772400" y="2148840"/>
-            <a:ext cx="3749039" cy="274320"/>
+            <a:off x="777240" y="5623560"/>
+            <a:ext cx="6400800" cy="274320"/>
           </a:xfrm>
           <a:prstGeom prst="rect">
             <a:avLst/>
@@ -10106,17 +10223,17 @@
           <a:p>
             <a:pPr algn="l">
               <a:lnSpc>
-                <a:spcPct val="120000"/>
+                <a:spcPct val="125000"/>
               </a:lnSpc>
             </a:pPr>
             <a:r>
-              <a:rPr sz="1100" b="1" i="0">
-                <a:solidFill>
-                  <a:srgbClr val="CC7A2E"/>
+              <a:rPr sz="1000" b="1" i="0">
+                <a:solidFill>
+                  <a:srgbClr val="CFA33C"/>
                 </a:solidFill>
                 <a:latin typeface="Calibri"/>
               </a:rPr>
-              <a:t>WHAT THIS MEANS</a:t>
+              <a:t>MEANWHILE,  ACROSS  AFRICA</a:t>
             </a:r>
           </a:p>
         </p:txBody>
@@ -10129,47 +10246,8 @@
         </p:nvSpPr>
         <p:spPr>
           <a:xfrm>
-            <a:off x="7772400" y="2514600"/>
-            <a:ext cx="3749039" cy="274320"/>
-          </a:xfrm>
-          <a:prstGeom prst="rect">
-            <a:avLst/>
-          </a:prstGeom>
-          <a:noFill/>
-        </p:spPr>
-        <p:txBody>
-          <a:bodyPr wrap="square" anchor="t" lIns="0" rIns="0" tIns="0" bIns="0">
-            <a:spAutoFit/>
-          </a:bodyPr>
-          <a:lstStyle/>
-          <a:p>
-            <a:pPr algn="l">
-              <a:lnSpc>
-                <a:spcPct val="120000"/>
-              </a:lnSpc>
-            </a:pPr>
-            <a:r>
-              <a:rPr sz="1100" b="1" i="0">
-                <a:solidFill>
-                  <a:srgbClr val="0A1F3D"/>
-                </a:solidFill>
-                <a:latin typeface="Calibri"/>
-              </a:rPr>
-              <a:t>MINING INTENSITY</a:t>
-            </a:r>
-          </a:p>
-        </p:txBody>
-      </p:sp>
-      <p:sp>
-        <p:nvSpPr>
-          <p:cNvPr id="12" name="TextBox 11"/>
-          <p:cNvSpPr txBox="1"/>
-          <p:nvPr/>
-        </p:nvSpPr>
-        <p:spPr>
-          <a:xfrm>
-            <a:off x="7772400" y="2788920"/>
-            <a:ext cx="3749039" cy="914400"/>
+            <a:off x="777240" y="5897880"/>
+            <a:ext cx="6400800" cy="548640"/>
           </a:xfrm>
           <a:prstGeom prst="rect">
             <a:avLst/>
@@ -10188,26 +10266,159 @@
               </a:lnSpc>
             </a:pPr>
             <a:r>
-              <a:rPr sz="1100" b="0" i="0">
-                <a:solidFill>
-                  <a:srgbClr val="121824"/>
+              <a:rPr sz="1100" b="1" i="0">
+                <a:solidFill>
+                  <a:srgbClr val="D97933"/>
                 </a:solidFill>
                 <a:latin typeface="Calibri"/>
               </a:rPr>
-              <a:t>Deep-level copper requires massive, uninterrupted power — hydropower is structurally mismatched.</a:t>
-            </a:r>
-          </a:p>
-        </p:txBody>
-      </p:sp>
-      <p:sp>
-        <p:nvSpPr>
-          <p:cNvPr id="13" name="TextBox 12"/>
+              <a:t>Egypt: </a:t>
+            </a:r>
+            <a:r>
+              <a:rPr sz="1100" b="0" i="0">
+                <a:solidFill>
+                  <a:srgbClr val="FFFFFF"/>
+                </a:solidFill>
+                <a:latin typeface="Calibri"/>
+              </a:rPr>
+              <a:t>4 reactors under construction at El Dabaa.  </a:t>
+            </a:r>
+            <a:r>
+              <a:rPr sz="1100" b="1" i="0">
+                <a:solidFill>
+                  <a:srgbClr val="D97933"/>
+                </a:solidFill>
+                <a:latin typeface="Calibri"/>
+              </a:rPr>
+              <a:t>Kenya: </a:t>
+            </a:r>
+            <a:r>
+              <a:rPr sz="1100" b="0" i="0">
+                <a:solidFill>
+                  <a:srgbClr val="FFFFFF"/>
+                </a:solidFill>
+                <a:latin typeface="Calibri"/>
+              </a:rPr>
+              <a:t>first criticality target 2034.  </a:t>
+            </a:r>
+            <a:r>
+              <a:rPr sz="1100" b="1" i="0">
+                <a:solidFill>
+                  <a:srgbClr val="D97933"/>
+                </a:solidFill>
+                <a:latin typeface="Calibri"/>
+              </a:rPr>
+              <a:t>South Africa: </a:t>
+            </a:r>
+            <a:r>
+              <a:rPr sz="1100" b="0" i="0">
+                <a:solidFill>
+                  <a:srgbClr val="FFFFFF"/>
+                </a:solidFill>
+                <a:latin typeface="Calibri"/>
+              </a:rPr>
+              <a:t>Koeberg, 40+ years.</a:t>
+            </a:r>
+          </a:p>
+        </p:txBody>
+      </p:sp>
+      <p:sp>
+        <p:nvSpPr>
+          <p:cNvPr id="12" name="Rectangle 11"/>
+          <p:cNvSpPr/>
+          <p:nvPr/>
+        </p:nvSpPr>
+        <p:spPr>
+          <a:xfrm>
+            <a:off x="7543800" y="2103120"/>
+            <a:ext cx="4160520" cy="4389120"/>
+          </a:xfrm>
+          <a:prstGeom prst="rect">
+            <a:avLst/>
+          </a:prstGeom>
+          <a:solidFill>
+            <a:srgbClr val="FAF7F0"/>
+          </a:solidFill>
+          <a:ln>
+            <a:noFill/>
+          </a:ln>
+          <a:effectLst/>
+        </p:spPr>
+        <p:style>
+          <a:lnRef idx="1">
+            <a:schemeClr val="accent1"/>
+          </a:lnRef>
+          <a:fillRef idx="3">
+            <a:schemeClr val="accent1"/>
+          </a:fillRef>
+          <a:effectRef idx="2">
+            <a:schemeClr val="accent1"/>
+          </a:effectRef>
+          <a:fontRef idx="minor">
+            <a:schemeClr val="lt1"/>
+          </a:fontRef>
+        </p:style>
+        <p:txBody>
+          <a:bodyPr rtlCol="0" anchor="ctr"/>
+          <a:lstStyle/>
+          <a:p>
+            <a:pPr algn="ctr"/>
+          </a:p>
+        </p:txBody>
+      </p:sp>
+      <p:sp>
+        <p:nvSpPr>
+          <p:cNvPr id="13" name="Rectangle 12"/>
+          <p:cNvSpPr/>
+          <p:nvPr/>
+        </p:nvSpPr>
+        <p:spPr>
+          <a:xfrm>
+            <a:off x="7543800" y="2103120"/>
+            <a:ext cx="109728" cy="4389120"/>
+          </a:xfrm>
+          <a:prstGeom prst="rect">
+            <a:avLst/>
+          </a:prstGeom>
+          <a:solidFill>
+            <a:srgbClr val="B54C1A"/>
+          </a:solidFill>
+          <a:ln>
+            <a:noFill/>
+          </a:ln>
+          <a:effectLst/>
+        </p:spPr>
+        <p:style>
+          <a:lnRef idx="1">
+            <a:schemeClr val="accent1"/>
+          </a:lnRef>
+          <a:fillRef idx="3">
+            <a:schemeClr val="accent1"/>
+          </a:fillRef>
+          <a:effectRef idx="2">
+            <a:schemeClr val="accent1"/>
+          </a:effectRef>
+          <a:fontRef idx="minor">
+            <a:schemeClr val="lt1"/>
+          </a:fontRef>
+        </p:style>
+        <p:txBody>
+          <a:bodyPr rtlCol="0" anchor="ctr"/>
+          <a:lstStyle/>
+          <a:p>
+            <a:pPr algn="ctr"/>
+          </a:p>
+        </p:txBody>
+      </p:sp>
+      <p:sp>
+        <p:nvSpPr>
+          <p:cNvPr id="14" name="TextBox 13"/>
           <p:cNvSpPr txBox="1"/>
           <p:nvPr/>
         </p:nvSpPr>
         <p:spPr>
           <a:xfrm>
-            <a:off x="7772400" y="3703320"/>
+            <a:off x="7772400" y="2240280"/>
             <a:ext cx="3749039" cy="274320"/>
           </a:xfrm>
           <a:prstGeom prst="rect">
@@ -10223,31 +10434,70 @@
           <a:p>
             <a:pPr algn="l">
               <a:lnSpc>
-                <a:spcPct val="120000"/>
+                <a:spcPct val="125000"/>
               </a:lnSpc>
             </a:pPr>
             <a:r>
-              <a:rPr sz="1100" b="1" i="0">
-                <a:solidFill>
-                  <a:srgbClr val="0A1F3D"/>
+              <a:rPr sz="1000" b="1" i="0">
+                <a:solidFill>
+                  <a:srgbClr val="B54C1A"/>
                 </a:solidFill>
                 <a:latin typeface="Calibri"/>
               </a:rPr>
-              <a:t>COST STABILITY</a:t>
-            </a:r>
-          </a:p>
-        </p:txBody>
-      </p:sp>
-      <p:sp>
-        <p:nvSpPr>
-          <p:cNvPr id="14" name="TextBox 13"/>
+              <a:t>WHAT THIS MEANS</a:t>
+            </a:r>
+          </a:p>
+        </p:txBody>
+      </p:sp>
+      <p:sp>
+        <p:nvSpPr>
+          <p:cNvPr id="15" name="TextBox 14"/>
           <p:cNvSpPr txBox="1"/>
           <p:nvPr/>
         </p:nvSpPr>
         <p:spPr>
           <a:xfrm>
-            <a:off x="7772400" y="3977639"/>
-            <a:ext cx="3749039" cy="914400"/>
+            <a:off x="7772400" y="2606040"/>
+            <a:ext cx="3749039" cy="274320"/>
+          </a:xfrm>
+          <a:prstGeom prst="rect">
+            <a:avLst/>
+          </a:prstGeom>
+          <a:noFill/>
+        </p:spPr>
+        <p:txBody>
+          <a:bodyPr wrap="square" anchor="t" lIns="0" rIns="0" tIns="0" bIns="0">
+            <a:spAutoFit/>
+          </a:bodyPr>
+          <a:lstStyle/>
+          <a:p>
+            <a:pPr algn="l">
+              <a:lnSpc>
+                <a:spcPct val="125000"/>
+              </a:lnSpc>
+            </a:pPr>
+            <a:r>
+              <a:rPr sz="1000" b="1" i="0">
+                <a:solidFill>
+                  <a:srgbClr val="082618"/>
+                </a:solidFill>
+                <a:latin typeface="Calibri"/>
+              </a:rPr>
+              <a:t>MINING INTENSITY</a:t>
+            </a:r>
+          </a:p>
+        </p:txBody>
+      </p:sp>
+      <p:sp>
+        <p:nvSpPr>
+          <p:cNvPr id="16" name="TextBox 15"/>
+          <p:cNvSpPr txBox="1"/>
+          <p:nvPr/>
+        </p:nvSpPr>
+        <p:spPr>
+          <a:xfrm>
+            <a:off x="7772400" y="2862072"/>
+            <a:ext cx="3749039" cy="777240"/>
           </a:xfrm>
           <a:prstGeom prst="rect">
             <a:avLst/>
@@ -10266,26 +10516,26 @@
               </a:lnSpc>
             </a:pPr>
             <a:r>
-              <a:rPr sz="1100" b="0" i="0">
-                <a:solidFill>
-                  <a:srgbClr val="121824"/>
+              <a:rPr sz="1050" b="0" i="0">
+                <a:solidFill>
+                  <a:srgbClr val="14181F"/>
                 </a:solidFill>
                 <a:latin typeface="Calibri"/>
               </a:rPr>
-              <a:t>Nuclear fuel costs are decade-stable vs. volatile diesel imports and emergency electricity buys.</a:t>
-            </a:r>
-          </a:p>
-        </p:txBody>
-      </p:sp>
-      <p:sp>
-        <p:nvSpPr>
-          <p:cNvPr id="15" name="TextBox 14"/>
+              <a:t>Deep-level copper needs ~1,200 MW continuous at full 3 Mt output — hydropower cannot deliver this reliably.</a:t>
+            </a:r>
+          </a:p>
+        </p:txBody>
+      </p:sp>
+      <p:sp>
+        <p:nvSpPr>
+          <p:cNvPr id="17" name="TextBox 16"/>
           <p:cNvSpPr txBox="1"/>
           <p:nvPr/>
         </p:nvSpPr>
         <p:spPr>
           <a:xfrm>
-            <a:off x="7772400" y="4892040"/>
+            <a:off x="7772400" y="3566160"/>
             <a:ext cx="3749039" cy="274320"/>
           </a:xfrm>
           <a:prstGeom prst="rect">
@@ -10301,31 +10551,31 @@
           <a:p>
             <a:pPr algn="l">
               <a:lnSpc>
-                <a:spcPct val="120000"/>
+                <a:spcPct val="125000"/>
               </a:lnSpc>
             </a:pPr>
             <a:r>
-              <a:rPr sz="1100" b="1" i="0">
-                <a:solidFill>
-                  <a:srgbClr val="0A1F3D"/>
+              <a:rPr sz="1000" b="1" i="0">
+                <a:solidFill>
+                  <a:srgbClr val="082618"/>
                 </a:solidFill>
                 <a:latin typeface="Calibri"/>
               </a:rPr>
-              <a:t>STRATEGIC FIT</a:t>
-            </a:r>
-          </a:p>
-        </p:txBody>
-      </p:sp>
-      <p:sp>
-        <p:nvSpPr>
-          <p:cNvPr id="16" name="TextBox 15"/>
+              <a:t>COST STABILITY</a:t>
+            </a:r>
+          </a:p>
+        </p:txBody>
+      </p:sp>
+      <p:sp>
+        <p:nvSpPr>
+          <p:cNvPr id="18" name="TextBox 17"/>
           <p:cNvSpPr txBox="1"/>
           <p:nvPr/>
         </p:nvSpPr>
         <p:spPr>
           <a:xfrm>
-            <a:off x="7772400" y="5166359"/>
-            <a:ext cx="3749039" cy="914400"/>
+            <a:off x="7772400" y="3822192"/>
+            <a:ext cx="3749039" cy="777240"/>
           </a:xfrm>
           <a:prstGeom prst="rect">
             <a:avLst/>
@@ -10344,34 +10594,190 @@
               </a:lnSpc>
             </a:pPr>
             <a:r>
-              <a:rPr sz="1100" b="0" i="0">
-                <a:solidFill>
-                  <a:srgbClr val="121824"/>
+              <a:rPr sz="1050" b="0" i="0">
+                <a:solidFill>
+                  <a:srgbClr val="14181F"/>
                 </a:solidFill>
                 <a:latin typeface="Calibri"/>
               </a:rPr>
-              <a:t>The 2,000 MW nuclear target maps directly onto the 3 Mt copper power gap.</a:t>
+              <a:t>Nuclear fuel costs are decade-stable. Drought imports cost us $0.50+/kWh in emergency buys.</a:t>
+            </a:r>
+          </a:p>
+        </p:txBody>
+      </p:sp>
+      <p:sp>
+        <p:nvSpPr>
+          <p:cNvPr id="19" name="TextBox 18"/>
+          <p:cNvSpPr txBox="1"/>
+          <p:nvPr/>
+        </p:nvSpPr>
+        <p:spPr>
+          <a:xfrm>
+            <a:off x="7772400" y="4526280"/>
+            <a:ext cx="3749039" cy="274320"/>
+          </a:xfrm>
+          <a:prstGeom prst="rect">
+            <a:avLst/>
+          </a:prstGeom>
+          <a:noFill/>
+        </p:spPr>
+        <p:txBody>
+          <a:bodyPr wrap="square" anchor="t" lIns="0" rIns="0" tIns="0" bIns="0">
+            <a:spAutoFit/>
+          </a:bodyPr>
+          <a:lstStyle/>
+          <a:p>
+            <a:pPr algn="l">
+              <a:lnSpc>
+                <a:spcPct val="125000"/>
+              </a:lnSpc>
+            </a:pPr>
+            <a:r>
+              <a:rPr sz="1000" b="1" i="0">
+                <a:solidFill>
+                  <a:srgbClr val="082618"/>
+                </a:solidFill>
+                <a:latin typeface="Calibri"/>
+              </a:rPr>
+              <a:t>STRATEGIC FIT</a:t>
+            </a:r>
+          </a:p>
+        </p:txBody>
+      </p:sp>
+      <p:sp>
+        <p:nvSpPr>
+          <p:cNvPr id="20" name="TextBox 19"/>
+          <p:cNvSpPr txBox="1"/>
+          <p:nvPr/>
+        </p:nvSpPr>
+        <p:spPr>
+          <a:xfrm>
+            <a:off x="7772400" y="4782312"/>
+            <a:ext cx="3749039" cy="777240"/>
+          </a:xfrm>
+          <a:prstGeom prst="rect">
+            <a:avLst/>
+          </a:prstGeom>
+          <a:noFill/>
+        </p:spPr>
+        <p:txBody>
+          <a:bodyPr wrap="square" anchor="t" lIns="0" rIns="0" tIns="0" bIns="0">
+            <a:spAutoFit/>
+          </a:bodyPr>
+          <a:lstStyle/>
+          <a:p>
+            <a:pPr algn="l">
+              <a:lnSpc>
+                <a:spcPct val="130000"/>
+              </a:lnSpc>
+            </a:pPr>
+            <a:r>
+              <a:rPr sz="1050" b="0" i="0">
+                <a:solidFill>
+                  <a:srgbClr val="14181F"/>
+                </a:solidFill>
+                <a:latin typeface="Calibri"/>
+              </a:rPr>
+              <a:t>Zambia's 2,000 MW nuclear target maps almost exactly onto the 3 Mt copper power gap.</a:t>
+            </a:r>
+          </a:p>
+        </p:txBody>
+      </p:sp>
+      <p:sp>
+        <p:nvSpPr>
+          <p:cNvPr id="21" name="TextBox 20"/>
+          <p:cNvSpPr txBox="1"/>
+          <p:nvPr/>
+        </p:nvSpPr>
+        <p:spPr>
+          <a:xfrm>
+            <a:off x="7772400" y="5486400"/>
+            <a:ext cx="3749039" cy="274320"/>
+          </a:xfrm>
+          <a:prstGeom prst="rect">
+            <a:avLst/>
+          </a:prstGeom>
+          <a:noFill/>
+        </p:spPr>
+        <p:txBody>
+          <a:bodyPr wrap="square" anchor="t" lIns="0" rIns="0" tIns="0" bIns="0">
+            <a:spAutoFit/>
+          </a:bodyPr>
+          <a:lstStyle/>
+          <a:p>
+            <a:pPr algn="l">
+              <a:lnSpc>
+                <a:spcPct val="125000"/>
+              </a:lnSpc>
+            </a:pPr>
+            <a:r>
+              <a:rPr sz="1000" b="1" i="0">
+                <a:solidFill>
+                  <a:srgbClr val="082618"/>
+                </a:solidFill>
+                <a:latin typeface="Calibri"/>
+              </a:rPr>
+              <a:t>THE WINDOW</a:t>
+            </a:r>
+          </a:p>
+        </p:txBody>
+      </p:sp>
+      <p:sp>
+        <p:nvSpPr>
+          <p:cNvPr id="22" name="TextBox 21"/>
+          <p:cNvSpPr txBox="1"/>
+          <p:nvPr/>
+        </p:nvSpPr>
+        <p:spPr>
+          <a:xfrm>
+            <a:off x="7772400" y="5742432"/>
+            <a:ext cx="3749039" cy="777240"/>
+          </a:xfrm>
+          <a:prstGeom prst="rect">
+            <a:avLst/>
+          </a:prstGeom>
+          <a:noFill/>
+        </p:spPr>
+        <p:txBody>
+          <a:bodyPr wrap="square" anchor="t" lIns="0" rIns="0" tIns="0" bIns="0">
+            <a:spAutoFit/>
+          </a:bodyPr>
+          <a:lstStyle/>
+          <a:p>
+            <a:pPr algn="l">
+              <a:lnSpc>
+                <a:spcPct val="130000"/>
+              </a:lnSpc>
+            </a:pPr>
+            <a:r>
+              <a:rPr sz="1050" b="0" i="0">
+                <a:solidFill>
+                  <a:srgbClr val="14181F"/>
+                </a:solidFill>
+                <a:latin typeface="Calibri"/>
+              </a:rPr>
+              <a:t>Egypt's first reactor enters service ~2026-28. If we wait, we buy that power from them.</a:t>
             </a:r>
           </a:p>
         </p:txBody>
       </p:sp>
       <p:cxnSp>
         <p:nvCxnSpPr>
-          <p:cNvPr id="17" name="Connector 16"/>
+          <p:cNvPr id="23" name="Connector 22"/>
           <p:cNvCxnSpPr/>
           <p:nvPr/>
         </p:nvCxnSpPr>
         <p:spPr>
           <a:xfrm>
-            <a:off x="0" y="6629400"/>
-            <a:ext cx="12191695" cy="0"/>
+            <a:off x="548640" y="6565392"/>
+            <a:ext cx="11064240" cy="0"/>
           </a:xfrm>
           <a:prstGeom prst="line">
             <a:avLst/>
           </a:prstGeom>
           <a:ln w="6350">
             <a:solidFill>
-              <a:srgbClr val="C8CED6"/>
+              <a:srgbClr val="C2B8A0"/>
             </a:solidFill>
           </a:ln>
         </p:spPr>
@@ -10392,57 +10798,13 @@
       </p:cxnSp>
       <p:sp>
         <p:nvSpPr>
-          <p:cNvPr id="18" name="Rectangle 17"/>
-          <p:cNvSpPr/>
-          <p:nvPr/>
-        </p:nvSpPr>
-        <p:spPr>
-          <a:xfrm>
-            <a:off x="0" y="6629400"/>
-            <a:ext cx="640080" cy="45720"/>
-          </a:xfrm>
-          <a:prstGeom prst="rect">
-            <a:avLst/>
-          </a:prstGeom>
-          <a:solidFill>
-            <a:srgbClr val="CC7A2E"/>
-          </a:solidFill>
-          <a:ln>
-            <a:noFill/>
-          </a:ln>
-          <a:effectLst/>
-        </p:spPr>
-        <p:style>
-          <a:lnRef idx="1">
-            <a:schemeClr val="accent1"/>
-          </a:lnRef>
-          <a:fillRef idx="3">
-            <a:schemeClr val="accent1"/>
-          </a:fillRef>
-          <a:effectRef idx="2">
-            <a:schemeClr val="accent1"/>
-          </a:effectRef>
-          <a:fontRef idx="minor">
-            <a:schemeClr val="lt1"/>
-          </a:fontRef>
-        </p:style>
-        <p:txBody>
-          <a:bodyPr rtlCol="0" anchor="ctr"/>
-          <a:lstStyle/>
-          <a:p>
-            <a:pPr algn="ctr"/>
-          </a:p>
-        </p:txBody>
-      </p:sp>
-      <p:sp>
-        <p:nvSpPr>
-          <p:cNvPr id="19" name="TextBox 18"/>
+          <p:cNvPr id="24" name="TextBox 23"/>
           <p:cNvSpPr txBox="1"/>
           <p:nvPr/>
         </p:nvSpPr>
         <p:spPr>
           <a:xfrm>
-            <a:off x="457200" y="6675120"/>
+            <a:off x="548640" y="6620256"/>
             <a:ext cx="9601200" cy="182880"/>
           </a:xfrm>
           <a:prstGeom prst="rect">
@@ -10458,31 +10820,31 @@
           <a:p>
             <a:pPr algn="l">
               <a:lnSpc>
-                <a:spcPct val="120000"/>
+                <a:spcPct val="125000"/>
               </a:lnSpc>
             </a:pPr>
             <a:r>
               <a:rPr sz="800" b="0" i="1">
                 <a:solidFill>
-                  <a:srgbClr val="6B7280"/>
+                  <a:srgbClr val="6B7078"/>
                 </a:solidFill>
                 <a:latin typeface="Calibri"/>
               </a:rPr>
-              <a:t>Sources: Zambia Ministry of Mines — Annual Mining Statistics · ZESCO Annual Reports 2023-2024</a:t>
-            </a:r>
-          </a:p>
-        </p:txBody>
-      </p:sp>
-      <p:sp>
-        <p:nvSpPr>
-          <p:cNvPr id="20" name="TextBox 19"/>
+              <a:t>SOURCES: Zambia Ministry of Mines — Annual Mining Statistics · World Nuclear Association Country Profiles (2024) · ZESCO Annual Reports 2023-2024</a:t>
+            </a:r>
+          </a:p>
+        </p:txBody>
+      </p:sp>
+      <p:sp>
+        <p:nvSpPr>
+          <p:cNvPr id="25" name="TextBox 24"/>
           <p:cNvSpPr txBox="1"/>
           <p:nvPr/>
         </p:nvSpPr>
         <p:spPr>
           <a:xfrm>
-            <a:off x="10424160" y="6675120"/>
-            <a:ext cx="1554480" cy="182880"/>
+            <a:off x="10332720" y="6620256"/>
+            <a:ext cx="1645920" cy="182880"/>
           </a:xfrm>
           <a:prstGeom prst="rect">
             <a:avLst/>
@@ -10497,17 +10859,17 @@
           <a:p>
             <a:pPr algn="r">
               <a:lnSpc>
-                <a:spcPct val="120000"/>
+                <a:spcPct val="125000"/>
               </a:lnSpc>
             </a:pPr>
             <a:r>
               <a:rPr sz="800" b="1" i="0">
                 <a:solidFill>
-                  <a:srgbClr val="2A3344"/>
+                  <a:srgbClr val="3A404A"/>
                 </a:solidFill>
                 <a:latin typeface="Calibri"/>
               </a:rPr>
-              <a:t>7 / 8  ·  E. Mwaba</a:t>
+              <a:t>7 / 8   E. MWABA</a:t>
             </a:r>
           </a:p>
         </p:txBody>
@@ -10526,7 +10888,7 @@
     <p:bg>
       <p:bgPr>
         <a:solidFill>
-          <a:srgbClr val="06142A"/>
+          <a:srgbClr val="082618"/>
         </a:solidFill>
         <a:effectLst/>
       </p:bgPr>
@@ -10553,7 +10915,7 @@
             <a:avLst/>
           </a:prstGeom>
           <a:solidFill>
-            <a:srgbClr val="CC7A2E"/>
+            <a:srgbClr val="B54C1A"/>
           </a:solidFill>
           <a:ln>
             <a:noFill/>
@@ -10584,7 +10946,51 @@
       </p:sp>
       <p:sp>
         <p:nvSpPr>
-          <p:cNvPr id="3" name="TextBox 2"/>
+          <p:cNvPr id="3" name="Rectangle 2"/>
+          <p:cNvSpPr/>
+          <p:nvPr/>
+        </p:nvSpPr>
+        <p:spPr>
+          <a:xfrm>
+            <a:off x="0" y="91440"/>
+            <a:ext cx="12191695" cy="36576"/>
+          </a:xfrm>
+          <a:prstGeom prst="rect">
+            <a:avLst/>
+          </a:prstGeom>
+          <a:solidFill>
+            <a:srgbClr val="CFA33C"/>
+          </a:solidFill>
+          <a:ln>
+            <a:noFill/>
+          </a:ln>
+          <a:effectLst/>
+        </p:spPr>
+        <p:style>
+          <a:lnRef idx="1">
+            <a:schemeClr val="accent1"/>
+          </a:lnRef>
+          <a:fillRef idx="3">
+            <a:schemeClr val="accent1"/>
+          </a:fillRef>
+          <a:effectRef idx="2">
+            <a:schemeClr val="accent1"/>
+          </a:effectRef>
+          <a:fontRef idx="minor">
+            <a:schemeClr val="lt1"/>
+          </a:fontRef>
+        </p:style>
+        <p:txBody>
+          <a:bodyPr rtlCol="0" anchor="ctr"/>
+          <a:lstStyle/>
+          <a:p>
+            <a:pPr algn="ctr"/>
+          </a:p>
+        </p:txBody>
+      </p:sp>
+      <p:sp>
+        <p:nvSpPr>
+          <p:cNvPr id="4" name="TextBox 3"/>
           <p:cNvSpPr txBox="1"/>
           <p:nvPr/>
         </p:nvSpPr>
@@ -10606,31 +11012,31 @@
           <a:p>
             <a:pPr algn="l">
               <a:lnSpc>
-                <a:spcPct val="120000"/>
+                <a:spcPct val="125000"/>
               </a:lnSpc>
             </a:pPr>
             <a:r>
               <a:rPr sz="1100" b="1" i="0">
                 <a:solidFill>
-                  <a:srgbClr val="E8A860"/>
+                  <a:srgbClr val="CFA33C"/>
                 </a:solidFill>
                 <a:latin typeface="Calibri"/>
               </a:rPr>
-              <a:t>06  ·  THE ROADMAP</a:t>
-            </a:r>
-          </a:p>
-        </p:txBody>
-      </p:sp>
-      <p:sp>
-        <p:nvSpPr>
-          <p:cNvPr id="4" name="TextBox 3"/>
+              <a:t>06  ·  THE ASK</a:t>
+            </a:r>
+          </a:p>
+        </p:txBody>
+      </p:sp>
+      <p:sp>
+        <p:nvSpPr>
+          <p:cNvPr id="5" name="TextBox 4"/>
           <p:cNvSpPr txBox="1"/>
           <p:nvPr/>
         </p:nvSpPr>
         <p:spPr>
           <a:xfrm>
             <a:off x="548640" y="731520"/>
-            <a:ext cx="11064240" cy="640080"/>
+            <a:ext cx="11064240" cy="822960"/>
           </a:xfrm>
           <a:prstGeom prst="rect">
             <a:avLst/>
@@ -10645,38 +11051,38 @@
           <a:p>
             <a:pPr algn="l">
               <a:lnSpc>
-                <a:spcPct val="120000"/>
+                <a:spcPct val="125000"/>
               </a:lnSpc>
             </a:pPr>
             <a:r>
-              <a:rPr sz="2800" b="1" i="0">
+              <a:rPr sz="3600" b="1" i="0">
                 <a:solidFill>
                   <a:srgbClr val="FFFFFF"/>
                 </a:solidFill>
-                <a:latin typeface="Calibri"/>
+                <a:latin typeface="Georgia"/>
               </a:rPr>
-              <a:t>From policy approval to first SMR — one decade.</a:t>
+              <a:t>Three decisions. One generation.</a:t>
             </a:r>
           </a:p>
         </p:txBody>
       </p:sp>
       <p:cxnSp>
         <p:nvCxnSpPr>
-          <p:cNvPr id="5" name="Connector 4"/>
+          <p:cNvPr id="6" name="Connector 5"/>
           <p:cNvCxnSpPr/>
           <p:nvPr/>
         </p:nvCxnSpPr>
         <p:spPr>
           <a:xfrm>
-            <a:off x="548640" y="1417320"/>
-            <a:ext cx="1097280" cy="0"/>
+            <a:off x="548640" y="1554480"/>
+            <a:ext cx="731520" cy="0"/>
           </a:xfrm>
           <a:prstGeom prst="line">
             <a:avLst/>
           </a:prstGeom>
-          <a:ln w="19050">
+          <a:ln w="25400">
             <a:solidFill>
-              <a:srgbClr val="CC7A2E"/>
+              <a:srgbClr val="B54C1A"/>
             </a:solidFill>
           </a:ln>
         </p:spPr>
@@ -10697,13 +11103,13 @@
       </p:cxnSp>
       <p:sp>
         <p:nvSpPr>
-          <p:cNvPr id="6" name="TextBox 5"/>
+          <p:cNvPr id="7" name="TextBox 6"/>
           <p:cNvSpPr txBox="1"/>
           <p:nvPr/>
         </p:nvSpPr>
         <p:spPr>
           <a:xfrm>
-            <a:off x="548640" y="1508760"/>
+            <a:off x="548640" y="1691640"/>
             <a:ext cx="11064240" cy="365760"/>
           </a:xfrm>
           <a:prstGeom prst="rect">
@@ -10719,31 +11125,75 @@
           <a:p>
             <a:pPr algn="l">
               <a:lnSpc>
-                <a:spcPct val="120000"/>
+                <a:spcPct val="125000"/>
               </a:lnSpc>
             </a:pPr>
             <a:r>
               <a:rPr sz="1300" b="0" i="1">
                 <a:solidFill>
-                  <a:srgbClr val="CFD8E3"/>
+                  <a:srgbClr val="CFE0D2"/>
                 </a:solidFill>
                 <a:latin typeface="Calibri"/>
               </a:rPr>
-              <a:t>Three workstreams. Visible milestones. Accountability windows.</a:t>
-            </a:r>
-          </a:p>
-        </p:txBody>
-      </p:sp>
-      <p:sp>
-        <p:nvSpPr>
-          <p:cNvPr id="7" name="TextBox 6"/>
+              <a:t>From radiological fear to industrial mastery — the choice is legislative, not technical.</a:t>
+            </a:r>
+          </a:p>
+        </p:txBody>
+      </p:sp>
+      <p:sp>
+        <p:nvSpPr>
+          <p:cNvPr id="8" name="Rectangle 7"/>
+          <p:cNvSpPr/>
+          <p:nvPr/>
+        </p:nvSpPr>
+        <p:spPr>
+          <a:xfrm>
+            <a:off x="548640" y="2423160"/>
+            <a:ext cx="1051560" cy="1097280"/>
+          </a:xfrm>
+          <a:prstGeom prst="rect">
+            <a:avLst/>
+          </a:prstGeom>
+          <a:solidFill>
+            <a:srgbClr val="B54C1A"/>
+          </a:solidFill>
+          <a:ln>
+            <a:noFill/>
+          </a:ln>
+          <a:effectLst/>
+        </p:spPr>
+        <p:style>
+          <a:lnRef idx="1">
+            <a:schemeClr val="accent1"/>
+          </a:lnRef>
+          <a:fillRef idx="3">
+            <a:schemeClr val="accent1"/>
+          </a:fillRef>
+          <a:effectRef idx="2">
+            <a:schemeClr val="accent1"/>
+          </a:effectRef>
+          <a:fontRef idx="minor">
+            <a:schemeClr val="lt1"/>
+          </a:fontRef>
+        </p:style>
+        <p:txBody>
+          <a:bodyPr rtlCol="0" anchor="ctr"/>
+          <a:lstStyle/>
+          <a:p>
+            <a:pPr algn="ctr"/>
+          </a:p>
+        </p:txBody>
+      </p:sp>
+      <p:sp>
+        <p:nvSpPr>
+          <p:cNvPr id="9" name="TextBox 8"/>
           <p:cNvSpPr txBox="1"/>
           <p:nvPr/>
         </p:nvSpPr>
         <p:spPr>
           <a:xfrm>
-            <a:off x="1005839" y="2148840"/>
-            <a:ext cx="548640" cy="274320"/>
+            <a:off x="548640" y="2697479"/>
+            <a:ext cx="1051560" cy="640080"/>
           </a:xfrm>
           <a:prstGeom prst="rect">
             <a:avLst/>
@@ -10758,31 +11208,119 @@
           <a:p>
             <a:pPr algn="ctr">
               <a:lnSpc>
-                <a:spcPct val="120000"/>
+                <a:spcPct val="125000"/>
               </a:lnSpc>
             </a:pPr>
             <a:r>
-              <a:rPr sz="1000" b="1" i="0">
-                <a:solidFill>
-                  <a:srgbClr val="E8A860"/>
-                </a:solidFill>
-                <a:latin typeface="Calibri"/>
+              <a:rPr sz="3600" b="1" i="0">
+                <a:solidFill>
+                  <a:srgbClr val="082618"/>
+                </a:solidFill>
+                <a:latin typeface="Georgia"/>
               </a:rPr>
-              <a:t>2026</a:t>
-            </a:r>
-          </a:p>
-        </p:txBody>
-      </p:sp>
-      <p:sp>
-        <p:nvSpPr>
-          <p:cNvPr id="8" name="TextBox 7"/>
+              <a:t>01</a:t>
+            </a:r>
+          </a:p>
+        </p:txBody>
+      </p:sp>
+      <p:sp>
+        <p:nvSpPr>
+          <p:cNvPr id="10" name="Rectangle 9"/>
+          <p:cNvSpPr/>
+          <p:nvPr/>
+        </p:nvSpPr>
+        <p:spPr>
+          <a:xfrm>
+            <a:off x="1600200" y="2423160"/>
+            <a:ext cx="10058400" cy="1097280"/>
+          </a:xfrm>
+          <a:prstGeom prst="rect">
+            <a:avLst/>
+          </a:prstGeom>
+          <a:solidFill>
+            <a:srgbClr val="0C301F"/>
+          </a:solidFill>
+          <a:ln>
+            <a:noFill/>
+          </a:ln>
+          <a:effectLst/>
+        </p:spPr>
+        <p:style>
+          <a:lnRef idx="1">
+            <a:schemeClr val="accent1"/>
+          </a:lnRef>
+          <a:fillRef idx="3">
+            <a:schemeClr val="accent1"/>
+          </a:fillRef>
+          <a:effectRef idx="2">
+            <a:schemeClr val="accent1"/>
+          </a:effectRef>
+          <a:fontRef idx="minor">
+            <a:schemeClr val="lt1"/>
+          </a:fontRef>
+        </p:style>
+        <p:txBody>
+          <a:bodyPr rtlCol="0" anchor="ctr"/>
+          <a:lstStyle/>
+          <a:p>
+            <a:pPr algn="ctr"/>
+          </a:p>
+        </p:txBody>
+      </p:sp>
+      <p:sp>
+        <p:nvSpPr>
+          <p:cNvPr id="11" name="Rectangle 10"/>
+          <p:cNvSpPr/>
+          <p:nvPr/>
+        </p:nvSpPr>
+        <p:spPr>
+          <a:xfrm>
+            <a:off x="1600200" y="2423160"/>
+            <a:ext cx="10058400" cy="36576"/>
+          </a:xfrm>
+          <a:prstGeom prst="rect">
+            <a:avLst/>
+          </a:prstGeom>
+          <a:solidFill>
+            <a:srgbClr val="CFA33C"/>
+          </a:solidFill>
+          <a:ln>
+            <a:noFill/>
+          </a:ln>
+          <a:effectLst/>
+        </p:spPr>
+        <p:style>
+          <a:lnRef idx="1">
+            <a:schemeClr val="accent1"/>
+          </a:lnRef>
+          <a:fillRef idx="3">
+            <a:schemeClr val="accent1"/>
+          </a:fillRef>
+          <a:effectRef idx="2">
+            <a:schemeClr val="accent1"/>
+          </a:effectRef>
+          <a:fontRef idx="minor">
+            <a:schemeClr val="lt1"/>
+          </a:fontRef>
+        </p:style>
+        <p:txBody>
+          <a:bodyPr rtlCol="0" anchor="ctr"/>
+          <a:lstStyle/>
+          <a:p>
+            <a:pPr algn="ctr"/>
+          </a:p>
+        </p:txBody>
+      </p:sp>
+      <p:sp>
+        <p:nvSpPr>
+          <p:cNvPr id="12" name="TextBox 11"/>
           <p:cNvSpPr txBox="1"/>
           <p:nvPr/>
         </p:nvSpPr>
         <p:spPr>
           <a:xfrm>
-            <a:off x="3072384" y="2148840"/>
-            <a:ext cx="548640" cy="274320"/>
+            <a:off x="1828800" y="2532888"/>
+            <a:ext cx="9601200" cy="320040"/>
           </a:xfrm>
           <a:prstGeom prst="rect">
             <a:avLst/>
@@ -10795,33 +11333,33 @@
           </a:bodyPr>
           <a:lstStyle/>
           <a:p>
-            <a:pPr algn="ctr">
+            <a:pPr algn="l">
               <a:lnSpc>
-                <a:spcPct val="120000"/>
+                <a:spcPct val="125000"/>
               </a:lnSpc>
             </a:pPr>
             <a:r>
-              <a:rPr sz="1000" b="1" i="0">
-                <a:solidFill>
-                  <a:srgbClr val="E8A860"/>
-                </a:solidFill>
-                <a:latin typeface="Calibri"/>
+              <a:rPr sz="1800" b="1" i="0">
+                <a:solidFill>
+                  <a:srgbClr val="CFA33C"/>
+                </a:solidFill>
+                <a:latin typeface="Georgia"/>
               </a:rPr>
-              <a:t>2028</a:t>
-            </a:r>
-          </a:p>
-        </p:txBody>
-      </p:sp>
-      <p:sp>
-        <p:nvSpPr>
-          <p:cNvPr id="9" name="TextBox 8"/>
+              <a:t>ENACT</a:t>
+            </a:r>
+          </a:p>
+        </p:txBody>
+      </p:sp>
+      <p:sp>
+        <p:nvSpPr>
+          <p:cNvPr id="13" name="TextBox 12"/>
           <p:cNvSpPr txBox="1"/>
           <p:nvPr/>
         </p:nvSpPr>
         <p:spPr>
           <a:xfrm>
-            <a:off x="5138928" y="2148840"/>
-            <a:ext cx="548640" cy="274320"/>
+            <a:off x="1828800" y="2880360"/>
+            <a:ext cx="9601200" cy="594360"/>
           </a:xfrm>
           <a:prstGeom prst="rect">
             <a:avLst/>
@@ -10834,33 +11372,77 @@
           </a:bodyPr>
           <a:lstStyle/>
           <a:p>
-            <a:pPr algn="ctr">
+            <a:pPr algn="l">
               <a:lnSpc>
-                <a:spcPct val="120000"/>
+                <a:spcPct val="130000"/>
               </a:lnSpc>
             </a:pPr>
             <a:r>
-              <a:rPr sz="1000" b="1" i="0">
-                <a:solidFill>
-                  <a:srgbClr val="E8A860"/>
+              <a:rPr sz="1200" b="0" i="0">
+                <a:solidFill>
+                  <a:srgbClr val="FFFFFF"/>
                 </a:solidFill>
                 <a:latin typeface="Calibri"/>
               </a:rPr>
-              <a:t>2030</a:t>
-            </a:r>
-          </a:p>
-        </p:txBody>
-      </p:sp>
-      <p:sp>
-        <p:nvSpPr>
-          <p:cNvPr id="10" name="TextBox 9"/>
+              <a:t>Pass the Nuclear Bill — empower NSPA as an IAEA-aligned independent regulator. Without this signature, every other step is symbolic.</a:t>
+            </a:r>
+          </a:p>
+        </p:txBody>
+      </p:sp>
+      <p:sp>
+        <p:nvSpPr>
+          <p:cNvPr id="14" name="Rectangle 13"/>
+          <p:cNvSpPr/>
+          <p:nvPr/>
+        </p:nvSpPr>
+        <p:spPr>
+          <a:xfrm>
+            <a:off x="548640" y="3611880"/>
+            <a:ext cx="1051560" cy="1097280"/>
+          </a:xfrm>
+          <a:prstGeom prst="rect">
+            <a:avLst/>
+          </a:prstGeom>
+          <a:solidFill>
+            <a:srgbClr val="B54C1A"/>
+          </a:solidFill>
+          <a:ln>
+            <a:noFill/>
+          </a:ln>
+          <a:effectLst/>
+        </p:spPr>
+        <p:style>
+          <a:lnRef idx="1">
+            <a:schemeClr val="accent1"/>
+          </a:lnRef>
+          <a:fillRef idx="3">
+            <a:schemeClr val="accent1"/>
+          </a:fillRef>
+          <a:effectRef idx="2">
+            <a:schemeClr val="accent1"/>
+          </a:effectRef>
+          <a:fontRef idx="minor">
+            <a:schemeClr val="lt1"/>
+          </a:fontRef>
+        </p:style>
+        <p:txBody>
+          <a:bodyPr rtlCol="0" anchor="ctr"/>
+          <a:lstStyle/>
+          <a:p>
+            <a:pPr algn="ctr"/>
+          </a:p>
+        </p:txBody>
+      </p:sp>
+      <p:sp>
+        <p:nvSpPr>
+          <p:cNvPr id="15" name="TextBox 14"/>
           <p:cNvSpPr txBox="1"/>
           <p:nvPr/>
         </p:nvSpPr>
         <p:spPr>
           <a:xfrm>
-            <a:off x="7205472" y="2148840"/>
-            <a:ext cx="548640" cy="274320"/>
+            <a:off x="548640" y="3886200"/>
+            <a:ext cx="1051560" cy="640080"/>
           </a:xfrm>
           <a:prstGeom prst="rect">
             <a:avLst/>
@@ -10875,31 +11457,119 @@
           <a:p>
             <a:pPr algn="ctr">
               <a:lnSpc>
-                <a:spcPct val="120000"/>
+                <a:spcPct val="125000"/>
               </a:lnSpc>
             </a:pPr>
             <a:r>
-              <a:rPr sz="1000" b="1" i="0">
-                <a:solidFill>
-                  <a:srgbClr val="E8A860"/>
-                </a:solidFill>
-                <a:latin typeface="Calibri"/>
+              <a:rPr sz="3600" b="1" i="0">
+                <a:solidFill>
+                  <a:srgbClr val="082618"/>
+                </a:solidFill>
+                <a:latin typeface="Georgia"/>
               </a:rPr>
-              <a:t>2032</a:t>
-            </a:r>
-          </a:p>
-        </p:txBody>
-      </p:sp>
-      <p:sp>
-        <p:nvSpPr>
-          <p:cNvPr id="11" name="TextBox 10"/>
+              <a:t>02</a:t>
+            </a:r>
+          </a:p>
+        </p:txBody>
+      </p:sp>
+      <p:sp>
+        <p:nvSpPr>
+          <p:cNvPr id="16" name="Rectangle 15"/>
+          <p:cNvSpPr/>
+          <p:nvPr/>
+        </p:nvSpPr>
+        <p:spPr>
+          <a:xfrm>
+            <a:off x="1600200" y="3611880"/>
+            <a:ext cx="10058400" cy="1097280"/>
+          </a:xfrm>
+          <a:prstGeom prst="rect">
+            <a:avLst/>
+          </a:prstGeom>
+          <a:solidFill>
+            <a:srgbClr val="0C301F"/>
+          </a:solidFill>
+          <a:ln>
+            <a:noFill/>
+          </a:ln>
+          <a:effectLst/>
+        </p:spPr>
+        <p:style>
+          <a:lnRef idx="1">
+            <a:schemeClr val="accent1"/>
+          </a:lnRef>
+          <a:fillRef idx="3">
+            <a:schemeClr val="accent1"/>
+          </a:fillRef>
+          <a:effectRef idx="2">
+            <a:schemeClr val="accent1"/>
+          </a:effectRef>
+          <a:fontRef idx="minor">
+            <a:schemeClr val="lt1"/>
+          </a:fontRef>
+        </p:style>
+        <p:txBody>
+          <a:bodyPr rtlCol="0" anchor="ctr"/>
+          <a:lstStyle/>
+          <a:p>
+            <a:pPr algn="ctr"/>
+          </a:p>
+        </p:txBody>
+      </p:sp>
+      <p:sp>
+        <p:nvSpPr>
+          <p:cNvPr id="17" name="Rectangle 16"/>
+          <p:cNvSpPr/>
+          <p:nvPr/>
+        </p:nvSpPr>
+        <p:spPr>
+          <a:xfrm>
+            <a:off x="1600200" y="3611880"/>
+            <a:ext cx="10058400" cy="36576"/>
+          </a:xfrm>
+          <a:prstGeom prst="rect">
+            <a:avLst/>
+          </a:prstGeom>
+          <a:solidFill>
+            <a:srgbClr val="CFA33C"/>
+          </a:solidFill>
+          <a:ln>
+            <a:noFill/>
+          </a:ln>
+          <a:effectLst/>
+        </p:spPr>
+        <p:style>
+          <a:lnRef idx="1">
+            <a:schemeClr val="accent1"/>
+          </a:lnRef>
+          <a:fillRef idx="3">
+            <a:schemeClr val="accent1"/>
+          </a:fillRef>
+          <a:effectRef idx="2">
+            <a:schemeClr val="accent1"/>
+          </a:effectRef>
+          <a:fontRef idx="minor">
+            <a:schemeClr val="lt1"/>
+          </a:fontRef>
+        </p:style>
+        <p:txBody>
+          <a:bodyPr rtlCol="0" anchor="ctr"/>
+          <a:lstStyle/>
+          <a:p>
+            <a:pPr algn="ctr"/>
+          </a:p>
+        </p:txBody>
+      </p:sp>
+      <p:sp>
+        <p:nvSpPr>
+          <p:cNvPr id="18" name="TextBox 17"/>
           <p:cNvSpPr txBox="1"/>
           <p:nvPr/>
         </p:nvSpPr>
         <p:spPr>
           <a:xfrm>
-            <a:off x="9272015" y="2148840"/>
-            <a:ext cx="548640" cy="274320"/>
+            <a:off x="1828800" y="3721608"/>
+            <a:ext cx="9601200" cy="320040"/>
           </a:xfrm>
           <a:prstGeom prst="rect">
             <a:avLst/>
@@ -10912,33 +11582,33 @@
           </a:bodyPr>
           <a:lstStyle/>
           <a:p>
-            <a:pPr algn="ctr">
+            <a:pPr algn="l">
               <a:lnSpc>
-                <a:spcPct val="120000"/>
+                <a:spcPct val="125000"/>
               </a:lnSpc>
             </a:pPr>
             <a:r>
-              <a:rPr sz="1000" b="1" i="0">
-                <a:solidFill>
-                  <a:srgbClr val="E8A860"/>
-                </a:solidFill>
-                <a:latin typeface="Calibri"/>
+              <a:rPr sz="1800" b="1" i="0">
+                <a:solidFill>
+                  <a:srgbClr val="CFA33C"/>
+                </a:solidFill>
+                <a:latin typeface="Georgia"/>
               </a:rPr>
-              <a:t>2034</a:t>
-            </a:r>
-          </a:p>
-        </p:txBody>
-      </p:sp>
-      <p:sp>
-        <p:nvSpPr>
-          <p:cNvPr id="12" name="TextBox 11"/>
+              <a:t>EQUIP</a:t>
+            </a:r>
+          </a:p>
+        </p:txBody>
+      </p:sp>
+      <p:sp>
+        <p:nvSpPr>
+          <p:cNvPr id="19" name="TextBox 18"/>
           <p:cNvSpPr txBox="1"/>
           <p:nvPr/>
         </p:nvSpPr>
         <p:spPr>
           <a:xfrm>
-            <a:off x="11338559" y="2148840"/>
-            <a:ext cx="548640" cy="274320"/>
+            <a:off x="1828800" y="4069080"/>
+            <a:ext cx="9601200" cy="594360"/>
           </a:xfrm>
           <a:prstGeom prst="rect">
             <a:avLst/>
@@ -10951,40 +11621,289 @@
           </a:bodyPr>
           <a:lstStyle/>
           <a:p>
+            <a:pPr algn="l">
+              <a:lnSpc>
+                <a:spcPct val="130000"/>
+              </a:lnSpc>
+            </a:pPr>
+            <a:r>
+              <a:rPr sz="1200" b="0" i="0">
+                <a:solidFill>
+                  <a:srgbClr val="FFFFFF"/>
+                </a:solidFill>
+                <a:latin typeface="Calibri"/>
+              </a:rPr>
+              <a:t>Fund radiological monitoring nationwide — starting in Siavonga. No Zambian community should live next to uranium without instruments.</a:t>
+            </a:r>
+          </a:p>
+        </p:txBody>
+      </p:sp>
+      <p:sp>
+        <p:nvSpPr>
+          <p:cNvPr id="20" name="Rectangle 19"/>
+          <p:cNvSpPr/>
+          <p:nvPr/>
+        </p:nvSpPr>
+        <p:spPr>
+          <a:xfrm>
+            <a:off x="548640" y="4800600"/>
+            <a:ext cx="1051560" cy="1097280"/>
+          </a:xfrm>
+          <a:prstGeom prst="rect">
+            <a:avLst/>
+          </a:prstGeom>
+          <a:solidFill>
+            <a:srgbClr val="B54C1A"/>
+          </a:solidFill>
+          <a:ln>
+            <a:noFill/>
+          </a:ln>
+          <a:effectLst/>
+        </p:spPr>
+        <p:style>
+          <a:lnRef idx="1">
+            <a:schemeClr val="accent1"/>
+          </a:lnRef>
+          <a:fillRef idx="3">
+            <a:schemeClr val="accent1"/>
+          </a:fillRef>
+          <a:effectRef idx="2">
+            <a:schemeClr val="accent1"/>
+          </a:effectRef>
+          <a:fontRef idx="minor">
+            <a:schemeClr val="lt1"/>
+          </a:fontRef>
+        </p:style>
+        <p:txBody>
+          <a:bodyPr rtlCol="0" anchor="ctr"/>
+          <a:lstStyle/>
+          <a:p>
+            <a:pPr algn="ctr"/>
+          </a:p>
+        </p:txBody>
+      </p:sp>
+      <p:sp>
+        <p:nvSpPr>
+          <p:cNvPr id="21" name="TextBox 20"/>
+          <p:cNvSpPr txBox="1"/>
+          <p:nvPr/>
+        </p:nvSpPr>
+        <p:spPr>
+          <a:xfrm>
+            <a:off x="548640" y="5074920"/>
+            <a:ext cx="1051560" cy="640080"/>
+          </a:xfrm>
+          <a:prstGeom prst="rect">
+            <a:avLst/>
+          </a:prstGeom>
+          <a:noFill/>
+        </p:spPr>
+        <p:txBody>
+          <a:bodyPr wrap="square" anchor="t" lIns="0" rIns="0" tIns="0" bIns="0">
+            <a:spAutoFit/>
+          </a:bodyPr>
+          <a:lstStyle/>
+          <a:p>
             <a:pPr algn="ctr">
               <a:lnSpc>
-                <a:spcPct val="120000"/>
+                <a:spcPct val="125000"/>
               </a:lnSpc>
             </a:pPr>
             <a:r>
-              <a:rPr sz="1000" b="1" i="0">
-                <a:solidFill>
-                  <a:srgbClr val="E8A860"/>
+              <a:rPr sz="3600" b="1" i="0">
+                <a:solidFill>
+                  <a:srgbClr val="082618"/>
+                </a:solidFill>
+                <a:latin typeface="Georgia"/>
+              </a:rPr>
+              <a:t>03</a:t>
+            </a:r>
+          </a:p>
+        </p:txBody>
+      </p:sp>
+      <p:sp>
+        <p:nvSpPr>
+          <p:cNvPr id="22" name="Rectangle 21"/>
+          <p:cNvSpPr/>
+          <p:nvPr/>
+        </p:nvSpPr>
+        <p:spPr>
+          <a:xfrm>
+            <a:off x="1600200" y="4800600"/>
+            <a:ext cx="10058400" cy="1097280"/>
+          </a:xfrm>
+          <a:prstGeom prst="rect">
+            <a:avLst/>
+          </a:prstGeom>
+          <a:solidFill>
+            <a:srgbClr val="0C301F"/>
+          </a:solidFill>
+          <a:ln>
+            <a:noFill/>
+          </a:ln>
+          <a:effectLst/>
+        </p:spPr>
+        <p:style>
+          <a:lnRef idx="1">
+            <a:schemeClr val="accent1"/>
+          </a:lnRef>
+          <a:fillRef idx="3">
+            <a:schemeClr val="accent1"/>
+          </a:fillRef>
+          <a:effectRef idx="2">
+            <a:schemeClr val="accent1"/>
+          </a:effectRef>
+          <a:fontRef idx="minor">
+            <a:schemeClr val="lt1"/>
+          </a:fontRef>
+        </p:style>
+        <p:txBody>
+          <a:bodyPr rtlCol="0" anchor="ctr"/>
+          <a:lstStyle/>
+          <a:p>
+            <a:pPr algn="ctr"/>
+          </a:p>
+        </p:txBody>
+      </p:sp>
+      <p:sp>
+        <p:nvSpPr>
+          <p:cNvPr id="23" name="Rectangle 22"/>
+          <p:cNvSpPr/>
+          <p:nvPr/>
+        </p:nvSpPr>
+        <p:spPr>
+          <a:xfrm>
+            <a:off x="1600200" y="4800600"/>
+            <a:ext cx="10058400" cy="36576"/>
+          </a:xfrm>
+          <a:prstGeom prst="rect">
+            <a:avLst/>
+          </a:prstGeom>
+          <a:solidFill>
+            <a:srgbClr val="CFA33C"/>
+          </a:solidFill>
+          <a:ln>
+            <a:noFill/>
+          </a:ln>
+          <a:effectLst/>
+        </p:spPr>
+        <p:style>
+          <a:lnRef idx="1">
+            <a:schemeClr val="accent1"/>
+          </a:lnRef>
+          <a:fillRef idx="3">
+            <a:schemeClr val="accent1"/>
+          </a:fillRef>
+          <a:effectRef idx="2">
+            <a:schemeClr val="accent1"/>
+          </a:effectRef>
+          <a:fontRef idx="minor">
+            <a:schemeClr val="lt1"/>
+          </a:fontRef>
+        </p:style>
+        <p:txBody>
+          <a:bodyPr rtlCol="0" anchor="ctr"/>
+          <a:lstStyle/>
+          <a:p>
+            <a:pPr algn="ctr"/>
+          </a:p>
+        </p:txBody>
+      </p:sp>
+      <p:sp>
+        <p:nvSpPr>
+          <p:cNvPr id="24" name="TextBox 23"/>
+          <p:cNvSpPr txBox="1"/>
+          <p:nvPr/>
+        </p:nvSpPr>
+        <p:spPr>
+          <a:xfrm>
+            <a:off x="1828800" y="4910328"/>
+            <a:ext cx="9601200" cy="320040"/>
+          </a:xfrm>
+          <a:prstGeom prst="rect">
+            <a:avLst/>
+          </a:prstGeom>
+          <a:noFill/>
+        </p:spPr>
+        <p:txBody>
+          <a:bodyPr wrap="square" anchor="t" lIns="0" rIns="0" tIns="0" bIns="0">
+            <a:spAutoFit/>
+          </a:bodyPr>
+          <a:lstStyle/>
+          <a:p>
+            <a:pPr algn="l">
+              <a:lnSpc>
+                <a:spcPct val="125000"/>
+              </a:lnSpc>
+            </a:pPr>
+            <a:r>
+              <a:rPr sz="1800" b="1" i="0">
+                <a:solidFill>
+                  <a:srgbClr val="CFA33C"/>
+                </a:solidFill>
+                <a:latin typeface="Georgia"/>
+              </a:rPr>
+              <a:t>EXECUTE</a:t>
+            </a:r>
+          </a:p>
+        </p:txBody>
+      </p:sp>
+      <p:sp>
+        <p:nvSpPr>
+          <p:cNvPr id="25" name="TextBox 24"/>
+          <p:cNvSpPr txBox="1"/>
+          <p:nvPr/>
+        </p:nvSpPr>
+        <p:spPr>
+          <a:xfrm>
+            <a:off x="1828800" y="5257800"/>
+            <a:ext cx="9601200" cy="594360"/>
+          </a:xfrm>
+          <a:prstGeom prst="rect">
+            <a:avLst/>
+          </a:prstGeom>
+          <a:noFill/>
+        </p:spPr>
+        <p:txBody>
+          <a:bodyPr wrap="square" anchor="t" lIns="0" rIns="0" tIns="0" bIns="0">
+            <a:spAutoFit/>
+          </a:bodyPr>
+          <a:lstStyle/>
+          <a:p>
+            <a:pPr algn="l">
+              <a:lnSpc>
+                <a:spcPct val="130000"/>
+              </a:lnSpc>
+            </a:pPr>
+            <a:r>
+              <a:rPr sz="1200" b="0" i="0">
+                <a:solidFill>
+                  <a:srgbClr val="FFFFFF"/>
                 </a:solidFill>
                 <a:latin typeface="Calibri"/>
               </a:rPr>
-              <a:t>2036+</a:t>
+              <a:t>Greenlight CNST and SMR pre-feasibility — partner with ROSATOM, NuScale, or Westinghouse using the agreements Cabinet already approved in 2020.</a:t>
             </a:r>
           </a:p>
         </p:txBody>
       </p:sp>
       <p:cxnSp>
         <p:nvCxnSpPr>
-          <p:cNvPr id="13" name="Connector 12"/>
+          <p:cNvPr id="26" name="Connector 25"/>
           <p:cNvCxnSpPr/>
           <p:nvPr/>
         </p:nvCxnSpPr>
         <p:spPr>
           <a:xfrm>
-            <a:off x="1280160" y="2514600"/>
-            <a:ext cx="10332719" cy="0"/>
+            <a:off x="548640" y="6080760"/>
+            <a:ext cx="11064240" cy="0"/>
           </a:xfrm>
           <a:prstGeom prst="line">
             <a:avLst/>
           </a:prstGeom>
-          <a:ln w="9525">
+          <a:ln w="6350">
             <a:solidFill>
-              <a:srgbClr val="334466"/>
+              <a:srgbClr val="335542"/>
             </a:solidFill>
           </a:ln>
         </p:spPr>
@@ -11005,102 +11924,14 @@
       </p:cxnSp>
       <p:sp>
         <p:nvSpPr>
-          <p:cNvPr id="14" name="Rectangle 13"/>
-          <p:cNvSpPr/>
-          <p:nvPr/>
-        </p:nvSpPr>
-        <p:spPr>
-          <a:xfrm>
-            <a:off x="1280160" y="3063239"/>
-            <a:ext cx="4133087" cy="411480"/>
-          </a:xfrm>
-          <a:prstGeom prst="rect">
-            <a:avLst/>
-          </a:prstGeom>
-          <a:solidFill>
-            <a:srgbClr val="CC7A2E"/>
-          </a:solidFill>
-          <a:ln>
-            <a:noFill/>
-          </a:ln>
-          <a:effectLst/>
-        </p:spPr>
-        <p:style>
-          <a:lnRef idx="1">
-            <a:schemeClr val="accent1"/>
-          </a:lnRef>
-          <a:fillRef idx="3">
-            <a:schemeClr val="accent1"/>
-          </a:fillRef>
-          <a:effectRef idx="2">
-            <a:schemeClr val="accent1"/>
-          </a:effectRef>
-          <a:fontRef idx="minor">
-            <a:schemeClr val="lt1"/>
-          </a:fontRef>
-        </p:style>
-        <p:txBody>
-          <a:bodyPr rtlCol="0" anchor="ctr"/>
-          <a:lstStyle/>
-          <a:p>
-            <a:pPr algn="ctr"/>
-          </a:p>
-        </p:txBody>
-      </p:sp>
-      <p:sp>
-        <p:nvSpPr>
-          <p:cNvPr id="15" name="Rectangle 14"/>
-          <p:cNvSpPr/>
-          <p:nvPr/>
-        </p:nvSpPr>
-        <p:spPr>
-          <a:xfrm>
-            <a:off x="1280160" y="3063239"/>
-            <a:ext cx="73152" cy="411480"/>
-          </a:xfrm>
-          <a:prstGeom prst="rect">
-            <a:avLst/>
-          </a:prstGeom>
-          <a:solidFill>
-            <a:srgbClr val="FFFFFF"/>
-          </a:solidFill>
-          <a:ln>
-            <a:noFill/>
-          </a:ln>
-          <a:effectLst/>
-        </p:spPr>
-        <p:style>
-          <a:lnRef idx="1">
-            <a:schemeClr val="accent1"/>
-          </a:lnRef>
-          <a:fillRef idx="3">
-            <a:schemeClr val="accent1"/>
-          </a:fillRef>
-          <a:effectRef idx="2">
-            <a:schemeClr val="accent1"/>
-          </a:effectRef>
-          <a:fontRef idx="minor">
-            <a:schemeClr val="lt1"/>
-          </a:fontRef>
-        </p:style>
-        <p:txBody>
-          <a:bodyPr rtlCol="0" anchor="ctr"/>
-          <a:lstStyle/>
-          <a:p>
-            <a:pPr algn="ctr"/>
-          </a:p>
-        </p:txBody>
-      </p:sp>
-      <p:sp>
-        <p:nvSpPr>
-          <p:cNvPr id="16" name="TextBox 15"/>
+          <p:cNvPr id="27" name="TextBox 26"/>
           <p:cNvSpPr txBox="1"/>
           <p:nvPr/>
         </p:nvSpPr>
         <p:spPr>
           <a:xfrm>
-            <a:off x="1389888" y="3081527"/>
-            <a:ext cx="3995927" cy="365760"/>
+            <a:off x="548640" y="6172200"/>
+            <a:ext cx="11064240" cy="411480"/>
           </a:xfrm>
           <a:prstGeom prst="rect">
             <a:avLst/>
@@ -11113,533 +11944,44 @@
           </a:bodyPr>
           <a:lstStyle/>
           <a:p>
-            <a:pPr algn="l">
-              <a:lnSpc>
-                <a:spcPct val="120000"/>
-              </a:lnSpc>
-            </a:pPr>
-            <a:r>
-              <a:rPr sz="1100" b="1" i="0">
-                <a:solidFill>
-                  <a:srgbClr val="06142A"/>
-                </a:solidFill>
-                <a:latin typeface="Calibri"/>
-              </a:rPr>
-              <a:t>POLICY  &amp;  REGULATION</a:t>
-            </a:r>
-          </a:p>
-        </p:txBody>
-      </p:sp>
-      <p:sp>
-        <p:nvSpPr>
-          <p:cNvPr id="17" name="TextBox 16"/>
-          <p:cNvSpPr txBox="1"/>
-          <p:nvPr/>
-        </p:nvSpPr>
-        <p:spPr>
-          <a:xfrm>
-            <a:off x="1280160" y="3520439"/>
-            <a:ext cx="10332719" cy="274320"/>
-          </a:xfrm>
-          <a:prstGeom prst="rect">
-            <a:avLst/>
-          </a:prstGeom>
-          <a:noFill/>
-        </p:spPr>
-        <p:txBody>
-          <a:bodyPr wrap="square" anchor="t" lIns="0" rIns="0" tIns="0" bIns="0">
-            <a:spAutoFit/>
-          </a:bodyPr>
-          <a:lstStyle/>
-          <a:p>
-            <a:pPr algn="l">
-              <a:lnSpc>
-                <a:spcPct val="120000"/>
-              </a:lnSpc>
-            </a:pPr>
-            <a:r>
-              <a:rPr sz="1000" b="0" i="0">
-                <a:solidFill>
-                  <a:srgbClr val="CFD8E3"/>
-                </a:solidFill>
-                <a:latin typeface="Calibri"/>
-              </a:rPr>
-              <a:t>Enact Nuclear Bill · Formalise NSPA · Site licensing</a:t>
-            </a:r>
-          </a:p>
-        </p:txBody>
-      </p:sp>
-      <p:sp>
-        <p:nvSpPr>
-          <p:cNvPr id="18" name="Rectangle 17"/>
-          <p:cNvSpPr/>
-          <p:nvPr/>
-        </p:nvSpPr>
-        <p:spPr>
-          <a:xfrm>
-            <a:off x="2313432" y="4069080"/>
-            <a:ext cx="8266175" cy="411480"/>
-          </a:xfrm>
-          <a:prstGeom prst="rect">
-            <a:avLst/>
-          </a:prstGeom>
-          <a:solidFill>
-            <a:srgbClr val="E8A860"/>
-          </a:solidFill>
-          <a:ln>
-            <a:noFill/>
-          </a:ln>
-          <a:effectLst/>
-        </p:spPr>
-        <p:style>
-          <a:lnRef idx="1">
-            <a:schemeClr val="accent1"/>
-          </a:lnRef>
-          <a:fillRef idx="3">
-            <a:schemeClr val="accent1"/>
-          </a:fillRef>
-          <a:effectRef idx="2">
-            <a:schemeClr val="accent1"/>
-          </a:effectRef>
-          <a:fontRef idx="minor">
-            <a:schemeClr val="lt1"/>
-          </a:fontRef>
-        </p:style>
-        <p:txBody>
-          <a:bodyPr rtlCol="0" anchor="ctr"/>
-          <a:lstStyle/>
-          <a:p>
-            <a:pPr algn="ctr"/>
-          </a:p>
-        </p:txBody>
-      </p:sp>
-      <p:sp>
-        <p:nvSpPr>
-          <p:cNvPr id="19" name="Rectangle 18"/>
-          <p:cNvSpPr/>
-          <p:nvPr/>
-        </p:nvSpPr>
-        <p:spPr>
-          <a:xfrm>
-            <a:off x="2313432" y="4069080"/>
-            <a:ext cx="73152" cy="411480"/>
-          </a:xfrm>
-          <a:prstGeom prst="rect">
-            <a:avLst/>
-          </a:prstGeom>
-          <a:solidFill>
-            <a:srgbClr val="FFFFFF"/>
-          </a:solidFill>
-          <a:ln>
-            <a:noFill/>
-          </a:ln>
-          <a:effectLst/>
-        </p:spPr>
-        <p:style>
-          <a:lnRef idx="1">
-            <a:schemeClr val="accent1"/>
-          </a:lnRef>
-          <a:fillRef idx="3">
-            <a:schemeClr val="accent1"/>
-          </a:fillRef>
-          <a:effectRef idx="2">
-            <a:schemeClr val="accent1"/>
-          </a:effectRef>
-          <a:fontRef idx="minor">
-            <a:schemeClr val="lt1"/>
-          </a:fontRef>
-        </p:style>
-        <p:txBody>
-          <a:bodyPr rtlCol="0" anchor="ctr"/>
-          <a:lstStyle/>
-          <a:p>
-            <a:pPr algn="ctr"/>
-          </a:p>
-        </p:txBody>
-      </p:sp>
-      <p:sp>
-        <p:nvSpPr>
-          <p:cNvPr id="20" name="TextBox 19"/>
-          <p:cNvSpPr txBox="1"/>
-          <p:nvPr/>
-        </p:nvSpPr>
-        <p:spPr>
-          <a:xfrm>
-            <a:off x="2423160" y="4087368"/>
-            <a:ext cx="8129015" cy="365760"/>
-          </a:xfrm>
-          <a:prstGeom prst="rect">
-            <a:avLst/>
-          </a:prstGeom>
-          <a:noFill/>
-        </p:spPr>
-        <p:txBody>
-          <a:bodyPr wrap="square" anchor="t" lIns="0" rIns="0" tIns="0" bIns="0">
-            <a:spAutoFit/>
-          </a:bodyPr>
-          <a:lstStyle/>
-          <a:p>
-            <a:pPr algn="l">
-              <a:lnSpc>
-                <a:spcPct val="120000"/>
-              </a:lnSpc>
-            </a:pPr>
-            <a:r>
-              <a:rPr sz="1100" b="1" i="0">
-                <a:solidFill>
-                  <a:srgbClr val="06142A"/>
-                </a:solidFill>
-                <a:latin typeface="Calibri"/>
-              </a:rPr>
-              <a:t>HUMAN  CAPITAL</a:t>
-            </a:r>
-          </a:p>
-        </p:txBody>
-      </p:sp>
-      <p:sp>
-        <p:nvSpPr>
-          <p:cNvPr id="21" name="TextBox 20"/>
-          <p:cNvSpPr txBox="1"/>
-          <p:nvPr/>
-        </p:nvSpPr>
-        <p:spPr>
-          <a:xfrm>
-            <a:off x="1280160" y="4526280"/>
-            <a:ext cx="10332719" cy="274320"/>
-          </a:xfrm>
-          <a:prstGeom prst="rect">
-            <a:avLst/>
-          </a:prstGeom>
-          <a:noFill/>
-        </p:spPr>
-        <p:txBody>
-          <a:bodyPr wrap="square" anchor="t" lIns="0" rIns="0" tIns="0" bIns="0">
-            <a:spAutoFit/>
-          </a:bodyPr>
-          <a:lstStyle/>
-          <a:p>
-            <a:pPr algn="l">
-              <a:lnSpc>
-                <a:spcPct val="120000"/>
-              </a:lnSpc>
-            </a:pPr>
-            <a:r>
-              <a:rPr sz="1000" b="0" i="0">
-                <a:solidFill>
-                  <a:srgbClr val="CFD8E3"/>
-                </a:solidFill>
-                <a:latin typeface="Calibri"/>
-              </a:rPr>
-              <a:t>Medical Physics · Nuclear Eng. · Data Analytics cohorts</a:t>
-            </a:r>
-          </a:p>
-        </p:txBody>
-      </p:sp>
-      <p:sp>
-        <p:nvSpPr>
-          <p:cNvPr id="22" name="Rectangle 21"/>
-          <p:cNvSpPr/>
-          <p:nvPr/>
-        </p:nvSpPr>
-        <p:spPr>
-          <a:xfrm>
-            <a:off x="5413248" y="5074920"/>
-            <a:ext cx="6199631" cy="411480"/>
-          </a:xfrm>
-          <a:prstGeom prst="rect">
-            <a:avLst/>
-          </a:prstGeom>
-          <a:solidFill>
-            <a:srgbClr val="B32B2B"/>
-          </a:solidFill>
-          <a:ln>
-            <a:noFill/>
-          </a:ln>
-          <a:effectLst/>
-        </p:spPr>
-        <p:style>
-          <a:lnRef idx="1">
-            <a:schemeClr val="accent1"/>
-          </a:lnRef>
-          <a:fillRef idx="3">
-            <a:schemeClr val="accent1"/>
-          </a:fillRef>
-          <a:effectRef idx="2">
-            <a:schemeClr val="accent1"/>
-          </a:effectRef>
-          <a:fontRef idx="minor">
-            <a:schemeClr val="lt1"/>
-          </a:fontRef>
-        </p:style>
-        <p:txBody>
-          <a:bodyPr rtlCol="0" anchor="ctr"/>
-          <a:lstStyle/>
-          <a:p>
-            <a:pPr algn="ctr"/>
-          </a:p>
-        </p:txBody>
-      </p:sp>
-      <p:sp>
-        <p:nvSpPr>
-          <p:cNvPr id="23" name="Rectangle 22"/>
-          <p:cNvSpPr/>
-          <p:nvPr/>
-        </p:nvSpPr>
-        <p:spPr>
-          <a:xfrm>
-            <a:off x="5413248" y="5074920"/>
-            <a:ext cx="73152" cy="411480"/>
-          </a:xfrm>
-          <a:prstGeom prst="rect">
-            <a:avLst/>
-          </a:prstGeom>
-          <a:solidFill>
-            <a:srgbClr val="FFFFFF"/>
-          </a:solidFill>
-          <a:ln>
-            <a:noFill/>
-          </a:ln>
-          <a:effectLst/>
-        </p:spPr>
-        <p:style>
-          <a:lnRef idx="1">
-            <a:schemeClr val="accent1"/>
-          </a:lnRef>
-          <a:fillRef idx="3">
-            <a:schemeClr val="accent1"/>
-          </a:fillRef>
-          <a:effectRef idx="2">
-            <a:schemeClr val="accent1"/>
-          </a:effectRef>
-          <a:fontRef idx="minor">
-            <a:schemeClr val="lt1"/>
-          </a:fontRef>
-        </p:style>
-        <p:txBody>
-          <a:bodyPr rtlCol="0" anchor="ctr"/>
-          <a:lstStyle/>
-          <a:p>
-            <a:pPr algn="ctr"/>
-          </a:p>
-        </p:txBody>
-      </p:sp>
-      <p:sp>
-        <p:nvSpPr>
-          <p:cNvPr id="24" name="TextBox 23"/>
-          <p:cNvSpPr txBox="1"/>
-          <p:nvPr/>
-        </p:nvSpPr>
-        <p:spPr>
-          <a:xfrm>
-            <a:off x="5522976" y="5093208"/>
-            <a:ext cx="6062471" cy="365760"/>
-          </a:xfrm>
-          <a:prstGeom prst="rect">
-            <a:avLst/>
-          </a:prstGeom>
-          <a:noFill/>
-        </p:spPr>
-        <p:txBody>
-          <a:bodyPr wrap="square" anchor="t" lIns="0" rIns="0" tIns="0" bIns="0">
-            <a:spAutoFit/>
-          </a:bodyPr>
-          <a:lstStyle/>
-          <a:p>
-            <a:pPr algn="l">
-              <a:lnSpc>
-                <a:spcPct val="120000"/>
-              </a:lnSpc>
-            </a:pPr>
-            <a:r>
-              <a:rPr sz="1100" b="1" i="0">
-                <a:solidFill>
-                  <a:srgbClr val="06142A"/>
-                </a:solidFill>
-                <a:latin typeface="Calibri"/>
-              </a:rPr>
-              <a:t>SMR  IMPLEMENTATION</a:t>
-            </a:r>
-          </a:p>
-        </p:txBody>
-      </p:sp>
-      <p:sp>
-        <p:nvSpPr>
-          <p:cNvPr id="25" name="TextBox 24"/>
-          <p:cNvSpPr txBox="1"/>
-          <p:nvPr/>
-        </p:nvSpPr>
-        <p:spPr>
-          <a:xfrm>
-            <a:off x="1280160" y="5532120"/>
-            <a:ext cx="10332719" cy="274320"/>
-          </a:xfrm>
-          <a:prstGeom prst="rect">
-            <a:avLst/>
-          </a:prstGeom>
-          <a:noFill/>
-        </p:spPr>
-        <p:txBody>
-          <a:bodyPr wrap="square" anchor="t" lIns="0" rIns="0" tIns="0" bIns="0">
-            <a:spAutoFit/>
-          </a:bodyPr>
-          <a:lstStyle/>
-          <a:p>
-            <a:pPr algn="l">
-              <a:lnSpc>
-                <a:spcPct val="120000"/>
-              </a:lnSpc>
-            </a:pPr>
-            <a:r>
-              <a:rPr sz="1000" b="0" i="0">
-                <a:solidFill>
-                  <a:srgbClr val="CFD8E3"/>
-                </a:solidFill>
-                <a:latin typeface="Calibri"/>
-              </a:rPr>
-              <a:t>Partner selection (ROSATOM / NuScale / Westinghouse) · Pre-feas · EPC · First criticality</a:t>
-            </a:r>
-          </a:p>
-        </p:txBody>
-      </p:sp>
-      <p:sp>
-        <p:nvSpPr>
-          <p:cNvPr id="26" name="Rectangle 25"/>
-          <p:cNvSpPr/>
-          <p:nvPr/>
-        </p:nvSpPr>
-        <p:spPr>
-          <a:xfrm>
-            <a:off x="548640" y="5989320"/>
-            <a:ext cx="11064240" cy="502920"/>
-          </a:xfrm>
-          <a:prstGeom prst="rect">
-            <a:avLst/>
-          </a:prstGeom>
-          <a:solidFill>
-            <a:srgbClr val="12284A"/>
-          </a:solidFill>
-          <a:ln>
-            <a:noFill/>
-          </a:ln>
-          <a:effectLst/>
-        </p:spPr>
-        <p:style>
-          <a:lnRef idx="1">
-            <a:schemeClr val="accent1"/>
-          </a:lnRef>
-          <a:fillRef idx="3">
-            <a:schemeClr val="accent1"/>
-          </a:fillRef>
-          <a:effectRef idx="2">
-            <a:schemeClr val="accent1"/>
-          </a:effectRef>
-          <a:fontRef idx="minor">
-            <a:schemeClr val="lt1"/>
-          </a:fontRef>
-        </p:style>
-        <p:txBody>
-          <a:bodyPr rtlCol="0" anchor="ctr"/>
-          <a:lstStyle/>
-          <a:p>
-            <a:pPr algn="ctr"/>
-          </a:p>
-        </p:txBody>
-      </p:sp>
-      <p:sp>
-        <p:nvSpPr>
-          <p:cNvPr id="27" name="Rectangle 26"/>
-          <p:cNvSpPr/>
-          <p:nvPr/>
-        </p:nvSpPr>
-        <p:spPr>
-          <a:xfrm>
-            <a:off x="548640" y="5989320"/>
-            <a:ext cx="91440" cy="502920"/>
-          </a:xfrm>
-          <a:prstGeom prst="rect">
-            <a:avLst/>
-          </a:prstGeom>
-          <a:solidFill>
-            <a:srgbClr val="CC7A2E"/>
-          </a:solidFill>
-          <a:ln>
-            <a:noFill/>
-          </a:ln>
-          <a:effectLst/>
-        </p:spPr>
-        <p:style>
-          <a:lnRef idx="1">
-            <a:schemeClr val="accent1"/>
-          </a:lnRef>
-          <a:fillRef idx="3">
-            <a:schemeClr val="accent1"/>
-          </a:fillRef>
-          <a:effectRef idx="2">
-            <a:schemeClr val="accent1"/>
-          </a:effectRef>
-          <a:fontRef idx="minor">
-            <a:schemeClr val="lt1"/>
-          </a:fontRef>
-        </p:style>
-        <p:txBody>
-          <a:bodyPr rtlCol="0" anchor="ctr"/>
-          <a:lstStyle/>
-          <a:p>
-            <a:pPr algn="ctr"/>
-          </a:p>
-        </p:txBody>
-      </p:sp>
-      <p:sp>
-        <p:nvSpPr>
-          <p:cNvPr id="28" name="TextBox 27"/>
-          <p:cNvSpPr txBox="1"/>
-          <p:nvPr/>
-        </p:nvSpPr>
-        <p:spPr>
-          <a:xfrm>
-            <a:off x="777240" y="6053328"/>
-            <a:ext cx="10698480" cy="411480"/>
-          </a:xfrm>
-          <a:prstGeom prst="rect">
-            <a:avLst/>
-          </a:prstGeom>
-          <a:noFill/>
-        </p:spPr>
-        <p:txBody>
-          <a:bodyPr wrap="square" anchor="t" lIns="0" rIns="0" tIns="0" bIns="0">
-            <a:spAutoFit/>
-          </a:bodyPr>
-          <a:lstStyle/>
-          <a:p>
-            <a:pPr algn="l">
+            <a:pPr algn="ctr">
               <a:lnSpc>
                 <a:spcPct val="115000"/>
               </a:lnSpc>
             </a:pPr>
             <a:r>
-              <a:rPr sz="1300" b="0" i="0">
+              <a:rPr sz="1400" b="0" i="1">
                 <a:solidFill>
                   <a:srgbClr val="FFFFFF"/>
                 </a:solidFill>
-                <a:latin typeface="Calibri"/>
+                <a:latin typeface="Georgia"/>
               </a:rPr>
-              <a:t>We have the minerals. We have the regulator. We have the data capacity. </a:t>
-            </a:r>
-            <a:r>
-              <a:rPr sz="1300" b="1" i="0">
-                <a:solidFill>
-                  <a:srgbClr val="E8A860"/>
-                </a:solidFill>
-                <a:latin typeface="Calibri"/>
+              <a:t>The fuel is under our feet. </a:t>
+            </a:r>
+            <a:r>
+              <a:rPr sz="1400" b="0" i="1">
+                <a:solidFill>
+                  <a:srgbClr val="FFFFFF"/>
+                </a:solidFill>
+                <a:latin typeface="Georgia"/>
               </a:rPr>
-              <a:t>Zambia is ready to start the nuclear conversation.</a:t>
-            </a:r>
-          </a:p>
-        </p:txBody>
-      </p:sp>
-      <p:sp>
-        <p:nvSpPr>
-          <p:cNvPr id="29" name="TextBox 28"/>
+              <a:t>The expertise is on our payroll. </a:t>
+            </a:r>
+            <a:r>
+              <a:rPr sz="1600" b="1" i="0">
+                <a:solidFill>
+                  <a:srgbClr val="CFA33C"/>
+                </a:solidFill>
+                <a:latin typeface="Georgia"/>
+              </a:rPr>
+              <a:t>Sign the bill.</a:t>
+            </a:r>
+          </a:p>
+        </p:txBody>
+      </p:sp>
+      <p:sp>
+        <p:nvSpPr>
+          <p:cNvPr id="28" name="TextBox 27"/>
           <p:cNvSpPr txBox="1"/>
           <p:nvPr/>
         </p:nvSpPr>
@@ -11661,17 +12003,17 @@
           <a:p>
             <a:pPr algn="ctr">
               <a:lnSpc>
-                <a:spcPct val="120000"/>
+                <a:spcPct val="125000"/>
               </a:lnSpc>
             </a:pPr>
             <a:r>
               <a:rPr sz="800" b="0" i="1">
                 <a:solidFill>
-                  <a:srgbClr val="8B97A8"/>
+                  <a:srgbClr val="8B9790"/>
                 </a:solidFill>
                 <a:latin typeface="Calibri"/>
               </a:rPr>
-              <a:t>8 / 8   ·   E. Mwaba   ·   Sources: DOE REMS 2024 · IAEA Milestones · 7NDP &amp; Vision 2030 · ZESCO 2023-24 · MoMMD · Siavonga Baseline 2024</a:t>
+              <a:t>8 / 8   ·   E. MWABA   ·   SOURCES: DOE REMS 2024 · IAEA Milestones · 7NDP &amp; Vision 2030 · ZESCO · MoMMD · Siavonga 2024 · IMF · WNA</a:t>
             </a:r>
           </a:p>
         </p:txBody>
